--- a/board/AOP_board_presentation.pptx
+++ b/board/AOP_board_presentation.pptx
@@ -16,9 +16,10 @@
     <p:sldId id="264" r:id="rId10"/>
     <p:sldId id="265" r:id="rId11"/>
     <p:sldId id="266" r:id="rId12"/>
+    <p:sldId id="267" r:id="rId13"/>
   </p:sldIdLst>
   <p:notesMasterIdLst>
-    <p:notesMasterId r:id="rId13"/>
+    <p:notesMasterId r:id="rId14"/>
   </p:notesMasterIdLst>
   <p:sldSz cx="12191695" cy="6858000"/>
   <p:notesSz cx="6858000" cy="12191695"/>
@@ -395,6 +396,1434 @@
 </file>
 
 <file path=ppt/charts/chart2.xml><?xml version="1.0" encoding="utf-8"?>
+<c:chartSpace xmlns:c="http://schemas.openxmlformats.org/drawingml/2006/chart" xmlns:a="http://schemas.openxmlformats.org/drawingml/2006/main" xmlns:r="http://schemas.openxmlformats.org/officeDocument/2006/relationships">
+  <c:date1904 val="0"/>
+  <c:roundedCorners val="1"/>
+  <c:chart>
+    <c:autoTitleDeleted val="1"/>
+    <c:plotArea>
+      <c:layout/>
+      <c:areaChart>
+        <c:varyColors val="0"/>
+        <c:ser>
+          <c:idx val="0"/>
+          <c:order val="0"/>
+          <c:tx>
+            <c:strRef>
+              <c:f>Sheet1!$B$1</c:f>
+              <c:strCache>
+                <c:ptCount val="1"/>
+                <c:pt idx="0">
+                  <c:v>Income</c:v>
+                </c:pt>
+              </c:strCache>
+            </c:strRef>
+          </c:tx>
+          <c:spPr>
+            <a:solidFill>
+              <a:srgbClr val="0F766E">
+                <a:alpha val="35000"/>
+              </a:srgbClr>
+            </a:solidFill>
+            <a:effectLst/>
+          </c:spPr>
+          <c:invertIfNegative val="0"/>
+          <c:dLbls>
+            <c:numFmt formatCode="#,##0" sourceLinked="0"/>
+            <c:txPr>
+              <a:bodyPr/>
+              <a:lstStyle/>
+              <a:p>
+                <a:pPr>
+                  <a:defRPr b="0" i="0" strike="noStrike" sz="1200" u="none">
+                    <a:solidFill>
+                      <a:srgbClr val="000000"/>
+                    </a:solidFill>
+                    <a:latin typeface="Arial"/>
+                  </a:defRPr>
+                </a:pPr>
+              </a:p>
+            </c:txPr>
+            <c:showLegendKey val="0"/>
+            <c:showVal val="0"/>
+            <c:showCatName val="0"/>
+            <c:showSerName val="0"/>
+            <c:showPercent val="0"/>
+            <c:showBubbleSize val="0"/>
+            <c:showLeaderLines val="0"/>
+          </c:dLbls>
+          <c:cat>
+            <c:multiLvlStrRef>
+              <c:f>Sheet1!$A$2:$A$13</c:f>
+              <c:multiLvlStrCache>
+                <c:ptCount val="12"/>
+                <c:lvl>
+                  <c:pt idx="0">
+                    <c:v>A</c:v>
+                  </c:pt>
+                  <c:pt idx="1">
+                    <c:v>M</c:v>
+                  </c:pt>
+                  <c:pt idx="2">
+                    <c:v>J</c:v>
+                  </c:pt>
+                  <c:pt idx="3">
+                    <c:v>J</c:v>
+                  </c:pt>
+                  <c:pt idx="4">
+                    <c:v>A</c:v>
+                  </c:pt>
+                  <c:pt idx="5">
+                    <c:v>S</c:v>
+                  </c:pt>
+                  <c:pt idx="6">
+                    <c:v>O</c:v>
+                  </c:pt>
+                  <c:pt idx="7">
+                    <c:v>N</c:v>
+                  </c:pt>
+                  <c:pt idx="8">
+                    <c:v>D</c:v>
+                  </c:pt>
+                  <c:pt idx="9">
+                    <c:v>J</c:v>
+                  </c:pt>
+                  <c:pt idx="10">
+                    <c:v>F</c:v>
+                  </c:pt>
+                  <c:pt idx="11">
+                    <c:v>M</c:v>
+                  </c:pt>
+                </c:lvl>
+              </c:multiLvlStrCache>
+            </c:multiLvlStrRef>
+          </c:cat>
+          <c:val>
+            <c:numRef>
+              <c:f>Sheet1!$B$2:$B$13</c:f>
+              <c:numCache>
+                <c:formatCode>General</c:formatCode>
+                <c:ptCount val="12"/>
+                <c:pt idx="0">
+                  <c:v>0.17</c:v>
+                </c:pt>
+                <c:pt idx="1">
+                  <c:v>0.2</c:v>
+                </c:pt>
+                <c:pt idx="2">
+                  <c:v>0.23</c:v>
+                </c:pt>
+                <c:pt idx="3">
+                  <c:v>0.23</c:v>
+                </c:pt>
+                <c:pt idx="4">
+                  <c:v>0.23</c:v>
+                </c:pt>
+                <c:pt idx="5">
+                  <c:v>0.23</c:v>
+                </c:pt>
+                <c:pt idx="6">
+                  <c:v>0.71</c:v>
+                </c:pt>
+                <c:pt idx="7">
+                  <c:v>0.71</c:v>
+                </c:pt>
+                <c:pt idx="8">
+                  <c:v>0.71</c:v>
+                </c:pt>
+                <c:pt idx="9">
+                  <c:v>0.71</c:v>
+                </c:pt>
+                <c:pt idx="10">
+                  <c:v>0.71</c:v>
+                </c:pt>
+                <c:pt idx="11">
+                  <c:v>0.71</c:v>
+                </c:pt>
+              </c:numCache>
+            </c:numRef>
+          </c:val>
+        </c:ser>
+        <c:dLbls>
+          <c:numFmt formatCode="#,##0" sourceLinked="0"/>
+          <c:txPr>
+            <a:bodyPr/>
+            <a:lstStyle/>
+            <a:p>
+              <a:pPr>
+                <a:defRPr b="0" i="0" strike="noStrike" sz="1200" u="none">
+                  <a:solidFill>
+                    <a:srgbClr val="000000"/>
+                  </a:solidFill>
+                  <a:latin typeface="Arial"/>
+                </a:defRPr>
+              </a:pPr>
+            </a:p>
+          </c:txPr>
+          <c:showLegendKey val="0"/>
+          <c:showVal val="0"/>
+          <c:showCatName val="0"/>
+          <c:showSerName val="0"/>
+          <c:showPercent val="0"/>
+          <c:showBubbleSize val="0"/>
+          <c:showLeaderLines val="0"/>
+        </c:dLbls>
+        <c:axId val="2094734554"/>
+        <c:axId val="2094734552"/>
+        <c:axId val="2094734556"/>
+      </c:areaChart>
+      <c:lineChart>
+        <c:varyColors val="0"/>
+        <c:ser>
+          <c:idx val="1"/>
+          <c:order val="1"/>
+          <c:tx>
+            <c:strRef>
+              <c:f>Sheet1!$C$1</c:f>
+              <c:strCache>
+                <c:ptCount val="1"/>
+                <c:pt idx="0">
+                  <c:v>Expense</c:v>
+                </c:pt>
+              </c:strCache>
+            </c:strRef>
+          </c:tx>
+          <c:spPr>
+            <a:solidFill>
+              <a:srgbClr val="334155"/>
+            </a:solidFill>
+            <a:ln w="28575" cap="flat">
+              <a:solidFill>
+                <a:srgbClr val="334155"/>
+              </a:solidFill>
+              <a:prstDash val="solid"/>
+              <a:round/>
+            </a:ln>
+            <a:effectLst/>
+          </c:spPr>
+          <c:invertIfNegative val="0"/>
+          <c:dLbls>
+            <c:numFmt formatCode="#,##0" sourceLinked="0"/>
+            <c:txPr>
+              <a:bodyPr/>
+              <a:lstStyle/>
+              <a:p>
+                <a:pPr>
+                  <a:defRPr b="0" i="0" strike="noStrike" sz="1200" u="none">
+                    <a:solidFill>
+                      <a:srgbClr val="000000"/>
+                    </a:solidFill>
+                    <a:latin typeface="Arial"/>
+                  </a:defRPr>
+                </a:pPr>
+              </a:p>
+            </c:txPr>
+            <c:showLegendKey val="0"/>
+            <c:showVal val="0"/>
+            <c:showCatName val="0"/>
+            <c:showSerName val="0"/>
+            <c:showPercent val="0"/>
+            <c:showBubbleSize val="0"/>
+            <c:showLeaderLines val="0"/>
+          </c:dLbls>
+          <c:marker>
+            <c:symbol val="none"/>
+            <c:size val="6"/>
+            <c:spPr>
+              <a:solidFill>
+                <a:srgbClr val="334155"/>
+              </a:solidFill>
+              <a:ln w="9525" cap="flat">
+                <a:solidFill>
+                  <a:srgbClr val="334155"/>
+                </a:solidFill>
+                <a:prstDash val="solid"/>
+                <a:round/>
+              </a:ln>
+              <a:effectLst/>
+            </c:spPr>
+          </c:marker>
+          <c:cat>
+            <c:multiLvlStrRef>
+              <c:f>Sheet1!$A$2:$A$13</c:f>
+              <c:multiLvlStrCache>
+                <c:ptCount val="12"/>
+                <c:lvl>
+                  <c:pt idx="0">
+                    <c:v>A</c:v>
+                  </c:pt>
+                  <c:pt idx="1">
+                    <c:v>M</c:v>
+                  </c:pt>
+                  <c:pt idx="2">
+                    <c:v>J</c:v>
+                  </c:pt>
+                  <c:pt idx="3">
+                    <c:v>J</c:v>
+                  </c:pt>
+                  <c:pt idx="4">
+                    <c:v>A</c:v>
+                  </c:pt>
+                  <c:pt idx="5">
+                    <c:v>S</c:v>
+                  </c:pt>
+                  <c:pt idx="6">
+                    <c:v>O</c:v>
+                  </c:pt>
+                  <c:pt idx="7">
+                    <c:v>N</c:v>
+                  </c:pt>
+                  <c:pt idx="8">
+                    <c:v>D</c:v>
+                  </c:pt>
+                  <c:pt idx="9">
+                    <c:v>J</c:v>
+                  </c:pt>
+                  <c:pt idx="10">
+                    <c:v>F</c:v>
+                  </c:pt>
+                  <c:pt idx="11">
+                    <c:v>M</c:v>
+                  </c:pt>
+                </c:lvl>
+              </c:multiLvlStrCache>
+            </c:multiLvlStrRef>
+          </c:cat>
+          <c:val>
+            <c:numRef>
+              <c:f>Sheet1!$C$2:$C$13</c:f>
+              <c:numCache>
+                <c:formatCode>General</c:formatCode>
+                <c:ptCount val="12"/>
+                <c:pt idx="0">
+                  <c:v>0.36</c:v>
+                </c:pt>
+                <c:pt idx="1">
+                  <c:v>0.33</c:v>
+                </c:pt>
+                <c:pt idx="2">
+                  <c:v>0.46</c:v>
+                </c:pt>
+                <c:pt idx="3">
+                  <c:v>0.4</c:v>
+                </c:pt>
+                <c:pt idx="4">
+                  <c:v>0.46</c:v>
+                </c:pt>
+                <c:pt idx="5">
+                  <c:v>0.46</c:v>
+                </c:pt>
+                <c:pt idx="6">
+                  <c:v>0.46</c:v>
+                </c:pt>
+                <c:pt idx="7">
+                  <c:v>0.46</c:v>
+                </c:pt>
+                <c:pt idx="8">
+                  <c:v>0.46</c:v>
+                </c:pt>
+                <c:pt idx="9">
+                  <c:v>0.46</c:v>
+                </c:pt>
+                <c:pt idx="10">
+                  <c:v>0.46</c:v>
+                </c:pt>
+                <c:pt idx="11">
+                  <c:v>0.46</c:v>
+                </c:pt>
+              </c:numCache>
+            </c:numRef>
+          </c:val>
+          <c:smooth val="0"/>
+        </c:ser>
+        <c:dLbls>
+          <c:numFmt formatCode="#,##0" sourceLinked="0"/>
+          <c:txPr>
+            <a:bodyPr/>
+            <a:lstStyle/>
+            <a:p>
+              <a:pPr>
+                <a:defRPr b="0" i="0" strike="noStrike" sz="1200" u="none">
+                  <a:solidFill>
+                    <a:srgbClr val="000000"/>
+                  </a:solidFill>
+                  <a:latin typeface="Arial"/>
+                </a:defRPr>
+              </a:pPr>
+            </a:p>
+          </c:txPr>
+          <c:showLegendKey val="0"/>
+          <c:showVal val="0"/>
+          <c:showCatName val="0"/>
+          <c:showSerName val="0"/>
+          <c:showPercent val="0"/>
+          <c:showBubbleSize val="0"/>
+          <c:showLeaderLines val="0"/>
+        </c:dLbls>
+        <c:marker val="1"/>
+        <c:axId val="2094734554"/>
+        <c:axId val="2094734552"/>
+        <c:axId val="2094734556"/>
+      </c:lineChart>
+      <c:catAx>
+        <c:axId val="2094734554"/>
+        <c:scaling>
+          <c:orientation val="minMax"/>
+        </c:scaling>
+        <c:delete val="0"/>
+        <c:axPos val="b"/>
+        <c:numFmt formatCode="General" sourceLinked="1"/>
+        <c:majorTickMark val="out"/>
+        <c:minorTickMark val="none"/>
+        <c:tickLblPos val="low"/>
+        <c:spPr>
+          <a:ln w="12700" cap="flat">
+            <a:solidFill>
+              <a:srgbClr val="888888"/>
+            </a:solidFill>
+            <a:prstDash val="solid"/>
+            <a:round/>
+          </a:ln>
+        </c:spPr>
+        <c:txPr>
+          <a:bodyPr/>
+          <a:lstStyle/>
+          <a:p>
+            <a:pPr>
+              <a:defRPr sz="800" b="0" i="0" u="none" strike="noStrike">
+                <a:solidFill>
+                  <a:srgbClr val="94A3B8"/>
+                </a:solidFill>
+                <a:latin typeface="Calibri"/>
+              </a:defRPr>
+            </a:pPr>
+            <a:endParaRPr lang="en-US"/>
+          </a:p>
+        </c:txPr>
+        <c:crossAx val="2094734552"/>
+        <c:crosses val="autoZero"/>
+        <c:auto val="1"/>
+        <c:lblAlgn val="ctr"/>
+        <c:noMultiLvlLbl val="1"/>
+      </c:catAx>
+      <c:valAx>
+        <c:axId val="2094734552"/>
+        <c:scaling>
+          <c:orientation val="minMax"/>
+          <c:max val="0.8"/>
+          <c:min val="0"/>
+        </c:scaling>
+        <c:delete val="1"/>
+        <c:axPos val="l"/>
+        <c:numFmt formatCode="General" sourceLinked="0"/>
+        <c:majorTickMark val="out"/>
+        <c:minorTickMark val="none"/>
+        <c:tickLblPos val="nextTo"/>
+        <c:spPr>
+          <a:ln w="12700" cap="flat">
+            <a:solidFill>
+              <a:srgbClr val="888888"/>
+            </a:solidFill>
+            <a:prstDash val="solid"/>
+            <a:round/>
+          </a:ln>
+        </c:spPr>
+        <c:txPr>
+          <a:bodyPr/>
+          <a:lstStyle/>
+          <a:p>
+            <a:pPr>
+              <a:defRPr sz="1200" b="0" i="0" u="none" strike="noStrike">
+                <a:solidFill>
+                  <a:srgbClr val="000000"/>
+                </a:solidFill>
+                <a:latin typeface="Arial"/>
+              </a:defRPr>
+            </a:pPr>
+            <a:endParaRPr lang="en-US"/>
+          </a:p>
+        </c:txPr>
+        <c:crossAx val="2094734554"/>
+        <c:crosses val="autoZero"/>
+        <c:crossBetween val="midCat"/>
+      </c:valAx>
+      <c:spPr>
+        <a:noFill/>
+        <a:ln>
+          <a:noFill/>
+        </a:ln>
+        <a:effectLst/>
+      </c:spPr>
+    </c:plotArea>
+    <c:plotVisOnly val="1"/>
+    <c:dispBlanksAs val="span"/>
+  </c:chart>
+  <c:spPr>
+    <a:noFill/>
+    <a:ln>
+      <a:noFill/>
+    </a:ln>
+    <a:effectLst/>
+  </c:spPr>
+  <c:externalData r:id="rId1">
+    <c:autoUpdate val="0"/>
+  </c:externalData>
+</c:chartSpace>
+</file>
+
+<file path=ppt/charts/chart3.xml><?xml version="1.0" encoding="utf-8"?>
+<c:chartSpace xmlns:c="http://schemas.openxmlformats.org/drawingml/2006/chart" xmlns:a="http://schemas.openxmlformats.org/drawingml/2006/main" xmlns:r="http://schemas.openxmlformats.org/officeDocument/2006/relationships">
+  <c:date1904 val="0"/>
+  <c:roundedCorners val="1"/>
+  <c:chart>
+    <c:autoTitleDeleted val="1"/>
+    <c:plotArea>
+      <c:layout/>
+      <c:areaChart>
+        <c:varyColors val="0"/>
+        <c:ser>
+          <c:idx val="0"/>
+          <c:order val="0"/>
+          <c:tx>
+            <c:strRef>
+              <c:f>Sheet1!$B$1</c:f>
+              <c:strCache>
+                <c:ptCount val="1"/>
+                <c:pt idx="0">
+                  <c:v>Income</c:v>
+                </c:pt>
+              </c:strCache>
+            </c:strRef>
+          </c:tx>
+          <c:spPr>
+            <a:solidFill>
+              <a:srgbClr val="0F766E">
+                <a:alpha val="35000"/>
+              </a:srgbClr>
+            </a:solidFill>
+            <a:effectLst/>
+          </c:spPr>
+          <c:invertIfNegative val="0"/>
+          <c:dLbls>
+            <c:numFmt formatCode="#,##0" sourceLinked="0"/>
+            <c:txPr>
+              <a:bodyPr/>
+              <a:lstStyle/>
+              <a:p>
+                <a:pPr>
+                  <a:defRPr b="0" i="0" strike="noStrike" sz="1200" u="none">
+                    <a:solidFill>
+                      <a:srgbClr val="000000"/>
+                    </a:solidFill>
+                    <a:latin typeface="Arial"/>
+                  </a:defRPr>
+                </a:pPr>
+              </a:p>
+            </c:txPr>
+            <c:showLegendKey val="0"/>
+            <c:showVal val="0"/>
+            <c:showCatName val="0"/>
+            <c:showSerName val="0"/>
+            <c:showPercent val="0"/>
+            <c:showBubbleSize val="0"/>
+            <c:showLeaderLines val="0"/>
+          </c:dLbls>
+          <c:cat>
+            <c:multiLvlStrRef>
+              <c:f>Sheet1!$A$2:$A$13</c:f>
+              <c:multiLvlStrCache>
+                <c:ptCount val="12"/>
+                <c:lvl>
+                  <c:pt idx="0">
+                    <c:v>A</c:v>
+                  </c:pt>
+                  <c:pt idx="1">
+                    <c:v>M</c:v>
+                  </c:pt>
+                  <c:pt idx="2">
+                    <c:v>J</c:v>
+                  </c:pt>
+                  <c:pt idx="3">
+                    <c:v>J</c:v>
+                  </c:pt>
+                  <c:pt idx="4">
+                    <c:v>A</c:v>
+                  </c:pt>
+                  <c:pt idx="5">
+                    <c:v>S</c:v>
+                  </c:pt>
+                  <c:pt idx="6">
+                    <c:v>O</c:v>
+                  </c:pt>
+                  <c:pt idx="7">
+                    <c:v>N</c:v>
+                  </c:pt>
+                  <c:pt idx="8">
+                    <c:v>D</c:v>
+                  </c:pt>
+                  <c:pt idx="9">
+                    <c:v>J</c:v>
+                  </c:pt>
+                  <c:pt idx="10">
+                    <c:v>F</c:v>
+                  </c:pt>
+                  <c:pt idx="11">
+                    <c:v>M</c:v>
+                  </c:pt>
+                </c:lvl>
+              </c:multiLvlStrCache>
+            </c:multiLvlStrRef>
+          </c:cat>
+          <c:val>
+            <c:numRef>
+              <c:f>Sheet1!$B$2:$B$13</c:f>
+              <c:numCache>
+                <c:formatCode>General</c:formatCode>
+                <c:ptCount val="12"/>
+                <c:pt idx="0">
+                  <c:v>0.17</c:v>
+                </c:pt>
+                <c:pt idx="1">
+                  <c:v>0.2</c:v>
+                </c:pt>
+                <c:pt idx="2">
+                  <c:v>0.23</c:v>
+                </c:pt>
+                <c:pt idx="3">
+                  <c:v>0.23</c:v>
+                </c:pt>
+                <c:pt idx="4">
+                  <c:v>0.23</c:v>
+                </c:pt>
+                <c:pt idx="5">
+                  <c:v>0.23</c:v>
+                </c:pt>
+                <c:pt idx="6">
+                  <c:v>0.23</c:v>
+                </c:pt>
+                <c:pt idx="7">
+                  <c:v>0.23</c:v>
+                </c:pt>
+                <c:pt idx="8">
+                  <c:v>0.23</c:v>
+                </c:pt>
+                <c:pt idx="9">
+                  <c:v>0.71</c:v>
+                </c:pt>
+                <c:pt idx="10">
+                  <c:v>0.71</c:v>
+                </c:pt>
+                <c:pt idx="11">
+                  <c:v>0.71</c:v>
+                </c:pt>
+              </c:numCache>
+            </c:numRef>
+          </c:val>
+        </c:ser>
+        <c:dLbls>
+          <c:numFmt formatCode="#,##0" sourceLinked="0"/>
+          <c:txPr>
+            <a:bodyPr/>
+            <a:lstStyle/>
+            <a:p>
+              <a:pPr>
+                <a:defRPr b="0" i="0" strike="noStrike" sz="1200" u="none">
+                  <a:solidFill>
+                    <a:srgbClr val="000000"/>
+                  </a:solidFill>
+                  <a:latin typeface="Arial"/>
+                </a:defRPr>
+              </a:pPr>
+            </a:p>
+          </c:txPr>
+          <c:showLegendKey val="0"/>
+          <c:showVal val="0"/>
+          <c:showCatName val="0"/>
+          <c:showSerName val="0"/>
+          <c:showPercent val="0"/>
+          <c:showBubbleSize val="0"/>
+          <c:showLeaderLines val="0"/>
+        </c:dLbls>
+        <c:axId val="2094734554"/>
+        <c:axId val="2094734552"/>
+        <c:axId val="2094734556"/>
+      </c:areaChart>
+      <c:lineChart>
+        <c:varyColors val="0"/>
+        <c:ser>
+          <c:idx val="1"/>
+          <c:order val="1"/>
+          <c:tx>
+            <c:strRef>
+              <c:f>Sheet1!$C$1</c:f>
+              <c:strCache>
+                <c:ptCount val="1"/>
+                <c:pt idx="0">
+                  <c:v>Expense</c:v>
+                </c:pt>
+              </c:strCache>
+            </c:strRef>
+          </c:tx>
+          <c:spPr>
+            <a:solidFill>
+              <a:srgbClr val="334155"/>
+            </a:solidFill>
+            <a:ln w="28575" cap="flat">
+              <a:solidFill>
+                <a:srgbClr val="334155"/>
+              </a:solidFill>
+              <a:prstDash val="solid"/>
+              <a:round/>
+            </a:ln>
+            <a:effectLst/>
+          </c:spPr>
+          <c:invertIfNegative val="0"/>
+          <c:dLbls>
+            <c:numFmt formatCode="#,##0" sourceLinked="0"/>
+            <c:txPr>
+              <a:bodyPr/>
+              <a:lstStyle/>
+              <a:p>
+                <a:pPr>
+                  <a:defRPr b="0" i="0" strike="noStrike" sz="1200" u="none">
+                    <a:solidFill>
+                      <a:srgbClr val="000000"/>
+                    </a:solidFill>
+                    <a:latin typeface="Arial"/>
+                  </a:defRPr>
+                </a:pPr>
+              </a:p>
+            </c:txPr>
+            <c:showLegendKey val="0"/>
+            <c:showVal val="0"/>
+            <c:showCatName val="0"/>
+            <c:showSerName val="0"/>
+            <c:showPercent val="0"/>
+            <c:showBubbleSize val="0"/>
+            <c:showLeaderLines val="0"/>
+          </c:dLbls>
+          <c:marker>
+            <c:symbol val="none"/>
+            <c:size val="6"/>
+            <c:spPr>
+              <a:solidFill>
+                <a:srgbClr val="334155"/>
+              </a:solidFill>
+              <a:ln w="9525" cap="flat">
+                <a:solidFill>
+                  <a:srgbClr val="334155"/>
+                </a:solidFill>
+                <a:prstDash val="solid"/>
+                <a:round/>
+              </a:ln>
+              <a:effectLst/>
+            </c:spPr>
+          </c:marker>
+          <c:cat>
+            <c:multiLvlStrRef>
+              <c:f>Sheet1!$A$2:$A$13</c:f>
+              <c:multiLvlStrCache>
+                <c:ptCount val="12"/>
+                <c:lvl>
+                  <c:pt idx="0">
+                    <c:v>A</c:v>
+                  </c:pt>
+                  <c:pt idx="1">
+                    <c:v>M</c:v>
+                  </c:pt>
+                  <c:pt idx="2">
+                    <c:v>J</c:v>
+                  </c:pt>
+                  <c:pt idx="3">
+                    <c:v>J</c:v>
+                  </c:pt>
+                  <c:pt idx="4">
+                    <c:v>A</c:v>
+                  </c:pt>
+                  <c:pt idx="5">
+                    <c:v>S</c:v>
+                  </c:pt>
+                  <c:pt idx="6">
+                    <c:v>O</c:v>
+                  </c:pt>
+                  <c:pt idx="7">
+                    <c:v>N</c:v>
+                  </c:pt>
+                  <c:pt idx="8">
+                    <c:v>D</c:v>
+                  </c:pt>
+                  <c:pt idx="9">
+                    <c:v>J</c:v>
+                  </c:pt>
+                  <c:pt idx="10">
+                    <c:v>F</c:v>
+                  </c:pt>
+                  <c:pt idx="11">
+                    <c:v>M</c:v>
+                  </c:pt>
+                </c:lvl>
+              </c:multiLvlStrCache>
+            </c:multiLvlStrRef>
+          </c:cat>
+          <c:val>
+            <c:numRef>
+              <c:f>Sheet1!$C$2:$C$13</c:f>
+              <c:numCache>
+                <c:formatCode>General</c:formatCode>
+                <c:ptCount val="12"/>
+                <c:pt idx="0">
+                  <c:v>0.36</c:v>
+                </c:pt>
+                <c:pt idx="1">
+                  <c:v>0.33</c:v>
+                </c:pt>
+                <c:pt idx="2">
+                  <c:v>0.46</c:v>
+                </c:pt>
+                <c:pt idx="3">
+                  <c:v>0.4</c:v>
+                </c:pt>
+                <c:pt idx="4">
+                  <c:v>0.46</c:v>
+                </c:pt>
+                <c:pt idx="5">
+                  <c:v>0.46</c:v>
+                </c:pt>
+                <c:pt idx="6">
+                  <c:v>0.46</c:v>
+                </c:pt>
+                <c:pt idx="7">
+                  <c:v>0.46</c:v>
+                </c:pt>
+                <c:pt idx="8">
+                  <c:v>0.46</c:v>
+                </c:pt>
+                <c:pt idx="9">
+                  <c:v>0.46</c:v>
+                </c:pt>
+                <c:pt idx="10">
+                  <c:v>0.46</c:v>
+                </c:pt>
+                <c:pt idx="11">
+                  <c:v>0.46</c:v>
+                </c:pt>
+              </c:numCache>
+            </c:numRef>
+          </c:val>
+          <c:smooth val="0"/>
+        </c:ser>
+        <c:dLbls>
+          <c:numFmt formatCode="#,##0" sourceLinked="0"/>
+          <c:txPr>
+            <a:bodyPr/>
+            <a:lstStyle/>
+            <a:p>
+              <a:pPr>
+                <a:defRPr b="0" i="0" strike="noStrike" sz="1200" u="none">
+                  <a:solidFill>
+                    <a:srgbClr val="000000"/>
+                  </a:solidFill>
+                  <a:latin typeface="Arial"/>
+                </a:defRPr>
+              </a:pPr>
+            </a:p>
+          </c:txPr>
+          <c:showLegendKey val="0"/>
+          <c:showVal val="0"/>
+          <c:showCatName val="0"/>
+          <c:showSerName val="0"/>
+          <c:showPercent val="0"/>
+          <c:showBubbleSize val="0"/>
+          <c:showLeaderLines val="0"/>
+        </c:dLbls>
+        <c:marker val="1"/>
+        <c:axId val="2094734554"/>
+        <c:axId val="2094734552"/>
+        <c:axId val="2094734556"/>
+      </c:lineChart>
+      <c:catAx>
+        <c:axId val="2094734554"/>
+        <c:scaling>
+          <c:orientation val="minMax"/>
+        </c:scaling>
+        <c:delete val="0"/>
+        <c:axPos val="b"/>
+        <c:numFmt formatCode="General" sourceLinked="1"/>
+        <c:majorTickMark val="out"/>
+        <c:minorTickMark val="none"/>
+        <c:tickLblPos val="low"/>
+        <c:spPr>
+          <a:ln w="12700" cap="flat">
+            <a:solidFill>
+              <a:srgbClr val="888888"/>
+            </a:solidFill>
+            <a:prstDash val="solid"/>
+            <a:round/>
+          </a:ln>
+        </c:spPr>
+        <c:txPr>
+          <a:bodyPr/>
+          <a:lstStyle/>
+          <a:p>
+            <a:pPr>
+              <a:defRPr sz="800" b="0" i="0" u="none" strike="noStrike">
+                <a:solidFill>
+                  <a:srgbClr val="94A3B8"/>
+                </a:solidFill>
+                <a:latin typeface="Calibri"/>
+              </a:defRPr>
+            </a:pPr>
+            <a:endParaRPr lang="en-US"/>
+          </a:p>
+        </c:txPr>
+        <c:crossAx val="2094734552"/>
+        <c:crosses val="autoZero"/>
+        <c:auto val="1"/>
+        <c:lblAlgn val="ctr"/>
+        <c:noMultiLvlLbl val="1"/>
+      </c:catAx>
+      <c:valAx>
+        <c:axId val="2094734552"/>
+        <c:scaling>
+          <c:orientation val="minMax"/>
+          <c:max val="0.8"/>
+          <c:min val="0"/>
+        </c:scaling>
+        <c:delete val="1"/>
+        <c:axPos val="l"/>
+        <c:numFmt formatCode="General" sourceLinked="0"/>
+        <c:majorTickMark val="out"/>
+        <c:minorTickMark val="none"/>
+        <c:tickLblPos val="nextTo"/>
+        <c:spPr>
+          <a:ln w="12700" cap="flat">
+            <a:solidFill>
+              <a:srgbClr val="888888"/>
+            </a:solidFill>
+            <a:prstDash val="solid"/>
+            <a:round/>
+          </a:ln>
+        </c:spPr>
+        <c:txPr>
+          <a:bodyPr/>
+          <a:lstStyle/>
+          <a:p>
+            <a:pPr>
+              <a:defRPr sz="1200" b="0" i="0" u="none" strike="noStrike">
+                <a:solidFill>
+                  <a:srgbClr val="000000"/>
+                </a:solidFill>
+                <a:latin typeface="Arial"/>
+              </a:defRPr>
+            </a:pPr>
+            <a:endParaRPr lang="en-US"/>
+          </a:p>
+        </c:txPr>
+        <c:crossAx val="2094734554"/>
+        <c:crosses val="autoZero"/>
+        <c:crossBetween val="midCat"/>
+      </c:valAx>
+      <c:spPr>
+        <a:noFill/>
+        <a:ln>
+          <a:noFill/>
+        </a:ln>
+        <a:effectLst/>
+      </c:spPr>
+    </c:plotArea>
+    <c:plotVisOnly val="1"/>
+    <c:dispBlanksAs val="span"/>
+  </c:chart>
+  <c:spPr>
+    <a:noFill/>
+    <a:ln>
+      <a:noFill/>
+    </a:ln>
+    <a:effectLst/>
+  </c:spPr>
+  <c:externalData r:id="rId1">
+    <c:autoUpdate val="0"/>
+  </c:externalData>
+</c:chartSpace>
+</file>
+
+<file path=ppt/charts/chart4.xml><?xml version="1.0" encoding="utf-8"?>
+<c:chartSpace xmlns:c="http://schemas.openxmlformats.org/drawingml/2006/chart" xmlns:a="http://schemas.openxmlformats.org/drawingml/2006/main" xmlns:r="http://schemas.openxmlformats.org/officeDocument/2006/relationships">
+  <c:date1904 val="0"/>
+  <c:roundedCorners val="1"/>
+  <c:chart>
+    <c:autoTitleDeleted val="1"/>
+    <c:plotArea>
+      <c:layout/>
+      <c:areaChart>
+        <c:varyColors val="0"/>
+        <c:ser>
+          <c:idx val="0"/>
+          <c:order val="0"/>
+          <c:tx>
+            <c:strRef>
+              <c:f>Sheet1!$B$1</c:f>
+              <c:strCache>
+                <c:ptCount val="1"/>
+                <c:pt idx="0">
+                  <c:v>Income</c:v>
+                </c:pt>
+              </c:strCache>
+            </c:strRef>
+          </c:tx>
+          <c:spPr>
+            <a:solidFill>
+              <a:srgbClr val="0F766E">
+                <a:alpha val="35000"/>
+              </a:srgbClr>
+            </a:solidFill>
+            <a:effectLst/>
+          </c:spPr>
+          <c:invertIfNegative val="0"/>
+          <c:dLbls>
+            <c:numFmt formatCode="#,##0" sourceLinked="0"/>
+            <c:txPr>
+              <a:bodyPr/>
+              <a:lstStyle/>
+              <a:p>
+                <a:pPr>
+                  <a:defRPr b="0" i="0" strike="noStrike" sz="1200" u="none">
+                    <a:solidFill>
+                      <a:srgbClr val="000000"/>
+                    </a:solidFill>
+                    <a:latin typeface="Arial"/>
+                  </a:defRPr>
+                </a:pPr>
+              </a:p>
+            </c:txPr>
+            <c:showLegendKey val="0"/>
+            <c:showVal val="0"/>
+            <c:showCatName val="0"/>
+            <c:showSerName val="0"/>
+            <c:showPercent val="0"/>
+            <c:showBubbleSize val="0"/>
+            <c:showLeaderLines val="0"/>
+          </c:dLbls>
+          <c:cat>
+            <c:multiLvlStrRef>
+              <c:f>Sheet1!$A$2:$A$13</c:f>
+              <c:multiLvlStrCache>
+                <c:ptCount val="12"/>
+                <c:lvl>
+                  <c:pt idx="0">
+                    <c:v>A</c:v>
+                  </c:pt>
+                  <c:pt idx="1">
+                    <c:v>M</c:v>
+                  </c:pt>
+                  <c:pt idx="2">
+                    <c:v>J</c:v>
+                  </c:pt>
+                  <c:pt idx="3">
+                    <c:v>J</c:v>
+                  </c:pt>
+                  <c:pt idx="4">
+                    <c:v>A</c:v>
+                  </c:pt>
+                  <c:pt idx="5">
+                    <c:v>S</c:v>
+                  </c:pt>
+                  <c:pt idx="6">
+                    <c:v>O</c:v>
+                  </c:pt>
+                  <c:pt idx="7">
+                    <c:v>N</c:v>
+                  </c:pt>
+                  <c:pt idx="8">
+                    <c:v>D</c:v>
+                  </c:pt>
+                  <c:pt idx="9">
+                    <c:v>J</c:v>
+                  </c:pt>
+                  <c:pt idx="10">
+                    <c:v>F</c:v>
+                  </c:pt>
+                  <c:pt idx="11">
+                    <c:v>M</c:v>
+                  </c:pt>
+                </c:lvl>
+              </c:multiLvlStrCache>
+            </c:multiLvlStrRef>
+          </c:cat>
+          <c:val>
+            <c:numRef>
+              <c:f>Sheet1!$B$2:$B$13</c:f>
+              <c:numCache>
+                <c:formatCode>General</c:formatCode>
+                <c:ptCount val="12"/>
+                <c:pt idx="0">
+                  <c:v>0.17</c:v>
+                </c:pt>
+                <c:pt idx="1">
+                  <c:v>0.2</c:v>
+                </c:pt>
+                <c:pt idx="2">
+                  <c:v>0.23</c:v>
+                </c:pt>
+                <c:pt idx="3">
+                  <c:v>0.23</c:v>
+                </c:pt>
+                <c:pt idx="4">
+                  <c:v>0.23</c:v>
+                </c:pt>
+                <c:pt idx="5">
+                  <c:v>0.23</c:v>
+                </c:pt>
+                <c:pt idx="6">
+                  <c:v>0.23</c:v>
+                </c:pt>
+                <c:pt idx="7">
+                  <c:v>0.23</c:v>
+                </c:pt>
+                <c:pt idx="8">
+                  <c:v>0.23</c:v>
+                </c:pt>
+                <c:pt idx="9">
+                  <c:v>0.23</c:v>
+                </c:pt>
+                <c:pt idx="10">
+                  <c:v>0.23</c:v>
+                </c:pt>
+                <c:pt idx="11">
+                  <c:v>0.23</c:v>
+                </c:pt>
+              </c:numCache>
+            </c:numRef>
+          </c:val>
+        </c:ser>
+        <c:dLbls>
+          <c:numFmt formatCode="#,##0" sourceLinked="0"/>
+          <c:txPr>
+            <a:bodyPr/>
+            <a:lstStyle/>
+            <a:p>
+              <a:pPr>
+                <a:defRPr b="0" i="0" strike="noStrike" sz="1200" u="none">
+                  <a:solidFill>
+                    <a:srgbClr val="000000"/>
+                  </a:solidFill>
+                  <a:latin typeface="Arial"/>
+                </a:defRPr>
+              </a:pPr>
+            </a:p>
+          </c:txPr>
+          <c:showLegendKey val="0"/>
+          <c:showVal val="0"/>
+          <c:showCatName val="0"/>
+          <c:showSerName val="0"/>
+          <c:showPercent val="0"/>
+          <c:showBubbleSize val="0"/>
+          <c:showLeaderLines val="0"/>
+        </c:dLbls>
+        <c:axId val="2094734554"/>
+        <c:axId val="2094734552"/>
+        <c:axId val="2094734556"/>
+      </c:areaChart>
+      <c:lineChart>
+        <c:varyColors val="0"/>
+        <c:ser>
+          <c:idx val="1"/>
+          <c:order val="1"/>
+          <c:tx>
+            <c:strRef>
+              <c:f>Sheet1!$C$1</c:f>
+              <c:strCache>
+                <c:ptCount val="1"/>
+                <c:pt idx="0">
+                  <c:v>Expense</c:v>
+                </c:pt>
+              </c:strCache>
+            </c:strRef>
+          </c:tx>
+          <c:spPr>
+            <a:solidFill>
+              <a:srgbClr val="334155"/>
+            </a:solidFill>
+            <a:ln w="28575" cap="flat">
+              <a:solidFill>
+                <a:srgbClr val="334155"/>
+              </a:solidFill>
+              <a:prstDash val="solid"/>
+              <a:round/>
+            </a:ln>
+            <a:effectLst/>
+          </c:spPr>
+          <c:invertIfNegative val="0"/>
+          <c:dLbls>
+            <c:numFmt formatCode="#,##0" sourceLinked="0"/>
+            <c:txPr>
+              <a:bodyPr/>
+              <a:lstStyle/>
+              <a:p>
+                <a:pPr>
+                  <a:defRPr b="0" i="0" strike="noStrike" sz="1200" u="none">
+                    <a:solidFill>
+                      <a:srgbClr val="000000"/>
+                    </a:solidFill>
+                    <a:latin typeface="Arial"/>
+                  </a:defRPr>
+                </a:pPr>
+              </a:p>
+            </c:txPr>
+            <c:showLegendKey val="0"/>
+            <c:showVal val="0"/>
+            <c:showCatName val="0"/>
+            <c:showSerName val="0"/>
+            <c:showPercent val="0"/>
+            <c:showBubbleSize val="0"/>
+            <c:showLeaderLines val="0"/>
+          </c:dLbls>
+          <c:marker>
+            <c:symbol val="none"/>
+            <c:size val="6"/>
+            <c:spPr>
+              <a:solidFill>
+                <a:srgbClr val="334155"/>
+              </a:solidFill>
+              <a:ln w="9525" cap="flat">
+                <a:solidFill>
+                  <a:srgbClr val="334155"/>
+                </a:solidFill>
+                <a:prstDash val="solid"/>
+                <a:round/>
+              </a:ln>
+              <a:effectLst/>
+            </c:spPr>
+          </c:marker>
+          <c:cat>
+            <c:multiLvlStrRef>
+              <c:f>Sheet1!$A$2:$A$13</c:f>
+              <c:multiLvlStrCache>
+                <c:ptCount val="12"/>
+                <c:lvl>
+                  <c:pt idx="0">
+                    <c:v>A</c:v>
+                  </c:pt>
+                  <c:pt idx="1">
+                    <c:v>M</c:v>
+                  </c:pt>
+                  <c:pt idx="2">
+                    <c:v>J</c:v>
+                  </c:pt>
+                  <c:pt idx="3">
+                    <c:v>J</c:v>
+                  </c:pt>
+                  <c:pt idx="4">
+                    <c:v>A</c:v>
+                  </c:pt>
+                  <c:pt idx="5">
+                    <c:v>S</c:v>
+                  </c:pt>
+                  <c:pt idx="6">
+                    <c:v>O</c:v>
+                  </c:pt>
+                  <c:pt idx="7">
+                    <c:v>N</c:v>
+                  </c:pt>
+                  <c:pt idx="8">
+                    <c:v>D</c:v>
+                  </c:pt>
+                  <c:pt idx="9">
+                    <c:v>J</c:v>
+                  </c:pt>
+                  <c:pt idx="10">
+                    <c:v>F</c:v>
+                  </c:pt>
+                  <c:pt idx="11">
+                    <c:v>M</c:v>
+                  </c:pt>
+                </c:lvl>
+              </c:multiLvlStrCache>
+            </c:multiLvlStrRef>
+          </c:cat>
+          <c:val>
+            <c:numRef>
+              <c:f>Sheet1!$C$2:$C$13</c:f>
+              <c:numCache>
+                <c:formatCode>General</c:formatCode>
+                <c:ptCount val="12"/>
+                <c:pt idx="0">
+                  <c:v>0.36</c:v>
+                </c:pt>
+                <c:pt idx="1">
+                  <c:v>0.33</c:v>
+                </c:pt>
+                <c:pt idx="2">
+                  <c:v>0.46</c:v>
+                </c:pt>
+                <c:pt idx="3">
+                  <c:v>0.4</c:v>
+                </c:pt>
+                <c:pt idx="4">
+                  <c:v>0.46</c:v>
+                </c:pt>
+                <c:pt idx="5">
+                  <c:v>0.46</c:v>
+                </c:pt>
+                <c:pt idx="6">
+                  <c:v>0.46</c:v>
+                </c:pt>
+                <c:pt idx="7">
+                  <c:v>0.46</c:v>
+                </c:pt>
+                <c:pt idx="8">
+                  <c:v>0.46</c:v>
+                </c:pt>
+                <c:pt idx="9">
+                  <c:v>0.46</c:v>
+                </c:pt>
+                <c:pt idx="10">
+                  <c:v>0.46</c:v>
+                </c:pt>
+                <c:pt idx="11">
+                  <c:v>0.46</c:v>
+                </c:pt>
+              </c:numCache>
+            </c:numRef>
+          </c:val>
+          <c:smooth val="0"/>
+        </c:ser>
+        <c:dLbls>
+          <c:numFmt formatCode="#,##0" sourceLinked="0"/>
+          <c:txPr>
+            <a:bodyPr/>
+            <a:lstStyle/>
+            <a:p>
+              <a:pPr>
+                <a:defRPr b="0" i="0" strike="noStrike" sz="1200" u="none">
+                  <a:solidFill>
+                    <a:srgbClr val="000000"/>
+                  </a:solidFill>
+                  <a:latin typeface="Arial"/>
+                </a:defRPr>
+              </a:pPr>
+            </a:p>
+          </c:txPr>
+          <c:showLegendKey val="0"/>
+          <c:showVal val="0"/>
+          <c:showCatName val="0"/>
+          <c:showSerName val="0"/>
+          <c:showPercent val="0"/>
+          <c:showBubbleSize val="0"/>
+          <c:showLeaderLines val="0"/>
+        </c:dLbls>
+        <c:marker val="1"/>
+        <c:axId val="2094734554"/>
+        <c:axId val="2094734552"/>
+        <c:axId val="2094734556"/>
+      </c:lineChart>
+      <c:catAx>
+        <c:axId val="2094734554"/>
+        <c:scaling>
+          <c:orientation val="minMax"/>
+        </c:scaling>
+        <c:delete val="0"/>
+        <c:axPos val="b"/>
+        <c:numFmt formatCode="General" sourceLinked="1"/>
+        <c:majorTickMark val="out"/>
+        <c:minorTickMark val="none"/>
+        <c:tickLblPos val="low"/>
+        <c:spPr>
+          <a:ln w="12700" cap="flat">
+            <a:solidFill>
+              <a:srgbClr val="888888"/>
+            </a:solidFill>
+            <a:prstDash val="solid"/>
+            <a:round/>
+          </a:ln>
+        </c:spPr>
+        <c:txPr>
+          <a:bodyPr/>
+          <a:lstStyle/>
+          <a:p>
+            <a:pPr>
+              <a:defRPr sz="800" b="0" i="0" u="none" strike="noStrike">
+                <a:solidFill>
+                  <a:srgbClr val="94A3B8"/>
+                </a:solidFill>
+                <a:latin typeface="Calibri"/>
+              </a:defRPr>
+            </a:pPr>
+            <a:endParaRPr lang="en-US"/>
+          </a:p>
+        </c:txPr>
+        <c:crossAx val="2094734552"/>
+        <c:crosses val="autoZero"/>
+        <c:auto val="1"/>
+        <c:lblAlgn val="ctr"/>
+        <c:noMultiLvlLbl val="1"/>
+      </c:catAx>
+      <c:valAx>
+        <c:axId val="2094734552"/>
+        <c:scaling>
+          <c:orientation val="minMax"/>
+          <c:max val="0.8"/>
+          <c:min val="0"/>
+        </c:scaling>
+        <c:delete val="1"/>
+        <c:axPos val="l"/>
+        <c:numFmt formatCode="General" sourceLinked="0"/>
+        <c:majorTickMark val="out"/>
+        <c:minorTickMark val="none"/>
+        <c:tickLblPos val="nextTo"/>
+        <c:spPr>
+          <a:ln w="12700" cap="flat">
+            <a:solidFill>
+              <a:srgbClr val="888888"/>
+            </a:solidFill>
+            <a:prstDash val="solid"/>
+            <a:round/>
+          </a:ln>
+        </c:spPr>
+        <c:txPr>
+          <a:bodyPr/>
+          <a:lstStyle/>
+          <a:p>
+            <a:pPr>
+              <a:defRPr sz="1200" b="0" i="0" u="none" strike="noStrike">
+                <a:solidFill>
+                  <a:srgbClr val="000000"/>
+                </a:solidFill>
+                <a:latin typeface="Arial"/>
+              </a:defRPr>
+            </a:pPr>
+            <a:endParaRPr lang="en-US"/>
+          </a:p>
+        </c:txPr>
+        <c:crossAx val="2094734554"/>
+        <c:crosses val="autoZero"/>
+        <c:crossBetween val="midCat"/>
+      </c:valAx>
+      <c:spPr>
+        <a:noFill/>
+        <a:ln>
+          <a:noFill/>
+        </a:ln>
+        <a:effectLst/>
+      </c:spPr>
+    </c:plotArea>
+    <c:plotVisOnly val="1"/>
+    <c:dispBlanksAs val="span"/>
+  </c:chart>
+  <c:spPr>
+    <a:noFill/>
+    <a:ln>
+      <a:noFill/>
+    </a:ln>
+    <a:effectLst/>
+  </c:spPr>
+  <c:externalData r:id="rId1">
+    <c:autoUpdate val="0"/>
+  </c:externalData>
+</c:chartSpace>
+</file>
+
+<file path=ppt/charts/chart5.xml><?xml version="1.0" encoding="utf-8"?>
 <c:chartSpace xmlns:c="http://schemas.openxmlformats.org/drawingml/2006/chart" xmlns:a="http://schemas.openxmlformats.org/drawingml/2006/main" xmlns:r="http://schemas.openxmlformats.org/officeDocument/2006/relationships">
   <c:date1904 val="0"/>
   <c:roundedCorners val="1"/>
@@ -765,7 +2194,7 @@
 </c:chartSpace>
 </file>
 
-<file path=ppt/charts/chart3.xml><?xml version="1.0" encoding="utf-8"?>
+<file path=ppt/charts/chart6.xml><?xml version="1.0" encoding="utf-8"?>
 <c:chartSpace xmlns:c="http://schemas.openxmlformats.org/drawingml/2006/chart" xmlns:a="http://schemas.openxmlformats.org/drawingml/2006/main" xmlns:r="http://schemas.openxmlformats.org/officeDocument/2006/relationships">
   <c:date1904 val="0"/>
   <c:roundedCorners val="1"/>
@@ -1210,7 +2639,7 @@
 </c:chartSpace>
 </file>
 
-<file path=ppt/charts/chart4.xml><?xml version="1.0" encoding="utf-8"?>
+<file path=ppt/charts/chart7.xml><?xml version="1.0" encoding="utf-8"?>
 <c:chartSpace xmlns:c="http://schemas.openxmlformats.org/drawingml/2006/chart" xmlns:a="http://schemas.openxmlformats.org/drawingml/2006/main" xmlns:r="http://schemas.openxmlformats.org/officeDocument/2006/relationships">
   <c:date1904 val="0"/>
   <c:roundedCorners val="1"/>
@@ -1545,7 +2974,7 @@
 </c:chartSpace>
 </file>
 
-<file path=ppt/charts/chart5.xml><?xml version="1.0" encoding="utf-8"?>
+<file path=ppt/charts/chart8.xml><?xml version="1.0" encoding="utf-8"?>
 <c:chartSpace xmlns:c="http://schemas.openxmlformats.org/drawingml/2006/chart" xmlns:a="http://schemas.openxmlformats.org/drawingml/2006/main" xmlns:r="http://schemas.openxmlformats.org/officeDocument/2006/relationships">
   <c:date1904 val="0"/>
   <c:roundedCorners val="1"/>
@@ -1566,7 +2995,7 @@
               <c:strCache>
                 <c:ptCount val="1"/>
                 <c:pt idx="0">
-                  <c:v>Rating revenue (Rs Cr)</c:v>
+                  <c:v>Rating revenue</c:v>
                 </c:pt>
               </c:strCache>
             </c:strRef>
@@ -1585,7 +3014,7 @@
               <a:lstStyle/>
               <a:p>
                 <a:pPr>
-                  <a:defRPr b="0" i="0" strike="noStrike" sz="1000" u="none">
+                  <a:defRPr b="0" i="0" strike="noStrike" sz="950" u="none">
                     <a:solidFill>
                       <a:srgbClr val="334155"/>
                     </a:solidFill>
@@ -1671,7 +3100,7 @@
             <a:lstStyle/>
             <a:p>
               <a:pPr>
-                <a:defRPr b="0" i="0" strike="noStrike" sz="1000" u="none">
+                <a:defRPr b="0" i="0" strike="noStrike" sz="950" u="none">
                   <a:solidFill>
                     <a:srgbClr val="334155"/>
                   </a:solidFill>
@@ -1719,7 +3148,7 @@
           <a:lstStyle/>
           <a:p>
             <a:pPr>
-              <a:defRPr sz="1100" b="0" i="0" u="none" strike="noStrike">
+              <a:defRPr sz="1050" b="0" i="0" u="none" strike="noStrike">
                 <a:solidFill>
                   <a:srgbClr val="334155"/>
                 </a:solidFill>
@@ -1747,6 +3176,248 @@
         <c:majorTickMark val="out"/>
         <c:minorTickMark val="none"/>
         <c:tickLblPos val="low"/>
+        <c:spPr>
+          <a:ln w="12700" cap="flat">
+            <a:solidFill>
+              <a:srgbClr val="888888"/>
+            </a:solidFill>
+            <a:prstDash val="solid"/>
+            <a:round/>
+          </a:ln>
+        </c:spPr>
+        <c:txPr>
+          <a:bodyPr/>
+          <a:lstStyle/>
+          <a:p>
+            <a:pPr>
+              <a:defRPr sz="1200" b="0" i="0" u="none" strike="noStrike">
+                <a:solidFill>
+                  <a:srgbClr val="000000"/>
+                </a:solidFill>
+                <a:latin typeface="Arial"/>
+              </a:defRPr>
+            </a:pPr>
+            <a:endParaRPr lang="en-US"/>
+          </a:p>
+        </c:txPr>
+        <c:crossAx val="2094734554"/>
+        <c:crosses val="autoZero"/>
+        <c:crossBetween val="between"/>
+      </c:valAx>
+      <c:spPr>
+        <a:noFill/>
+        <a:ln>
+          <a:noFill/>
+        </a:ln>
+        <a:effectLst/>
+      </c:spPr>
+    </c:plotArea>
+    <c:plotVisOnly val="1"/>
+    <c:dispBlanksAs val="span"/>
+  </c:chart>
+  <c:spPr>
+    <a:noFill/>
+    <a:ln>
+      <a:noFill/>
+    </a:ln>
+    <a:effectLst/>
+  </c:spPr>
+  <c:externalData r:id="rId1">
+    <c:autoUpdate val="0"/>
+  </c:externalData>
+</c:chartSpace>
+</file>
+
+<file path=ppt/charts/chart9.xml><?xml version="1.0" encoding="utf-8"?>
+<c:chartSpace xmlns:c="http://schemas.openxmlformats.org/drawingml/2006/chart" xmlns:a="http://schemas.openxmlformats.org/drawingml/2006/main" xmlns:r="http://schemas.openxmlformats.org/officeDocument/2006/relationships">
+  <c:date1904 val="0"/>
+  <c:roundedCorners val="1"/>
+  <c:chart>
+    <c:autoTitleDeleted val="1"/>
+    <c:plotArea>
+      <c:layout/>
+      <c:barChart>
+        <c:barDir val="col"/>
+        <c:grouping val="clustered"/>
+        <c:varyColors val="0"/>
+        <c:ser>
+          <c:idx val="0"/>
+          <c:order val="0"/>
+          <c:tx>
+            <c:strRef>
+              <c:f>Sheet1!$B$1</c:f>
+              <c:strCache>
+                <c:ptCount val="1"/>
+                <c:pt idx="0">
+                  <c:v>ACER rating revenue</c:v>
+                </c:pt>
+              </c:strCache>
+            </c:strRef>
+          </c:tx>
+          <c:spPr>
+            <a:solidFill>
+              <a:srgbClr val="0F766E"/>
+            </a:solidFill>
+            <a:effectLst/>
+          </c:spPr>
+          <c:invertIfNegative val="0"/>
+          <c:dLbls>
+            <c:numFmt formatCode="#,##0" sourceLinked="0"/>
+            <c:txPr>
+              <a:bodyPr/>
+              <a:lstStyle/>
+              <a:p>
+                <a:pPr>
+                  <a:defRPr b="0" i="0" strike="noStrike" sz="950" u="none">
+                    <a:solidFill>
+                      <a:srgbClr val="334155"/>
+                    </a:solidFill>
+                    <a:latin typeface="Calibri"/>
+                  </a:defRPr>
+                </a:pPr>
+              </a:p>
+            </c:txPr>
+            <c:showLegendKey val="0"/>
+            <c:showVal val="1"/>
+            <c:showCatName val="0"/>
+            <c:showSerName val="0"/>
+            <c:showPercent val="0"/>
+            <c:showBubbleSize val="0"/>
+            <c:showLeaderLines val="0"/>
+          </c:dLbls>
+          <c:cat>
+            <c:multiLvlStrRef>
+              <c:f>Sheet1!$A$2:$A$6</c:f>
+              <c:multiLvlStrCache>
+                <c:ptCount val="5"/>
+                <c:lvl>
+                  <c:pt idx="0">
+                    <c:v>FY26</c:v>
+                  </c:pt>
+                  <c:pt idx="1">
+                    <c:v>FY27</c:v>
+                  </c:pt>
+                  <c:pt idx="2">
+                    <c:v>FY28</c:v>
+                  </c:pt>
+                  <c:pt idx="3">
+                    <c:v>FY29</c:v>
+                  </c:pt>
+                  <c:pt idx="4">
+                    <c:v>FY30</c:v>
+                  </c:pt>
+                </c:lvl>
+              </c:multiLvlStrCache>
+            </c:multiLvlStrRef>
+          </c:cat>
+          <c:val>
+            <c:numRef>
+              <c:f>Sheet1!$B$2:$B$6</c:f>
+              <c:numCache>
+                <c:formatCode>General</c:formatCode>
+                <c:ptCount val="5"/>
+                <c:pt idx="0">
+                  <c:v>0.08</c:v>
+                </c:pt>
+                <c:pt idx="1">
+                  <c:v>3.8</c:v>
+                </c:pt>
+                <c:pt idx="2">
+                  <c:v>8.3</c:v>
+                </c:pt>
+                <c:pt idx="3">
+                  <c:v>11.3</c:v>
+                </c:pt>
+                <c:pt idx="4">
+                  <c:v>16</c:v>
+                </c:pt>
+              </c:numCache>
+            </c:numRef>
+          </c:val>
+        </c:ser>
+        <c:dLbls>
+          <c:numFmt formatCode="#,##0" sourceLinked="0"/>
+          <c:txPr>
+            <a:bodyPr/>
+            <a:lstStyle/>
+            <a:p>
+              <a:pPr>
+                <a:defRPr b="0" i="0" strike="noStrike" sz="950" u="none">
+                  <a:solidFill>
+                    <a:srgbClr val="334155"/>
+                  </a:solidFill>
+                  <a:latin typeface="Calibri"/>
+                </a:defRPr>
+              </a:pPr>
+            </a:p>
+          </c:txPr>
+          <c:showLegendKey val="0"/>
+          <c:showVal val="1"/>
+          <c:showCatName val="0"/>
+          <c:showSerName val="0"/>
+          <c:showPercent val="0"/>
+          <c:showBubbleSize val="0"/>
+          <c:showLeaderLines val="0"/>
+        </c:dLbls>
+        <c:gapWidth val="150"/>
+        <c:overlap val="0"/>
+        <c:axId val="2094734554"/>
+        <c:axId val="2094734552"/>
+        <c:axId val="2094734556"/>
+      </c:barChart>
+      <c:catAx>
+        <c:axId val="2094734554"/>
+        <c:scaling>
+          <c:orientation val="minMax"/>
+        </c:scaling>
+        <c:delete val="0"/>
+        <c:axPos val="b"/>
+        <c:numFmt formatCode="General" sourceLinked="1"/>
+        <c:majorTickMark val="out"/>
+        <c:minorTickMark val="none"/>
+        <c:tickLblPos val="low"/>
+        <c:spPr>
+          <a:ln w="12700" cap="flat">
+            <a:solidFill>
+              <a:srgbClr val="888888"/>
+            </a:solidFill>
+            <a:prstDash val="solid"/>
+            <a:round/>
+          </a:ln>
+        </c:spPr>
+        <c:txPr>
+          <a:bodyPr/>
+          <a:lstStyle/>
+          <a:p>
+            <a:pPr>
+              <a:defRPr sz="1050" b="0" i="0" u="none" strike="noStrike">
+                <a:solidFill>
+                  <a:srgbClr val="334155"/>
+                </a:solidFill>
+                <a:latin typeface="Calibri"/>
+              </a:defRPr>
+            </a:pPr>
+            <a:endParaRPr lang="en-US"/>
+          </a:p>
+        </c:txPr>
+        <c:crossAx val="2094734552"/>
+        <c:crosses val="autoZero"/>
+        <c:auto val="1"/>
+        <c:lblAlgn val="ctr"/>
+        <c:noMultiLvlLbl val="1"/>
+      </c:catAx>
+      <c:valAx>
+        <c:axId val="2094734552"/>
+        <c:scaling>
+          <c:orientation val="minMax"/>
+          <c:max val="19"/>
+        </c:scaling>
+        <c:delete val="1"/>
+        <c:axPos val="l"/>
+        <c:numFmt formatCode="General" sourceLinked="0"/>
+        <c:majorTickMark val="out"/>
+        <c:minorTickMark val="none"/>
+        <c:tickLblPos val="nextTo"/>
         <c:spPr>
           <a:ln w="12700" cap="flat">
             <a:solidFill>
@@ -2394,6 +4065,94 @@
             <a:fld id="{F7021451-1387-4CA6-816F-3879F97B5CBC}" type="slidenum">
               <a:rPr lang="en-US"/>
               <a:t>11</a:t>
+            </a:fld>
+            <a:endParaRPr lang="en-US"/>
+          </a:p>
+        </p:txBody>
+      </p:sp>
+    </p:spTree>
+    <p:extLst>
+      <p:ext uri="{BB962C8B-B14F-4D97-AF65-F5344CB8AC3E}">
+        <p14:creationId xmlns:p14="http://schemas.microsoft.com/office/powerpoint/2010/main" val="1024086991"/>
+      </p:ext>
+    </p:extLst>
+  </p:cSld>
+  <p:clrMapOvr>
+    <a:masterClrMapping/>
+  </p:clrMapOvr>
+</p:notes>
+</file>
+
+<file path=ppt/notesSlides/notesSlide12.xml><?xml version="1.0" encoding="utf-8"?>
+<p:notes xmlns:a="http://schemas.openxmlformats.org/drawingml/2006/main" xmlns:r="http://schemas.openxmlformats.org/officeDocument/2006/relationships" xmlns:p="http://schemas.openxmlformats.org/presentationml/2006/main">
+  <p:cSld>
+    <p:spTree>
+      <p:nvGrpSpPr>
+        <p:cNvPr id="1" name=""/>
+        <p:cNvGrpSpPr/>
+        <p:nvPr/>
+      </p:nvGrpSpPr>
+      <p:grpSpPr>
+        <a:xfrm>
+          <a:off x="0" y="0"/>
+          <a:ext cx="0" cy="0"/>
+          <a:chOff x="0" y="0"/>
+          <a:chExt cx="0" cy="0"/>
+        </a:xfrm>
+      </p:grpSpPr>
+      <p:sp>
+        <p:nvSpPr>
+          <p:cNvPr id="2" name="Slide Image Placeholder 1"/>
+          <p:cNvSpPr>
+            <a:spLocks noGrp="1" noRot="1" noChangeAspect="1"/>
+          </p:cNvSpPr>
+          <p:nvPr>
+            <p:ph type="sldImg"/>
+          </p:nvPr>
+        </p:nvSpPr>
+        <p:spPr/>
+      </p:sp>
+      <p:sp>
+        <p:nvSpPr>
+          <p:cNvPr id="3" name="Notes Placeholder 2"/>
+          <p:cNvSpPr>
+            <a:spLocks noGrp="1"/>
+          </p:cNvSpPr>
+          <p:nvPr>
+            <p:ph type="body" idx="1"/>
+          </p:nvPr>
+        </p:nvSpPr>
+        <p:spPr/>
+        <p:txBody>
+          <a:bodyPr/>
+          <a:lstStyle/>
+          <a:p>
+            <a:r>
+              <a:rPr lang="en-US" dirty="0"/>
+              <a:t/>
+            </a:r>
+            <a:endParaRPr lang="en-US" dirty="0"/>
+          </a:p>
+        </p:txBody>
+      </p:sp>
+      <p:sp>
+        <p:nvSpPr>
+          <p:cNvPr id="4" name="Slide Number Placeholder 3"/>
+          <p:cNvSpPr>
+            <a:spLocks noGrp="1"/>
+          </p:cNvSpPr>
+          <p:nvPr>
+            <p:ph type="sldNum" sz="quarter" idx="10"/>
+          </p:nvPr>
+        </p:nvSpPr>
+        <p:spPr/>
+        <p:txBody>
+          <a:bodyPr/>
+          <a:lstStyle/>
+          <a:p>
+            <a:fld id="{F7021451-1387-4CA6-816F-3879F97B5CBC}" type="slidenum">
+              <a:rPr lang="en-US"/>
+              <a:t>12</a:t>
             </a:fld>
             <a:endParaRPr lang="en-US"/>
           </a:p>
@@ -3922,7 +5681,7 @@
                 <a:ea typeface="Calibri" pitchFamily="34" charset="-122"/>
                 <a:cs typeface="Calibri" pitchFamily="34" charset="-120"/>
               </a:rPr>
-              <a:t>EXECUTION</a:t>
+              <a:t>INDUSTRY MAP</a:t>
             </a:r>
             <a:endParaRPr lang="en-US" sz="1100" dirty="0"/>
           </a:p>
@@ -3953,7 +5712,7 @@
               <a:buNone/>
             </a:pPr>
             <a:r>
-              <a:rPr lang="en-US" sz="3000" b="1" dirty="0">
+              <a:rPr lang="en-US" sz="2900" b="1" dirty="0">
                 <a:solidFill>
                   <a:srgbClr val="0F172A"/>
                 </a:solidFill>
@@ -3961,9 +5720,9 @@
                 <a:ea typeface="Cambria" pitchFamily="34" charset="-122"/>
                 <a:cs typeface="Cambria" pitchFamily="34" charset="-120"/>
               </a:rPr>
-              <a:t>Milestones, KPIs and risks</a:t>
-            </a:r>
-            <a:endParaRPr lang="en-US" sz="3000" dirty="0"/>
+              <a:t>What the CRAs earn, and where we go</a:t>
+            </a:r>
+            <a:endParaRPr lang="en-US" sz="2900" dirty="0"/>
           </a:p>
         </p:txBody>
       </p:sp>
@@ -3975,8 +5734,8 @@
         </p:nvSpPr>
         <p:spPr>
           <a:xfrm>
-            <a:off x="566928" y="1417320"/>
-            <a:ext cx="5486400" cy="274320"/>
+            <a:off x="566928" y="1298448"/>
+            <a:ext cx="11064240" cy="457200"/>
           </a:xfrm>
           <a:prstGeom prst="rect">
             <a:avLst/>
@@ -3992,17 +5751,17 @@
               <a:buNone/>
             </a:pPr>
             <a:r>
-              <a:rPr lang="en-US" sz="1300" b="1" dirty="0">
-                <a:solidFill>
-                  <a:srgbClr val="2B5CC4"/>
+              <a:rPr lang="en-US" sz="1400" dirty="0">
+                <a:solidFill>
+                  <a:srgbClr val="64748B"/>
                 </a:solidFill>
                 <a:latin typeface="Calibri" pitchFamily="34" charset="0"/>
                 <a:ea typeface="Calibri" pitchFamily="34" charset="-122"/>
                 <a:cs typeface="Calibri" pitchFamily="34" charset="-120"/>
               </a:rPr>
-              <a:t>Milestones (base case)</a:t>
-            </a:r>
-            <a:endParaRPr lang="en-US" sz="1300" dirty="0"/>
+              <a:t>The Indian rating industry is about Rs 2,000 Cr. We enter small and climb a credible ladder.</a:t>
+            </a:r>
+            <a:endParaRPr lang="en-US" sz="1400" dirty="0"/>
           </a:p>
         </p:txBody>
       </p:sp>
@@ -4014,28 +5773,24 @@
         </p:nvSpPr>
         <p:spPr>
           <a:xfrm>
-            <a:off x="566928" y="1737360"/>
-            <a:ext cx="5394960" cy="2377440"/>
-          </a:xfrm>
-          <a:prstGeom prst="rect">
-            <a:avLst/>
-          </a:prstGeom>
-          <a:noFill/>
-          <a:ln/>
-        </p:spPr>
-        <p:txBody>
-          <a:bodyPr wrap="square" rtlCol="0" anchor="t"/>
-          <a:lstStyle/>
-          <a:p>
-            <a:pPr marL="177800" indent="-177800">
-              <a:spcAft>
-                <a:spcPts val="700"/>
-              </a:spcAft>
-              <a:buSzPct val="100000"/>
-              <a:buChar char="•"/>
-            </a:pPr>
-            <a:r>
-              <a:rPr lang="en-US" sz="1250" dirty="0">
+            <a:off x="566928" y="1371600"/>
+            <a:ext cx="5486400" cy="274320"/>
+          </a:xfrm>
+          <a:prstGeom prst="rect">
+            <a:avLst/>
+          </a:prstGeom>
+          <a:noFill/>
+          <a:ln/>
+        </p:spPr>
+        <p:txBody>
+          <a:bodyPr wrap="square" rtlCol="0" anchor="ctr"/>
+          <a:lstStyle/>
+          <a:p>
+            <a:pPr indent="0" marL="0">
+              <a:buNone/>
+            </a:pPr>
+            <a:r>
+              <a:rPr lang="en-US" sz="1200" b="1" dirty="0">
                 <a:solidFill>
                   <a:srgbClr val="334155"/>
                 </a:solidFill>
@@ -4043,20 +5798,54 @@
                 <a:ea typeface="Calibri" pitchFamily="34" charset="-122"/>
                 <a:cs typeface="Calibri" pitchFamily="34" charset="-120"/>
               </a:rPr>
-              <a:t>Now: SEBI registered, two hires and four BDs onboarding.</a:t>
-            </a:r>
-            <a:endParaRPr lang="en-US" sz="1250" dirty="0"/>
-          </a:p>
-          <a:p>
-            <a:pPr marL="177800" indent="-177800">
-              <a:spcAft>
-                <a:spcPts val="700"/>
-              </a:spcAft>
-              <a:buSzPct val="100000"/>
-              <a:buChar char="•"/>
-            </a:pPr>
-            <a:r>
-              <a:rPr lang="en-US" sz="1250" dirty="0">
+              <a:t>Rating revenue, latest year (Rs Cr)</a:t>
+            </a:r>
+            <a:endParaRPr lang="en-US" sz="1200" dirty="0"/>
+          </a:p>
+        </p:txBody>
+      </p:sp>
+      <p:graphicFrame>
+        <p:nvGraphicFramePr>
+          <p:cNvPr id="7" name="Chart 0" descr=""/>
+          <p:cNvGraphicFramePr/>
+          <p:nvPr/>
+        </p:nvGraphicFramePr>
+        <p:xfrm>
+          <a:off x="566928" y="1691640"/>
+          <a:ext cx="5577840" cy="3657600"/>
+        </p:xfrm>
+        <a:graphic xmlns:a="http://schemas.openxmlformats.org/drawingml/2006/main">
+          <a:graphicData uri="http://schemas.openxmlformats.org/drawingml/2006/chart">
+            <c:chart xmlns:c="http://schemas.openxmlformats.org/drawingml/2006/chart" r:id="rId1"/>
+          </a:graphicData>
+        </a:graphic>
+      </p:graphicFrame>
+      <p:sp>
+        <p:nvSpPr>
+          <p:cNvPr id="8" name="Text 5"/>
+          <p:cNvSpPr/>
+          <p:nvPr/>
+        </p:nvSpPr>
+        <p:spPr>
+          <a:xfrm>
+            <a:off x="6400800" y="1371600"/>
+            <a:ext cx="5486400" cy="274320"/>
+          </a:xfrm>
+          <a:prstGeom prst="rect">
+            <a:avLst/>
+          </a:prstGeom>
+          <a:noFill/>
+          <a:ln/>
+        </p:spPr>
+        <p:txBody>
+          <a:bodyPr wrap="square" rtlCol="0" anchor="ctr"/>
+          <a:lstStyle/>
+          <a:p>
+            <a:pPr indent="0" marL="0">
+              <a:buNone/>
+            </a:pPr>
+            <a:r>
+              <a:rPr lang="en-US" sz="1200" b="1" dirty="0">
                 <a:solidFill>
                   <a:srgbClr val="334155"/>
                 </a:solidFill>
@@ -4064,85 +5853,248 @@
                 <a:ea typeface="Calibri" pitchFamily="34" charset="-122"/>
                 <a:cs typeface="Calibri" pitchFamily="34" charset="-120"/>
               </a:rPr>
-              <a:t>Q2: pursue RBI ECAI accreditation, build the BD pipeline.</a:t>
-            </a:r>
-            <a:endParaRPr lang="en-US" sz="1250" dirty="0"/>
-          </a:p>
-          <a:p>
-            <a:pPr marL="177800" indent="-177800">
-              <a:spcAft>
-                <a:spcPts val="700"/>
-              </a:spcAft>
-              <a:buSzPct val="100000"/>
-              <a:buChar char="•"/>
-            </a:pPr>
-            <a:r>
-              <a:rPr lang="en-US" sz="1250" dirty="0">
-                <a:solidFill>
-                  <a:srgbClr val="334155"/>
+              <a:t>Our revenue trajectory (Rs Cr)</a:t>
+            </a:r>
+            <a:endParaRPr lang="en-US" sz="1200" dirty="0"/>
+          </a:p>
+        </p:txBody>
+      </p:sp>
+      <p:graphicFrame>
+        <p:nvGraphicFramePr>
+          <p:cNvPr id="9" name="Chart 1" descr=""/>
+          <p:cNvGraphicFramePr/>
+          <p:nvPr/>
+        </p:nvGraphicFramePr>
+        <p:xfrm>
+          <a:off x="6400800" y="1691640"/>
+          <a:ext cx="5394960" cy="2286000"/>
+        </p:xfrm>
+        <a:graphic xmlns:a="http://schemas.openxmlformats.org/drawingml/2006/main">
+          <a:graphicData uri="http://schemas.openxmlformats.org/drawingml/2006/chart">
+            <c:chart xmlns:c="http://schemas.openxmlformats.org/drawingml/2006/chart" r:id="rId2"/>
+          </a:graphicData>
+        </a:graphic>
+      </p:graphicFrame>
+      <p:sp>
+        <p:nvSpPr>
+          <p:cNvPr id="10" name="Shape 6"/>
+          <p:cNvSpPr/>
+          <p:nvPr/>
+        </p:nvSpPr>
+        <p:spPr>
+          <a:xfrm>
+            <a:off x="6400800" y="4160520"/>
+            <a:ext cx="1691640" cy="1143000"/>
+          </a:xfrm>
+          <a:prstGeom prst="roundRect">
+            <a:avLst>
+              <a:gd name="adj" fmla="val 4800"/>
+            </a:avLst>
+          </a:prstGeom>
+          <a:solidFill>
+            <a:srgbClr val="F5F8FB"/>
+          </a:solidFill>
+          <a:ln w="12700">
+            <a:solidFill>
+              <a:srgbClr val="E2E8F0"/>
+            </a:solidFill>
+            <a:prstDash val="solid"/>
+          </a:ln>
+        </p:spPr>
+      </p:sp>
+      <p:sp>
+        <p:nvSpPr>
+          <p:cNvPr id="11" name="Text 7"/>
+          <p:cNvSpPr/>
+          <p:nvPr/>
+        </p:nvSpPr>
+        <p:spPr>
+          <a:xfrm>
+            <a:off x="6510528" y="4251960"/>
+            <a:ext cx="1463040" cy="228600"/>
+          </a:xfrm>
+          <a:prstGeom prst="rect">
+            <a:avLst/>
+          </a:prstGeom>
+          <a:noFill/>
+          <a:ln/>
+        </p:spPr>
+        <p:txBody>
+          <a:bodyPr wrap="square" rtlCol="0" anchor="ctr"/>
+          <a:lstStyle/>
+          <a:p>
+            <a:pPr indent="0" marL="0">
+              <a:buNone/>
+            </a:pPr>
+            <a:r>
+              <a:rPr lang="en-US" sz="1050" dirty="0">
+                <a:solidFill>
+                  <a:srgbClr val="64748B"/>
                 </a:solidFill>
                 <a:latin typeface="Calibri" pitchFamily="34" charset="0"/>
                 <a:ea typeface="Calibri" pitchFamily="34" charset="-122"/>
                 <a:cs typeface="Calibri" pitchFamily="34" charset="-120"/>
               </a:rPr>
-              <a:t>1 Oct: BLR live, first mandates.</a:t>
-            </a:r>
-            <a:endParaRPr lang="en-US" sz="1250" dirty="0"/>
-          </a:p>
-          <a:p>
-            <a:pPr marL="177800" indent="-177800">
-              <a:spcAft>
-                <a:spcPts val="700"/>
-              </a:spcAft>
-              <a:buSzPct val="100000"/>
-              <a:buChar char="•"/>
-            </a:pPr>
-            <a:r>
-              <a:rPr lang="en-US" sz="1250" dirty="0">
-                <a:solidFill>
-                  <a:srgbClr val="334155"/>
+              <a:t>TAM</a:t>
+            </a:r>
+            <a:endParaRPr lang="en-US" sz="1050" dirty="0"/>
+          </a:p>
+        </p:txBody>
+      </p:sp>
+      <p:sp>
+        <p:nvSpPr>
+          <p:cNvPr id="12" name="Text 8"/>
+          <p:cNvSpPr/>
+          <p:nvPr/>
+        </p:nvSpPr>
+        <p:spPr>
+          <a:xfrm>
+            <a:off x="6510528" y="4480560"/>
+            <a:ext cx="1463040" cy="320040"/>
+          </a:xfrm>
+          <a:prstGeom prst="rect">
+            <a:avLst/>
+          </a:prstGeom>
+          <a:noFill/>
+          <a:ln/>
+        </p:spPr>
+        <p:txBody>
+          <a:bodyPr wrap="square" rtlCol="0" anchor="ctr"/>
+          <a:lstStyle/>
+          <a:p>
+            <a:pPr indent="0" marL="0">
+              <a:buNone/>
+            </a:pPr>
+            <a:r>
+              <a:rPr lang="en-US" sz="1400" b="1" dirty="0">
+                <a:solidFill>
+                  <a:srgbClr val="0F172A"/>
+                </a:solidFill>
+                <a:latin typeface="Cambria" pitchFamily="34" charset="0"/>
+                <a:ea typeface="Cambria" pitchFamily="34" charset="-122"/>
+                <a:cs typeface="Cambria" pitchFamily="34" charset="-120"/>
+              </a:rPr>
+              <a:t>Rs 2,000 Cr</a:t>
+            </a:r>
+            <a:endParaRPr lang="en-US" sz="1400" dirty="0"/>
+          </a:p>
+        </p:txBody>
+      </p:sp>
+      <p:sp>
+        <p:nvSpPr>
+          <p:cNvPr id="13" name="Text 9"/>
+          <p:cNvSpPr/>
+          <p:nvPr/>
+        </p:nvSpPr>
+        <p:spPr>
+          <a:xfrm>
+            <a:off x="6510528" y="4846320"/>
+            <a:ext cx="1508760" cy="365760"/>
+          </a:xfrm>
+          <a:prstGeom prst="rect">
+            <a:avLst/>
+          </a:prstGeom>
+          <a:noFill/>
+          <a:ln/>
+        </p:spPr>
+        <p:txBody>
+          <a:bodyPr wrap="square" rtlCol="0" anchor="ctr"/>
+          <a:lstStyle/>
+          <a:p>
+            <a:pPr indent="0" marL="0">
+              <a:buNone/>
+            </a:pPr>
+            <a:r>
+              <a:rPr lang="en-US" sz="850" dirty="0">
+                <a:solidFill>
+                  <a:srgbClr val="94A3B8"/>
                 </a:solidFill>
                 <a:latin typeface="Calibri" pitchFamily="34" charset="0"/>
                 <a:ea typeface="Calibri" pitchFamily="34" charset="-122"/>
                 <a:cs typeface="Calibri" pitchFamily="34" charset="-120"/>
               </a:rPr>
-              <a:t>Q3 to Q4: ramp to 16 per month, reach break even.</a:t>
-            </a:r>
-            <a:endParaRPr lang="en-US" sz="1250" dirty="0"/>
-          </a:p>
-          <a:p>
-            <a:pPr marL="177800" indent="-177800">
-              <a:spcAft>
-                <a:spcPts val="700"/>
-              </a:spcAft>
-              <a:buSzPct val="100000"/>
-              <a:buChar char="•"/>
-            </a:pPr>
-            <a:r>
-              <a:rPr lang="en-US" sz="1250" dirty="0">
-                <a:solidFill>
-                  <a:srgbClr val="334155"/>
+              <a:t>whole industry</a:t>
+            </a:r>
+            <a:endParaRPr lang="en-US" sz="850" dirty="0"/>
+          </a:p>
+        </p:txBody>
+      </p:sp>
+      <p:sp>
+        <p:nvSpPr>
+          <p:cNvPr id="14" name="Shape 10"/>
+          <p:cNvSpPr/>
+          <p:nvPr/>
+        </p:nvSpPr>
+        <p:spPr>
+          <a:xfrm>
+            <a:off x="8211312" y="4160520"/>
+            <a:ext cx="1691640" cy="1143000"/>
+          </a:xfrm>
+          <a:prstGeom prst="roundRect">
+            <a:avLst>
+              <a:gd name="adj" fmla="val 4800"/>
+            </a:avLst>
+          </a:prstGeom>
+          <a:solidFill>
+            <a:srgbClr val="F5F8FB"/>
+          </a:solidFill>
+          <a:ln w="12700">
+            <a:solidFill>
+              <a:srgbClr val="E2E8F0"/>
+            </a:solidFill>
+            <a:prstDash val="solid"/>
+          </a:ln>
+        </p:spPr>
+      </p:sp>
+      <p:sp>
+        <p:nvSpPr>
+          <p:cNvPr id="15" name="Text 11"/>
+          <p:cNvSpPr/>
+          <p:nvPr/>
+        </p:nvSpPr>
+        <p:spPr>
+          <a:xfrm>
+            <a:off x="8321040" y="4251960"/>
+            <a:ext cx="1463040" cy="228600"/>
+          </a:xfrm>
+          <a:prstGeom prst="rect">
+            <a:avLst/>
+          </a:prstGeom>
+          <a:noFill/>
+          <a:ln/>
+        </p:spPr>
+        <p:txBody>
+          <a:bodyPr wrap="square" rtlCol="0" anchor="ctr"/>
+          <a:lstStyle/>
+          <a:p>
+            <a:pPr indent="0" marL="0">
+              <a:buNone/>
+            </a:pPr>
+            <a:r>
+              <a:rPr lang="en-US" sz="1050" dirty="0">
+                <a:solidFill>
+                  <a:srgbClr val="64748B"/>
                 </a:solidFill>
                 <a:latin typeface="Calibri" pitchFamily="34" charset="0"/>
                 <a:ea typeface="Calibri" pitchFamily="34" charset="-122"/>
                 <a:cs typeface="Calibri" pitchFamily="34" charset="-120"/>
               </a:rPr>
-              <a:t>FY28: full year of BLR, surveillance annuity, profitability.</a:t>
-            </a:r>
-            <a:endParaRPr lang="en-US" sz="1250" dirty="0"/>
-          </a:p>
-        </p:txBody>
-      </p:sp>
-      <p:sp>
-        <p:nvSpPr>
-          <p:cNvPr id="7" name="Text 5"/>
-          <p:cNvSpPr/>
-          <p:nvPr/>
-        </p:nvSpPr>
-        <p:spPr>
-          <a:xfrm>
-            <a:off x="566928" y="4160520"/>
-            <a:ext cx="5486400" cy="274320"/>
+              <a:t>SAM</a:t>
+            </a:r>
+            <a:endParaRPr lang="en-US" sz="1050" dirty="0"/>
+          </a:p>
+        </p:txBody>
+      </p:sp>
+      <p:sp>
+        <p:nvSpPr>
+          <p:cNvPr id="16" name="Text 12"/>
+          <p:cNvSpPr/>
+          <p:nvPr/>
+        </p:nvSpPr>
+        <p:spPr>
+          <a:xfrm>
+            <a:off x="8321040" y="4480560"/>
+            <a:ext cx="1463040" cy="320040"/>
           </a:xfrm>
           <a:prstGeom prst="rect">
             <a:avLst/>
@@ -4158,305 +6110,237 @@
               <a:buNone/>
             </a:pPr>
             <a:r>
-              <a:rPr lang="en-US" sz="1300" b="1" dirty="0">
-                <a:solidFill>
-                  <a:srgbClr val="2B5CC4"/>
+              <a:rPr lang="en-US" sz="1400" b="1" dirty="0">
+                <a:solidFill>
+                  <a:srgbClr val="0F172A"/>
+                </a:solidFill>
+                <a:latin typeface="Cambria" pitchFamily="34" charset="0"/>
+                <a:ea typeface="Cambria" pitchFamily="34" charset="-122"/>
+                <a:cs typeface="Cambria" pitchFamily="34" charset="-120"/>
+              </a:rPr>
+              <a:t>Rs 500 Cr</a:t>
+            </a:r>
+            <a:endParaRPr lang="en-US" sz="1400" dirty="0"/>
+          </a:p>
+        </p:txBody>
+      </p:sp>
+      <p:sp>
+        <p:nvSpPr>
+          <p:cNvPr id="17" name="Text 13"/>
+          <p:cNvSpPr/>
+          <p:nvPr/>
+        </p:nvSpPr>
+        <p:spPr>
+          <a:xfrm>
+            <a:off x="8321040" y="4846320"/>
+            <a:ext cx="1508760" cy="365760"/>
+          </a:xfrm>
+          <a:prstGeom prst="rect">
+            <a:avLst/>
+          </a:prstGeom>
+          <a:noFill/>
+          <a:ln/>
+        </p:spPr>
+        <p:txBody>
+          <a:bodyPr wrap="square" rtlCol="0" anchor="ctr"/>
+          <a:lstStyle/>
+          <a:p>
+            <a:pPr indent="0" marL="0">
+              <a:buNone/>
+            </a:pPr>
+            <a:r>
+              <a:rPr lang="en-US" sz="850" dirty="0">
+                <a:solidFill>
+                  <a:srgbClr val="94A3B8"/>
                 </a:solidFill>
                 <a:latin typeface="Calibri" pitchFamily="34" charset="0"/>
                 <a:ea typeface="Calibri" pitchFamily="34" charset="-122"/>
                 <a:cs typeface="Calibri" pitchFamily="34" charset="-120"/>
               </a:rPr>
-              <a:t>KPIs the Board will see</a:t>
-            </a:r>
-            <a:endParaRPr lang="en-US" sz="1300" dirty="0"/>
-          </a:p>
-        </p:txBody>
-      </p:sp>
-      <p:sp>
-        <p:nvSpPr>
-          <p:cNvPr id="8" name="Text 6"/>
-          <p:cNvSpPr/>
-          <p:nvPr/>
-        </p:nvSpPr>
-        <p:spPr>
-          <a:xfrm>
-            <a:off x="566928" y="4480560"/>
-            <a:ext cx="5394960" cy="1737360"/>
-          </a:xfrm>
-          <a:prstGeom prst="rect">
-            <a:avLst/>
-          </a:prstGeom>
-          <a:noFill/>
-          <a:ln/>
-        </p:spPr>
-        <p:txBody>
-          <a:bodyPr wrap="square" rtlCol="0" anchor="t"/>
-          <a:lstStyle/>
-          <a:p>
-            <a:pPr marL="177800" indent="-177800">
-              <a:spcAft>
-                <a:spcPts val="700"/>
-              </a:spcAft>
-              <a:buSzPct val="100000"/>
-              <a:buChar char="•"/>
-            </a:pPr>
-            <a:r>
-              <a:rPr lang="en-US" sz="1250" dirty="0">
-                <a:solidFill>
-                  <a:srgbClr val="334155"/>
+              <a:t>Rs 100 Cr+ BLR</a:t>
+            </a:r>
+            <a:endParaRPr lang="en-US" sz="850" dirty="0"/>
+          </a:p>
+        </p:txBody>
+      </p:sp>
+      <p:sp>
+        <p:nvSpPr>
+          <p:cNvPr id="18" name="Shape 14"/>
+          <p:cNvSpPr/>
+          <p:nvPr/>
+        </p:nvSpPr>
+        <p:spPr>
+          <a:xfrm>
+            <a:off x="10021824" y="4160520"/>
+            <a:ext cx="1691640" cy="1143000"/>
+          </a:xfrm>
+          <a:prstGeom prst="roundRect">
+            <a:avLst>
+              <a:gd name="adj" fmla="val 4800"/>
+            </a:avLst>
+          </a:prstGeom>
+          <a:solidFill>
+            <a:srgbClr val="F5F8FB"/>
+          </a:solidFill>
+          <a:ln w="12700">
+            <a:solidFill>
+              <a:srgbClr val="E2E8F0"/>
+            </a:solidFill>
+            <a:prstDash val="solid"/>
+          </a:ln>
+        </p:spPr>
+      </p:sp>
+      <p:sp>
+        <p:nvSpPr>
+          <p:cNvPr id="19" name="Text 15"/>
+          <p:cNvSpPr/>
+          <p:nvPr/>
+        </p:nvSpPr>
+        <p:spPr>
+          <a:xfrm>
+            <a:off x="10131552" y="4251960"/>
+            <a:ext cx="1463040" cy="228600"/>
+          </a:xfrm>
+          <a:prstGeom prst="rect">
+            <a:avLst/>
+          </a:prstGeom>
+          <a:noFill/>
+          <a:ln/>
+        </p:spPr>
+        <p:txBody>
+          <a:bodyPr wrap="square" rtlCol="0" anchor="ctr"/>
+          <a:lstStyle/>
+          <a:p>
+            <a:pPr indent="0" marL="0">
+              <a:buNone/>
+            </a:pPr>
+            <a:r>
+              <a:rPr lang="en-US" sz="1050" dirty="0">
+                <a:solidFill>
+                  <a:srgbClr val="64748B"/>
                 </a:solidFill>
                 <a:latin typeface="Calibri" pitchFamily="34" charset="0"/>
                 <a:ea typeface="Calibri" pitchFamily="34" charset="-122"/>
                 <a:cs typeface="Calibri" pitchFamily="34" charset="-120"/>
               </a:rPr>
-              <a:t>Mandates per month and cumulative rated debt.</a:t>
-            </a:r>
-            <a:endParaRPr lang="en-US" sz="1250" dirty="0"/>
-          </a:p>
-          <a:p>
-            <a:pPr marL="177800" indent="-177800">
-              <a:spcAft>
-                <a:spcPts val="700"/>
-              </a:spcAft>
-              <a:buSzPct val="100000"/>
-              <a:buChar char="•"/>
-            </a:pPr>
-            <a:r>
-              <a:rPr lang="en-US" sz="1250" dirty="0">
-                <a:solidFill>
-                  <a:srgbClr val="334155"/>
+              <a:t>SOM FY28</a:t>
+            </a:r>
+            <a:endParaRPr lang="en-US" sz="1050" dirty="0"/>
+          </a:p>
+        </p:txBody>
+      </p:sp>
+      <p:sp>
+        <p:nvSpPr>
+          <p:cNvPr id="20" name="Text 16"/>
+          <p:cNvSpPr/>
+          <p:nvPr/>
+        </p:nvSpPr>
+        <p:spPr>
+          <a:xfrm>
+            <a:off x="10131552" y="4480560"/>
+            <a:ext cx="1463040" cy="320040"/>
+          </a:xfrm>
+          <a:prstGeom prst="rect">
+            <a:avLst/>
+          </a:prstGeom>
+          <a:noFill/>
+          <a:ln/>
+        </p:spPr>
+        <p:txBody>
+          <a:bodyPr wrap="square" rtlCol="0" anchor="ctr"/>
+          <a:lstStyle/>
+          <a:p>
+            <a:pPr indent="0" marL="0">
+              <a:buNone/>
+            </a:pPr>
+            <a:r>
+              <a:rPr lang="en-US" sz="1400" b="1" dirty="0">
+                <a:solidFill>
+                  <a:srgbClr val="0F172A"/>
+                </a:solidFill>
+                <a:latin typeface="Cambria" pitchFamily="34" charset="0"/>
+                <a:ea typeface="Cambria" pitchFamily="34" charset="-122"/>
+                <a:cs typeface="Cambria" pitchFamily="34" charset="-120"/>
+              </a:rPr>
+              <a:t>Rs 8 Cr</a:t>
+            </a:r>
+            <a:endParaRPr lang="en-US" sz="1400" dirty="0"/>
+          </a:p>
+        </p:txBody>
+      </p:sp>
+      <p:sp>
+        <p:nvSpPr>
+          <p:cNvPr id="21" name="Text 17"/>
+          <p:cNvSpPr/>
+          <p:nvPr/>
+        </p:nvSpPr>
+        <p:spPr>
+          <a:xfrm>
+            <a:off x="10131552" y="4846320"/>
+            <a:ext cx="1508760" cy="365760"/>
+          </a:xfrm>
+          <a:prstGeom prst="rect">
+            <a:avLst/>
+          </a:prstGeom>
+          <a:noFill/>
+          <a:ln/>
+        </p:spPr>
+        <p:txBody>
+          <a:bodyPr wrap="square" rtlCol="0" anchor="ctr"/>
+          <a:lstStyle/>
+          <a:p>
+            <a:pPr indent="0" marL="0">
+              <a:buNone/>
+            </a:pPr>
+            <a:r>
+              <a:rPr lang="en-US" sz="850" dirty="0">
+                <a:solidFill>
+                  <a:srgbClr val="94A3B8"/>
                 </a:solidFill>
                 <a:latin typeface="Calibri" pitchFamily="34" charset="0"/>
                 <a:ea typeface="Calibri" pitchFamily="34" charset="-122"/>
                 <a:cs typeface="Calibri" pitchFamily="34" charset="-120"/>
               </a:rPr>
-              <a:t>Ratings share of income, revenue versus plan.</a:t>
-            </a:r>
-            <a:endParaRPr lang="en-US" sz="1250" dirty="0"/>
-          </a:p>
-          <a:p>
-            <a:pPr marL="177800" indent="-177800">
-              <a:spcAft>
-                <a:spcPts val="700"/>
-              </a:spcAft>
-              <a:buSzPct val="100000"/>
-              <a:buChar char="•"/>
-            </a:pPr>
-            <a:r>
-              <a:rPr lang="en-US" sz="1250" dirty="0">
-                <a:solidFill>
-                  <a:srgbClr val="334155"/>
+              <a:t>0.4%, to ~0.8% by FY30</a:t>
+            </a:r>
+            <a:endParaRPr lang="en-US" sz="850" dirty="0"/>
+          </a:p>
+        </p:txBody>
+      </p:sp>
+      <p:sp>
+        <p:nvSpPr>
+          <p:cNvPr id="22" name="Text 18"/>
+          <p:cNvSpPr/>
+          <p:nvPr/>
+        </p:nvSpPr>
+        <p:spPr>
+          <a:xfrm>
+            <a:off x="566928" y="6446520"/>
+            <a:ext cx="11064240" cy="301752"/>
+          </a:xfrm>
+          <a:prstGeom prst="rect">
+            <a:avLst/>
+          </a:prstGeom>
+          <a:noFill/>
+          <a:ln/>
+        </p:spPr>
+        <p:txBody>
+          <a:bodyPr wrap="square" rtlCol="0" anchor="ctr"/>
+          <a:lstStyle/>
+          <a:p>
+            <a:pPr indent="0" marL="0">
+              <a:buNone/>
+            </a:pPr>
+            <a:r>
+              <a:rPr lang="en-US" sz="900" i="1" dirty="0">
+                <a:solidFill>
+                  <a:srgbClr val="94A3B8"/>
                 </a:solidFill>
                 <a:latin typeface="Calibri" pitchFamily="34" charset="0"/>
                 <a:ea typeface="Calibri" pitchFamily="34" charset="-122"/>
                 <a:cs typeface="Calibri" pitchFamily="34" charset="-120"/>
               </a:rPr>
-              <a:t>Cash position and net worth headroom.</a:t>
-            </a:r>
-            <a:endParaRPr lang="en-US" sz="1250" dirty="0"/>
-          </a:p>
-        </p:txBody>
-      </p:sp>
-      <p:sp>
-        <p:nvSpPr>
-          <p:cNvPr id="9" name="Text 7"/>
-          <p:cNvSpPr/>
-          <p:nvPr/>
-        </p:nvSpPr>
-        <p:spPr>
-          <a:xfrm>
-            <a:off x="6309360" y="1417320"/>
-            <a:ext cx="5486400" cy="274320"/>
-          </a:xfrm>
-          <a:prstGeom prst="rect">
-            <a:avLst/>
-          </a:prstGeom>
-          <a:noFill/>
-          <a:ln/>
-        </p:spPr>
-        <p:txBody>
-          <a:bodyPr wrap="square" rtlCol="0" anchor="ctr"/>
-          <a:lstStyle/>
-          <a:p>
-            <a:pPr indent="0" marL="0">
-              <a:buNone/>
-            </a:pPr>
-            <a:r>
-              <a:rPr lang="en-US" sz="1300" b="1" dirty="0">
-                <a:solidFill>
-                  <a:srgbClr val="2B5CC4"/>
-                </a:solidFill>
-                <a:latin typeface="Calibri" pitchFamily="34" charset="0"/>
-                <a:ea typeface="Calibri" pitchFamily="34" charset="-122"/>
-                <a:cs typeface="Calibri" pitchFamily="34" charset="-120"/>
-              </a:rPr>
-              <a:t>Key risks and mitigations</a:t>
-            </a:r>
-            <a:endParaRPr lang="en-US" sz="1300" dirty="0"/>
-          </a:p>
-        </p:txBody>
-      </p:sp>
-      <p:sp>
-        <p:nvSpPr>
-          <p:cNvPr id="10" name="Text 8"/>
-          <p:cNvSpPr/>
-          <p:nvPr/>
-        </p:nvSpPr>
-        <p:spPr>
-          <a:xfrm>
-            <a:off x="6309360" y="1737360"/>
-            <a:ext cx="5486400" cy="4480560"/>
-          </a:xfrm>
-          <a:prstGeom prst="rect">
-            <a:avLst/>
-          </a:prstGeom>
-          <a:noFill/>
-          <a:ln/>
-        </p:spPr>
-        <p:txBody>
-          <a:bodyPr wrap="square" rtlCol="0" anchor="t"/>
-          <a:lstStyle/>
-          <a:p>
-            <a:pPr marL="177800" indent="-177800">
-              <a:spcAft>
-                <a:spcPts val="700"/>
-              </a:spcAft>
-              <a:buSzPct val="100000"/>
-              <a:buChar char="•"/>
-            </a:pPr>
-            <a:r>
-              <a:rPr lang="en-US" sz="1250" dirty="0">
-                <a:solidFill>
-                  <a:srgbClr val="334155"/>
-                </a:solidFill>
-                <a:latin typeface="Calibri" pitchFamily="34" charset="0"/>
-                <a:ea typeface="Calibri" pitchFamily="34" charset="-122"/>
-                <a:cs typeface="Calibri" pitchFamily="34" charset="-120"/>
-              </a:rPr>
-              <a:t>BLR licence delay: cost trigger, stagger the second hire, freeze discretionary spend.</a:t>
-            </a:r>
-            <a:endParaRPr lang="en-US" sz="1250" dirty="0"/>
-          </a:p>
-          <a:p>
-            <a:pPr marL="177800" indent="-177800">
-              <a:spcAft>
-                <a:spcPts val="700"/>
-              </a:spcAft>
-              <a:buSzPct val="100000"/>
-              <a:buChar char="•"/>
-            </a:pPr>
-            <a:r>
-              <a:rPr lang="en-US" sz="1250" dirty="0">
-                <a:solidFill>
-                  <a:srgbClr val="334155"/>
-                </a:solidFill>
-                <a:latin typeface="Calibri" pitchFamily="34" charset="0"/>
-                <a:ea typeface="Calibri" pitchFamily="34" charset="-122"/>
-                <a:cs typeface="Calibri" pitchFamily="34" charset="-120"/>
-              </a:rPr>
-              <a:t>BD ramp shortfall: disciplined pipeline, phased monthly targets.</a:t>
-            </a:r>
-            <a:endParaRPr lang="en-US" sz="1250" dirty="0"/>
-          </a:p>
-          <a:p>
-            <a:pPr marL="177800" indent="-177800">
-              <a:spcAft>
-                <a:spcPts val="700"/>
-              </a:spcAft>
-              <a:buSzPct val="100000"/>
-              <a:buChar char="•"/>
-            </a:pPr>
-            <a:r>
-              <a:rPr lang="en-US" sz="1250" dirty="0">
-                <a:solidFill>
-                  <a:srgbClr val="334155"/>
-                </a:solidFill>
-                <a:latin typeface="Calibri" pitchFamily="34" charset="0"/>
-                <a:ea typeface="Calibri" pitchFamily="34" charset="-122"/>
-                <a:cs typeface="Calibri" pitchFamily="34" charset="-120"/>
-              </a:rPr>
-              <a:t>Competition from incumbents: price, service and second rating niche.</a:t>
-            </a:r>
-            <a:endParaRPr lang="en-US" sz="1250" dirty="0"/>
-          </a:p>
-          <a:p>
-            <a:pPr marL="177800" indent="-177800">
-              <a:spcAft>
-                <a:spcPts val="700"/>
-              </a:spcAft>
-              <a:buSzPct val="100000"/>
-              <a:buChar char="•"/>
-            </a:pPr>
-            <a:r>
-              <a:rPr lang="en-US" sz="1250" dirty="0">
-                <a:solidFill>
-                  <a:srgbClr val="334155"/>
-                </a:solidFill>
-                <a:latin typeface="Calibri" pitchFamily="34" charset="0"/>
-                <a:ea typeface="Calibri" pitchFamily="34" charset="-122"/>
-                <a:cs typeface="Calibri" pitchFamily="34" charset="-120"/>
-              </a:rPr>
-              <a:t>Rating quality or compliance failure: independent rating committee and strong process. Brickwork lost its licence and most of its revenue to lapses, rating revenue fell from about Rs 48.5 Cr to about Rs 5 Cr.</a:t>
-            </a:r>
-            <a:endParaRPr lang="en-US" sz="1250" dirty="0"/>
-          </a:p>
-          <a:p>
-            <a:pPr marL="177800" indent="-177800">
-              <a:spcAft>
-                <a:spcPts val="700"/>
-              </a:spcAft>
-              <a:buSzPct val="100000"/>
-              <a:buChar char="•"/>
-            </a:pPr>
-            <a:r>
-              <a:rPr lang="en-US" sz="1250" dirty="0">
-                <a:solidFill>
-                  <a:srgbClr val="334155"/>
-                </a:solidFill>
-                <a:latin typeface="Calibri" pitchFamily="34" charset="0"/>
-                <a:ea typeface="Calibri" pitchFamily="34" charset="-122"/>
-                <a:cs typeface="Calibri" pitchFamily="34" charset="-120"/>
-              </a:rPr>
-              <a:t>Client concentration: keep no single issuer above 10% of revenue.</a:t>
-            </a:r>
-            <a:endParaRPr lang="en-US" sz="1250" dirty="0"/>
-          </a:p>
-        </p:txBody>
-      </p:sp>
-      <p:sp>
-        <p:nvSpPr>
-          <p:cNvPr id="11" name="Text 9"/>
-          <p:cNvSpPr/>
-          <p:nvPr/>
-        </p:nvSpPr>
-        <p:spPr>
-          <a:xfrm>
-            <a:off x="566928" y="6437376"/>
-            <a:ext cx="11064240" cy="310896"/>
-          </a:xfrm>
-          <a:prstGeom prst="rect">
-            <a:avLst/>
-          </a:prstGeom>
-          <a:noFill/>
-          <a:ln/>
-        </p:spPr>
-        <p:txBody>
-          <a:bodyPr wrap="square" rtlCol="0" anchor="ctr"/>
-          <a:lstStyle/>
-          <a:p>
-            <a:pPr indent="0" marL="0">
-              <a:buNone/>
-            </a:pPr>
-            <a:r>
-              <a:rPr lang="en-US" sz="900" i="1" dirty="0">
-                <a:solidFill>
-                  <a:srgbClr val="94A3B8"/>
-                </a:solidFill>
-                <a:latin typeface="Calibri" pitchFamily="34" charset="0"/>
-                <a:ea typeface="Calibri" pitchFamily="34" charset="-122"/>
-                <a:cs typeface="Calibri" pitchFamily="34" charset="-120"/>
-              </a:rPr>
-              <a:t>Source: Internal [1]. Brickwork history, brickworkratings.com [9].</a:t>
+              <a:t>Source: peer figures from official disclosures, CRISIL [3], CARE [5], India Ratings [6], Infomerics [7], Acuite [8]. ACER, Internal [1] and plan [2]. TAM and SAM are estimates.</a:t>
             </a:r>
             <a:endParaRPr lang="en-US" sz="900" dirty="0"/>
           </a:p>
@@ -4566,7 +6450,7 @@
                 <a:ea typeface="Calibri" pitchFamily="34" charset="-122"/>
                 <a:cs typeface="Calibri" pitchFamily="34" charset="-120"/>
               </a:rPr>
-              <a:t>RECOMMENDATION</a:t>
+              <a:t>EXECUTION</a:t>
             </a:r>
             <a:endParaRPr lang="en-US" sz="1100" dirty="0"/>
           </a:p>
@@ -4597,7 +6481,7 @@
               <a:buNone/>
             </a:pPr>
             <a:r>
-              <a:rPr lang="en-US" sz="3000" b="1" dirty="0">
+              <a:rPr lang="en-US" sz="2900" b="1" dirty="0">
                 <a:solidFill>
                   <a:srgbClr val="0F172A"/>
                 </a:solidFill>
@@ -4605,9 +6489,9 @@
                 <a:ea typeface="Cambria" pitchFamily="34" charset="-122"/>
                 <a:cs typeface="Cambria" pitchFamily="34" charset="-120"/>
               </a:rPr>
-              <a:t>The ask, and the market behind it</a:t>
-            </a:r>
-            <a:endParaRPr lang="en-US" sz="3000" dirty="0"/>
+              <a:t>Milestones, KPIs and risks</a:t>
+            </a:r>
+            <a:endParaRPr lang="en-US" sz="2900" dirty="0"/>
           </a:p>
         </p:txBody>
       </p:sp>
@@ -4619,7 +6503,7 @@
         </p:nvSpPr>
         <p:spPr>
           <a:xfrm>
-            <a:off x="566928" y="1371600"/>
+            <a:off x="566928" y="1417320"/>
             <a:ext cx="5486400" cy="274320"/>
           </a:xfrm>
           <a:prstGeom prst="rect">
@@ -4644,7 +6528,7 @@
                 <a:ea typeface="Calibri" pitchFamily="34" charset="-122"/>
                 <a:cs typeface="Calibri" pitchFamily="34" charset="-120"/>
               </a:rPr>
-              <a:t>The Board is asked to approve</a:t>
+              <a:t>Milestones (base case)</a:t>
             </a:r>
             <a:endParaRPr lang="en-US" sz="1300" dirty="0"/>
           </a:p>
@@ -4658,8 +6542,8 @@
         </p:nvSpPr>
         <p:spPr>
           <a:xfrm>
-            <a:off x="566928" y="1691640"/>
-            <a:ext cx="5486400" cy="2651760"/>
+            <a:off x="566928" y="1737360"/>
+            <a:ext cx="5394960" cy="2286000"/>
           </a:xfrm>
           <a:prstGeom prst="rect">
             <a:avLst/>
@@ -4679,7 +6563,7 @@
               <a:buChar char="•"/>
             </a:pPr>
             <a:r>
-              <a:rPr lang="en-US" sz="1300" dirty="0">
+              <a:rPr lang="en-US" sz="1250" dirty="0">
                 <a:solidFill>
                   <a:srgbClr val="334155"/>
                 </a:solidFill>
@@ -4687,9 +6571,9 @@
                 <a:ea typeface="Calibri" pitchFamily="34" charset="-122"/>
                 <a:cs typeface="Calibri" pitchFamily="34" charset="-120"/>
               </a:rPr>
-              <a:t>The FY27 operating budget of Rs 5.24 Cr, including Rs 0.64 Cr for the two new hires.</a:t>
-            </a:r>
-            <a:endParaRPr lang="en-US" sz="1300" dirty="0"/>
+              <a:t>Now: SEBI registered, two hires and four BDs onboarding.</a:t>
+            </a:r>
+            <a:endParaRPr lang="en-US" sz="1250" dirty="0"/>
           </a:p>
           <a:p>
             <a:pPr marL="177800" indent="-177800">
@@ -4700,7 +6584,7 @@
               <a:buChar char="•"/>
             </a:pPr>
             <a:r>
-              <a:rPr lang="en-US" sz="1300" dirty="0">
+              <a:rPr lang="en-US" sz="1250" dirty="0">
                 <a:solidFill>
                   <a:srgbClr val="334155"/>
                 </a:solidFill>
@@ -4708,9 +6592,9 @@
                 <a:ea typeface="Calibri" pitchFamily="34" charset="-122"/>
                 <a:cs typeface="Calibri" pitchFamily="34" charset="-120"/>
               </a:rPr>
-              <a:t>The headcount plan: two senior hires plus four BDs.</a:t>
-            </a:r>
-            <a:endParaRPr lang="en-US" sz="1300" dirty="0"/>
+              <a:t>Q2: pursue RBI ECAI accreditation, build the BD pipeline.</a:t>
+            </a:r>
+            <a:endParaRPr lang="en-US" sz="1250" dirty="0"/>
           </a:p>
           <a:p>
             <a:pPr marL="177800" indent="-177800">
@@ -4721,7 +6605,7 @@
               <a:buChar char="•"/>
             </a:pPr>
             <a:r>
-              <a:rPr lang="en-US" sz="1300" dirty="0">
+              <a:rPr lang="en-US" sz="1250" dirty="0">
                 <a:solidFill>
                   <a:srgbClr val="334155"/>
                 </a:solidFill>
@@ -4729,9 +6613,9 @@
                 <a:ea typeface="Calibri" pitchFamily="34" charset="-122"/>
                 <a:cs typeface="Calibri" pitchFamily="34" charset="-120"/>
               </a:rPr>
-              <a:t>The base case, BLR live by 1 October at 16 cases per month.</a:t>
-            </a:r>
-            <a:endParaRPr lang="en-US" sz="1300" dirty="0"/>
+              <a:t>1 Oct: BLR live, first mandates.</a:t>
+            </a:r>
+            <a:endParaRPr lang="en-US" sz="1250" dirty="0"/>
           </a:p>
           <a:p>
             <a:pPr marL="177800" indent="-177800">
@@ -4742,7 +6626,7 @@
               <a:buChar char="•"/>
             </a:pPr>
             <a:r>
-              <a:rPr lang="en-US" sz="1300" dirty="0">
+              <a:rPr lang="en-US" sz="1250" dirty="0">
                 <a:solidFill>
                   <a:srgbClr val="334155"/>
                 </a:solidFill>
@@ -4750,88 +6634,43 @@
                 <a:ea typeface="Calibri" pitchFamily="34" charset="-122"/>
                 <a:cs typeface="Calibri" pitchFamily="34" charset="-120"/>
               </a:rPr>
-              <a:t>Noting that the plan is fully funded without touching the Rs 25 Cr net worth, and the cost trigger applies if BLR slips past January.</a:t>
-            </a:r>
-            <a:endParaRPr lang="en-US" sz="1300" dirty="0"/>
-          </a:p>
-        </p:txBody>
-      </p:sp>
-      <p:sp>
-        <p:nvSpPr>
-          <p:cNvPr id="7" name="Text 5"/>
-          <p:cNvSpPr/>
-          <p:nvPr/>
-        </p:nvSpPr>
-        <p:spPr>
-          <a:xfrm>
-            <a:off x="6400800" y="1371600"/>
-            <a:ext cx="5486400" cy="274320"/>
-          </a:xfrm>
-          <a:prstGeom prst="rect">
-            <a:avLst/>
-          </a:prstGeom>
-          <a:noFill/>
-          <a:ln/>
-        </p:spPr>
-        <p:txBody>
-          <a:bodyPr wrap="square" rtlCol="0" anchor="ctr"/>
-          <a:lstStyle/>
-          <a:p>
-            <a:pPr indent="0" marL="0">
-              <a:buNone/>
-            </a:pPr>
-            <a:r>
-              <a:rPr lang="en-US" sz="1300" b="1" dirty="0">
-                <a:solidFill>
-                  <a:srgbClr val="2B5CC4"/>
+              <a:t>Q3 to Q4: ramp to 16 per month, reach break even.</a:t>
+            </a:r>
+            <a:endParaRPr lang="en-US" sz="1250" dirty="0"/>
+          </a:p>
+          <a:p>
+            <a:pPr marL="177800" indent="-177800">
+              <a:spcAft>
+                <a:spcPts val="700"/>
+              </a:spcAft>
+              <a:buSzPct val="100000"/>
+              <a:buChar char="•"/>
+            </a:pPr>
+            <a:r>
+              <a:rPr lang="en-US" sz="1250" dirty="0">
+                <a:solidFill>
+                  <a:srgbClr val="334155"/>
                 </a:solidFill>
                 <a:latin typeface="Calibri" pitchFamily="34" charset="0"/>
                 <a:ea typeface="Calibri" pitchFamily="34" charset="-122"/>
                 <a:cs typeface="Calibri" pitchFamily="34" charset="-120"/>
               </a:rPr>
-              <a:t>Market opportunity</a:t>
-            </a:r>
-            <a:endParaRPr lang="en-US" sz="1300" dirty="0"/>
-          </a:p>
-        </p:txBody>
-      </p:sp>
-      <p:sp>
-        <p:nvSpPr>
-          <p:cNvPr id="8" name="Shape 6"/>
-          <p:cNvSpPr/>
-          <p:nvPr/>
-        </p:nvSpPr>
-        <p:spPr>
-          <a:xfrm>
-            <a:off x="6400800" y="1737360"/>
-            <a:ext cx="5394960" cy="713232"/>
-          </a:xfrm>
-          <a:prstGeom prst="roundRect">
-            <a:avLst>
-              <a:gd name="adj" fmla="val 7692"/>
-            </a:avLst>
-          </a:prstGeom>
-          <a:solidFill>
-            <a:srgbClr val="F5F8FB"/>
-          </a:solidFill>
-          <a:ln w="12700">
-            <a:solidFill>
-              <a:srgbClr val="E2E8F0"/>
-            </a:solidFill>
-            <a:prstDash val="solid"/>
-          </a:ln>
-        </p:spPr>
-      </p:sp>
-      <p:sp>
-        <p:nvSpPr>
-          <p:cNvPr id="9" name="Text 7"/>
-          <p:cNvSpPr/>
-          <p:nvPr/>
-        </p:nvSpPr>
-        <p:spPr>
-          <a:xfrm>
-            <a:off x="6583680" y="1865376"/>
-            <a:ext cx="3566160" cy="457200"/>
+              <a:t>FY28: full year of BLR, surveillance annuity, profitability.</a:t>
+            </a:r>
+            <a:endParaRPr lang="en-US" sz="1250" dirty="0"/>
+          </a:p>
+        </p:txBody>
+      </p:sp>
+      <p:sp>
+        <p:nvSpPr>
+          <p:cNvPr id="7" name="Text 5"/>
+          <p:cNvSpPr/>
+          <p:nvPr/>
+        </p:nvSpPr>
+        <p:spPr>
+          <a:xfrm>
+            <a:off x="566928" y="4114800"/>
+            <a:ext cx="5486400" cy="274320"/>
           </a:xfrm>
           <a:prstGeom prst="rect">
             <a:avLst/>
@@ -4847,17 +6686,141 @@
               <a:buNone/>
             </a:pPr>
             <a:r>
-              <a:rPr lang="en-US" sz="1200" dirty="0">
-                <a:solidFill>
-                  <a:srgbClr val="64748B"/>
+              <a:rPr lang="en-US" sz="1300" b="1" dirty="0">
+                <a:solidFill>
+                  <a:srgbClr val="2B5CC4"/>
                 </a:solidFill>
                 <a:latin typeface="Calibri" pitchFamily="34" charset="0"/>
                 <a:ea typeface="Calibri" pitchFamily="34" charset="-122"/>
                 <a:cs typeface="Calibri" pitchFamily="34" charset="-120"/>
               </a:rPr>
-              <a:t>TAM, Indian rating industry</a:t>
-            </a:r>
-            <a:endParaRPr lang="en-US" sz="1200" dirty="0"/>
+              <a:t>KPIs the Board will see</a:t>
+            </a:r>
+            <a:endParaRPr lang="en-US" sz="1300" dirty="0"/>
+          </a:p>
+        </p:txBody>
+      </p:sp>
+      <p:sp>
+        <p:nvSpPr>
+          <p:cNvPr id="8" name="Text 6"/>
+          <p:cNvSpPr/>
+          <p:nvPr/>
+        </p:nvSpPr>
+        <p:spPr>
+          <a:xfrm>
+            <a:off x="566928" y="4434840"/>
+            <a:ext cx="5394960" cy="1737360"/>
+          </a:xfrm>
+          <a:prstGeom prst="rect">
+            <a:avLst/>
+          </a:prstGeom>
+          <a:noFill/>
+          <a:ln/>
+        </p:spPr>
+        <p:txBody>
+          <a:bodyPr wrap="square" rtlCol="0" anchor="t"/>
+          <a:lstStyle/>
+          <a:p>
+            <a:pPr marL="177800" indent="-177800">
+              <a:spcAft>
+                <a:spcPts val="700"/>
+              </a:spcAft>
+              <a:buSzPct val="100000"/>
+              <a:buChar char="•"/>
+            </a:pPr>
+            <a:r>
+              <a:rPr lang="en-US" sz="1250" dirty="0">
+                <a:solidFill>
+                  <a:srgbClr val="334155"/>
+                </a:solidFill>
+                <a:latin typeface="Calibri" pitchFamily="34" charset="0"/>
+                <a:ea typeface="Calibri" pitchFamily="34" charset="-122"/>
+                <a:cs typeface="Calibri" pitchFamily="34" charset="-120"/>
+              </a:rPr>
+              <a:t>Mandates per month and cumulative rated debt.</a:t>
+            </a:r>
+            <a:endParaRPr lang="en-US" sz="1250" dirty="0"/>
+          </a:p>
+          <a:p>
+            <a:pPr marL="177800" indent="-177800">
+              <a:spcAft>
+                <a:spcPts val="700"/>
+              </a:spcAft>
+              <a:buSzPct val="100000"/>
+              <a:buChar char="•"/>
+            </a:pPr>
+            <a:r>
+              <a:rPr lang="en-US" sz="1250" dirty="0">
+                <a:solidFill>
+                  <a:srgbClr val="334155"/>
+                </a:solidFill>
+                <a:latin typeface="Calibri" pitchFamily="34" charset="0"/>
+                <a:ea typeface="Calibri" pitchFamily="34" charset="-122"/>
+                <a:cs typeface="Calibri" pitchFamily="34" charset="-120"/>
+              </a:rPr>
+              <a:t>Ratings share of income, revenue versus plan.</a:t>
+            </a:r>
+            <a:endParaRPr lang="en-US" sz="1250" dirty="0"/>
+          </a:p>
+          <a:p>
+            <a:pPr marL="177800" indent="-177800">
+              <a:spcAft>
+                <a:spcPts val="700"/>
+              </a:spcAft>
+              <a:buSzPct val="100000"/>
+              <a:buChar char="•"/>
+            </a:pPr>
+            <a:r>
+              <a:rPr lang="en-US" sz="1250" dirty="0">
+                <a:solidFill>
+                  <a:srgbClr val="334155"/>
+                </a:solidFill>
+                <a:latin typeface="Calibri" pitchFamily="34" charset="0"/>
+                <a:ea typeface="Calibri" pitchFamily="34" charset="-122"/>
+                <a:cs typeface="Calibri" pitchFamily="34" charset="-120"/>
+              </a:rPr>
+              <a:t>Cash position and net worth headroom.</a:t>
+            </a:r>
+            <a:endParaRPr lang="en-US" sz="1250" dirty="0"/>
+          </a:p>
+        </p:txBody>
+      </p:sp>
+      <p:sp>
+        <p:nvSpPr>
+          <p:cNvPr id="9" name="Text 7"/>
+          <p:cNvSpPr/>
+          <p:nvPr/>
+        </p:nvSpPr>
+        <p:spPr>
+          <a:xfrm>
+            <a:off x="6309360" y="1417320"/>
+            <a:ext cx="5486400" cy="274320"/>
+          </a:xfrm>
+          <a:prstGeom prst="rect">
+            <a:avLst/>
+          </a:prstGeom>
+          <a:noFill/>
+          <a:ln/>
+        </p:spPr>
+        <p:txBody>
+          <a:bodyPr wrap="square" rtlCol="0" anchor="ctr"/>
+          <a:lstStyle/>
+          <a:p>
+            <a:pPr indent="0" marL="0">
+              <a:buNone/>
+            </a:pPr>
+            <a:r>
+              <a:rPr lang="en-US" sz="1300" b="1" dirty="0">
+                <a:solidFill>
+                  <a:srgbClr val="2B5CC4"/>
+                </a:solidFill>
+                <a:latin typeface="Calibri" pitchFamily="34" charset="0"/>
+                <a:ea typeface="Calibri" pitchFamily="34" charset="-122"/>
+                <a:cs typeface="Calibri" pitchFamily="34" charset="-120"/>
+              </a:rPr>
+              <a:t>Key risks and mitigations</a:t>
+            </a:r>
+            <a:endParaRPr lang="en-US" sz="1300" dirty="0"/>
           </a:p>
         </p:txBody>
       </p:sp>
@@ -4869,8 +6832,206 @@
         </p:nvSpPr>
         <p:spPr>
           <a:xfrm>
-            <a:off x="10058400" y="1865376"/>
-            <a:ext cx="1645920" cy="457200"/>
+            <a:off x="6309360" y="1737360"/>
+            <a:ext cx="5486400" cy="4480560"/>
+          </a:xfrm>
+          <a:prstGeom prst="rect">
+            <a:avLst/>
+          </a:prstGeom>
+          <a:noFill/>
+          <a:ln/>
+        </p:spPr>
+        <p:txBody>
+          <a:bodyPr wrap="square" rtlCol="0" anchor="t"/>
+          <a:lstStyle/>
+          <a:p>
+            <a:pPr marL="177800" indent="-177800">
+              <a:spcAft>
+                <a:spcPts val="700"/>
+              </a:spcAft>
+              <a:buSzPct val="100000"/>
+              <a:buChar char="•"/>
+            </a:pPr>
+            <a:r>
+              <a:rPr lang="en-US" sz="1250" dirty="0">
+                <a:solidFill>
+                  <a:srgbClr val="334155"/>
+                </a:solidFill>
+                <a:latin typeface="Calibri" pitchFamily="34" charset="0"/>
+                <a:ea typeface="Calibri" pitchFamily="34" charset="-122"/>
+                <a:cs typeface="Calibri" pitchFamily="34" charset="-120"/>
+              </a:rPr>
+              <a:t>BLR licence delay: cost trigger, stagger the second hire, freeze discretionary spend.</a:t>
+            </a:r>
+            <a:endParaRPr lang="en-US" sz="1250" dirty="0"/>
+          </a:p>
+          <a:p>
+            <a:pPr marL="177800" indent="-177800">
+              <a:spcAft>
+                <a:spcPts val="700"/>
+              </a:spcAft>
+              <a:buSzPct val="100000"/>
+              <a:buChar char="•"/>
+            </a:pPr>
+            <a:r>
+              <a:rPr lang="en-US" sz="1250" dirty="0">
+                <a:solidFill>
+                  <a:srgbClr val="334155"/>
+                </a:solidFill>
+                <a:latin typeface="Calibri" pitchFamily="34" charset="0"/>
+                <a:ea typeface="Calibri" pitchFamily="34" charset="-122"/>
+                <a:cs typeface="Calibri" pitchFamily="34" charset="-120"/>
+              </a:rPr>
+              <a:t>BD ramp shortfall: disciplined pipeline, phased monthly targets.</a:t>
+            </a:r>
+            <a:endParaRPr lang="en-US" sz="1250" dirty="0"/>
+          </a:p>
+          <a:p>
+            <a:pPr marL="177800" indent="-177800">
+              <a:spcAft>
+                <a:spcPts val="700"/>
+              </a:spcAft>
+              <a:buSzPct val="100000"/>
+              <a:buChar char="•"/>
+            </a:pPr>
+            <a:r>
+              <a:rPr lang="en-US" sz="1250" dirty="0">
+                <a:solidFill>
+                  <a:srgbClr val="334155"/>
+                </a:solidFill>
+                <a:latin typeface="Calibri" pitchFamily="34" charset="0"/>
+                <a:ea typeface="Calibri" pitchFamily="34" charset="-122"/>
+                <a:cs typeface="Calibri" pitchFamily="34" charset="-120"/>
+              </a:rPr>
+              <a:t>Competition from incumbents: price, service and second rating niche.</a:t>
+            </a:r>
+            <a:endParaRPr lang="en-US" sz="1250" dirty="0"/>
+          </a:p>
+          <a:p>
+            <a:pPr marL="177800" indent="-177800">
+              <a:spcAft>
+                <a:spcPts val="700"/>
+              </a:spcAft>
+              <a:buSzPct val="100000"/>
+              <a:buChar char="•"/>
+            </a:pPr>
+            <a:r>
+              <a:rPr lang="en-US" sz="1250" dirty="0">
+                <a:solidFill>
+                  <a:srgbClr val="334155"/>
+                </a:solidFill>
+                <a:latin typeface="Calibri" pitchFamily="34" charset="0"/>
+                <a:ea typeface="Calibri" pitchFamily="34" charset="-122"/>
+                <a:cs typeface="Calibri" pitchFamily="34" charset="-120"/>
+              </a:rPr>
+              <a:t>Rating quality or compliance failure: independent rating committee and strong process. Brickwork lost its licence and most of its revenue to lapses, rating revenue fell from about Rs 48.5 Cr to about Rs 5 Cr.</a:t>
+            </a:r>
+            <a:endParaRPr lang="en-US" sz="1250" dirty="0"/>
+          </a:p>
+          <a:p>
+            <a:pPr marL="177800" indent="-177800">
+              <a:spcAft>
+                <a:spcPts val="700"/>
+              </a:spcAft>
+              <a:buSzPct val="100000"/>
+              <a:buChar char="•"/>
+            </a:pPr>
+            <a:r>
+              <a:rPr lang="en-US" sz="1250" dirty="0">
+                <a:solidFill>
+                  <a:srgbClr val="334155"/>
+                </a:solidFill>
+                <a:latin typeface="Calibri" pitchFamily="34" charset="0"/>
+                <a:ea typeface="Calibri" pitchFamily="34" charset="-122"/>
+                <a:cs typeface="Calibri" pitchFamily="34" charset="-120"/>
+              </a:rPr>
+              <a:t>Client concentration: keep no single issuer above 10% of revenue.</a:t>
+            </a:r>
+            <a:endParaRPr lang="en-US" sz="1250" dirty="0"/>
+          </a:p>
+        </p:txBody>
+      </p:sp>
+      <p:sp>
+        <p:nvSpPr>
+          <p:cNvPr id="11" name="Text 9"/>
+          <p:cNvSpPr/>
+          <p:nvPr/>
+        </p:nvSpPr>
+        <p:spPr>
+          <a:xfrm>
+            <a:off x="566928" y="6446520"/>
+            <a:ext cx="11064240" cy="301752"/>
+          </a:xfrm>
+          <a:prstGeom prst="rect">
+            <a:avLst/>
+          </a:prstGeom>
+          <a:noFill/>
+          <a:ln/>
+        </p:spPr>
+        <p:txBody>
+          <a:bodyPr wrap="square" rtlCol="0" anchor="ctr"/>
+          <a:lstStyle/>
+          <a:p>
+            <a:pPr indent="0" marL="0">
+              <a:buNone/>
+            </a:pPr>
+            <a:r>
+              <a:rPr lang="en-US" sz="900" i="1" dirty="0">
+                <a:solidFill>
+                  <a:srgbClr val="94A3B8"/>
+                </a:solidFill>
+                <a:latin typeface="Calibri" pitchFamily="34" charset="0"/>
+                <a:ea typeface="Calibri" pitchFamily="34" charset="-122"/>
+                <a:cs typeface="Calibri" pitchFamily="34" charset="-120"/>
+              </a:rPr>
+              <a:t>Source: Internal [1]. Brickwork history, brickworkratings.com [9].</a:t>
+            </a:r>
+            <a:endParaRPr lang="en-US" sz="900" dirty="0"/>
+          </a:p>
+        </p:txBody>
+      </p:sp>
+    </p:spTree>
+  </p:cSld>
+  <p:clrMapOvr>
+    <a:masterClrMapping/>
+  </p:clrMapOvr>
+</p:sld>
+</file>
+
+<file path=ppt/slides/slide12.xml><?xml version="1.0" encoding="utf-8"?>
+<p:sld xmlns:a="http://schemas.openxmlformats.org/drawingml/2006/main" xmlns:r="http://schemas.openxmlformats.org/officeDocument/2006/relationships" xmlns:p="http://schemas.openxmlformats.org/presentationml/2006/main">
+  <p:cSld name="Slide 12">
+    <p:bg>
+      <p:bgPr>
+        <a:solidFill>
+          <a:srgbClr val="FFFFFF"/>
+        </a:solidFill>
+      </p:bgPr>
+    </p:bg>
+    <p:spTree>
+      <p:nvGrpSpPr>
+        <p:cNvPr id="1" name=""/>
+        <p:cNvGrpSpPr/>
+        <p:nvPr/>
+      </p:nvGrpSpPr>
+      <p:grpSpPr>
+        <a:xfrm>
+          <a:off x="0" y="0"/>
+          <a:ext cx="0" cy="0"/>
+          <a:chOff x="0" y="0"/>
+          <a:chExt cx="0" cy="0"/>
+        </a:xfrm>
+      </p:grpSpPr>
+      <p:sp>
+        <p:nvSpPr>
+          <p:cNvPr id="2" name="Text 0"/>
+          <p:cNvSpPr/>
+          <p:nvPr/>
+        </p:nvSpPr>
+        <p:spPr>
+          <a:xfrm>
+            <a:off x="11430000" y="402336"/>
+            <a:ext cx="365760" cy="274320"/>
           </a:xfrm>
           <a:prstGeom prst="rect">
             <a:avLst/>
@@ -4886,7 +7047,85 @@
               <a:buNone/>
             </a:pPr>
             <a:r>
-              <a:rPr lang="en-US" sz="1400" b="1" dirty="0">
+              <a:rPr lang="en-US" sz="1100" b="1" dirty="0">
+                <a:solidFill>
+                  <a:srgbClr val="94A3B8"/>
+                </a:solidFill>
+                <a:latin typeface="Calibri" pitchFamily="34" charset="0"/>
+                <a:ea typeface="Calibri" pitchFamily="34" charset="-122"/>
+                <a:cs typeface="Calibri" pitchFamily="34" charset="-120"/>
+              </a:rPr>
+              <a:t>12</a:t>
+            </a:r>
+            <a:endParaRPr lang="en-US" sz="1100" dirty="0"/>
+          </a:p>
+        </p:txBody>
+      </p:sp>
+      <p:sp>
+        <p:nvSpPr>
+          <p:cNvPr id="3" name="Text 1"/>
+          <p:cNvSpPr/>
+          <p:nvPr/>
+        </p:nvSpPr>
+        <p:spPr>
+          <a:xfrm>
+            <a:off x="566928" y="438912"/>
+            <a:ext cx="10058400" cy="274320"/>
+          </a:xfrm>
+          <a:prstGeom prst="rect">
+            <a:avLst/>
+          </a:prstGeom>
+          <a:noFill/>
+          <a:ln/>
+        </p:spPr>
+        <p:txBody>
+          <a:bodyPr wrap="square" rtlCol="0" anchor="ctr"/>
+          <a:lstStyle/>
+          <a:p>
+            <a:pPr indent="0" marL="0">
+              <a:buNone/>
+            </a:pPr>
+            <a:r>
+              <a:rPr lang="en-US" sz="1100" b="1" spc="200" kern="0" dirty="0">
+                <a:solidFill>
+                  <a:srgbClr val="2B5CC4"/>
+                </a:solidFill>
+                <a:latin typeface="Calibri" pitchFamily="34" charset="0"/>
+                <a:ea typeface="Calibri" pitchFamily="34" charset="-122"/>
+                <a:cs typeface="Calibri" pitchFamily="34" charset="-120"/>
+              </a:rPr>
+              <a:t>RECOMMENDATION</a:t>
+            </a:r>
+            <a:endParaRPr lang="en-US" sz="1100" dirty="0"/>
+          </a:p>
+        </p:txBody>
+      </p:sp>
+      <p:sp>
+        <p:nvSpPr>
+          <p:cNvPr id="4" name="Text 2"/>
+          <p:cNvSpPr/>
+          <p:nvPr/>
+        </p:nvSpPr>
+        <p:spPr>
+          <a:xfrm>
+            <a:off x="566928" y="694944"/>
+            <a:ext cx="11064240" cy="548640"/>
+          </a:xfrm>
+          <a:prstGeom prst="rect">
+            <a:avLst/>
+          </a:prstGeom>
+          <a:noFill/>
+          <a:ln/>
+        </p:spPr>
+        <p:txBody>
+          <a:bodyPr wrap="square" rtlCol="0" anchor="ctr"/>
+          <a:lstStyle/>
+          <a:p>
+            <a:pPr indent="0" marL="0">
+              <a:buNone/>
+            </a:pPr>
+            <a:r>
+              <a:rPr lang="en-US" sz="2900" b="1" dirty="0">
                 <a:solidFill>
                   <a:srgbClr val="0F172A"/>
                 </a:solidFill>
@@ -4894,154 +7133,189 @@
                 <a:ea typeface="Cambria" pitchFamily="34" charset="-122"/>
                 <a:cs typeface="Cambria" pitchFamily="34" charset="-120"/>
               </a:rPr>
-              <a:t>about Rs 2,000 Cr</a:t>
-            </a:r>
-            <a:endParaRPr lang="en-US" sz="1400" dirty="0"/>
-          </a:p>
-        </p:txBody>
-      </p:sp>
-      <p:sp>
-        <p:nvSpPr>
-          <p:cNvPr id="11" name="Shape 9"/>
-          <p:cNvSpPr/>
-          <p:nvPr/>
-        </p:nvSpPr>
-        <p:spPr>
-          <a:xfrm>
-            <a:off x="6400800" y="2578608"/>
-            <a:ext cx="5394960" cy="713232"/>
-          </a:xfrm>
-          <a:prstGeom prst="roundRect">
-            <a:avLst>
-              <a:gd name="adj" fmla="val 7692"/>
-            </a:avLst>
-          </a:prstGeom>
-          <a:solidFill>
-            <a:srgbClr val="F5F8FB"/>
-          </a:solidFill>
-          <a:ln w="12700">
-            <a:solidFill>
-              <a:srgbClr val="E2E8F0"/>
-            </a:solidFill>
-            <a:prstDash val="solid"/>
-          </a:ln>
-        </p:spPr>
-      </p:sp>
-      <p:sp>
-        <p:nvSpPr>
-          <p:cNvPr id="12" name="Text 10"/>
-          <p:cNvSpPr/>
-          <p:nvPr/>
-        </p:nvSpPr>
-        <p:spPr>
-          <a:xfrm>
-            <a:off x="6583680" y="2706624"/>
-            <a:ext cx="3566160" cy="457200"/>
-          </a:xfrm>
-          <a:prstGeom prst="rect">
-            <a:avLst/>
-          </a:prstGeom>
-          <a:noFill/>
-          <a:ln/>
-        </p:spPr>
-        <p:txBody>
-          <a:bodyPr wrap="square" rtlCol="0" anchor="ctr"/>
-          <a:lstStyle/>
-          <a:p>
-            <a:pPr indent="0" marL="0">
-              <a:buNone/>
-            </a:pPr>
-            <a:r>
-              <a:rPr lang="en-US" sz="1200" dirty="0">
-                <a:solidFill>
-                  <a:srgbClr val="64748B"/>
+              <a:t>The ask</a:t>
+            </a:r>
+            <a:endParaRPr lang="en-US" sz="2900" dirty="0"/>
+          </a:p>
+        </p:txBody>
+      </p:sp>
+      <p:sp>
+        <p:nvSpPr>
+          <p:cNvPr id="5" name="Text 3"/>
+          <p:cNvSpPr/>
+          <p:nvPr/>
+        </p:nvSpPr>
+        <p:spPr>
+          <a:xfrm>
+            <a:off x="566928" y="1554480"/>
+            <a:ext cx="10972800" cy="2377440"/>
+          </a:xfrm>
+          <a:prstGeom prst="rect">
+            <a:avLst/>
+          </a:prstGeom>
+          <a:noFill/>
+          <a:ln/>
+        </p:spPr>
+        <p:txBody>
+          <a:bodyPr wrap="square" rtlCol="0" anchor="t"/>
+          <a:lstStyle/>
+          <a:p>
+            <a:pPr marL="177800" indent="-177800">
+              <a:spcAft>
+                <a:spcPts val="700"/>
+              </a:spcAft>
+              <a:buSzPct val="100000"/>
+              <a:buChar char="•"/>
+            </a:pPr>
+            <a:r>
+              <a:rPr lang="en-US" sz="1500" dirty="0">
+                <a:solidFill>
+                  <a:srgbClr val="334155"/>
                 </a:solidFill>
                 <a:latin typeface="Calibri" pitchFamily="34" charset="0"/>
                 <a:ea typeface="Calibri" pitchFamily="34" charset="-122"/>
                 <a:cs typeface="Calibri" pitchFamily="34" charset="-120"/>
               </a:rPr>
-              <a:t>SAM, Rs 100 Cr plus BLR segment</a:t>
-            </a:r>
-            <a:endParaRPr lang="en-US" sz="1200" dirty="0"/>
-          </a:p>
-        </p:txBody>
-      </p:sp>
-      <p:sp>
-        <p:nvSpPr>
-          <p:cNvPr id="13" name="Text 11"/>
-          <p:cNvSpPr/>
-          <p:nvPr/>
-        </p:nvSpPr>
-        <p:spPr>
-          <a:xfrm>
-            <a:off x="10058400" y="2706624"/>
-            <a:ext cx="1645920" cy="457200"/>
-          </a:xfrm>
-          <a:prstGeom prst="rect">
-            <a:avLst/>
-          </a:prstGeom>
-          <a:noFill/>
-          <a:ln/>
-        </p:spPr>
-        <p:txBody>
-          <a:bodyPr wrap="square" rtlCol="0" anchor="ctr"/>
-          <a:lstStyle/>
-          <a:p>
-            <a:pPr algn="r" indent="0" marL="0">
-              <a:buNone/>
-            </a:pPr>
-            <a:r>
-              <a:rPr lang="en-US" sz="1400" b="1" dirty="0">
-                <a:solidFill>
-                  <a:srgbClr val="2B5CC4"/>
+              <a:t>Approve the FY27 operating budget of Rs 5.24 Cr, including Rs 0.64 Cr for the two new hires.</a:t>
+            </a:r>
+            <a:endParaRPr lang="en-US" sz="1500" dirty="0"/>
+          </a:p>
+          <a:p>
+            <a:pPr marL="177800" indent="-177800">
+              <a:spcAft>
+                <a:spcPts val="700"/>
+              </a:spcAft>
+              <a:buSzPct val="100000"/>
+              <a:buChar char="•"/>
+            </a:pPr>
+            <a:r>
+              <a:rPr lang="en-US" sz="1500" dirty="0">
+                <a:solidFill>
+                  <a:srgbClr val="334155"/>
+                </a:solidFill>
+                <a:latin typeface="Calibri" pitchFamily="34" charset="0"/>
+                <a:ea typeface="Calibri" pitchFamily="34" charset="-122"/>
+                <a:cs typeface="Calibri" pitchFamily="34" charset="-120"/>
+              </a:rPr>
+              <a:t>Approve the headcount plan: two senior hires plus four BDs.</a:t>
+            </a:r>
+            <a:endParaRPr lang="en-US" sz="1500" dirty="0"/>
+          </a:p>
+          <a:p>
+            <a:pPr marL="177800" indent="-177800">
+              <a:spcAft>
+                <a:spcPts val="700"/>
+              </a:spcAft>
+              <a:buSzPct val="100000"/>
+              <a:buChar char="•"/>
+            </a:pPr>
+            <a:r>
+              <a:rPr lang="en-US" sz="1500" dirty="0">
+                <a:solidFill>
+                  <a:srgbClr val="334155"/>
+                </a:solidFill>
+                <a:latin typeface="Calibri" pitchFamily="34" charset="0"/>
+                <a:ea typeface="Calibri" pitchFamily="34" charset="-122"/>
+                <a:cs typeface="Calibri" pitchFamily="34" charset="-120"/>
+              </a:rPr>
+              <a:t>Endorse the base case, BLR live by 1 October at 16 cases per month.</a:t>
+            </a:r>
+            <a:endParaRPr lang="en-US" sz="1500" dirty="0"/>
+          </a:p>
+          <a:p>
+            <a:pPr marL="177800" indent="-177800">
+              <a:spcAft>
+                <a:spcPts val="700"/>
+              </a:spcAft>
+              <a:buSzPct val="100000"/>
+              <a:buChar char="•"/>
+            </a:pPr>
+            <a:r>
+              <a:rPr lang="en-US" sz="1500" dirty="0">
+                <a:solidFill>
+                  <a:srgbClr val="334155"/>
+                </a:solidFill>
+                <a:latin typeface="Calibri" pitchFamily="34" charset="0"/>
+                <a:ea typeface="Calibri" pitchFamily="34" charset="-122"/>
+                <a:cs typeface="Calibri" pitchFamily="34" charset="-120"/>
+              </a:rPr>
+              <a:t>Note that the plan is fully funded without touching the Rs 25 Cr net worth, with a cost trigger if BLR slips past January.</a:t>
+            </a:r>
+            <a:endParaRPr lang="en-US" sz="1500" dirty="0"/>
+          </a:p>
+        </p:txBody>
+      </p:sp>
+      <p:sp>
+        <p:nvSpPr>
+          <p:cNvPr id="6" name="Shape 4"/>
+          <p:cNvSpPr/>
+          <p:nvPr/>
+        </p:nvSpPr>
+        <p:spPr>
+          <a:xfrm>
+            <a:off x="566928" y="4206240"/>
+            <a:ext cx="11064240" cy="1371600"/>
+          </a:xfrm>
+          <a:prstGeom prst="roundRect">
+            <a:avLst>
+              <a:gd name="adj" fmla="val 5333"/>
+            </a:avLst>
+          </a:prstGeom>
+          <a:solidFill>
+            <a:srgbClr val="0F172A"/>
+          </a:solidFill>
+          <a:ln/>
+        </p:spPr>
+      </p:sp>
+      <p:sp>
+        <p:nvSpPr>
+          <p:cNvPr id="7" name="Text 5"/>
+          <p:cNvSpPr/>
+          <p:nvPr/>
+        </p:nvSpPr>
+        <p:spPr>
+          <a:xfrm>
+            <a:off x="841248" y="4434840"/>
+            <a:ext cx="10515600" cy="914400"/>
+          </a:xfrm>
+          <a:prstGeom prst="rect">
+            <a:avLst/>
+          </a:prstGeom>
+          <a:noFill/>
+          <a:ln/>
+        </p:spPr>
+        <p:txBody>
+          <a:bodyPr wrap="square" rtlCol="0" anchor="ctr"/>
+          <a:lstStyle/>
+          <a:p>
+            <a:pPr indent="0" marL="0">
+              <a:buNone/>
+            </a:pPr>
+            <a:r>
+              <a:rPr lang="en-US" sz="1700" b="1" dirty="0">
+                <a:solidFill>
+                  <a:srgbClr val="FFFFFF"/>
                 </a:solidFill>
                 <a:latin typeface="Cambria" pitchFamily="34" charset="0"/>
                 <a:ea typeface="Cambria" pitchFamily="34" charset="-122"/>
                 <a:cs typeface="Cambria" pitchFamily="34" charset="-120"/>
               </a:rPr>
-              <a:t>about Rs 500 Cr</a:t>
-            </a:r>
-            <a:endParaRPr lang="en-US" sz="1400" dirty="0"/>
-          </a:p>
-        </p:txBody>
-      </p:sp>
-      <p:sp>
-        <p:nvSpPr>
-          <p:cNvPr id="14" name="Shape 12"/>
-          <p:cNvSpPr/>
-          <p:nvPr/>
-        </p:nvSpPr>
-        <p:spPr>
-          <a:xfrm>
-            <a:off x="6400800" y="3419856"/>
-            <a:ext cx="5394960" cy="713232"/>
-          </a:xfrm>
-          <a:prstGeom prst="roundRect">
-            <a:avLst>
-              <a:gd name="adj" fmla="val 7692"/>
-            </a:avLst>
-          </a:prstGeom>
-          <a:solidFill>
-            <a:srgbClr val="F5F8FB"/>
-          </a:solidFill>
-          <a:ln w="12700">
-            <a:solidFill>
-              <a:srgbClr val="E2E8F0"/>
-            </a:solidFill>
-            <a:prstDash val="solid"/>
-          </a:ln>
-        </p:spPr>
-      </p:sp>
-      <p:sp>
-        <p:nvSpPr>
-          <p:cNvPr id="15" name="Text 13"/>
-          <p:cNvSpPr/>
-          <p:nvPr/>
-        </p:nvSpPr>
-        <p:spPr>
-          <a:xfrm>
-            <a:off x="6583680" y="3547872"/>
-            <a:ext cx="3566160" cy="457200"/>
+              <a:t>Solvency is secure. Operational self sufficiency by FY28 is the goal, and the BLR licence is the one variable that decides the pace.</a:t>
+            </a:r>
+            <a:endParaRPr lang="en-US" sz="1700" dirty="0"/>
+          </a:p>
+        </p:txBody>
+      </p:sp>
+      <p:sp>
+        <p:nvSpPr>
+          <p:cNvPr id="8" name="Text 6"/>
+          <p:cNvSpPr/>
+          <p:nvPr/>
+        </p:nvSpPr>
+        <p:spPr>
+          <a:xfrm>
+            <a:off x="566928" y="6446520"/>
+            <a:ext cx="11064240" cy="301752"/>
           </a:xfrm>
           <a:prstGeom prst="rect">
             <a:avLst/>
@@ -5057,154 +7331,15 @@
               <a:buNone/>
             </a:pPr>
             <a:r>
-              <a:rPr lang="en-US" sz="1200" dirty="0">
-                <a:solidFill>
-                  <a:srgbClr val="64748B"/>
+              <a:rPr lang="en-US" sz="900" i="1" dirty="0">
+                <a:solidFill>
+                  <a:srgbClr val="94A3B8"/>
                 </a:solidFill>
                 <a:latin typeface="Calibri" pitchFamily="34" charset="0"/>
                 <a:ea typeface="Calibri" pitchFamily="34" charset="-122"/>
                 <a:cs typeface="Calibri" pitchFamily="34" charset="-120"/>
               </a:rPr>
-              <a:t>SOM, ACER by FY28</a:t>
-            </a:r>
-            <a:endParaRPr lang="en-US" sz="1200" dirty="0"/>
-          </a:p>
-        </p:txBody>
-      </p:sp>
-      <p:sp>
-        <p:nvSpPr>
-          <p:cNvPr id="16" name="Text 14"/>
-          <p:cNvSpPr/>
-          <p:nvPr/>
-        </p:nvSpPr>
-        <p:spPr>
-          <a:xfrm>
-            <a:off x="10058400" y="3547872"/>
-            <a:ext cx="1645920" cy="457200"/>
-          </a:xfrm>
-          <a:prstGeom prst="rect">
-            <a:avLst/>
-          </a:prstGeom>
-          <a:noFill/>
-          <a:ln/>
-        </p:spPr>
-        <p:txBody>
-          <a:bodyPr wrap="square" rtlCol="0" anchor="ctr"/>
-          <a:lstStyle/>
-          <a:p>
-            <a:pPr algn="r" indent="0" marL="0">
-              <a:buNone/>
-            </a:pPr>
-            <a:r>
-              <a:rPr lang="en-US" sz="1400" b="1" dirty="0">
-                <a:solidFill>
-                  <a:srgbClr val="0F766E"/>
-                </a:solidFill>
-                <a:latin typeface="Cambria" pitchFamily="34" charset="0"/>
-                <a:ea typeface="Cambria" pitchFamily="34" charset="-122"/>
-                <a:cs typeface="Cambria" pitchFamily="34" charset="-120"/>
-              </a:rPr>
-              <a:t>about Rs 8 Cr, 0.4%</a:t>
-            </a:r>
-            <a:endParaRPr lang="en-US" sz="1400" dirty="0"/>
-          </a:p>
-        </p:txBody>
-      </p:sp>
-      <p:sp>
-        <p:nvSpPr>
-          <p:cNvPr id="17" name="Shape 15"/>
-          <p:cNvSpPr/>
-          <p:nvPr/>
-        </p:nvSpPr>
-        <p:spPr>
-          <a:xfrm>
-            <a:off x="566928" y="4663440"/>
-            <a:ext cx="11064240" cy="1234440"/>
-          </a:xfrm>
-          <a:prstGeom prst="roundRect">
-            <a:avLst>
-              <a:gd name="adj" fmla="val 5926"/>
-            </a:avLst>
-          </a:prstGeom>
-          <a:solidFill>
-            <a:srgbClr val="0F172A"/>
-          </a:solidFill>
-          <a:ln/>
-        </p:spPr>
-      </p:sp>
-      <p:sp>
-        <p:nvSpPr>
-          <p:cNvPr id="18" name="Text 16"/>
-          <p:cNvSpPr/>
-          <p:nvPr/>
-        </p:nvSpPr>
-        <p:spPr>
-          <a:xfrm>
-            <a:off x="841248" y="4892040"/>
-            <a:ext cx="10515600" cy="822960"/>
-          </a:xfrm>
-          <a:prstGeom prst="rect">
-            <a:avLst/>
-          </a:prstGeom>
-          <a:noFill/>
-          <a:ln/>
-        </p:spPr>
-        <p:txBody>
-          <a:bodyPr wrap="square" rtlCol="0" anchor="ctr"/>
-          <a:lstStyle/>
-          <a:p>
-            <a:pPr indent="0" marL="0">
-              <a:buNone/>
-            </a:pPr>
-            <a:r>
-              <a:rPr lang="en-US" sz="1600" b="1" dirty="0">
-                <a:solidFill>
-                  <a:srgbClr val="FFFFFF"/>
-                </a:solidFill>
-                <a:latin typeface="Cambria" pitchFamily="34" charset="0"/>
-                <a:ea typeface="Cambria" pitchFamily="34" charset="-122"/>
-                <a:cs typeface="Cambria" pitchFamily="34" charset="-120"/>
-              </a:rPr>
-              <a:t>Solvency is secure. Operational self sufficiency by FY28 is the goal, and the BLR licence is the one variable that decides the pace.</a:t>
-            </a:r>
-            <a:endParaRPr lang="en-US" sz="1600" dirty="0"/>
-          </a:p>
-        </p:txBody>
-      </p:sp>
-      <p:sp>
-        <p:nvSpPr>
-          <p:cNvPr id="19" name="Text 17"/>
-          <p:cNvSpPr/>
-          <p:nvPr/>
-        </p:nvSpPr>
-        <p:spPr>
-          <a:xfrm>
-            <a:off x="566928" y="6437376"/>
-            <a:ext cx="11064240" cy="310896"/>
-          </a:xfrm>
-          <a:prstGeom prst="rect">
-            <a:avLst/>
-          </a:prstGeom>
-          <a:noFill/>
-          <a:ln/>
-        </p:spPr>
-        <p:txBody>
-          <a:bodyPr wrap="square" rtlCol="0" anchor="ctr"/>
-          <a:lstStyle/>
-          <a:p>
-            <a:pPr indent="0" marL="0">
-              <a:buNone/>
-            </a:pPr>
-            <a:r>
-              <a:rPr lang="en-US" sz="900" i="1" dirty="0">
-                <a:solidFill>
-                  <a:srgbClr val="94A3B8"/>
-                </a:solidFill>
-                <a:latin typeface="Calibri" pitchFamily="34" charset="0"/>
-                <a:ea typeface="Calibri" pitchFamily="34" charset="-122"/>
-                <a:cs typeface="Calibri" pitchFamily="34" charset="-120"/>
-              </a:rPr>
-              <a:t>Sources: [1] Internal. [2] Management assumption. [3] crisil.com. [5] careratings.com. [6] indiaratings.co.in. [7] infomerics.com. [8] acuite.in. [9] brickworkratings.com. [10] SEBI CRA Regulations. TAM and SAM are estimates.</a:t>
+              <a:t>Sources: [1] Internal. [2] Management assumption. [3] crisil.com. [5] careratings.com. [6] indiaratings.co.in. [7] infomerics.com. [8] acuite.in. [9] brickworkratings.com. [10] SEBI CRA Regulations.</a:t>
             </a:r>
             <a:endParaRPr lang="en-US" sz="900" dirty="0"/>
           </a:p>
@@ -5345,7 +7480,7 @@
               <a:buNone/>
             </a:pPr>
             <a:r>
-              <a:rPr lang="en-US" sz="3000" b="1" dirty="0">
+              <a:rPr lang="en-US" sz="2900" b="1" dirty="0">
                 <a:solidFill>
                   <a:srgbClr val="0F172A"/>
                 </a:solidFill>
@@ -5355,7 +7490,7 @@
               </a:rPr>
               <a:t>Where we stand today</a:t>
             </a:r>
-            <a:endParaRPr lang="en-US" sz="3000" dirty="0"/>
+            <a:endParaRPr lang="en-US" sz="2900" dirty="0"/>
           </a:p>
         </p:txBody>
       </p:sp>
@@ -5384,7 +7519,7 @@
               <a:buNone/>
             </a:pPr>
             <a:r>
-              <a:rPr lang="en-US" sz="1450" dirty="0">
+              <a:rPr lang="en-US" sz="1400" dirty="0">
                 <a:solidFill>
                   <a:srgbClr val="64748B"/>
                 </a:solidFill>
@@ -5392,9 +7527,9 @@
                 <a:ea typeface="Calibri" pitchFamily="34" charset="-122"/>
                 <a:cs typeface="Calibri" pitchFamily="34" charset="-120"/>
               </a:rPr>
-              <a:t>Financially solvent and capital rich, but the income still comes from reserves, not from operations.</a:t>
-            </a:r>
-            <a:endParaRPr lang="en-US" sz="1450" dirty="0"/>
+              <a:t>Financially solvent and capital rich, but income still comes from reserves, not from operations.</a:t>
+            </a:r>
+            <a:endParaRPr lang="en-US" sz="1400" dirty="0"/>
           </a:p>
         </p:txBody>
       </p:sp>
@@ -6053,7 +8188,7 @@
                 <a:ea typeface="Calibri" pitchFamily="34" charset="-122"/>
                 <a:cs typeface="Calibri" pitchFamily="34" charset="-120"/>
               </a:rPr>
-              <a:t>Operating revenue has just begun to inflect, from Rs 8 L in all of FY26 to Rs 28.5 L in the first quarter of FY27. This plan is about converting that spark into a franchise.</a:t>
+              <a:t>Operating revenue has just begun to inflect, from Rs 8 L in all of FY26 to Rs 28.5 L in the first quarter of FY27.</a:t>
             </a:r>
             <a:endParaRPr lang="en-US" sz="1400" dirty="0"/>
           </a:p>
@@ -6067,8 +8202,8 @@
         </p:nvSpPr>
         <p:spPr>
           <a:xfrm>
-            <a:off x="566928" y="6437376"/>
-            <a:ext cx="11064240" cy="310896"/>
+            <a:off x="566928" y="6446520"/>
+            <a:ext cx="11064240" cy="301752"/>
           </a:xfrm>
           <a:prstGeom prst="rect">
             <a:avLst/>
@@ -6233,7 +8368,7 @@
               <a:buNone/>
             </a:pPr>
             <a:r>
-              <a:rPr lang="en-US" sz="3000" b="1" dirty="0">
+              <a:rPr lang="en-US" sz="2900" b="1" dirty="0">
                 <a:solidFill>
                   <a:srgbClr val="0F172A"/>
                 </a:solidFill>
@@ -6243,7 +8378,7 @@
               </a:rPr>
               <a:t>BLR is the switch, and why a borrower picks us</a:t>
             </a:r>
-            <a:endParaRPr lang="en-US" sz="3000" dirty="0"/>
+            <a:endParaRPr lang="en-US" sz="2900" dirty="0"/>
           </a:p>
         </p:txBody>
       </p:sp>
@@ -6272,7 +8407,7 @@
               <a:buNone/>
             </a:pPr>
             <a:r>
-              <a:rPr lang="en-US" sz="1450" dirty="0">
+              <a:rPr lang="en-US" sz="1400" dirty="0">
                 <a:solidFill>
                   <a:srgbClr val="64748B"/>
                 </a:solidFill>
@@ -6282,7 +8417,7 @@
               </a:rPr>
               <a:t>One regulatory milestone turns idle capital into an operating engine. The wedge against incumbents is real.</a:t>
             </a:r>
-            <a:endParaRPr lang="en-US" sz="1450" dirty="0"/>
+            <a:endParaRPr lang="en-US" sz="1400" dirty="0"/>
           </a:p>
         </p:txBody>
       </p:sp>
@@ -6673,8 +8808,8 @@
         </p:nvSpPr>
         <p:spPr>
           <a:xfrm>
-            <a:off x="566928" y="6437376"/>
-            <a:ext cx="11064240" cy="310896"/>
+            <a:off x="566928" y="6446520"/>
+            <a:ext cx="11064240" cy="301752"/>
           </a:xfrm>
           <a:prstGeom prst="rect">
             <a:avLst/>
@@ -6698,7 +8833,7 @@
                 <a:ea typeface="Calibri" pitchFamily="34" charset="-122"/>
                 <a:cs typeface="Calibri" pitchFamily="34" charset="-120"/>
               </a:rPr>
-              <a:t>Source: Infomerics [7]. Hiring and pricing, Internal [1] and management assumption [2]. Regulatory basis, SEBI and RBI ECAI framework [10].</a:t>
+              <a:t>Source: Infomerics [7]. Hiring and pricing, Internal [1] and assumption [2]. Regulatory basis [10].</a:t>
             </a:r>
             <a:endParaRPr lang="en-US" sz="900" dirty="0"/>
           </a:p>
@@ -6839,7 +8974,7 @@
               <a:buNone/>
             </a:pPr>
             <a:r>
-              <a:rPr lang="en-US" sz="3000" b="1" dirty="0">
+              <a:rPr lang="en-US" sz="2900" b="1" dirty="0">
                 <a:solidFill>
                   <a:srgbClr val="0F172A"/>
                 </a:solidFill>
@@ -6849,7 +8984,7 @@
               </a:rPr>
               <a:t>Unit economics and the scale it builds</a:t>
             </a:r>
-            <a:endParaRPr lang="en-US" sz="3000" dirty="0"/>
+            <a:endParaRPr lang="en-US" sz="2900" dirty="0"/>
           </a:p>
         </p:txBody>
       </p:sp>
@@ -7462,7 +9597,7 @@
                 <a:ea typeface="Calibri" pitchFamily="34" charset="-122"/>
                 <a:cs typeface="Calibri" pitchFamily="34" charset="-120"/>
               </a:rPr>
-              <a:t>Debt rated per month: 16 x Rs 100 Cr = Rs 1,600 Cr. Cumulative rated debt reaches about Rs 9,600 Cr over the six live months in the base case.</a:t>
+              <a:t>16 x Rs 100 Cr = Rs 1,600 Cr of debt rated every month. Cumulative rated debt reaches about Rs 9,600 Cr over the six live months in the base case.</a:t>
             </a:r>
             <a:endParaRPr lang="en-US" sz="1350" dirty="0"/>
           </a:p>
@@ -7476,7 +9611,7 @@
         </p:nvSpPr>
         <p:spPr>
           <a:xfrm>
-            <a:off x="566928" y="4023360"/>
+            <a:off x="566928" y="4069080"/>
             <a:ext cx="2606040" cy="1097280"/>
           </a:xfrm>
           <a:prstGeom prst="roundRect">
@@ -7503,7 +9638,7 @@
         </p:nvSpPr>
         <p:spPr>
           <a:xfrm>
-            <a:off x="713232" y="4133088"/>
+            <a:off x="713232" y="4178808"/>
             <a:ext cx="2313432" cy="274320"/>
           </a:xfrm>
           <a:prstGeom prst="rect">
@@ -7542,7 +9677,7 @@
         </p:nvSpPr>
         <p:spPr>
           <a:xfrm>
-            <a:off x="713232" y="4370832"/>
+            <a:off x="713232" y="4416552"/>
             <a:ext cx="2313432" cy="411480"/>
           </a:xfrm>
           <a:prstGeom prst="rect">
@@ -7581,7 +9716,7 @@
         </p:nvSpPr>
         <p:spPr>
           <a:xfrm>
-            <a:off x="713232" y="4809744"/>
+            <a:off x="713232" y="4855464"/>
             <a:ext cx="2313432" cy="365760"/>
           </a:xfrm>
           <a:prstGeom prst="rect">
@@ -7620,7 +9755,7 @@
         </p:nvSpPr>
         <p:spPr>
           <a:xfrm>
-            <a:off x="3328416" y="4023360"/>
+            <a:off x="3328416" y="4069080"/>
             <a:ext cx="2606040" cy="1097280"/>
           </a:xfrm>
           <a:prstGeom prst="roundRect">
@@ -7647,7 +9782,7 @@
         </p:nvSpPr>
         <p:spPr>
           <a:xfrm>
-            <a:off x="3474720" y="4133088"/>
+            <a:off x="3474720" y="4178808"/>
             <a:ext cx="2313432" cy="274320"/>
           </a:xfrm>
           <a:prstGeom prst="rect">
@@ -7686,7 +9821,7 @@
         </p:nvSpPr>
         <p:spPr>
           <a:xfrm>
-            <a:off x="3474720" y="4370832"/>
+            <a:off x="3474720" y="4416552"/>
             <a:ext cx="2313432" cy="411480"/>
           </a:xfrm>
           <a:prstGeom prst="rect">
@@ -7725,7 +9860,7 @@
         </p:nvSpPr>
         <p:spPr>
           <a:xfrm>
-            <a:off x="3474720" y="4809744"/>
+            <a:off x="3474720" y="4855464"/>
             <a:ext cx="2313432" cy="365760"/>
           </a:xfrm>
           <a:prstGeom prst="rect">
@@ -7780,8 +9915,8 @@
         </p:nvSpPr>
         <p:spPr>
           <a:xfrm>
-            <a:off x="566928" y="6437376"/>
-            <a:ext cx="11064240" cy="310896"/>
+            <a:off x="566928" y="6446520"/>
+            <a:ext cx="11064240" cy="301752"/>
           </a:xfrm>
           <a:prstGeom prst="rect">
             <a:avLst/>
@@ -7946,7 +10081,7 @@
               <a:buNone/>
             </a:pPr>
             <a:r>
-              <a:rPr lang="en-US" sz="3000" b="1" dirty="0">
+              <a:rPr lang="en-US" sz="2900" b="1" dirty="0">
                 <a:solidFill>
                   <a:srgbClr val="0F172A"/>
                 </a:solidFill>
@@ -7956,7 +10091,7 @@
               </a:rPr>
               <a:t>How the year lands, by BLR licence timing</a:t>
             </a:r>
-            <a:endParaRPr lang="en-US" sz="3000" dirty="0"/>
+            <a:endParaRPr lang="en-US" sz="2900" dirty="0"/>
           </a:p>
         </p:txBody>
       </p:sp>
@@ -7985,7 +10120,7 @@
               <a:buNone/>
             </a:pPr>
             <a:r>
-              <a:rPr lang="en-US" sz="1450" dirty="0">
+              <a:rPr lang="en-US" sz="1400" dirty="0">
                 <a:solidFill>
                   <a:srgbClr val="64748B"/>
                 </a:solidFill>
@@ -7995,7 +10130,7 @@
               </a:rPr>
               <a:t>Same cost base of Rs 5.24 Cr and same FD income across all three. Only the licence date changes. S1 is the base case.</a:t>
             </a:r>
-            <a:endParaRPr lang="en-US" sz="1450" dirty="0"/>
+            <a:endParaRPr lang="en-US" sz="1400" dirty="0"/>
           </a:p>
         </p:txBody>
       </p:sp>
@@ -9558,8 +11693,8 @@
         </p:nvSpPr>
         <p:spPr>
           <a:xfrm>
-            <a:off x="566928" y="6437376"/>
-            <a:ext cx="11064240" cy="310896"/>
+            <a:off x="566928" y="6446520"/>
+            <a:ext cx="11064240" cy="301752"/>
           </a:xfrm>
           <a:prstGeom prst="rect">
             <a:avLst/>
@@ -9583,7 +11718,7 @@
                 <a:ea typeface="Calibri" pitchFamily="34" charset="-122"/>
                 <a:cs typeface="Calibri" pitchFamily="34" charset="-120"/>
               </a:rPr>
-              <a:t>Source: FD interest and cost base, Internal run rate [1]. BLR revenue, management assumptions [2]. Flat 16 cases per month from launch, initial fees only in FY27.</a:t>
+              <a:t>Source: FD interest and cost base, Internal run rate [1]. BLR revenue, assumptions [2]. Flat 16 cases per month from launch, initial fees only in FY27.</a:t>
             </a:r>
             <a:endParaRPr lang="en-US" sz="900" dirty="0"/>
           </a:p>
@@ -9693,7 +11828,7 @@
                 <a:ea typeface="Calibri" pitchFamily="34" charset="-122"/>
                 <a:cs typeface="Calibri" pitchFamily="34" charset="-120"/>
               </a:rPr>
-              <a:t>THE OPERATING PLAN</a:t>
+              <a:t>THE PROJECTION THAT MATTERS</a:t>
             </a:r>
             <a:endParaRPr lang="en-US" sz="1100" dirty="0"/>
           </a:p>
@@ -9724,7 +11859,7 @@
               <a:buNone/>
             </a:pPr>
             <a:r>
-              <a:rPr lang="en-US" sz="3000" b="1" dirty="0">
+              <a:rPr lang="en-US" sz="2900" b="1" dirty="0">
                 <a:solidFill>
                   <a:srgbClr val="0F172A"/>
                 </a:solidFill>
@@ -9732,9 +11867,9 @@
                 <a:ea typeface="Cambria" pitchFamily="34" charset="-122"/>
                 <a:cs typeface="Cambria" pitchFamily="34" charset="-120"/>
               </a:rPr>
-              <a:t>FY27 budget, quarter by quarter and by cost head</a:t>
-            </a:r>
-            <a:endParaRPr lang="en-US" sz="3000" dirty="0"/>
+              <a:t>Monthly path to break even, all three cases</a:t>
+            </a:r>
+            <a:endParaRPr lang="en-US" sz="2900" dirty="0"/>
           </a:p>
         </p:txBody>
       </p:sp>
@@ -9746,8 +11881,8 @@
         </p:nvSpPr>
         <p:spPr>
           <a:xfrm>
-            <a:off x="566928" y="1417320"/>
-            <a:ext cx="5486400" cy="274320"/>
+            <a:off x="566928" y="1298448"/>
+            <a:ext cx="11064240" cy="457200"/>
           </a:xfrm>
           <a:prstGeom prst="rect">
             <a:avLst/>
@@ -9763,23 +11898,585 @@
               <a:buNone/>
             </a:pPr>
             <a:r>
-              <a:rPr lang="en-US" sz="1300" b="1" dirty="0">
-                <a:solidFill>
-                  <a:srgbClr val="334155"/>
+              <a:rPr lang="en-US" sz="1400" dirty="0">
+                <a:solidFill>
+                  <a:srgbClr val="64748B"/>
                 </a:solidFill>
                 <a:latin typeface="Calibri" pitchFamily="34" charset="0"/>
                 <a:ea typeface="Calibri" pitchFamily="34" charset="-122"/>
                 <a:cs typeface="Calibri" pitchFamily="34" charset="-120"/>
               </a:rPr>
-              <a:t>Quarterly P&amp;L, base case (Rs Cr)</a:t>
-            </a:r>
-            <a:endParaRPr lang="en-US" sz="1300" dirty="0"/>
+              <a:t>Green area is total monthly income, FD plus ratings. The dark line is all in monthly expense. Where green rises above the line, the month is cash positive.</a:t>
+            </a:r>
+            <a:endParaRPr lang="en-US" sz="1400" dirty="0"/>
+          </a:p>
+        </p:txBody>
+      </p:sp>
+      <p:sp>
+        <p:nvSpPr>
+          <p:cNvPr id="6" name="Text 4"/>
+          <p:cNvSpPr/>
+          <p:nvPr/>
+        </p:nvSpPr>
+        <p:spPr>
+          <a:xfrm>
+            <a:off x="566928" y="1920240"/>
+            <a:ext cx="3520440" cy="274320"/>
+          </a:xfrm>
+          <a:prstGeom prst="rect">
+            <a:avLst/>
+          </a:prstGeom>
+          <a:noFill/>
+          <a:ln/>
+        </p:spPr>
+        <p:txBody>
+          <a:bodyPr wrap="square" rtlCol="0" anchor="ctr"/>
+          <a:lstStyle/>
+          <a:p>
+            <a:pPr indent="0" marL="0">
+              <a:buNone/>
+            </a:pPr>
+            <a:r>
+              <a:rPr lang="en-US" sz="1400" b="1" dirty="0">
+                <a:solidFill>
+                  <a:srgbClr val="0F172A"/>
+                </a:solidFill>
+                <a:latin typeface="Cambria" pitchFamily="34" charset="0"/>
+                <a:ea typeface="Cambria" pitchFamily="34" charset="-122"/>
+                <a:cs typeface="Cambria" pitchFamily="34" charset="-120"/>
+              </a:rPr>
+              <a:t>S1. BLR by Oct</a:t>
+            </a:r>
+            <a:endParaRPr lang="en-US" sz="1400" dirty="0"/>
+          </a:p>
+        </p:txBody>
+      </p:sp>
+      <p:sp>
+        <p:nvSpPr>
+          <p:cNvPr id="7" name="Text 5"/>
+          <p:cNvSpPr/>
+          <p:nvPr/>
+        </p:nvSpPr>
+        <p:spPr>
+          <a:xfrm>
+            <a:off x="566928" y="2212848"/>
+            <a:ext cx="3520440" cy="274320"/>
+          </a:xfrm>
+          <a:prstGeom prst="rect">
+            <a:avLst/>
+          </a:prstGeom>
+          <a:noFill/>
+          <a:ln/>
+        </p:spPr>
+        <p:txBody>
+          <a:bodyPr wrap="square" rtlCol="0" anchor="ctr"/>
+          <a:lstStyle/>
+          <a:p>
+            <a:pPr indent="0" marL="0">
+              <a:buNone/>
+            </a:pPr>
+            <a:r>
+              <a:rPr lang="en-US" sz="1150" b="1" dirty="0">
+                <a:solidFill>
+                  <a:srgbClr val="0F766E"/>
+                </a:solidFill>
+                <a:latin typeface="Calibri" pitchFamily="34" charset="0"/>
+                <a:ea typeface="Calibri" pitchFamily="34" charset="-122"/>
+                <a:cs typeface="Calibri" pitchFamily="34" charset="-120"/>
+              </a:rPr>
+              <a:t>Break even from October</a:t>
+            </a:r>
+            <a:endParaRPr lang="en-US" sz="1150" dirty="0"/>
           </a:p>
         </p:txBody>
       </p:sp>
       <p:graphicFrame>
         <p:nvGraphicFramePr>
-          <p:cNvPr id="7" name="Table 0"/>
+          <p:cNvPr id="8" name="Chart 0" descr=""/>
+          <p:cNvGraphicFramePr/>
+          <p:nvPr/>
+        </p:nvGraphicFramePr>
+        <p:xfrm>
+          <a:off x="566928" y="2514600"/>
+          <a:ext cx="3520440" cy="3108960"/>
+        </p:xfrm>
+        <a:graphic xmlns:a="http://schemas.openxmlformats.org/drawingml/2006/main">
+          <a:graphicData uri="http://schemas.openxmlformats.org/drawingml/2006/chart">
+            <c:chart xmlns:c="http://schemas.openxmlformats.org/drawingml/2006/chart" r:id="rId1"/>
+          </a:graphicData>
+        </a:graphic>
+      </p:graphicFrame>
+      <p:sp>
+        <p:nvSpPr>
+          <p:cNvPr id="9" name="Text 6"/>
+          <p:cNvSpPr/>
+          <p:nvPr/>
+        </p:nvSpPr>
+        <p:spPr>
+          <a:xfrm>
+            <a:off x="4270248" y="1920240"/>
+            <a:ext cx="3520440" cy="274320"/>
+          </a:xfrm>
+          <a:prstGeom prst="rect">
+            <a:avLst/>
+          </a:prstGeom>
+          <a:noFill/>
+          <a:ln/>
+        </p:spPr>
+        <p:txBody>
+          <a:bodyPr wrap="square" rtlCol="0" anchor="ctr"/>
+          <a:lstStyle/>
+          <a:p>
+            <a:pPr indent="0" marL="0">
+              <a:buNone/>
+            </a:pPr>
+            <a:r>
+              <a:rPr lang="en-US" sz="1400" b="1" dirty="0">
+                <a:solidFill>
+                  <a:srgbClr val="0F172A"/>
+                </a:solidFill>
+                <a:latin typeface="Cambria" pitchFamily="34" charset="0"/>
+                <a:ea typeface="Cambria" pitchFamily="34" charset="-122"/>
+                <a:cs typeface="Cambria" pitchFamily="34" charset="-120"/>
+              </a:rPr>
+              <a:t>S2. BLR by Jan</a:t>
+            </a:r>
+            <a:endParaRPr lang="en-US" sz="1400" dirty="0"/>
+          </a:p>
+        </p:txBody>
+      </p:sp>
+      <p:sp>
+        <p:nvSpPr>
+          <p:cNvPr id="10" name="Text 7"/>
+          <p:cNvSpPr/>
+          <p:nvPr/>
+        </p:nvSpPr>
+        <p:spPr>
+          <a:xfrm>
+            <a:off x="4270248" y="2212848"/>
+            <a:ext cx="3520440" cy="274320"/>
+          </a:xfrm>
+          <a:prstGeom prst="rect">
+            <a:avLst/>
+          </a:prstGeom>
+          <a:noFill/>
+          <a:ln/>
+        </p:spPr>
+        <p:txBody>
+          <a:bodyPr wrap="square" rtlCol="0" anchor="ctr"/>
+          <a:lstStyle/>
+          <a:p>
+            <a:pPr indent="0" marL="0">
+              <a:buNone/>
+            </a:pPr>
+            <a:r>
+              <a:rPr lang="en-US" sz="1150" b="1" dirty="0">
+                <a:solidFill>
+                  <a:srgbClr val="2B5CC4"/>
+                </a:solidFill>
+                <a:latin typeface="Calibri" pitchFamily="34" charset="0"/>
+                <a:ea typeface="Calibri" pitchFamily="34" charset="-122"/>
+                <a:cs typeface="Calibri" pitchFamily="34" charset="-120"/>
+              </a:rPr>
+              <a:t>Break even from January</a:t>
+            </a:r>
+            <a:endParaRPr lang="en-US" sz="1150" dirty="0"/>
+          </a:p>
+        </p:txBody>
+      </p:sp>
+      <p:graphicFrame>
+        <p:nvGraphicFramePr>
+          <p:cNvPr id="11" name="Chart 1" descr=""/>
+          <p:cNvGraphicFramePr/>
+          <p:nvPr/>
+        </p:nvGraphicFramePr>
+        <p:xfrm>
+          <a:off x="4270248" y="2514600"/>
+          <a:ext cx="3520440" cy="3108960"/>
+        </p:xfrm>
+        <a:graphic xmlns:a="http://schemas.openxmlformats.org/drawingml/2006/main">
+          <a:graphicData uri="http://schemas.openxmlformats.org/drawingml/2006/chart">
+            <c:chart xmlns:c="http://schemas.openxmlformats.org/drawingml/2006/chart" r:id="rId2"/>
+          </a:graphicData>
+        </a:graphic>
+      </p:graphicFrame>
+      <p:sp>
+        <p:nvSpPr>
+          <p:cNvPr id="12" name="Text 8"/>
+          <p:cNvSpPr/>
+          <p:nvPr/>
+        </p:nvSpPr>
+        <p:spPr>
+          <a:xfrm>
+            <a:off x="7973568" y="1920240"/>
+            <a:ext cx="3520440" cy="274320"/>
+          </a:xfrm>
+          <a:prstGeom prst="rect">
+            <a:avLst/>
+          </a:prstGeom>
+          <a:noFill/>
+          <a:ln/>
+        </p:spPr>
+        <p:txBody>
+          <a:bodyPr wrap="square" rtlCol="0" anchor="ctr"/>
+          <a:lstStyle/>
+          <a:p>
+            <a:pPr indent="0" marL="0">
+              <a:buNone/>
+            </a:pPr>
+            <a:r>
+              <a:rPr lang="en-US" sz="1400" b="1" dirty="0">
+                <a:solidFill>
+                  <a:srgbClr val="0F172A"/>
+                </a:solidFill>
+                <a:latin typeface="Cambria" pitchFamily="34" charset="0"/>
+                <a:ea typeface="Cambria" pitchFamily="34" charset="-122"/>
+                <a:cs typeface="Cambria" pitchFamily="34" charset="-120"/>
+              </a:rPr>
+              <a:t>S3. No BLR</a:t>
+            </a:r>
+            <a:endParaRPr lang="en-US" sz="1400" dirty="0"/>
+          </a:p>
+        </p:txBody>
+      </p:sp>
+      <p:sp>
+        <p:nvSpPr>
+          <p:cNvPr id="13" name="Text 9"/>
+          <p:cNvSpPr/>
+          <p:nvPr/>
+        </p:nvSpPr>
+        <p:spPr>
+          <a:xfrm>
+            <a:off x="7973568" y="2212848"/>
+            <a:ext cx="3520440" cy="274320"/>
+          </a:xfrm>
+          <a:prstGeom prst="rect">
+            <a:avLst/>
+          </a:prstGeom>
+          <a:noFill/>
+          <a:ln/>
+        </p:spPr>
+        <p:txBody>
+          <a:bodyPr wrap="square" rtlCol="0" anchor="ctr"/>
+          <a:lstStyle/>
+          <a:p>
+            <a:pPr indent="0" marL="0">
+              <a:buNone/>
+            </a:pPr>
+            <a:r>
+              <a:rPr lang="en-US" sz="1150" b="1" dirty="0">
+                <a:solidFill>
+                  <a:srgbClr val="DC2626"/>
+                </a:solidFill>
+                <a:latin typeface="Calibri" pitchFamily="34" charset="0"/>
+                <a:ea typeface="Calibri" pitchFamily="34" charset="-122"/>
+                <a:cs typeface="Calibri" pitchFamily="34" charset="-120"/>
+              </a:rPr>
+              <a:t>Not reached in FY27</a:t>
+            </a:r>
+            <a:endParaRPr lang="en-US" sz="1150" dirty="0"/>
+          </a:p>
+        </p:txBody>
+      </p:sp>
+      <p:graphicFrame>
+        <p:nvGraphicFramePr>
+          <p:cNvPr id="14" name="Chart 2" descr=""/>
+          <p:cNvGraphicFramePr/>
+          <p:nvPr/>
+        </p:nvGraphicFramePr>
+        <p:xfrm>
+          <a:off x="7973568" y="2514600"/>
+          <a:ext cx="3520440" cy="3108960"/>
+        </p:xfrm>
+        <a:graphic xmlns:a="http://schemas.openxmlformats.org/drawingml/2006/main">
+          <a:graphicData uri="http://schemas.openxmlformats.org/drawingml/2006/chart">
+            <c:chart xmlns:c="http://schemas.openxmlformats.org/drawingml/2006/chart" r:id="rId3"/>
+          </a:graphicData>
+        </a:graphic>
+      </p:graphicFrame>
+      <p:sp>
+        <p:nvSpPr>
+          <p:cNvPr id="15" name="Text 10"/>
+          <p:cNvSpPr/>
+          <p:nvPr/>
+        </p:nvSpPr>
+        <p:spPr>
+          <a:xfrm>
+            <a:off x="566928" y="5669280"/>
+            <a:ext cx="7315200" cy="274320"/>
+          </a:xfrm>
+          <a:prstGeom prst="rect">
+            <a:avLst/>
+          </a:prstGeom>
+          <a:noFill/>
+          <a:ln/>
+        </p:spPr>
+        <p:txBody>
+          <a:bodyPr wrap="square" rtlCol="0" anchor="ctr"/>
+          <a:lstStyle/>
+          <a:p>
+            <a:pPr indent="0" marL="0">
+              <a:buNone/>
+            </a:pPr>
+            <a:r>
+              <a:rPr lang="en-US" sz="1100" b="1" dirty="0">
+                <a:solidFill>
+                  <a:srgbClr val="0F766E"/>
+                </a:solidFill>
+                <a:latin typeface="Calibri" pitchFamily="34" charset="0"/>
+                <a:ea typeface="Calibri" pitchFamily="34" charset="-122"/>
+                <a:cs typeface="Calibri" pitchFamily="34" charset="-120"/>
+              </a:rPr>
+              <a:t>Income, FD plus ratings   </a:t>
+            </a:r>
+            <a:pPr indent="0" marL="0">
+              <a:buNone/>
+            </a:pPr>
+            <a:r>
+              <a:rPr lang="en-US" sz="1100" b="1" dirty="0">
+                <a:solidFill>
+                  <a:srgbClr val="334155"/>
+                </a:solidFill>
+                <a:latin typeface="Calibri" pitchFamily="34" charset="0"/>
+                <a:ea typeface="Calibri" pitchFamily="34" charset="-122"/>
+                <a:cs typeface="Calibri" pitchFamily="34" charset="-120"/>
+              </a:rPr>
+              <a:t>Expense, all in</a:t>
+            </a:r>
+            <a:endParaRPr lang="en-US" sz="1100" dirty="0"/>
+          </a:p>
+        </p:txBody>
+      </p:sp>
+      <p:sp>
+        <p:nvSpPr>
+          <p:cNvPr id="16" name="Text 11"/>
+          <p:cNvSpPr/>
+          <p:nvPr/>
+        </p:nvSpPr>
+        <p:spPr>
+          <a:xfrm>
+            <a:off x="566928" y="6446520"/>
+            <a:ext cx="11064240" cy="301752"/>
+          </a:xfrm>
+          <a:prstGeom prst="rect">
+            <a:avLst/>
+          </a:prstGeom>
+          <a:noFill/>
+          <a:ln/>
+        </p:spPr>
+        <p:txBody>
+          <a:bodyPr wrap="square" rtlCol="0" anchor="ctr"/>
+          <a:lstStyle/>
+          <a:p>
+            <a:pPr indent="0" marL="0">
+              <a:buNone/>
+            </a:pPr>
+            <a:r>
+              <a:rPr lang="en-US" sz="900" i="1" dirty="0">
+                <a:solidFill>
+                  <a:srgbClr val="94A3B8"/>
+                </a:solidFill>
+                <a:latin typeface="Calibri" pitchFamily="34" charset="0"/>
+                <a:ea typeface="Calibri" pitchFamily="34" charset="-122"/>
+                <a:cs typeface="Calibri" pitchFamily="34" charset="-120"/>
+              </a:rPr>
+              <a:t>Source: monthly build from Internal run rate [1] and BLR assumptions [2]. Months Apr to Mar. Values in Rs Cr.</a:t>
+            </a:r>
+            <a:endParaRPr lang="en-US" sz="900" dirty="0"/>
+          </a:p>
+        </p:txBody>
+      </p:sp>
+    </p:spTree>
+  </p:cSld>
+  <p:clrMapOvr>
+    <a:masterClrMapping/>
+  </p:clrMapOvr>
+</p:sld>
+</file>
+
+<file path=ppt/slides/slide7.xml><?xml version="1.0" encoding="utf-8"?>
+<p:sld xmlns:a="http://schemas.openxmlformats.org/drawingml/2006/main" xmlns:r="http://schemas.openxmlformats.org/officeDocument/2006/relationships" xmlns:p="http://schemas.openxmlformats.org/presentationml/2006/main">
+  <p:cSld name="Slide 7">
+    <p:bg>
+      <p:bgPr>
+        <a:solidFill>
+          <a:srgbClr val="FFFFFF"/>
+        </a:solidFill>
+      </p:bgPr>
+    </p:bg>
+    <p:spTree>
+      <p:nvGrpSpPr>
+        <p:cNvPr id="1" name=""/>
+        <p:cNvGrpSpPr/>
+        <p:nvPr/>
+      </p:nvGrpSpPr>
+      <p:grpSpPr>
+        <a:xfrm>
+          <a:off x="0" y="0"/>
+          <a:ext cx="0" cy="0"/>
+          <a:chOff x="0" y="0"/>
+          <a:chExt cx="0" cy="0"/>
+        </a:xfrm>
+      </p:grpSpPr>
+      <p:sp>
+        <p:nvSpPr>
+          <p:cNvPr id="2" name="Text 0"/>
+          <p:cNvSpPr/>
+          <p:nvPr/>
+        </p:nvSpPr>
+        <p:spPr>
+          <a:xfrm>
+            <a:off x="11430000" y="402336"/>
+            <a:ext cx="365760" cy="274320"/>
+          </a:xfrm>
+          <a:prstGeom prst="rect">
+            <a:avLst/>
+          </a:prstGeom>
+          <a:noFill/>
+          <a:ln/>
+        </p:spPr>
+        <p:txBody>
+          <a:bodyPr wrap="square" rtlCol="0" anchor="ctr"/>
+          <a:lstStyle/>
+          <a:p>
+            <a:pPr algn="r" indent="0" marL="0">
+              <a:buNone/>
+            </a:pPr>
+            <a:r>
+              <a:rPr lang="en-US" sz="1100" b="1" dirty="0">
+                <a:solidFill>
+                  <a:srgbClr val="94A3B8"/>
+                </a:solidFill>
+                <a:latin typeface="Calibri" pitchFamily="34" charset="0"/>
+                <a:ea typeface="Calibri" pitchFamily="34" charset="-122"/>
+                <a:cs typeface="Calibri" pitchFamily="34" charset="-120"/>
+              </a:rPr>
+              <a:t>07</a:t>
+            </a:r>
+            <a:endParaRPr lang="en-US" sz="1100" dirty="0"/>
+          </a:p>
+        </p:txBody>
+      </p:sp>
+      <p:sp>
+        <p:nvSpPr>
+          <p:cNvPr id="3" name="Text 1"/>
+          <p:cNvSpPr/>
+          <p:nvPr/>
+        </p:nvSpPr>
+        <p:spPr>
+          <a:xfrm>
+            <a:off x="566928" y="438912"/>
+            <a:ext cx="10058400" cy="274320"/>
+          </a:xfrm>
+          <a:prstGeom prst="rect">
+            <a:avLst/>
+          </a:prstGeom>
+          <a:noFill/>
+          <a:ln/>
+        </p:spPr>
+        <p:txBody>
+          <a:bodyPr wrap="square" rtlCol="0" anchor="ctr"/>
+          <a:lstStyle/>
+          <a:p>
+            <a:pPr indent="0" marL="0">
+              <a:buNone/>
+            </a:pPr>
+            <a:r>
+              <a:rPr lang="en-US" sz="1100" b="1" spc="200" kern="0" dirty="0">
+                <a:solidFill>
+                  <a:srgbClr val="2B5CC4"/>
+                </a:solidFill>
+                <a:latin typeface="Calibri" pitchFamily="34" charset="0"/>
+                <a:ea typeface="Calibri" pitchFamily="34" charset="-122"/>
+                <a:cs typeface="Calibri" pitchFamily="34" charset="-120"/>
+              </a:rPr>
+              <a:t>THE OPERATING PLAN</a:t>
+            </a:r>
+            <a:endParaRPr lang="en-US" sz="1100" dirty="0"/>
+          </a:p>
+        </p:txBody>
+      </p:sp>
+      <p:sp>
+        <p:nvSpPr>
+          <p:cNvPr id="4" name="Text 2"/>
+          <p:cNvSpPr/>
+          <p:nvPr/>
+        </p:nvSpPr>
+        <p:spPr>
+          <a:xfrm>
+            <a:off x="566928" y="694944"/>
+            <a:ext cx="11064240" cy="548640"/>
+          </a:xfrm>
+          <a:prstGeom prst="rect">
+            <a:avLst/>
+          </a:prstGeom>
+          <a:noFill/>
+          <a:ln/>
+        </p:spPr>
+        <p:txBody>
+          <a:bodyPr wrap="square" rtlCol="0" anchor="ctr"/>
+          <a:lstStyle/>
+          <a:p>
+            <a:pPr indent="0" marL="0">
+              <a:buNone/>
+            </a:pPr>
+            <a:r>
+              <a:rPr lang="en-US" sz="2900" b="1" dirty="0">
+                <a:solidFill>
+                  <a:srgbClr val="0F172A"/>
+                </a:solidFill>
+                <a:latin typeface="Cambria" pitchFamily="34" charset="0"/>
+                <a:ea typeface="Cambria" pitchFamily="34" charset="-122"/>
+                <a:cs typeface="Cambria" pitchFamily="34" charset="-120"/>
+              </a:rPr>
+              <a:t>FY27 budget, quarter by quarter and by cost head</a:t>
+            </a:r>
+            <a:endParaRPr lang="en-US" sz="2900" dirty="0"/>
+          </a:p>
+        </p:txBody>
+      </p:sp>
+      <p:sp>
+        <p:nvSpPr>
+          <p:cNvPr id="5" name="Text 3"/>
+          <p:cNvSpPr/>
+          <p:nvPr/>
+        </p:nvSpPr>
+        <p:spPr>
+          <a:xfrm>
+            <a:off x="566928" y="1417320"/>
+            <a:ext cx="5486400" cy="274320"/>
+          </a:xfrm>
+          <a:prstGeom prst="rect">
+            <a:avLst/>
+          </a:prstGeom>
+          <a:noFill/>
+          <a:ln/>
+        </p:spPr>
+        <p:txBody>
+          <a:bodyPr wrap="square" rtlCol="0" anchor="ctr"/>
+          <a:lstStyle/>
+          <a:p>
+            <a:pPr indent="0" marL="0">
+              <a:buNone/>
+            </a:pPr>
+            <a:r>
+              <a:rPr lang="en-US" sz="1300" b="1" dirty="0">
+                <a:solidFill>
+                  <a:srgbClr val="334155"/>
+                </a:solidFill>
+                <a:latin typeface="Calibri" pitchFamily="34" charset="0"/>
+                <a:ea typeface="Calibri" pitchFamily="34" charset="-122"/>
+                <a:cs typeface="Calibri" pitchFamily="34" charset="-120"/>
+              </a:rPr>
+              <a:t>Quarterly P&amp;L, base case (Rs Cr)</a:t>
+            </a:r>
+            <a:endParaRPr lang="en-US" sz="1300" dirty="0"/>
+          </a:p>
+        </p:txBody>
+      </p:sp>
+      <p:graphicFrame>
+        <p:nvGraphicFramePr>
+          <p:cNvPr id="8" name="Table 0"/>
           <p:cNvGraphicFramePr>
             <a:graphicFrameLocks noGrp="1"/>
           </p:cNvGraphicFramePr>
@@ -9811,7 +12508,7 @@
                     <a:bodyPr/>
                     <a:lstStyle/>
                     <a:p>
-                      <a:pPr indent="0" marL="0">
+                      <a:pPr algn="l" indent="0" marL="0">
                         <a:buNone/>
                       </a:pPr>
                       <a:endParaRPr lang="en-US" sz="1100" dirty="0">
@@ -11548,8 +14245,8 @@
         </p:nvSpPr>
         <p:spPr>
           <a:xfrm>
-            <a:off x="566928" y="6437376"/>
-            <a:ext cx="11064240" cy="310896"/>
+            <a:off x="566928" y="6446520"/>
+            <a:ext cx="11064240" cy="301752"/>
           </a:xfrm>
           <a:prstGeom prst="rect">
             <a:avLst/>
@@ -11574,855 +14271,6 @@
                 <a:cs typeface="Calibri" pitchFamily="34" charset="-120"/>
               </a:rPr>
               <a:t>Source: quarterly build and cost heads modelled from Internal run rate [1] and BLR assumptions [2].</a:t>
-            </a:r>
-            <a:endParaRPr lang="en-US" sz="900" dirty="0"/>
-          </a:p>
-        </p:txBody>
-      </p:sp>
-    </p:spTree>
-  </p:cSld>
-  <p:clrMapOvr>
-    <a:masterClrMapping/>
-  </p:clrMapOvr>
-</p:sld>
-</file>
-
-<file path=ppt/slides/slide7.xml><?xml version="1.0" encoding="utf-8"?>
-<p:sld xmlns:a="http://schemas.openxmlformats.org/drawingml/2006/main" xmlns:r="http://schemas.openxmlformats.org/officeDocument/2006/relationships" xmlns:p="http://schemas.openxmlformats.org/presentationml/2006/main">
-  <p:cSld name="Slide 7">
-    <p:bg>
-      <p:bgPr>
-        <a:solidFill>
-          <a:srgbClr val="FFFFFF"/>
-        </a:solidFill>
-      </p:bgPr>
-    </p:bg>
-    <p:spTree>
-      <p:nvGrpSpPr>
-        <p:cNvPr id="1" name=""/>
-        <p:cNvGrpSpPr/>
-        <p:nvPr/>
-      </p:nvGrpSpPr>
-      <p:grpSpPr>
-        <a:xfrm>
-          <a:off x="0" y="0"/>
-          <a:ext cx="0" cy="0"/>
-          <a:chOff x="0" y="0"/>
-          <a:chExt cx="0" cy="0"/>
-        </a:xfrm>
-      </p:grpSpPr>
-      <p:sp>
-        <p:nvSpPr>
-          <p:cNvPr id="2" name="Text 0"/>
-          <p:cNvSpPr/>
-          <p:nvPr/>
-        </p:nvSpPr>
-        <p:spPr>
-          <a:xfrm>
-            <a:off x="11430000" y="402336"/>
-            <a:ext cx="365760" cy="274320"/>
-          </a:xfrm>
-          <a:prstGeom prst="rect">
-            <a:avLst/>
-          </a:prstGeom>
-          <a:noFill/>
-          <a:ln/>
-        </p:spPr>
-        <p:txBody>
-          <a:bodyPr wrap="square" rtlCol="0" anchor="ctr"/>
-          <a:lstStyle/>
-          <a:p>
-            <a:pPr algn="r" indent="0" marL="0">
-              <a:buNone/>
-            </a:pPr>
-            <a:r>
-              <a:rPr lang="en-US" sz="1100" b="1" dirty="0">
-                <a:solidFill>
-                  <a:srgbClr val="94A3B8"/>
-                </a:solidFill>
-                <a:latin typeface="Calibri" pitchFamily="34" charset="0"/>
-                <a:ea typeface="Calibri" pitchFamily="34" charset="-122"/>
-                <a:cs typeface="Calibri" pitchFamily="34" charset="-120"/>
-              </a:rPr>
-              <a:t>07</a:t>
-            </a:r>
-            <a:endParaRPr lang="en-US" sz="1100" dirty="0"/>
-          </a:p>
-        </p:txBody>
-      </p:sp>
-      <p:sp>
-        <p:nvSpPr>
-          <p:cNvPr id="3" name="Text 1"/>
-          <p:cNvSpPr/>
-          <p:nvPr/>
-        </p:nvSpPr>
-        <p:spPr>
-          <a:xfrm>
-            <a:off x="566928" y="438912"/>
-            <a:ext cx="10058400" cy="274320"/>
-          </a:xfrm>
-          <a:prstGeom prst="rect">
-            <a:avLst/>
-          </a:prstGeom>
-          <a:noFill/>
-          <a:ln/>
-        </p:spPr>
-        <p:txBody>
-          <a:bodyPr wrap="square" rtlCol="0" anchor="ctr"/>
-          <a:lstStyle/>
-          <a:p>
-            <a:pPr indent="0" marL="0">
-              <a:buNone/>
-            </a:pPr>
-            <a:r>
-              <a:rPr lang="en-US" sz="1100" b="1" spc="200" kern="0" dirty="0">
-                <a:solidFill>
-                  <a:srgbClr val="2B5CC4"/>
-                </a:solidFill>
-                <a:latin typeface="Calibri" pitchFamily="34" charset="0"/>
-                <a:ea typeface="Calibri" pitchFamily="34" charset="-122"/>
-                <a:cs typeface="Calibri" pitchFamily="34" charset="-120"/>
-              </a:rPr>
-              <a:t>FUNDING AND RUNWAY</a:t>
-            </a:r>
-            <a:endParaRPr lang="en-US" sz="1100" dirty="0"/>
-          </a:p>
-        </p:txBody>
-      </p:sp>
-      <p:sp>
-        <p:nvSpPr>
-          <p:cNvPr id="4" name="Text 2"/>
-          <p:cNvSpPr/>
-          <p:nvPr/>
-        </p:nvSpPr>
-        <p:spPr>
-          <a:xfrm>
-            <a:off x="566928" y="694944"/>
-            <a:ext cx="11064240" cy="548640"/>
-          </a:xfrm>
-          <a:prstGeom prst="rect">
-            <a:avLst/>
-          </a:prstGeom>
-          <a:noFill/>
-          <a:ln/>
-        </p:spPr>
-        <p:txBody>
-          <a:bodyPr wrap="square" rtlCol="0" anchor="ctr"/>
-          <a:lstStyle/>
-          <a:p>
-            <a:pPr indent="0" marL="0">
-              <a:buNone/>
-            </a:pPr>
-            <a:r>
-              <a:rPr lang="en-US" sz="3000" b="1" dirty="0">
-                <a:solidFill>
-                  <a:srgbClr val="0F172A"/>
-                </a:solidFill>
-                <a:latin typeface="Cambria" pitchFamily="34" charset="0"/>
-                <a:ea typeface="Cambria" pitchFamily="34" charset="-122"/>
-                <a:cs typeface="Cambria" pitchFamily="34" charset="-120"/>
-              </a:rPr>
-              <a:t>Solvency is not the question</a:t>
-            </a:r>
-            <a:endParaRPr lang="en-US" sz="3000" dirty="0"/>
-          </a:p>
-        </p:txBody>
-      </p:sp>
-      <p:sp>
-        <p:nvSpPr>
-          <p:cNvPr id="5" name="Text 3"/>
-          <p:cNvSpPr/>
-          <p:nvPr/>
-        </p:nvSpPr>
-        <p:spPr>
-          <a:xfrm>
-            <a:off x="566928" y="1298448"/>
-            <a:ext cx="11064240" cy="457200"/>
-          </a:xfrm>
-          <a:prstGeom prst="rect">
-            <a:avLst/>
-          </a:prstGeom>
-          <a:noFill/>
-          <a:ln/>
-        </p:spPr>
-        <p:txBody>
-          <a:bodyPr wrap="square" rtlCol="0" anchor="ctr"/>
-          <a:lstStyle/>
-          <a:p>
-            <a:pPr indent="0" marL="0">
-              <a:buNone/>
-            </a:pPr>
-            <a:r>
-              <a:rPr lang="en-US" sz="1450" dirty="0">
-                <a:solidFill>
-                  <a:srgbClr val="64748B"/>
-                </a:solidFill>
-                <a:latin typeface="Calibri" pitchFamily="34" charset="0"/>
-                <a:ea typeface="Calibri" pitchFamily="34" charset="-122"/>
-                <a:cs typeface="Calibri" pitchFamily="34" charset="-120"/>
-              </a:rPr>
-              <a:t>The plan is fully funded in every scenario without touching the regulatory net worth.</a:t>
-            </a:r>
-            <a:endParaRPr lang="en-US" sz="1450" dirty="0"/>
-          </a:p>
-        </p:txBody>
-      </p:sp>
-      <p:sp>
-        <p:nvSpPr>
-          <p:cNvPr id="6" name="Shape 4"/>
-          <p:cNvSpPr/>
-          <p:nvPr/>
-        </p:nvSpPr>
-        <p:spPr>
-          <a:xfrm>
-            <a:off x="566928" y="1783080"/>
-            <a:ext cx="2606040" cy="1280160"/>
-          </a:xfrm>
-          <a:prstGeom prst="roundRect">
-            <a:avLst>
-              <a:gd name="adj" fmla="val 4286"/>
-            </a:avLst>
-          </a:prstGeom>
-          <a:solidFill>
-            <a:srgbClr val="F5F8FB"/>
-          </a:solidFill>
-          <a:ln w="12700">
-            <a:solidFill>
-              <a:srgbClr val="E2E8F0"/>
-            </a:solidFill>
-            <a:prstDash val="solid"/>
-          </a:ln>
-        </p:spPr>
-      </p:sp>
-      <p:sp>
-        <p:nvSpPr>
-          <p:cNvPr id="7" name="Text 5"/>
-          <p:cNvSpPr/>
-          <p:nvPr/>
-        </p:nvSpPr>
-        <p:spPr>
-          <a:xfrm>
-            <a:off x="713232" y="1892808"/>
-            <a:ext cx="2313432" cy="274320"/>
-          </a:xfrm>
-          <a:prstGeom prst="rect">
-            <a:avLst/>
-          </a:prstGeom>
-          <a:noFill/>
-          <a:ln/>
-        </p:spPr>
-        <p:txBody>
-          <a:bodyPr wrap="square" rtlCol="0" anchor="ctr"/>
-          <a:lstStyle/>
-          <a:p>
-            <a:pPr indent="0" marL="0">
-              <a:buNone/>
-            </a:pPr>
-            <a:r>
-              <a:rPr lang="en-US" sz="1050" dirty="0">
-                <a:solidFill>
-                  <a:srgbClr val="64748B"/>
-                </a:solidFill>
-                <a:latin typeface="Calibri" pitchFamily="34" charset="0"/>
-                <a:ea typeface="Calibri" pitchFamily="34" charset="-122"/>
-                <a:cs typeface="Calibri" pitchFamily="34" charset="-120"/>
-              </a:rPr>
-              <a:t>Total FD corpus</a:t>
-            </a:r>
-            <a:endParaRPr lang="en-US" sz="1050" dirty="0"/>
-          </a:p>
-        </p:txBody>
-      </p:sp>
-      <p:sp>
-        <p:nvSpPr>
-          <p:cNvPr id="8" name="Text 6"/>
-          <p:cNvSpPr/>
-          <p:nvPr/>
-        </p:nvSpPr>
-        <p:spPr>
-          <a:xfrm>
-            <a:off x="713232" y="2130552"/>
-            <a:ext cx="2313432" cy="411480"/>
-          </a:xfrm>
-          <a:prstGeom prst="rect">
-            <a:avLst/>
-          </a:prstGeom>
-          <a:noFill/>
-          <a:ln/>
-        </p:spPr>
-        <p:txBody>
-          <a:bodyPr wrap="square" rtlCol="0" anchor="ctr"/>
-          <a:lstStyle/>
-          <a:p>
-            <a:pPr indent="0" marL="0">
-              <a:buNone/>
-            </a:pPr>
-            <a:r>
-              <a:rPr lang="en-US" sz="2000" b="1" dirty="0">
-                <a:solidFill>
-                  <a:srgbClr val="0F172A"/>
-                </a:solidFill>
-                <a:latin typeface="Cambria" pitchFamily="34" charset="0"/>
-                <a:ea typeface="Cambria" pitchFamily="34" charset="-122"/>
-                <a:cs typeface="Cambria" pitchFamily="34" charset="-120"/>
-              </a:rPr>
-              <a:t>Rs 26.1 Cr</a:t>
-            </a:r>
-            <a:endParaRPr lang="en-US" sz="2000" dirty="0"/>
-          </a:p>
-        </p:txBody>
-      </p:sp>
-      <p:sp>
-        <p:nvSpPr>
-          <p:cNvPr id="9" name="Shape 7"/>
-          <p:cNvSpPr/>
-          <p:nvPr/>
-        </p:nvSpPr>
-        <p:spPr>
-          <a:xfrm>
-            <a:off x="3328416" y="1783080"/>
-            <a:ext cx="2606040" cy="1280160"/>
-          </a:xfrm>
-          <a:prstGeom prst="roundRect">
-            <a:avLst>
-              <a:gd name="adj" fmla="val 4286"/>
-            </a:avLst>
-          </a:prstGeom>
-          <a:solidFill>
-            <a:srgbClr val="F5F8FB"/>
-          </a:solidFill>
-          <a:ln w="12700">
-            <a:solidFill>
-              <a:srgbClr val="E2E8F0"/>
-            </a:solidFill>
-            <a:prstDash val="solid"/>
-          </a:ln>
-        </p:spPr>
-      </p:sp>
-      <p:sp>
-        <p:nvSpPr>
-          <p:cNvPr id="10" name="Text 8"/>
-          <p:cNvSpPr/>
-          <p:nvPr/>
-        </p:nvSpPr>
-        <p:spPr>
-          <a:xfrm>
-            <a:off x="3474720" y="1892808"/>
-            <a:ext cx="2313432" cy="274320"/>
-          </a:xfrm>
-          <a:prstGeom prst="rect">
-            <a:avLst/>
-          </a:prstGeom>
-          <a:noFill/>
-          <a:ln/>
-        </p:spPr>
-        <p:txBody>
-          <a:bodyPr wrap="square" rtlCol="0" anchor="ctr"/>
-          <a:lstStyle/>
-          <a:p>
-            <a:pPr indent="0" marL="0">
-              <a:buNone/>
-            </a:pPr>
-            <a:r>
-              <a:rPr lang="en-US" sz="1050" dirty="0">
-                <a:solidFill>
-                  <a:srgbClr val="64748B"/>
-                </a:solidFill>
-                <a:latin typeface="Calibri" pitchFamily="34" charset="0"/>
-                <a:ea typeface="Calibri" pitchFamily="34" charset="-122"/>
-                <a:cs typeface="Calibri" pitchFamily="34" charset="-120"/>
-              </a:rPr>
-              <a:t>Locked (SEBI net worth)</a:t>
-            </a:r>
-            <a:endParaRPr lang="en-US" sz="1050" dirty="0"/>
-          </a:p>
-        </p:txBody>
-      </p:sp>
-      <p:sp>
-        <p:nvSpPr>
-          <p:cNvPr id="11" name="Text 9"/>
-          <p:cNvSpPr/>
-          <p:nvPr/>
-        </p:nvSpPr>
-        <p:spPr>
-          <a:xfrm>
-            <a:off x="3474720" y="2130552"/>
-            <a:ext cx="2313432" cy="411480"/>
-          </a:xfrm>
-          <a:prstGeom prst="rect">
-            <a:avLst/>
-          </a:prstGeom>
-          <a:noFill/>
-          <a:ln/>
-        </p:spPr>
-        <p:txBody>
-          <a:bodyPr wrap="square" rtlCol="0" anchor="ctr"/>
-          <a:lstStyle/>
-          <a:p>
-            <a:pPr indent="0" marL="0">
-              <a:buNone/>
-            </a:pPr>
-            <a:r>
-              <a:rPr lang="en-US" sz="2000" b="1" dirty="0">
-                <a:solidFill>
-                  <a:srgbClr val="DC2626"/>
-                </a:solidFill>
-                <a:latin typeface="Cambria" pitchFamily="34" charset="0"/>
-                <a:ea typeface="Cambria" pitchFamily="34" charset="-122"/>
-                <a:cs typeface="Cambria" pitchFamily="34" charset="-120"/>
-              </a:rPr>
-              <a:t>Rs 25.0 Cr</a:t>
-            </a:r>
-            <a:endParaRPr lang="en-US" sz="2000" dirty="0"/>
-          </a:p>
-        </p:txBody>
-      </p:sp>
-      <p:sp>
-        <p:nvSpPr>
-          <p:cNvPr id="12" name="Text 10"/>
-          <p:cNvSpPr/>
-          <p:nvPr/>
-        </p:nvSpPr>
-        <p:spPr>
-          <a:xfrm>
-            <a:off x="3474720" y="2569464"/>
-            <a:ext cx="2313432" cy="365760"/>
-          </a:xfrm>
-          <a:prstGeom prst="rect">
-            <a:avLst/>
-          </a:prstGeom>
-          <a:noFill/>
-          <a:ln/>
-        </p:spPr>
-        <p:txBody>
-          <a:bodyPr wrap="square" rtlCol="0" anchor="ctr"/>
-          <a:lstStyle/>
-          <a:p>
-            <a:pPr indent="0" marL="0">
-              <a:buNone/>
-            </a:pPr>
-            <a:r>
-              <a:rPr lang="en-US" sz="900" dirty="0">
-                <a:solidFill>
-                  <a:srgbClr val="94A3B8"/>
-                </a:solidFill>
-                <a:latin typeface="Calibri" pitchFamily="34" charset="0"/>
-                <a:ea typeface="Calibri" pitchFamily="34" charset="-122"/>
-                <a:cs typeface="Calibri" pitchFamily="34" charset="-120"/>
-              </a:rPr>
-              <a:t>must be held at all times</a:t>
-            </a:r>
-            <a:endParaRPr lang="en-US" sz="900" dirty="0"/>
-          </a:p>
-        </p:txBody>
-      </p:sp>
-      <p:sp>
-        <p:nvSpPr>
-          <p:cNvPr id="13" name="Shape 11"/>
-          <p:cNvSpPr/>
-          <p:nvPr/>
-        </p:nvSpPr>
-        <p:spPr>
-          <a:xfrm>
-            <a:off x="6089904" y="1783080"/>
-            <a:ext cx="2606040" cy="1280160"/>
-          </a:xfrm>
-          <a:prstGeom prst="roundRect">
-            <a:avLst>
-              <a:gd name="adj" fmla="val 4286"/>
-            </a:avLst>
-          </a:prstGeom>
-          <a:solidFill>
-            <a:srgbClr val="F5F8FB"/>
-          </a:solidFill>
-          <a:ln w="12700">
-            <a:solidFill>
-              <a:srgbClr val="E2E8F0"/>
-            </a:solidFill>
-            <a:prstDash val="solid"/>
-          </a:ln>
-        </p:spPr>
-      </p:sp>
-      <p:sp>
-        <p:nvSpPr>
-          <p:cNvPr id="14" name="Text 12"/>
-          <p:cNvSpPr/>
-          <p:nvPr/>
-        </p:nvSpPr>
-        <p:spPr>
-          <a:xfrm>
-            <a:off x="6236208" y="1892808"/>
-            <a:ext cx="2313432" cy="274320"/>
-          </a:xfrm>
-          <a:prstGeom prst="rect">
-            <a:avLst/>
-          </a:prstGeom>
-          <a:noFill/>
-          <a:ln/>
-        </p:spPr>
-        <p:txBody>
-          <a:bodyPr wrap="square" rtlCol="0" anchor="ctr"/>
-          <a:lstStyle/>
-          <a:p>
-            <a:pPr indent="0" marL="0">
-              <a:buNone/>
-            </a:pPr>
-            <a:r>
-              <a:rPr lang="en-US" sz="1050" dirty="0">
-                <a:solidFill>
-                  <a:srgbClr val="64748B"/>
-                </a:solidFill>
-                <a:latin typeface="Calibri" pitchFamily="34" charset="0"/>
-                <a:ea typeface="Calibri" pitchFamily="34" charset="-122"/>
-                <a:cs typeface="Calibri" pitchFamily="34" charset="-120"/>
-              </a:rPr>
-              <a:t>Accessible funds</a:t>
-            </a:r>
-            <a:endParaRPr lang="en-US" sz="1050" dirty="0"/>
-          </a:p>
-        </p:txBody>
-      </p:sp>
-      <p:sp>
-        <p:nvSpPr>
-          <p:cNvPr id="15" name="Text 13"/>
-          <p:cNvSpPr/>
-          <p:nvPr/>
-        </p:nvSpPr>
-        <p:spPr>
-          <a:xfrm>
-            <a:off x="6236208" y="2130552"/>
-            <a:ext cx="2313432" cy="411480"/>
-          </a:xfrm>
-          <a:prstGeom prst="rect">
-            <a:avLst/>
-          </a:prstGeom>
-          <a:noFill/>
-          <a:ln/>
-        </p:spPr>
-        <p:txBody>
-          <a:bodyPr wrap="square" rtlCol="0" anchor="ctr"/>
-          <a:lstStyle/>
-          <a:p>
-            <a:pPr indent="0" marL="0">
-              <a:buNone/>
-            </a:pPr>
-            <a:r>
-              <a:rPr lang="en-US" sz="2000" b="1" dirty="0">
-                <a:solidFill>
-                  <a:srgbClr val="0F766E"/>
-                </a:solidFill>
-                <a:latin typeface="Cambria" pitchFamily="34" charset="0"/>
-                <a:ea typeface="Cambria" pitchFamily="34" charset="-122"/>
-                <a:cs typeface="Cambria" pitchFamily="34" charset="-120"/>
-              </a:rPr>
-              <a:t>about Rs 3.0 Cr</a:t>
-            </a:r>
-            <a:endParaRPr lang="en-US" sz="2000" dirty="0"/>
-          </a:p>
-        </p:txBody>
-      </p:sp>
-      <p:sp>
-        <p:nvSpPr>
-          <p:cNvPr id="16" name="Text 14"/>
-          <p:cNvSpPr/>
-          <p:nvPr/>
-        </p:nvSpPr>
-        <p:spPr>
-          <a:xfrm>
-            <a:off x="6236208" y="2569464"/>
-            <a:ext cx="2313432" cy="365760"/>
-          </a:xfrm>
-          <a:prstGeom prst="rect">
-            <a:avLst/>
-          </a:prstGeom>
-          <a:noFill/>
-          <a:ln/>
-        </p:spPr>
-        <p:txBody>
-          <a:bodyPr wrap="square" rtlCol="0" anchor="ctr"/>
-          <a:lstStyle/>
-          <a:p>
-            <a:pPr indent="0" marL="0">
-              <a:buNone/>
-            </a:pPr>
-            <a:r>
-              <a:rPr lang="en-US" sz="900" dirty="0">
-                <a:solidFill>
-                  <a:srgbClr val="94A3B8"/>
-                </a:solidFill>
-                <a:latin typeface="Calibri" pitchFamily="34" charset="0"/>
-                <a:ea typeface="Calibri" pitchFamily="34" charset="-122"/>
-                <a:cs typeface="Calibri" pitchFamily="34" charset="-120"/>
-              </a:rPr>
-              <a:t>non locked FD plus bank</a:t>
-            </a:r>
-            <a:endParaRPr lang="en-US" sz="900" dirty="0"/>
-          </a:p>
-        </p:txBody>
-      </p:sp>
-      <p:sp>
-        <p:nvSpPr>
-          <p:cNvPr id="17" name="Shape 15"/>
-          <p:cNvSpPr/>
-          <p:nvPr/>
-        </p:nvSpPr>
-        <p:spPr>
-          <a:xfrm>
-            <a:off x="8851392" y="1783080"/>
-            <a:ext cx="2606040" cy="1280160"/>
-          </a:xfrm>
-          <a:prstGeom prst="roundRect">
-            <a:avLst>
-              <a:gd name="adj" fmla="val 4286"/>
-            </a:avLst>
-          </a:prstGeom>
-          <a:solidFill>
-            <a:srgbClr val="F5F8FB"/>
-          </a:solidFill>
-          <a:ln w="12700">
-            <a:solidFill>
-              <a:srgbClr val="E2E8F0"/>
-            </a:solidFill>
-            <a:prstDash val="solid"/>
-          </a:ln>
-        </p:spPr>
-      </p:sp>
-      <p:sp>
-        <p:nvSpPr>
-          <p:cNvPr id="18" name="Text 16"/>
-          <p:cNvSpPr/>
-          <p:nvPr/>
-        </p:nvSpPr>
-        <p:spPr>
-          <a:xfrm>
-            <a:off x="8997696" y="1892808"/>
-            <a:ext cx="2313432" cy="274320"/>
-          </a:xfrm>
-          <a:prstGeom prst="rect">
-            <a:avLst/>
-          </a:prstGeom>
-          <a:noFill/>
-          <a:ln/>
-        </p:spPr>
-        <p:txBody>
-          <a:bodyPr wrap="square" rtlCol="0" anchor="ctr"/>
-          <a:lstStyle/>
-          <a:p>
-            <a:pPr indent="0" marL="0">
-              <a:buNone/>
-            </a:pPr>
-            <a:r>
-              <a:rPr lang="en-US" sz="1050" dirty="0">
-                <a:solidFill>
-                  <a:srgbClr val="64748B"/>
-                </a:solidFill>
-                <a:latin typeface="Calibri" pitchFamily="34" charset="0"/>
-                <a:ea typeface="Calibri" pitchFamily="34" charset="-122"/>
-                <a:cs typeface="Calibri" pitchFamily="34" charset="-120"/>
-              </a:rPr>
-              <a:t>Annual FD interest</a:t>
-            </a:r>
-            <a:endParaRPr lang="en-US" sz="1050" dirty="0"/>
-          </a:p>
-        </p:txBody>
-      </p:sp>
-      <p:sp>
-        <p:nvSpPr>
-          <p:cNvPr id="19" name="Text 17"/>
-          <p:cNvSpPr/>
-          <p:nvPr/>
-        </p:nvSpPr>
-        <p:spPr>
-          <a:xfrm>
-            <a:off x="8997696" y="2130552"/>
-            <a:ext cx="2313432" cy="411480"/>
-          </a:xfrm>
-          <a:prstGeom prst="rect">
-            <a:avLst/>
-          </a:prstGeom>
-          <a:noFill/>
-          <a:ln/>
-        </p:spPr>
-        <p:txBody>
-          <a:bodyPr wrap="square" rtlCol="0" anchor="ctr"/>
-          <a:lstStyle/>
-          <a:p>
-            <a:pPr indent="0" marL="0">
-              <a:buNone/>
-            </a:pPr>
-            <a:r>
-              <a:rPr lang="en-US" sz="2000" b="1" dirty="0">
-                <a:solidFill>
-                  <a:srgbClr val="0F766E"/>
-                </a:solidFill>
-                <a:latin typeface="Cambria" pitchFamily="34" charset="0"/>
-                <a:ea typeface="Cambria" pitchFamily="34" charset="-122"/>
-                <a:cs typeface="Cambria" pitchFamily="34" charset="-120"/>
-              </a:rPr>
-              <a:t>about Rs 1.8 Cr</a:t>
-            </a:r>
-            <a:endParaRPr lang="en-US" sz="2000" dirty="0"/>
-          </a:p>
-        </p:txBody>
-      </p:sp>
-      <p:sp>
-        <p:nvSpPr>
-          <p:cNvPr id="20" name="Text 18"/>
-          <p:cNvSpPr/>
-          <p:nvPr/>
-        </p:nvSpPr>
-        <p:spPr>
-          <a:xfrm>
-            <a:off x="8997696" y="2569464"/>
-            <a:ext cx="2313432" cy="365760"/>
-          </a:xfrm>
-          <a:prstGeom prst="rect">
-            <a:avLst/>
-          </a:prstGeom>
-          <a:noFill/>
-          <a:ln/>
-        </p:spPr>
-        <p:txBody>
-          <a:bodyPr wrap="square" rtlCol="0" anchor="ctr"/>
-          <a:lstStyle/>
-          <a:p>
-            <a:pPr indent="0" marL="0">
-              <a:buNone/>
-            </a:pPr>
-            <a:r>
-              <a:rPr lang="en-US" sz="900" dirty="0">
-                <a:solidFill>
-                  <a:srgbClr val="94A3B8"/>
-                </a:solidFill>
-                <a:latin typeface="Calibri" pitchFamily="34" charset="0"/>
-                <a:ea typeface="Calibri" pitchFamily="34" charset="-122"/>
-                <a:cs typeface="Calibri" pitchFamily="34" charset="-120"/>
-              </a:rPr>
-              <a:t>recurring cash income</a:t>
-            </a:r>
-            <a:endParaRPr lang="en-US" sz="900" dirty="0"/>
-          </a:p>
-        </p:txBody>
-      </p:sp>
-      <p:sp>
-        <p:nvSpPr>
-          <p:cNvPr id="21" name="Text 19"/>
-          <p:cNvSpPr/>
-          <p:nvPr/>
-        </p:nvSpPr>
-        <p:spPr>
-          <a:xfrm>
-            <a:off x="566928" y="3383280"/>
-            <a:ext cx="10972800" cy="2377440"/>
-          </a:xfrm>
-          <a:prstGeom prst="rect">
-            <a:avLst/>
-          </a:prstGeom>
-          <a:noFill/>
-          <a:ln/>
-        </p:spPr>
-        <p:txBody>
-          <a:bodyPr wrap="square" rtlCol="0" anchor="t"/>
-          <a:lstStyle/>
-          <a:p>
-            <a:pPr marL="177800" indent="-177800">
-              <a:spcAft>
-                <a:spcPts val="700"/>
-              </a:spcAft>
-              <a:buSzPct val="100000"/>
-              <a:buChar char="•"/>
-            </a:pPr>
-            <a:r>
-              <a:rPr lang="en-US" sz="1400" dirty="0">
-                <a:solidFill>
-                  <a:srgbClr val="334155"/>
-                </a:solidFill>
-                <a:latin typeface="Calibri" pitchFamily="34" charset="0"/>
-                <a:ea typeface="Calibri" pitchFamily="34" charset="-122"/>
-                <a:cs typeface="Calibri" pitchFamily="34" charset="-120"/>
-              </a:rPr>
-              <a:t>Base case S1 breaks even, so no drawdown is needed.</a:t>
-            </a:r>
-            <a:endParaRPr lang="en-US" sz="1400" dirty="0"/>
-          </a:p>
-          <a:p>
-            <a:pPr marL="177800" indent="-177800">
-              <a:spcAft>
-                <a:spcPts val="700"/>
-              </a:spcAft>
-              <a:buSzPct val="100000"/>
-              <a:buChar char="•"/>
-            </a:pPr>
-            <a:r>
-              <a:rPr lang="en-US" sz="1400" dirty="0">
-                <a:solidFill>
-                  <a:srgbClr val="334155"/>
-                </a:solidFill>
-                <a:latin typeface="Calibri" pitchFamily="34" charset="0"/>
-                <a:ea typeface="Calibri" pitchFamily="34" charset="-122"/>
-                <a:cs typeface="Calibri" pitchFamily="34" charset="-120"/>
-              </a:rPr>
-              <a:t>Even the worst case S3, a Rs 2.6 Cr loss, translates to about Rs 2.5 Cr of cash burn, comfortably inside the roughly Rs 3.0 Cr of accessible funds plus Rs 1.8 Cr of annual interest.</a:t>
-            </a:r>
-            <a:endParaRPr lang="en-US" sz="1400" dirty="0"/>
-          </a:p>
-          <a:p>
-            <a:pPr marL="177800" indent="-177800">
-              <a:spcAft>
-                <a:spcPts val="700"/>
-              </a:spcAft>
-              <a:buSzPct val="100000"/>
-              <a:buChar char="•"/>
-            </a:pPr>
-            <a:r>
-              <a:rPr lang="en-US" sz="1400" dirty="0">
-                <a:solidFill>
-                  <a:srgbClr val="334155"/>
-                </a:solidFill>
-                <a:latin typeface="Calibri" pitchFamily="34" charset="0"/>
-                <a:ea typeface="Calibri" pitchFamily="34" charset="-122"/>
-                <a:cs typeface="Calibri" pitchFamily="34" charset="-120"/>
-              </a:rPr>
-              <a:t>The Rs 25 Cr net worth stays intact in every scenario, so the SEBI registration is never at risk. The question for the Board is operational self sufficiency, not survival.</a:t>
-            </a:r>
-            <a:endParaRPr lang="en-US" sz="1400" dirty="0"/>
-          </a:p>
-        </p:txBody>
-      </p:sp>
-      <p:sp>
-        <p:nvSpPr>
-          <p:cNvPr id="22" name="Text 20"/>
-          <p:cNvSpPr/>
-          <p:nvPr/>
-        </p:nvSpPr>
-        <p:spPr>
-          <a:xfrm>
-            <a:off x="566928" y="6437376"/>
-            <a:ext cx="11064240" cy="310896"/>
-          </a:xfrm>
-          <a:prstGeom prst="rect">
-            <a:avLst/>
-          </a:prstGeom>
-          <a:noFill/>
-          <a:ln/>
-        </p:spPr>
-        <p:txBody>
-          <a:bodyPr wrap="square" rtlCol="0" anchor="ctr"/>
-          <a:lstStyle/>
-          <a:p>
-            <a:pPr indent="0" marL="0">
-              <a:buNone/>
-            </a:pPr>
-            <a:r>
-              <a:rPr lang="en-US" sz="900" i="1" dirty="0">
-                <a:solidFill>
-                  <a:srgbClr val="94A3B8"/>
-                </a:solidFill>
-                <a:latin typeface="Calibri" pitchFamily="34" charset="0"/>
-                <a:ea typeface="Calibri" pitchFamily="34" charset="-122"/>
-                <a:cs typeface="Calibri" pitchFamily="34" charset="-120"/>
-              </a:rPr>
-              <a:t>Source: Internal [1]. SEBI net worth basis [10].</a:t>
             </a:r>
             <a:endParaRPr lang="en-US" sz="900" dirty="0"/>
           </a:p>
@@ -12532,7 +14380,7 @@
                 <a:ea typeface="Calibri" pitchFamily="34" charset="-122"/>
                 <a:cs typeface="Calibri" pitchFamily="34" charset="-120"/>
               </a:rPr>
-              <a:t>THE CLIMB</a:t>
+              <a:t>FUNDING AND RUNWAY</a:t>
             </a:r>
             <a:endParaRPr lang="en-US" sz="1100" dirty="0"/>
           </a:p>
@@ -12563,7 +14411,7 @@
               <a:buNone/>
             </a:pPr>
             <a:r>
-              <a:rPr lang="en-US" sz="3000" b="1" dirty="0">
+              <a:rPr lang="en-US" sz="2900" b="1" dirty="0">
                 <a:solidFill>
                   <a:srgbClr val="0F172A"/>
                 </a:solidFill>
@@ -12571,9 +14419,9 @@
                 <a:ea typeface="Cambria" pitchFamily="34" charset="-122"/>
                 <a:cs typeface="Cambria" pitchFamily="34" charset="-120"/>
               </a:rPr>
-              <a:t>Revenue trajectory and the income mix flip</a:t>
-            </a:r>
-            <a:endParaRPr lang="en-US" sz="3000" dirty="0"/>
+              <a:t>Solvency is not the question</a:t>
+            </a:r>
+            <a:endParaRPr lang="en-US" sz="2900" dirty="0"/>
           </a:p>
         </p:txBody>
       </p:sp>
@@ -12585,8 +14433,8 @@
         </p:nvSpPr>
         <p:spPr>
           <a:xfrm>
-            <a:off x="566928" y="1417320"/>
-            <a:ext cx="5486400" cy="274320"/>
+            <a:off x="566928" y="1298448"/>
+            <a:ext cx="11064240" cy="457200"/>
           </a:xfrm>
           <a:prstGeom prst="rect">
             <a:avLst/>
@@ -12602,46 +14450,57 @@
               <a:buNone/>
             </a:pPr>
             <a:r>
-              <a:rPr lang="en-US" sz="1200" b="1" dirty="0">
-                <a:solidFill>
-                  <a:srgbClr val="334155"/>
+              <a:rPr lang="en-US" sz="1400" dirty="0">
+                <a:solidFill>
+                  <a:srgbClr val="64748B"/>
                 </a:solidFill>
                 <a:latin typeface="Calibri" pitchFamily="34" charset="0"/>
                 <a:ea typeface="Calibri" pitchFamily="34" charset="-122"/>
                 <a:cs typeface="Calibri" pitchFamily="34" charset="-120"/>
               </a:rPr>
-              <a:t>Operating revenue build, base case (Rs Cr)</a:t>
-            </a:r>
-            <a:endParaRPr lang="en-US" sz="1200" dirty="0"/>
-          </a:p>
-        </p:txBody>
-      </p:sp>
-      <p:graphicFrame>
-        <p:nvGraphicFramePr>
-          <p:cNvPr id="6" name="Chart 0" descr=""/>
-          <p:cNvGraphicFramePr/>
-          <p:nvPr/>
-        </p:nvGraphicFramePr>
-        <p:xfrm>
-          <a:off x="566928" y="1737360"/>
-          <a:ext cx="5669280" cy="4023360"/>
-        </p:xfrm>
-        <a:graphic xmlns:a="http://schemas.openxmlformats.org/drawingml/2006/main">
-          <a:graphicData uri="http://schemas.openxmlformats.org/drawingml/2006/chart">
-            <c:chart xmlns:c="http://schemas.openxmlformats.org/drawingml/2006/chart" r:id="rId1"/>
-          </a:graphicData>
-        </a:graphic>
-      </p:graphicFrame>
-      <p:sp>
-        <p:nvSpPr>
-          <p:cNvPr id="7" name="Text 4"/>
-          <p:cNvSpPr/>
-          <p:nvPr/>
-        </p:nvSpPr>
-        <p:spPr>
-          <a:xfrm>
-            <a:off x="6492240" y="1417320"/>
-            <a:ext cx="5486400" cy="274320"/>
+              <a:t>The plan is fully funded in every scenario without touching the regulatory net worth.</a:t>
+            </a:r>
+            <a:endParaRPr lang="en-US" sz="1400" dirty="0"/>
+          </a:p>
+        </p:txBody>
+      </p:sp>
+      <p:sp>
+        <p:nvSpPr>
+          <p:cNvPr id="6" name="Shape 4"/>
+          <p:cNvSpPr/>
+          <p:nvPr/>
+        </p:nvSpPr>
+        <p:spPr>
+          <a:xfrm>
+            <a:off x="566928" y="1783080"/>
+            <a:ext cx="2606040" cy="1280160"/>
+          </a:xfrm>
+          <a:prstGeom prst="roundRect">
+            <a:avLst>
+              <a:gd name="adj" fmla="val 4286"/>
+            </a:avLst>
+          </a:prstGeom>
+          <a:solidFill>
+            <a:srgbClr val="F5F8FB"/>
+          </a:solidFill>
+          <a:ln w="12700">
+            <a:solidFill>
+              <a:srgbClr val="E2E8F0"/>
+            </a:solidFill>
+            <a:prstDash val="solid"/>
+          </a:ln>
+        </p:spPr>
+      </p:sp>
+      <p:sp>
+        <p:nvSpPr>
+          <p:cNvPr id="7" name="Text 5"/>
+          <p:cNvSpPr/>
+          <p:nvPr/>
+        </p:nvSpPr>
+        <p:spPr>
+          <a:xfrm>
+            <a:off x="713232" y="1892808"/>
+            <a:ext cx="2313432" cy="274320"/>
           </a:xfrm>
           <a:prstGeom prst="rect">
             <a:avLst/>
@@ -12657,46 +14516,30 @@
               <a:buNone/>
             </a:pPr>
             <a:r>
-              <a:rPr lang="en-US" sz="1200" b="1" dirty="0">
-                <a:solidFill>
-                  <a:srgbClr val="334155"/>
+              <a:rPr lang="en-US" sz="1050" dirty="0">
+                <a:solidFill>
+                  <a:srgbClr val="64748B"/>
                 </a:solidFill>
                 <a:latin typeface="Calibri" pitchFamily="34" charset="0"/>
                 <a:ea typeface="Calibri" pitchFamily="34" charset="-122"/>
                 <a:cs typeface="Calibri" pitchFamily="34" charset="-120"/>
               </a:rPr>
-              <a:t>Income mix, FD versus ratings</a:t>
-            </a:r>
-            <a:endParaRPr lang="en-US" sz="1200" dirty="0"/>
-          </a:p>
-        </p:txBody>
-      </p:sp>
-      <p:graphicFrame>
-        <p:nvGraphicFramePr>
-          <p:cNvPr id="8" name="Chart 1" descr=""/>
-          <p:cNvGraphicFramePr/>
-          <p:nvPr/>
-        </p:nvGraphicFramePr>
-        <p:xfrm>
-          <a:off x="6400800" y="1737360"/>
-          <a:ext cx="5394960" cy="4023360"/>
-        </p:xfrm>
-        <a:graphic xmlns:a="http://schemas.openxmlformats.org/drawingml/2006/main">
-          <a:graphicData uri="http://schemas.openxmlformats.org/drawingml/2006/chart">
-            <c:chart xmlns:c="http://schemas.openxmlformats.org/drawingml/2006/chart" r:id="rId2"/>
-          </a:graphicData>
-        </a:graphic>
-      </p:graphicFrame>
-      <p:sp>
-        <p:nvSpPr>
-          <p:cNvPr id="9" name="Text 5"/>
-          <p:cNvSpPr/>
-          <p:nvPr/>
-        </p:nvSpPr>
-        <p:spPr>
-          <a:xfrm>
-            <a:off x="566928" y="6437376"/>
-            <a:ext cx="11064240" cy="310896"/>
+              <a:t>Total FD corpus</a:t>
+            </a:r>
+            <a:endParaRPr lang="en-US" sz="1050" dirty="0"/>
+          </a:p>
+        </p:txBody>
+      </p:sp>
+      <p:sp>
+        <p:nvSpPr>
+          <p:cNvPr id="8" name="Text 6"/>
+          <p:cNvSpPr/>
+          <p:nvPr/>
+        </p:nvSpPr>
+        <p:spPr>
+          <a:xfrm>
+            <a:off x="713232" y="2130552"/>
+            <a:ext cx="2313432" cy="411480"/>
           </a:xfrm>
           <a:prstGeom prst="rect">
             <a:avLst/>
@@ -12712,15 +14555,571 @@
               <a:buNone/>
             </a:pPr>
             <a:r>
-              <a:rPr lang="en-US" sz="900" i="1" dirty="0">
-                <a:solidFill>
-                  <a:srgbClr val="94A3B8"/>
+              <a:rPr lang="en-US" sz="2000" b="1" dirty="0">
+                <a:solidFill>
+                  <a:srgbClr val="0F172A"/>
+                </a:solidFill>
+                <a:latin typeface="Cambria" pitchFamily="34" charset="0"/>
+                <a:ea typeface="Cambria" pitchFamily="34" charset="-122"/>
+                <a:cs typeface="Cambria" pitchFamily="34" charset="-120"/>
+              </a:rPr>
+              <a:t>Rs 26.1 Cr</a:t>
+            </a:r>
+            <a:endParaRPr lang="en-US" sz="2000" dirty="0"/>
+          </a:p>
+        </p:txBody>
+      </p:sp>
+      <p:sp>
+        <p:nvSpPr>
+          <p:cNvPr id="9" name="Shape 7"/>
+          <p:cNvSpPr/>
+          <p:nvPr/>
+        </p:nvSpPr>
+        <p:spPr>
+          <a:xfrm>
+            <a:off x="3328416" y="1783080"/>
+            <a:ext cx="2606040" cy="1280160"/>
+          </a:xfrm>
+          <a:prstGeom prst="roundRect">
+            <a:avLst>
+              <a:gd name="adj" fmla="val 4286"/>
+            </a:avLst>
+          </a:prstGeom>
+          <a:solidFill>
+            <a:srgbClr val="F5F8FB"/>
+          </a:solidFill>
+          <a:ln w="12700">
+            <a:solidFill>
+              <a:srgbClr val="E2E8F0"/>
+            </a:solidFill>
+            <a:prstDash val="solid"/>
+          </a:ln>
+        </p:spPr>
+      </p:sp>
+      <p:sp>
+        <p:nvSpPr>
+          <p:cNvPr id="10" name="Text 8"/>
+          <p:cNvSpPr/>
+          <p:nvPr/>
+        </p:nvSpPr>
+        <p:spPr>
+          <a:xfrm>
+            <a:off x="3474720" y="1892808"/>
+            <a:ext cx="2313432" cy="274320"/>
+          </a:xfrm>
+          <a:prstGeom prst="rect">
+            <a:avLst/>
+          </a:prstGeom>
+          <a:noFill/>
+          <a:ln/>
+        </p:spPr>
+        <p:txBody>
+          <a:bodyPr wrap="square" rtlCol="0" anchor="ctr"/>
+          <a:lstStyle/>
+          <a:p>
+            <a:pPr indent="0" marL="0">
+              <a:buNone/>
+            </a:pPr>
+            <a:r>
+              <a:rPr lang="en-US" sz="1050" dirty="0">
+                <a:solidFill>
+                  <a:srgbClr val="64748B"/>
                 </a:solidFill>
                 <a:latin typeface="Calibri" pitchFamily="34" charset="0"/>
                 <a:ea typeface="Calibri" pitchFamily="34" charset="-122"/>
                 <a:cs typeface="Calibri" pitchFamily="34" charset="-120"/>
               </a:rPr>
-              <a:t>Source: FY26 actual, Internal [1]. FY27 to FY29 modelled from Internal baseline [1] and BLR assumptions [2]. Values in Rs Cr and percent.</a:t>
+              <a:t>Locked, SEBI net worth</a:t>
+            </a:r>
+            <a:endParaRPr lang="en-US" sz="1050" dirty="0"/>
+          </a:p>
+        </p:txBody>
+      </p:sp>
+      <p:sp>
+        <p:nvSpPr>
+          <p:cNvPr id="11" name="Text 9"/>
+          <p:cNvSpPr/>
+          <p:nvPr/>
+        </p:nvSpPr>
+        <p:spPr>
+          <a:xfrm>
+            <a:off x="3474720" y="2130552"/>
+            <a:ext cx="2313432" cy="411480"/>
+          </a:xfrm>
+          <a:prstGeom prst="rect">
+            <a:avLst/>
+          </a:prstGeom>
+          <a:noFill/>
+          <a:ln/>
+        </p:spPr>
+        <p:txBody>
+          <a:bodyPr wrap="square" rtlCol="0" anchor="ctr"/>
+          <a:lstStyle/>
+          <a:p>
+            <a:pPr indent="0" marL="0">
+              <a:buNone/>
+            </a:pPr>
+            <a:r>
+              <a:rPr lang="en-US" sz="2000" b="1" dirty="0">
+                <a:solidFill>
+                  <a:srgbClr val="DC2626"/>
+                </a:solidFill>
+                <a:latin typeface="Cambria" pitchFamily="34" charset="0"/>
+                <a:ea typeface="Cambria" pitchFamily="34" charset="-122"/>
+                <a:cs typeface="Cambria" pitchFamily="34" charset="-120"/>
+              </a:rPr>
+              <a:t>Rs 25.0 Cr</a:t>
+            </a:r>
+            <a:endParaRPr lang="en-US" sz="2000" dirty="0"/>
+          </a:p>
+        </p:txBody>
+      </p:sp>
+      <p:sp>
+        <p:nvSpPr>
+          <p:cNvPr id="12" name="Text 10"/>
+          <p:cNvSpPr/>
+          <p:nvPr/>
+        </p:nvSpPr>
+        <p:spPr>
+          <a:xfrm>
+            <a:off x="3474720" y="2569464"/>
+            <a:ext cx="2313432" cy="365760"/>
+          </a:xfrm>
+          <a:prstGeom prst="rect">
+            <a:avLst/>
+          </a:prstGeom>
+          <a:noFill/>
+          <a:ln/>
+        </p:spPr>
+        <p:txBody>
+          <a:bodyPr wrap="square" rtlCol="0" anchor="ctr"/>
+          <a:lstStyle/>
+          <a:p>
+            <a:pPr indent="0" marL="0">
+              <a:buNone/>
+            </a:pPr>
+            <a:r>
+              <a:rPr lang="en-US" sz="900" dirty="0">
+                <a:solidFill>
+                  <a:srgbClr val="94A3B8"/>
+                </a:solidFill>
+                <a:latin typeface="Calibri" pitchFamily="34" charset="0"/>
+                <a:ea typeface="Calibri" pitchFamily="34" charset="-122"/>
+                <a:cs typeface="Calibri" pitchFamily="34" charset="-120"/>
+              </a:rPr>
+              <a:t>held at all times</a:t>
+            </a:r>
+            <a:endParaRPr lang="en-US" sz="900" dirty="0"/>
+          </a:p>
+        </p:txBody>
+      </p:sp>
+      <p:sp>
+        <p:nvSpPr>
+          <p:cNvPr id="13" name="Shape 11"/>
+          <p:cNvSpPr/>
+          <p:nvPr/>
+        </p:nvSpPr>
+        <p:spPr>
+          <a:xfrm>
+            <a:off x="6089904" y="1783080"/>
+            <a:ext cx="2606040" cy="1280160"/>
+          </a:xfrm>
+          <a:prstGeom prst="roundRect">
+            <a:avLst>
+              <a:gd name="adj" fmla="val 4286"/>
+            </a:avLst>
+          </a:prstGeom>
+          <a:solidFill>
+            <a:srgbClr val="F5F8FB"/>
+          </a:solidFill>
+          <a:ln w="12700">
+            <a:solidFill>
+              <a:srgbClr val="E2E8F0"/>
+            </a:solidFill>
+            <a:prstDash val="solid"/>
+          </a:ln>
+        </p:spPr>
+      </p:sp>
+      <p:sp>
+        <p:nvSpPr>
+          <p:cNvPr id="14" name="Text 12"/>
+          <p:cNvSpPr/>
+          <p:nvPr/>
+        </p:nvSpPr>
+        <p:spPr>
+          <a:xfrm>
+            <a:off x="6236208" y="1892808"/>
+            <a:ext cx="2313432" cy="274320"/>
+          </a:xfrm>
+          <a:prstGeom prst="rect">
+            <a:avLst/>
+          </a:prstGeom>
+          <a:noFill/>
+          <a:ln/>
+        </p:spPr>
+        <p:txBody>
+          <a:bodyPr wrap="square" rtlCol="0" anchor="ctr"/>
+          <a:lstStyle/>
+          <a:p>
+            <a:pPr indent="0" marL="0">
+              <a:buNone/>
+            </a:pPr>
+            <a:r>
+              <a:rPr lang="en-US" sz="1050" dirty="0">
+                <a:solidFill>
+                  <a:srgbClr val="64748B"/>
+                </a:solidFill>
+                <a:latin typeface="Calibri" pitchFamily="34" charset="0"/>
+                <a:ea typeface="Calibri" pitchFamily="34" charset="-122"/>
+                <a:cs typeface="Calibri" pitchFamily="34" charset="-120"/>
+              </a:rPr>
+              <a:t>Accessible funds</a:t>
+            </a:r>
+            <a:endParaRPr lang="en-US" sz="1050" dirty="0"/>
+          </a:p>
+        </p:txBody>
+      </p:sp>
+      <p:sp>
+        <p:nvSpPr>
+          <p:cNvPr id="15" name="Text 13"/>
+          <p:cNvSpPr/>
+          <p:nvPr/>
+        </p:nvSpPr>
+        <p:spPr>
+          <a:xfrm>
+            <a:off x="6236208" y="2130552"/>
+            <a:ext cx="2313432" cy="411480"/>
+          </a:xfrm>
+          <a:prstGeom prst="rect">
+            <a:avLst/>
+          </a:prstGeom>
+          <a:noFill/>
+          <a:ln/>
+        </p:spPr>
+        <p:txBody>
+          <a:bodyPr wrap="square" rtlCol="0" anchor="ctr"/>
+          <a:lstStyle/>
+          <a:p>
+            <a:pPr indent="0" marL="0">
+              <a:buNone/>
+            </a:pPr>
+            <a:r>
+              <a:rPr lang="en-US" sz="2000" b="1" dirty="0">
+                <a:solidFill>
+                  <a:srgbClr val="0F766E"/>
+                </a:solidFill>
+                <a:latin typeface="Cambria" pitchFamily="34" charset="0"/>
+                <a:ea typeface="Cambria" pitchFamily="34" charset="-122"/>
+                <a:cs typeface="Cambria" pitchFamily="34" charset="-120"/>
+              </a:rPr>
+              <a:t>about Rs 3.0 Cr</a:t>
+            </a:r>
+            <a:endParaRPr lang="en-US" sz="2000" dirty="0"/>
+          </a:p>
+        </p:txBody>
+      </p:sp>
+      <p:sp>
+        <p:nvSpPr>
+          <p:cNvPr id="16" name="Text 14"/>
+          <p:cNvSpPr/>
+          <p:nvPr/>
+        </p:nvSpPr>
+        <p:spPr>
+          <a:xfrm>
+            <a:off x="6236208" y="2569464"/>
+            <a:ext cx="2313432" cy="365760"/>
+          </a:xfrm>
+          <a:prstGeom prst="rect">
+            <a:avLst/>
+          </a:prstGeom>
+          <a:noFill/>
+          <a:ln/>
+        </p:spPr>
+        <p:txBody>
+          <a:bodyPr wrap="square" rtlCol="0" anchor="ctr"/>
+          <a:lstStyle/>
+          <a:p>
+            <a:pPr indent="0" marL="0">
+              <a:buNone/>
+            </a:pPr>
+            <a:r>
+              <a:rPr lang="en-US" sz="900" dirty="0">
+                <a:solidFill>
+                  <a:srgbClr val="94A3B8"/>
+                </a:solidFill>
+                <a:latin typeface="Calibri" pitchFamily="34" charset="0"/>
+                <a:ea typeface="Calibri" pitchFamily="34" charset="-122"/>
+                <a:cs typeface="Calibri" pitchFamily="34" charset="-120"/>
+              </a:rPr>
+              <a:t>non locked FD plus bank</a:t>
+            </a:r>
+            <a:endParaRPr lang="en-US" sz="900" dirty="0"/>
+          </a:p>
+        </p:txBody>
+      </p:sp>
+      <p:sp>
+        <p:nvSpPr>
+          <p:cNvPr id="17" name="Shape 15"/>
+          <p:cNvSpPr/>
+          <p:nvPr/>
+        </p:nvSpPr>
+        <p:spPr>
+          <a:xfrm>
+            <a:off x="8851392" y="1783080"/>
+            <a:ext cx="2606040" cy="1280160"/>
+          </a:xfrm>
+          <a:prstGeom prst="roundRect">
+            <a:avLst>
+              <a:gd name="adj" fmla="val 4286"/>
+            </a:avLst>
+          </a:prstGeom>
+          <a:solidFill>
+            <a:srgbClr val="F5F8FB"/>
+          </a:solidFill>
+          <a:ln w="12700">
+            <a:solidFill>
+              <a:srgbClr val="E2E8F0"/>
+            </a:solidFill>
+            <a:prstDash val="solid"/>
+          </a:ln>
+        </p:spPr>
+      </p:sp>
+      <p:sp>
+        <p:nvSpPr>
+          <p:cNvPr id="18" name="Text 16"/>
+          <p:cNvSpPr/>
+          <p:nvPr/>
+        </p:nvSpPr>
+        <p:spPr>
+          <a:xfrm>
+            <a:off x="8997696" y="1892808"/>
+            <a:ext cx="2313432" cy="274320"/>
+          </a:xfrm>
+          <a:prstGeom prst="rect">
+            <a:avLst/>
+          </a:prstGeom>
+          <a:noFill/>
+          <a:ln/>
+        </p:spPr>
+        <p:txBody>
+          <a:bodyPr wrap="square" rtlCol="0" anchor="ctr"/>
+          <a:lstStyle/>
+          <a:p>
+            <a:pPr indent="0" marL="0">
+              <a:buNone/>
+            </a:pPr>
+            <a:r>
+              <a:rPr lang="en-US" sz="1050" dirty="0">
+                <a:solidFill>
+                  <a:srgbClr val="64748B"/>
+                </a:solidFill>
+                <a:latin typeface="Calibri" pitchFamily="34" charset="0"/>
+                <a:ea typeface="Calibri" pitchFamily="34" charset="-122"/>
+                <a:cs typeface="Calibri" pitchFamily="34" charset="-120"/>
+              </a:rPr>
+              <a:t>Annual FD interest</a:t>
+            </a:r>
+            <a:endParaRPr lang="en-US" sz="1050" dirty="0"/>
+          </a:p>
+        </p:txBody>
+      </p:sp>
+      <p:sp>
+        <p:nvSpPr>
+          <p:cNvPr id="19" name="Text 17"/>
+          <p:cNvSpPr/>
+          <p:nvPr/>
+        </p:nvSpPr>
+        <p:spPr>
+          <a:xfrm>
+            <a:off x="8997696" y="2130552"/>
+            <a:ext cx="2313432" cy="411480"/>
+          </a:xfrm>
+          <a:prstGeom prst="rect">
+            <a:avLst/>
+          </a:prstGeom>
+          <a:noFill/>
+          <a:ln/>
+        </p:spPr>
+        <p:txBody>
+          <a:bodyPr wrap="square" rtlCol="0" anchor="ctr"/>
+          <a:lstStyle/>
+          <a:p>
+            <a:pPr indent="0" marL="0">
+              <a:buNone/>
+            </a:pPr>
+            <a:r>
+              <a:rPr lang="en-US" sz="2000" b="1" dirty="0">
+                <a:solidFill>
+                  <a:srgbClr val="0F766E"/>
+                </a:solidFill>
+                <a:latin typeface="Cambria" pitchFamily="34" charset="0"/>
+                <a:ea typeface="Cambria" pitchFamily="34" charset="-122"/>
+                <a:cs typeface="Cambria" pitchFamily="34" charset="-120"/>
+              </a:rPr>
+              <a:t>about Rs 1.8 Cr</a:t>
+            </a:r>
+            <a:endParaRPr lang="en-US" sz="2000" dirty="0"/>
+          </a:p>
+        </p:txBody>
+      </p:sp>
+      <p:sp>
+        <p:nvSpPr>
+          <p:cNvPr id="20" name="Text 18"/>
+          <p:cNvSpPr/>
+          <p:nvPr/>
+        </p:nvSpPr>
+        <p:spPr>
+          <a:xfrm>
+            <a:off x="8997696" y="2569464"/>
+            <a:ext cx="2313432" cy="365760"/>
+          </a:xfrm>
+          <a:prstGeom prst="rect">
+            <a:avLst/>
+          </a:prstGeom>
+          <a:noFill/>
+          <a:ln/>
+        </p:spPr>
+        <p:txBody>
+          <a:bodyPr wrap="square" rtlCol="0" anchor="ctr"/>
+          <a:lstStyle/>
+          <a:p>
+            <a:pPr indent="0" marL="0">
+              <a:buNone/>
+            </a:pPr>
+            <a:r>
+              <a:rPr lang="en-US" sz="900" dirty="0">
+                <a:solidFill>
+                  <a:srgbClr val="94A3B8"/>
+                </a:solidFill>
+                <a:latin typeface="Calibri" pitchFamily="34" charset="0"/>
+                <a:ea typeface="Calibri" pitchFamily="34" charset="-122"/>
+                <a:cs typeface="Calibri" pitchFamily="34" charset="-120"/>
+              </a:rPr>
+              <a:t>recurring cash income</a:t>
+            </a:r>
+            <a:endParaRPr lang="en-US" sz="900" dirty="0"/>
+          </a:p>
+        </p:txBody>
+      </p:sp>
+      <p:sp>
+        <p:nvSpPr>
+          <p:cNvPr id="21" name="Text 19"/>
+          <p:cNvSpPr/>
+          <p:nvPr/>
+        </p:nvSpPr>
+        <p:spPr>
+          <a:xfrm>
+            <a:off x="566928" y="3383280"/>
+            <a:ext cx="10972800" cy="2377440"/>
+          </a:xfrm>
+          <a:prstGeom prst="rect">
+            <a:avLst/>
+          </a:prstGeom>
+          <a:noFill/>
+          <a:ln/>
+        </p:spPr>
+        <p:txBody>
+          <a:bodyPr wrap="square" rtlCol="0" anchor="t"/>
+          <a:lstStyle/>
+          <a:p>
+            <a:pPr marL="177800" indent="-177800">
+              <a:spcAft>
+                <a:spcPts val="700"/>
+              </a:spcAft>
+              <a:buSzPct val="100000"/>
+              <a:buChar char="•"/>
+            </a:pPr>
+            <a:r>
+              <a:rPr lang="en-US" sz="1400" dirty="0">
+                <a:solidFill>
+                  <a:srgbClr val="334155"/>
+                </a:solidFill>
+                <a:latin typeface="Calibri" pitchFamily="34" charset="0"/>
+                <a:ea typeface="Calibri" pitchFamily="34" charset="-122"/>
+                <a:cs typeface="Calibri" pitchFamily="34" charset="-120"/>
+              </a:rPr>
+              <a:t>Base case S1 breaks even, so no drawdown is needed.</a:t>
+            </a:r>
+            <a:endParaRPr lang="en-US" sz="1400" dirty="0"/>
+          </a:p>
+          <a:p>
+            <a:pPr marL="177800" indent="-177800">
+              <a:spcAft>
+                <a:spcPts val="700"/>
+              </a:spcAft>
+              <a:buSzPct val="100000"/>
+              <a:buChar char="•"/>
+            </a:pPr>
+            <a:r>
+              <a:rPr lang="en-US" sz="1400" dirty="0">
+                <a:solidFill>
+                  <a:srgbClr val="334155"/>
+                </a:solidFill>
+                <a:latin typeface="Calibri" pitchFamily="34" charset="0"/>
+                <a:ea typeface="Calibri" pitchFamily="34" charset="-122"/>
+                <a:cs typeface="Calibri" pitchFamily="34" charset="-120"/>
+              </a:rPr>
+              <a:t>Even the worst case S3, a Rs 2.6 Cr loss, is about Rs 2.5 Cr of cash burn, comfortably inside the roughly Rs 3.0 Cr accessible plus Rs 1.8 Cr of annual interest.</a:t>
+            </a:r>
+            <a:endParaRPr lang="en-US" sz="1400" dirty="0"/>
+          </a:p>
+          <a:p>
+            <a:pPr marL="177800" indent="-177800">
+              <a:spcAft>
+                <a:spcPts val="700"/>
+              </a:spcAft>
+              <a:buSzPct val="100000"/>
+              <a:buChar char="•"/>
+            </a:pPr>
+            <a:r>
+              <a:rPr lang="en-US" sz="1400" dirty="0">
+                <a:solidFill>
+                  <a:srgbClr val="334155"/>
+                </a:solidFill>
+                <a:latin typeface="Calibri" pitchFamily="34" charset="0"/>
+                <a:ea typeface="Calibri" pitchFamily="34" charset="-122"/>
+                <a:cs typeface="Calibri" pitchFamily="34" charset="-120"/>
+              </a:rPr>
+              <a:t>The Rs 25 Cr net worth stays intact in every scenario, so the SEBI registration is never at risk. The question is operational self sufficiency, not survival.</a:t>
+            </a:r>
+            <a:endParaRPr lang="en-US" sz="1400" dirty="0"/>
+          </a:p>
+        </p:txBody>
+      </p:sp>
+      <p:sp>
+        <p:nvSpPr>
+          <p:cNvPr id="22" name="Text 20"/>
+          <p:cNvSpPr/>
+          <p:nvPr/>
+        </p:nvSpPr>
+        <p:spPr>
+          <a:xfrm>
+            <a:off x="566928" y="6446520"/>
+            <a:ext cx="11064240" cy="301752"/>
+          </a:xfrm>
+          <a:prstGeom prst="rect">
+            <a:avLst/>
+          </a:prstGeom>
+          <a:noFill/>
+          <a:ln/>
+        </p:spPr>
+        <p:txBody>
+          <a:bodyPr wrap="square" rtlCol="0" anchor="ctr"/>
+          <a:lstStyle/>
+          <a:p>
+            <a:pPr indent="0" marL="0">
+              <a:buNone/>
+            </a:pPr>
+            <a:r>
+              <a:rPr lang="en-US" sz="900" i="1" dirty="0">
+                <a:solidFill>
+                  <a:srgbClr val="94A3B8"/>
+                </a:solidFill>
+                <a:latin typeface="Calibri" pitchFamily="34" charset="0"/>
+                <a:ea typeface="Calibri" pitchFamily="34" charset="-122"/>
+                <a:cs typeface="Calibri" pitchFamily="34" charset="-120"/>
+              </a:rPr>
+              <a:t>Source: Internal [1]. SEBI net worth basis [10].</a:t>
             </a:r>
             <a:endParaRPr lang="en-US" sz="900" dirty="0"/>
           </a:p>
@@ -12830,7 +15229,7 @@
                 <a:ea typeface="Calibri" pitchFamily="34" charset="-122"/>
                 <a:cs typeface="Calibri" pitchFamily="34" charset="-120"/>
               </a:rPr>
-              <a:t>WHERE WE SIT</a:t>
+              <a:t>THE CLIMB</a:t>
             </a:r>
             <a:endParaRPr lang="en-US" sz="1100" dirty="0"/>
           </a:p>
@@ -12861,7 +15260,7 @@
               <a:buNone/>
             </a:pPr>
             <a:r>
-              <a:rPr lang="en-US" sz="3000" b="1" dirty="0">
+              <a:rPr lang="en-US" sz="2900" b="1" dirty="0">
                 <a:solidFill>
                   <a:srgbClr val="0F172A"/>
                 </a:solidFill>
@@ -12869,9 +15268,9 @@
                 <a:ea typeface="Cambria" pitchFamily="34" charset="-122"/>
                 <a:cs typeface="Cambria" pitchFamily="34" charset="-120"/>
               </a:rPr>
-              <a:t>ACER on the industry map, and the path</a:t>
-            </a:r>
-            <a:endParaRPr lang="en-US" sz="3000" dirty="0"/>
+              <a:t>Revenue trajectory and the income mix flip</a:t>
+            </a:r>
+            <a:endParaRPr lang="en-US" sz="2900" dirty="0"/>
           </a:p>
         </p:txBody>
       </p:sp>
@@ -12883,8 +15282,8 @@
         </p:nvSpPr>
         <p:spPr>
           <a:xfrm>
-            <a:off x="566928" y="1298448"/>
-            <a:ext cx="11064240" cy="457200"/>
+            <a:off x="566928" y="1417320"/>
+            <a:ext cx="5486400" cy="274320"/>
           </a:xfrm>
           <a:prstGeom prst="rect">
             <a:avLst/>
@@ -12900,17 +15299,17 @@
               <a:buNone/>
             </a:pPr>
             <a:r>
-              <a:rPr lang="en-US" sz="1450" dirty="0">
-                <a:solidFill>
-                  <a:srgbClr val="64748B"/>
+              <a:rPr lang="en-US" sz="1200" b="1" dirty="0">
+                <a:solidFill>
+                  <a:srgbClr val="334155"/>
                 </a:solidFill>
                 <a:latin typeface="Calibri" pitchFamily="34" charset="0"/>
                 <a:ea typeface="Calibri" pitchFamily="34" charset="-122"/>
                 <a:cs typeface="Calibri" pitchFamily="34" charset="-120"/>
               </a:rPr>
-              <a:t>Our FY28 target is a credible first step. Infomerics and Acuite show a small CRA can scale on BLR.</a:t>
-            </a:r>
-            <a:endParaRPr lang="en-US" sz="1450" dirty="0"/>
+              <a:t>Operating revenue build, base case (Rs Cr)</a:t>
+            </a:r>
+            <a:endParaRPr lang="en-US" sz="1200" dirty="0"/>
           </a:p>
         </p:txBody>
       </p:sp>
@@ -12921,8 +15320,8 @@
           <p:nvPr/>
         </p:nvGraphicFramePr>
         <p:xfrm>
-          <a:off x="566928" y="1783080"/>
-          <a:ext cx="7680960" cy="4206240"/>
+          <a:off x="566928" y="1737360"/>
+          <a:ext cx="5669280" cy="4023360"/>
         </p:xfrm>
         <a:graphic xmlns:a="http://schemas.openxmlformats.org/drawingml/2006/main">
           <a:graphicData uri="http://schemas.openxmlformats.org/drawingml/2006/chart">
@@ -12938,28 +15337,24 @@
         </p:nvSpPr>
         <p:spPr>
           <a:xfrm>
-            <a:off x="8503920" y="2011680"/>
-            <a:ext cx="3200400" cy="3657600"/>
-          </a:xfrm>
-          <a:prstGeom prst="rect">
-            <a:avLst/>
-          </a:prstGeom>
-          <a:noFill/>
-          <a:ln/>
-        </p:spPr>
-        <p:txBody>
-          <a:bodyPr wrap="square" rtlCol="0" anchor="t"/>
-          <a:lstStyle/>
-          <a:p>
-            <a:pPr marL="177800" indent="-177800">
-              <a:spcAft>
-                <a:spcPts val="700"/>
-              </a:spcAft>
-              <a:buSzPct val="100000"/>
-              <a:buChar char="•"/>
-            </a:pPr>
-            <a:r>
-              <a:rPr lang="en-US" sz="1250" dirty="0">
+            <a:off x="6492240" y="1417320"/>
+            <a:ext cx="5486400" cy="274320"/>
+          </a:xfrm>
+          <a:prstGeom prst="rect">
+            <a:avLst/>
+          </a:prstGeom>
+          <a:noFill/>
+          <a:ln/>
+        </p:spPr>
+        <p:txBody>
+          <a:bodyPr wrap="square" rtlCol="0" anchor="ctr"/>
+          <a:lstStyle/>
+          <a:p>
+            <a:pPr indent="0" marL="0">
+              <a:buNone/>
+            </a:pPr>
+            <a:r>
+              <a:rPr lang="en-US" sz="1200" b="1" dirty="0">
                 <a:solidFill>
                   <a:srgbClr val="334155"/>
                 </a:solidFill>
@@ -12967,109 +15362,62 @@
                 <a:ea typeface="Calibri" pitchFamily="34" charset="-122"/>
                 <a:cs typeface="Calibri" pitchFamily="34" charset="-120"/>
               </a:rPr>
-              <a:t>ACER at inception is about 2% of the smallest established peer.</a:t>
-            </a:r>
-            <a:endParaRPr lang="en-US" sz="1250" dirty="0"/>
-          </a:p>
-          <a:p>
-            <a:pPr marL="177800" indent="-177800">
-              <a:spcAft>
-                <a:spcPts val="700"/>
-              </a:spcAft>
-              <a:buSzPct val="100000"/>
-              <a:buChar char="•"/>
-            </a:pPr>
-            <a:r>
-              <a:rPr lang="en-US" sz="1250" dirty="0">
-                <a:solidFill>
-                  <a:srgbClr val="334155"/>
+              <a:t>Income mix, FD versus ratings</a:t>
+            </a:r>
+            <a:endParaRPr lang="en-US" sz="1200" dirty="0"/>
+          </a:p>
+        </p:txBody>
+      </p:sp>
+      <p:graphicFrame>
+        <p:nvGraphicFramePr>
+          <p:cNvPr id="8" name="Chart 1" descr=""/>
+          <p:cNvGraphicFramePr/>
+          <p:nvPr/>
+        </p:nvGraphicFramePr>
+        <p:xfrm>
+          <a:off x="6400800" y="1737360"/>
+          <a:ext cx="5394960" cy="4023360"/>
+        </p:xfrm>
+        <a:graphic xmlns:a="http://schemas.openxmlformats.org/drawingml/2006/main">
+          <a:graphicData uri="http://schemas.openxmlformats.org/drawingml/2006/chart">
+            <c:chart xmlns:c="http://schemas.openxmlformats.org/drawingml/2006/chart" r:id="rId2"/>
+          </a:graphicData>
+        </a:graphic>
+      </p:graphicFrame>
+      <p:sp>
+        <p:nvSpPr>
+          <p:cNvPr id="9" name="Text 5"/>
+          <p:cNvSpPr/>
+          <p:nvPr/>
+        </p:nvSpPr>
+        <p:spPr>
+          <a:xfrm>
+            <a:off x="566928" y="6446520"/>
+            <a:ext cx="11064240" cy="301752"/>
+          </a:xfrm>
+          <a:prstGeom prst="rect">
+            <a:avLst/>
+          </a:prstGeom>
+          <a:noFill/>
+          <a:ln/>
+        </p:spPr>
+        <p:txBody>
+          <a:bodyPr wrap="square" rtlCol="0" anchor="ctr"/>
+          <a:lstStyle/>
+          <a:p>
+            <a:pPr indent="0" marL="0">
+              <a:buNone/>
+            </a:pPr>
+            <a:r>
+              <a:rPr lang="en-US" sz="900" i="1" dirty="0">
+                <a:solidFill>
+                  <a:srgbClr val="94A3B8"/>
                 </a:solidFill>
                 <a:latin typeface="Calibri" pitchFamily="34" charset="0"/>
                 <a:ea typeface="Calibri" pitchFamily="34" charset="-122"/>
                 <a:cs typeface="Calibri" pitchFamily="34" charset="-120"/>
               </a:rPr>
-              <a:t>Infomerics grew Rs 64 Cr to Rs 95 Cr in three years.</a:t>
-            </a:r>
-            <a:endParaRPr lang="en-US" sz="1250" dirty="0"/>
-          </a:p>
-          <a:p>
-            <a:pPr marL="177800" indent="-177800">
-              <a:spcAft>
-                <a:spcPts val="700"/>
-              </a:spcAft>
-              <a:buSzPct val="100000"/>
-              <a:buChar char="•"/>
-            </a:pPr>
-            <a:r>
-              <a:rPr lang="en-US" sz="1250" dirty="0">
-                <a:solidFill>
-                  <a:srgbClr val="334155"/>
-                </a:solidFill>
-                <a:latin typeface="Calibri" pitchFamily="34" charset="0"/>
-                <a:ea typeface="Calibri" pitchFamily="34" charset="-122"/>
-                <a:cs typeface="Calibri" pitchFamily="34" charset="-120"/>
-              </a:rPr>
-              <a:t>Acuite sits at about Rs 57 Cr.</a:t>
-            </a:r>
-            <a:endParaRPr lang="en-US" sz="1250" dirty="0"/>
-          </a:p>
-          <a:p>
-            <a:pPr marL="177800" indent="-177800">
-              <a:spcAft>
-                <a:spcPts val="700"/>
-              </a:spcAft>
-              <a:buSzPct val="100000"/>
-              <a:buChar char="•"/>
-            </a:pPr>
-            <a:r>
-              <a:rPr lang="en-US" sz="1250" dirty="0">
-                <a:solidFill>
-                  <a:srgbClr val="334155"/>
-                </a:solidFill>
-                <a:latin typeface="Calibri" pitchFamily="34" charset="0"/>
-                <a:ea typeface="Calibri" pitchFamily="34" charset="-122"/>
-                <a:cs typeface="Calibri" pitchFamily="34" charset="-120"/>
-              </a:rPr>
-              <a:t>Our FY28 Rs 8 Cr is the first rung of that same ladder.</a:t>
-            </a:r>
-            <a:endParaRPr lang="en-US" sz="1250" dirty="0"/>
-          </a:p>
-        </p:txBody>
-      </p:sp>
-      <p:sp>
-        <p:nvSpPr>
-          <p:cNvPr id="8" name="Text 5"/>
-          <p:cNvSpPr/>
-          <p:nvPr/>
-        </p:nvSpPr>
-        <p:spPr>
-          <a:xfrm>
-            <a:off x="566928" y="6437376"/>
-            <a:ext cx="11064240" cy="310896"/>
-          </a:xfrm>
-          <a:prstGeom prst="rect">
-            <a:avLst/>
-          </a:prstGeom>
-          <a:noFill/>
-          <a:ln/>
-        </p:spPr>
-        <p:txBody>
-          <a:bodyPr wrap="square" rtlCol="0" anchor="ctr"/>
-          <a:lstStyle/>
-          <a:p>
-            <a:pPr indent="0" marL="0">
-              <a:buNone/>
-            </a:pPr>
-            <a:r>
-              <a:rPr lang="en-US" sz="900" i="1" dirty="0">
-                <a:solidFill>
-                  <a:srgbClr val="94A3B8"/>
-                </a:solidFill>
-                <a:latin typeface="Calibri" pitchFamily="34" charset="0"/>
-                <a:ea typeface="Calibri" pitchFamily="34" charset="-122"/>
-                <a:cs typeface="Calibri" pitchFamily="34" charset="-120"/>
-              </a:rPr>
-              <a:t>Source: peer figures from each company's official disclosures, CRISIL [3], CARE [5], India Ratings [6], Infomerics [7], Acuite [8]. ACER, Internal [1] and plan [2].</a:t>
+              <a:t>Source: FY26 actual, Internal [1]. FY27 to FY29 modelled from Internal baseline [1] and BLR assumptions [2].</a:t>
             </a:r>
             <a:endParaRPr lang="en-US" sz="900" dirty="0"/>
           </a:p>

--- a/board/AOP_board_presentation.pptx
+++ b/board/AOP_board_presentation.pptx
@@ -123,6 +123,791 @@
   <c:date1904 val="0"/>
   <c:roundedCorners val="1"/>
   <c:chart>
+    <c:autoTitleDeleted val="1"/>
+    <c:plotArea>
+      <c:layout/>
+      <c:areaChart>
+        <c:varyColors val="0"/>
+        <c:ser>
+          <c:idx val="0"/>
+          <c:order val="0"/>
+          <c:tx>
+            <c:strRef>
+              <c:f>Sheet1!$B$1</c:f>
+              <c:strCache>
+                <c:ptCount val="1"/>
+                <c:pt idx="0">
+                  <c:v>Income (FD + ratings)</c:v>
+                </c:pt>
+              </c:strCache>
+            </c:strRef>
+          </c:tx>
+          <c:spPr>
+            <a:solidFill>
+              <a:srgbClr val="0F766E">
+                <a:alpha val="35000"/>
+              </a:srgbClr>
+            </a:solidFill>
+            <a:effectLst/>
+          </c:spPr>
+          <c:invertIfNegative val="0"/>
+          <c:dLbls>
+            <c:numFmt formatCode="#,##0" sourceLinked="0"/>
+            <c:txPr>
+              <a:bodyPr/>
+              <a:lstStyle/>
+              <a:p>
+                <a:pPr>
+                  <a:defRPr b="0" i="0" strike="noStrike" sz="1200" u="none">
+                    <a:solidFill>
+                      <a:srgbClr val="000000"/>
+                    </a:solidFill>
+                    <a:latin typeface="Arial"/>
+                  </a:defRPr>
+                </a:pPr>
+              </a:p>
+            </c:txPr>
+            <c:showLegendKey val="0"/>
+            <c:showVal val="0"/>
+            <c:showCatName val="0"/>
+            <c:showSerName val="0"/>
+            <c:showPercent val="0"/>
+            <c:showBubbleSize val="0"/>
+            <c:showLeaderLines val="0"/>
+          </c:dLbls>
+          <c:cat>
+            <c:multiLvlStrRef>
+              <c:f>Sheet1!$A$2:$A$16</c:f>
+              <c:multiLvlStrCache>
+                <c:ptCount val="15"/>
+                <c:lvl>
+                  <c:pt idx="0">
+                    <c:v>Apr</c:v>
+                  </c:pt>
+                  <c:pt idx="1">
+                    <c:v>May</c:v>
+                  </c:pt>
+                  <c:pt idx="2">
+                    <c:v>Jun</c:v>
+                  </c:pt>
+                  <c:pt idx="3">
+                    <c:v>Jul</c:v>
+                  </c:pt>
+                  <c:pt idx="4">
+                    <c:v>Aug</c:v>
+                  </c:pt>
+                  <c:pt idx="5">
+                    <c:v>Sep</c:v>
+                  </c:pt>
+                  <c:pt idx="6">
+                    <c:v>Oct</c:v>
+                  </c:pt>
+                  <c:pt idx="7">
+                    <c:v>Nov</c:v>
+                  </c:pt>
+                  <c:pt idx="8">
+                    <c:v>Dec</c:v>
+                  </c:pt>
+                  <c:pt idx="9">
+                    <c:v>Jan</c:v>
+                  </c:pt>
+                  <c:pt idx="10">
+                    <c:v>Feb</c:v>
+                  </c:pt>
+                  <c:pt idx="11">
+                    <c:v>Mar</c:v>
+                  </c:pt>
+                  <c:pt idx="12">
+                    <c:v>Apr</c:v>
+                  </c:pt>
+                  <c:pt idx="13">
+                    <c:v>May</c:v>
+                  </c:pt>
+                  <c:pt idx="14">
+                    <c:v>Jun</c:v>
+                  </c:pt>
+                </c:lvl>
+              </c:multiLvlStrCache>
+            </c:multiLvlStrRef>
+          </c:cat>
+          <c:val>
+            <c:numRef>
+              <c:f>Sheet1!$B$2:$B$16</c:f>
+              <c:numCache>
+                <c:formatCode>General</c:formatCode>
+                <c:ptCount val="15"/>
+                <c:pt idx="0">
+                  <c:v>0</c:v>
+                </c:pt>
+                <c:pt idx="1">
+                  <c:v>0</c:v>
+                </c:pt>
+                <c:pt idx="2">
+                  <c:v>0.134</c:v>
+                </c:pt>
+                <c:pt idx="3">
+                  <c:v>0.015</c:v>
+                </c:pt>
+                <c:pt idx="4">
+                  <c:v>0.146</c:v>
+                </c:pt>
+                <c:pt idx="5">
+                  <c:v>0.29</c:v>
+                </c:pt>
+                <c:pt idx="6">
+                  <c:v>0.146</c:v>
+                </c:pt>
+                <c:pt idx="7">
+                  <c:v>0.145</c:v>
+                </c:pt>
+                <c:pt idx="8">
+                  <c:v>0.145</c:v>
+                </c:pt>
+                <c:pt idx="9">
+                  <c:v>0.156</c:v>
+                </c:pt>
+                <c:pt idx="10">
+                  <c:v>0.235</c:v>
+                </c:pt>
+                <c:pt idx="11">
+                  <c:v>0.149</c:v>
+                </c:pt>
+                <c:pt idx="12">
+                  <c:v>0.175</c:v>
+                </c:pt>
+                <c:pt idx="13">
+                  <c:v>0.194</c:v>
+                </c:pt>
+                <c:pt idx="14">
+                  <c:v>0.232</c:v>
+                </c:pt>
+              </c:numCache>
+            </c:numRef>
+          </c:val>
+        </c:ser>
+        <c:dLbls>
+          <c:numFmt formatCode="#,##0" sourceLinked="0"/>
+          <c:txPr>
+            <a:bodyPr/>
+            <a:lstStyle/>
+            <a:p>
+              <a:pPr>
+                <a:defRPr b="0" i="0" strike="noStrike" sz="1200" u="none">
+                  <a:solidFill>
+                    <a:srgbClr val="000000"/>
+                  </a:solidFill>
+                  <a:latin typeface="Arial"/>
+                </a:defRPr>
+              </a:pPr>
+            </a:p>
+          </c:txPr>
+          <c:showLegendKey val="0"/>
+          <c:showVal val="0"/>
+          <c:showCatName val="0"/>
+          <c:showSerName val="0"/>
+          <c:showPercent val="0"/>
+          <c:showBubbleSize val="0"/>
+          <c:showLeaderLines val="0"/>
+        </c:dLbls>
+        <c:axId val="2094734554"/>
+        <c:axId val="2094734552"/>
+        <c:axId val="2094734556"/>
+      </c:areaChart>
+      <c:lineChart>
+        <c:varyColors val="0"/>
+        <c:ser>
+          <c:idx val="1"/>
+          <c:order val="1"/>
+          <c:tx>
+            <c:strRef>
+              <c:f>Sheet1!$C$1</c:f>
+              <c:strCache>
+                <c:ptCount val="1"/>
+                <c:pt idx="0">
+                  <c:v>Expense, all in</c:v>
+                </c:pt>
+              </c:strCache>
+            </c:strRef>
+          </c:tx>
+          <c:spPr>
+            <a:solidFill>
+              <a:srgbClr val="334155"/>
+            </a:solidFill>
+            <a:ln w="25400" cap="flat">
+              <a:solidFill>
+                <a:srgbClr val="334155"/>
+              </a:solidFill>
+              <a:prstDash val="solid"/>
+              <a:round/>
+            </a:ln>
+            <a:effectLst/>
+          </c:spPr>
+          <c:invertIfNegative val="0"/>
+          <c:dLbls>
+            <c:numFmt formatCode="#,##0" sourceLinked="0"/>
+            <c:txPr>
+              <a:bodyPr/>
+              <a:lstStyle/>
+              <a:p>
+                <a:pPr>
+                  <a:defRPr b="0" i="0" strike="noStrike" sz="1200" u="none">
+                    <a:solidFill>
+                      <a:srgbClr val="000000"/>
+                    </a:solidFill>
+                    <a:latin typeface="Arial"/>
+                  </a:defRPr>
+                </a:pPr>
+              </a:p>
+            </c:txPr>
+            <c:showLegendKey val="0"/>
+            <c:showVal val="0"/>
+            <c:showCatName val="0"/>
+            <c:showSerName val="0"/>
+            <c:showPercent val="0"/>
+            <c:showBubbleSize val="0"/>
+            <c:showLeaderLines val="0"/>
+          </c:dLbls>
+          <c:marker>
+            <c:symbol val="none"/>
+            <c:size val="6"/>
+            <c:spPr>
+              <a:solidFill>
+                <a:srgbClr val="334155"/>
+              </a:solidFill>
+              <a:ln w="9525" cap="flat">
+                <a:solidFill>
+                  <a:srgbClr val="334155"/>
+                </a:solidFill>
+                <a:prstDash val="solid"/>
+                <a:round/>
+              </a:ln>
+              <a:effectLst/>
+            </c:spPr>
+          </c:marker>
+          <c:cat>
+            <c:multiLvlStrRef>
+              <c:f>Sheet1!$A$2:$A$16</c:f>
+              <c:multiLvlStrCache>
+                <c:ptCount val="15"/>
+                <c:lvl>
+                  <c:pt idx="0">
+                    <c:v>Apr</c:v>
+                  </c:pt>
+                  <c:pt idx="1">
+                    <c:v>May</c:v>
+                  </c:pt>
+                  <c:pt idx="2">
+                    <c:v>Jun</c:v>
+                  </c:pt>
+                  <c:pt idx="3">
+                    <c:v>Jul</c:v>
+                  </c:pt>
+                  <c:pt idx="4">
+                    <c:v>Aug</c:v>
+                  </c:pt>
+                  <c:pt idx="5">
+                    <c:v>Sep</c:v>
+                  </c:pt>
+                  <c:pt idx="6">
+                    <c:v>Oct</c:v>
+                  </c:pt>
+                  <c:pt idx="7">
+                    <c:v>Nov</c:v>
+                  </c:pt>
+                  <c:pt idx="8">
+                    <c:v>Dec</c:v>
+                  </c:pt>
+                  <c:pt idx="9">
+                    <c:v>Jan</c:v>
+                  </c:pt>
+                  <c:pt idx="10">
+                    <c:v>Feb</c:v>
+                  </c:pt>
+                  <c:pt idx="11">
+                    <c:v>Mar</c:v>
+                  </c:pt>
+                  <c:pt idx="12">
+                    <c:v>Apr</c:v>
+                  </c:pt>
+                  <c:pt idx="13">
+                    <c:v>May</c:v>
+                  </c:pt>
+                  <c:pt idx="14">
+                    <c:v>Jun</c:v>
+                  </c:pt>
+                </c:lvl>
+              </c:multiLvlStrCache>
+            </c:multiLvlStrRef>
+          </c:cat>
+          <c:val>
+            <c:numRef>
+              <c:f>Sheet1!$C$2:$C$16</c:f>
+              <c:numCache>
+                <c:formatCode>General</c:formatCode>
+                <c:ptCount val="15"/>
+                <c:pt idx="0">
+                  <c:v>0.036</c:v>
+                </c:pt>
+                <c:pt idx="1">
+                  <c:v>0.095</c:v>
+                </c:pt>
+                <c:pt idx="2">
+                  <c:v>0.171</c:v>
+                </c:pt>
+                <c:pt idx="3">
+                  <c:v>0.1</c:v>
+                </c:pt>
+                <c:pt idx="4">
+                  <c:v>0.14</c:v>
+                </c:pt>
+                <c:pt idx="5">
+                  <c:v>0.183</c:v>
+                </c:pt>
+                <c:pt idx="6">
+                  <c:v>0.177</c:v>
+                </c:pt>
+                <c:pt idx="7">
+                  <c:v>0.196</c:v>
+                </c:pt>
+                <c:pt idx="8">
+                  <c:v>0.334</c:v>
+                </c:pt>
+                <c:pt idx="9">
+                  <c:v>0.267</c:v>
+                </c:pt>
+                <c:pt idx="10">
+                  <c:v>0.359</c:v>
+                </c:pt>
+                <c:pt idx="11">
+                  <c:v>0.38</c:v>
+                </c:pt>
+                <c:pt idx="12">
+                  <c:v>0.364</c:v>
+                </c:pt>
+                <c:pt idx="13">
+                  <c:v>0.33</c:v>
+                </c:pt>
+                <c:pt idx="14">
+                  <c:v>0.463</c:v>
+                </c:pt>
+              </c:numCache>
+            </c:numRef>
+          </c:val>
+          <c:smooth val="0"/>
+        </c:ser>
+        <c:dLbls>
+          <c:numFmt formatCode="#,##0" sourceLinked="0"/>
+          <c:txPr>
+            <a:bodyPr/>
+            <a:lstStyle/>
+            <a:p>
+              <a:pPr>
+                <a:defRPr b="0" i="0" strike="noStrike" sz="1200" u="none">
+                  <a:solidFill>
+                    <a:srgbClr val="000000"/>
+                  </a:solidFill>
+                  <a:latin typeface="Arial"/>
+                </a:defRPr>
+              </a:pPr>
+            </a:p>
+          </c:txPr>
+          <c:showLegendKey val="0"/>
+          <c:showVal val="0"/>
+          <c:showCatName val="0"/>
+          <c:showSerName val="0"/>
+          <c:showPercent val="0"/>
+          <c:showBubbleSize val="0"/>
+          <c:showLeaderLines val="0"/>
+        </c:dLbls>
+        <c:marker val="1"/>
+        <c:axId val="2094734554"/>
+        <c:axId val="2094734552"/>
+        <c:axId val="2094734556"/>
+      </c:lineChart>
+      <c:catAx>
+        <c:axId val="2094734554"/>
+        <c:scaling>
+          <c:orientation val="minMax"/>
+        </c:scaling>
+        <c:delete val="0"/>
+        <c:axPos val="b"/>
+        <c:numFmt formatCode="General" sourceLinked="1"/>
+        <c:majorTickMark val="out"/>
+        <c:minorTickMark val="none"/>
+        <c:tickLblPos val="low"/>
+        <c:spPr>
+          <a:ln w="12700" cap="flat">
+            <a:solidFill>
+              <a:srgbClr val="888888"/>
+            </a:solidFill>
+            <a:prstDash val="solid"/>
+            <a:round/>
+          </a:ln>
+        </c:spPr>
+        <c:txPr>
+          <a:bodyPr/>
+          <a:lstStyle/>
+          <a:p>
+            <a:pPr>
+              <a:defRPr sz="800" b="0" i="0" u="none" strike="noStrike">
+                <a:solidFill>
+                  <a:srgbClr val="94A3B8"/>
+                </a:solidFill>
+                <a:latin typeface="Calibri"/>
+              </a:defRPr>
+            </a:pPr>
+            <a:endParaRPr lang="en-US"/>
+          </a:p>
+        </c:txPr>
+        <c:crossAx val="2094734552"/>
+        <c:crosses val="autoZero"/>
+        <c:auto val="1"/>
+        <c:lblAlgn val="ctr"/>
+        <c:noMultiLvlLbl val="1"/>
+      </c:catAx>
+      <c:valAx>
+        <c:axId val="2094734552"/>
+        <c:scaling>
+          <c:orientation val="minMax"/>
+          <c:max val="0.5"/>
+          <c:min val="0"/>
+        </c:scaling>
+        <c:delete val="0"/>
+        <c:axPos val="l"/>
+        <c:majorGridlines>
+          <c:spPr>
+            <a:ln w="6350" cap="flat">
+              <a:solidFill>
+                <a:srgbClr val="E2E8F0"/>
+              </a:solidFill>
+              <a:prstDash val="solid"/>
+              <a:round/>
+            </a:ln>
+          </c:spPr>
+        </c:majorGridlines>
+        <c:numFmt formatCode="General" sourceLinked="0"/>
+        <c:majorTickMark val="out"/>
+        <c:minorTickMark val="none"/>
+        <c:tickLblPos val="nextTo"/>
+        <c:spPr>
+          <a:ln w="12700" cap="flat">
+            <a:solidFill>
+              <a:srgbClr val="888888"/>
+            </a:solidFill>
+            <a:prstDash val="solid"/>
+            <a:round/>
+          </a:ln>
+        </c:spPr>
+        <c:txPr>
+          <a:bodyPr/>
+          <a:lstStyle/>
+          <a:p>
+            <a:pPr>
+              <a:defRPr sz="900" b="0" i="0" u="none" strike="noStrike">
+                <a:solidFill>
+                  <a:srgbClr val="94A3B8"/>
+                </a:solidFill>
+                <a:latin typeface="Calibri"/>
+              </a:defRPr>
+            </a:pPr>
+            <a:endParaRPr lang="en-US"/>
+          </a:p>
+        </c:txPr>
+        <c:crossAx val="2094734554"/>
+        <c:crosses val="autoZero"/>
+        <c:crossBetween val="midCat"/>
+      </c:valAx>
+      <c:spPr>
+        <a:noFill/>
+        <a:ln>
+          <a:noFill/>
+        </a:ln>
+        <a:effectLst/>
+      </c:spPr>
+    </c:plotArea>
+    <c:legend>
+      <c:legendPos val="b"/>
+      <c:overlay val="0"/>
+      <c:txPr>
+        <a:bodyPr/>
+        <a:lstStyle/>
+        <a:p>
+          <a:pPr>
+            <a:defRPr sz="1000">
+              <a:solidFill>
+                <a:srgbClr val="334155"/>
+              </a:solidFill>
+              <a:latin typeface="Calibri"/>
+              <a:cs typeface="Calibri"/>
+            </a:defRPr>
+          </a:pPr>
+          <a:endParaRPr lang="en-US"/>
+        </a:p>
+      </c:txPr>
+    </c:legend>
+    <c:plotVisOnly val="1"/>
+    <c:dispBlanksAs val="span"/>
+  </c:chart>
+  <c:spPr>
+    <a:noFill/>
+    <a:ln>
+      <a:noFill/>
+    </a:ln>
+    <a:effectLst/>
+  </c:spPr>
+  <c:externalData r:id="rId1">
+    <c:autoUpdate val="0"/>
+  </c:externalData>
+</c:chartSpace>
+</file>
+
+<file path=ppt/charts/chart10.xml><?xml version="1.0" encoding="utf-8"?>
+<c:chartSpace xmlns:c="http://schemas.openxmlformats.org/drawingml/2006/chart" xmlns:a="http://schemas.openxmlformats.org/drawingml/2006/main" xmlns:r="http://schemas.openxmlformats.org/officeDocument/2006/relationships">
+  <c:date1904 val="0"/>
+  <c:roundedCorners val="1"/>
+  <c:chart>
+    <c:autoTitleDeleted val="1"/>
+    <c:plotArea>
+      <c:layout/>
+      <c:barChart>
+        <c:barDir val="col"/>
+        <c:grouping val="clustered"/>
+        <c:varyColors val="0"/>
+        <c:ser>
+          <c:idx val="0"/>
+          <c:order val="0"/>
+          <c:tx>
+            <c:strRef>
+              <c:f>Sheet1!$B$1</c:f>
+              <c:strCache>
+                <c:ptCount val="1"/>
+                <c:pt idx="0">
+                  <c:v>ACER rating revenue</c:v>
+                </c:pt>
+              </c:strCache>
+            </c:strRef>
+          </c:tx>
+          <c:spPr>
+            <a:solidFill>
+              <a:srgbClr val="0F766E"/>
+            </a:solidFill>
+            <a:effectLst/>
+          </c:spPr>
+          <c:invertIfNegative val="0"/>
+          <c:dLbls>
+            <c:numFmt formatCode="#,##0" sourceLinked="0"/>
+            <c:txPr>
+              <a:bodyPr/>
+              <a:lstStyle/>
+              <a:p>
+                <a:pPr>
+                  <a:defRPr b="0" i="0" strike="noStrike" sz="950" u="none">
+                    <a:solidFill>
+                      <a:srgbClr val="334155"/>
+                    </a:solidFill>
+                    <a:latin typeface="Calibri"/>
+                  </a:defRPr>
+                </a:pPr>
+              </a:p>
+            </c:txPr>
+            <c:showLegendKey val="0"/>
+            <c:showVal val="1"/>
+            <c:showCatName val="0"/>
+            <c:showSerName val="0"/>
+            <c:showPercent val="0"/>
+            <c:showBubbleSize val="0"/>
+            <c:showLeaderLines val="0"/>
+          </c:dLbls>
+          <c:cat>
+            <c:multiLvlStrRef>
+              <c:f>Sheet1!$A$2:$A$6</c:f>
+              <c:multiLvlStrCache>
+                <c:ptCount val="5"/>
+                <c:lvl>
+                  <c:pt idx="0">
+                    <c:v>FY26</c:v>
+                  </c:pt>
+                  <c:pt idx="1">
+                    <c:v>FY27</c:v>
+                  </c:pt>
+                  <c:pt idx="2">
+                    <c:v>FY28</c:v>
+                  </c:pt>
+                  <c:pt idx="3">
+                    <c:v>FY29</c:v>
+                  </c:pt>
+                  <c:pt idx="4">
+                    <c:v>FY30</c:v>
+                  </c:pt>
+                </c:lvl>
+              </c:multiLvlStrCache>
+            </c:multiLvlStrRef>
+          </c:cat>
+          <c:val>
+            <c:numRef>
+              <c:f>Sheet1!$B$2:$B$6</c:f>
+              <c:numCache>
+                <c:formatCode>General</c:formatCode>
+                <c:ptCount val="5"/>
+                <c:pt idx="0">
+                  <c:v>0.08</c:v>
+                </c:pt>
+                <c:pt idx="1">
+                  <c:v>3.8</c:v>
+                </c:pt>
+                <c:pt idx="2">
+                  <c:v>8.3</c:v>
+                </c:pt>
+                <c:pt idx="3">
+                  <c:v>11.3</c:v>
+                </c:pt>
+                <c:pt idx="4">
+                  <c:v>16</c:v>
+                </c:pt>
+              </c:numCache>
+            </c:numRef>
+          </c:val>
+        </c:ser>
+        <c:dLbls>
+          <c:numFmt formatCode="#,##0" sourceLinked="0"/>
+          <c:txPr>
+            <a:bodyPr/>
+            <a:lstStyle/>
+            <a:p>
+              <a:pPr>
+                <a:defRPr b="0" i="0" strike="noStrike" sz="950" u="none">
+                  <a:solidFill>
+                    <a:srgbClr val="334155"/>
+                  </a:solidFill>
+                  <a:latin typeface="Calibri"/>
+                </a:defRPr>
+              </a:pPr>
+            </a:p>
+          </c:txPr>
+          <c:showLegendKey val="0"/>
+          <c:showVal val="1"/>
+          <c:showCatName val="0"/>
+          <c:showSerName val="0"/>
+          <c:showPercent val="0"/>
+          <c:showBubbleSize val="0"/>
+          <c:showLeaderLines val="0"/>
+        </c:dLbls>
+        <c:gapWidth val="150"/>
+        <c:overlap val="0"/>
+        <c:axId val="2094734554"/>
+        <c:axId val="2094734552"/>
+        <c:axId val="2094734556"/>
+      </c:barChart>
+      <c:catAx>
+        <c:axId val="2094734554"/>
+        <c:scaling>
+          <c:orientation val="minMax"/>
+        </c:scaling>
+        <c:delete val="0"/>
+        <c:axPos val="b"/>
+        <c:numFmt formatCode="General" sourceLinked="1"/>
+        <c:majorTickMark val="out"/>
+        <c:minorTickMark val="none"/>
+        <c:tickLblPos val="low"/>
+        <c:spPr>
+          <a:ln w="12700" cap="flat">
+            <a:solidFill>
+              <a:srgbClr val="888888"/>
+            </a:solidFill>
+            <a:prstDash val="solid"/>
+            <a:round/>
+          </a:ln>
+        </c:spPr>
+        <c:txPr>
+          <a:bodyPr/>
+          <a:lstStyle/>
+          <a:p>
+            <a:pPr>
+              <a:defRPr sz="1050" b="0" i="0" u="none" strike="noStrike">
+                <a:solidFill>
+                  <a:srgbClr val="334155"/>
+                </a:solidFill>
+                <a:latin typeface="Calibri"/>
+              </a:defRPr>
+            </a:pPr>
+            <a:endParaRPr lang="en-US"/>
+          </a:p>
+        </c:txPr>
+        <c:crossAx val="2094734552"/>
+        <c:crosses val="autoZero"/>
+        <c:auto val="1"/>
+        <c:lblAlgn val="ctr"/>
+        <c:noMultiLvlLbl val="1"/>
+      </c:catAx>
+      <c:valAx>
+        <c:axId val="2094734552"/>
+        <c:scaling>
+          <c:orientation val="minMax"/>
+          <c:max val="19"/>
+        </c:scaling>
+        <c:delete val="1"/>
+        <c:axPos val="l"/>
+        <c:numFmt formatCode="General" sourceLinked="0"/>
+        <c:majorTickMark val="out"/>
+        <c:minorTickMark val="none"/>
+        <c:tickLblPos val="nextTo"/>
+        <c:spPr>
+          <a:ln w="12700" cap="flat">
+            <a:solidFill>
+              <a:srgbClr val="888888"/>
+            </a:solidFill>
+            <a:prstDash val="solid"/>
+            <a:round/>
+          </a:ln>
+        </c:spPr>
+        <c:txPr>
+          <a:bodyPr/>
+          <a:lstStyle/>
+          <a:p>
+            <a:pPr>
+              <a:defRPr sz="1200" b="0" i="0" u="none" strike="noStrike">
+                <a:solidFill>
+                  <a:srgbClr val="000000"/>
+                </a:solidFill>
+                <a:latin typeface="Arial"/>
+              </a:defRPr>
+            </a:pPr>
+            <a:endParaRPr lang="en-US"/>
+          </a:p>
+        </c:txPr>
+        <c:crossAx val="2094734554"/>
+        <c:crosses val="autoZero"/>
+        <c:crossBetween val="between"/>
+      </c:valAx>
+      <c:spPr>
+        <a:noFill/>
+        <a:ln>
+          <a:noFill/>
+        </a:ln>
+        <a:effectLst/>
+      </c:spPr>
+    </c:plotArea>
+    <c:plotVisOnly val="1"/>
+    <c:dispBlanksAs val="span"/>
+  </c:chart>
+  <c:spPr>
+    <a:noFill/>
+    <a:ln>
+      <a:noFill/>
+    </a:ln>
+    <a:effectLst/>
+  </c:spPr>
+  <c:externalData r:id="rId1">
+    <c:autoUpdate val="0"/>
+  </c:externalData>
+</c:chartSpace>
+</file>
+
+<file path=ppt/charts/chart2.xml><?xml version="1.0" encoding="utf-8"?>
+<c:chartSpace xmlns:c="http://schemas.openxmlformats.org/drawingml/2006/chart" xmlns:a="http://schemas.openxmlformats.org/drawingml/2006/main" xmlns:r="http://schemas.openxmlformats.org/officeDocument/2006/relationships">
+  <c:date1904 val="0"/>
+  <c:roundedCorners val="1"/>
+  <c:chart>
     <c:title>
       <c:tx>
         <c:rich>
@@ -395,7 +1180,7 @@
 </c:chartSpace>
 </file>
 
-<file path=ppt/charts/chart2.xml><?xml version="1.0" encoding="utf-8"?>
+<file path=ppt/charts/chart3.xml><?xml version="1.0" encoding="utf-8"?>
 <c:chartSpace xmlns:c="http://schemas.openxmlformats.org/drawingml/2006/chart" xmlns:a="http://schemas.openxmlformats.org/drawingml/2006/main" xmlns:r="http://schemas.openxmlformats.org/officeDocument/2006/relationships">
   <c:date1904 val="0"/>
   <c:roundedCorners val="1"/>
@@ -871,7 +1656,7 @@
 </c:chartSpace>
 </file>
 
-<file path=ppt/charts/chart3.xml><?xml version="1.0" encoding="utf-8"?>
+<file path=ppt/charts/chart4.xml><?xml version="1.0" encoding="utf-8"?>
 <c:chartSpace xmlns:c="http://schemas.openxmlformats.org/drawingml/2006/chart" xmlns:a="http://schemas.openxmlformats.org/drawingml/2006/main" xmlns:r="http://schemas.openxmlformats.org/officeDocument/2006/relationships">
   <c:date1904 val="0"/>
   <c:roundedCorners val="1"/>
@@ -1347,7 +2132,7 @@
 </c:chartSpace>
 </file>
 
-<file path=ppt/charts/chart4.xml><?xml version="1.0" encoding="utf-8"?>
+<file path=ppt/charts/chart5.xml><?xml version="1.0" encoding="utf-8"?>
 <c:chartSpace xmlns:c="http://schemas.openxmlformats.org/drawingml/2006/chart" xmlns:a="http://schemas.openxmlformats.org/drawingml/2006/main" xmlns:r="http://schemas.openxmlformats.org/officeDocument/2006/relationships">
   <c:date1904 val="0"/>
   <c:roundedCorners val="1"/>
@@ -1457,10 +2242,10 @@
                 <c:formatCode>General</c:formatCode>
                 <c:ptCount val="12"/>
                 <c:pt idx="0">
-                  <c:v>0.17</c:v>
+                  <c:v>0.18</c:v>
                 </c:pt>
                 <c:pt idx="1">
-                  <c:v>0.2</c:v>
+                  <c:v>0.19</c:v>
                 </c:pt>
                 <c:pt idx="2">
                   <c:v>0.23</c:v>
@@ -1823,7 +2608,7 @@
 </c:chartSpace>
 </file>
 
-<file path=ppt/charts/chart5.xml><?xml version="1.0" encoding="utf-8"?>
+<file path=ppt/charts/chart6.xml><?xml version="1.0" encoding="utf-8"?>
 <c:chartSpace xmlns:c="http://schemas.openxmlformats.org/drawingml/2006/chart" xmlns:a="http://schemas.openxmlformats.org/drawingml/2006/main" xmlns:r="http://schemas.openxmlformats.org/officeDocument/2006/relationships">
   <c:date1904 val="0"/>
   <c:roundedCorners val="1"/>
@@ -2100,22 +2885,22 @@
               <c:strCache>
                 <c:ptCount val="6"/>
                 <c:pt idx="0">
-                  <c:v>People (incl. 2 hires)</c:v>
+                  <c:v>Salary</c:v>
                 </c:pt>
                 <c:pt idx="1">
-                  <c:v>Facilities</c:v>
+                  <c:v>Rent</c:v>
                 </c:pt>
                 <c:pt idx="2">
-                  <c:v>Professional and board</c:v>
+                  <c:v>Professional</c:v>
                 </c:pt>
                 <c:pt idx="3">
-                  <c:v>Technology and data</c:v>
+                  <c:v>Sitting fees</c:v>
                 </c:pt>
                 <c:pt idx="4">
-                  <c:v>Travel and admin</c:v>
+                  <c:v>Travel</c:v>
                 </c:pt>
                 <c:pt idx="5">
-                  <c:v>Regulatory and depr.</c:v>
+                  <c:v>Other heads</c:v>
                 </c:pt>
               </c:strCache>
             </c:strRef>
@@ -2126,22 +2911,22 @@
               <c:numCache>
                 <c:ptCount val="6"/>
                 <c:pt idx="0">
-                  <c:v>3.64</c:v>
+                  <c:v>71.99</c:v>
                 </c:pt>
                 <c:pt idx="1">
-                  <c:v>0.62</c:v>
+                  <c:v>14.65</c:v>
                 </c:pt>
                 <c:pt idx="2">
-                  <c:v>0.34</c:v>
+                  <c:v>6.01</c:v>
                 </c:pt>
                 <c:pt idx="3">
-                  <c:v>0.34</c:v>
+                  <c:v>5.5</c:v>
                 </c:pt>
                 <c:pt idx="4">
-                  <c:v>0.16</c:v>
+                  <c:v>3.7</c:v>
                 </c:pt>
                 <c:pt idx="5">
-                  <c:v>0.14</c:v>
+                  <c:v>21.43</c:v>
                 </c:pt>
               </c:numCache>
             </c:numRef>
@@ -2194,7 +2979,7 @@
 </c:chartSpace>
 </file>
 
-<file path=ppt/charts/chart6.xml><?xml version="1.0" encoding="utf-8"?>
+<file path=ppt/charts/chart7.xml><?xml version="1.0" encoding="utf-8"?>
 <c:chartSpace xmlns:c="http://schemas.openxmlformats.org/drawingml/2006/chart" xmlns:a="http://schemas.openxmlformats.org/drawingml/2006/main" xmlns:r="http://schemas.openxmlformats.org/officeDocument/2006/relationships">
   <c:date1904 val="0"/>
   <c:roundedCorners val="1"/>
@@ -2639,7 +3424,7 @@
 </c:chartSpace>
 </file>
 
-<file path=ppt/charts/chart7.xml><?xml version="1.0" encoding="utf-8"?>
+<file path=ppt/charts/chart8.xml><?xml version="1.0" encoding="utf-8"?>
 <c:chartSpace xmlns:c="http://schemas.openxmlformats.org/drawingml/2006/chart" xmlns:a="http://schemas.openxmlformats.org/drawingml/2006/main" xmlns:r="http://schemas.openxmlformats.org/officeDocument/2006/relationships">
   <c:date1904 val="0"/>
   <c:roundedCorners val="1"/>
@@ -2974,7 +3759,7 @@
 </c:chartSpace>
 </file>
 
-<file path=ppt/charts/chart8.xml><?xml version="1.0" encoding="utf-8"?>
+<file path=ppt/charts/chart9.xml><?xml version="1.0" encoding="utf-8"?>
 <c:chartSpace xmlns:c="http://schemas.openxmlformats.org/drawingml/2006/chart" xmlns:a="http://schemas.openxmlformats.org/drawingml/2006/main" xmlns:r="http://schemas.openxmlformats.org/officeDocument/2006/relationships">
   <c:date1904 val="0"/>
   <c:roundedCorners val="1"/>
@@ -3176,248 +3961,6 @@
         <c:majorTickMark val="out"/>
         <c:minorTickMark val="none"/>
         <c:tickLblPos val="low"/>
-        <c:spPr>
-          <a:ln w="12700" cap="flat">
-            <a:solidFill>
-              <a:srgbClr val="888888"/>
-            </a:solidFill>
-            <a:prstDash val="solid"/>
-            <a:round/>
-          </a:ln>
-        </c:spPr>
-        <c:txPr>
-          <a:bodyPr/>
-          <a:lstStyle/>
-          <a:p>
-            <a:pPr>
-              <a:defRPr sz="1200" b="0" i="0" u="none" strike="noStrike">
-                <a:solidFill>
-                  <a:srgbClr val="000000"/>
-                </a:solidFill>
-                <a:latin typeface="Arial"/>
-              </a:defRPr>
-            </a:pPr>
-            <a:endParaRPr lang="en-US"/>
-          </a:p>
-        </c:txPr>
-        <c:crossAx val="2094734554"/>
-        <c:crosses val="autoZero"/>
-        <c:crossBetween val="between"/>
-      </c:valAx>
-      <c:spPr>
-        <a:noFill/>
-        <a:ln>
-          <a:noFill/>
-        </a:ln>
-        <a:effectLst/>
-      </c:spPr>
-    </c:plotArea>
-    <c:plotVisOnly val="1"/>
-    <c:dispBlanksAs val="span"/>
-  </c:chart>
-  <c:spPr>
-    <a:noFill/>
-    <a:ln>
-      <a:noFill/>
-    </a:ln>
-    <a:effectLst/>
-  </c:spPr>
-  <c:externalData r:id="rId1">
-    <c:autoUpdate val="0"/>
-  </c:externalData>
-</c:chartSpace>
-</file>
-
-<file path=ppt/charts/chart9.xml><?xml version="1.0" encoding="utf-8"?>
-<c:chartSpace xmlns:c="http://schemas.openxmlformats.org/drawingml/2006/chart" xmlns:a="http://schemas.openxmlformats.org/drawingml/2006/main" xmlns:r="http://schemas.openxmlformats.org/officeDocument/2006/relationships">
-  <c:date1904 val="0"/>
-  <c:roundedCorners val="1"/>
-  <c:chart>
-    <c:autoTitleDeleted val="1"/>
-    <c:plotArea>
-      <c:layout/>
-      <c:barChart>
-        <c:barDir val="col"/>
-        <c:grouping val="clustered"/>
-        <c:varyColors val="0"/>
-        <c:ser>
-          <c:idx val="0"/>
-          <c:order val="0"/>
-          <c:tx>
-            <c:strRef>
-              <c:f>Sheet1!$B$1</c:f>
-              <c:strCache>
-                <c:ptCount val="1"/>
-                <c:pt idx="0">
-                  <c:v>ACER rating revenue</c:v>
-                </c:pt>
-              </c:strCache>
-            </c:strRef>
-          </c:tx>
-          <c:spPr>
-            <a:solidFill>
-              <a:srgbClr val="0F766E"/>
-            </a:solidFill>
-            <a:effectLst/>
-          </c:spPr>
-          <c:invertIfNegative val="0"/>
-          <c:dLbls>
-            <c:numFmt formatCode="#,##0" sourceLinked="0"/>
-            <c:txPr>
-              <a:bodyPr/>
-              <a:lstStyle/>
-              <a:p>
-                <a:pPr>
-                  <a:defRPr b="0" i="0" strike="noStrike" sz="950" u="none">
-                    <a:solidFill>
-                      <a:srgbClr val="334155"/>
-                    </a:solidFill>
-                    <a:latin typeface="Calibri"/>
-                  </a:defRPr>
-                </a:pPr>
-              </a:p>
-            </c:txPr>
-            <c:showLegendKey val="0"/>
-            <c:showVal val="1"/>
-            <c:showCatName val="0"/>
-            <c:showSerName val="0"/>
-            <c:showPercent val="0"/>
-            <c:showBubbleSize val="0"/>
-            <c:showLeaderLines val="0"/>
-          </c:dLbls>
-          <c:cat>
-            <c:multiLvlStrRef>
-              <c:f>Sheet1!$A$2:$A$6</c:f>
-              <c:multiLvlStrCache>
-                <c:ptCount val="5"/>
-                <c:lvl>
-                  <c:pt idx="0">
-                    <c:v>FY26</c:v>
-                  </c:pt>
-                  <c:pt idx="1">
-                    <c:v>FY27</c:v>
-                  </c:pt>
-                  <c:pt idx="2">
-                    <c:v>FY28</c:v>
-                  </c:pt>
-                  <c:pt idx="3">
-                    <c:v>FY29</c:v>
-                  </c:pt>
-                  <c:pt idx="4">
-                    <c:v>FY30</c:v>
-                  </c:pt>
-                </c:lvl>
-              </c:multiLvlStrCache>
-            </c:multiLvlStrRef>
-          </c:cat>
-          <c:val>
-            <c:numRef>
-              <c:f>Sheet1!$B$2:$B$6</c:f>
-              <c:numCache>
-                <c:formatCode>General</c:formatCode>
-                <c:ptCount val="5"/>
-                <c:pt idx="0">
-                  <c:v>0.08</c:v>
-                </c:pt>
-                <c:pt idx="1">
-                  <c:v>3.8</c:v>
-                </c:pt>
-                <c:pt idx="2">
-                  <c:v>8.3</c:v>
-                </c:pt>
-                <c:pt idx="3">
-                  <c:v>11.3</c:v>
-                </c:pt>
-                <c:pt idx="4">
-                  <c:v>16</c:v>
-                </c:pt>
-              </c:numCache>
-            </c:numRef>
-          </c:val>
-        </c:ser>
-        <c:dLbls>
-          <c:numFmt formatCode="#,##0" sourceLinked="0"/>
-          <c:txPr>
-            <a:bodyPr/>
-            <a:lstStyle/>
-            <a:p>
-              <a:pPr>
-                <a:defRPr b="0" i="0" strike="noStrike" sz="950" u="none">
-                  <a:solidFill>
-                    <a:srgbClr val="334155"/>
-                  </a:solidFill>
-                  <a:latin typeface="Calibri"/>
-                </a:defRPr>
-              </a:pPr>
-            </a:p>
-          </c:txPr>
-          <c:showLegendKey val="0"/>
-          <c:showVal val="1"/>
-          <c:showCatName val="0"/>
-          <c:showSerName val="0"/>
-          <c:showPercent val="0"/>
-          <c:showBubbleSize val="0"/>
-          <c:showLeaderLines val="0"/>
-        </c:dLbls>
-        <c:gapWidth val="150"/>
-        <c:overlap val="0"/>
-        <c:axId val="2094734554"/>
-        <c:axId val="2094734552"/>
-        <c:axId val="2094734556"/>
-      </c:barChart>
-      <c:catAx>
-        <c:axId val="2094734554"/>
-        <c:scaling>
-          <c:orientation val="minMax"/>
-        </c:scaling>
-        <c:delete val="0"/>
-        <c:axPos val="b"/>
-        <c:numFmt formatCode="General" sourceLinked="1"/>
-        <c:majorTickMark val="out"/>
-        <c:minorTickMark val="none"/>
-        <c:tickLblPos val="low"/>
-        <c:spPr>
-          <a:ln w="12700" cap="flat">
-            <a:solidFill>
-              <a:srgbClr val="888888"/>
-            </a:solidFill>
-            <a:prstDash val="solid"/>
-            <a:round/>
-          </a:ln>
-        </c:spPr>
-        <c:txPr>
-          <a:bodyPr/>
-          <a:lstStyle/>
-          <a:p>
-            <a:pPr>
-              <a:defRPr sz="1050" b="0" i="0" u="none" strike="noStrike">
-                <a:solidFill>
-                  <a:srgbClr val="334155"/>
-                </a:solidFill>
-                <a:latin typeface="Calibri"/>
-              </a:defRPr>
-            </a:pPr>
-            <a:endParaRPr lang="en-US"/>
-          </a:p>
-        </c:txPr>
-        <c:crossAx val="2094734552"/>
-        <c:crosses val="autoZero"/>
-        <c:auto val="1"/>
-        <c:lblAlgn val="ctr"/>
-        <c:noMultiLvlLbl val="1"/>
-      </c:catAx>
-      <c:valAx>
-        <c:axId val="2094734552"/>
-        <c:scaling>
-          <c:orientation val="minMax"/>
-          <c:max val="19"/>
-        </c:scaling>
-        <c:delete val="1"/>
-        <c:axPos val="l"/>
-        <c:numFmt formatCode="General" sourceLinked="0"/>
-        <c:majorTickMark val="out"/>
-        <c:minorTickMark val="none"/>
-        <c:tickLblPos val="nextTo"/>
         <c:spPr>
           <a:ln w="12700" cap="flat">
             <a:solidFill>
@@ -8117,28 +8660,24 @@
         </p:nvSpPr>
         <p:spPr>
           <a:xfrm>
-            <a:off x="566928" y="3383280"/>
-            <a:ext cx="10972800" cy="2286000"/>
-          </a:xfrm>
-          <a:prstGeom prst="rect">
-            <a:avLst/>
-          </a:prstGeom>
-          <a:noFill/>
-          <a:ln/>
-        </p:spPr>
-        <p:txBody>
-          <a:bodyPr wrap="square" rtlCol="0" anchor="t"/>
-          <a:lstStyle/>
-          <a:p>
-            <a:pPr marL="177800" indent="-177800">
-              <a:spcAft>
-                <a:spcPts val="700"/>
-              </a:spcAft>
-              <a:buSzPct val="100000"/>
-              <a:buChar char="•"/>
-            </a:pPr>
-            <a:r>
-              <a:rPr lang="en-US" sz="1400" dirty="0">
+            <a:off x="566928" y="3200400"/>
+            <a:ext cx="6949440" cy="274320"/>
+          </a:xfrm>
+          <a:prstGeom prst="rect">
+            <a:avLst/>
+          </a:prstGeom>
+          <a:noFill/>
+          <a:ln/>
+        </p:spPr>
+        <p:txBody>
+          <a:bodyPr wrap="square" rtlCol="0" anchor="ctr"/>
+          <a:lstStyle/>
+          <a:p>
+            <a:pPr indent="0" marL="0">
+              <a:buNone/>
+            </a:pPr>
+            <a:r>
+              <a:rPr lang="en-US" sz="1200" b="1" dirty="0">
                 <a:solidFill>
                   <a:srgbClr val="334155"/>
                 </a:solidFill>
@@ -8146,20 +8685,54 @@
                 <a:ea typeface="Calibri" pitchFamily="34" charset="-122"/>
                 <a:cs typeface="Calibri" pitchFamily="34" charset="-120"/>
               </a:rPr>
-              <a:t>Income is carried by interest on the deposit corpus, not by the rating business. That is a capital story, not yet an operating one.</a:t>
-            </a:r>
-            <a:endParaRPr lang="en-US" sz="1400" dirty="0"/>
-          </a:p>
-          <a:p>
-            <a:pPr marL="177800" indent="-177800">
-              <a:spcAft>
-                <a:spcPts val="700"/>
-              </a:spcAft>
-              <a:buSzPct val="100000"/>
-              <a:buChar char="•"/>
-            </a:pPr>
-            <a:r>
-              <a:rPr lang="en-US" sz="1400" dirty="0">
+              <a:t>Actual monthly income and expense, from the books (Rs Cr)</a:t>
+            </a:r>
+            <a:endParaRPr lang="en-US" sz="1200" dirty="0"/>
+          </a:p>
+        </p:txBody>
+      </p:sp>
+      <p:graphicFrame>
+        <p:nvGraphicFramePr>
+          <p:cNvPr id="23" name="Chart 0" descr=""/>
+          <p:cNvGraphicFramePr/>
+          <p:nvPr/>
+        </p:nvGraphicFramePr>
+        <p:xfrm>
+          <a:off x="566928" y="3474720"/>
+          <a:ext cx="6766560" cy="2697480"/>
+        </p:xfrm>
+        <a:graphic xmlns:a="http://schemas.openxmlformats.org/drawingml/2006/main">
+          <a:graphicData uri="http://schemas.openxmlformats.org/drawingml/2006/chart">
+            <c:chart xmlns:c="http://schemas.openxmlformats.org/drawingml/2006/chart" r:id="rId1"/>
+          </a:graphicData>
+        </a:graphic>
+      </p:graphicFrame>
+      <p:sp>
+        <p:nvSpPr>
+          <p:cNvPr id="24" name="Text 21"/>
+          <p:cNvSpPr/>
+          <p:nvPr/>
+        </p:nvSpPr>
+        <p:spPr>
+          <a:xfrm>
+            <a:off x="7635240" y="3566160"/>
+            <a:ext cx="3977640" cy="2377440"/>
+          </a:xfrm>
+          <a:prstGeom prst="rect">
+            <a:avLst/>
+          </a:prstGeom>
+          <a:noFill/>
+          <a:ln/>
+        </p:spPr>
+        <p:txBody>
+          <a:bodyPr wrap="square" rtlCol="0" anchor="t"/>
+          <a:lstStyle/>
+          <a:p>
+            <a:pPr indent="0" marL="0">
+              <a:buNone/>
+            </a:pPr>
+            <a:r>
+              <a:rPr lang="en-US" sz="1350" dirty="0">
                 <a:solidFill>
                   <a:srgbClr val="334155"/>
                 </a:solidFill>
@@ -8167,67 +8740,46 @@
                 <a:ea typeface="Calibri" pitchFamily="34" charset="-122"/>
                 <a:cs typeface="Calibri" pitchFamily="34" charset="-120"/>
               </a:rPr>
-              <a:t>The Rs 25 Cr net worth barrier that stops most new entrants is already met and parked in fixed deposits.</a:t>
-            </a:r>
-            <a:endParaRPr lang="en-US" sz="1400" dirty="0"/>
-          </a:p>
-          <a:p>
-            <a:pPr marL="177800" indent="-177800">
-              <a:spcAft>
-                <a:spcPts val="700"/>
-              </a:spcAft>
-              <a:buSzPct val="100000"/>
-              <a:buChar char="•"/>
-            </a:pPr>
-            <a:r>
-              <a:rPr lang="en-US" sz="1400" dirty="0">
-                <a:solidFill>
-                  <a:srgbClr val="334155"/>
+              <a:t>Income sat around Rs 14 to 15 L a month, almost all FD interest, while expense climbed past it as the team grew. Ratings income appears only in the last few months. Every value is booked.</a:t>
+            </a:r>
+            <a:endParaRPr lang="en-US" sz="1350" dirty="0"/>
+          </a:p>
+        </p:txBody>
+      </p:sp>
+      <p:sp>
+        <p:nvSpPr>
+          <p:cNvPr id="25" name="Text 22"/>
+          <p:cNvSpPr/>
+          <p:nvPr/>
+        </p:nvSpPr>
+        <p:spPr>
+          <a:xfrm>
+            <a:off x="566928" y="6446520"/>
+            <a:ext cx="11064240" cy="301752"/>
+          </a:xfrm>
+          <a:prstGeom prst="rect">
+            <a:avLst/>
+          </a:prstGeom>
+          <a:noFill/>
+          <a:ln/>
+        </p:spPr>
+        <p:txBody>
+          <a:bodyPr wrap="square" rtlCol="0" anchor="ctr"/>
+          <a:lstStyle/>
+          <a:p>
+            <a:pPr indent="0" marL="0">
+              <a:buNone/>
+            </a:pPr>
+            <a:r>
+              <a:rPr lang="en-US" sz="900" i="1" dirty="0">
+                <a:solidFill>
+                  <a:srgbClr val="94A3B8"/>
                 </a:solidFill>
                 <a:latin typeface="Calibri" pitchFamily="34" charset="0"/>
                 <a:ea typeface="Calibri" pitchFamily="34" charset="-122"/>
                 <a:cs typeface="Calibri" pitchFamily="34" charset="-120"/>
               </a:rPr>
-              <a:t>Operating revenue has just begun to inflect, from Rs 8 L in all of FY26 to Rs 28.5 L in the first quarter of FY27.</a:t>
-            </a:r>
-            <a:endParaRPr lang="en-US" sz="1400" dirty="0"/>
-          </a:p>
-        </p:txBody>
-      </p:sp>
-      <p:sp>
-        <p:nvSpPr>
-          <p:cNvPr id="23" name="Text 21"/>
-          <p:cNvSpPr/>
-          <p:nvPr/>
-        </p:nvSpPr>
-        <p:spPr>
-          <a:xfrm>
-            <a:off x="566928" y="6446520"/>
-            <a:ext cx="11064240" cy="301752"/>
-          </a:xfrm>
-          <a:prstGeom prst="rect">
-            <a:avLst/>
-          </a:prstGeom>
-          <a:noFill/>
-          <a:ln/>
-        </p:spPr>
-        <p:txBody>
-          <a:bodyPr wrap="square" rtlCol="0" anchor="ctr"/>
-          <a:lstStyle/>
-          <a:p>
-            <a:pPr indent="0" marL="0">
-              <a:buNone/>
-            </a:pPr>
-            <a:r>
-              <a:rPr lang="en-US" sz="900" i="1" dirty="0">
-                <a:solidFill>
-                  <a:srgbClr val="94A3B8"/>
-                </a:solidFill>
-                <a:latin typeface="Calibri" pitchFamily="34" charset="0"/>
-                <a:ea typeface="Calibri" pitchFamily="34" charset="-122"/>
-                <a:cs typeface="Calibri" pitchFamily="34" charset="-120"/>
-              </a:rPr>
-              <a:t>Source: Internal [1]. SEBI net worth requirement [10].</a:t>
+              <a:t>Source: Internal monthly ledger, Apr 2025 to Jun 2026 [1]. SEBI net worth requirement [10].</a:t>
             </a:r>
             <a:endParaRPr lang="en-US" sz="900" dirty="0"/>
           </a:p>
@@ -11906,7 +12458,7 @@
                 <a:ea typeface="Calibri" pitchFamily="34" charset="-122"/>
                 <a:cs typeface="Calibri" pitchFamily="34" charset="-120"/>
               </a:rPr>
-              <a:t>Green area is total monthly income, FD plus ratings. The dark line is all in monthly expense. Where green rises above the line, the month is cash positive.</a:t>
+              <a:t>Green area is total monthly income, FD plus ratings. The dark line is all in monthly expense. The first quarter, Apr to Jun, is actual; the rest is projected. Where green rises above the line, the month is cash positive.</a:t>
             </a:r>
             <a:endParaRPr lang="en-US" sz="1400" dirty="0"/>
           </a:p>
@@ -12783,7 +13335,7 @@
                           <a:ea typeface="Calibri" pitchFamily="34" charset="-122"/>
                           <a:cs typeface="Calibri" pitchFamily="34" charset="-120"/>
                         </a:rPr>
-                        <a:t>Q1 (Apr to Jun)</a:t>
+                        <a:t>Q1 (Apr to Jun) actual</a:t>
                       </a:r>
                       <a:endParaRPr lang="en-US" sz="1200" dirty="0">
                         <a:latin typeface="Calibri" charset="0"/>
@@ -14164,7 +14716,7 @@
               <a:buNone/>
             </a:pPr>
             <a:r>
-              <a:rPr lang="en-US" sz="1300" b="1" dirty="0">
+              <a:rPr lang="en-US" sz="1200" b="1" dirty="0">
                 <a:solidFill>
                   <a:srgbClr val="334155"/>
                 </a:solidFill>
@@ -14172,9 +14724,9 @@
                 <a:ea typeface="Calibri" pitchFamily="34" charset="-122"/>
                 <a:cs typeface="Calibri" pitchFamily="34" charset="-120"/>
               </a:rPr>
-              <a:t>FY27 cost base, Rs 5.24 Cr by head</a:t>
-            </a:r>
-            <a:endParaRPr lang="en-US" sz="1300" dirty="0"/>
+              <a:t>FY27 actual spend to date, by ledger head (Rs Lakh)</a:t>
+            </a:r>
+            <a:endParaRPr lang="en-US" sz="1200" dirty="0"/>
           </a:p>
         </p:txBody>
       </p:sp>
@@ -14223,7 +14775,7 @@
               <a:buChar char="•"/>
             </a:pPr>
             <a:r>
-              <a:rPr lang="en-US" sz="1350" dirty="0">
+              <a:rPr lang="en-US" sz="1300" dirty="0">
                 <a:solidFill>
                   <a:srgbClr val="334155"/>
                 </a:solidFill>
@@ -14231,9 +14783,9 @@
                 <a:ea typeface="Calibri" pitchFamily="34" charset="-122"/>
                 <a:cs typeface="Calibri" pitchFamily="34" charset="-120"/>
               </a:rPr>
-              <a:t>People are 69% of cost, the single lever the Board controls. The two new hires add Rs 0.64 Cr in FY27; the rest of the base is largely fixed.</a:t>
-            </a:r>
-            <a:endParaRPr lang="en-US" sz="1350" dirty="0"/>
+              <a:t>Salary is 58% of actual spend to date and rises further as the two new hires annualise. Q1 P&amp;L above is booked actual; Q2 to Q4 are projected. Full year cost base is budgeted at Rs 5.24 Cr.</a:t>
+            </a:r>
+            <a:endParaRPr lang="en-US" sz="1300" dirty="0"/>
           </a:p>
         </p:txBody>
       </p:sp>
@@ -14270,7 +14822,7 @@
                 <a:ea typeface="Calibri" pitchFamily="34" charset="-122"/>
                 <a:cs typeface="Calibri" pitchFamily="34" charset="-120"/>
               </a:rPr>
-              <a:t>Source: quarterly build and cost heads modelled from Internal run rate [1] and BLR assumptions [2].</a:t>
+              <a:t>Source: cost heads are Internal actuals to 21 Jul [1]; quarterly build uses Internal run rate [1] and BLR assumptions [2].</a:t>
             </a:r>
             <a:endParaRPr lang="en-US" sz="900" dirty="0"/>
           </a:p>

--- a/board/AOP_board_presentation.pptx
+++ b/board/AOP_board_presentation.pptx
@@ -17,9 +17,12 @@
     <p:sldId id="265" r:id="rId11"/>
     <p:sldId id="266" r:id="rId12"/>
     <p:sldId id="267" r:id="rId13"/>
+    <p:sldId id="268" r:id="rId14"/>
+    <p:sldId id="269" r:id="rId15"/>
+    <p:sldId id="270" r:id="rId16"/>
   </p:sldIdLst>
   <p:notesMasterIdLst>
-    <p:notesMasterId r:id="rId14"/>
+    <p:notesMasterId r:id="rId17"/>
   </p:notesMasterIdLst>
   <p:sldSz cx="12191695" cy="6858000"/>
   <p:notesSz cx="6858000" cy="12191695"/>
@@ -670,6 +673,260 @@
     <c:plotArea>
       <c:layout/>
       <c:barChart>
+        <c:barDir val="bar"/>
+        <c:grouping val="clustered"/>
+        <c:varyColors val="0"/>
+        <c:ser>
+          <c:idx val="0"/>
+          <c:order val="0"/>
+          <c:tx>
+            <c:strRef>
+              <c:f>Sheet1!$B$1</c:f>
+              <c:strCache>
+                <c:ptCount val="1"/>
+                <c:pt idx="0">
+                  <c:v>Rating revenue</c:v>
+                </c:pt>
+              </c:strCache>
+            </c:strRef>
+          </c:tx>
+          <c:spPr>
+            <a:solidFill>
+              <a:srgbClr val="2B5CC4"/>
+            </a:solidFill>
+            <a:effectLst/>
+          </c:spPr>
+          <c:invertIfNegative val="0"/>
+          <c:dLbls>
+            <c:numFmt formatCode="#,##0" sourceLinked="0"/>
+            <c:txPr>
+              <a:bodyPr/>
+              <a:lstStyle/>
+              <a:p>
+                <a:pPr>
+                  <a:defRPr b="0" i="0" strike="noStrike" sz="950" u="none">
+                    <a:solidFill>
+                      <a:srgbClr val="334155"/>
+                    </a:solidFill>
+                    <a:latin typeface="Calibri"/>
+                  </a:defRPr>
+                </a:pPr>
+              </a:p>
+            </c:txPr>
+            <c:showLegendKey val="0"/>
+            <c:showVal val="1"/>
+            <c:showCatName val="0"/>
+            <c:showSerName val="0"/>
+            <c:showPercent val="0"/>
+            <c:showBubbleSize val="0"/>
+            <c:showLeaderLines val="0"/>
+          </c:dLbls>
+          <c:cat>
+            <c:multiLvlStrRef>
+              <c:f>Sheet1!$A$2:$A$8</c:f>
+              <c:multiLvlStrCache>
+                <c:ptCount val="7"/>
+                <c:lvl>
+                  <c:pt idx="0">
+                    <c:v>ACER now</c:v>
+                  </c:pt>
+                  <c:pt idx="1">
+                    <c:v>ACER FY28</c:v>
+                  </c:pt>
+                  <c:pt idx="2">
+                    <c:v>Acuite</c:v>
+                  </c:pt>
+                  <c:pt idx="3">
+                    <c:v>Infomerics</c:v>
+                  </c:pt>
+                  <c:pt idx="4">
+                    <c:v>India Ratings</c:v>
+                  </c:pt>
+                  <c:pt idx="5">
+                    <c:v>CARE</c:v>
+                  </c:pt>
+                  <c:pt idx="6">
+                    <c:v>CRISIL</c:v>
+                  </c:pt>
+                </c:lvl>
+              </c:multiLvlStrCache>
+            </c:multiLvlStrRef>
+          </c:cat>
+          <c:val>
+            <c:numRef>
+              <c:f>Sheet1!$B$2:$B$8</c:f>
+              <c:numCache>
+                <c:formatCode>General</c:formatCode>
+                <c:ptCount val="7"/>
+                <c:pt idx="0">
+                  <c:v>0.9</c:v>
+                </c:pt>
+                <c:pt idx="1">
+                  <c:v>8</c:v>
+                </c:pt>
+                <c:pt idx="2">
+                  <c:v>57</c:v>
+                </c:pt>
+                <c:pt idx="3">
+                  <c:v>95</c:v>
+                </c:pt>
+                <c:pt idx="4">
+                  <c:v>251</c:v>
+                </c:pt>
+                <c:pt idx="5">
+                  <c:v>423</c:v>
+                </c:pt>
+                <c:pt idx="6">
+                  <c:v>909</c:v>
+                </c:pt>
+              </c:numCache>
+            </c:numRef>
+          </c:val>
+        </c:ser>
+        <c:dLbls>
+          <c:numFmt formatCode="#,##0" sourceLinked="0"/>
+          <c:txPr>
+            <a:bodyPr/>
+            <a:lstStyle/>
+            <a:p>
+              <a:pPr>
+                <a:defRPr b="0" i="0" strike="noStrike" sz="950" u="none">
+                  <a:solidFill>
+                    <a:srgbClr val="334155"/>
+                  </a:solidFill>
+                  <a:latin typeface="Calibri"/>
+                </a:defRPr>
+              </a:pPr>
+            </a:p>
+          </c:txPr>
+          <c:showLegendKey val="0"/>
+          <c:showVal val="1"/>
+          <c:showCatName val="0"/>
+          <c:showSerName val="0"/>
+          <c:showPercent val="0"/>
+          <c:showBubbleSize val="0"/>
+          <c:showLeaderLines val="0"/>
+        </c:dLbls>
+        <c:gapWidth val="40"/>
+        <c:overlap val="0"/>
+        <c:axId val="2094734554"/>
+        <c:axId val="2094734552"/>
+        <c:axId val="2094734556"/>
+      </c:barChart>
+      <c:catAx>
+        <c:axId val="2094734554"/>
+        <c:scaling>
+          <c:orientation val="minMax"/>
+        </c:scaling>
+        <c:delete val="0"/>
+        <c:axPos val="l"/>
+        <c:numFmt formatCode="General" sourceLinked="1"/>
+        <c:majorTickMark val="out"/>
+        <c:minorTickMark val="none"/>
+        <c:tickLblPos val="nextTo"/>
+        <c:spPr>
+          <a:ln w="12700" cap="flat">
+            <a:solidFill>
+              <a:srgbClr val="888888"/>
+            </a:solidFill>
+            <a:prstDash val="solid"/>
+            <a:round/>
+          </a:ln>
+        </c:spPr>
+        <c:txPr>
+          <a:bodyPr/>
+          <a:lstStyle/>
+          <a:p>
+            <a:pPr>
+              <a:defRPr sz="1050" b="0" i="0" u="none" strike="noStrike">
+                <a:solidFill>
+                  <a:srgbClr val="334155"/>
+                </a:solidFill>
+                <a:latin typeface="Calibri"/>
+              </a:defRPr>
+            </a:pPr>
+            <a:endParaRPr lang="en-US"/>
+          </a:p>
+        </c:txPr>
+        <c:crossAx val="2094734552"/>
+        <c:crosses val="autoZero"/>
+        <c:auto val="1"/>
+        <c:lblAlgn val="ctr"/>
+        <c:noMultiLvlLbl val="1"/>
+      </c:catAx>
+      <c:valAx>
+        <c:axId val="2094734552"/>
+        <c:scaling>
+          <c:orientation val="minMax"/>
+          <c:max val="1000"/>
+        </c:scaling>
+        <c:delete val="1"/>
+        <c:axPos val="b"/>
+        <c:numFmt formatCode="General" sourceLinked="0"/>
+        <c:majorTickMark val="out"/>
+        <c:minorTickMark val="none"/>
+        <c:tickLblPos val="low"/>
+        <c:spPr>
+          <a:ln w="12700" cap="flat">
+            <a:solidFill>
+              <a:srgbClr val="888888"/>
+            </a:solidFill>
+            <a:prstDash val="solid"/>
+            <a:round/>
+          </a:ln>
+        </c:spPr>
+        <c:txPr>
+          <a:bodyPr/>
+          <a:lstStyle/>
+          <a:p>
+            <a:pPr>
+              <a:defRPr sz="1200" b="0" i="0" u="none" strike="noStrike">
+                <a:solidFill>
+                  <a:srgbClr val="000000"/>
+                </a:solidFill>
+                <a:latin typeface="Arial"/>
+              </a:defRPr>
+            </a:pPr>
+            <a:endParaRPr lang="en-US"/>
+          </a:p>
+        </c:txPr>
+        <c:crossAx val="2094734554"/>
+        <c:crosses val="autoZero"/>
+        <c:crossBetween val="between"/>
+      </c:valAx>
+      <c:spPr>
+        <a:noFill/>
+        <a:ln>
+          <a:noFill/>
+        </a:ln>
+        <a:effectLst/>
+      </c:spPr>
+    </c:plotArea>
+    <c:plotVisOnly val="1"/>
+    <c:dispBlanksAs val="span"/>
+  </c:chart>
+  <c:spPr>
+    <a:noFill/>
+    <a:ln>
+      <a:noFill/>
+    </a:ln>
+    <a:effectLst/>
+  </c:spPr>
+  <c:externalData r:id="rId1">
+    <c:autoUpdate val="0"/>
+  </c:externalData>
+</c:chartSpace>
+</file>
+
+<file path=ppt/charts/chart11.xml><?xml version="1.0" encoding="utf-8"?>
+<c:chartSpace xmlns:c="http://schemas.openxmlformats.org/drawingml/2006/chart" xmlns:a="http://schemas.openxmlformats.org/drawingml/2006/main" xmlns:r="http://schemas.openxmlformats.org/officeDocument/2006/relationships">
+  <c:date1904 val="0"/>
+  <c:roundedCorners val="1"/>
+  <c:chart>
+    <c:autoTitleDeleted val="1"/>
+    <c:plotArea>
+      <c:layout/>
+      <c:barChart>
         <c:barDir val="col"/>
         <c:grouping val="clustered"/>
         <c:varyColors val="0"/>
@@ -701,7 +958,7 @@
               <a:lstStyle/>
               <a:p>
                 <a:pPr>
-                  <a:defRPr b="0" i="0" strike="noStrike" sz="950" u="none">
+                  <a:defRPr b="0" i="0" strike="noStrike" sz="1000" u="none">
                     <a:solidFill>
                       <a:srgbClr val="334155"/>
                     </a:solidFill>
@@ -775,7 +1032,7 @@
             <a:lstStyle/>
             <a:p>
               <a:pPr>
-                <a:defRPr b="0" i="0" strike="noStrike" sz="950" u="none">
+                <a:defRPr b="0" i="0" strike="noStrike" sz="1000" u="none">
                   <a:solidFill>
                     <a:srgbClr val="334155"/>
                   </a:solidFill>
@@ -823,7 +1080,7 @@
           <a:lstStyle/>
           <a:p>
             <a:pPr>
-              <a:defRPr sz="1050" b="0" i="0" u="none" strike="noStrike">
+              <a:defRPr sz="1100" b="0" i="0" u="none" strike="noStrike">
                 <a:solidFill>
                   <a:srgbClr val="334155"/>
                 </a:solidFill>
@@ -887,6 +1144,254 @@
         <a:effectLst/>
       </c:spPr>
     </c:plotArea>
+    <c:plotVisOnly val="1"/>
+    <c:dispBlanksAs val="span"/>
+  </c:chart>
+  <c:spPr>
+    <a:noFill/>
+    <a:ln>
+      <a:noFill/>
+    </a:ln>
+    <a:effectLst/>
+  </c:spPr>
+  <c:externalData r:id="rId1">
+    <c:autoUpdate val="0"/>
+  </c:externalData>
+</c:chartSpace>
+</file>
+
+<file path=ppt/charts/chart12.xml><?xml version="1.0" encoding="utf-8"?>
+<c:chartSpace xmlns:c="http://schemas.openxmlformats.org/drawingml/2006/chart" xmlns:a="http://schemas.openxmlformats.org/drawingml/2006/main" xmlns:r="http://schemas.openxmlformats.org/officeDocument/2006/relationships">
+  <c:date1904 val="0"/>
+  <c:roundedCorners val="1"/>
+  <c:chart>
+    <c:autoTitleDeleted val="1"/>
+    <c:plotArea>
+      <c:layout/>
+      <c:doughnutChart>
+        <c:varyColors val="1"/>
+        <c:ser>
+          <c:idx val="0"/>
+          <c:order val="0"/>
+          <c:tx>
+            <c:strRef>
+              <c:f>Sheet1!$B$1</c:f>
+              <c:strCache>
+                <c:ptCount val="1"/>
+                <c:pt idx="0">
+                  <c:v>FY28</c:v>
+                </c:pt>
+              </c:strCache>
+            </c:strRef>
+          </c:tx>
+          <c:spPr>
+            <a:solidFill>
+              <a:schemeClr val="accent1"/>
+            </a:solidFill>
+            <a:ln w="9525" cap="flat">
+              <a:solidFill>
+                <a:srgbClr val="F9F9F9"/>
+              </a:solidFill>
+              <a:prstDash val="solid"/>
+              <a:round/>
+            </a:ln>
+            <a:effectLst/>
+          </c:spPr>
+          <c:dPt>
+            <c:idx val="0"/>
+            <c:bubble3D val="0"/>
+            <c:spPr>
+              <a:solidFill>
+                <a:srgbClr val="0F766E"/>
+              </a:solidFill>
+              <a:effectLst/>
+            </c:spPr>
+          </c:dPt>
+          <c:dPt>
+            <c:idx val="1"/>
+            <c:bubble3D val="0"/>
+            <c:spPr>
+              <a:solidFill>
+                <a:srgbClr val="2B5CC4"/>
+              </a:solidFill>
+              <a:effectLst/>
+            </c:spPr>
+          </c:dPt>
+          <c:dPt>
+            <c:idx val="2"/>
+            <c:bubble3D val="0"/>
+            <c:spPr>
+              <a:solidFill>
+                <a:srgbClr val="94A3B8"/>
+              </a:solidFill>
+              <a:effectLst/>
+            </c:spPr>
+          </c:dPt>
+          <c:dLbls>
+            <c:dLbl>
+              <c:idx val="0"/>
+              <c:numFmt formatCode="General" sourceLinked="0"/>
+              <c:spPr/>
+              <c:txPr>
+                <a:bodyPr/>
+                <a:lstStyle/>
+                <a:p>
+                  <a:pPr>
+                    <a:defRPr sz="900" b="0" i="0" u="none" strike="noStrike">
+                      <a:solidFill>
+                        <a:srgbClr val="FFFFFF"/>
+                      </a:solidFill>
+                      <a:latin typeface="Calibri"/>
+                    </a:defRPr>
+                  </a:pPr>
+                </a:p>
+              </c:txPr>
+              <c:showLegendKey val="0"/>
+              <c:showVal val="1"/>
+              <c:showCatName val="0"/>
+              <c:showSerName val="0"/>
+              <c:showPercent val="0"/>
+              <c:showBubbleSize val="0"/>
+            </c:dLbl>
+            <c:dLbl>
+              <c:idx val="1"/>
+              <c:numFmt formatCode="General" sourceLinked="0"/>
+              <c:spPr/>
+              <c:txPr>
+                <a:bodyPr/>
+                <a:lstStyle/>
+                <a:p>
+                  <a:pPr>
+                    <a:defRPr sz="900" b="0" i="0" u="none" strike="noStrike">
+                      <a:solidFill>
+                        <a:srgbClr val="FFFFFF"/>
+                      </a:solidFill>
+                      <a:latin typeface="Calibri"/>
+                    </a:defRPr>
+                  </a:pPr>
+                </a:p>
+              </c:txPr>
+              <c:showLegendKey val="0"/>
+              <c:showVal val="1"/>
+              <c:showCatName val="0"/>
+              <c:showSerName val="0"/>
+              <c:showPercent val="0"/>
+              <c:showBubbleSize val="0"/>
+            </c:dLbl>
+            <c:dLbl>
+              <c:idx val="2"/>
+              <c:numFmt formatCode="General" sourceLinked="0"/>
+              <c:spPr/>
+              <c:txPr>
+                <a:bodyPr/>
+                <a:lstStyle/>
+                <a:p>
+                  <a:pPr>
+                    <a:defRPr sz="900" b="0" i="0" u="none" strike="noStrike">
+                      <a:solidFill>
+                        <a:srgbClr val="FFFFFF"/>
+                      </a:solidFill>
+                      <a:latin typeface="Calibri"/>
+                    </a:defRPr>
+                  </a:pPr>
+                </a:p>
+              </c:txPr>
+              <c:showLegendKey val="0"/>
+              <c:showVal val="1"/>
+              <c:showCatName val="0"/>
+              <c:showSerName val="0"/>
+              <c:showPercent val="0"/>
+              <c:showBubbleSize val="0"/>
+            </c:dLbl>
+            <c:numFmt formatCode="General" sourceLinked="0"/>
+            <c:txPr>
+              <a:bodyPr/>
+              <a:lstStyle/>
+              <a:p>
+                <a:pPr>
+                  <a:defRPr sz="1800" b="0" i="0" u="none" strike="noStrike">
+                    <a:solidFill>
+                      <a:srgbClr val="000000"/>
+                    </a:solidFill>
+                    <a:latin typeface="Arial"/>
+                  </a:defRPr>
+                </a:pPr>
+              </a:p>
+            </c:txPr>
+            <c:showLegendKey val="0"/>
+            <c:showVal val="0"/>
+            <c:showCatName val="1"/>
+            <c:showSerName val="0"/>
+            <c:showPercent val="1"/>
+            <c:showBubbleSize val="0"/>
+            <c:showLeaderLines val="0"/>
+          </c:dLbls>
+          <c:cat>
+            <c:strRef>
+              <c:f>Sheet1!$A$2:$A$4</c:f>
+              <c:strCache>
+                <c:ptCount val="3"/>
+                <c:pt idx="0">
+                  <c:v>BLR initial fees</c:v>
+                </c:pt>
+                <c:pt idx="1">
+                  <c:v>Surveillance annuity</c:v>
+                </c:pt>
+                <c:pt idx="2">
+                  <c:v>Existing ratings</c:v>
+                </c:pt>
+              </c:strCache>
+            </c:strRef>
+          </c:cat>
+          <c:val>
+            <c:numRef>
+              <c:f>Sheet1!$B$2:$B$4</c:f>
+              <c:numCache>
+                <c:ptCount val="3"/>
+                <c:pt idx="0">
+                  <c:v>5.76</c:v>
+                </c:pt>
+                <c:pt idx="1">
+                  <c:v>1.44</c:v>
+                </c:pt>
+                <c:pt idx="2">
+                  <c:v>1.1</c:v>
+                </c:pt>
+              </c:numCache>
+            </c:numRef>
+          </c:val>
+        </c:ser>
+        <c:firstSliceAng val="0"/>
+        <c:holeSize val="55"/>
+      </c:doughnutChart>
+      <c:spPr>
+        <a:noFill/>
+        <a:ln>
+          <a:noFill/>
+        </a:ln>
+        <a:effectLst/>
+      </c:spPr>
+    </c:plotArea>
+    <c:legend>
+      <c:legendPos val="b"/>
+      <c:overlay val="0"/>
+      <c:txPr>
+        <a:bodyPr/>
+        <a:lstStyle/>
+        <a:p>
+          <a:pPr>
+            <a:defRPr sz="1000">
+              <a:solidFill>
+                <a:srgbClr val="334155"/>
+              </a:solidFill>
+              <a:latin typeface="Calibri"/>
+              <a:cs typeface="Calibri"/>
+            </a:defRPr>
+          </a:pPr>
+          <a:endParaRPr lang="en-US"/>
+        </a:p>
+      </c:txPr>
+    </c:legend>
     <c:plotVisOnly val="1"/>
     <c:dispBlanksAs val="span"/>
   </c:chart>
@@ -1188,7 +1693,9 @@
     <c:autoTitleDeleted val="1"/>
     <c:plotArea>
       <c:layout/>
-      <c:areaChart>
+      <c:barChart>
+        <c:barDir val="col"/>
+        <c:grouping val="clustered"/>
         <c:varyColors val="0"/>
         <c:ser>
           <c:idx val="0"/>
@@ -1199,16 +1706,14 @@
               <c:strCache>
                 <c:ptCount val="1"/>
                 <c:pt idx="0">
-                  <c:v>Income</c:v>
+                  <c:v>FD returns</c:v>
                 </c:pt>
               </c:strCache>
             </c:strRef>
           </c:tx>
           <c:spPr>
             <a:solidFill>
-              <a:srgbClr val="0F766E">
-                <a:alpha val="35000"/>
-              </a:srgbClr>
+              <a:srgbClr val="94A3B8"/>
             </a:solidFill>
             <a:effectLst/>
           </c:spPr>
@@ -1220,17 +1725,17 @@
               <a:lstStyle/>
               <a:p>
                 <a:pPr>
-                  <a:defRPr b="0" i="0" strike="noStrike" sz="1200" u="none">
+                  <a:defRPr b="0" i="0" strike="noStrike" sz="700" u="none">
                     <a:solidFill>
-                      <a:srgbClr val="000000"/>
+                      <a:srgbClr val="334155"/>
                     </a:solidFill>
-                    <a:latin typeface="Arial"/>
+                    <a:latin typeface="Calibri"/>
                   </a:defRPr>
                 </a:pPr>
               </a:p>
             </c:txPr>
             <c:showLegendKey val="0"/>
-            <c:showVal val="0"/>
+            <c:showVal val="1"/>
             <c:showCatName val="0"/>
             <c:showSerName val="0"/>
             <c:showPercent val="0"/>
@@ -1244,40 +1749,40 @@
                 <c:ptCount val="12"/>
                 <c:lvl>
                   <c:pt idx="0">
-                    <c:v>A</c:v>
+                    <c:v>Apr</c:v>
                   </c:pt>
                   <c:pt idx="1">
-                    <c:v>M</c:v>
+                    <c:v>May</c:v>
                   </c:pt>
                   <c:pt idx="2">
-                    <c:v>J</c:v>
+                    <c:v>Jun</c:v>
                   </c:pt>
                   <c:pt idx="3">
-                    <c:v>J</c:v>
+                    <c:v>Jul</c:v>
                   </c:pt>
                   <c:pt idx="4">
-                    <c:v>A</c:v>
+                    <c:v>Aug</c:v>
                   </c:pt>
                   <c:pt idx="5">
-                    <c:v>S</c:v>
+                    <c:v>Sep</c:v>
                   </c:pt>
                   <c:pt idx="6">
-                    <c:v>O</c:v>
+                    <c:v>Oct</c:v>
                   </c:pt>
                   <c:pt idx="7">
-                    <c:v>N</c:v>
+                    <c:v>Nov</c:v>
                   </c:pt>
                   <c:pt idx="8">
-                    <c:v>D</c:v>
+                    <c:v>Dec</c:v>
                   </c:pt>
                   <c:pt idx="9">
-                    <c:v>J</c:v>
+                    <c:v>Jan</c:v>
                   </c:pt>
                   <c:pt idx="10">
-                    <c:v>F</c:v>
+                    <c:v>Feb</c:v>
                   </c:pt>
                   <c:pt idx="11">
-                    <c:v>M</c:v>
+                    <c:v>Mar</c:v>
                   </c:pt>
                 </c:lvl>
               </c:multiLvlStrCache>
@@ -1290,75 +1795,45 @@
                 <c:formatCode>General</c:formatCode>
                 <c:ptCount val="12"/>
                 <c:pt idx="0">
-                  <c:v>0.17</c:v>
+                  <c:v>15</c:v>
                 </c:pt>
                 <c:pt idx="1">
-                  <c:v>0.2</c:v>
+                  <c:v>15</c:v>
                 </c:pt>
                 <c:pt idx="2">
-                  <c:v>0.23</c:v>
+                  <c:v>15</c:v>
                 </c:pt>
                 <c:pt idx="3">
-                  <c:v>0.23</c:v>
+                  <c:v>15</c:v>
                 </c:pt>
                 <c:pt idx="4">
-                  <c:v>0.23</c:v>
+                  <c:v>15</c:v>
                 </c:pt>
                 <c:pt idx="5">
-                  <c:v>0.23</c:v>
+                  <c:v>15</c:v>
                 </c:pt>
                 <c:pt idx="6">
-                  <c:v>0.71</c:v>
+                  <c:v>15</c:v>
                 </c:pt>
                 <c:pt idx="7">
-                  <c:v>0.71</c:v>
+                  <c:v>15</c:v>
                 </c:pt>
                 <c:pt idx="8">
-                  <c:v>0.71</c:v>
+                  <c:v>15</c:v>
                 </c:pt>
                 <c:pt idx="9">
-                  <c:v>0.71</c:v>
+                  <c:v>15</c:v>
                 </c:pt>
                 <c:pt idx="10">
-                  <c:v>0.71</c:v>
+                  <c:v>15</c:v>
                 </c:pt>
                 <c:pt idx="11">
-                  <c:v>0.71</c:v>
+                  <c:v>15</c:v>
                 </c:pt>
               </c:numCache>
             </c:numRef>
           </c:val>
         </c:ser>
-        <c:dLbls>
-          <c:numFmt formatCode="#,##0" sourceLinked="0"/>
-          <c:txPr>
-            <a:bodyPr/>
-            <a:lstStyle/>
-            <a:p>
-              <a:pPr>
-                <a:defRPr b="0" i="0" strike="noStrike" sz="1200" u="none">
-                  <a:solidFill>
-                    <a:srgbClr val="000000"/>
-                  </a:solidFill>
-                  <a:latin typeface="Arial"/>
-                </a:defRPr>
-              </a:pPr>
-            </a:p>
-          </c:txPr>
-          <c:showLegendKey val="0"/>
-          <c:showVal val="0"/>
-          <c:showCatName val="0"/>
-          <c:showSerName val="0"/>
-          <c:showPercent val="0"/>
-          <c:showBubbleSize val="0"/>
-          <c:showLeaderLines val="0"/>
-        </c:dLbls>
-        <c:axId val="2094734554"/>
-        <c:axId val="2094734552"/>
-        <c:axId val="2094734556"/>
-      </c:areaChart>
-      <c:lineChart>
-        <c:varyColors val="0"/>
         <c:ser>
           <c:idx val="1"/>
           <c:order val="1"/>
@@ -1368,22 +1843,15 @@
               <c:strCache>
                 <c:ptCount val="1"/>
                 <c:pt idx="0">
-                  <c:v>Expense</c:v>
+                  <c:v>Earning (existing + BLR)</c:v>
                 </c:pt>
               </c:strCache>
             </c:strRef>
           </c:tx>
           <c:spPr>
             <a:solidFill>
-              <a:srgbClr val="334155"/>
+              <a:srgbClr val="0F766E"/>
             </a:solidFill>
-            <a:ln w="28575" cap="flat">
-              <a:solidFill>
-                <a:srgbClr val="334155"/>
-              </a:solidFill>
-              <a:prstDash val="solid"/>
-              <a:round/>
-            </a:ln>
             <a:effectLst/>
           </c:spPr>
           <c:invertIfNegative val="0"/>
@@ -1394,40 +1862,23 @@
               <a:lstStyle/>
               <a:p>
                 <a:pPr>
-                  <a:defRPr b="0" i="0" strike="noStrike" sz="1200" u="none">
+                  <a:defRPr b="0" i="0" strike="noStrike" sz="700" u="none">
                     <a:solidFill>
-                      <a:srgbClr val="000000"/>
+                      <a:srgbClr val="334155"/>
                     </a:solidFill>
-                    <a:latin typeface="Arial"/>
+                    <a:latin typeface="Calibri"/>
                   </a:defRPr>
                 </a:pPr>
               </a:p>
             </c:txPr>
             <c:showLegendKey val="0"/>
-            <c:showVal val="0"/>
+            <c:showVal val="1"/>
             <c:showCatName val="0"/>
             <c:showSerName val="0"/>
             <c:showPercent val="0"/>
             <c:showBubbleSize val="0"/>
             <c:showLeaderLines val="0"/>
           </c:dLbls>
-          <c:marker>
-            <c:symbol val="none"/>
-            <c:size val="6"/>
-            <c:spPr>
-              <a:solidFill>
-                <a:srgbClr val="334155"/>
-              </a:solidFill>
-              <a:ln w="9525" cap="flat">
-                <a:solidFill>
-                  <a:srgbClr val="334155"/>
-                </a:solidFill>
-                <a:prstDash val="solid"/>
-                <a:round/>
-              </a:ln>
-              <a:effectLst/>
-            </c:spPr>
-          </c:marker>
           <c:cat>
             <c:multiLvlStrRef>
               <c:f>Sheet1!$A$2:$A$13</c:f>
@@ -1435,40 +1886,40 @@
                 <c:ptCount val="12"/>
                 <c:lvl>
                   <c:pt idx="0">
-                    <c:v>A</c:v>
+                    <c:v>Apr</c:v>
                   </c:pt>
                   <c:pt idx="1">
-                    <c:v>M</c:v>
+                    <c:v>May</c:v>
                   </c:pt>
                   <c:pt idx="2">
-                    <c:v>J</c:v>
+                    <c:v>Jun</c:v>
                   </c:pt>
                   <c:pt idx="3">
-                    <c:v>J</c:v>
+                    <c:v>Jul</c:v>
                   </c:pt>
                   <c:pt idx="4">
-                    <c:v>A</c:v>
+                    <c:v>Aug</c:v>
                   </c:pt>
                   <c:pt idx="5">
-                    <c:v>S</c:v>
+                    <c:v>Sep</c:v>
                   </c:pt>
                   <c:pt idx="6">
-                    <c:v>O</c:v>
+                    <c:v>Oct</c:v>
                   </c:pt>
                   <c:pt idx="7">
-                    <c:v>N</c:v>
+                    <c:v>Nov</c:v>
                   </c:pt>
                   <c:pt idx="8">
-                    <c:v>D</c:v>
+                    <c:v>Dec</c:v>
                   </c:pt>
                   <c:pt idx="9">
-                    <c:v>J</c:v>
+                    <c:v>Jan</c:v>
                   </c:pt>
                   <c:pt idx="10">
-                    <c:v>F</c:v>
+                    <c:v>Feb</c:v>
                   </c:pt>
                   <c:pt idx="11">
-                    <c:v>M</c:v>
+                    <c:v>Mar</c:v>
                   </c:pt>
                 </c:lvl>
               </c:multiLvlStrCache>
@@ -1481,45 +1932,181 @@
                 <c:formatCode>General</c:formatCode>
                 <c:ptCount val="12"/>
                 <c:pt idx="0">
-                  <c:v>0.36</c:v>
+                  <c:v>2</c:v>
                 </c:pt>
                 <c:pt idx="1">
-                  <c:v>0.33</c:v>
+                  <c:v>5</c:v>
                 </c:pt>
                 <c:pt idx="2">
-                  <c:v>0.46</c:v>
+                  <c:v>8</c:v>
                 </c:pt>
                 <c:pt idx="3">
-                  <c:v>0.4</c:v>
+                  <c:v>8</c:v>
                 </c:pt>
                 <c:pt idx="4">
-                  <c:v>0.46</c:v>
+                  <c:v>8</c:v>
                 </c:pt>
                 <c:pt idx="5">
-                  <c:v>0.46</c:v>
+                  <c:v>8</c:v>
                 </c:pt>
                 <c:pt idx="6">
-                  <c:v>0.46</c:v>
+                  <c:v>56</c:v>
                 </c:pt>
                 <c:pt idx="7">
-                  <c:v>0.46</c:v>
+                  <c:v>56</c:v>
                 </c:pt>
                 <c:pt idx="8">
-                  <c:v>0.46</c:v>
+                  <c:v>56</c:v>
                 </c:pt>
                 <c:pt idx="9">
-                  <c:v>0.46</c:v>
+                  <c:v>56</c:v>
                 </c:pt>
                 <c:pt idx="10">
-                  <c:v>0.46</c:v>
+                  <c:v>56</c:v>
                 </c:pt>
                 <c:pt idx="11">
-                  <c:v>0.46</c:v>
+                  <c:v>56</c:v>
                 </c:pt>
               </c:numCache>
             </c:numRef>
           </c:val>
-          <c:smooth val="0"/>
+        </c:ser>
+        <c:ser>
+          <c:idx val="2"/>
+          <c:order val="2"/>
+          <c:tx>
+            <c:strRef>
+              <c:f>Sheet1!$D$1</c:f>
+              <c:strCache>
+                <c:ptCount val="1"/>
+                <c:pt idx="0">
+                  <c:v>Expense, all in</c:v>
+                </c:pt>
+              </c:strCache>
+            </c:strRef>
+          </c:tx>
+          <c:spPr>
+            <a:solidFill>
+              <a:srgbClr val="334155"/>
+            </a:solidFill>
+            <a:effectLst/>
+          </c:spPr>
+          <c:invertIfNegative val="0"/>
+          <c:dLbls>
+            <c:numFmt formatCode="#,##0" sourceLinked="0"/>
+            <c:txPr>
+              <a:bodyPr/>
+              <a:lstStyle/>
+              <a:p>
+                <a:pPr>
+                  <a:defRPr b="0" i="0" strike="noStrike" sz="700" u="none">
+                    <a:solidFill>
+                      <a:srgbClr val="334155"/>
+                    </a:solidFill>
+                    <a:latin typeface="Calibri"/>
+                  </a:defRPr>
+                </a:pPr>
+              </a:p>
+            </c:txPr>
+            <c:showLegendKey val="0"/>
+            <c:showVal val="1"/>
+            <c:showCatName val="0"/>
+            <c:showSerName val="0"/>
+            <c:showPercent val="0"/>
+            <c:showBubbleSize val="0"/>
+            <c:showLeaderLines val="0"/>
+          </c:dLbls>
+          <c:cat>
+            <c:multiLvlStrRef>
+              <c:f>Sheet1!$A$2:$A$13</c:f>
+              <c:multiLvlStrCache>
+                <c:ptCount val="12"/>
+                <c:lvl>
+                  <c:pt idx="0">
+                    <c:v>Apr</c:v>
+                  </c:pt>
+                  <c:pt idx="1">
+                    <c:v>May</c:v>
+                  </c:pt>
+                  <c:pt idx="2">
+                    <c:v>Jun</c:v>
+                  </c:pt>
+                  <c:pt idx="3">
+                    <c:v>Jul</c:v>
+                  </c:pt>
+                  <c:pt idx="4">
+                    <c:v>Aug</c:v>
+                  </c:pt>
+                  <c:pt idx="5">
+                    <c:v>Sep</c:v>
+                  </c:pt>
+                  <c:pt idx="6">
+                    <c:v>Oct</c:v>
+                  </c:pt>
+                  <c:pt idx="7">
+                    <c:v>Nov</c:v>
+                  </c:pt>
+                  <c:pt idx="8">
+                    <c:v>Dec</c:v>
+                  </c:pt>
+                  <c:pt idx="9">
+                    <c:v>Jan</c:v>
+                  </c:pt>
+                  <c:pt idx="10">
+                    <c:v>Feb</c:v>
+                  </c:pt>
+                  <c:pt idx="11">
+                    <c:v>Mar</c:v>
+                  </c:pt>
+                </c:lvl>
+              </c:multiLvlStrCache>
+            </c:multiLvlStrRef>
+          </c:cat>
+          <c:val>
+            <c:numRef>
+              <c:f>Sheet1!$D$2:$D$13</c:f>
+              <c:numCache>
+                <c:formatCode>General</c:formatCode>
+                <c:ptCount val="12"/>
+                <c:pt idx="0">
+                  <c:v>36</c:v>
+                </c:pt>
+                <c:pt idx="1">
+                  <c:v>33</c:v>
+                </c:pt>
+                <c:pt idx="2">
+                  <c:v>46</c:v>
+                </c:pt>
+                <c:pt idx="3">
+                  <c:v>40</c:v>
+                </c:pt>
+                <c:pt idx="4">
+                  <c:v>46</c:v>
+                </c:pt>
+                <c:pt idx="5">
+                  <c:v>46</c:v>
+                </c:pt>
+                <c:pt idx="6">
+                  <c:v>46</c:v>
+                </c:pt>
+                <c:pt idx="7">
+                  <c:v>46</c:v>
+                </c:pt>
+                <c:pt idx="8">
+                  <c:v>46</c:v>
+                </c:pt>
+                <c:pt idx="9">
+                  <c:v>46</c:v>
+                </c:pt>
+                <c:pt idx="10">
+                  <c:v>46</c:v>
+                </c:pt>
+                <c:pt idx="11">
+                  <c:v>46</c:v>
+                </c:pt>
+              </c:numCache>
+            </c:numRef>
+          </c:val>
         </c:ser>
         <c:dLbls>
           <c:numFmt formatCode="#,##0" sourceLinked="0"/>
@@ -1528,28 +2115,29 @@
             <a:lstStyle/>
             <a:p>
               <a:pPr>
-                <a:defRPr b="0" i="0" strike="noStrike" sz="1200" u="none">
+                <a:defRPr b="0" i="0" strike="noStrike" sz="700" u="none">
                   <a:solidFill>
-                    <a:srgbClr val="000000"/>
+                    <a:srgbClr val="334155"/>
                   </a:solidFill>
-                  <a:latin typeface="Arial"/>
+                  <a:latin typeface="Calibri"/>
                 </a:defRPr>
               </a:pPr>
             </a:p>
           </c:txPr>
           <c:showLegendKey val="0"/>
-          <c:showVal val="0"/>
+          <c:showVal val="1"/>
           <c:showCatName val="0"/>
           <c:showSerName val="0"/>
           <c:showPercent val="0"/>
           <c:showBubbleSize val="0"/>
           <c:showLeaderLines val="0"/>
         </c:dLbls>
-        <c:marker val="1"/>
+        <c:gapWidth val="150"/>
+        <c:overlap val="0"/>
         <c:axId val="2094734554"/>
         <c:axId val="2094734552"/>
         <c:axId val="2094734556"/>
-      </c:lineChart>
+      </c:barChart>
       <c:catAx>
         <c:axId val="2094734554"/>
         <c:scaling>
@@ -1575,9 +2163,9 @@
           <a:lstStyle/>
           <a:p>
             <a:pPr>
-              <a:defRPr sz="800" b="0" i="0" u="none" strike="noStrike">
-                <a:solidFill>
-                  <a:srgbClr val="94A3B8"/>
+              <a:defRPr sz="1000" b="0" i="0" u="none" strike="noStrike">
+                <a:solidFill>
+                  <a:srgbClr val="334155"/>
                 </a:solidFill>
                 <a:latin typeface="Calibri"/>
               </a:defRPr>
@@ -1595,7 +2183,7 @@
         <c:axId val="2094734552"/>
         <c:scaling>
           <c:orientation val="minMax"/>
-          <c:max val="0.8"/>
+          <c:max val="64"/>
           <c:min val="0"/>
         </c:scaling>
         <c:delete val="1"/>
@@ -1630,7 +2218,7 @@
         </c:txPr>
         <c:crossAx val="2094734554"/>
         <c:crosses val="autoZero"/>
-        <c:crossBetween val="midCat"/>
+        <c:crossBetween val="between"/>
       </c:valAx>
       <c:spPr>
         <a:noFill/>
@@ -1640,6 +2228,26 @@
         <a:effectLst/>
       </c:spPr>
     </c:plotArea>
+    <c:legend>
+      <c:legendPos val="b"/>
+      <c:overlay val="0"/>
+      <c:txPr>
+        <a:bodyPr/>
+        <a:lstStyle/>
+        <a:p>
+          <a:pPr>
+            <a:defRPr sz="1100">
+              <a:solidFill>
+                <a:srgbClr val="334155"/>
+              </a:solidFill>
+              <a:latin typeface="Calibri"/>
+              <a:cs typeface="Calibri"/>
+            </a:defRPr>
+          </a:pPr>
+          <a:endParaRPr lang="en-US"/>
+        </a:p>
+      </c:txPr>
+    </c:legend>
     <c:plotVisOnly val="1"/>
     <c:dispBlanksAs val="span"/>
   </c:chart>
@@ -1664,7 +2272,9 @@
     <c:autoTitleDeleted val="1"/>
     <c:plotArea>
       <c:layout/>
-      <c:areaChart>
+      <c:barChart>
+        <c:barDir val="col"/>
+        <c:grouping val="clustered"/>
         <c:varyColors val="0"/>
         <c:ser>
           <c:idx val="0"/>
@@ -1675,16 +2285,14 @@
               <c:strCache>
                 <c:ptCount val="1"/>
                 <c:pt idx="0">
-                  <c:v>Income</c:v>
+                  <c:v>FD returns</c:v>
                 </c:pt>
               </c:strCache>
             </c:strRef>
           </c:tx>
           <c:spPr>
             <a:solidFill>
-              <a:srgbClr val="0F766E">
-                <a:alpha val="35000"/>
-              </a:srgbClr>
+              <a:srgbClr val="94A3B8"/>
             </a:solidFill>
             <a:effectLst/>
           </c:spPr>
@@ -1696,17 +2304,17 @@
               <a:lstStyle/>
               <a:p>
                 <a:pPr>
-                  <a:defRPr b="0" i="0" strike="noStrike" sz="1200" u="none">
+                  <a:defRPr b="0" i="0" strike="noStrike" sz="700" u="none">
                     <a:solidFill>
-                      <a:srgbClr val="000000"/>
+                      <a:srgbClr val="334155"/>
                     </a:solidFill>
-                    <a:latin typeface="Arial"/>
+                    <a:latin typeface="Calibri"/>
                   </a:defRPr>
                 </a:pPr>
               </a:p>
             </c:txPr>
             <c:showLegendKey val="0"/>
-            <c:showVal val="0"/>
+            <c:showVal val="1"/>
             <c:showCatName val="0"/>
             <c:showSerName val="0"/>
             <c:showPercent val="0"/>
@@ -1720,40 +2328,40 @@
                 <c:ptCount val="12"/>
                 <c:lvl>
                   <c:pt idx="0">
-                    <c:v>A</c:v>
+                    <c:v>Apr</c:v>
                   </c:pt>
                   <c:pt idx="1">
-                    <c:v>M</c:v>
+                    <c:v>May</c:v>
                   </c:pt>
                   <c:pt idx="2">
-                    <c:v>J</c:v>
+                    <c:v>Jun</c:v>
                   </c:pt>
                   <c:pt idx="3">
-                    <c:v>J</c:v>
+                    <c:v>Jul</c:v>
                   </c:pt>
                   <c:pt idx="4">
-                    <c:v>A</c:v>
+                    <c:v>Aug</c:v>
                   </c:pt>
                   <c:pt idx="5">
-                    <c:v>S</c:v>
+                    <c:v>Sep</c:v>
                   </c:pt>
                   <c:pt idx="6">
-                    <c:v>O</c:v>
+                    <c:v>Oct</c:v>
                   </c:pt>
                   <c:pt idx="7">
-                    <c:v>N</c:v>
+                    <c:v>Nov</c:v>
                   </c:pt>
                   <c:pt idx="8">
-                    <c:v>D</c:v>
+                    <c:v>Dec</c:v>
                   </c:pt>
                   <c:pt idx="9">
-                    <c:v>J</c:v>
+                    <c:v>Jan</c:v>
                   </c:pt>
                   <c:pt idx="10">
-                    <c:v>F</c:v>
+                    <c:v>Feb</c:v>
                   </c:pt>
                   <c:pt idx="11">
-                    <c:v>M</c:v>
+                    <c:v>Mar</c:v>
                   </c:pt>
                 </c:lvl>
               </c:multiLvlStrCache>
@@ -1766,75 +2374,45 @@
                 <c:formatCode>General</c:formatCode>
                 <c:ptCount val="12"/>
                 <c:pt idx="0">
-                  <c:v>0.17</c:v>
+                  <c:v>15</c:v>
                 </c:pt>
                 <c:pt idx="1">
-                  <c:v>0.2</c:v>
+                  <c:v>15</c:v>
                 </c:pt>
                 <c:pt idx="2">
-                  <c:v>0.23</c:v>
+                  <c:v>15</c:v>
                 </c:pt>
                 <c:pt idx="3">
-                  <c:v>0.23</c:v>
+                  <c:v>15</c:v>
                 </c:pt>
                 <c:pt idx="4">
-                  <c:v>0.23</c:v>
+                  <c:v>15</c:v>
                 </c:pt>
                 <c:pt idx="5">
-                  <c:v>0.23</c:v>
+                  <c:v>15</c:v>
                 </c:pt>
                 <c:pt idx="6">
-                  <c:v>0.23</c:v>
+                  <c:v>15</c:v>
                 </c:pt>
                 <c:pt idx="7">
-                  <c:v>0.23</c:v>
+                  <c:v>15</c:v>
                 </c:pt>
                 <c:pt idx="8">
-                  <c:v>0.23</c:v>
+                  <c:v>15</c:v>
                 </c:pt>
                 <c:pt idx="9">
-                  <c:v>0.71</c:v>
+                  <c:v>15</c:v>
                 </c:pt>
                 <c:pt idx="10">
-                  <c:v>0.71</c:v>
+                  <c:v>15</c:v>
                 </c:pt>
                 <c:pt idx="11">
-                  <c:v>0.71</c:v>
+                  <c:v>15</c:v>
                 </c:pt>
               </c:numCache>
             </c:numRef>
           </c:val>
         </c:ser>
-        <c:dLbls>
-          <c:numFmt formatCode="#,##0" sourceLinked="0"/>
-          <c:txPr>
-            <a:bodyPr/>
-            <a:lstStyle/>
-            <a:p>
-              <a:pPr>
-                <a:defRPr b="0" i="0" strike="noStrike" sz="1200" u="none">
-                  <a:solidFill>
-                    <a:srgbClr val="000000"/>
-                  </a:solidFill>
-                  <a:latin typeface="Arial"/>
-                </a:defRPr>
-              </a:pPr>
-            </a:p>
-          </c:txPr>
-          <c:showLegendKey val="0"/>
-          <c:showVal val="0"/>
-          <c:showCatName val="0"/>
-          <c:showSerName val="0"/>
-          <c:showPercent val="0"/>
-          <c:showBubbleSize val="0"/>
-          <c:showLeaderLines val="0"/>
-        </c:dLbls>
-        <c:axId val="2094734554"/>
-        <c:axId val="2094734552"/>
-        <c:axId val="2094734556"/>
-      </c:areaChart>
-      <c:lineChart>
-        <c:varyColors val="0"/>
         <c:ser>
           <c:idx val="1"/>
           <c:order val="1"/>
@@ -1844,22 +2422,15 @@
               <c:strCache>
                 <c:ptCount val="1"/>
                 <c:pt idx="0">
-                  <c:v>Expense</c:v>
+                  <c:v>Earning (existing + BLR)</c:v>
                 </c:pt>
               </c:strCache>
             </c:strRef>
           </c:tx>
           <c:spPr>
             <a:solidFill>
-              <a:srgbClr val="334155"/>
+              <a:srgbClr val="0F766E"/>
             </a:solidFill>
-            <a:ln w="28575" cap="flat">
-              <a:solidFill>
-                <a:srgbClr val="334155"/>
-              </a:solidFill>
-              <a:prstDash val="solid"/>
-              <a:round/>
-            </a:ln>
             <a:effectLst/>
           </c:spPr>
           <c:invertIfNegative val="0"/>
@@ -1870,40 +2441,23 @@
               <a:lstStyle/>
               <a:p>
                 <a:pPr>
-                  <a:defRPr b="0" i="0" strike="noStrike" sz="1200" u="none">
+                  <a:defRPr b="0" i="0" strike="noStrike" sz="700" u="none">
                     <a:solidFill>
-                      <a:srgbClr val="000000"/>
+                      <a:srgbClr val="334155"/>
                     </a:solidFill>
-                    <a:latin typeface="Arial"/>
+                    <a:latin typeface="Calibri"/>
                   </a:defRPr>
                 </a:pPr>
               </a:p>
             </c:txPr>
             <c:showLegendKey val="0"/>
-            <c:showVal val="0"/>
+            <c:showVal val="1"/>
             <c:showCatName val="0"/>
             <c:showSerName val="0"/>
             <c:showPercent val="0"/>
             <c:showBubbleSize val="0"/>
             <c:showLeaderLines val="0"/>
           </c:dLbls>
-          <c:marker>
-            <c:symbol val="none"/>
-            <c:size val="6"/>
-            <c:spPr>
-              <a:solidFill>
-                <a:srgbClr val="334155"/>
-              </a:solidFill>
-              <a:ln w="9525" cap="flat">
-                <a:solidFill>
-                  <a:srgbClr val="334155"/>
-                </a:solidFill>
-                <a:prstDash val="solid"/>
-                <a:round/>
-              </a:ln>
-              <a:effectLst/>
-            </c:spPr>
-          </c:marker>
           <c:cat>
             <c:multiLvlStrRef>
               <c:f>Sheet1!$A$2:$A$13</c:f>
@@ -1911,40 +2465,40 @@
                 <c:ptCount val="12"/>
                 <c:lvl>
                   <c:pt idx="0">
-                    <c:v>A</c:v>
+                    <c:v>Apr</c:v>
                   </c:pt>
                   <c:pt idx="1">
-                    <c:v>M</c:v>
+                    <c:v>May</c:v>
                   </c:pt>
                   <c:pt idx="2">
-                    <c:v>J</c:v>
+                    <c:v>Jun</c:v>
                   </c:pt>
                   <c:pt idx="3">
-                    <c:v>J</c:v>
+                    <c:v>Jul</c:v>
                   </c:pt>
                   <c:pt idx="4">
-                    <c:v>A</c:v>
+                    <c:v>Aug</c:v>
                   </c:pt>
                   <c:pt idx="5">
-                    <c:v>S</c:v>
+                    <c:v>Sep</c:v>
                   </c:pt>
                   <c:pt idx="6">
-                    <c:v>O</c:v>
+                    <c:v>Oct</c:v>
                   </c:pt>
                   <c:pt idx="7">
-                    <c:v>N</c:v>
+                    <c:v>Nov</c:v>
                   </c:pt>
                   <c:pt idx="8">
-                    <c:v>D</c:v>
+                    <c:v>Dec</c:v>
                   </c:pt>
                   <c:pt idx="9">
-                    <c:v>J</c:v>
+                    <c:v>Jan</c:v>
                   </c:pt>
                   <c:pt idx="10">
-                    <c:v>F</c:v>
+                    <c:v>Feb</c:v>
                   </c:pt>
                   <c:pt idx="11">
-                    <c:v>M</c:v>
+                    <c:v>Mar</c:v>
                   </c:pt>
                 </c:lvl>
               </c:multiLvlStrCache>
@@ -1957,45 +2511,181 @@
                 <c:formatCode>General</c:formatCode>
                 <c:ptCount val="12"/>
                 <c:pt idx="0">
-                  <c:v>0.36</c:v>
+                  <c:v>2</c:v>
                 </c:pt>
                 <c:pt idx="1">
-                  <c:v>0.33</c:v>
+                  <c:v>5</c:v>
                 </c:pt>
                 <c:pt idx="2">
-                  <c:v>0.46</c:v>
+                  <c:v>8</c:v>
                 </c:pt>
                 <c:pt idx="3">
-                  <c:v>0.4</c:v>
+                  <c:v>8</c:v>
                 </c:pt>
                 <c:pt idx="4">
-                  <c:v>0.46</c:v>
+                  <c:v>8</c:v>
                 </c:pt>
                 <c:pt idx="5">
-                  <c:v>0.46</c:v>
+                  <c:v>8</c:v>
                 </c:pt>
                 <c:pt idx="6">
-                  <c:v>0.46</c:v>
+                  <c:v>8</c:v>
                 </c:pt>
                 <c:pt idx="7">
-                  <c:v>0.46</c:v>
+                  <c:v>8</c:v>
                 </c:pt>
                 <c:pt idx="8">
-                  <c:v>0.46</c:v>
+                  <c:v>8</c:v>
                 </c:pt>
                 <c:pt idx="9">
-                  <c:v>0.46</c:v>
+                  <c:v>56</c:v>
                 </c:pt>
                 <c:pt idx="10">
-                  <c:v>0.46</c:v>
+                  <c:v>56</c:v>
                 </c:pt>
                 <c:pt idx="11">
-                  <c:v>0.46</c:v>
+                  <c:v>56</c:v>
                 </c:pt>
               </c:numCache>
             </c:numRef>
           </c:val>
-          <c:smooth val="0"/>
+        </c:ser>
+        <c:ser>
+          <c:idx val="2"/>
+          <c:order val="2"/>
+          <c:tx>
+            <c:strRef>
+              <c:f>Sheet1!$D$1</c:f>
+              <c:strCache>
+                <c:ptCount val="1"/>
+                <c:pt idx="0">
+                  <c:v>Expense, all in</c:v>
+                </c:pt>
+              </c:strCache>
+            </c:strRef>
+          </c:tx>
+          <c:spPr>
+            <a:solidFill>
+              <a:srgbClr val="334155"/>
+            </a:solidFill>
+            <a:effectLst/>
+          </c:spPr>
+          <c:invertIfNegative val="0"/>
+          <c:dLbls>
+            <c:numFmt formatCode="#,##0" sourceLinked="0"/>
+            <c:txPr>
+              <a:bodyPr/>
+              <a:lstStyle/>
+              <a:p>
+                <a:pPr>
+                  <a:defRPr b="0" i="0" strike="noStrike" sz="700" u="none">
+                    <a:solidFill>
+                      <a:srgbClr val="334155"/>
+                    </a:solidFill>
+                    <a:latin typeface="Calibri"/>
+                  </a:defRPr>
+                </a:pPr>
+              </a:p>
+            </c:txPr>
+            <c:showLegendKey val="0"/>
+            <c:showVal val="1"/>
+            <c:showCatName val="0"/>
+            <c:showSerName val="0"/>
+            <c:showPercent val="0"/>
+            <c:showBubbleSize val="0"/>
+            <c:showLeaderLines val="0"/>
+          </c:dLbls>
+          <c:cat>
+            <c:multiLvlStrRef>
+              <c:f>Sheet1!$A$2:$A$13</c:f>
+              <c:multiLvlStrCache>
+                <c:ptCount val="12"/>
+                <c:lvl>
+                  <c:pt idx="0">
+                    <c:v>Apr</c:v>
+                  </c:pt>
+                  <c:pt idx="1">
+                    <c:v>May</c:v>
+                  </c:pt>
+                  <c:pt idx="2">
+                    <c:v>Jun</c:v>
+                  </c:pt>
+                  <c:pt idx="3">
+                    <c:v>Jul</c:v>
+                  </c:pt>
+                  <c:pt idx="4">
+                    <c:v>Aug</c:v>
+                  </c:pt>
+                  <c:pt idx="5">
+                    <c:v>Sep</c:v>
+                  </c:pt>
+                  <c:pt idx="6">
+                    <c:v>Oct</c:v>
+                  </c:pt>
+                  <c:pt idx="7">
+                    <c:v>Nov</c:v>
+                  </c:pt>
+                  <c:pt idx="8">
+                    <c:v>Dec</c:v>
+                  </c:pt>
+                  <c:pt idx="9">
+                    <c:v>Jan</c:v>
+                  </c:pt>
+                  <c:pt idx="10">
+                    <c:v>Feb</c:v>
+                  </c:pt>
+                  <c:pt idx="11">
+                    <c:v>Mar</c:v>
+                  </c:pt>
+                </c:lvl>
+              </c:multiLvlStrCache>
+            </c:multiLvlStrRef>
+          </c:cat>
+          <c:val>
+            <c:numRef>
+              <c:f>Sheet1!$D$2:$D$13</c:f>
+              <c:numCache>
+                <c:formatCode>General</c:formatCode>
+                <c:ptCount val="12"/>
+                <c:pt idx="0">
+                  <c:v>36</c:v>
+                </c:pt>
+                <c:pt idx="1">
+                  <c:v>33</c:v>
+                </c:pt>
+                <c:pt idx="2">
+                  <c:v>46</c:v>
+                </c:pt>
+                <c:pt idx="3">
+                  <c:v>40</c:v>
+                </c:pt>
+                <c:pt idx="4">
+                  <c:v>46</c:v>
+                </c:pt>
+                <c:pt idx="5">
+                  <c:v>46</c:v>
+                </c:pt>
+                <c:pt idx="6">
+                  <c:v>46</c:v>
+                </c:pt>
+                <c:pt idx="7">
+                  <c:v>46</c:v>
+                </c:pt>
+                <c:pt idx="8">
+                  <c:v>46</c:v>
+                </c:pt>
+                <c:pt idx="9">
+                  <c:v>46</c:v>
+                </c:pt>
+                <c:pt idx="10">
+                  <c:v>46</c:v>
+                </c:pt>
+                <c:pt idx="11">
+                  <c:v>46</c:v>
+                </c:pt>
+              </c:numCache>
+            </c:numRef>
+          </c:val>
         </c:ser>
         <c:dLbls>
           <c:numFmt formatCode="#,##0" sourceLinked="0"/>
@@ -2004,28 +2694,29 @@
             <a:lstStyle/>
             <a:p>
               <a:pPr>
-                <a:defRPr b="0" i="0" strike="noStrike" sz="1200" u="none">
+                <a:defRPr b="0" i="0" strike="noStrike" sz="700" u="none">
                   <a:solidFill>
-                    <a:srgbClr val="000000"/>
+                    <a:srgbClr val="334155"/>
                   </a:solidFill>
-                  <a:latin typeface="Arial"/>
+                  <a:latin typeface="Calibri"/>
                 </a:defRPr>
               </a:pPr>
             </a:p>
           </c:txPr>
           <c:showLegendKey val="0"/>
-          <c:showVal val="0"/>
+          <c:showVal val="1"/>
           <c:showCatName val="0"/>
           <c:showSerName val="0"/>
           <c:showPercent val="0"/>
           <c:showBubbleSize val="0"/>
           <c:showLeaderLines val="0"/>
         </c:dLbls>
-        <c:marker val="1"/>
+        <c:gapWidth val="150"/>
+        <c:overlap val="0"/>
         <c:axId val="2094734554"/>
         <c:axId val="2094734552"/>
         <c:axId val="2094734556"/>
-      </c:lineChart>
+      </c:barChart>
       <c:catAx>
         <c:axId val="2094734554"/>
         <c:scaling>
@@ -2051,9 +2742,9 @@
           <a:lstStyle/>
           <a:p>
             <a:pPr>
-              <a:defRPr sz="800" b="0" i="0" u="none" strike="noStrike">
-                <a:solidFill>
-                  <a:srgbClr val="94A3B8"/>
+              <a:defRPr sz="1000" b="0" i="0" u="none" strike="noStrike">
+                <a:solidFill>
+                  <a:srgbClr val="334155"/>
                 </a:solidFill>
                 <a:latin typeface="Calibri"/>
               </a:defRPr>
@@ -2071,7 +2762,7 @@
         <c:axId val="2094734552"/>
         <c:scaling>
           <c:orientation val="minMax"/>
-          <c:max val="0.8"/>
+          <c:max val="64"/>
           <c:min val="0"/>
         </c:scaling>
         <c:delete val="1"/>
@@ -2106,7 +2797,7 @@
         </c:txPr>
         <c:crossAx val="2094734554"/>
         <c:crosses val="autoZero"/>
-        <c:crossBetween val="midCat"/>
+        <c:crossBetween val="between"/>
       </c:valAx>
       <c:spPr>
         <a:noFill/>
@@ -2116,6 +2807,26 @@
         <a:effectLst/>
       </c:spPr>
     </c:plotArea>
+    <c:legend>
+      <c:legendPos val="b"/>
+      <c:overlay val="0"/>
+      <c:txPr>
+        <a:bodyPr/>
+        <a:lstStyle/>
+        <a:p>
+          <a:pPr>
+            <a:defRPr sz="1100">
+              <a:solidFill>
+                <a:srgbClr val="334155"/>
+              </a:solidFill>
+              <a:latin typeface="Calibri"/>
+              <a:cs typeface="Calibri"/>
+            </a:defRPr>
+          </a:pPr>
+          <a:endParaRPr lang="en-US"/>
+        </a:p>
+      </c:txPr>
+    </c:legend>
     <c:plotVisOnly val="1"/>
     <c:dispBlanksAs val="span"/>
   </c:chart>
@@ -2140,7 +2851,9 @@
     <c:autoTitleDeleted val="1"/>
     <c:plotArea>
       <c:layout/>
-      <c:areaChart>
+      <c:barChart>
+        <c:barDir val="col"/>
+        <c:grouping val="clustered"/>
         <c:varyColors val="0"/>
         <c:ser>
           <c:idx val="0"/>
@@ -2151,16 +2864,14 @@
               <c:strCache>
                 <c:ptCount val="1"/>
                 <c:pt idx="0">
-                  <c:v>Income</c:v>
+                  <c:v>FD returns</c:v>
                 </c:pt>
               </c:strCache>
             </c:strRef>
           </c:tx>
           <c:spPr>
             <a:solidFill>
-              <a:srgbClr val="0F766E">
-                <a:alpha val="35000"/>
-              </a:srgbClr>
+              <a:srgbClr val="94A3B8"/>
             </a:solidFill>
             <a:effectLst/>
           </c:spPr>
@@ -2172,17 +2883,17 @@
               <a:lstStyle/>
               <a:p>
                 <a:pPr>
-                  <a:defRPr b="0" i="0" strike="noStrike" sz="1200" u="none">
+                  <a:defRPr b="0" i="0" strike="noStrike" sz="700" u="none">
                     <a:solidFill>
-                      <a:srgbClr val="000000"/>
+                      <a:srgbClr val="334155"/>
                     </a:solidFill>
-                    <a:latin typeface="Arial"/>
+                    <a:latin typeface="Calibri"/>
                   </a:defRPr>
                 </a:pPr>
               </a:p>
             </c:txPr>
             <c:showLegendKey val="0"/>
-            <c:showVal val="0"/>
+            <c:showVal val="1"/>
             <c:showCatName val="0"/>
             <c:showSerName val="0"/>
             <c:showPercent val="0"/>
@@ -2196,40 +2907,40 @@
                 <c:ptCount val="12"/>
                 <c:lvl>
                   <c:pt idx="0">
-                    <c:v>A</c:v>
+                    <c:v>Apr</c:v>
                   </c:pt>
                   <c:pt idx="1">
-                    <c:v>M</c:v>
+                    <c:v>May</c:v>
                   </c:pt>
                   <c:pt idx="2">
-                    <c:v>J</c:v>
+                    <c:v>Jun</c:v>
                   </c:pt>
                   <c:pt idx="3">
-                    <c:v>J</c:v>
+                    <c:v>Jul</c:v>
                   </c:pt>
                   <c:pt idx="4">
-                    <c:v>A</c:v>
+                    <c:v>Aug</c:v>
                   </c:pt>
                   <c:pt idx="5">
-                    <c:v>S</c:v>
+                    <c:v>Sep</c:v>
                   </c:pt>
                   <c:pt idx="6">
-                    <c:v>O</c:v>
+                    <c:v>Oct</c:v>
                   </c:pt>
                   <c:pt idx="7">
-                    <c:v>N</c:v>
+                    <c:v>Nov</c:v>
                   </c:pt>
                   <c:pt idx="8">
-                    <c:v>D</c:v>
+                    <c:v>Dec</c:v>
                   </c:pt>
                   <c:pt idx="9">
-                    <c:v>J</c:v>
+                    <c:v>Jan</c:v>
                   </c:pt>
                   <c:pt idx="10">
-                    <c:v>F</c:v>
+                    <c:v>Feb</c:v>
                   </c:pt>
                   <c:pt idx="11">
-                    <c:v>M</c:v>
+                    <c:v>Mar</c:v>
                   </c:pt>
                 </c:lvl>
               </c:multiLvlStrCache>
@@ -2242,75 +2953,45 @@
                 <c:formatCode>General</c:formatCode>
                 <c:ptCount val="12"/>
                 <c:pt idx="0">
-                  <c:v>0.18</c:v>
+                  <c:v>15</c:v>
                 </c:pt>
                 <c:pt idx="1">
-                  <c:v>0.19</c:v>
+                  <c:v>15</c:v>
                 </c:pt>
                 <c:pt idx="2">
-                  <c:v>0.23</c:v>
+                  <c:v>15</c:v>
                 </c:pt>
                 <c:pt idx="3">
-                  <c:v>0.23</c:v>
+                  <c:v>15</c:v>
                 </c:pt>
                 <c:pt idx="4">
-                  <c:v>0.23</c:v>
+                  <c:v>15</c:v>
                 </c:pt>
                 <c:pt idx="5">
-                  <c:v>0.23</c:v>
+                  <c:v>15</c:v>
                 </c:pt>
                 <c:pt idx="6">
-                  <c:v>0.23</c:v>
+                  <c:v>15</c:v>
                 </c:pt>
                 <c:pt idx="7">
-                  <c:v>0.23</c:v>
+                  <c:v>15</c:v>
                 </c:pt>
                 <c:pt idx="8">
-                  <c:v>0.23</c:v>
+                  <c:v>15</c:v>
                 </c:pt>
                 <c:pt idx="9">
-                  <c:v>0.23</c:v>
+                  <c:v>15</c:v>
                 </c:pt>
                 <c:pt idx="10">
-                  <c:v>0.23</c:v>
+                  <c:v>15</c:v>
                 </c:pt>
                 <c:pt idx="11">
-                  <c:v>0.23</c:v>
+                  <c:v>15</c:v>
                 </c:pt>
               </c:numCache>
             </c:numRef>
           </c:val>
         </c:ser>
-        <c:dLbls>
-          <c:numFmt formatCode="#,##0" sourceLinked="0"/>
-          <c:txPr>
-            <a:bodyPr/>
-            <a:lstStyle/>
-            <a:p>
-              <a:pPr>
-                <a:defRPr b="0" i="0" strike="noStrike" sz="1200" u="none">
-                  <a:solidFill>
-                    <a:srgbClr val="000000"/>
-                  </a:solidFill>
-                  <a:latin typeface="Arial"/>
-                </a:defRPr>
-              </a:pPr>
-            </a:p>
-          </c:txPr>
-          <c:showLegendKey val="0"/>
-          <c:showVal val="0"/>
-          <c:showCatName val="0"/>
-          <c:showSerName val="0"/>
-          <c:showPercent val="0"/>
-          <c:showBubbleSize val="0"/>
-          <c:showLeaderLines val="0"/>
-        </c:dLbls>
-        <c:axId val="2094734554"/>
-        <c:axId val="2094734552"/>
-        <c:axId val="2094734556"/>
-      </c:areaChart>
-      <c:lineChart>
-        <c:varyColors val="0"/>
         <c:ser>
           <c:idx val="1"/>
           <c:order val="1"/>
@@ -2320,22 +3001,15 @@
               <c:strCache>
                 <c:ptCount val="1"/>
                 <c:pt idx="0">
-                  <c:v>Expense</c:v>
+                  <c:v>Earning (existing + BLR)</c:v>
                 </c:pt>
               </c:strCache>
             </c:strRef>
           </c:tx>
           <c:spPr>
             <a:solidFill>
-              <a:srgbClr val="334155"/>
+              <a:srgbClr val="0F766E"/>
             </a:solidFill>
-            <a:ln w="28575" cap="flat">
-              <a:solidFill>
-                <a:srgbClr val="334155"/>
-              </a:solidFill>
-              <a:prstDash val="solid"/>
-              <a:round/>
-            </a:ln>
             <a:effectLst/>
           </c:spPr>
           <c:invertIfNegative val="0"/>
@@ -2346,40 +3020,23 @@
               <a:lstStyle/>
               <a:p>
                 <a:pPr>
-                  <a:defRPr b="0" i="0" strike="noStrike" sz="1200" u="none">
+                  <a:defRPr b="0" i="0" strike="noStrike" sz="700" u="none">
                     <a:solidFill>
-                      <a:srgbClr val="000000"/>
+                      <a:srgbClr val="334155"/>
                     </a:solidFill>
-                    <a:latin typeface="Arial"/>
+                    <a:latin typeface="Calibri"/>
                   </a:defRPr>
                 </a:pPr>
               </a:p>
             </c:txPr>
             <c:showLegendKey val="0"/>
-            <c:showVal val="0"/>
+            <c:showVal val="1"/>
             <c:showCatName val="0"/>
             <c:showSerName val="0"/>
             <c:showPercent val="0"/>
             <c:showBubbleSize val="0"/>
             <c:showLeaderLines val="0"/>
           </c:dLbls>
-          <c:marker>
-            <c:symbol val="none"/>
-            <c:size val="6"/>
-            <c:spPr>
-              <a:solidFill>
-                <a:srgbClr val="334155"/>
-              </a:solidFill>
-              <a:ln w="9525" cap="flat">
-                <a:solidFill>
-                  <a:srgbClr val="334155"/>
-                </a:solidFill>
-                <a:prstDash val="solid"/>
-                <a:round/>
-              </a:ln>
-              <a:effectLst/>
-            </c:spPr>
-          </c:marker>
           <c:cat>
             <c:multiLvlStrRef>
               <c:f>Sheet1!$A$2:$A$13</c:f>
@@ -2387,40 +3044,40 @@
                 <c:ptCount val="12"/>
                 <c:lvl>
                   <c:pt idx="0">
-                    <c:v>A</c:v>
+                    <c:v>Apr</c:v>
                   </c:pt>
                   <c:pt idx="1">
-                    <c:v>M</c:v>
+                    <c:v>May</c:v>
                   </c:pt>
                   <c:pt idx="2">
-                    <c:v>J</c:v>
+                    <c:v>Jun</c:v>
                   </c:pt>
                   <c:pt idx="3">
-                    <c:v>J</c:v>
+                    <c:v>Jul</c:v>
                   </c:pt>
                   <c:pt idx="4">
-                    <c:v>A</c:v>
+                    <c:v>Aug</c:v>
                   </c:pt>
                   <c:pt idx="5">
-                    <c:v>S</c:v>
+                    <c:v>Sep</c:v>
                   </c:pt>
                   <c:pt idx="6">
-                    <c:v>O</c:v>
+                    <c:v>Oct</c:v>
                   </c:pt>
                   <c:pt idx="7">
-                    <c:v>N</c:v>
+                    <c:v>Nov</c:v>
                   </c:pt>
                   <c:pt idx="8">
-                    <c:v>D</c:v>
+                    <c:v>Dec</c:v>
                   </c:pt>
                   <c:pt idx="9">
-                    <c:v>J</c:v>
+                    <c:v>Jan</c:v>
                   </c:pt>
                   <c:pt idx="10">
-                    <c:v>F</c:v>
+                    <c:v>Feb</c:v>
                   </c:pt>
                   <c:pt idx="11">
-                    <c:v>M</c:v>
+                    <c:v>Mar</c:v>
                   </c:pt>
                 </c:lvl>
               </c:multiLvlStrCache>
@@ -2433,45 +3090,181 @@
                 <c:formatCode>General</c:formatCode>
                 <c:ptCount val="12"/>
                 <c:pt idx="0">
-                  <c:v>0.36</c:v>
+                  <c:v>2</c:v>
                 </c:pt>
                 <c:pt idx="1">
-                  <c:v>0.33</c:v>
+                  <c:v>5</c:v>
                 </c:pt>
                 <c:pt idx="2">
-                  <c:v>0.46</c:v>
+                  <c:v>8</c:v>
                 </c:pt>
                 <c:pt idx="3">
-                  <c:v>0.4</c:v>
+                  <c:v>8</c:v>
                 </c:pt>
                 <c:pt idx="4">
-                  <c:v>0.46</c:v>
+                  <c:v>8</c:v>
                 </c:pt>
                 <c:pt idx="5">
-                  <c:v>0.46</c:v>
+                  <c:v>8</c:v>
                 </c:pt>
                 <c:pt idx="6">
-                  <c:v>0.46</c:v>
+                  <c:v>8</c:v>
                 </c:pt>
                 <c:pt idx="7">
-                  <c:v>0.46</c:v>
+                  <c:v>8</c:v>
                 </c:pt>
                 <c:pt idx="8">
-                  <c:v>0.46</c:v>
+                  <c:v>8</c:v>
                 </c:pt>
                 <c:pt idx="9">
-                  <c:v>0.46</c:v>
+                  <c:v>8</c:v>
                 </c:pt>
                 <c:pt idx="10">
-                  <c:v>0.46</c:v>
+                  <c:v>8</c:v>
                 </c:pt>
                 <c:pt idx="11">
-                  <c:v>0.46</c:v>
+                  <c:v>8</c:v>
                 </c:pt>
               </c:numCache>
             </c:numRef>
           </c:val>
-          <c:smooth val="0"/>
+        </c:ser>
+        <c:ser>
+          <c:idx val="2"/>
+          <c:order val="2"/>
+          <c:tx>
+            <c:strRef>
+              <c:f>Sheet1!$D$1</c:f>
+              <c:strCache>
+                <c:ptCount val="1"/>
+                <c:pt idx="0">
+                  <c:v>Expense, all in</c:v>
+                </c:pt>
+              </c:strCache>
+            </c:strRef>
+          </c:tx>
+          <c:spPr>
+            <a:solidFill>
+              <a:srgbClr val="334155"/>
+            </a:solidFill>
+            <a:effectLst/>
+          </c:spPr>
+          <c:invertIfNegative val="0"/>
+          <c:dLbls>
+            <c:numFmt formatCode="#,##0" sourceLinked="0"/>
+            <c:txPr>
+              <a:bodyPr/>
+              <a:lstStyle/>
+              <a:p>
+                <a:pPr>
+                  <a:defRPr b="0" i="0" strike="noStrike" sz="700" u="none">
+                    <a:solidFill>
+                      <a:srgbClr val="334155"/>
+                    </a:solidFill>
+                    <a:latin typeface="Calibri"/>
+                  </a:defRPr>
+                </a:pPr>
+              </a:p>
+            </c:txPr>
+            <c:showLegendKey val="0"/>
+            <c:showVal val="1"/>
+            <c:showCatName val="0"/>
+            <c:showSerName val="0"/>
+            <c:showPercent val="0"/>
+            <c:showBubbleSize val="0"/>
+            <c:showLeaderLines val="0"/>
+          </c:dLbls>
+          <c:cat>
+            <c:multiLvlStrRef>
+              <c:f>Sheet1!$A$2:$A$13</c:f>
+              <c:multiLvlStrCache>
+                <c:ptCount val="12"/>
+                <c:lvl>
+                  <c:pt idx="0">
+                    <c:v>Apr</c:v>
+                  </c:pt>
+                  <c:pt idx="1">
+                    <c:v>May</c:v>
+                  </c:pt>
+                  <c:pt idx="2">
+                    <c:v>Jun</c:v>
+                  </c:pt>
+                  <c:pt idx="3">
+                    <c:v>Jul</c:v>
+                  </c:pt>
+                  <c:pt idx="4">
+                    <c:v>Aug</c:v>
+                  </c:pt>
+                  <c:pt idx="5">
+                    <c:v>Sep</c:v>
+                  </c:pt>
+                  <c:pt idx="6">
+                    <c:v>Oct</c:v>
+                  </c:pt>
+                  <c:pt idx="7">
+                    <c:v>Nov</c:v>
+                  </c:pt>
+                  <c:pt idx="8">
+                    <c:v>Dec</c:v>
+                  </c:pt>
+                  <c:pt idx="9">
+                    <c:v>Jan</c:v>
+                  </c:pt>
+                  <c:pt idx="10">
+                    <c:v>Feb</c:v>
+                  </c:pt>
+                  <c:pt idx="11">
+                    <c:v>Mar</c:v>
+                  </c:pt>
+                </c:lvl>
+              </c:multiLvlStrCache>
+            </c:multiLvlStrRef>
+          </c:cat>
+          <c:val>
+            <c:numRef>
+              <c:f>Sheet1!$D$2:$D$13</c:f>
+              <c:numCache>
+                <c:formatCode>General</c:formatCode>
+                <c:ptCount val="12"/>
+                <c:pt idx="0">
+                  <c:v>36</c:v>
+                </c:pt>
+                <c:pt idx="1">
+                  <c:v>33</c:v>
+                </c:pt>
+                <c:pt idx="2">
+                  <c:v>46</c:v>
+                </c:pt>
+                <c:pt idx="3">
+                  <c:v>40</c:v>
+                </c:pt>
+                <c:pt idx="4">
+                  <c:v>46</c:v>
+                </c:pt>
+                <c:pt idx="5">
+                  <c:v>46</c:v>
+                </c:pt>
+                <c:pt idx="6">
+                  <c:v>46</c:v>
+                </c:pt>
+                <c:pt idx="7">
+                  <c:v>46</c:v>
+                </c:pt>
+                <c:pt idx="8">
+                  <c:v>46</c:v>
+                </c:pt>
+                <c:pt idx="9">
+                  <c:v>46</c:v>
+                </c:pt>
+                <c:pt idx="10">
+                  <c:v>46</c:v>
+                </c:pt>
+                <c:pt idx="11">
+                  <c:v>46</c:v>
+                </c:pt>
+              </c:numCache>
+            </c:numRef>
+          </c:val>
         </c:ser>
         <c:dLbls>
           <c:numFmt formatCode="#,##0" sourceLinked="0"/>
@@ -2480,28 +3273,29 @@
             <a:lstStyle/>
             <a:p>
               <a:pPr>
-                <a:defRPr b="0" i="0" strike="noStrike" sz="1200" u="none">
+                <a:defRPr b="0" i="0" strike="noStrike" sz="700" u="none">
                   <a:solidFill>
-                    <a:srgbClr val="000000"/>
+                    <a:srgbClr val="334155"/>
                   </a:solidFill>
-                  <a:latin typeface="Arial"/>
+                  <a:latin typeface="Calibri"/>
                 </a:defRPr>
               </a:pPr>
             </a:p>
           </c:txPr>
           <c:showLegendKey val="0"/>
-          <c:showVal val="0"/>
+          <c:showVal val="1"/>
           <c:showCatName val="0"/>
           <c:showSerName val="0"/>
           <c:showPercent val="0"/>
           <c:showBubbleSize val="0"/>
           <c:showLeaderLines val="0"/>
         </c:dLbls>
-        <c:marker val="1"/>
+        <c:gapWidth val="150"/>
+        <c:overlap val="0"/>
         <c:axId val="2094734554"/>
         <c:axId val="2094734552"/>
         <c:axId val="2094734556"/>
-      </c:lineChart>
+      </c:barChart>
       <c:catAx>
         <c:axId val="2094734554"/>
         <c:scaling>
@@ -2527,9 +3321,9 @@
           <a:lstStyle/>
           <a:p>
             <a:pPr>
-              <a:defRPr sz="800" b="0" i="0" u="none" strike="noStrike">
-                <a:solidFill>
-                  <a:srgbClr val="94A3B8"/>
+              <a:defRPr sz="1000" b="0" i="0" u="none" strike="noStrike">
+                <a:solidFill>
+                  <a:srgbClr val="334155"/>
                 </a:solidFill>
                 <a:latin typeface="Calibri"/>
               </a:defRPr>
@@ -2547,7 +3341,7 @@
         <c:axId val="2094734552"/>
         <c:scaling>
           <c:orientation val="minMax"/>
-          <c:max val="0.8"/>
+          <c:max val="64"/>
           <c:min val="0"/>
         </c:scaling>
         <c:delete val="1"/>
@@ -2582,7 +3376,7 @@
         </c:txPr>
         <c:crossAx val="2094734554"/>
         <c:crosses val="autoZero"/>
-        <c:crossBetween val="midCat"/>
+        <c:crossBetween val="between"/>
       </c:valAx>
       <c:spPr>
         <a:noFill/>
@@ -2592,6 +3386,26 @@
         <a:effectLst/>
       </c:spPr>
     </c:plotArea>
+    <c:legend>
+      <c:legendPos val="b"/>
+      <c:overlay val="0"/>
+      <c:txPr>
+        <a:bodyPr/>
+        <a:lstStyle/>
+        <a:p>
+          <a:pPr>
+            <a:defRPr sz="1100">
+              <a:solidFill>
+                <a:srgbClr val="334155"/>
+              </a:solidFill>
+              <a:latin typeface="Calibri"/>
+              <a:cs typeface="Calibri"/>
+            </a:defRPr>
+          </a:pPr>
+          <a:endParaRPr lang="en-US"/>
+        </a:p>
+      </c:txPr>
+    </c:legend>
     <c:plotVisOnly val="1"/>
     <c:dispBlanksAs val="span"/>
   </c:chart>
@@ -2715,7 +3529,7 @@
                 <a:lstStyle/>
                 <a:p>
                   <a:pPr>
-                    <a:defRPr sz="900" b="0" i="0" u="none" strike="noStrike">
+                    <a:defRPr sz="850" b="0" i="0" u="none" strike="noStrike">
                       <a:solidFill>
                         <a:srgbClr val="FFFFFF"/>
                       </a:solidFill>
@@ -2740,7 +3554,7 @@
                 <a:lstStyle/>
                 <a:p>
                   <a:pPr>
-                    <a:defRPr sz="900" b="0" i="0" u="none" strike="noStrike">
+                    <a:defRPr sz="850" b="0" i="0" u="none" strike="noStrike">
                       <a:solidFill>
                         <a:srgbClr val="FFFFFF"/>
                       </a:solidFill>
@@ -2765,7 +3579,7 @@
                 <a:lstStyle/>
                 <a:p>
                   <a:pPr>
-                    <a:defRPr sz="900" b="0" i="0" u="none" strike="noStrike">
+                    <a:defRPr sz="850" b="0" i="0" u="none" strike="noStrike">
                       <a:solidFill>
                         <a:srgbClr val="FFFFFF"/>
                       </a:solidFill>
@@ -2790,7 +3604,7 @@
                 <a:lstStyle/>
                 <a:p>
                   <a:pPr>
-                    <a:defRPr sz="900" b="0" i="0" u="none" strike="noStrike">
+                    <a:defRPr sz="850" b="0" i="0" u="none" strike="noStrike">
                       <a:solidFill>
                         <a:srgbClr val="FFFFFF"/>
                       </a:solidFill>
@@ -2815,7 +3629,7 @@
                 <a:lstStyle/>
                 <a:p>
                   <a:pPr>
-                    <a:defRPr sz="900" b="0" i="0" u="none" strike="noStrike">
+                    <a:defRPr sz="850" b="0" i="0" u="none" strike="noStrike">
                       <a:solidFill>
                         <a:srgbClr val="FFFFFF"/>
                       </a:solidFill>
@@ -2840,7 +3654,7 @@
                 <a:lstStyle/>
                 <a:p>
                   <a:pPr>
-                    <a:defRPr sz="900" b="0" i="0" u="none" strike="noStrike">
+                    <a:defRPr sz="850" b="0" i="0" u="none" strike="noStrike">
                       <a:solidFill>
                         <a:srgbClr val="FFFFFF"/>
                       </a:solidFill>
@@ -2951,7 +3765,7 @@
         <a:lstStyle/>
         <a:p>
           <a:pPr>
-            <a:defRPr sz="1000">
+            <a:defRPr sz="950">
               <a:solidFill>
                 <a:srgbClr val="334155"/>
               </a:solidFill>
@@ -2980,6 +3794,236 @@
 </file>
 
 <file path=ppt/charts/chart7.xml><?xml version="1.0" encoding="utf-8"?>
+<c:chartSpace xmlns:c="http://schemas.openxmlformats.org/drawingml/2006/chart" xmlns:a="http://schemas.openxmlformats.org/drawingml/2006/main" xmlns:r="http://schemas.openxmlformats.org/officeDocument/2006/relationships">
+  <c:date1904 val="0"/>
+  <c:roundedCorners val="1"/>
+  <c:chart>
+    <c:autoTitleDeleted val="1"/>
+    <c:plotArea>
+      <c:layout/>
+      <c:barChart>
+        <c:barDir val="bar"/>
+        <c:grouping val="clustered"/>
+        <c:varyColors val="0"/>
+        <c:ser>
+          <c:idx val="0"/>
+          <c:order val="0"/>
+          <c:tx>
+            <c:strRef>
+              <c:f>Sheet1!$B$1</c:f>
+              <c:strCache>
+                <c:ptCount val="1"/>
+                <c:pt idx="0">
+                  <c:v>Rs Cr</c:v>
+                </c:pt>
+              </c:strCache>
+            </c:strRef>
+          </c:tx>
+          <c:spPr>
+            <a:solidFill>
+              <a:srgbClr val="0F766E"/>
+            </a:solidFill>
+            <a:effectLst/>
+          </c:spPr>
+          <c:invertIfNegative val="0"/>
+          <c:dLbls>
+            <c:numFmt formatCode="#,##0" sourceLinked="0"/>
+            <c:txPr>
+              <a:bodyPr/>
+              <a:lstStyle/>
+              <a:p>
+                <a:pPr>
+                  <a:defRPr b="0" i="0" strike="noStrike" sz="1000" u="none">
+                    <a:solidFill>
+                      <a:srgbClr val="334155"/>
+                    </a:solidFill>
+                    <a:latin typeface="Calibri"/>
+                  </a:defRPr>
+                </a:pPr>
+              </a:p>
+            </c:txPr>
+            <c:showLegendKey val="0"/>
+            <c:showVal val="1"/>
+            <c:showCatName val="0"/>
+            <c:showSerName val="0"/>
+            <c:showPercent val="0"/>
+            <c:showBubbleSize val="0"/>
+            <c:showLeaderLines val="0"/>
+          </c:dLbls>
+          <c:cat>
+            <c:multiLvlStrRef>
+              <c:f>Sheet1!$A$2:$A$4</c:f>
+              <c:multiLvlStrCache>
+                <c:ptCount val="3"/>
+                <c:lvl>
+                  <c:pt idx="0">
+                    <c:v>Existing team</c:v>
+                  </c:pt>
+                  <c:pt idx="1">
+                    <c:v>New hire 1 (CTC)</c:v>
+                  </c:pt>
+                  <c:pt idx="2">
+                    <c:v>New hire 2 (CTC)</c:v>
+                  </c:pt>
+                </c:lvl>
+              </c:multiLvlStrCache>
+            </c:multiLvlStrRef>
+          </c:cat>
+          <c:val>
+            <c:numRef>
+              <c:f>Sheet1!$B$2:$B$4</c:f>
+              <c:numCache>
+                <c:formatCode>General</c:formatCode>
+                <c:ptCount val="3"/>
+                <c:pt idx="0">
+                  <c:v>3</c:v>
+                </c:pt>
+                <c:pt idx="1">
+                  <c:v>0.45</c:v>
+                </c:pt>
+                <c:pt idx="2">
+                  <c:v>0.5</c:v>
+                </c:pt>
+              </c:numCache>
+            </c:numRef>
+          </c:val>
+        </c:ser>
+        <c:dLbls>
+          <c:numFmt formatCode="#,##0" sourceLinked="0"/>
+          <c:txPr>
+            <a:bodyPr/>
+            <a:lstStyle/>
+            <a:p>
+              <a:pPr>
+                <a:defRPr b="0" i="0" strike="noStrike" sz="1000" u="none">
+                  <a:solidFill>
+                    <a:srgbClr val="334155"/>
+                  </a:solidFill>
+                  <a:latin typeface="Calibri"/>
+                </a:defRPr>
+              </a:pPr>
+            </a:p>
+          </c:txPr>
+          <c:showLegendKey val="0"/>
+          <c:showVal val="1"/>
+          <c:showCatName val="0"/>
+          <c:showSerName val="0"/>
+          <c:showPercent val="0"/>
+          <c:showBubbleSize val="0"/>
+          <c:showLeaderLines val="0"/>
+        </c:dLbls>
+        <c:gapWidth val="50"/>
+        <c:overlap val="0"/>
+        <c:axId val="2094734554"/>
+        <c:axId val="2094734552"/>
+        <c:axId val="2094734556"/>
+      </c:barChart>
+      <c:catAx>
+        <c:axId val="2094734554"/>
+        <c:scaling>
+          <c:orientation val="minMax"/>
+        </c:scaling>
+        <c:delete val="0"/>
+        <c:axPos val="l"/>
+        <c:numFmt formatCode="General" sourceLinked="1"/>
+        <c:majorTickMark val="out"/>
+        <c:minorTickMark val="none"/>
+        <c:tickLblPos val="nextTo"/>
+        <c:spPr>
+          <a:ln w="12700" cap="flat">
+            <a:solidFill>
+              <a:srgbClr val="888888"/>
+            </a:solidFill>
+            <a:prstDash val="solid"/>
+            <a:round/>
+          </a:ln>
+        </c:spPr>
+        <c:txPr>
+          <a:bodyPr/>
+          <a:lstStyle/>
+          <a:p>
+            <a:pPr>
+              <a:defRPr sz="1100" b="0" i="0" u="none" strike="noStrike">
+                <a:solidFill>
+                  <a:srgbClr val="334155"/>
+                </a:solidFill>
+                <a:latin typeface="Calibri"/>
+              </a:defRPr>
+            </a:pPr>
+            <a:endParaRPr lang="en-US"/>
+          </a:p>
+        </c:txPr>
+        <c:crossAx val="2094734552"/>
+        <c:crosses val="autoZero"/>
+        <c:auto val="1"/>
+        <c:lblAlgn val="ctr"/>
+        <c:noMultiLvlLbl val="1"/>
+      </c:catAx>
+      <c:valAx>
+        <c:axId val="2094734552"/>
+        <c:scaling>
+          <c:orientation val="minMax"/>
+          <c:max val="3.6"/>
+        </c:scaling>
+        <c:delete val="1"/>
+        <c:axPos val="b"/>
+        <c:numFmt formatCode="General" sourceLinked="0"/>
+        <c:majorTickMark val="out"/>
+        <c:minorTickMark val="none"/>
+        <c:tickLblPos val="low"/>
+        <c:spPr>
+          <a:ln w="12700" cap="flat">
+            <a:solidFill>
+              <a:srgbClr val="888888"/>
+            </a:solidFill>
+            <a:prstDash val="solid"/>
+            <a:round/>
+          </a:ln>
+        </c:spPr>
+        <c:txPr>
+          <a:bodyPr/>
+          <a:lstStyle/>
+          <a:p>
+            <a:pPr>
+              <a:defRPr sz="1200" b="0" i="0" u="none" strike="noStrike">
+                <a:solidFill>
+                  <a:srgbClr val="000000"/>
+                </a:solidFill>
+                <a:latin typeface="Arial"/>
+              </a:defRPr>
+            </a:pPr>
+            <a:endParaRPr lang="en-US"/>
+          </a:p>
+        </c:txPr>
+        <c:crossAx val="2094734554"/>
+        <c:crosses val="autoZero"/>
+        <c:crossBetween val="between"/>
+      </c:valAx>
+      <c:spPr>
+        <a:noFill/>
+        <a:ln>
+          <a:noFill/>
+        </a:ln>
+        <a:effectLst/>
+      </c:spPr>
+    </c:plotArea>
+    <c:plotVisOnly val="1"/>
+    <c:dispBlanksAs val="span"/>
+  </c:chart>
+  <c:spPr>
+    <a:noFill/>
+    <a:ln>
+      <a:noFill/>
+    </a:ln>
+    <a:effectLst/>
+  </c:spPr>
+  <c:externalData r:id="rId1">
+    <c:autoUpdate val="0"/>
+  </c:externalData>
+</c:chartSpace>
+</file>
+
+<file path=ppt/charts/chart8.xml><?xml version="1.0" encoding="utf-8"?>
 <c:chartSpace xmlns:c="http://schemas.openxmlformats.org/drawingml/2006/chart" xmlns:a="http://schemas.openxmlformats.org/drawingml/2006/main" xmlns:r="http://schemas.openxmlformats.org/officeDocument/2006/relationships">
   <c:date1904 val="0"/>
   <c:roundedCorners val="1"/>
@@ -3424,7 +4468,7 @@
 </c:chartSpace>
 </file>
 
-<file path=ppt/charts/chart8.xml><?xml version="1.0" encoding="utf-8"?>
+<file path=ppt/charts/chart9.xml><?xml version="1.0" encoding="utf-8"?>
 <c:chartSpace xmlns:c="http://schemas.openxmlformats.org/drawingml/2006/chart" xmlns:a="http://schemas.openxmlformats.org/drawingml/2006/main" xmlns:r="http://schemas.openxmlformats.org/officeDocument/2006/relationships">
   <c:date1904 val="0"/>
   <c:roundedCorners val="1"/>
@@ -3743,260 +4787,6 @@
         </a:p>
       </c:txPr>
     </c:legend>
-    <c:plotVisOnly val="1"/>
-    <c:dispBlanksAs val="span"/>
-  </c:chart>
-  <c:spPr>
-    <a:noFill/>
-    <a:ln>
-      <a:noFill/>
-    </a:ln>
-    <a:effectLst/>
-  </c:spPr>
-  <c:externalData r:id="rId1">
-    <c:autoUpdate val="0"/>
-  </c:externalData>
-</c:chartSpace>
-</file>
-
-<file path=ppt/charts/chart9.xml><?xml version="1.0" encoding="utf-8"?>
-<c:chartSpace xmlns:c="http://schemas.openxmlformats.org/drawingml/2006/chart" xmlns:a="http://schemas.openxmlformats.org/drawingml/2006/main" xmlns:r="http://schemas.openxmlformats.org/officeDocument/2006/relationships">
-  <c:date1904 val="0"/>
-  <c:roundedCorners val="1"/>
-  <c:chart>
-    <c:autoTitleDeleted val="1"/>
-    <c:plotArea>
-      <c:layout/>
-      <c:barChart>
-        <c:barDir val="bar"/>
-        <c:grouping val="clustered"/>
-        <c:varyColors val="0"/>
-        <c:ser>
-          <c:idx val="0"/>
-          <c:order val="0"/>
-          <c:tx>
-            <c:strRef>
-              <c:f>Sheet1!$B$1</c:f>
-              <c:strCache>
-                <c:ptCount val="1"/>
-                <c:pt idx="0">
-                  <c:v>Rating revenue</c:v>
-                </c:pt>
-              </c:strCache>
-            </c:strRef>
-          </c:tx>
-          <c:spPr>
-            <a:solidFill>
-              <a:srgbClr val="2B5CC4"/>
-            </a:solidFill>
-            <a:effectLst/>
-          </c:spPr>
-          <c:invertIfNegative val="0"/>
-          <c:dLbls>
-            <c:numFmt formatCode="#,##0" sourceLinked="0"/>
-            <c:txPr>
-              <a:bodyPr/>
-              <a:lstStyle/>
-              <a:p>
-                <a:pPr>
-                  <a:defRPr b="0" i="0" strike="noStrike" sz="950" u="none">
-                    <a:solidFill>
-                      <a:srgbClr val="334155"/>
-                    </a:solidFill>
-                    <a:latin typeface="Calibri"/>
-                  </a:defRPr>
-                </a:pPr>
-              </a:p>
-            </c:txPr>
-            <c:showLegendKey val="0"/>
-            <c:showVal val="1"/>
-            <c:showCatName val="0"/>
-            <c:showSerName val="0"/>
-            <c:showPercent val="0"/>
-            <c:showBubbleSize val="0"/>
-            <c:showLeaderLines val="0"/>
-          </c:dLbls>
-          <c:cat>
-            <c:multiLvlStrRef>
-              <c:f>Sheet1!$A$2:$A$8</c:f>
-              <c:multiLvlStrCache>
-                <c:ptCount val="7"/>
-                <c:lvl>
-                  <c:pt idx="0">
-                    <c:v>ACER now</c:v>
-                  </c:pt>
-                  <c:pt idx="1">
-                    <c:v>ACER FY28</c:v>
-                  </c:pt>
-                  <c:pt idx="2">
-                    <c:v>Acuite</c:v>
-                  </c:pt>
-                  <c:pt idx="3">
-                    <c:v>Infomerics</c:v>
-                  </c:pt>
-                  <c:pt idx="4">
-                    <c:v>India Ratings</c:v>
-                  </c:pt>
-                  <c:pt idx="5">
-                    <c:v>CARE</c:v>
-                  </c:pt>
-                  <c:pt idx="6">
-                    <c:v>CRISIL</c:v>
-                  </c:pt>
-                </c:lvl>
-              </c:multiLvlStrCache>
-            </c:multiLvlStrRef>
-          </c:cat>
-          <c:val>
-            <c:numRef>
-              <c:f>Sheet1!$B$2:$B$8</c:f>
-              <c:numCache>
-                <c:formatCode>General</c:formatCode>
-                <c:ptCount val="7"/>
-                <c:pt idx="0">
-                  <c:v>0.9</c:v>
-                </c:pt>
-                <c:pt idx="1">
-                  <c:v>8</c:v>
-                </c:pt>
-                <c:pt idx="2">
-                  <c:v>57</c:v>
-                </c:pt>
-                <c:pt idx="3">
-                  <c:v>95</c:v>
-                </c:pt>
-                <c:pt idx="4">
-                  <c:v>251</c:v>
-                </c:pt>
-                <c:pt idx="5">
-                  <c:v>423</c:v>
-                </c:pt>
-                <c:pt idx="6">
-                  <c:v>909</c:v>
-                </c:pt>
-              </c:numCache>
-            </c:numRef>
-          </c:val>
-        </c:ser>
-        <c:dLbls>
-          <c:numFmt formatCode="#,##0" sourceLinked="0"/>
-          <c:txPr>
-            <a:bodyPr/>
-            <a:lstStyle/>
-            <a:p>
-              <a:pPr>
-                <a:defRPr b="0" i="0" strike="noStrike" sz="950" u="none">
-                  <a:solidFill>
-                    <a:srgbClr val="334155"/>
-                  </a:solidFill>
-                  <a:latin typeface="Calibri"/>
-                </a:defRPr>
-              </a:pPr>
-            </a:p>
-          </c:txPr>
-          <c:showLegendKey val="0"/>
-          <c:showVal val="1"/>
-          <c:showCatName val="0"/>
-          <c:showSerName val="0"/>
-          <c:showPercent val="0"/>
-          <c:showBubbleSize val="0"/>
-          <c:showLeaderLines val="0"/>
-        </c:dLbls>
-        <c:gapWidth val="40"/>
-        <c:overlap val="0"/>
-        <c:axId val="2094734554"/>
-        <c:axId val="2094734552"/>
-        <c:axId val="2094734556"/>
-      </c:barChart>
-      <c:catAx>
-        <c:axId val="2094734554"/>
-        <c:scaling>
-          <c:orientation val="minMax"/>
-        </c:scaling>
-        <c:delete val="0"/>
-        <c:axPos val="l"/>
-        <c:numFmt formatCode="General" sourceLinked="1"/>
-        <c:majorTickMark val="out"/>
-        <c:minorTickMark val="none"/>
-        <c:tickLblPos val="nextTo"/>
-        <c:spPr>
-          <a:ln w="12700" cap="flat">
-            <a:solidFill>
-              <a:srgbClr val="888888"/>
-            </a:solidFill>
-            <a:prstDash val="solid"/>
-            <a:round/>
-          </a:ln>
-        </c:spPr>
-        <c:txPr>
-          <a:bodyPr/>
-          <a:lstStyle/>
-          <a:p>
-            <a:pPr>
-              <a:defRPr sz="1050" b="0" i="0" u="none" strike="noStrike">
-                <a:solidFill>
-                  <a:srgbClr val="334155"/>
-                </a:solidFill>
-                <a:latin typeface="Calibri"/>
-              </a:defRPr>
-            </a:pPr>
-            <a:endParaRPr lang="en-US"/>
-          </a:p>
-        </c:txPr>
-        <c:crossAx val="2094734552"/>
-        <c:crosses val="autoZero"/>
-        <c:auto val="1"/>
-        <c:lblAlgn val="ctr"/>
-        <c:noMultiLvlLbl val="1"/>
-      </c:catAx>
-      <c:valAx>
-        <c:axId val="2094734552"/>
-        <c:scaling>
-          <c:orientation val="minMax"/>
-          <c:max val="1000"/>
-        </c:scaling>
-        <c:delete val="1"/>
-        <c:axPos val="b"/>
-        <c:numFmt formatCode="General" sourceLinked="0"/>
-        <c:majorTickMark val="out"/>
-        <c:minorTickMark val="none"/>
-        <c:tickLblPos val="low"/>
-        <c:spPr>
-          <a:ln w="12700" cap="flat">
-            <a:solidFill>
-              <a:srgbClr val="888888"/>
-            </a:solidFill>
-            <a:prstDash val="solid"/>
-            <a:round/>
-          </a:ln>
-        </c:spPr>
-        <c:txPr>
-          <a:bodyPr/>
-          <a:lstStyle/>
-          <a:p>
-            <a:pPr>
-              <a:defRPr sz="1200" b="0" i="0" u="none" strike="noStrike">
-                <a:solidFill>
-                  <a:srgbClr val="000000"/>
-                </a:solidFill>
-                <a:latin typeface="Arial"/>
-              </a:defRPr>
-            </a:pPr>
-            <a:endParaRPr lang="en-US"/>
-          </a:p>
-        </c:txPr>
-        <c:crossAx val="2094734554"/>
-        <c:crosses val="autoZero"/>
-        <c:crossBetween val="between"/>
-      </c:valAx>
-      <c:spPr>
-        <a:noFill/>
-        <a:ln>
-          <a:noFill/>
-        </a:ln>
-        <a:effectLst/>
-      </c:spPr>
-    </c:plotArea>
     <c:plotVisOnly val="1"/>
     <c:dispBlanksAs val="span"/>
   </c:chart>
@@ -4696,6 +5486,270 @@
             <a:fld id="{F7021451-1387-4CA6-816F-3879F97B5CBC}" type="slidenum">
               <a:rPr lang="en-US"/>
               <a:t>12</a:t>
+            </a:fld>
+            <a:endParaRPr lang="en-US"/>
+          </a:p>
+        </p:txBody>
+      </p:sp>
+    </p:spTree>
+    <p:extLst>
+      <p:ext uri="{BB962C8B-B14F-4D97-AF65-F5344CB8AC3E}">
+        <p14:creationId xmlns:p14="http://schemas.microsoft.com/office/powerpoint/2010/main" val="1024086991"/>
+      </p:ext>
+    </p:extLst>
+  </p:cSld>
+  <p:clrMapOvr>
+    <a:masterClrMapping/>
+  </p:clrMapOvr>
+</p:notes>
+</file>
+
+<file path=ppt/notesSlides/notesSlide13.xml><?xml version="1.0" encoding="utf-8"?>
+<p:notes xmlns:a="http://schemas.openxmlformats.org/drawingml/2006/main" xmlns:r="http://schemas.openxmlformats.org/officeDocument/2006/relationships" xmlns:p="http://schemas.openxmlformats.org/presentationml/2006/main">
+  <p:cSld>
+    <p:spTree>
+      <p:nvGrpSpPr>
+        <p:cNvPr id="1" name=""/>
+        <p:cNvGrpSpPr/>
+        <p:nvPr/>
+      </p:nvGrpSpPr>
+      <p:grpSpPr>
+        <a:xfrm>
+          <a:off x="0" y="0"/>
+          <a:ext cx="0" cy="0"/>
+          <a:chOff x="0" y="0"/>
+          <a:chExt cx="0" cy="0"/>
+        </a:xfrm>
+      </p:grpSpPr>
+      <p:sp>
+        <p:nvSpPr>
+          <p:cNvPr id="2" name="Slide Image Placeholder 1"/>
+          <p:cNvSpPr>
+            <a:spLocks noGrp="1" noRot="1" noChangeAspect="1"/>
+          </p:cNvSpPr>
+          <p:nvPr>
+            <p:ph type="sldImg"/>
+          </p:nvPr>
+        </p:nvSpPr>
+        <p:spPr/>
+      </p:sp>
+      <p:sp>
+        <p:nvSpPr>
+          <p:cNvPr id="3" name="Notes Placeholder 2"/>
+          <p:cNvSpPr>
+            <a:spLocks noGrp="1"/>
+          </p:cNvSpPr>
+          <p:nvPr>
+            <p:ph type="body" idx="1"/>
+          </p:nvPr>
+        </p:nvSpPr>
+        <p:spPr/>
+        <p:txBody>
+          <a:bodyPr/>
+          <a:lstStyle/>
+          <a:p>
+            <a:r>
+              <a:rPr lang="en-US" dirty="0"/>
+              <a:t/>
+            </a:r>
+            <a:endParaRPr lang="en-US" dirty="0"/>
+          </a:p>
+        </p:txBody>
+      </p:sp>
+      <p:sp>
+        <p:nvSpPr>
+          <p:cNvPr id="4" name="Slide Number Placeholder 3"/>
+          <p:cNvSpPr>
+            <a:spLocks noGrp="1"/>
+          </p:cNvSpPr>
+          <p:nvPr>
+            <p:ph type="sldNum" sz="quarter" idx="10"/>
+          </p:nvPr>
+        </p:nvSpPr>
+        <p:spPr/>
+        <p:txBody>
+          <a:bodyPr/>
+          <a:lstStyle/>
+          <a:p>
+            <a:fld id="{F7021451-1387-4CA6-816F-3879F97B5CBC}" type="slidenum">
+              <a:rPr lang="en-US"/>
+              <a:t>13</a:t>
+            </a:fld>
+            <a:endParaRPr lang="en-US"/>
+          </a:p>
+        </p:txBody>
+      </p:sp>
+    </p:spTree>
+    <p:extLst>
+      <p:ext uri="{BB962C8B-B14F-4D97-AF65-F5344CB8AC3E}">
+        <p14:creationId xmlns:p14="http://schemas.microsoft.com/office/powerpoint/2010/main" val="1024086991"/>
+      </p:ext>
+    </p:extLst>
+  </p:cSld>
+  <p:clrMapOvr>
+    <a:masterClrMapping/>
+  </p:clrMapOvr>
+</p:notes>
+</file>
+
+<file path=ppt/notesSlides/notesSlide14.xml><?xml version="1.0" encoding="utf-8"?>
+<p:notes xmlns:a="http://schemas.openxmlformats.org/drawingml/2006/main" xmlns:r="http://schemas.openxmlformats.org/officeDocument/2006/relationships" xmlns:p="http://schemas.openxmlformats.org/presentationml/2006/main">
+  <p:cSld>
+    <p:spTree>
+      <p:nvGrpSpPr>
+        <p:cNvPr id="1" name=""/>
+        <p:cNvGrpSpPr/>
+        <p:nvPr/>
+      </p:nvGrpSpPr>
+      <p:grpSpPr>
+        <a:xfrm>
+          <a:off x="0" y="0"/>
+          <a:ext cx="0" cy="0"/>
+          <a:chOff x="0" y="0"/>
+          <a:chExt cx="0" cy="0"/>
+        </a:xfrm>
+      </p:grpSpPr>
+      <p:sp>
+        <p:nvSpPr>
+          <p:cNvPr id="2" name="Slide Image Placeholder 1"/>
+          <p:cNvSpPr>
+            <a:spLocks noGrp="1" noRot="1" noChangeAspect="1"/>
+          </p:cNvSpPr>
+          <p:nvPr>
+            <p:ph type="sldImg"/>
+          </p:nvPr>
+        </p:nvSpPr>
+        <p:spPr/>
+      </p:sp>
+      <p:sp>
+        <p:nvSpPr>
+          <p:cNvPr id="3" name="Notes Placeholder 2"/>
+          <p:cNvSpPr>
+            <a:spLocks noGrp="1"/>
+          </p:cNvSpPr>
+          <p:nvPr>
+            <p:ph type="body" idx="1"/>
+          </p:nvPr>
+        </p:nvSpPr>
+        <p:spPr/>
+        <p:txBody>
+          <a:bodyPr/>
+          <a:lstStyle/>
+          <a:p>
+            <a:r>
+              <a:rPr lang="en-US" dirty="0"/>
+              <a:t/>
+            </a:r>
+            <a:endParaRPr lang="en-US" dirty="0"/>
+          </a:p>
+        </p:txBody>
+      </p:sp>
+      <p:sp>
+        <p:nvSpPr>
+          <p:cNvPr id="4" name="Slide Number Placeholder 3"/>
+          <p:cNvSpPr>
+            <a:spLocks noGrp="1"/>
+          </p:cNvSpPr>
+          <p:nvPr>
+            <p:ph type="sldNum" sz="quarter" idx="10"/>
+          </p:nvPr>
+        </p:nvSpPr>
+        <p:spPr/>
+        <p:txBody>
+          <a:bodyPr/>
+          <a:lstStyle/>
+          <a:p>
+            <a:fld id="{F7021451-1387-4CA6-816F-3879F97B5CBC}" type="slidenum">
+              <a:rPr lang="en-US"/>
+              <a:t>14</a:t>
+            </a:fld>
+            <a:endParaRPr lang="en-US"/>
+          </a:p>
+        </p:txBody>
+      </p:sp>
+    </p:spTree>
+    <p:extLst>
+      <p:ext uri="{BB962C8B-B14F-4D97-AF65-F5344CB8AC3E}">
+        <p14:creationId xmlns:p14="http://schemas.microsoft.com/office/powerpoint/2010/main" val="1024086991"/>
+      </p:ext>
+    </p:extLst>
+  </p:cSld>
+  <p:clrMapOvr>
+    <a:masterClrMapping/>
+  </p:clrMapOvr>
+</p:notes>
+</file>
+
+<file path=ppt/notesSlides/notesSlide15.xml><?xml version="1.0" encoding="utf-8"?>
+<p:notes xmlns:a="http://schemas.openxmlformats.org/drawingml/2006/main" xmlns:r="http://schemas.openxmlformats.org/officeDocument/2006/relationships" xmlns:p="http://schemas.openxmlformats.org/presentationml/2006/main">
+  <p:cSld>
+    <p:spTree>
+      <p:nvGrpSpPr>
+        <p:cNvPr id="1" name=""/>
+        <p:cNvGrpSpPr/>
+        <p:nvPr/>
+      </p:nvGrpSpPr>
+      <p:grpSpPr>
+        <a:xfrm>
+          <a:off x="0" y="0"/>
+          <a:ext cx="0" cy="0"/>
+          <a:chOff x="0" y="0"/>
+          <a:chExt cx="0" cy="0"/>
+        </a:xfrm>
+      </p:grpSpPr>
+      <p:sp>
+        <p:nvSpPr>
+          <p:cNvPr id="2" name="Slide Image Placeholder 1"/>
+          <p:cNvSpPr>
+            <a:spLocks noGrp="1" noRot="1" noChangeAspect="1"/>
+          </p:cNvSpPr>
+          <p:nvPr>
+            <p:ph type="sldImg"/>
+          </p:nvPr>
+        </p:nvSpPr>
+        <p:spPr/>
+      </p:sp>
+      <p:sp>
+        <p:nvSpPr>
+          <p:cNvPr id="3" name="Notes Placeholder 2"/>
+          <p:cNvSpPr>
+            <a:spLocks noGrp="1"/>
+          </p:cNvSpPr>
+          <p:nvPr>
+            <p:ph type="body" idx="1"/>
+          </p:nvPr>
+        </p:nvSpPr>
+        <p:spPr/>
+        <p:txBody>
+          <a:bodyPr/>
+          <a:lstStyle/>
+          <a:p>
+            <a:r>
+              <a:rPr lang="en-US" dirty="0"/>
+              <a:t/>
+            </a:r>
+            <a:endParaRPr lang="en-US" dirty="0"/>
+          </a:p>
+        </p:txBody>
+      </p:sp>
+      <p:sp>
+        <p:nvSpPr>
+          <p:cNvPr id="4" name="Slide Number Placeholder 3"/>
+          <p:cNvSpPr>
+            <a:spLocks noGrp="1"/>
+          </p:cNvSpPr>
+          <p:nvPr>
+            <p:ph type="sldNum" sz="quarter" idx="10"/>
+          </p:nvPr>
+        </p:nvSpPr>
+        <p:spPr/>
+        <p:txBody>
+          <a:bodyPr/>
+          <a:lstStyle/>
+          <a:p>
+            <a:fld id="{F7021451-1387-4CA6-816F-3879F97B5CBC}" type="slidenum">
+              <a:rPr lang="en-US"/>
+              <a:t>15</a:t>
             </a:fld>
             <a:endParaRPr lang="en-US"/>
           </a:p>
@@ -6224,7 +7278,7 @@
                 <a:ea typeface="Calibri" pitchFamily="34" charset="-122"/>
                 <a:cs typeface="Calibri" pitchFamily="34" charset="-120"/>
               </a:rPr>
-              <a:t>INDUSTRY MAP</a:t>
+              <a:t>FUNDING AND RUNWAY</a:t>
             </a:r>
             <a:endParaRPr lang="en-US" sz="1100" dirty="0"/>
           </a:p>
@@ -6263,7 +7317,7 @@
                 <a:ea typeface="Cambria" pitchFamily="34" charset="-122"/>
                 <a:cs typeface="Cambria" pitchFamily="34" charset="-120"/>
               </a:rPr>
-              <a:t>What the CRAs earn, and where we go</a:t>
+              <a:t>Solvency is not the question</a:t>
             </a:r>
             <a:endParaRPr lang="en-US" sz="2900" dirty="0"/>
           </a:p>
@@ -6302,7 +7356,7 @@
                 <a:ea typeface="Calibri" pitchFamily="34" charset="-122"/>
                 <a:cs typeface="Calibri" pitchFamily="34" charset="-120"/>
               </a:rPr>
-              <a:t>The Indian rating industry is about Rs 2,000 Cr. We enter small and climb a credible ladder.</a:t>
+              <a:t>The plan is fully funded in every scenario without touching the regulatory net worth.</a:t>
             </a:r>
             <a:endParaRPr lang="en-US" sz="1400" dirty="0"/>
           </a:p>
@@ -6310,128 +7364,18 @@
       </p:sp>
       <p:sp>
         <p:nvSpPr>
-          <p:cNvPr id="6" name="Text 4"/>
-          <p:cNvSpPr/>
-          <p:nvPr/>
-        </p:nvSpPr>
-        <p:spPr>
-          <a:xfrm>
-            <a:off x="566928" y="1371600"/>
-            <a:ext cx="5486400" cy="274320"/>
-          </a:xfrm>
-          <a:prstGeom prst="rect">
-            <a:avLst/>
-          </a:prstGeom>
-          <a:noFill/>
-          <a:ln/>
-        </p:spPr>
-        <p:txBody>
-          <a:bodyPr wrap="square" rtlCol="0" anchor="ctr"/>
-          <a:lstStyle/>
-          <a:p>
-            <a:pPr indent="0" marL="0">
-              <a:buNone/>
-            </a:pPr>
-            <a:r>
-              <a:rPr lang="en-US" sz="1200" b="1" dirty="0">
-                <a:solidFill>
-                  <a:srgbClr val="334155"/>
-                </a:solidFill>
-                <a:latin typeface="Calibri" pitchFamily="34" charset="0"/>
-                <a:ea typeface="Calibri" pitchFamily="34" charset="-122"/>
-                <a:cs typeface="Calibri" pitchFamily="34" charset="-120"/>
-              </a:rPr>
-              <a:t>Rating revenue, latest year (Rs Cr)</a:t>
-            </a:r>
-            <a:endParaRPr lang="en-US" sz="1200" dirty="0"/>
-          </a:p>
-        </p:txBody>
-      </p:sp>
-      <p:graphicFrame>
-        <p:nvGraphicFramePr>
-          <p:cNvPr id="7" name="Chart 0" descr=""/>
-          <p:cNvGraphicFramePr/>
-          <p:nvPr/>
-        </p:nvGraphicFramePr>
-        <p:xfrm>
-          <a:off x="566928" y="1691640"/>
-          <a:ext cx="5577840" cy="3657600"/>
-        </p:xfrm>
-        <a:graphic xmlns:a="http://schemas.openxmlformats.org/drawingml/2006/main">
-          <a:graphicData uri="http://schemas.openxmlformats.org/drawingml/2006/chart">
-            <c:chart xmlns:c="http://schemas.openxmlformats.org/drawingml/2006/chart" r:id="rId1"/>
-          </a:graphicData>
-        </a:graphic>
-      </p:graphicFrame>
-      <p:sp>
-        <p:nvSpPr>
-          <p:cNvPr id="8" name="Text 5"/>
-          <p:cNvSpPr/>
-          <p:nvPr/>
-        </p:nvSpPr>
-        <p:spPr>
-          <a:xfrm>
-            <a:off x="6400800" y="1371600"/>
-            <a:ext cx="5486400" cy="274320"/>
-          </a:xfrm>
-          <a:prstGeom prst="rect">
-            <a:avLst/>
-          </a:prstGeom>
-          <a:noFill/>
-          <a:ln/>
-        </p:spPr>
-        <p:txBody>
-          <a:bodyPr wrap="square" rtlCol="0" anchor="ctr"/>
-          <a:lstStyle/>
-          <a:p>
-            <a:pPr indent="0" marL="0">
-              <a:buNone/>
-            </a:pPr>
-            <a:r>
-              <a:rPr lang="en-US" sz="1200" b="1" dirty="0">
-                <a:solidFill>
-                  <a:srgbClr val="334155"/>
-                </a:solidFill>
-                <a:latin typeface="Calibri" pitchFamily="34" charset="0"/>
-                <a:ea typeface="Calibri" pitchFamily="34" charset="-122"/>
-                <a:cs typeface="Calibri" pitchFamily="34" charset="-120"/>
-              </a:rPr>
-              <a:t>Our revenue trajectory (Rs Cr)</a:t>
-            </a:r>
-            <a:endParaRPr lang="en-US" sz="1200" dirty="0"/>
-          </a:p>
-        </p:txBody>
-      </p:sp>
-      <p:graphicFrame>
-        <p:nvGraphicFramePr>
-          <p:cNvPr id="9" name="Chart 1" descr=""/>
-          <p:cNvGraphicFramePr/>
-          <p:nvPr/>
-        </p:nvGraphicFramePr>
-        <p:xfrm>
-          <a:off x="6400800" y="1691640"/>
-          <a:ext cx="5394960" cy="2286000"/>
-        </p:xfrm>
-        <a:graphic xmlns:a="http://schemas.openxmlformats.org/drawingml/2006/main">
-          <a:graphicData uri="http://schemas.openxmlformats.org/drawingml/2006/chart">
-            <c:chart xmlns:c="http://schemas.openxmlformats.org/drawingml/2006/chart" r:id="rId2"/>
-          </a:graphicData>
-        </a:graphic>
-      </p:graphicFrame>
-      <p:sp>
-        <p:nvSpPr>
-          <p:cNvPr id="10" name="Shape 6"/>
-          <p:cNvSpPr/>
-          <p:nvPr/>
-        </p:nvSpPr>
-        <p:spPr>
-          <a:xfrm>
-            <a:off x="6400800" y="4160520"/>
-            <a:ext cx="1691640" cy="1143000"/>
+          <p:cNvPr id="6" name="Shape 4"/>
+          <p:cNvSpPr/>
+          <p:nvPr/>
+        </p:nvSpPr>
+        <p:spPr>
+          <a:xfrm>
+            <a:off x="566928" y="1783080"/>
+            <a:ext cx="2606040" cy="1280160"/>
           </a:xfrm>
           <a:prstGeom prst="roundRect">
             <a:avLst>
-              <a:gd name="adj" fmla="val 4800"/>
+              <a:gd name="adj" fmla="val 4286"/>
             </a:avLst>
           </a:prstGeom>
           <a:solidFill>
@@ -6447,14 +7391,14 @@
       </p:sp>
       <p:sp>
         <p:nvSpPr>
-          <p:cNvPr id="11" name="Text 7"/>
-          <p:cNvSpPr/>
-          <p:nvPr/>
-        </p:nvSpPr>
-        <p:spPr>
-          <a:xfrm>
-            <a:off x="6510528" y="4251960"/>
-            <a:ext cx="1463040" cy="228600"/>
+          <p:cNvPr id="7" name="Text 5"/>
+          <p:cNvSpPr/>
+          <p:nvPr/>
+        </p:nvSpPr>
+        <p:spPr>
+          <a:xfrm>
+            <a:off x="713232" y="1892808"/>
+            <a:ext cx="2313432" cy="274320"/>
           </a:xfrm>
           <a:prstGeom prst="rect">
             <a:avLst/>
@@ -6478,7 +7422,7 @@
                 <a:ea typeface="Calibri" pitchFamily="34" charset="-122"/>
                 <a:cs typeface="Calibri" pitchFamily="34" charset="-120"/>
               </a:rPr>
-              <a:t>TAM</a:t>
+              <a:t>Total FD corpus</a:t>
             </a:r>
             <a:endParaRPr lang="en-US" sz="1050" dirty="0"/>
           </a:p>
@@ -6486,14 +7430,14 @@
       </p:sp>
       <p:sp>
         <p:nvSpPr>
-          <p:cNvPr id="12" name="Text 8"/>
-          <p:cNvSpPr/>
-          <p:nvPr/>
-        </p:nvSpPr>
-        <p:spPr>
-          <a:xfrm>
-            <a:off x="6510528" y="4480560"/>
-            <a:ext cx="1463040" cy="320040"/>
+          <p:cNvPr id="8" name="Text 6"/>
+          <p:cNvSpPr/>
+          <p:nvPr/>
+        </p:nvSpPr>
+        <p:spPr>
+          <a:xfrm>
+            <a:off x="713232" y="2130552"/>
+            <a:ext cx="2313432" cy="411480"/>
           </a:xfrm>
           <a:prstGeom prst="rect">
             <a:avLst/>
@@ -6509,7 +7453,7 @@
               <a:buNone/>
             </a:pPr>
             <a:r>
-              <a:rPr lang="en-US" sz="1400" b="1" dirty="0">
+              <a:rPr lang="en-US" sz="2000" b="1" dirty="0">
                 <a:solidFill>
                   <a:srgbClr val="0F172A"/>
                 </a:solidFill>
@@ -6517,65 +7461,26 @@
                 <a:ea typeface="Cambria" pitchFamily="34" charset="-122"/>
                 <a:cs typeface="Cambria" pitchFamily="34" charset="-120"/>
               </a:rPr>
-              <a:t>Rs 2,000 Cr</a:t>
-            </a:r>
-            <a:endParaRPr lang="en-US" sz="1400" dirty="0"/>
-          </a:p>
-        </p:txBody>
-      </p:sp>
-      <p:sp>
-        <p:nvSpPr>
-          <p:cNvPr id="13" name="Text 9"/>
-          <p:cNvSpPr/>
-          <p:nvPr/>
-        </p:nvSpPr>
-        <p:spPr>
-          <a:xfrm>
-            <a:off x="6510528" y="4846320"/>
-            <a:ext cx="1508760" cy="365760"/>
-          </a:xfrm>
-          <a:prstGeom prst="rect">
-            <a:avLst/>
-          </a:prstGeom>
-          <a:noFill/>
-          <a:ln/>
-        </p:spPr>
-        <p:txBody>
-          <a:bodyPr wrap="square" rtlCol="0" anchor="ctr"/>
-          <a:lstStyle/>
-          <a:p>
-            <a:pPr indent="0" marL="0">
-              <a:buNone/>
-            </a:pPr>
-            <a:r>
-              <a:rPr lang="en-US" sz="850" dirty="0">
-                <a:solidFill>
-                  <a:srgbClr val="94A3B8"/>
-                </a:solidFill>
-                <a:latin typeface="Calibri" pitchFamily="34" charset="0"/>
-                <a:ea typeface="Calibri" pitchFamily="34" charset="-122"/>
-                <a:cs typeface="Calibri" pitchFamily="34" charset="-120"/>
-              </a:rPr>
-              <a:t>whole industry</a:t>
-            </a:r>
-            <a:endParaRPr lang="en-US" sz="850" dirty="0"/>
-          </a:p>
-        </p:txBody>
-      </p:sp>
-      <p:sp>
-        <p:nvSpPr>
-          <p:cNvPr id="14" name="Shape 10"/>
-          <p:cNvSpPr/>
-          <p:nvPr/>
-        </p:nvSpPr>
-        <p:spPr>
-          <a:xfrm>
-            <a:off x="8211312" y="4160520"/>
-            <a:ext cx="1691640" cy="1143000"/>
+              <a:t>Rs 26.1 Cr</a:t>
+            </a:r>
+            <a:endParaRPr lang="en-US" sz="2000" dirty="0"/>
+          </a:p>
+        </p:txBody>
+      </p:sp>
+      <p:sp>
+        <p:nvSpPr>
+          <p:cNvPr id="9" name="Shape 7"/>
+          <p:cNvSpPr/>
+          <p:nvPr/>
+        </p:nvSpPr>
+        <p:spPr>
+          <a:xfrm>
+            <a:off x="3328416" y="1783080"/>
+            <a:ext cx="2606040" cy="1280160"/>
           </a:xfrm>
           <a:prstGeom prst="roundRect">
             <a:avLst>
-              <a:gd name="adj" fmla="val 4800"/>
+              <a:gd name="adj" fmla="val 4286"/>
             </a:avLst>
           </a:prstGeom>
           <a:solidFill>
@@ -6591,14 +7496,14 @@
       </p:sp>
       <p:sp>
         <p:nvSpPr>
-          <p:cNvPr id="15" name="Text 11"/>
-          <p:cNvSpPr/>
-          <p:nvPr/>
-        </p:nvSpPr>
-        <p:spPr>
-          <a:xfrm>
-            <a:off x="8321040" y="4251960"/>
-            <a:ext cx="1463040" cy="228600"/>
+          <p:cNvPr id="10" name="Text 8"/>
+          <p:cNvSpPr/>
+          <p:nvPr/>
+        </p:nvSpPr>
+        <p:spPr>
+          <a:xfrm>
+            <a:off x="3474720" y="1892808"/>
+            <a:ext cx="2313432" cy="274320"/>
           </a:xfrm>
           <a:prstGeom prst="rect">
             <a:avLst/>
@@ -6622,7 +7527,7 @@
                 <a:ea typeface="Calibri" pitchFamily="34" charset="-122"/>
                 <a:cs typeface="Calibri" pitchFamily="34" charset="-120"/>
               </a:rPr>
-              <a:t>SAM</a:t>
+              <a:t>Locked, SEBI net worth</a:t>
             </a:r>
             <a:endParaRPr lang="en-US" sz="1050" dirty="0"/>
           </a:p>
@@ -6630,14 +7535,14 @@
       </p:sp>
       <p:sp>
         <p:nvSpPr>
-          <p:cNvPr id="16" name="Text 12"/>
-          <p:cNvSpPr/>
-          <p:nvPr/>
-        </p:nvSpPr>
-        <p:spPr>
-          <a:xfrm>
-            <a:off x="8321040" y="4480560"/>
-            <a:ext cx="1463040" cy="320040"/>
+          <p:cNvPr id="11" name="Text 9"/>
+          <p:cNvSpPr/>
+          <p:nvPr/>
+        </p:nvSpPr>
+        <p:spPr>
+          <a:xfrm>
+            <a:off x="3474720" y="2130552"/>
+            <a:ext cx="2313432" cy="411480"/>
           </a:xfrm>
           <a:prstGeom prst="rect">
             <a:avLst/>
@@ -6653,30 +7558,30 @@
               <a:buNone/>
             </a:pPr>
             <a:r>
-              <a:rPr lang="en-US" sz="1400" b="1" dirty="0">
-                <a:solidFill>
-                  <a:srgbClr val="0F172A"/>
+              <a:rPr lang="en-US" sz="2000" b="1" dirty="0">
+                <a:solidFill>
+                  <a:srgbClr val="DC2626"/>
                 </a:solidFill>
                 <a:latin typeface="Cambria" pitchFamily="34" charset="0"/>
                 <a:ea typeface="Cambria" pitchFamily="34" charset="-122"/>
                 <a:cs typeface="Cambria" pitchFamily="34" charset="-120"/>
               </a:rPr>
-              <a:t>Rs 500 Cr</a:t>
-            </a:r>
-            <a:endParaRPr lang="en-US" sz="1400" dirty="0"/>
-          </a:p>
-        </p:txBody>
-      </p:sp>
-      <p:sp>
-        <p:nvSpPr>
-          <p:cNvPr id="17" name="Text 13"/>
-          <p:cNvSpPr/>
-          <p:nvPr/>
-        </p:nvSpPr>
-        <p:spPr>
-          <a:xfrm>
-            <a:off x="8321040" y="4846320"/>
-            <a:ext cx="1508760" cy="365760"/>
+              <a:t>Rs 25.0 Cr</a:t>
+            </a:r>
+            <a:endParaRPr lang="en-US" sz="2000" dirty="0"/>
+          </a:p>
+        </p:txBody>
+      </p:sp>
+      <p:sp>
+        <p:nvSpPr>
+          <p:cNvPr id="12" name="Text 10"/>
+          <p:cNvSpPr/>
+          <p:nvPr/>
+        </p:nvSpPr>
+        <p:spPr>
+          <a:xfrm>
+            <a:off x="3474720" y="2569464"/>
+            <a:ext cx="2313432" cy="365760"/>
           </a:xfrm>
           <a:prstGeom prst="rect">
             <a:avLst/>
@@ -6692,7 +7597,7 @@
               <a:buNone/>
             </a:pPr>
             <a:r>
-              <a:rPr lang="en-US" sz="850" dirty="0">
+              <a:rPr lang="en-US" sz="900" dirty="0">
                 <a:solidFill>
                   <a:srgbClr val="94A3B8"/>
                 </a:solidFill>
@@ -6700,26 +7605,26 @@
                 <a:ea typeface="Calibri" pitchFamily="34" charset="-122"/>
                 <a:cs typeface="Calibri" pitchFamily="34" charset="-120"/>
               </a:rPr>
-              <a:t>Rs 100 Cr+ BLR</a:t>
-            </a:r>
-            <a:endParaRPr lang="en-US" sz="850" dirty="0"/>
-          </a:p>
-        </p:txBody>
-      </p:sp>
-      <p:sp>
-        <p:nvSpPr>
-          <p:cNvPr id="18" name="Shape 14"/>
-          <p:cNvSpPr/>
-          <p:nvPr/>
-        </p:nvSpPr>
-        <p:spPr>
-          <a:xfrm>
-            <a:off x="10021824" y="4160520"/>
-            <a:ext cx="1691640" cy="1143000"/>
+              <a:t>held at all times</a:t>
+            </a:r>
+            <a:endParaRPr lang="en-US" sz="900" dirty="0"/>
+          </a:p>
+        </p:txBody>
+      </p:sp>
+      <p:sp>
+        <p:nvSpPr>
+          <p:cNvPr id="13" name="Shape 11"/>
+          <p:cNvSpPr/>
+          <p:nvPr/>
+        </p:nvSpPr>
+        <p:spPr>
+          <a:xfrm>
+            <a:off x="6089904" y="1783080"/>
+            <a:ext cx="2606040" cy="1280160"/>
           </a:xfrm>
           <a:prstGeom prst="roundRect">
             <a:avLst>
-              <a:gd name="adj" fmla="val 4800"/>
+              <a:gd name="adj" fmla="val 4286"/>
             </a:avLst>
           </a:prstGeom>
           <a:solidFill>
@@ -6735,14 +7640,14 @@
       </p:sp>
       <p:sp>
         <p:nvSpPr>
-          <p:cNvPr id="19" name="Text 15"/>
-          <p:cNvSpPr/>
-          <p:nvPr/>
-        </p:nvSpPr>
-        <p:spPr>
-          <a:xfrm>
-            <a:off x="10131552" y="4251960"/>
-            <a:ext cx="1463040" cy="228600"/>
+          <p:cNvPr id="14" name="Text 12"/>
+          <p:cNvSpPr/>
+          <p:nvPr/>
+        </p:nvSpPr>
+        <p:spPr>
+          <a:xfrm>
+            <a:off x="6236208" y="1892808"/>
+            <a:ext cx="2313432" cy="274320"/>
           </a:xfrm>
           <a:prstGeom prst="rect">
             <a:avLst/>
@@ -6766,7 +7671,7 @@
                 <a:ea typeface="Calibri" pitchFamily="34" charset="-122"/>
                 <a:cs typeface="Calibri" pitchFamily="34" charset="-120"/>
               </a:rPr>
-              <a:t>SOM FY28</a:t>
+              <a:t>Accessible funds</a:t>
             </a:r>
             <a:endParaRPr lang="en-US" sz="1050" dirty="0"/>
           </a:p>
@@ -6774,14 +7679,14 @@
       </p:sp>
       <p:sp>
         <p:nvSpPr>
-          <p:cNvPr id="20" name="Text 16"/>
-          <p:cNvSpPr/>
-          <p:nvPr/>
-        </p:nvSpPr>
-        <p:spPr>
-          <a:xfrm>
-            <a:off x="10131552" y="4480560"/>
-            <a:ext cx="1463040" cy="320040"/>
+          <p:cNvPr id="15" name="Text 13"/>
+          <p:cNvSpPr/>
+          <p:nvPr/>
+        </p:nvSpPr>
+        <p:spPr>
+          <a:xfrm>
+            <a:off x="6236208" y="2130552"/>
+            <a:ext cx="2313432" cy="411480"/>
           </a:xfrm>
           <a:prstGeom prst="rect">
             <a:avLst/>
@@ -6797,30 +7702,30 @@
               <a:buNone/>
             </a:pPr>
             <a:r>
-              <a:rPr lang="en-US" sz="1400" b="1" dirty="0">
-                <a:solidFill>
-                  <a:srgbClr val="0F172A"/>
+              <a:rPr lang="en-US" sz="2000" b="1" dirty="0">
+                <a:solidFill>
+                  <a:srgbClr val="0F766E"/>
                 </a:solidFill>
                 <a:latin typeface="Cambria" pitchFamily="34" charset="0"/>
                 <a:ea typeface="Cambria" pitchFamily="34" charset="-122"/>
                 <a:cs typeface="Cambria" pitchFamily="34" charset="-120"/>
               </a:rPr>
-              <a:t>Rs 8 Cr</a:t>
-            </a:r>
-            <a:endParaRPr lang="en-US" sz="1400" dirty="0"/>
-          </a:p>
-        </p:txBody>
-      </p:sp>
-      <p:sp>
-        <p:nvSpPr>
-          <p:cNvPr id="21" name="Text 17"/>
-          <p:cNvSpPr/>
-          <p:nvPr/>
-        </p:nvSpPr>
-        <p:spPr>
-          <a:xfrm>
-            <a:off x="10131552" y="4846320"/>
-            <a:ext cx="1508760" cy="365760"/>
+              <a:t>about Rs 3.0 Cr</a:t>
+            </a:r>
+            <a:endParaRPr lang="en-US" sz="2000" dirty="0"/>
+          </a:p>
+        </p:txBody>
+      </p:sp>
+      <p:sp>
+        <p:nvSpPr>
+          <p:cNvPr id="16" name="Text 14"/>
+          <p:cNvSpPr/>
+          <p:nvPr/>
+        </p:nvSpPr>
+        <p:spPr>
+          <a:xfrm>
+            <a:off x="6236208" y="2569464"/>
+            <a:ext cx="2313432" cy="365760"/>
           </a:xfrm>
           <a:prstGeom prst="rect">
             <a:avLst/>
@@ -6836,7 +7741,7 @@
               <a:buNone/>
             </a:pPr>
             <a:r>
-              <a:rPr lang="en-US" sz="850" dirty="0">
+              <a:rPr lang="en-US" sz="900" dirty="0">
                 <a:solidFill>
                   <a:srgbClr val="94A3B8"/>
                 </a:solidFill>
@@ -6844,22 +7749,49 @@
                 <a:ea typeface="Calibri" pitchFamily="34" charset="-122"/>
                 <a:cs typeface="Calibri" pitchFamily="34" charset="-120"/>
               </a:rPr>
-              <a:t>0.4%, to ~0.8% by FY30</a:t>
-            </a:r>
-            <a:endParaRPr lang="en-US" sz="850" dirty="0"/>
-          </a:p>
-        </p:txBody>
-      </p:sp>
-      <p:sp>
-        <p:nvSpPr>
-          <p:cNvPr id="22" name="Text 18"/>
-          <p:cNvSpPr/>
-          <p:nvPr/>
-        </p:nvSpPr>
-        <p:spPr>
-          <a:xfrm>
-            <a:off x="566928" y="6446520"/>
-            <a:ext cx="11064240" cy="301752"/>
+              <a:t>non locked FD plus bank</a:t>
+            </a:r>
+            <a:endParaRPr lang="en-US" sz="900" dirty="0"/>
+          </a:p>
+        </p:txBody>
+      </p:sp>
+      <p:sp>
+        <p:nvSpPr>
+          <p:cNvPr id="17" name="Shape 15"/>
+          <p:cNvSpPr/>
+          <p:nvPr/>
+        </p:nvSpPr>
+        <p:spPr>
+          <a:xfrm>
+            <a:off x="8851392" y="1783080"/>
+            <a:ext cx="2606040" cy="1280160"/>
+          </a:xfrm>
+          <a:prstGeom prst="roundRect">
+            <a:avLst>
+              <a:gd name="adj" fmla="val 4286"/>
+            </a:avLst>
+          </a:prstGeom>
+          <a:solidFill>
+            <a:srgbClr val="F5F8FB"/>
+          </a:solidFill>
+          <a:ln w="12700">
+            <a:solidFill>
+              <a:srgbClr val="E2E8F0"/>
+            </a:solidFill>
+            <a:prstDash val="solid"/>
+          </a:ln>
+        </p:spPr>
+      </p:sp>
+      <p:sp>
+        <p:nvSpPr>
+          <p:cNvPr id="18" name="Text 16"/>
+          <p:cNvSpPr/>
+          <p:nvPr/>
+        </p:nvSpPr>
+        <p:spPr>
+          <a:xfrm>
+            <a:off x="8997696" y="1892808"/>
+            <a:ext cx="2313432" cy="274320"/>
           </a:xfrm>
           <a:prstGeom prst="rect">
             <a:avLst/>
@@ -6875,15 +7807,217 @@
               <a:buNone/>
             </a:pPr>
             <a:r>
-              <a:rPr lang="en-US" sz="900" i="1" dirty="0">
-                <a:solidFill>
-                  <a:srgbClr val="94A3B8"/>
+              <a:rPr lang="en-US" sz="1050" dirty="0">
+                <a:solidFill>
+                  <a:srgbClr val="64748B"/>
                 </a:solidFill>
                 <a:latin typeface="Calibri" pitchFamily="34" charset="0"/>
                 <a:ea typeface="Calibri" pitchFamily="34" charset="-122"/>
                 <a:cs typeface="Calibri" pitchFamily="34" charset="-120"/>
               </a:rPr>
-              <a:t>Source: peer figures from official disclosures, CRISIL [3], CARE [5], India Ratings [6], Infomerics [7], Acuite [8]. ACER, Internal [1] and plan [2]. TAM and SAM are estimates.</a:t>
+              <a:t>Annual FD interest</a:t>
+            </a:r>
+            <a:endParaRPr lang="en-US" sz="1050" dirty="0"/>
+          </a:p>
+        </p:txBody>
+      </p:sp>
+      <p:sp>
+        <p:nvSpPr>
+          <p:cNvPr id="19" name="Text 17"/>
+          <p:cNvSpPr/>
+          <p:nvPr/>
+        </p:nvSpPr>
+        <p:spPr>
+          <a:xfrm>
+            <a:off x="8997696" y="2130552"/>
+            <a:ext cx="2313432" cy="411480"/>
+          </a:xfrm>
+          <a:prstGeom prst="rect">
+            <a:avLst/>
+          </a:prstGeom>
+          <a:noFill/>
+          <a:ln/>
+        </p:spPr>
+        <p:txBody>
+          <a:bodyPr wrap="square" rtlCol="0" anchor="ctr"/>
+          <a:lstStyle/>
+          <a:p>
+            <a:pPr indent="0" marL="0">
+              <a:buNone/>
+            </a:pPr>
+            <a:r>
+              <a:rPr lang="en-US" sz="2000" b="1" dirty="0">
+                <a:solidFill>
+                  <a:srgbClr val="0F766E"/>
+                </a:solidFill>
+                <a:latin typeface="Cambria" pitchFamily="34" charset="0"/>
+                <a:ea typeface="Cambria" pitchFamily="34" charset="-122"/>
+                <a:cs typeface="Cambria" pitchFamily="34" charset="-120"/>
+              </a:rPr>
+              <a:t>about Rs 1.8 Cr</a:t>
+            </a:r>
+            <a:endParaRPr lang="en-US" sz="2000" dirty="0"/>
+          </a:p>
+        </p:txBody>
+      </p:sp>
+      <p:sp>
+        <p:nvSpPr>
+          <p:cNvPr id="20" name="Text 18"/>
+          <p:cNvSpPr/>
+          <p:nvPr/>
+        </p:nvSpPr>
+        <p:spPr>
+          <a:xfrm>
+            <a:off x="8997696" y="2569464"/>
+            <a:ext cx="2313432" cy="365760"/>
+          </a:xfrm>
+          <a:prstGeom prst="rect">
+            <a:avLst/>
+          </a:prstGeom>
+          <a:noFill/>
+          <a:ln/>
+        </p:spPr>
+        <p:txBody>
+          <a:bodyPr wrap="square" rtlCol="0" anchor="ctr"/>
+          <a:lstStyle/>
+          <a:p>
+            <a:pPr indent="0" marL="0">
+              <a:buNone/>
+            </a:pPr>
+            <a:r>
+              <a:rPr lang="en-US" sz="900" dirty="0">
+                <a:solidFill>
+                  <a:srgbClr val="94A3B8"/>
+                </a:solidFill>
+                <a:latin typeface="Calibri" pitchFamily="34" charset="0"/>
+                <a:ea typeface="Calibri" pitchFamily="34" charset="-122"/>
+                <a:cs typeface="Calibri" pitchFamily="34" charset="-120"/>
+              </a:rPr>
+              <a:t>recurring cash income</a:t>
+            </a:r>
+            <a:endParaRPr lang="en-US" sz="900" dirty="0"/>
+          </a:p>
+        </p:txBody>
+      </p:sp>
+      <p:sp>
+        <p:nvSpPr>
+          <p:cNvPr id="21" name="Text 19"/>
+          <p:cNvSpPr/>
+          <p:nvPr/>
+        </p:nvSpPr>
+        <p:spPr>
+          <a:xfrm>
+            <a:off x="566928" y="3383280"/>
+            <a:ext cx="10972800" cy="2377440"/>
+          </a:xfrm>
+          <a:prstGeom prst="rect">
+            <a:avLst/>
+          </a:prstGeom>
+          <a:noFill/>
+          <a:ln/>
+        </p:spPr>
+        <p:txBody>
+          <a:bodyPr wrap="square" rtlCol="0" anchor="t"/>
+          <a:lstStyle/>
+          <a:p>
+            <a:pPr marL="177800" indent="-177800">
+              <a:spcAft>
+                <a:spcPts val="700"/>
+              </a:spcAft>
+              <a:buSzPct val="100000"/>
+              <a:buChar char="•"/>
+            </a:pPr>
+            <a:r>
+              <a:rPr lang="en-US" sz="1400" dirty="0">
+                <a:solidFill>
+                  <a:srgbClr val="334155"/>
+                </a:solidFill>
+                <a:latin typeface="Calibri" pitchFamily="34" charset="0"/>
+                <a:ea typeface="Calibri" pitchFamily="34" charset="-122"/>
+                <a:cs typeface="Calibri" pitchFamily="34" charset="-120"/>
+              </a:rPr>
+              <a:t>Base case S1 breaks even, so no drawdown is needed.</a:t>
+            </a:r>
+            <a:endParaRPr lang="en-US" sz="1400" dirty="0"/>
+          </a:p>
+          <a:p>
+            <a:pPr marL="177800" indent="-177800">
+              <a:spcAft>
+                <a:spcPts val="700"/>
+              </a:spcAft>
+              <a:buSzPct val="100000"/>
+              <a:buChar char="•"/>
+            </a:pPr>
+            <a:r>
+              <a:rPr lang="en-US" sz="1400" dirty="0">
+                <a:solidFill>
+                  <a:srgbClr val="334155"/>
+                </a:solidFill>
+                <a:latin typeface="Calibri" pitchFamily="34" charset="0"/>
+                <a:ea typeface="Calibri" pitchFamily="34" charset="-122"/>
+                <a:cs typeface="Calibri" pitchFamily="34" charset="-120"/>
+              </a:rPr>
+              <a:t>Even the worst case S3, a Rs 2.6 Cr loss, is about Rs 2.5 Cr of cash burn, comfortably inside the roughly Rs 3.0 Cr accessible plus Rs 1.8 Cr of annual interest.</a:t>
+            </a:r>
+            <a:endParaRPr lang="en-US" sz="1400" dirty="0"/>
+          </a:p>
+          <a:p>
+            <a:pPr marL="177800" indent="-177800">
+              <a:spcAft>
+                <a:spcPts val="700"/>
+              </a:spcAft>
+              <a:buSzPct val="100000"/>
+              <a:buChar char="•"/>
+            </a:pPr>
+            <a:r>
+              <a:rPr lang="en-US" sz="1400" dirty="0">
+                <a:solidFill>
+                  <a:srgbClr val="334155"/>
+                </a:solidFill>
+                <a:latin typeface="Calibri" pitchFamily="34" charset="0"/>
+                <a:ea typeface="Calibri" pitchFamily="34" charset="-122"/>
+                <a:cs typeface="Calibri" pitchFamily="34" charset="-120"/>
+              </a:rPr>
+              <a:t>The Rs 25 Cr net worth stays intact in every scenario, so the SEBI registration is never at risk. The question is operational self sufficiency, not survival.</a:t>
+            </a:r>
+            <a:endParaRPr lang="en-US" sz="1400" dirty="0"/>
+          </a:p>
+        </p:txBody>
+      </p:sp>
+      <p:sp>
+        <p:nvSpPr>
+          <p:cNvPr id="22" name="Text 20"/>
+          <p:cNvSpPr/>
+          <p:nvPr/>
+        </p:nvSpPr>
+        <p:spPr>
+          <a:xfrm>
+            <a:off x="566928" y="6446520"/>
+            <a:ext cx="11064240" cy="301752"/>
+          </a:xfrm>
+          <a:prstGeom prst="rect">
+            <a:avLst/>
+          </a:prstGeom>
+          <a:noFill/>
+          <a:ln/>
+        </p:spPr>
+        <p:txBody>
+          <a:bodyPr wrap="square" rtlCol="0" anchor="ctr"/>
+          <a:lstStyle/>
+          <a:p>
+            <a:pPr indent="0" marL="0">
+              <a:buNone/>
+            </a:pPr>
+            <a:r>
+              <a:rPr lang="en-US" sz="900" i="1" dirty="0">
+                <a:solidFill>
+                  <a:srgbClr val="94A3B8"/>
+                </a:solidFill>
+                <a:latin typeface="Calibri" pitchFamily="34" charset="0"/>
+                <a:ea typeface="Calibri" pitchFamily="34" charset="-122"/>
+                <a:cs typeface="Calibri" pitchFamily="34" charset="-120"/>
+              </a:rPr>
+              <a:t>Source: Internal [1]. SEBI net worth basis [10].</a:t>
             </a:r>
             <a:endParaRPr lang="en-US" sz="900" dirty="0"/>
           </a:p>
@@ -6993,7 +8127,7 @@
                 <a:ea typeface="Calibri" pitchFamily="34" charset="-122"/>
                 <a:cs typeface="Calibri" pitchFamily="34" charset="-120"/>
               </a:rPr>
-              <a:t>EXECUTION</a:t>
+              <a:t>THE CLIMB</a:t>
             </a:r>
             <a:endParaRPr lang="en-US" sz="1100" dirty="0"/>
           </a:p>
@@ -7032,7 +8166,7 @@
                 <a:ea typeface="Cambria" pitchFamily="34" charset="-122"/>
                 <a:cs typeface="Cambria" pitchFamily="34" charset="-120"/>
               </a:rPr>
-              <a:t>Milestones, KPIs and risks</a:t>
+              <a:t>Revenue trajectory and the income mix flip</a:t>
             </a:r>
             <a:endParaRPr lang="en-US" sz="2900" dirty="0"/>
           </a:p>
@@ -7063,50 +8197,62 @@
               <a:buNone/>
             </a:pPr>
             <a:r>
-              <a:rPr lang="en-US" sz="1300" b="1" dirty="0">
-                <a:solidFill>
-                  <a:srgbClr val="2B5CC4"/>
+              <a:rPr lang="en-US" sz="1200" b="1" dirty="0">
+                <a:solidFill>
+                  <a:srgbClr val="334155"/>
                 </a:solidFill>
                 <a:latin typeface="Calibri" pitchFamily="34" charset="0"/>
                 <a:ea typeface="Calibri" pitchFamily="34" charset="-122"/>
                 <a:cs typeface="Calibri" pitchFamily="34" charset="-120"/>
               </a:rPr>
-              <a:t>Milestones (base case)</a:t>
-            </a:r>
-            <a:endParaRPr lang="en-US" sz="1300" dirty="0"/>
-          </a:p>
-        </p:txBody>
-      </p:sp>
-      <p:sp>
-        <p:nvSpPr>
-          <p:cNvPr id="6" name="Text 4"/>
-          <p:cNvSpPr/>
-          <p:nvPr/>
-        </p:nvSpPr>
-        <p:spPr>
-          <a:xfrm>
-            <a:off x="566928" y="1737360"/>
-            <a:ext cx="5394960" cy="2286000"/>
-          </a:xfrm>
-          <a:prstGeom prst="rect">
-            <a:avLst/>
-          </a:prstGeom>
-          <a:noFill/>
-          <a:ln/>
-        </p:spPr>
-        <p:txBody>
-          <a:bodyPr wrap="square" rtlCol="0" anchor="t"/>
-          <a:lstStyle/>
-          <a:p>
-            <a:pPr marL="177800" indent="-177800">
-              <a:spcAft>
-                <a:spcPts val="700"/>
-              </a:spcAft>
-              <a:buSzPct val="100000"/>
-              <a:buChar char="•"/>
-            </a:pPr>
-            <a:r>
-              <a:rPr lang="en-US" sz="1250" dirty="0">
+              <a:t>Operating revenue build, base case (Rs Cr)</a:t>
+            </a:r>
+            <a:endParaRPr lang="en-US" sz="1200" dirty="0"/>
+          </a:p>
+        </p:txBody>
+      </p:sp>
+      <p:graphicFrame>
+        <p:nvGraphicFramePr>
+          <p:cNvPr id="6" name="Chart 0" descr=""/>
+          <p:cNvGraphicFramePr/>
+          <p:nvPr/>
+        </p:nvGraphicFramePr>
+        <p:xfrm>
+          <a:off x="566928" y="1737360"/>
+          <a:ext cx="5669280" cy="4023360"/>
+        </p:xfrm>
+        <a:graphic xmlns:a="http://schemas.openxmlformats.org/drawingml/2006/main">
+          <a:graphicData uri="http://schemas.openxmlformats.org/drawingml/2006/chart">
+            <c:chart xmlns:c="http://schemas.openxmlformats.org/drawingml/2006/chart" r:id="rId1"/>
+          </a:graphicData>
+        </a:graphic>
+      </p:graphicFrame>
+      <p:sp>
+        <p:nvSpPr>
+          <p:cNvPr id="7" name="Text 4"/>
+          <p:cNvSpPr/>
+          <p:nvPr/>
+        </p:nvSpPr>
+        <p:spPr>
+          <a:xfrm>
+            <a:off x="6492240" y="1417320"/>
+            <a:ext cx="5486400" cy="274320"/>
+          </a:xfrm>
+          <a:prstGeom prst="rect">
+            <a:avLst/>
+          </a:prstGeom>
+          <a:noFill/>
+          <a:ln/>
+        </p:spPr>
+        <p:txBody>
+          <a:bodyPr wrap="square" rtlCol="0" anchor="ctr"/>
+          <a:lstStyle/>
+          <a:p>
+            <a:pPr indent="0" marL="0">
+              <a:buNone/>
+            </a:pPr>
+            <a:r>
+              <a:rPr lang="en-US" sz="1200" b="1" dirty="0">
                 <a:solidFill>
                   <a:srgbClr val="334155"/>
                 </a:solidFill>
@@ -7114,420 +8260,62 @@
                 <a:ea typeface="Calibri" pitchFamily="34" charset="-122"/>
                 <a:cs typeface="Calibri" pitchFamily="34" charset="-120"/>
               </a:rPr>
-              <a:t>Now: SEBI registered, two hires and four BDs onboarding.</a:t>
-            </a:r>
-            <a:endParaRPr lang="en-US" sz="1250" dirty="0"/>
-          </a:p>
-          <a:p>
-            <a:pPr marL="177800" indent="-177800">
-              <a:spcAft>
-                <a:spcPts val="700"/>
-              </a:spcAft>
-              <a:buSzPct val="100000"/>
-              <a:buChar char="•"/>
-            </a:pPr>
-            <a:r>
-              <a:rPr lang="en-US" sz="1250" dirty="0">
-                <a:solidFill>
-                  <a:srgbClr val="334155"/>
+              <a:t>Income mix, FD versus ratings</a:t>
+            </a:r>
+            <a:endParaRPr lang="en-US" sz="1200" dirty="0"/>
+          </a:p>
+        </p:txBody>
+      </p:sp>
+      <p:graphicFrame>
+        <p:nvGraphicFramePr>
+          <p:cNvPr id="8" name="Chart 1" descr=""/>
+          <p:cNvGraphicFramePr/>
+          <p:nvPr/>
+        </p:nvGraphicFramePr>
+        <p:xfrm>
+          <a:off x="6400800" y="1737360"/>
+          <a:ext cx="5394960" cy="4023360"/>
+        </p:xfrm>
+        <a:graphic xmlns:a="http://schemas.openxmlformats.org/drawingml/2006/main">
+          <a:graphicData uri="http://schemas.openxmlformats.org/drawingml/2006/chart">
+            <c:chart xmlns:c="http://schemas.openxmlformats.org/drawingml/2006/chart" r:id="rId2"/>
+          </a:graphicData>
+        </a:graphic>
+      </p:graphicFrame>
+      <p:sp>
+        <p:nvSpPr>
+          <p:cNvPr id="9" name="Text 5"/>
+          <p:cNvSpPr/>
+          <p:nvPr/>
+        </p:nvSpPr>
+        <p:spPr>
+          <a:xfrm>
+            <a:off x="566928" y="6446520"/>
+            <a:ext cx="11064240" cy="301752"/>
+          </a:xfrm>
+          <a:prstGeom prst="rect">
+            <a:avLst/>
+          </a:prstGeom>
+          <a:noFill/>
+          <a:ln/>
+        </p:spPr>
+        <p:txBody>
+          <a:bodyPr wrap="square" rtlCol="0" anchor="ctr"/>
+          <a:lstStyle/>
+          <a:p>
+            <a:pPr indent="0" marL="0">
+              <a:buNone/>
+            </a:pPr>
+            <a:r>
+              <a:rPr lang="en-US" sz="900" i="1" dirty="0">
+                <a:solidFill>
+                  <a:srgbClr val="94A3B8"/>
                 </a:solidFill>
                 <a:latin typeface="Calibri" pitchFamily="34" charset="0"/>
                 <a:ea typeface="Calibri" pitchFamily="34" charset="-122"/>
                 <a:cs typeface="Calibri" pitchFamily="34" charset="-120"/>
               </a:rPr>
-              <a:t>Q2: pursue RBI ECAI accreditation, build the BD pipeline.</a:t>
-            </a:r>
-            <a:endParaRPr lang="en-US" sz="1250" dirty="0"/>
-          </a:p>
-          <a:p>
-            <a:pPr marL="177800" indent="-177800">
-              <a:spcAft>
-                <a:spcPts val="700"/>
-              </a:spcAft>
-              <a:buSzPct val="100000"/>
-              <a:buChar char="•"/>
-            </a:pPr>
-            <a:r>
-              <a:rPr lang="en-US" sz="1250" dirty="0">
-                <a:solidFill>
-                  <a:srgbClr val="334155"/>
-                </a:solidFill>
-                <a:latin typeface="Calibri" pitchFamily="34" charset="0"/>
-                <a:ea typeface="Calibri" pitchFamily="34" charset="-122"/>
-                <a:cs typeface="Calibri" pitchFamily="34" charset="-120"/>
-              </a:rPr>
-              <a:t>1 Oct: BLR live, first mandates.</a:t>
-            </a:r>
-            <a:endParaRPr lang="en-US" sz="1250" dirty="0"/>
-          </a:p>
-          <a:p>
-            <a:pPr marL="177800" indent="-177800">
-              <a:spcAft>
-                <a:spcPts val="700"/>
-              </a:spcAft>
-              <a:buSzPct val="100000"/>
-              <a:buChar char="•"/>
-            </a:pPr>
-            <a:r>
-              <a:rPr lang="en-US" sz="1250" dirty="0">
-                <a:solidFill>
-                  <a:srgbClr val="334155"/>
-                </a:solidFill>
-                <a:latin typeface="Calibri" pitchFamily="34" charset="0"/>
-                <a:ea typeface="Calibri" pitchFamily="34" charset="-122"/>
-                <a:cs typeface="Calibri" pitchFamily="34" charset="-120"/>
-              </a:rPr>
-              <a:t>Q3 to Q4: ramp to 16 per month, reach break even.</a:t>
-            </a:r>
-            <a:endParaRPr lang="en-US" sz="1250" dirty="0"/>
-          </a:p>
-          <a:p>
-            <a:pPr marL="177800" indent="-177800">
-              <a:spcAft>
-                <a:spcPts val="700"/>
-              </a:spcAft>
-              <a:buSzPct val="100000"/>
-              <a:buChar char="•"/>
-            </a:pPr>
-            <a:r>
-              <a:rPr lang="en-US" sz="1250" dirty="0">
-                <a:solidFill>
-                  <a:srgbClr val="334155"/>
-                </a:solidFill>
-                <a:latin typeface="Calibri" pitchFamily="34" charset="0"/>
-                <a:ea typeface="Calibri" pitchFamily="34" charset="-122"/>
-                <a:cs typeface="Calibri" pitchFamily="34" charset="-120"/>
-              </a:rPr>
-              <a:t>FY28: full year of BLR, surveillance annuity, profitability.</a:t>
-            </a:r>
-            <a:endParaRPr lang="en-US" sz="1250" dirty="0"/>
-          </a:p>
-        </p:txBody>
-      </p:sp>
-      <p:sp>
-        <p:nvSpPr>
-          <p:cNvPr id="7" name="Text 5"/>
-          <p:cNvSpPr/>
-          <p:nvPr/>
-        </p:nvSpPr>
-        <p:spPr>
-          <a:xfrm>
-            <a:off x="566928" y="4114800"/>
-            <a:ext cx="5486400" cy="274320"/>
-          </a:xfrm>
-          <a:prstGeom prst="rect">
-            <a:avLst/>
-          </a:prstGeom>
-          <a:noFill/>
-          <a:ln/>
-        </p:spPr>
-        <p:txBody>
-          <a:bodyPr wrap="square" rtlCol="0" anchor="ctr"/>
-          <a:lstStyle/>
-          <a:p>
-            <a:pPr indent="0" marL="0">
-              <a:buNone/>
-            </a:pPr>
-            <a:r>
-              <a:rPr lang="en-US" sz="1300" b="1" dirty="0">
-                <a:solidFill>
-                  <a:srgbClr val="2B5CC4"/>
-                </a:solidFill>
-                <a:latin typeface="Calibri" pitchFamily="34" charset="0"/>
-                <a:ea typeface="Calibri" pitchFamily="34" charset="-122"/>
-                <a:cs typeface="Calibri" pitchFamily="34" charset="-120"/>
-              </a:rPr>
-              <a:t>KPIs the Board will see</a:t>
-            </a:r>
-            <a:endParaRPr lang="en-US" sz="1300" dirty="0"/>
-          </a:p>
-        </p:txBody>
-      </p:sp>
-      <p:sp>
-        <p:nvSpPr>
-          <p:cNvPr id="8" name="Text 6"/>
-          <p:cNvSpPr/>
-          <p:nvPr/>
-        </p:nvSpPr>
-        <p:spPr>
-          <a:xfrm>
-            <a:off x="566928" y="4434840"/>
-            <a:ext cx="5394960" cy="1737360"/>
-          </a:xfrm>
-          <a:prstGeom prst="rect">
-            <a:avLst/>
-          </a:prstGeom>
-          <a:noFill/>
-          <a:ln/>
-        </p:spPr>
-        <p:txBody>
-          <a:bodyPr wrap="square" rtlCol="0" anchor="t"/>
-          <a:lstStyle/>
-          <a:p>
-            <a:pPr marL="177800" indent="-177800">
-              <a:spcAft>
-                <a:spcPts val="700"/>
-              </a:spcAft>
-              <a:buSzPct val="100000"/>
-              <a:buChar char="•"/>
-            </a:pPr>
-            <a:r>
-              <a:rPr lang="en-US" sz="1250" dirty="0">
-                <a:solidFill>
-                  <a:srgbClr val="334155"/>
-                </a:solidFill>
-                <a:latin typeface="Calibri" pitchFamily="34" charset="0"/>
-                <a:ea typeface="Calibri" pitchFamily="34" charset="-122"/>
-                <a:cs typeface="Calibri" pitchFamily="34" charset="-120"/>
-              </a:rPr>
-              <a:t>Mandates per month and cumulative rated debt.</a:t>
-            </a:r>
-            <a:endParaRPr lang="en-US" sz="1250" dirty="0"/>
-          </a:p>
-          <a:p>
-            <a:pPr marL="177800" indent="-177800">
-              <a:spcAft>
-                <a:spcPts val="700"/>
-              </a:spcAft>
-              <a:buSzPct val="100000"/>
-              <a:buChar char="•"/>
-            </a:pPr>
-            <a:r>
-              <a:rPr lang="en-US" sz="1250" dirty="0">
-                <a:solidFill>
-                  <a:srgbClr val="334155"/>
-                </a:solidFill>
-                <a:latin typeface="Calibri" pitchFamily="34" charset="0"/>
-                <a:ea typeface="Calibri" pitchFamily="34" charset="-122"/>
-                <a:cs typeface="Calibri" pitchFamily="34" charset="-120"/>
-              </a:rPr>
-              <a:t>Ratings share of income, revenue versus plan.</a:t>
-            </a:r>
-            <a:endParaRPr lang="en-US" sz="1250" dirty="0"/>
-          </a:p>
-          <a:p>
-            <a:pPr marL="177800" indent="-177800">
-              <a:spcAft>
-                <a:spcPts val="700"/>
-              </a:spcAft>
-              <a:buSzPct val="100000"/>
-              <a:buChar char="•"/>
-            </a:pPr>
-            <a:r>
-              <a:rPr lang="en-US" sz="1250" dirty="0">
-                <a:solidFill>
-                  <a:srgbClr val="334155"/>
-                </a:solidFill>
-                <a:latin typeface="Calibri" pitchFamily="34" charset="0"/>
-                <a:ea typeface="Calibri" pitchFamily="34" charset="-122"/>
-                <a:cs typeface="Calibri" pitchFamily="34" charset="-120"/>
-              </a:rPr>
-              <a:t>Cash position and net worth headroom.</a:t>
-            </a:r>
-            <a:endParaRPr lang="en-US" sz="1250" dirty="0"/>
-          </a:p>
-        </p:txBody>
-      </p:sp>
-      <p:sp>
-        <p:nvSpPr>
-          <p:cNvPr id="9" name="Text 7"/>
-          <p:cNvSpPr/>
-          <p:nvPr/>
-        </p:nvSpPr>
-        <p:spPr>
-          <a:xfrm>
-            <a:off x="6309360" y="1417320"/>
-            <a:ext cx="5486400" cy="274320"/>
-          </a:xfrm>
-          <a:prstGeom prst="rect">
-            <a:avLst/>
-          </a:prstGeom>
-          <a:noFill/>
-          <a:ln/>
-        </p:spPr>
-        <p:txBody>
-          <a:bodyPr wrap="square" rtlCol="0" anchor="ctr"/>
-          <a:lstStyle/>
-          <a:p>
-            <a:pPr indent="0" marL="0">
-              <a:buNone/>
-            </a:pPr>
-            <a:r>
-              <a:rPr lang="en-US" sz="1300" b="1" dirty="0">
-                <a:solidFill>
-                  <a:srgbClr val="2B5CC4"/>
-                </a:solidFill>
-                <a:latin typeface="Calibri" pitchFamily="34" charset="0"/>
-                <a:ea typeface="Calibri" pitchFamily="34" charset="-122"/>
-                <a:cs typeface="Calibri" pitchFamily="34" charset="-120"/>
-              </a:rPr>
-              <a:t>Key risks and mitigations</a:t>
-            </a:r>
-            <a:endParaRPr lang="en-US" sz="1300" dirty="0"/>
-          </a:p>
-        </p:txBody>
-      </p:sp>
-      <p:sp>
-        <p:nvSpPr>
-          <p:cNvPr id="10" name="Text 8"/>
-          <p:cNvSpPr/>
-          <p:nvPr/>
-        </p:nvSpPr>
-        <p:spPr>
-          <a:xfrm>
-            <a:off x="6309360" y="1737360"/>
-            <a:ext cx="5486400" cy="4480560"/>
-          </a:xfrm>
-          <a:prstGeom prst="rect">
-            <a:avLst/>
-          </a:prstGeom>
-          <a:noFill/>
-          <a:ln/>
-        </p:spPr>
-        <p:txBody>
-          <a:bodyPr wrap="square" rtlCol="0" anchor="t"/>
-          <a:lstStyle/>
-          <a:p>
-            <a:pPr marL="177800" indent="-177800">
-              <a:spcAft>
-                <a:spcPts val="700"/>
-              </a:spcAft>
-              <a:buSzPct val="100000"/>
-              <a:buChar char="•"/>
-            </a:pPr>
-            <a:r>
-              <a:rPr lang="en-US" sz="1250" dirty="0">
-                <a:solidFill>
-                  <a:srgbClr val="334155"/>
-                </a:solidFill>
-                <a:latin typeface="Calibri" pitchFamily="34" charset="0"/>
-                <a:ea typeface="Calibri" pitchFamily="34" charset="-122"/>
-                <a:cs typeface="Calibri" pitchFamily="34" charset="-120"/>
-              </a:rPr>
-              <a:t>BLR licence delay: cost trigger, stagger the second hire, freeze discretionary spend.</a:t>
-            </a:r>
-            <a:endParaRPr lang="en-US" sz="1250" dirty="0"/>
-          </a:p>
-          <a:p>
-            <a:pPr marL="177800" indent="-177800">
-              <a:spcAft>
-                <a:spcPts val="700"/>
-              </a:spcAft>
-              <a:buSzPct val="100000"/>
-              <a:buChar char="•"/>
-            </a:pPr>
-            <a:r>
-              <a:rPr lang="en-US" sz="1250" dirty="0">
-                <a:solidFill>
-                  <a:srgbClr val="334155"/>
-                </a:solidFill>
-                <a:latin typeface="Calibri" pitchFamily="34" charset="0"/>
-                <a:ea typeface="Calibri" pitchFamily="34" charset="-122"/>
-                <a:cs typeface="Calibri" pitchFamily="34" charset="-120"/>
-              </a:rPr>
-              <a:t>BD ramp shortfall: disciplined pipeline, phased monthly targets.</a:t>
-            </a:r>
-            <a:endParaRPr lang="en-US" sz="1250" dirty="0"/>
-          </a:p>
-          <a:p>
-            <a:pPr marL="177800" indent="-177800">
-              <a:spcAft>
-                <a:spcPts val="700"/>
-              </a:spcAft>
-              <a:buSzPct val="100000"/>
-              <a:buChar char="•"/>
-            </a:pPr>
-            <a:r>
-              <a:rPr lang="en-US" sz="1250" dirty="0">
-                <a:solidFill>
-                  <a:srgbClr val="334155"/>
-                </a:solidFill>
-                <a:latin typeface="Calibri" pitchFamily="34" charset="0"/>
-                <a:ea typeface="Calibri" pitchFamily="34" charset="-122"/>
-                <a:cs typeface="Calibri" pitchFamily="34" charset="-120"/>
-              </a:rPr>
-              <a:t>Competition from incumbents: price, service and second rating niche.</a:t>
-            </a:r>
-            <a:endParaRPr lang="en-US" sz="1250" dirty="0"/>
-          </a:p>
-          <a:p>
-            <a:pPr marL="177800" indent="-177800">
-              <a:spcAft>
-                <a:spcPts val="700"/>
-              </a:spcAft>
-              <a:buSzPct val="100000"/>
-              <a:buChar char="•"/>
-            </a:pPr>
-            <a:r>
-              <a:rPr lang="en-US" sz="1250" dirty="0">
-                <a:solidFill>
-                  <a:srgbClr val="334155"/>
-                </a:solidFill>
-                <a:latin typeface="Calibri" pitchFamily="34" charset="0"/>
-                <a:ea typeface="Calibri" pitchFamily="34" charset="-122"/>
-                <a:cs typeface="Calibri" pitchFamily="34" charset="-120"/>
-              </a:rPr>
-              <a:t>Rating quality or compliance failure: independent rating committee and strong process. Brickwork lost its licence and most of its revenue to lapses, rating revenue fell from about Rs 48.5 Cr to about Rs 5 Cr.</a:t>
-            </a:r>
-            <a:endParaRPr lang="en-US" sz="1250" dirty="0"/>
-          </a:p>
-          <a:p>
-            <a:pPr marL="177800" indent="-177800">
-              <a:spcAft>
-                <a:spcPts val="700"/>
-              </a:spcAft>
-              <a:buSzPct val="100000"/>
-              <a:buChar char="•"/>
-            </a:pPr>
-            <a:r>
-              <a:rPr lang="en-US" sz="1250" dirty="0">
-                <a:solidFill>
-                  <a:srgbClr val="334155"/>
-                </a:solidFill>
-                <a:latin typeface="Calibri" pitchFamily="34" charset="0"/>
-                <a:ea typeface="Calibri" pitchFamily="34" charset="-122"/>
-                <a:cs typeface="Calibri" pitchFamily="34" charset="-120"/>
-              </a:rPr>
-              <a:t>Client concentration: keep no single issuer above 10% of revenue.</a:t>
-            </a:r>
-            <a:endParaRPr lang="en-US" sz="1250" dirty="0"/>
-          </a:p>
-        </p:txBody>
-      </p:sp>
-      <p:sp>
-        <p:nvSpPr>
-          <p:cNvPr id="11" name="Text 9"/>
-          <p:cNvSpPr/>
-          <p:nvPr/>
-        </p:nvSpPr>
-        <p:spPr>
-          <a:xfrm>
-            <a:off x="566928" y="6446520"/>
-            <a:ext cx="11064240" cy="301752"/>
-          </a:xfrm>
-          <a:prstGeom prst="rect">
-            <a:avLst/>
-          </a:prstGeom>
-          <a:noFill/>
-          <a:ln/>
-        </p:spPr>
-        <p:txBody>
-          <a:bodyPr wrap="square" rtlCol="0" anchor="ctr"/>
-          <a:lstStyle/>
-          <a:p>
-            <a:pPr indent="0" marL="0">
-              <a:buNone/>
-            </a:pPr>
-            <a:r>
-              <a:rPr lang="en-US" sz="900" i="1" dirty="0">
-                <a:solidFill>
-                  <a:srgbClr val="94A3B8"/>
-                </a:solidFill>
-                <a:latin typeface="Calibri" pitchFamily="34" charset="0"/>
-                <a:ea typeface="Calibri" pitchFamily="34" charset="-122"/>
-                <a:cs typeface="Calibri" pitchFamily="34" charset="-120"/>
-              </a:rPr>
-              <a:t>Source: Internal [1]. Brickwork history, brickworkratings.com [9].</a:t>
+              <a:t>Source: FY26 actual, Internal [1]. FY27 to FY29 modelled [1][2].</a:t>
             </a:r>
             <a:endParaRPr lang="en-US" sz="900" dirty="0"/>
           </a:p>
@@ -7637,6 +8425,1584 @@
                 <a:ea typeface="Calibri" pitchFamily="34" charset="-122"/>
                 <a:cs typeface="Calibri" pitchFamily="34" charset="-120"/>
               </a:rPr>
+              <a:t>INDUSTRY MAP</a:t>
+            </a:r>
+            <a:endParaRPr lang="en-US" sz="1100" dirty="0"/>
+          </a:p>
+        </p:txBody>
+      </p:sp>
+      <p:sp>
+        <p:nvSpPr>
+          <p:cNvPr id="4" name="Text 2"/>
+          <p:cNvSpPr/>
+          <p:nvPr/>
+        </p:nvSpPr>
+        <p:spPr>
+          <a:xfrm>
+            <a:off x="566928" y="694944"/>
+            <a:ext cx="11064240" cy="548640"/>
+          </a:xfrm>
+          <a:prstGeom prst="rect">
+            <a:avLst/>
+          </a:prstGeom>
+          <a:noFill/>
+          <a:ln/>
+        </p:spPr>
+        <p:txBody>
+          <a:bodyPr wrap="square" rtlCol="0" anchor="ctr"/>
+          <a:lstStyle/>
+          <a:p>
+            <a:pPr indent="0" marL="0">
+              <a:buNone/>
+            </a:pPr>
+            <a:r>
+              <a:rPr lang="en-US" sz="2900" b="1" dirty="0">
+                <a:solidFill>
+                  <a:srgbClr val="0F172A"/>
+                </a:solidFill>
+                <a:latin typeface="Cambria" pitchFamily="34" charset="0"/>
+                <a:ea typeface="Cambria" pitchFamily="34" charset="-122"/>
+                <a:cs typeface="Cambria" pitchFamily="34" charset="-120"/>
+              </a:rPr>
+              <a:t>What the CRAs earn, and our trajectory</a:t>
+            </a:r>
+            <a:endParaRPr lang="en-US" sz="2900" dirty="0"/>
+          </a:p>
+        </p:txBody>
+      </p:sp>
+      <p:sp>
+        <p:nvSpPr>
+          <p:cNvPr id="5" name="Text 3"/>
+          <p:cNvSpPr/>
+          <p:nvPr/>
+        </p:nvSpPr>
+        <p:spPr>
+          <a:xfrm>
+            <a:off x="566928" y="1298448"/>
+            <a:ext cx="11064240" cy="457200"/>
+          </a:xfrm>
+          <a:prstGeom prst="rect">
+            <a:avLst/>
+          </a:prstGeom>
+          <a:noFill/>
+          <a:ln/>
+        </p:spPr>
+        <p:txBody>
+          <a:bodyPr wrap="square" rtlCol="0" anchor="ctr"/>
+          <a:lstStyle/>
+          <a:p>
+            <a:pPr indent="0" marL="0">
+              <a:buNone/>
+            </a:pPr>
+            <a:r>
+              <a:rPr lang="en-US" sz="1400" dirty="0">
+                <a:solidFill>
+                  <a:srgbClr val="64748B"/>
+                </a:solidFill>
+                <a:latin typeface="Calibri" pitchFamily="34" charset="0"/>
+                <a:ea typeface="Calibri" pitchFamily="34" charset="-122"/>
+                <a:cs typeface="Calibri" pitchFamily="34" charset="-120"/>
+              </a:rPr>
+              <a:t>The Indian rating industry is about Rs 2,000 Cr. We enter small and climb a credible ladder.</a:t>
+            </a:r>
+            <a:endParaRPr lang="en-US" sz="1400" dirty="0"/>
+          </a:p>
+        </p:txBody>
+      </p:sp>
+      <p:sp>
+        <p:nvSpPr>
+          <p:cNvPr id="6" name="Text 4"/>
+          <p:cNvSpPr/>
+          <p:nvPr/>
+        </p:nvSpPr>
+        <p:spPr>
+          <a:xfrm>
+            <a:off x="566928" y="1371600"/>
+            <a:ext cx="5486400" cy="274320"/>
+          </a:xfrm>
+          <a:prstGeom prst="rect">
+            <a:avLst/>
+          </a:prstGeom>
+          <a:noFill/>
+          <a:ln/>
+        </p:spPr>
+        <p:txBody>
+          <a:bodyPr wrap="square" rtlCol="0" anchor="ctr"/>
+          <a:lstStyle/>
+          <a:p>
+            <a:pPr indent="0" marL="0">
+              <a:buNone/>
+            </a:pPr>
+            <a:r>
+              <a:rPr lang="en-US" sz="1200" b="1" dirty="0">
+                <a:solidFill>
+                  <a:srgbClr val="334155"/>
+                </a:solidFill>
+                <a:latin typeface="Calibri" pitchFamily="34" charset="0"/>
+                <a:ea typeface="Calibri" pitchFamily="34" charset="-122"/>
+                <a:cs typeface="Calibri" pitchFamily="34" charset="-120"/>
+              </a:rPr>
+              <a:t>Rating revenue, latest year (Rs Cr)</a:t>
+            </a:r>
+            <a:endParaRPr lang="en-US" sz="1200" dirty="0"/>
+          </a:p>
+        </p:txBody>
+      </p:sp>
+      <p:graphicFrame>
+        <p:nvGraphicFramePr>
+          <p:cNvPr id="7" name="Chart 0" descr=""/>
+          <p:cNvGraphicFramePr/>
+          <p:nvPr/>
+        </p:nvGraphicFramePr>
+        <p:xfrm>
+          <a:off x="566928" y="1691640"/>
+          <a:ext cx="5577840" cy="4206240"/>
+        </p:xfrm>
+        <a:graphic xmlns:a="http://schemas.openxmlformats.org/drawingml/2006/main">
+          <a:graphicData uri="http://schemas.openxmlformats.org/drawingml/2006/chart">
+            <c:chart xmlns:c="http://schemas.openxmlformats.org/drawingml/2006/chart" r:id="rId1"/>
+          </a:graphicData>
+        </a:graphic>
+      </p:graphicFrame>
+      <p:sp>
+        <p:nvSpPr>
+          <p:cNvPr id="8" name="Text 5"/>
+          <p:cNvSpPr/>
+          <p:nvPr/>
+        </p:nvSpPr>
+        <p:spPr>
+          <a:xfrm>
+            <a:off x="6400800" y="1371600"/>
+            <a:ext cx="5486400" cy="274320"/>
+          </a:xfrm>
+          <a:prstGeom prst="rect">
+            <a:avLst/>
+          </a:prstGeom>
+          <a:noFill/>
+          <a:ln/>
+        </p:spPr>
+        <p:txBody>
+          <a:bodyPr wrap="square" rtlCol="0" anchor="ctr"/>
+          <a:lstStyle/>
+          <a:p>
+            <a:pPr indent="0" marL="0">
+              <a:buNone/>
+            </a:pPr>
+            <a:r>
+              <a:rPr lang="en-US" sz="1200" b="1" dirty="0">
+                <a:solidFill>
+                  <a:srgbClr val="334155"/>
+                </a:solidFill>
+                <a:latin typeface="Calibri" pitchFamily="34" charset="0"/>
+                <a:ea typeface="Calibri" pitchFamily="34" charset="-122"/>
+                <a:cs typeface="Calibri" pitchFamily="34" charset="-120"/>
+              </a:rPr>
+              <a:t>Our revenue trajectory (Rs Cr), FY26 actual then projected</a:t>
+            </a:r>
+            <a:endParaRPr lang="en-US" sz="1200" dirty="0"/>
+          </a:p>
+        </p:txBody>
+      </p:sp>
+      <p:graphicFrame>
+        <p:nvGraphicFramePr>
+          <p:cNvPr id="9" name="Chart 1" descr=""/>
+          <p:cNvGraphicFramePr/>
+          <p:nvPr/>
+        </p:nvGraphicFramePr>
+        <p:xfrm>
+          <a:off x="6400800" y="1691640"/>
+          <a:ext cx="5394960" cy="4206240"/>
+        </p:xfrm>
+        <a:graphic xmlns:a="http://schemas.openxmlformats.org/drawingml/2006/main">
+          <a:graphicData uri="http://schemas.openxmlformats.org/drawingml/2006/chart">
+            <c:chart xmlns:c="http://schemas.openxmlformats.org/drawingml/2006/chart" r:id="rId2"/>
+          </a:graphicData>
+        </a:graphic>
+      </p:graphicFrame>
+      <p:sp>
+        <p:nvSpPr>
+          <p:cNvPr id="10" name="Text 6"/>
+          <p:cNvSpPr/>
+          <p:nvPr/>
+        </p:nvSpPr>
+        <p:spPr>
+          <a:xfrm>
+            <a:off x="566928" y="6446520"/>
+            <a:ext cx="11064240" cy="301752"/>
+          </a:xfrm>
+          <a:prstGeom prst="rect">
+            <a:avLst/>
+          </a:prstGeom>
+          <a:noFill/>
+          <a:ln/>
+        </p:spPr>
+        <p:txBody>
+          <a:bodyPr wrap="square" rtlCol="0" anchor="ctr"/>
+          <a:lstStyle/>
+          <a:p>
+            <a:pPr indent="0" marL="0">
+              <a:buNone/>
+            </a:pPr>
+            <a:r>
+              <a:rPr lang="en-US" sz="900" i="1" dirty="0">
+                <a:solidFill>
+                  <a:srgbClr val="94A3B8"/>
+                </a:solidFill>
+                <a:latin typeface="Calibri" pitchFamily="34" charset="0"/>
+                <a:ea typeface="Calibri" pitchFamily="34" charset="-122"/>
+                <a:cs typeface="Calibri" pitchFamily="34" charset="-120"/>
+              </a:rPr>
+              <a:t>Source: peer figures from official disclosures, CRISIL [3], CARE [5], India Ratings [6], Infomerics [7], Acuite [8]. ACER, Internal [1] and plan [2].</a:t>
+            </a:r>
+            <a:endParaRPr lang="en-US" sz="900" dirty="0"/>
+          </a:p>
+        </p:txBody>
+      </p:sp>
+    </p:spTree>
+  </p:cSld>
+  <p:clrMapOvr>
+    <a:masterClrMapping/>
+  </p:clrMapOvr>
+</p:sld>
+</file>
+
+<file path=ppt/slides/slide13.xml><?xml version="1.0" encoding="utf-8"?>
+<p:sld xmlns:a="http://schemas.openxmlformats.org/drawingml/2006/main" xmlns:r="http://schemas.openxmlformats.org/officeDocument/2006/relationships" xmlns:p="http://schemas.openxmlformats.org/presentationml/2006/main">
+  <p:cSld name="Slide 13">
+    <p:bg>
+      <p:bgPr>
+        <a:solidFill>
+          <a:srgbClr val="FFFFFF"/>
+        </a:solidFill>
+      </p:bgPr>
+    </p:bg>
+    <p:spTree>
+      <p:nvGrpSpPr>
+        <p:cNvPr id="1" name=""/>
+        <p:cNvGrpSpPr/>
+        <p:nvPr/>
+      </p:nvGrpSpPr>
+      <p:grpSpPr>
+        <a:xfrm>
+          <a:off x="0" y="0"/>
+          <a:ext cx="0" cy="0"/>
+          <a:chOff x="0" y="0"/>
+          <a:chExt cx="0" cy="0"/>
+        </a:xfrm>
+      </p:grpSpPr>
+      <p:sp>
+        <p:nvSpPr>
+          <p:cNvPr id="2" name="Text 0"/>
+          <p:cNvSpPr/>
+          <p:nvPr/>
+        </p:nvSpPr>
+        <p:spPr>
+          <a:xfrm>
+            <a:off x="11430000" y="402336"/>
+            <a:ext cx="365760" cy="274320"/>
+          </a:xfrm>
+          <a:prstGeom prst="rect">
+            <a:avLst/>
+          </a:prstGeom>
+          <a:noFill/>
+          <a:ln/>
+        </p:spPr>
+        <p:txBody>
+          <a:bodyPr wrap="square" rtlCol="0" anchor="ctr"/>
+          <a:lstStyle/>
+          <a:p>
+            <a:pPr algn="r" indent="0" marL="0">
+              <a:buNone/>
+            </a:pPr>
+            <a:r>
+              <a:rPr lang="en-US" sz="1100" b="1" dirty="0">
+                <a:solidFill>
+                  <a:srgbClr val="94A3B8"/>
+                </a:solidFill>
+                <a:latin typeface="Calibri" pitchFamily="34" charset="0"/>
+                <a:ea typeface="Calibri" pitchFamily="34" charset="-122"/>
+                <a:cs typeface="Calibri" pitchFamily="34" charset="-120"/>
+              </a:rPr>
+              <a:t>13</a:t>
+            </a:r>
+            <a:endParaRPr lang="en-US" sz="1100" dirty="0"/>
+          </a:p>
+        </p:txBody>
+      </p:sp>
+      <p:sp>
+        <p:nvSpPr>
+          <p:cNvPr id="3" name="Text 1"/>
+          <p:cNvSpPr/>
+          <p:nvPr/>
+        </p:nvSpPr>
+        <p:spPr>
+          <a:xfrm>
+            <a:off x="566928" y="438912"/>
+            <a:ext cx="10058400" cy="274320"/>
+          </a:xfrm>
+          <a:prstGeom prst="rect">
+            <a:avLst/>
+          </a:prstGeom>
+          <a:noFill/>
+          <a:ln/>
+        </p:spPr>
+        <p:txBody>
+          <a:bodyPr wrap="square" rtlCol="0" anchor="ctr"/>
+          <a:lstStyle/>
+          <a:p>
+            <a:pPr indent="0" marL="0">
+              <a:buNone/>
+            </a:pPr>
+            <a:r>
+              <a:rPr lang="en-US" sz="1100" b="1" spc="200" kern="0" dirty="0">
+                <a:solidFill>
+                  <a:srgbClr val="2B5CC4"/>
+                </a:solidFill>
+                <a:latin typeface="Calibri" pitchFamily="34" charset="0"/>
+                <a:ea typeface="Calibri" pitchFamily="34" charset="-122"/>
+                <a:cs typeface="Calibri" pitchFamily="34" charset="-120"/>
+              </a:rPr>
+              <a:t>MARKET OPPORTUNITY</a:t>
+            </a:r>
+            <a:endParaRPr lang="en-US" sz="1100" dirty="0"/>
+          </a:p>
+        </p:txBody>
+      </p:sp>
+      <p:sp>
+        <p:nvSpPr>
+          <p:cNvPr id="4" name="Text 2"/>
+          <p:cNvSpPr/>
+          <p:nvPr/>
+        </p:nvSpPr>
+        <p:spPr>
+          <a:xfrm>
+            <a:off x="566928" y="694944"/>
+            <a:ext cx="11064240" cy="548640"/>
+          </a:xfrm>
+          <a:prstGeom prst="rect">
+            <a:avLst/>
+          </a:prstGeom>
+          <a:noFill/>
+          <a:ln/>
+        </p:spPr>
+        <p:txBody>
+          <a:bodyPr wrap="square" rtlCol="0" anchor="ctr"/>
+          <a:lstStyle/>
+          <a:p>
+            <a:pPr indent="0" marL="0">
+              <a:buNone/>
+            </a:pPr>
+            <a:r>
+              <a:rPr lang="en-US" sz="2900" b="1" dirty="0">
+                <a:solidFill>
+                  <a:srgbClr val="0F172A"/>
+                </a:solidFill>
+                <a:latin typeface="Cambria" pitchFamily="34" charset="0"/>
+                <a:ea typeface="Cambria" pitchFamily="34" charset="-122"/>
+                <a:cs typeface="Cambria" pitchFamily="34" charset="-120"/>
+              </a:rPr>
+              <a:t>Where ACER stands, and what it earns in FY28</a:t>
+            </a:r>
+            <a:endParaRPr lang="en-US" sz="2900" dirty="0"/>
+          </a:p>
+        </p:txBody>
+      </p:sp>
+      <p:sp>
+        <p:nvSpPr>
+          <p:cNvPr id="5" name="Text 3"/>
+          <p:cNvSpPr/>
+          <p:nvPr/>
+        </p:nvSpPr>
+        <p:spPr>
+          <a:xfrm>
+            <a:off x="566928" y="1417320"/>
+            <a:ext cx="5486400" cy="274320"/>
+          </a:xfrm>
+          <a:prstGeom prst="rect">
+            <a:avLst/>
+          </a:prstGeom>
+          <a:noFill/>
+          <a:ln/>
+        </p:spPr>
+        <p:txBody>
+          <a:bodyPr wrap="square" rtlCol="0" anchor="ctr"/>
+          <a:lstStyle/>
+          <a:p>
+            <a:pPr indent="0" marL="0">
+              <a:buNone/>
+            </a:pPr>
+            <a:r>
+              <a:rPr lang="en-US" sz="1200" b="1" dirty="0">
+                <a:solidFill>
+                  <a:srgbClr val="334155"/>
+                </a:solidFill>
+                <a:latin typeface="Calibri" pitchFamily="34" charset="0"/>
+                <a:ea typeface="Calibri" pitchFamily="34" charset="-122"/>
+                <a:cs typeface="Calibri" pitchFamily="34" charset="-120"/>
+              </a:rPr>
+              <a:t>Market size, TAM SAM SOM</a:t>
+            </a:r>
+            <a:endParaRPr lang="en-US" sz="1200" dirty="0"/>
+          </a:p>
+        </p:txBody>
+      </p:sp>
+      <p:sp>
+        <p:nvSpPr>
+          <p:cNvPr id="6" name="Shape 4"/>
+          <p:cNvSpPr/>
+          <p:nvPr/>
+        </p:nvSpPr>
+        <p:spPr>
+          <a:xfrm>
+            <a:off x="777240" y="2651760"/>
+            <a:ext cx="3017520" cy="3017520"/>
+          </a:xfrm>
+          <a:prstGeom prst="ellipse">
+            <a:avLst/>
+          </a:prstGeom>
+          <a:solidFill>
+            <a:srgbClr val="EEF2F9"/>
+          </a:solidFill>
+          <a:ln w="12700">
+            <a:solidFill>
+              <a:srgbClr val="CBD5E1"/>
+            </a:solidFill>
+            <a:prstDash val="solid"/>
+          </a:ln>
+        </p:spPr>
+      </p:sp>
+      <p:sp>
+        <p:nvSpPr>
+          <p:cNvPr id="7" name="Shape 5"/>
+          <p:cNvSpPr/>
+          <p:nvPr/>
+        </p:nvSpPr>
+        <p:spPr>
+          <a:xfrm>
+            <a:off x="1531620" y="4160520"/>
+            <a:ext cx="1508760" cy="1508760"/>
+          </a:xfrm>
+          <a:prstGeom prst="ellipse">
+            <a:avLst/>
+          </a:prstGeom>
+          <a:solidFill>
+            <a:srgbClr val="DBE6FB"/>
+          </a:solidFill>
+          <a:ln w="12700">
+            <a:solidFill>
+              <a:srgbClr val="2B5CC4"/>
+            </a:solidFill>
+            <a:prstDash val="solid"/>
+          </a:ln>
+        </p:spPr>
+      </p:sp>
+      <p:sp>
+        <p:nvSpPr>
+          <p:cNvPr id="8" name="Shape 6"/>
+          <p:cNvSpPr/>
+          <p:nvPr/>
+        </p:nvSpPr>
+        <p:spPr>
+          <a:xfrm>
+            <a:off x="2157984" y="5413248"/>
+            <a:ext cx="256032" cy="256032"/>
+          </a:xfrm>
+          <a:prstGeom prst="ellipse">
+            <a:avLst/>
+          </a:prstGeom>
+          <a:solidFill>
+            <a:srgbClr val="0F766E"/>
+          </a:solidFill>
+          <a:ln w="12700">
+            <a:solidFill>
+              <a:srgbClr val="0F766E"/>
+            </a:solidFill>
+            <a:prstDash val="solid"/>
+          </a:ln>
+        </p:spPr>
+      </p:sp>
+      <p:sp>
+        <p:nvSpPr>
+          <p:cNvPr id="9" name="Text 7"/>
+          <p:cNvSpPr/>
+          <p:nvPr/>
+        </p:nvSpPr>
+        <p:spPr>
+          <a:xfrm>
+            <a:off x="4297680" y="1874520"/>
+            <a:ext cx="3291840" cy="548640"/>
+          </a:xfrm>
+          <a:prstGeom prst="rect">
+            <a:avLst/>
+          </a:prstGeom>
+          <a:noFill/>
+          <a:ln/>
+        </p:spPr>
+        <p:txBody>
+          <a:bodyPr wrap="square" rtlCol="0" anchor="t"/>
+          <a:lstStyle/>
+          <a:p>
+            <a:pPr indent="0" marL="0">
+              <a:buNone/>
+            </a:pPr>
+            <a:r>
+              <a:rPr lang="en-US" sz="1300" b="1" dirty="0">
+                <a:solidFill>
+                  <a:srgbClr val="0F172A"/>
+                </a:solidFill>
+                <a:latin typeface="Calibri" pitchFamily="34" charset="0"/>
+                <a:ea typeface="Calibri" pitchFamily="34" charset="-122"/>
+                <a:cs typeface="Calibri" pitchFamily="34" charset="-120"/>
+              </a:rPr>
+              <a:t>TAM  Rs 2,000 Cr
+</a:t>
+            </a:r>
+            <a:pPr indent="0" marL="0">
+              <a:buNone/>
+            </a:pPr>
+            <a:r>
+              <a:rPr lang="en-US" sz="1100" dirty="0">
+                <a:solidFill>
+                  <a:srgbClr val="64748B"/>
+                </a:solidFill>
+                <a:latin typeface="Calibri" pitchFamily="34" charset="0"/>
+                <a:ea typeface="Calibri" pitchFamily="34" charset="-122"/>
+                <a:cs typeface="Calibri" pitchFamily="34" charset="-120"/>
+              </a:rPr>
+              <a:t>whole rating industry</a:t>
+            </a:r>
+            <a:endParaRPr lang="en-US" sz="1300" dirty="0"/>
+          </a:p>
+        </p:txBody>
+      </p:sp>
+      <p:sp>
+        <p:nvSpPr>
+          <p:cNvPr id="10" name="Text 8"/>
+          <p:cNvSpPr/>
+          <p:nvPr/>
+        </p:nvSpPr>
+        <p:spPr>
+          <a:xfrm>
+            <a:off x="4297680" y="3063240"/>
+            <a:ext cx="3291840" cy="548640"/>
+          </a:xfrm>
+          <a:prstGeom prst="rect">
+            <a:avLst/>
+          </a:prstGeom>
+          <a:noFill/>
+          <a:ln/>
+        </p:spPr>
+        <p:txBody>
+          <a:bodyPr wrap="square" rtlCol="0" anchor="t"/>
+          <a:lstStyle/>
+          <a:p>
+            <a:pPr indent="0" marL="0">
+              <a:buNone/>
+            </a:pPr>
+            <a:r>
+              <a:rPr lang="en-US" sz="1300" b="1" dirty="0">
+                <a:solidFill>
+                  <a:srgbClr val="2B5CC4"/>
+                </a:solidFill>
+                <a:latin typeface="Calibri" pitchFamily="34" charset="0"/>
+                <a:ea typeface="Calibri" pitchFamily="34" charset="-122"/>
+                <a:cs typeface="Calibri" pitchFamily="34" charset="-120"/>
+              </a:rPr>
+              <a:t>SAM  Rs 500 Cr
+</a:t>
+            </a:r>
+            <a:pPr indent="0" marL="0">
+              <a:buNone/>
+            </a:pPr>
+            <a:r>
+              <a:rPr lang="en-US" sz="1100" dirty="0">
+                <a:solidFill>
+                  <a:srgbClr val="64748B"/>
+                </a:solidFill>
+                <a:latin typeface="Calibri" pitchFamily="34" charset="0"/>
+                <a:ea typeface="Calibri" pitchFamily="34" charset="-122"/>
+                <a:cs typeface="Calibri" pitchFamily="34" charset="-120"/>
+              </a:rPr>
+              <a:t>Rs 100 Cr+ BLR segment</a:t>
+            </a:r>
+            <a:endParaRPr lang="en-US" sz="1300" dirty="0"/>
+          </a:p>
+        </p:txBody>
+      </p:sp>
+      <p:sp>
+        <p:nvSpPr>
+          <p:cNvPr id="11" name="Text 9"/>
+          <p:cNvSpPr/>
+          <p:nvPr/>
+        </p:nvSpPr>
+        <p:spPr>
+          <a:xfrm>
+            <a:off x="4297680" y="4251960"/>
+            <a:ext cx="3383280" cy="731520"/>
+          </a:xfrm>
+          <a:prstGeom prst="rect">
+            <a:avLst/>
+          </a:prstGeom>
+          <a:noFill/>
+          <a:ln/>
+        </p:spPr>
+        <p:txBody>
+          <a:bodyPr wrap="square" rtlCol="0" anchor="t"/>
+          <a:lstStyle/>
+          <a:p>
+            <a:pPr indent="0" marL="0">
+              <a:buNone/>
+            </a:pPr>
+            <a:r>
+              <a:rPr lang="en-US" sz="1300" b="1" dirty="0">
+                <a:solidFill>
+                  <a:srgbClr val="0F766E"/>
+                </a:solidFill>
+                <a:latin typeface="Calibri" pitchFamily="34" charset="0"/>
+                <a:ea typeface="Calibri" pitchFamily="34" charset="-122"/>
+                <a:cs typeface="Calibri" pitchFamily="34" charset="-120"/>
+              </a:rPr>
+              <a:t>SOM  Rs 8 Cr
+</a:t>
+            </a:r>
+            <a:pPr indent="0" marL="0">
+              <a:buNone/>
+            </a:pPr>
+            <a:r>
+              <a:rPr lang="en-US" sz="1100" dirty="0">
+                <a:solidFill>
+                  <a:srgbClr val="64748B"/>
+                </a:solidFill>
+                <a:latin typeface="Calibri" pitchFamily="34" charset="0"/>
+                <a:ea typeface="Calibri" pitchFamily="34" charset="-122"/>
+                <a:cs typeface="Calibri" pitchFamily="34" charset="-120"/>
+              </a:rPr>
+              <a:t>ACER FY28, about 0.4%, rising toward 0.8% by FY30</a:t>
+            </a:r>
+            <a:endParaRPr lang="en-US" sz="1300" dirty="0"/>
+          </a:p>
+        </p:txBody>
+      </p:sp>
+      <p:sp>
+        <p:nvSpPr>
+          <p:cNvPr id="12" name="Text 10"/>
+          <p:cNvSpPr/>
+          <p:nvPr/>
+        </p:nvSpPr>
+        <p:spPr>
+          <a:xfrm>
+            <a:off x="7863840" y="1417320"/>
+            <a:ext cx="3931920" cy="274320"/>
+          </a:xfrm>
+          <a:prstGeom prst="rect">
+            <a:avLst/>
+          </a:prstGeom>
+          <a:noFill/>
+          <a:ln/>
+        </p:spPr>
+        <p:txBody>
+          <a:bodyPr wrap="square" rtlCol="0" anchor="ctr"/>
+          <a:lstStyle/>
+          <a:p>
+            <a:pPr indent="0" marL="0">
+              <a:buNone/>
+            </a:pPr>
+            <a:r>
+              <a:rPr lang="en-US" sz="1200" b="1" dirty="0">
+                <a:solidFill>
+                  <a:srgbClr val="334155"/>
+                </a:solidFill>
+                <a:latin typeface="Calibri" pitchFamily="34" charset="0"/>
+                <a:ea typeface="Calibri" pitchFamily="34" charset="-122"/>
+                <a:cs typeface="Calibri" pitchFamily="34" charset="-120"/>
+              </a:rPr>
+              <a:t>What ACER earns in FY28, Rs 8.3 Cr</a:t>
+            </a:r>
+            <a:endParaRPr lang="en-US" sz="1200" dirty="0"/>
+          </a:p>
+        </p:txBody>
+      </p:sp>
+      <p:graphicFrame>
+        <p:nvGraphicFramePr>
+          <p:cNvPr id="13" name="Chart 0" descr=""/>
+          <p:cNvGraphicFramePr/>
+          <p:nvPr/>
+        </p:nvGraphicFramePr>
+        <p:xfrm>
+          <a:off x="7680960" y="1737360"/>
+          <a:ext cx="4114800" cy="3108960"/>
+        </p:xfrm>
+        <a:graphic xmlns:a="http://schemas.openxmlformats.org/drawingml/2006/main">
+          <a:graphicData uri="http://schemas.openxmlformats.org/drawingml/2006/chart">
+            <c:chart xmlns:c="http://schemas.openxmlformats.org/drawingml/2006/chart" r:id="rId1"/>
+          </a:graphicData>
+        </a:graphic>
+      </p:graphicFrame>
+      <p:sp>
+        <p:nvSpPr>
+          <p:cNvPr id="14" name="Text 11"/>
+          <p:cNvSpPr/>
+          <p:nvPr/>
+        </p:nvSpPr>
+        <p:spPr>
+          <a:xfrm>
+            <a:off x="8732520" y="2971800"/>
+            <a:ext cx="2011680" cy="320040"/>
+          </a:xfrm>
+          <a:prstGeom prst="rect">
+            <a:avLst/>
+          </a:prstGeom>
+          <a:noFill/>
+          <a:ln/>
+        </p:spPr>
+        <p:txBody>
+          <a:bodyPr wrap="square" rtlCol="0" anchor="ctr"/>
+          <a:lstStyle/>
+          <a:p>
+            <a:pPr algn="ctr" indent="0" marL="0">
+              <a:buNone/>
+            </a:pPr>
+            <a:r>
+              <a:rPr lang="en-US" sz="1500" b="1" dirty="0">
+                <a:solidFill>
+                  <a:srgbClr val="0F172A"/>
+                </a:solidFill>
+                <a:latin typeface="Cambria" pitchFamily="34" charset="0"/>
+                <a:ea typeface="Cambria" pitchFamily="34" charset="-122"/>
+                <a:cs typeface="Cambria" pitchFamily="34" charset="-120"/>
+              </a:rPr>
+              <a:t>Rs 8.3 Cr</a:t>
+            </a:r>
+            <a:endParaRPr lang="en-US" sz="1500" dirty="0"/>
+          </a:p>
+        </p:txBody>
+      </p:sp>
+      <p:sp>
+        <p:nvSpPr>
+          <p:cNvPr id="15" name="Text 12"/>
+          <p:cNvSpPr/>
+          <p:nvPr/>
+        </p:nvSpPr>
+        <p:spPr>
+          <a:xfrm>
+            <a:off x="7680960" y="4937760"/>
+            <a:ext cx="4114800" cy="1188720"/>
+          </a:xfrm>
+          <a:prstGeom prst="rect">
+            <a:avLst/>
+          </a:prstGeom>
+          <a:noFill/>
+          <a:ln/>
+        </p:spPr>
+        <p:txBody>
+          <a:bodyPr wrap="square" rtlCol="0" anchor="t"/>
+          <a:lstStyle/>
+          <a:p>
+            <a:pPr indent="0" marL="0">
+              <a:buNone/>
+            </a:pPr>
+            <a:r>
+              <a:rPr lang="en-US" sz="1150" dirty="0">
+                <a:solidFill>
+                  <a:srgbClr val="334155"/>
+                </a:solidFill>
+                <a:latin typeface="Calibri" pitchFamily="34" charset="0"/>
+                <a:ea typeface="Calibri" pitchFamily="34" charset="-122"/>
+                <a:cs typeface="Calibri" pitchFamily="34" charset="-120"/>
+              </a:rPr>
+              <a:t>BLR initial fees Rs 5.76 Cr, surveillance Rs 1.44 Cr, existing ratings Rs 1.10 Cr. About 0.4% of the Rs 2,000 Cr industry, a deliberately modest and credible first slice.</a:t>
+            </a:r>
+            <a:endParaRPr lang="en-US" sz="1150" dirty="0"/>
+          </a:p>
+        </p:txBody>
+      </p:sp>
+      <p:sp>
+        <p:nvSpPr>
+          <p:cNvPr id="16" name="Text 13"/>
+          <p:cNvSpPr/>
+          <p:nvPr/>
+        </p:nvSpPr>
+        <p:spPr>
+          <a:xfrm>
+            <a:off x="566928" y="6446520"/>
+            <a:ext cx="11064240" cy="301752"/>
+          </a:xfrm>
+          <a:prstGeom prst="rect">
+            <a:avLst/>
+          </a:prstGeom>
+          <a:noFill/>
+          <a:ln/>
+        </p:spPr>
+        <p:txBody>
+          <a:bodyPr wrap="square" rtlCol="0" anchor="ctr"/>
+          <a:lstStyle/>
+          <a:p>
+            <a:pPr indent="0" marL="0">
+              <a:buNone/>
+            </a:pPr>
+            <a:r>
+              <a:rPr lang="en-US" sz="900" i="1" dirty="0">
+                <a:solidFill>
+                  <a:srgbClr val="94A3B8"/>
+                </a:solidFill>
+                <a:latin typeface="Calibri" pitchFamily="34" charset="0"/>
+                <a:ea typeface="Calibri" pitchFamily="34" charset="-122"/>
+                <a:cs typeface="Calibri" pitchFamily="34" charset="-120"/>
+              </a:rPr>
+              <a:t>Source: TAM and SAM are analyst estimates from official rating segment revenues [3][5][6]. ACER FY28 from this plan's model [1][2].</a:t>
+            </a:r>
+            <a:endParaRPr lang="en-US" sz="900" dirty="0"/>
+          </a:p>
+        </p:txBody>
+      </p:sp>
+    </p:spTree>
+  </p:cSld>
+  <p:clrMapOvr>
+    <a:masterClrMapping/>
+  </p:clrMapOvr>
+</p:sld>
+</file>
+
+<file path=ppt/slides/slide14.xml><?xml version="1.0" encoding="utf-8"?>
+<p:sld xmlns:a="http://schemas.openxmlformats.org/drawingml/2006/main" xmlns:r="http://schemas.openxmlformats.org/officeDocument/2006/relationships" xmlns:p="http://schemas.openxmlformats.org/presentationml/2006/main">
+  <p:cSld name="Slide 14">
+    <p:bg>
+      <p:bgPr>
+        <a:solidFill>
+          <a:srgbClr val="FFFFFF"/>
+        </a:solidFill>
+      </p:bgPr>
+    </p:bg>
+    <p:spTree>
+      <p:nvGrpSpPr>
+        <p:cNvPr id="1" name=""/>
+        <p:cNvGrpSpPr/>
+        <p:nvPr/>
+      </p:nvGrpSpPr>
+      <p:grpSpPr>
+        <a:xfrm>
+          <a:off x="0" y="0"/>
+          <a:ext cx="0" cy="0"/>
+          <a:chOff x="0" y="0"/>
+          <a:chExt cx="0" cy="0"/>
+        </a:xfrm>
+      </p:grpSpPr>
+      <p:sp>
+        <p:nvSpPr>
+          <p:cNvPr id="2" name="Text 0"/>
+          <p:cNvSpPr/>
+          <p:nvPr/>
+        </p:nvSpPr>
+        <p:spPr>
+          <a:xfrm>
+            <a:off x="11430000" y="402336"/>
+            <a:ext cx="365760" cy="274320"/>
+          </a:xfrm>
+          <a:prstGeom prst="rect">
+            <a:avLst/>
+          </a:prstGeom>
+          <a:noFill/>
+          <a:ln/>
+        </p:spPr>
+        <p:txBody>
+          <a:bodyPr wrap="square" rtlCol="0" anchor="ctr"/>
+          <a:lstStyle/>
+          <a:p>
+            <a:pPr algn="r" indent="0" marL="0">
+              <a:buNone/>
+            </a:pPr>
+            <a:r>
+              <a:rPr lang="en-US" sz="1100" b="1" dirty="0">
+                <a:solidFill>
+                  <a:srgbClr val="94A3B8"/>
+                </a:solidFill>
+                <a:latin typeface="Calibri" pitchFamily="34" charset="0"/>
+                <a:ea typeface="Calibri" pitchFamily="34" charset="-122"/>
+                <a:cs typeface="Calibri" pitchFamily="34" charset="-120"/>
+              </a:rPr>
+              <a:t>14</a:t>
+            </a:r>
+            <a:endParaRPr lang="en-US" sz="1100" dirty="0"/>
+          </a:p>
+        </p:txBody>
+      </p:sp>
+      <p:sp>
+        <p:nvSpPr>
+          <p:cNvPr id="3" name="Text 1"/>
+          <p:cNvSpPr/>
+          <p:nvPr/>
+        </p:nvSpPr>
+        <p:spPr>
+          <a:xfrm>
+            <a:off x="566928" y="438912"/>
+            <a:ext cx="10058400" cy="274320"/>
+          </a:xfrm>
+          <a:prstGeom prst="rect">
+            <a:avLst/>
+          </a:prstGeom>
+          <a:noFill/>
+          <a:ln/>
+        </p:spPr>
+        <p:txBody>
+          <a:bodyPr wrap="square" rtlCol="0" anchor="ctr"/>
+          <a:lstStyle/>
+          <a:p>
+            <a:pPr indent="0" marL="0">
+              <a:buNone/>
+            </a:pPr>
+            <a:r>
+              <a:rPr lang="en-US" sz="1100" b="1" spc="200" kern="0" dirty="0">
+                <a:solidFill>
+                  <a:srgbClr val="2B5CC4"/>
+                </a:solidFill>
+                <a:latin typeface="Calibri" pitchFamily="34" charset="0"/>
+                <a:ea typeface="Calibri" pitchFamily="34" charset="-122"/>
+                <a:cs typeface="Calibri" pitchFamily="34" charset="-120"/>
+              </a:rPr>
+              <a:t>EXECUTION</a:t>
+            </a:r>
+            <a:endParaRPr lang="en-US" sz="1100" dirty="0"/>
+          </a:p>
+        </p:txBody>
+      </p:sp>
+      <p:sp>
+        <p:nvSpPr>
+          <p:cNvPr id="4" name="Text 2"/>
+          <p:cNvSpPr/>
+          <p:nvPr/>
+        </p:nvSpPr>
+        <p:spPr>
+          <a:xfrm>
+            <a:off x="566928" y="694944"/>
+            <a:ext cx="11064240" cy="548640"/>
+          </a:xfrm>
+          <a:prstGeom prst="rect">
+            <a:avLst/>
+          </a:prstGeom>
+          <a:noFill/>
+          <a:ln/>
+        </p:spPr>
+        <p:txBody>
+          <a:bodyPr wrap="square" rtlCol="0" anchor="ctr"/>
+          <a:lstStyle/>
+          <a:p>
+            <a:pPr indent="0" marL="0">
+              <a:buNone/>
+            </a:pPr>
+            <a:r>
+              <a:rPr lang="en-US" sz="2900" b="1" dirty="0">
+                <a:solidFill>
+                  <a:srgbClr val="0F172A"/>
+                </a:solidFill>
+                <a:latin typeface="Cambria" pitchFamily="34" charset="0"/>
+                <a:ea typeface="Cambria" pitchFamily="34" charset="-122"/>
+                <a:cs typeface="Cambria" pitchFamily="34" charset="-120"/>
+              </a:rPr>
+              <a:t>Milestones, KPIs and risks</a:t>
+            </a:r>
+            <a:endParaRPr lang="en-US" sz="2900" dirty="0"/>
+          </a:p>
+        </p:txBody>
+      </p:sp>
+      <p:sp>
+        <p:nvSpPr>
+          <p:cNvPr id="5" name="Text 3"/>
+          <p:cNvSpPr/>
+          <p:nvPr/>
+        </p:nvSpPr>
+        <p:spPr>
+          <a:xfrm>
+            <a:off x="566928" y="1417320"/>
+            <a:ext cx="5486400" cy="274320"/>
+          </a:xfrm>
+          <a:prstGeom prst="rect">
+            <a:avLst/>
+          </a:prstGeom>
+          <a:noFill/>
+          <a:ln/>
+        </p:spPr>
+        <p:txBody>
+          <a:bodyPr wrap="square" rtlCol="0" anchor="ctr"/>
+          <a:lstStyle/>
+          <a:p>
+            <a:pPr indent="0" marL="0">
+              <a:buNone/>
+            </a:pPr>
+            <a:r>
+              <a:rPr lang="en-US" sz="1300" b="1" dirty="0">
+                <a:solidFill>
+                  <a:srgbClr val="2B5CC4"/>
+                </a:solidFill>
+                <a:latin typeface="Calibri" pitchFamily="34" charset="0"/>
+                <a:ea typeface="Calibri" pitchFamily="34" charset="-122"/>
+                <a:cs typeface="Calibri" pitchFamily="34" charset="-120"/>
+              </a:rPr>
+              <a:t>Milestones (base case)</a:t>
+            </a:r>
+            <a:endParaRPr lang="en-US" sz="1300" dirty="0"/>
+          </a:p>
+        </p:txBody>
+      </p:sp>
+      <p:sp>
+        <p:nvSpPr>
+          <p:cNvPr id="6" name="Text 4"/>
+          <p:cNvSpPr/>
+          <p:nvPr/>
+        </p:nvSpPr>
+        <p:spPr>
+          <a:xfrm>
+            <a:off x="566928" y="1737360"/>
+            <a:ext cx="5394960" cy="2286000"/>
+          </a:xfrm>
+          <a:prstGeom prst="rect">
+            <a:avLst/>
+          </a:prstGeom>
+          <a:noFill/>
+          <a:ln/>
+        </p:spPr>
+        <p:txBody>
+          <a:bodyPr wrap="square" rtlCol="0" anchor="t"/>
+          <a:lstStyle/>
+          <a:p>
+            <a:pPr marL="177800" indent="-177800">
+              <a:spcAft>
+                <a:spcPts val="700"/>
+              </a:spcAft>
+              <a:buSzPct val="100000"/>
+              <a:buChar char="•"/>
+            </a:pPr>
+            <a:r>
+              <a:rPr lang="en-US" sz="1250" dirty="0">
+                <a:solidFill>
+                  <a:srgbClr val="334155"/>
+                </a:solidFill>
+                <a:latin typeface="Calibri" pitchFamily="34" charset="0"/>
+                <a:ea typeface="Calibri" pitchFamily="34" charset="-122"/>
+                <a:cs typeface="Calibri" pitchFamily="34" charset="-120"/>
+              </a:rPr>
+              <a:t>Now: SEBI registered, two hires and four BDs onboarding.</a:t>
+            </a:r>
+            <a:endParaRPr lang="en-US" sz="1250" dirty="0"/>
+          </a:p>
+          <a:p>
+            <a:pPr marL="177800" indent="-177800">
+              <a:spcAft>
+                <a:spcPts val="700"/>
+              </a:spcAft>
+              <a:buSzPct val="100000"/>
+              <a:buChar char="•"/>
+            </a:pPr>
+            <a:r>
+              <a:rPr lang="en-US" sz="1250" dirty="0">
+                <a:solidFill>
+                  <a:srgbClr val="334155"/>
+                </a:solidFill>
+                <a:latin typeface="Calibri" pitchFamily="34" charset="0"/>
+                <a:ea typeface="Calibri" pitchFamily="34" charset="-122"/>
+                <a:cs typeface="Calibri" pitchFamily="34" charset="-120"/>
+              </a:rPr>
+              <a:t>Q2: pursue RBI ECAI accreditation, build the BD pipeline.</a:t>
+            </a:r>
+            <a:endParaRPr lang="en-US" sz="1250" dirty="0"/>
+          </a:p>
+          <a:p>
+            <a:pPr marL="177800" indent="-177800">
+              <a:spcAft>
+                <a:spcPts val="700"/>
+              </a:spcAft>
+              <a:buSzPct val="100000"/>
+              <a:buChar char="•"/>
+            </a:pPr>
+            <a:r>
+              <a:rPr lang="en-US" sz="1250" dirty="0">
+                <a:solidFill>
+                  <a:srgbClr val="334155"/>
+                </a:solidFill>
+                <a:latin typeface="Calibri" pitchFamily="34" charset="0"/>
+                <a:ea typeface="Calibri" pitchFamily="34" charset="-122"/>
+                <a:cs typeface="Calibri" pitchFamily="34" charset="-120"/>
+              </a:rPr>
+              <a:t>1 Oct: BLR live, first mandates.</a:t>
+            </a:r>
+            <a:endParaRPr lang="en-US" sz="1250" dirty="0"/>
+          </a:p>
+          <a:p>
+            <a:pPr marL="177800" indent="-177800">
+              <a:spcAft>
+                <a:spcPts val="700"/>
+              </a:spcAft>
+              <a:buSzPct val="100000"/>
+              <a:buChar char="•"/>
+            </a:pPr>
+            <a:r>
+              <a:rPr lang="en-US" sz="1250" dirty="0">
+                <a:solidFill>
+                  <a:srgbClr val="334155"/>
+                </a:solidFill>
+                <a:latin typeface="Calibri" pitchFamily="34" charset="0"/>
+                <a:ea typeface="Calibri" pitchFamily="34" charset="-122"/>
+                <a:cs typeface="Calibri" pitchFamily="34" charset="-120"/>
+              </a:rPr>
+              <a:t>Q3 to Q4: ramp to 16 per month, reach break even.</a:t>
+            </a:r>
+            <a:endParaRPr lang="en-US" sz="1250" dirty="0"/>
+          </a:p>
+          <a:p>
+            <a:pPr marL="177800" indent="-177800">
+              <a:spcAft>
+                <a:spcPts val="700"/>
+              </a:spcAft>
+              <a:buSzPct val="100000"/>
+              <a:buChar char="•"/>
+            </a:pPr>
+            <a:r>
+              <a:rPr lang="en-US" sz="1250" dirty="0">
+                <a:solidFill>
+                  <a:srgbClr val="334155"/>
+                </a:solidFill>
+                <a:latin typeface="Calibri" pitchFamily="34" charset="0"/>
+                <a:ea typeface="Calibri" pitchFamily="34" charset="-122"/>
+                <a:cs typeface="Calibri" pitchFamily="34" charset="-120"/>
+              </a:rPr>
+              <a:t>FY28: full year of BLR, surveillance annuity, profitability.</a:t>
+            </a:r>
+            <a:endParaRPr lang="en-US" sz="1250" dirty="0"/>
+          </a:p>
+        </p:txBody>
+      </p:sp>
+      <p:sp>
+        <p:nvSpPr>
+          <p:cNvPr id="7" name="Text 5"/>
+          <p:cNvSpPr/>
+          <p:nvPr/>
+        </p:nvSpPr>
+        <p:spPr>
+          <a:xfrm>
+            <a:off x="566928" y="4114800"/>
+            <a:ext cx="5486400" cy="274320"/>
+          </a:xfrm>
+          <a:prstGeom prst="rect">
+            <a:avLst/>
+          </a:prstGeom>
+          <a:noFill/>
+          <a:ln/>
+        </p:spPr>
+        <p:txBody>
+          <a:bodyPr wrap="square" rtlCol="0" anchor="ctr"/>
+          <a:lstStyle/>
+          <a:p>
+            <a:pPr indent="0" marL="0">
+              <a:buNone/>
+            </a:pPr>
+            <a:r>
+              <a:rPr lang="en-US" sz="1300" b="1" dirty="0">
+                <a:solidFill>
+                  <a:srgbClr val="2B5CC4"/>
+                </a:solidFill>
+                <a:latin typeface="Calibri" pitchFamily="34" charset="0"/>
+                <a:ea typeface="Calibri" pitchFamily="34" charset="-122"/>
+                <a:cs typeface="Calibri" pitchFamily="34" charset="-120"/>
+              </a:rPr>
+              <a:t>KPIs the Board will see</a:t>
+            </a:r>
+            <a:endParaRPr lang="en-US" sz="1300" dirty="0"/>
+          </a:p>
+        </p:txBody>
+      </p:sp>
+      <p:sp>
+        <p:nvSpPr>
+          <p:cNvPr id="8" name="Text 6"/>
+          <p:cNvSpPr/>
+          <p:nvPr/>
+        </p:nvSpPr>
+        <p:spPr>
+          <a:xfrm>
+            <a:off x="566928" y="4434840"/>
+            <a:ext cx="5394960" cy="1737360"/>
+          </a:xfrm>
+          <a:prstGeom prst="rect">
+            <a:avLst/>
+          </a:prstGeom>
+          <a:noFill/>
+          <a:ln/>
+        </p:spPr>
+        <p:txBody>
+          <a:bodyPr wrap="square" rtlCol="0" anchor="t"/>
+          <a:lstStyle/>
+          <a:p>
+            <a:pPr marL="177800" indent="-177800">
+              <a:spcAft>
+                <a:spcPts val="700"/>
+              </a:spcAft>
+              <a:buSzPct val="100000"/>
+              <a:buChar char="•"/>
+            </a:pPr>
+            <a:r>
+              <a:rPr lang="en-US" sz="1250" dirty="0">
+                <a:solidFill>
+                  <a:srgbClr val="334155"/>
+                </a:solidFill>
+                <a:latin typeface="Calibri" pitchFamily="34" charset="0"/>
+                <a:ea typeface="Calibri" pitchFamily="34" charset="-122"/>
+                <a:cs typeface="Calibri" pitchFamily="34" charset="-120"/>
+              </a:rPr>
+              <a:t>Mandates per month and cumulative rated debt.</a:t>
+            </a:r>
+            <a:endParaRPr lang="en-US" sz="1250" dirty="0"/>
+          </a:p>
+          <a:p>
+            <a:pPr marL="177800" indent="-177800">
+              <a:spcAft>
+                <a:spcPts val="700"/>
+              </a:spcAft>
+              <a:buSzPct val="100000"/>
+              <a:buChar char="•"/>
+            </a:pPr>
+            <a:r>
+              <a:rPr lang="en-US" sz="1250" dirty="0">
+                <a:solidFill>
+                  <a:srgbClr val="334155"/>
+                </a:solidFill>
+                <a:latin typeface="Calibri" pitchFamily="34" charset="0"/>
+                <a:ea typeface="Calibri" pitchFamily="34" charset="-122"/>
+                <a:cs typeface="Calibri" pitchFamily="34" charset="-120"/>
+              </a:rPr>
+              <a:t>Ratings share of income, revenue versus plan.</a:t>
+            </a:r>
+            <a:endParaRPr lang="en-US" sz="1250" dirty="0"/>
+          </a:p>
+          <a:p>
+            <a:pPr marL="177800" indent="-177800">
+              <a:spcAft>
+                <a:spcPts val="700"/>
+              </a:spcAft>
+              <a:buSzPct val="100000"/>
+              <a:buChar char="•"/>
+            </a:pPr>
+            <a:r>
+              <a:rPr lang="en-US" sz="1250" dirty="0">
+                <a:solidFill>
+                  <a:srgbClr val="334155"/>
+                </a:solidFill>
+                <a:latin typeface="Calibri" pitchFamily="34" charset="0"/>
+                <a:ea typeface="Calibri" pitchFamily="34" charset="-122"/>
+                <a:cs typeface="Calibri" pitchFamily="34" charset="-120"/>
+              </a:rPr>
+              <a:t>Cash position and net worth headroom.</a:t>
+            </a:r>
+            <a:endParaRPr lang="en-US" sz="1250" dirty="0"/>
+          </a:p>
+        </p:txBody>
+      </p:sp>
+      <p:sp>
+        <p:nvSpPr>
+          <p:cNvPr id="9" name="Text 7"/>
+          <p:cNvSpPr/>
+          <p:nvPr/>
+        </p:nvSpPr>
+        <p:spPr>
+          <a:xfrm>
+            <a:off x="6309360" y="1417320"/>
+            <a:ext cx="5486400" cy="274320"/>
+          </a:xfrm>
+          <a:prstGeom prst="rect">
+            <a:avLst/>
+          </a:prstGeom>
+          <a:noFill/>
+          <a:ln/>
+        </p:spPr>
+        <p:txBody>
+          <a:bodyPr wrap="square" rtlCol="0" anchor="ctr"/>
+          <a:lstStyle/>
+          <a:p>
+            <a:pPr indent="0" marL="0">
+              <a:buNone/>
+            </a:pPr>
+            <a:r>
+              <a:rPr lang="en-US" sz="1300" b="1" dirty="0">
+                <a:solidFill>
+                  <a:srgbClr val="2B5CC4"/>
+                </a:solidFill>
+                <a:latin typeface="Calibri" pitchFamily="34" charset="0"/>
+                <a:ea typeface="Calibri" pitchFamily="34" charset="-122"/>
+                <a:cs typeface="Calibri" pitchFamily="34" charset="-120"/>
+              </a:rPr>
+              <a:t>Key risks and mitigations</a:t>
+            </a:r>
+            <a:endParaRPr lang="en-US" sz="1300" dirty="0"/>
+          </a:p>
+        </p:txBody>
+      </p:sp>
+      <p:sp>
+        <p:nvSpPr>
+          <p:cNvPr id="10" name="Text 8"/>
+          <p:cNvSpPr/>
+          <p:nvPr/>
+        </p:nvSpPr>
+        <p:spPr>
+          <a:xfrm>
+            <a:off x="6309360" y="1737360"/>
+            <a:ext cx="5486400" cy="4480560"/>
+          </a:xfrm>
+          <a:prstGeom prst="rect">
+            <a:avLst/>
+          </a:prstGeom>
+          <a:noFill/>
+          <a:ln/>
+        </p:spPr>
+        <p:txBody>
+          <a:bodyPr wrap="square" rtlCol="0" anchor="t"/>
+          <a:lstStyle/>
+          <a:p>
+            <a:pPr marL="177800" indent="-177800">
+              <a:spcAft>
+                <a:spcPts val="700"/>
+              </a:spcAft>
+              <a:buSzPct val="100000"/>
+              <a:buChar char="•"/>
+            </a:pPr>
+            <a:r>
+              <a:rPr lang="en-US" sz="1250" dirty="0">
+                <a:solidFill>
+                  <a:srgbClr val="334155"/>
+                </a:solidFill>
+                <a:latin typeface="Calibri" pitchFamily="34" charset="0"/>
+                <a:ea typeface="Calibri" pitchFamily="34" charset="-122"/>
+                <a:cs typeface="Calibri" pitchFamily="34" charset="-120"/>
+              </a:rPr>
+              <a:t>BLR licence delay: cost trigger, stagger the second hire, freeze discretionary spend.</a:t>
+            </a:r>
+            <a:endParaRPr lang="en-US" sz="1250" dirty="0"/>
+          </a:p>
+          <a:p>
+            <a:pPr marL="177800" indent="-177800">
+              <a:spcAft>
+                <a:spcPts val="700"/>
+              </a:spcAft>
+              <a:buSzPct val="100000"/>
+              <a:buChar char="•"/>
+            </a:pPr>
+            <a:r>
+              <a:rPr lang="en-US" sz="1250" dirty="0">
+                <a:solidFill>
+                  <a:srgbClr val="334155"/>
+                </a:solidFill>
+                <a:latin typeface="Calibri" pitchFamily="34" charset="0"/>
+                <a:ea typeface="Calibri" pitchFamily="34" charset="-122"/>
+                <a:cs typeface="Calibri" pitchFamily="34" charset="-120"/>
+              </a:rPr>
+              <a:t>BD ramp shortfall: disciplined pipeline, phased monthly targets.</a:t>
+            </a:r>
+            <a:endParaRPr lang="en-US" sz="1250" dirty="0"/>
+          </a:p>
+          <a:p>
+            <a:pPr marL="177800" indent="-177800">
+              <a:spcAft>
+                <a:spcPts val="700"/>
+              </a:spcAft>
+              <a:buSzPct val="100000"/>
+              <a:buChar char="•"/>
+            </a:pPr>
+            <a:r>
+              <a:rPr lang="en-US" sz="1250" dirty="0">
+                <a:solidFill>
+                  <a:srgbClr val="334155"/>
+                </a:solidFill>
+                <a:latin typeface="Calibri" pitchFamily="34" charset="0"/>
+                <a:ea typeface="Calibri" pitchFamily="34" charset="-122"/>
+                <a:cs typeface="Calibri" pitchFamily="34" charset="-120"/>
+              </a:rPr>
+              <a:t>Competition from incumbents: price, service and second rating niche.</a:t>
+            </a:r>
+            <a:endParaRPr lang="en-US" sz="1250" dirty="0"/>
+          </a:p>
+          <a:p>
+            <a:pPr marL="177800" indent="-177800">
+              <a:spcAft>
+                <a:spcPts val="700"/>
+              </a:spcAft>
+              <a:buSzPct val="100000"/>
+              <a:buChar char="•"/>
+            </a:pPr>
+            <a:r>
+              <a:rPr lang="en-US" sz="1250" dirty="0">
+                <a:solidFill>
+                  <a:srgbClr val="334155"/>
+                </a:solidFill>
+                <a:latin typeface="Calibri" pitchFamily="34" charset="0"/>
+                <a:ea typeface="Calibri" pitchFamily="34" charset="-122"/>
+                <a:cs typeface="Calibri" pitchFamily="34" charset="-120"/>
+              </a:rPr>
+              <a:t>Rating quality or compliance failure: independent rating committee and strong process. Brickwork lost its licence and most of its revenue to lapses, rating revenue fell from about Rs 48.5 Cr to about Rs 5 Cr.</a:t>
+            </a:r>
+            <a:endParaRPr lang="en-US" sz="1250" dirty="0"/>
+          </a:p>
+          <a:p>
+            <a:pPr marL="177800" indent="-177800">
+              <a:spcAft>
+                <a:spcPts val="700"/>
+              </a:spcAft>
+              <a:buSzPct val="100000"/>
+              <a:buChar char="•"/>
+            </a:pPr>
+            <a:r>
+              <a:rPr lang="en-US" sz="1250" dirty="0">
+                <a:solidFill>
+                  <a:srgbClr val="334155"/>
+                </a:solidFill>
+                <a:latin typeface="Calibri" pitchFamily="34" charset="0"/>
+                <a:ea typeface="Calibri" pitchFamily="34" charset="-122"/>
+                <a:cs typeface="Calibri" pitchFamily="34" charset="-120"/>
+              </a:rPr>
+              <a:t>Client concentration: keep no single issuer above 10% of revenue.</a:t>
+            </a:r>
+            <a:endParaRPr lang="en-US" sz="1250" dirty="0"/>
+          </a:p>
+        </p:txBody>
+      </p:sp>
+      <p:sp>
+        <p:nvSpPr>
+          <p:cNvPr id="11" name="Text 9"/>
+          <p:cNvSpPr/>
+          <p:nvPr/>
+        </p:nvSpPr>
+        <p:spPr>
+          <a:xfrm>
+            <a:off x="566928" y="6446520"/>
+            <a:ext cx="11064240" cy="301752"/>
+          </a:xfrm>
+          <a:prstGeom prst="rect">
+            <a:avLst/>
+          </a:prstGeom>
+          <a:noFill/>
+          <a:ln/>
+        </p:spPr>
+        <p:txBody>
+          <a:bodyPr wrap="square" rtlCol="0" anchor="ctr"/>
+          <a:lstStyle/>
+          <a:p>
+            <a:pPr indent="0" marL="0">
+              <a:buNone/>
+            </a:pPr>
+            <a:r>
+              <a:rPr lang="en-US" sz="900" i="1" dirty="0">
+                <a:solidFill>
+                  <a:srgbClr val="94A3B8"/>
+                </a:solidFill>
+                <a:latin typeface="Calibri" pitchFamily="34" charset="0"/>
+                <a:ea typeface="Calibri" pitchFamily="34" charset="-122"/>
+                <a:cs typeface="Calibri" pitchFamily="34" charset="-120"/>
+              </a:rPr>
+              <a:t>Source: Internal [1]. Brickwork history, brickworkratings.com [9].</a:t>
+            </a:r>
+            <a:endParaRPr lang="en-US" sz="900" dirty="0"/>
+          </a:p>
+        </p:txBody>
+      </p:sp>
+    </p:spTree>
+  </p:cSld>
+  <p:clrMapOvr>
+    <a:masterClrMapping/>
+  </p:clrMapOvr>
+</p:sld>
+</file>
+
+<file path=ppt/slides/slide15.xml><?xml version="1.0" encoding="utf-8"?>
+<p:sld xmlns:a="http://schemas.openxmlformats.org/drawingml/2006/main" xmlns:r="http://schemas.openxmlformats.org/officeDocument/2006/relationships" xmlns:p="http://schemas.openxmlformats.org/presentationml/2006/main">
+  <p:cSld name="Slide 15">
+    <p:bg>
+      <p:bgPr>
+        <a:solidFill>
+          <a:srgbClr val="FFFFFF"/>
+        </a:solidFill>
+      </p:bgPr>
+    </p:bg>
+    <p:spTree>
+      <p:nvGrpSpPr>
+        <p:cNvPr id="1" name=""/>
+        <p:cNvGrpSpPr/>
+        <p:nvPr/>
+      </p:nvGrpSpPr>
+      <p:grpSpPr>
+        <a:xfrm>
+          <a:off x="0" y="0"/>
+          <a:ext cx="0" cy="0"/>
+          <a:chOff x="0" y="0"/>
+          <a:chExt cx="0" cy="0"/>
+        </a:xfrm>
+      </p:grpSpPr>
+      <p:sp>
+        <p:nvSpPr>
+          <p:cNvPr id="2" name="Text 0"/>
+          <p:cNvSpPr/>
+          <p:nvPr/>
+        </p:nvSpPr>
+        <p:spPr>
+          <a:xfrm>
+            <a:off x="11430000" y="402336"/>
+            <a:ext cx="365760" cy="274320"/>
+          </a:xfrm>
+          <a:prstGeom prst="rect">
+            <a:avLst/>
+          </a:prstGeom>
+          <a:noFill/>
+          <a:ln/>
+        </p:spPr>
+        <p:txBody>
+          <a:bodyPr wrap="square" rtlCol="0" anchor="ctr"/>
+          <a:lstStyle/>
+          <a:p>
+            <a:pPr algn="r" indent="0" marL="0">
+              <a:buNone/>
+            </a:pPr>
+            <a:r>
+              <a:rPr lang="en-US" sz="1100" b="1" dirty="0">
+                <a:solidFill>
+                  <a:srgbClr val="94A3B8"/>
+                </a:solidFill>
+                <a:latin typeface="Calibri" pitchFamily="34" charset="0"/>
+                <a:ea typeface="Calibri" pitchFamily="34" charset="-122"/>
+                <a:cs typeface="Calibri" pitchFamily="34" charset="-120"/>
+              </a:rPr>
+              <a:t>15</a:t>
+            </a:r>
+            <a:endParaRPr lang="en-US" sz="1100" dirty="0"/>
+          </a:p>
+        </p:txBody>
+      </p:sp>
+      <p:sp>
+        <p:nvSpPr>
+          <p:cNvPr id="3" name="Text 1"/>
+          <p:cNvSpPr/>
+          <p:nvPr/>
+        </p:nvSpPr>
+        <p:spPr>
+          <a:xfrm>
+            <a:off x="566928" y="438912"/>
+            <a:ext cx="10058400" cy="274320"/>
+          </a:xfrm>
+          <a:prstGeom prst="rect">
+            <a:avLst/>
+          </a:prstGeom>
+          <a:noFill/>
+          <a:ln/>
+        </p:spPr>
+        <p:txBody>
+          <a:bodyPr wrap="square" rtlCol="0" anchor="ctr"/>
+          <a:lstStyle/>
+          <a:p>
+            <a:pPr indent="0" marL="0">
+              <a:buNone/>
+            </a:pPr>
+            <a:r>
+              <a:rPr lang="en-US" sz="1100" b="1" spc="200" kern="0" dirty="0">
+                <a:solidFill>
+                  <a:srgbClr val="2B5CC4"/>
+                </a:solidFill>
+                <a:latin typeface="Calibri" pitchFamily="34" charset="0"/>
+                <a:ea typeface="Calibri" pitchFamily="34" charset="-122"/>
+                <a:cs typeface="Calibri" pitchFamily="34" charset="-120"/>
+              </a:rPr>
               <a:t>RECOMMENDATION</a:t>
             </a:r>
             <a:endParaRPr lang="en-US" sz="1100" dirty="0"/>
@@ -12380,7 +14746,7 @@
                 <a:ea typeface="Calibri" pitchFamily="34" charset="-122"/>
                 <a:cs typeface="Calibri" pitchFamily="34" charset="-120"/>
               </a:rPr>
-              <a:t>THE PROJECTION THAT MATTERS</a:t>
+              <a:t>MONTHLY PATH TO BREAK EVEN</a:t>
             </a:r>
             <a:endParaRPr lang="en-US" sz="1100" dirty="0"/>
           </a:p>
@@ -12419,7 +14785,7 @@
                 <a:ea typeface="Cambria" pitchFamily="34" charset="-122"/>
                 <a:cs typeface="Cambria" pitchFamily="34" charset="-120"/>
               </a:rPr>
-              <a:t>Monthly path to break even, all three cases</a:t>
+              <a:t>S1. BLR by October</a:t>
             </a:r>
             <a:endParaRPr lang="en-US" sz="2900" dirty="0"/>
           </a:p>
@@ -12433,8 +14799,8 @@
         </p:nvSpPr>
         <p:spPr>
           <a:xfrm>
-            <a:off x="566928" y="1298448"/>
-            <a:ext cx="11064240" cy="457200"/>
+            <a:off x="566928" y="1325880"/>
+            <a:ext cx="8229600" cy="320040"/>
           </a:xfrm>
           <a:prstGeom prst="rect">
             <a:avLst/>
@@ -12450,107 +14816,29 @@
               <a:buNone/>
             </a:pPr>
             <a:r>
-              <a:rPr lang="en-US" sz="1400" dirty="0">
-                <a:solidFill>
-                  <a:srgbClr val="64748B"/>
+              <a:rPr lang="en-US" sz="1400" b="1" dirty="0">
+                <a:solidFill>
+                  <a:srgbClr val="0F766E"/>
                 </a:solidFill>
                 <a:latin typeface="Calibri" pitchFamily="34" charset="0"/>
                 <a:ea typeface="Calibri" pitchFamily="34" charset="-122"/>
                 <a:cs typeface="Calibri" pitchFamily="34" charset="-120"/>
               </a:rPr>
-              <a:t>Green area is total monthly income, FD plus ratings. The dark line is all in monthly expense. The first quarter, Apr to Jun, is actual; the rest is projected. Where green rises above the line, the month is cash positive.</a:t>
+              <a:t>Cash positive from October, when FD plus earning clears expense.</a:t>
             </a:r>
             <a:endParaRPr lang="en-US" sz="1400" dirty="0"/>
-          </a:p>
-        </p:txBody>
-      </p:sp>
-      <p:sp>
-        <p:nvSpPr>
-          <p:cNvPr id="6" name="Text 4"/>
-          <p:cNvSpPr/>
-          <p:nvPr/>
-        </p:nvSpPr>
-        <p:spPr>
-          <a:xfrm>
-            <a:off x="566928" y="1920240"/>
-            <a:ext cx="3520440" cy="274320"/>
-          </a:xfrm>
-          <a:prstGeom prst="rect">
-            <a:avLst/>
-          </a:prstGeom>
-          <a:noFill/>
-          <a:ln/>
-        </p:spPr>
-        <p:txBody>
-          <a:bodyPr wrap="square" rtlCol="0" anchor="ctr"/>
-          <a:lstStyle/>
-          <a:p>
-            <a:pPr indent="0" marL="0">
-              <a:buNone/>
-            </a:pPr>
-            <a:r>
-              <a:rPr lang="en-US" sz="1400" b="1" dirty="0">
-                <a:solidFill>
-                  <a:srgbClr val="0F172A"/>
-                </a:solidFill>
-                <a:latin typeface="Cambria" pitchFamily="34" charset="0"/>
-                <a:ea typeface="Cambria" pitchFamily="34" charset="-122"/>
-                <a:cs typeface="Cambria" pitchFamily="34" charset="-120"/>
-              </a:rPr>
-              <a:t>S1. BLR by Oct</a:t>
-            </a:r>
-            <a:endParaRPr lang="en-US" sz="1400" dirty="0"/>
-          </a:p>
-        </p:txBody>
-      </p:sp>
-      <p:sp>
-        <p:nvSpPr>
-          <p:cNvPr id="7" name="Text 5"/>
-          <p:cNvSpPr/>
-          <p:nvPr/>
-        </p:nvSpPr>
-        <p:spPr>
-          <a:xfrm>
-            <a:off x="566928" y="2212848"/>
-            <a:ext cx="3520440" cy="274320"/>
-          </a:xfrm>
-          <a:prstGeom prst="rect">
-            <a:avLst/>
-          </a:prstGeom>
-          <a:noFill/>
-          <a:ln/>
-        </p:spPr>
-        <p:txBody>
-          <a:bodyPr wrap="square" rtlCol="0" anchor="ctr"/>
-          <a:lstStyle/>
-          <a:p>
-            <a:pPr indent="0" marL="0">
-              <a:buNone/>
-            </a:pPr>
-            <a:r>
-              <a:rPr lang="en-US" sz="1150" b="1" dirty="0">
-                <a:solidFill>
-                  <a:srgbClr val="0F766E"/>
-                </a:solidFill>
-                <a:latin typeface="Calibri" pitchFamily="34" charset="0"/>
-                <a:ea typeface="Calibri" pitchFamily="34" charset="-122"/>
-                <a:cs typeface="Calibri" pitchFamily="34" charset="-120"/>
-              </a:rPr>
-              <a:t>Break even from October</a:t>
-            </a:r>
-            <a:endParaRPr lang="en-US" sz="1150" dirty="0"/>
           </a:p>
         </p:txBody>
       </p:sp>
       <p:graphicFrame>
         <p:nvGraphicFramePr>
-          <p:cNvPr id="8" name="Chart 0" descr=""/>
+          <p:cNvPr id="6" name="Chart 0" descr=""/>
           <p:cNvGraphicFramePr/>
           <p:nvPr/>
         </p:nvGraphicFramePr>
         <p:xfrm>
-          <a:off x="566928" y="2514600"/>
-          <a:ext cx="3520440" cy="3108960"/>
+          <a:off x="566928" y="1691640"/>
+          <a:ext cx="11064240" cy="3977640"/>
         </p:xfrm>
         <a:graphic xmlns:a="http://schemas.openxmlformats.org/drawingml/2006/main">
           <a:graphicData uri="http://schemas.openxmlformats.org/drawingml/2006/chart">
@@ -12560,14 +14848,14 @@
       </p:graphicFrame>
       <p:sp>
         <p:nvSpPr>
-          <p:cNvPr id="9" name="Text 6"/>
-          <p:cNvSpPr/>
-          <p:nvPr/>
-        </p:nvSpPr>
-        <p:spPr>
-          <a:xfrm>
-            <a:off x="4270248" y="1920240"/>
-            <a:ext cx="3520440" cy="274320"/>
+          <p:cNvPr id="7" name="Text 4"/>
+          <p:cNvSpPr/>
+          <p:nvPr/>
+        </p:nvSpPr>
+        <p:spPr>
+          <a:xfrm>
+            <a:off x="566928" y="5760720"/>
+            <a:ext cx="11064240" cy="457200"/>
           </a:xfrm>
           <a:prstGeom prst="rect">
             <a:avLst/>
@@ -12583,85 +14871,30 @@
               <a:buNone/>
             </a:pPr>
             <a:r>
-              <a:rPr lang="en-US" sz="1400" b="1" dirty="0">
-                <a:solidFill>
-                  <a:srgbClr val="0F172A"/>
-                </a:solidFill>
-                <a:latin typeface="Cambria" pitchFamily="34" charset="0"/>
-                <a:ea typeface="Cambria" pitchFamily="34" charset="-122"/>
-                <a:cs typeface="Cambria" pitchFamily="34" charset="-120"/>
-              </a:rPr>
-              <a:t>S2. BLR by Jan</a:t>
-            </a:r>
-            <a:endParaRPr lang="en-US" sz="1400" dirty="0"/>
-          </a:p>
-        </p:txBody>
-      </p:sp>
-      <p:sp>
-        <p:nvSpPr>
-          <p:cNvPr id="10" name="Text 7"/>
-          <p:cNvSpPr/>
-          <p:nvPr/>
-        </p:nvSpPr>
-        <p:spPr>
-          <a:xfrm>
-            <a:off x="4270248" y="2212848"/>
-            <a:ext cx="3520440" cy="274320"/>
-          </a:xfrm>
-          <a:prstGeom prst="rect">
-            <a:avLst/>
-          </a:prstGeom>
-          <a:noFill/>
-          <a:ln/>
-        </p:spPr>
-        <p:txBody>
-          <a:bodyPr wrap="square" rtlCol="0" anchor="ctr"/>
-          <a:lstStyle/>
-          <a:p>
-            <a:pPr indent="0" marL="0">
-              <a:buNone/>
-            </a:pPr>
-            <a:r>
-              <a:rPr lang="en-US" sz="1150" b="1" dirty="0">
-                <a:solidFill>
-                  <a:srgbClr val="2B5CC4"/>
+              <a:rPr lang="en-US" sz="1250" dirty="0">
+                <a:solidFill>
+                  <a:srgbClr val="334155"/>
                 </a:solidFill>
                 <a:latin typeface="Calibri" pitchFamily="34" charset="0"/>
                 <a:ea typeface="Calibri" pitchFamily="34" charset="-122"/>
                 <a:cs typeface="Calibri" pitchFamily="34" charset="-120"/>
               </a:rPr>
-              <a:t>Break even from January</a:t>
-            </a:r>
-            <a:endParaRPr lang="en-US" sz="1150" dirty="0"/>
-          </a:p>
-        </p:txBody>
-      </p:sp>
-      <p:graphicFrame>
-        <p:nvGraphicFramePr>
-          <p:cNvPr id="11" name="Chart 1" descr=""/>
-          <p:cNvGraphicFramePr/>
-          <p:nvPr/>
-        </p:nvGraphicFramePr>
-        <p:xfrm>
-          <a:off x="4270248" y="2514600"/>
-          <a:ext cx="3520440" cy="3108960"/>
-        </p:xfrm>
-        <a:graphic xmlns:a="http://schemas.openxmlformats.org/drawingml/2006/main">
-          <a:graphicData uri="http://schemas.openxmlformats.org/drawingml/2006/chart">
-            <c:chart xmlns:c="http://schemas.openxmlformats.org/drawingml/2006/chart" r:id="rId2"/>
-          </a:graphicData>
-        </a:graphic>
-      </p:graphicFrame>
-      <p:sp>
-        <p:nvSpPr>
-          <p:cNvPr id="12" name="Text 8"/>
-          <p:cNvSpPr/>
-          <p:nvPr/>
-        </p:nvSpPr>
-        <p:spPr>
-          <a:xfrm>
-            <a:off x="7973568" y="1920240"/>
-            <a:ext cx="3520440" cy="274320"/>
+              <a:t>Earning jumps from Rs 8 L to Rs 56 L in October as 16 cases at Rs 3 L land, above the Rs 46 L monthly expense.</a:t>
+            </a:r>
+            <a:endParaRPr lang="en-US" sz="1250" dirty="0"/>
+          </a:p>
+        </p:txBody>
+      </p:sp>
+      <p:sp>
+        <p:nvSpPr>
+          <p:cNvPr id="8" name="Text 5"/>
+          <p:cNvSpPr/>
+          <p:nvPr/>
+        </p:nvSpPr>
+        <p:spPr>
+          <a:xfrm>
+            <a:off x="566928" y="6446520"/>
+            <a:ext cx="11064240" cy="301752"/>
           </a:xfrm>
           <a:prstGeom prst="rect">
             <a:avLst/>
@@ -12677,162 +14910,15 @@
               <a:buNone/>
             </a:pPr>
             <a:r>
-              <a:rPr lang="en-US" sz="1400" b="1" dirty="0">
-                <a:solidFill>
-                  <a:srgbClr val="0F172A"/>
-                </a:solidFill>
-                <a:latin typeface="Cambria" pitchFamily="34" charset="0"/>
-                <a:ea typeface="Cambria" pitchFamily="34" charset="-122"/>
-                <a:cs typeface="Cambria" pitchFamily="34" charset="-120"/>
-              </a:rPr>
-              <a:t>S3. No BLR</a:t>
-            </a:r>
-            <a:endParaRPr lang="en-US" sz="1400" dirty="0"/>
-          </a:p>
-        </p:txBody>
-      </p:sp>
-      <p:sp>
-        <p:nvSpPr>
-          <p:cNvPr id="13" name="Text 9"/>
-          <p:cNvSpPr/>
-          <p:nvPr/>
-        </p:nvSpPr>
-        <p:spPr>
-          <a:xfrm>
-            <a:off x="7973568" y="2212848"/>
-            <a:ext cx="3520440" cy="274320"/>
-          </a:xfrm>
-          <a:prstGeom prst="rect">
-            <a:avLst/>
-          </a:prstGeom>
-          <a:noFill/>
-          <a:ln/>
-        </p:spPr>
-        <p:txBody>
-          <a:bodyPr wrap="square" rtlCol="0" anchor="ctr"/>
-          <a:lstStyle/>
-          <a:p>
-            <a:pPr indent="0" marL="0">
-              <a:buNone/>
-            </a:pPr>
-            <a:r>
-              <a:rPr lang="en-US" sz="1150" b="1" dirty="0">
-                <a:solidFill>
-                  <a:srgbClr val="DC2626"/>
+              <a:rPr lang="en-US" sz="900" i="1" dirty="0">
+                <a:solidFill>
+                  <a:srgbClr val="94A3B8"/>
                 </a:solidFill>
                 <a:latin typeface="Calibri" pitchFamily="34" charset="0"/>
                 <a:ea typeface="Calibri" pitchFamily="34" charset="-122"/>
                 <a:cs typeface="Calibri" pitchFamily="34" charset="-120"/>
               </a:rPr>
-              <a:t>Not reached in FY27</a:t>
-            </a:r>
-            <a:endParaRPr lang="en-US" sz="1150" dirty="0"/>
-          </a:p>
-        </p:txBody>
-      </p:sp>
-      <p:graphicFrame>
-        <p:nvGraphicFramePr>
-          <p:cNvPr id="14" name="Chart 2" descr=""/>
-          <p:cNvGraphicFramePr/>
-          <p:nvPr/>
-        </p:nvGraphicFramePr>
-        <p:xfrm>
-          <a:off x="7973568" y="2514600"/>
-          <a:ext cx="3520440" cy="3108960"/>
-        </p:xfrm>
-        <a:graphic xmlns:a="http://schemas.openxmlformats.org/drawingml/2006/main">
-          <a:graphicData uri="http://schemas.openxmlformats.org/drawingml/2006/chart">
-            <c:chart xmlns:c="http://schemas.openxmlformats.org/drawingml/2006/chart" r:id="rId3"/>
-          </a:graphicData>
-        </a:graphic>
-      </p:graphicFrame>
-      <p:sp>
-        <p:nvSpPr>
-          <p:cNvPr id="15" name="Text 10"/>
-          <p:cNvSpPr/>
-          <p:nvPr/>
-        </p:nvSpPr>
-        <p:spPr>
-          <a:xfrm>
-            <a:off x="566928" y="5669280"/>
-            <a:ext cx="7315200" cy="274320"/>
-          </a:xfrm>
-          <a:prstGeom prst="rect">
-            <a:avLst/>
-          </a:prstGeom>
-          <a:noFill/>
-          <a:ln/>
-        </p:spPr>
-        <p:txBody>
-          <a:bodyPr wrap="square" rtlCol="0" anchor="ctr"/>
-          <a:lstStyle/>
-          <a:p>
-            <a:pPr indent="0" marL="0">
-              <a:buNone/>
-            </a:pPr>
-            <a:r>
-              <a:rPr lang="en-US" sz="1100" b="1" dirty="0">
-                <a:solidFill>
-                  <a:srgbClr val="0F766E"/>
-                </a:solidFill>
-                <a:latin typeface="Calibri" pitchFamily="34" charset="0"/>
-                <a:ea typeface="Calibri" pitchFamily="34" charset="-122"/>
-                <a:cs typeface="Calibri" pitchFamily="34" charset="-120"/>
-              </a:rPr>
-              <a:t>Income, FD plus ratings   </a:t>
-            </a:r>
-            <a:pPr indent="0" marL="0">
-              <a:buNone/>
-            </a:pPr>
-            <a:r>
-              <a:rPr lang="en-US" sz="1100" b="1" dirty="0">
-                <a:solidFill>
-                  <a:srgbClr val="334155"/>
-                </a:solidFill>
-                <a:latin typeface="Calibri" pitchFamily="34" charset="0"/>
-                <a:ea typeface="Calibri" pitchFamily="34" charset="-122"/>
-                <a:cs typeface="Calibri" pitchFamily="34" charset="-120"/>
-              </a:rPr>
-              <a:t>Expense, all in</a:t>
-            </a:r>
-            <a:endParaRPr lang="en-US" sz="1100" dirty="0"/>
-          </a:p>
-        </p:txBody>
-      </p:sp>
-      <p:sp>
-        <p:nvSpPr>
-          <p:cNvPr id="16" name="Text 11"/>
-          <p:cNvSpPr/>
-          <p:nvPr/>
-        </p:nvSpPr>
-        <p:spPr>
-          <a:xfrm>
-            <a:off x="566928" y="6446520"/>
-            <a:ext cx="11064240" cy="301752"/>
-          </a:xfrm>
-          <a:prstGeom prst="rect">
-            <a:avLst/>
-          </a:prstGeom>
-          <a:noFill/>
-          <a:ln/>
-        </p:spPr>
-        <p:txBody>
-          <a:bodyPr wrap="square" rtlCol="0" anchor="ctr"/>
-          <a:lstStyle/>
-          <a:p>
-            <a:pPr indent="0" marL="0">
-              <a:buNone/>
-            </a:pPr>
-            <a:r>
-              <a:rPr lang="en-US" sz="900" i="1" dirty="0">
-                <a:solidFill>
-                  <a:srgbClr val="94A3B8"/>
-                </a:solidFill>
-                <a:latin typeface="Calibri" pitchFamily="34" charset="0"/>
-                <a:ea typeface="Calibri" pitchFamily="34" charset="-122"/>
-                <a:cs typeface="Calibri" pitchFamily="34" charset="-120"/>
-              </a:rPr>
-              <a:t>Source: monthly build from Internal run rate [1] and BLR assumptions [2]. Months Apr to Mar. Values in Rs Cr.</a:t>
+              <a:t>Source: actual months Apr to Jun from Internal ledger [1]; projected months from Internal run rate [1] and BLR assumptions [2]. Values Rs Lakh. Earning = existing ratings plus 16 new cases at Rs 3 L each once BLR is live.</a:t>
             </a:r>
             <a:endParaRPr lang="en-US" sz="900" dirty="0"/>
           </a:p>
@@ -12942,7 +15028,7 @@
                 <a:ea typeface="Calibri" pitchFamily="34" charset="-122"/>
                 <a:cs typeface="Calibri" pitchFamily="34" charset="-120"/>
               </a:rPr>
-              <a:t>THE OPERATING PLAN</a:t>
+              <a:t>MONTHLY PATH TO BREAK EVEN</a:t>
             </a:r>
             <a:endParaRPr lang="en-US" sz="1100" dirty="0"/>
           </a:p>
@@ -12981,7 +15067,7 @@
                 <a:ea typeface="Cambria" pitchFamily="34" charset="-122"/>
                 <a:cs typeface="Cambria" pitchFamily="34" charset="-120"/>
               </a:rPr>
-              <a:t>FY27 budget, quarter by quarter and by cost head</a:t>
+              <a:t>S2. BLR by January</a:t>
             </a:r>
             <a:endParaRPr lang="en-US" sz="2900" dirty="0"/>
           </a:p>
@@ -12995,8 +15081,8 @@
         </p:nvSpPr>
         <p:spPr>
           <a:xfrm>
-            <a:off x="566928" y="1417320"/>
-            <a:ext cx="5486400" cy="274320"/>
+            <a:off x="566928" y="1325880"/>
+            <a:ext cx="8229600" cy="320040"/>
           </a:xfrm>
           <a:prstGeom prst="rect">
             <a:avLst/>
@@ -13012,23 +15098,587 @@
               <a:buNone/>
             </a:pPr>
             <a:r>
-              <a:rPr lang="en-US" sz="1300" b="1" dirty="0">
-                <a:solidFill>
-                  <a:srgbClr val="334155"/>
+              <a:rPr lang="en-US" sz="1400" b="1" dirty="0">
+                <a:solidFill>
+                  <a:srgbClr val="2B5CC4"/>
                 </a:solidFill>
                 <a:latin typeface="Calibri" pitchFamily="34" charset="0"/>
                 <a:ea typeface="Calibri" pitchFamily="34" charset="-122"/>
                 <a:cs typeface="Calibri" pitchFamily="34" charset="-120"/>
               </a:rPr>
-              <a:t>Quarterly P&amp;L, base case (Rs Cr)</a:t>
-            </a:r>
-            <a:endParaRPr lang="en-US" sz="1300" dirty="0"/>
+              <a:t>Cash positive from January, only the final quarter carries BLR revenue.</a:t>
+            </a:r>
+            <a:endParaRPr lang="en-US" sz="1400" dirty="0"/>
           </a:p>
         </p:txBody>
       </p:sp>
       <p:graphicFrame>
         <p:nvGraphicFramePr>
-          <p:cNvPr id="8" name="Table 0"/>
+          <p:cNvPr id="6" name="Chart 0" descr=""/>
+          <p:cNvGraphicFramePr/>
+          <p:nvPr/>
+        </p:nvGraphicFramePr>
+        <p:xfrm>
+          <a:off x="566928" y="1691640"/>
+          <a:ext cx="11064240" cy="3977640"/>
+        </p:xfrm>
+        <a:graphic xmlns:a="http://schemas.openxmlformats.org/drawingml/2006/main">
+          <a:graphicData uri="http://schemas.openxmlformats.org/drawingml/2006/chart">
+            <c:chart xmlns:c="http://schemas.openxmlformats.org/drawingml/2006/chart" r:id="rId1"/>
+          </a:graphicData>
+        </a:graphic>
+      </p:graphicFrame>
+      <p:sp>
+        <p:nvSpPr>
+          <p:cNvPr id="7" name="Text 4"/>
+          <p:cNvSpPr/>
+          <p:nvPr/>
+        </p:nvSpPr>
+        <p:spPr>
+          <a:xfrm>
+            <a:off x="566928" y="5760720"/>
+            <a:ext cx="11064240" cy="457200"/>
+          </a:xfrm>
+          <a:prstGeom prst="rect">
+            <a:avLst/>
+          </a:prstGeom>
+          <a:noFill/>
+          <a:ln/>
+        </p:spPr>
+        <p:txBody>
+          <a:bodyPr wrap="square" rtlCol="0" anchor="ctr"/>
+          <a:lstStyle/>
+          <a:p>
+            <a:pPr indent="0" marL="0">
+              <a:buNone/>
+            </a:pPr>
+            <a:r>
+              <a:rPr lang="en-US" sz="1250" dirty="0">
+                <a:solidFill>
+                  <a:srgbClr val="334155"/>
+                </a:solidFill>
+                <a:latin typeface="Calibri" pitchFamily="34" charset="0"/>
+                <a:ea typeface="Calibri" pitchFamily="34" charset="-122"/>
+                <a:cs typeface="Calibri" pitchFamily="34" charset="-120"/>
+              </a:rPr>
+              <a:t>The team and expense run all year, but earning only steps up in January. FY27 stays a loss overall.</a:t>
+            </a:r>
+            <a:endParaRPr lang="en-US" sz="1250" dirty="0"/>
+          </a:p>
+        </p:txBody>
+      </p:sp>
+      <p:sp>
+        <p:nvSpPr>
+          <p:cNvPr id="8" name="Text 5"/>
+          <p:cNvSpPr/>
+          <p:nvPr/>
+        </p:nvSpPr>
+        <p:spPr>
+          <a:xfrm>
+            <a:off x="566928" y="6446520"/>
+            <a:ext cx="11064240" cy="301752"/>
+          </a:xfrm>
+          <a:prstGeom prst="rect">
+            <a:avLst/>
+          </a:prstGeom>
+          <a:noFill/>
+          <a:ln/>
+        </p:spPr>
+        <p:txBody>
+          <a:bodyPr wrap="square" rtlCol="0" anchor="ctr"/>
+          <a:lstStyle/>
+          <a:p>
+            <a:pPr indent="0" marL="0">
+              <a:buNone/>
+            </a:pPr>
+            <a:r>
+              <a:rPr lang="en-US" sz="900" i="1" dirty="0">
+                <a:solidFill>
+                  <a:srgbClr val="94A3B8"/>
+                </a:solidFill>
+                <a:latin typeface="Calibri" pitchFamily="34" charset="0"/>
+                <a:ea typeface="Calibri" pitchFamily="34" charset="-122"/>
+                <a:cs typeface="Calibri" pitchFamily="34" charset="-120"/>
+              </a:rPr>
+              <a:t>Source: actual months Apr to Jun from Internal ledger [1]; projected months from Internal run rate [1] and BLR assumptions [2]. Values Rs Lakh. Earning = existing ratings plus 16 new cases at Rs 3 L each once BLR is live.</a:t>
+            </a:r>
+            <a:endParaRPr lang="en-US" sz="900" dirty="0"/>
+          </a:p>
+        </p:txBody>
+      </p:sp>
+    </p:spTree>
+  </p:cSld>
+  <p:clrMapOvr>
+    <a:masterClrMapping/>
+  </p:clrMapOvr>
+</p:sld>
+</file>
+
+<file path=ppt/slides/slide8.xml><?xml version="1.0" encoding="utf-8"?>
+<p:sld xmlns:a="http://schemas.openxmlformats.org/drawingml/2006/main" xmlns:r="http://schemas.openxmlformats.org/officeDocument/2006/relationships" xmlns:p="http://schemas.openxmlformats.org/presentationml/2006/main">
+  <p:cSld name="Slide 8">
+    <p:bg>
+      <p:bgPr>
+        <a:solidFill>
+          <a:srgbClr val="FFFFFF"/>
+        </a:solidFill>
+      </p:bgPr>
+    </p:bg>
+    <p:spTree>
+      <p:nvGrpSpPr>
+        <p:cNvPr id="1" name=""/>
+        <p:cNvGrpSpPr/>
+        <p:nvPr/>
+      </p:nvGrpSpPr>
+      <p:grpSpPr>
+        <a:xfrm>
+          <a:off x="0" y="0"/>
+          <a:ext cx="0" cy="0"/>
+          <a:chOff x="0" y="0"/>
+          <a:chExt cx="0" cy="0"/>
+        </a:xfrm>
+      </p:grpSpPr>
+      <p:sp>
+        <p:nvSpPr>
+          <p:cNvPr id="2" name="Text 0"/>
+          <p:cNvSpPr/>
+          <p:nvPr/>
+        </p:nvSpPr>
+        <p:spPr>
+          <a:xfrm>
+            <a:off x="11430000" y="402336"/>
+            <a:ext cx="365760" cy="274320"/>
+          </a:xfrm>
+          <a:prstGeom prst="rect">
+            <a:avLst/>
+          </a:prstGeom>
+          <a:noFill/>
+          <a:ln/>
+        </p:spPr>
+        <p:txBody>
+          <a:bodyPr wrap="square" rtlCol="0" anchor="ctr"/>
+          <a:lstStyle/>
+          <a:p>
+            <a:pPr algn="r" indent="0" marL="0">
+              <a:buNone/>
+            </a:pPr>
+            <a:r>
+              <a:rPr lang="en-US" sz="1100" b="1" dirty="0">
+                <a:solidFill>
+                  <a:srgbClr val="94A3B8"/>
+                </a:solidFill>
+                <a:latin typeface="Calibri" pitchFamily="34" charset="0"/>
+                <a:ea typeface="Calibri" pitchFamily="34" charset="-122"/>
+                <a:cs typeface="Calibri" pitchFamily="34" charset="-120"/>
+              </a:rPr>
+              <a:t>08</a:t>
+            </a:r>
+            <a:endParaRPr lang="en-US" sz="1100" dirty="0"/>
+          </a:p>
+        </p:txBody>
+      </p:sp>
+      <p:sp>
+        <p:nvSpPr>
+          <p:cNvPr id="3" name="Text 1"/>
+          <p:cNvSpPr/>
+          <p:nvPr/>
+        </p:nvSpPr>
+        <p:spPr>
+          <a:xfrm>
+            <a:off x="566928" y="438912"/>
+            <a:ext cx="10058400" cy="274320"/>
+          </a:xfrm>
+          <a:prstGeom prst="rect">
+            <a:avLst/>
+          </a:prstGeom>
+          <a:noFill/>
+          <a:ln/>
+        </p:spPr>
+        <p:txBody>
+          <a:bodyPr wrap="square" rtlCol="0" anchor="ctr"/>
+          <a:lstStyle/>
+          <a:p>
+            <a:pPr indent="0" marL="0">
+              <a:buNone/>
+            </a:pPr>
+            <a:r>
+              <a:rPr lang="en-US" sz="1100" b="1" spc="200" kern="0" dirty="0">
+                <a:solidFill>
+                  <a:srgbClr val="2B5CC4"/>
+                </a:solidFill>
+                <a:latin typeface="Calibri" pitchFamily="34" charset="0"/>
+                <a:ea typeface="Calibri" pitchFamily="34" charset="-122"/>
+                <a:cs typeface="Calibri" pitchFamily="34" charset="-120"/>
+              </a:rPr>
+              <a:t>MONTHLY PATH TO BREAK EVEN</a:t>
+            </a:r>
+            <a:endParaRPr lang="en-US" sz="1100" dirty="0"/>
+          </a:p>
+        </p:txBody>
+      </p:sp>
+      <p:sp>
+        <p:nvSpPr>
+          <p:cNvPr id="4" name="Text 2"/>
+          <p:cNvSpPr/>
+          <p:nvPr/>
+        </p:nvSpPr>
+        <p:spPr>
+          <a:xfrm>
+            <a:off x="566928" y="694944"/>
+            <a:ext cx="11064240" cy="548640"/>
+          </a:xfrm>
+          <a:prstGeom prst="rect">
+            <a:avLst/>
+          </a:prstGeom>
+          <a:noFill/>
+          <a:ln/>
+        </p:spPr>
+        <p:txBody>
+          <a:bodyPr wrap="square" rtlCol="0" anchor="ctr"/>
+          <a:lstStyle/>
+          <a:p>
+            <a:pPr indent="0" marL="0">
+              <a:buNone/>
+            </a:pPr>
+            <a:r>
+              <a:rPr lang="en-US" sz="2900" b="1" dirty="0">
+                <a:solidFill>
+                  <a:srgbClr val="0F172A"/>
+                </a:solidFill>
+                <a:latin typeface="Cambria" pitchFamily="34" charset="0"/>
+                <a:ea typeface="Cambria" pitchFamily="34" charset="-122"/>
+                <a:cs typeface="Cambria" pitchFamily="34" charset="-120"/>
+              </a:rPr>
+              <a:t>S3. No BLR this financial year</a:t>
+            </a:r>
+            <a:endParaRPr lang="en-US" sz="2900" dirty="0"/>
+          </a:p>
+        </p:txBody>
+      </p:sp>
+      <p:sp>
+        <p:nvSpPr>
+          <p:cNvPr id="5" name="Text 3"/>
+          <p:cNvSpPr/>
+          <p:nvPr/>
+        </p:nvSpPr>
+        <p:spPr>
+          <a:xfrm>
+            <a:off x="566928" y="1325880"/>
+            <a:ext cx="8229600" cy="320040"/>
+          </a:xfrm>
+          <a:prstGeom prst="rect">
+            <a:avLst/>
+          </a:prstGeom>
+          <a:noFill/>
+          <a:ln/>
+        </p:spPr>
+        <p:txBody>
+          <a:bodyPr wrap="square" rtlCol="0" anchor="ctr"/>
+          <a:lstStyle/>
+          <a:p>
+            <a:pPr indent="0" marL="0">
+              <a:buNone/>
+            </a:pPr>
+            <a:r>
+              <a:rPr lang="en-US" sz="1400" b="1" dirty="0">
+                <a:solidFill>
+                  <a:srgbClr val="DC2626"/>
+                </a:solidFill>
+                <a:latin typeface="Calibri" pitchFamily="34" charset="0"/>
+                <a:ea typeface="Calibri" pitchFamily="34" charset="-122"/>
+                <a:cs typeface="Calibri" pitchFamily="34" charset="-120"/>
+              </a:rPr>
+              <a:t>Break even is not reached, earning stays at the existing run rate.</a:t>
+            </a:r>
+            <a:endParaRPr lang="en-US" sz="1400" dirty="0"/>
+          </a:p>
+        </p:txBody>
+      </p:sp>
+      <p:graphicFrame>
+        <p:nvGraphicFramePr>
+          <p:cNvPr id="6" name="Chart 0" descr=""/>
+          <p:cNvGraphicFramePr/>
+          <p:nvPr/>
+        </p:nvGraphicFramePr>
+        <p:xfrm>
+          <a:off x="566928" y="1691640"/>
+          <a:ext cx="11064240" cy="3977640"/>
+        </p:xfrm>
+        <a:graphic xmlns:a="http://schemas.openxmlformats.org/drawingml/2006/main">
+          <a:graphicData uri="http://schemas.openxmlformats.org/drawingml/2006/chart">
+            <c:chart xmlns:c="http://schemas.openxmlformats.org/drawingml/2006/chart" r:id="rId1"/>
+          </a:graphicData>
+        </a:graphic>
+      </p:graphicFrame>
+      <p:sp>
+        <p:nvSpPr>
+          <p:cNvPr id="7" name="Text 4"/>
+          <p:cNvSpPr/>
+          <p:nvPr/>
+        </p:nvSpPr>
+        <p:spPr>
+          <a:xfrm>
+            <a:off x="566928" y="5760720"/>
+            <a:ext cx="11064240" cy="457200"/>
+          </a:xfrm>
+          <a:prstGeom prst="rect">
+            <a:avLst/>
+          </a:prstGeom>
+          <a:noFill/>
+          <a:ln/>
+        </p:spPr>
+        <p:txBody>
+          <a:bodyPr wrap="square" rtlCol="0" anchor="ctr"/>
+          <a:lstStyle/>
+          <a:p>
+            <a:pPr indent="0" marL="0">
+              <a:buNone/>
+            </a:pPr>
+            <a:r>
+              <a:rPr lang="en-US" sz="1250" dirty="0">
+                <a:solidFill>
+                  <a:srgbClr val="334155"/>
+                </a:solidFill>
+                <a:latin typeface="Calibri" pitchFamily="34" charset="0"/>
+                <a:ea typeface="Calibri" pitchFamily="34" charset="-122"/>
+                <a:cs typeface="Calibri" pitchFamily="34" charset="-120"/>
+              </a:rPr>
+              <a:t>Existing ratings grow to about Rs 8 L a month, well short of the Rs 46 L expense. Funded from reserves.</a:t>
+            </a:r>
+            <a:endParaRPr lang="en-US" sz="1250" dirty="0"/>
+          </a:p>
+        </p:txBody>
+      </p:sp>
+      <p:sp>
+        <p:nvSpPr>
+          <p:cNvPr id="8" name="Text 5"/>
+          <p:cNvSpPr/>
+          <p:nvPr/>
+        </p:nvSpPr>
+        <p:spPr>
+          <a:xfrm>
+            <a:off x="566928" y="6446520"/>
+            <a:ext cx="11064240" cy="301752"/>
+          </a:xfrm>
+          <a:prstGeom prst="rect">
+            <a:avLst/>
+          </a:prstGeom>
+          <a:noFill/>
+          <a:ln/>
+        </p:spPr>
+        <p:txBody>
+          <a:bodyPr wrap="square" rtlCol="0" anchor="ctr"/>
+          <a:lstStyle/>
+          <a:p>
+            <a:pPr indent="0" marL="0">
+              <a:buNone/>
+            </a:pPr>
+            <a:r>
+              <a:rPr lang="en-US" sz="900" i="1" dirty="0">
+                <a:solidFill>
+                  <a:srgbClr val="94A3B8"/>
+                </a:solidFill>
+                <a:latin typeface="Calibri" pitchFamily="34" charset="0"/>
+                <a:ea typeface="Calibri" pitchFamily="34" charset="-122"/>
+                <a:cs typeface="Calibri" pitchFamily="34" charset="-120"/>
+              </a:rPr>
+              <a:t>Source: actual months Apr to Jun from Internal ledger [1]; projected months from Internal run rate [1] and BLR assumptions [2]. Values Rs Lakh. Earning = existing ratings plus 16 new cases at Rs 3 L each once BLR is live.</a:t>
+            </a:r>
+            <a:endParaRPr lang="en-US" sz="900" dirty="0"/>
+          </a:p>
+        </p:txBody>
+      </p:sp>
+    </p:spTree>
+  </p:cSld>
+  <p:clrMapOvr>
+    <a:masterClrMapping/>
+  </p:clrMapOvr>
+</p:sld>
+</file>
+
+<file path=ppt/slides/slide9.xml><?xml version="1.0" encoding="utf-8"?>
+<p:sld xmlns:a="http://schemas.openxmlformats.org/drawingml/2006/main" xmlns:r="http://schemas.openxmlformats.org/officeDocument/2006/relationships" xmlns:p="http://schemas.openxmlformats.org/presentationml/2006/main">
+  <p:cSld name="Slide 9">
+    <p:bg>
+      <p:bgPr>
+        <a:solidFill>
+          <a:srgbClr val="FFFFFF"/>
+        </a:solidFill>
+      </p:bgPr>
+    </p:bg>
+    <p:spTree>
+      <p:nvGrpSpPr>
+        <p:cNvPr id="1" name=""/>
+        <p:cNvGrpSpPr/>
+        <p:nvPr/>
+      </p:nvGrpSpPr>
+      <p:grpSpPr>
+        <a:xfrm>
+          <a:off x="0" y="0"/>
+          <a:ext cx="0" cy="0"/>
+          <a:chOff x="0" y="0"/>
+          <a:chExt cx="0" cy="0"/>
+        </a:xfrm>
+      </p:grpSpPr>
+      <p:sp>
+        <p:nvSpPr>
+          <p:cNvPr id="2" name="Text 0"/>
+          <p:cNvSpPr/>
+          <p:nvPr/>
+        </p:nvSpPr>
+        <p:spPr>
+          <a:xfrm>
+            <a:off x="11430000" y="402336"/>
+            <a:ext cx="365760" cy="274320"/>
+          </a:xfrm>
+          <a:prstGeom prst="rect">
+            <a:avLst/>
+          </a:prstGeom>
+          <a:noFill/>
+          <a:ln/>
+        </p:spPr>
+        <p:txBody>
+          <a:bodyPr wrap="square" rtlCol="0" anchor="ctr"/>
+          <a:lstStyle/>
+          <a:p>
+            <a:pPr algn="r" indent="0" marL="0">
+              <a:buNone/>
+            </a:pPr>
+            <a:r>
+              <a:rPr lang="en-US" sz="1100" b="1" dirty="0">
+                <a:solidFill>
+                  <a:srgbClr val="94A3B8"/>
+                </a:solidFill>
+                <a:latin typeface="Calibri" pitchFamily="34" charset="0"/>
+                <a:ea typeface="Calibri" pitchFamily="34" charset="-122"/>
+                <a:cs typeface="Calibri" pitchFamily="34" charset="-120"/>
+              </a:rPr>
+              <a:t>09</a:t>
+            </a:r>
+            <a:endParaRPr lang="en-US" sz="1100" dirty="0"/>
+          </a:p>
+        </p:txBody>
+      </p:sp>
+      <p:sp>
+        <p:nvSpPr>
+          <p:cNvPr id="3" name="Text 1"/>
+          <p:cNvSpPr/>
+          <p:nvPr/>
+        </p:nvSpPr>
+        <p:spPr>
+          <a:xfrm>
+            <a:off x="566928" y="438912"/>
+            <a:ext cx="10058400" cy="274320"/>
+          </a:xfrm>
+          <a:prstGeom prst="rect">
+            <a:avLst/>
+          </a:prstGeom>
+          <a:noFill/>
+          <a:ln/>
+        </p:spPr>
+        <p:txBody>
+          <a:bodyPr wrap="square" rtlCol="0" anchor="ctr"/>
+          <a:lstStyle/>
+          <a:p>
+            <a:pPr indent="0" marL="0">
+              <a:buNone/>
+            </a:pPr>
+            <a:r>
+              <a:rPr lang="en-US" sz="1100" b="1" spc="200" kern="0" dirty="0">
+                <a:solidFill>
+                  <a:srgbClr val="2B5CC4"/>
+                </a:solidFill>
+                <a:latin typeface="Calibri" pitchFamily="34" charset="0"/>
+                <a:ea typeface="Calibri" pitchFamily="34" charset="-122"/>
+                <a:cs typeface="Calibri" pitchFamily="34" charset="-120"/>
+              </a:rPr>
+              <a:t>THE OPERATING PLAN</a:t>
+            </a:r>
+            <a:endParaRPr lang="en-US" sz="1100" dirty="0"/>
+          </a:p>
+        </p:txBody>
+      </p:sp>
+      <p:sp>
+        <p:nvSpPr>
+          <p:cNvPr id="4" name="Text 2"/>
+          <p:cNvSpPr/>
+          <p:nvPr/>
+        </p:nvSpPr>
+        <p:spPr>
+          <a:xfrm>
+            <a:off x="566928" y="694944"/>
+            <a:ext cx="11064240" cy="548640"/>
+          </a:xfrm>
+          <a:prstGeom prst="rect">
+            <a:avLst/>
+          </a:prstGeom>
+          <a:noFill/>
+          <a:ln/>
+        </p:spPr>
+        <p:txBody>
+          <a:bodyPr wrap="square" rtlCol="0" anchor="ctr"/>
+          <a:lstStyle/>
+          <a:p>
+            <a:pPr indent="0" marL="0">
+              <a:buNone/>
+            </a:pPr>
+            <a:r>
+              <a:rPr lang="en-US" sz="2900" b="1" dirty="0">
+                <a:solidFill>
+                  <a:srgbClr val="0F172A"/>
+                </a:solidFill>
+                <a:latin typeface="Cambria" pitchFamily="34" charset="0"/>
+                <a:ea typeface="Cambria" pitchFamily="34" charset="-122"/>
+                <a:cs typeface="Cambria" pitchFamily="34" charset="-120"/>
+              </a:rPr>
+              <a:t>FY27 budget and cost</a:t>
+            </a:r>
+            <a:endParaRPr lang="en-US" sz="2900" dirty="0"/>
+          </a:p>
+        </p:txBody>
+      </p:sp>
+      <p:sp>
+        <p:nvSpPr>
+          <p:cNvPr id="5" name="Text 3"/>
+          <p:cNvSpPr/>
+          <p:nvPr/>
+        </p:nvSpPr>
+        <p:spPr>
+          <a:xfrm>
+            <a:off x="566928" y="1371600"/>
+            <a:ext cx="5486400" cy="274320"/>
+          </a:xfrm>
+          <a:prstGeom prst="rect">
+            <a:avLst/>
+          </a:prstGeom>
+          <a:noFill/>
+          <a:ln/>
+        </p:spPr>
+        <p:txBody>
+          <a:bodyPr wrap="square" rtlCol="0" anchor="ctr"/>
+          <a:lstStyle/>
+          <a:p>
+            <a:pPr indent="0" marL="0">
+              <a:buNone/>
+            </a:pPr>
+            <a:r>
+              <a:rPr lang="en-US" sz="1200" b="1" dirty="0">
+                <a:solidFill>
+                  <a:srgbClr val="334155"/>
+                </a:solidFill>
+                <a:latin typeface="Calibri" pitchFamily="34" charset="0"/>
+                <a:ea typeface="Calibri" pitchFamily="34" charset="-122"/>
+                <a:cs typeface="Calibri" pitchFamily="34" charset="-120"/>
+              </a:rPr>
+              <a:t>Quarterly P&amp;L, base case (Rs Cr)</a:t>
+            </a:r>
+            <a:endParaRPr lang="en-US" sz="1200" dirty="0"/>
+          </a:p>
+        </p:txBody>
+      </p:sp>
+      <p:graphicFrame>
+        <p:nvGraphicFramePr>
+          <p:cNvPr id="10" name="Table 0"/>
           <p:cNvGraphicFramePr>
             <a:graphicFrameLocks noGrp="1"/>
           </p:cNvGraphicFramePr>
@@ -13041,7 +15691,7 @@
           </p:nvPr>
         </p:nvGraphicFramePr>
         <p:xfrm>
-          <a:off x="566928" y="1737360"/>
+          <a:off x="566928" y="1691640"/>
           <a:ext cx="5486400" cy="914400"/>
         </p:xfrm>
         <a:graphic>
@@ -13054,7 +15704,7 @@
                 <a:gridCol w="1097280"/>
                 <a:gridCol w="1097280"/>
               </a:tblGrid>
-              <a:tr h="384048">
+              <a:tr h="347472">
                 <a:tc>
                   <a:txBody>
                     <a:bodyPr/>
@@ -13317,7 +15967,7 @@
                   </a:tcPr>
                 </a:tc>
               </a:tr>
-              <a:tr h="384048">
+              <a:tr h="347472">
                 <a:tc>
                   <a:txBody>
                     <a:bodyPr/>
@@ -13327,7 +15977,7 @@
                         <a:buNone/>
                       </a:pPr>
                       <a:r>
-                        <a:rPr lang="en-US" sz="1200" dirty="0">
+                        <a:rPr lang="en-US" sz="1150" dirty="0">
                           <a:solidFill>
                             <a:srgbClr val="334155"/>
                           </a:solidFill>
@@ -13335,9 +15985,9 @@
                           <a:ea typeface="Calibri" pitchFamily="34" charset="-122"/>
                           <a:cs typeface="Calibri" pitchFamily="34" charset="-120"/>
                         </a:rPr>
-                        <a:t>Q1 (Apr to Jun) actual</a:t>
+                        <a:t>Q1 (Apr-Jun) actual</a:t>
                       </a:r>
-                      <a:endParaRPr lang="en-US" sz="1200" dirty="0">
+                      <a:endParaRPr lang="en-US" sz="1150" dirty="0">
                         <a:latin typeface="Calibri" charset="0"/>
                         <a:ea typeface="Calibri" charset="0"/>
                         <a:cs typeface="Calibri" charset="0"/>
@@ -13395,7 +16045,7 @@
                         <a:buNone/>
                       </a:pPr>
                       <a:r>
-                        <a:rPr lang="en-US" sz="1200" dirty="0">
+                        <a:rPr lang="en-US" sz="1150" dirty="0">
                           <a:solidFill>
                             <a:srgbClr val="334155"/>
                           </a:solidFill>
@@ -13405,7 +16055,7 @@
                         </a:rPr>
                         <a:t>0.60</a:t>
                       </a:r>
-                      <a:endParaRPr lang="en-US" sz="1200" dirty="0">
+                      <a:endParaRPr lang="en-US" sz="1150" dirty="0">
                         <a:latin typeface="Calibri" charset="0"/>
                         <a:ea typeface="Calibri" charset="0"/>
                         <a:cs typeface="Calibri" charset="0"/>
@@ -13463,7 +16113,7 @@
                         <a:buNone/>
                       </a:pPr>
                       <a:r>
-                        <a:rPr lang="en-US" sz="1200" dirty="0">
+                        <a:rPr lang="en-US" sz="1150" dirty="0">
                           <a:solidFill>
                             <a:srgbClr val="334155"/>
                           </a:solidFill>
@@ -13473,7 +16123,7 @@
                         </a:rPr>
                         <a:t>1.16</a:t>
                       </a:r>
-                      <a:endParaRPr lang="en-US" sz="1200" dirty="0">
+                      <a:endParaRPr lang="en-US" sz="1150" dirty="0">
                         <a:latin typeface="Calibri" charset="0"/>
                         <a:ea typeface="Calibri" charset="0"/>
                         <a:cs typeface="Calibri" charset="0"/>
@@ -13531,7 +16181,7 @@
                         <a:buNone/>
                       </a:pPr>
                       <a:r>
-                        <a:rPr lang="en-US" sz="1200" dirty="0">
+                        <a:rPr lang="en-US" sz="1150" dirty="0">
                           <a:solidFill>
                             <a:srgbClr val="DC2626"/>
                           </a:solidFill>
@@ -13541,7 +16191,7 @@
                         </a:rPr>
                         <a:t>-0.56</a:t>
                       </a:r>
-                      <a:endParaRPr lang="en-US" sz="1200" dirty="0">
+                      <a:endParaRPr lang="en-US" sz="1150" dirty="0">
                         <a:latin typeface="Calibri" charset="0"/>
                         <a:ea typeface="Calibri" charset="0"/>
                         <a:cs typeface="Calibri" charset="0"/>
@@ -13591,7 +16241,7 @@
                   </a:tcPr>
                 </a:tc>
               </a:tr>
-              <a:tr h="384048">
+              <a:tr h="347472">
                 <a:tc>
                   <a:txBody>
                     <a:bodyPr/>
@@ -13601,7 +16251,7 @@
                         <a:buNone/>
                       </a:pPr>
                       <a:r>
-                        <a:rPr lang="en-US" sz="1200" dirty="0">
+                        <a:rPr lang="en-US" sz="1150" dirty="0">
                           <a:solidFill>
                             <a:srgbClr val="334155"/>
                           </a:solidFill>
@@ -13609,9 +16259,9 @@
                           <a:ea typeface="Calibri" pitchFamily="34" charset="-122"/>
                           <a:cs typeface="Calibri" pitchFamily="34" charset="-120"/>
                         </a:rPr>
-                        <a:t>Q2 (Jul to Sep)</a:t>
+                        <a:t>Q2 (Jul-Sep)</a:t>
                       </a:r>
-                      <a:endParaRPr lang="en-US" sz="1200" dirty="0">
+                      <a:endParaRPr lang="en-US" sz="1150" dirty="0">
                         <a:latin typeface="Calibri" charset="0"/>
                         <a:ea typeface="Calibri" charset="0"/>
                         <a:cs typeface="Calibri" charset="0"/>
@@ -13669,7 +16319,7 @@
                         <a:buNone/>
                       </a:pPr>
                       <a:r>
-                        <a:rPr lang="en-US" sz="1200" dirty="0">
+                        <a:rPr lang="en-US" sz="1150" dirty="0">
                           <a:solidFill>
                             <a:srgbClr val="334155"/>
                           </a:solidFill>
@@ -13679,7 +16329,7 @@
                         </a:rPr>
                         <a:t>0.69</a:t>
                       </a:r>
-                      <a:endParaRPr lang="en-US" sz="1200" dirty="0">
+                      <a:endParaRPr lang="en-US" sz="1150" dirty="0">
                         <a:latin typeface="Calibri" charset="0"/>
                         <a:ea typeface="Calibri" charset="0"/>
                         <a:cs typeface="Calibri" charset="0"/>
@@ -13737,7 +16387,7 @@
                         <a:buNone/>
                       </a:pPr>
                       <a:r>
-                        <a:rPr lang="en-US" sz="1200" dirty="0">
+                        <a:rPr lang="en-US" sz="1150" dirty="0">
                           <a:solidFill>
                             <a:srgbClr val="334155"/>
                           </a:solidFill>
@@ -13747,7 +16397,7 @@
                         </a:rPr>
                         <a:t>1.32</a:t>
                       </a:r>
-                      <a:endParaRPr lang="en-US" sz="1200" dirty="0">
+                      <a:endParaRPr lang="en-US" sz="1150" dirty="0">
                         <a:latin typeface="Calibri" charset="0"/>
                         <a:ea typeface="Calibri" charset="0"/>
                         <a:cs typeface="Calibri" charset="0"/>
@@ -13805,7 +16455,7 @@
                         <a:buNone/>
                       </a:pPr>
                       <a:r>
-                        <a:rPr lang="en-US" sz="1200" dirty="0">
+                        <a:rPr lang="en-US" sz="1150" dirty="0">
                           <a:solidFill>
                             <a:srgbClr val="DC2626"/>
                           </a:solidFill>
@@ -13815,7 +16465,7 @@
                         </a:rPr>
                         <a:t>-0.63</a:t>
                       </a:r>
-                      <a:endParaRPr lang="en-US" sz="1200" dirty="0">
+                      <a:endParaRPr lang="en-US" sz="1150" dirty="0">
                         <a:latin typeface="Calibri" charset="0"/>
                         <a:ea typeface="Calibri" charset="0"/>
                         <a:cs typeface="Calibri" charset="0"/>
@@ -13865,7 +16515,7 @@
                   </a:tcPr>
                 </a:tc>
               </a:tr>
-              <a:tr h="384048">
+              <a:tr h="347472">
                 <a:tc>
                   <a:txBody>
                     <a:bodyPr/>
@@ -13875,7 +16525,7 @@
                         <a:buNone/>
                       </a:pPr>
                       <a:r>
-                        <a:rPr lang="en-US" sz="1200" dirty="0">
+                        <a:rPr lang="en-US" sz="1150" dirty="0">
                           <a:solidFill>
                             <a:srgbClr val="334155"/>
                           </a:solidFill>
@@ -13883,9 +16533,9 @@
                           <a:ea typeface="Calibri" pitchFamily="34" charset="-122"/>
                           <a:cs typeface="Calibri" pitchFamily="34" charset="-120"/>
                         </a:rPr>
-                        <a:t>Q3 (Oct to Dec)</a:t>
+                        <a:t>Q3 (Oct-Dec)</a:t>
                       </a:r>
-                      <a:endParaRPr lang="en-US" sz="1200" dirty="0">
+                      <a:endParaRPr lang="en-US" sz="1150" dirty="0">
                         <a:latin typeface="Calibri" charset="0"/>
                         <a:ea typeface="Calibri" charset="0"/>
                         <a:cs typeface="Calibri" charset="0"/>
@@ -13943,7 +16593,7 @@
                         <a:buNone/>
                       </a:pPr>
                       <a:r>
-                        <a:rPr lang="en-US" sz="1200" dirty="0">
+                        <a:rPr lang="en-US" sz="1150" dirty="0">
                           <a:solidFill>
                             <a:srgbClr val="334155"/>
                           </a:solidFill>
@@ -13953,7 +16603,7 @@
                         </a:rPr>
                         <a:t>2.13</a:t>
                       </a:r>
-                      <a:endParaRPr lang="en-US" sz="1200" dirty="0">
+                      <a:endParaRPr lang="en-US" sz="1150" dirty="0">
                         <a:latin typeface="Calibri" charset="0"/>
                         <a:ea typeface="Calibri" charset="0"/>
                         <a:cs typeface="Calibri" charset="0"/>
@@ -14011,7 +16661,7 @@
                         <a:buNone/>
                       </a:pPr>
                       <a:r>
-                        <a:rPr lang="en-US" sz="1200" dirty="0">
+                        <a:rPr lang="en-US" sz="1150" dirty="0">
                           <a:solidFill>
                             <a:srgbClr val="334155"/>
                           </a:solidFill>
@@ -14021,7 +16671,7 @@
                         </a:rPr>
                         <a:t>1.38</a:t>
                       </a:r>
-                      <a:endParaRPr lang="en-US" sz="1200" dirty="0">
+                      <a:endParaRPr lang="en-US" sz="1150" dirty="0">
                         <a:latin typeface="Calibri" charset="0"/>
                         <a:ea typeface="Calibri" charset="0"/>
                         <a:cs typeface="Calibri" charset="0"/>
@@ -14079,7 +16729,7 @@
                         <a:buNone/>
                       </a:pPr>
                       <a:r>
-                        <a:rPr lang="en-US" sz="1200" dirty="0">
+                        <a:rPr lang="en-US" sz="1150" dirty="0">
                           <a:solidFill>
                             <a:srgbClr val="0F766E"/>
                           </a:solidFill>
@@ -14089,7 +16739,7 @@
                         </a:rPr>
                         <a:t>+0.75</a:t>
                       </a:r>
-                      <a:endParaRPr lang="en-US" sz="1200" dirty="0">
+                      <a:endParaRPr lang="en-US" sz="1150" dirty="0">
                         <a:latin typeface="Calibri" charset="0"/>
                         <a:ea typeface="Calibri" charset="0"/>
                         <a:cs typeface="Calibri" charset="0"/>
@@ -14139,7 +16789,7 @@
                   </a:tcPr>
                 </a:tc>
               </a:tr>
-              <a:tr h="384048">
+              <a:tr h="347472">
                 <a:tc>
                   <a:txBody>
                     <a:bodyPr/>
@@ -14149,7 +16799,7 @@
                         <a:buNone/>
                       </a:pPr>
                       <a:r>
-                        <a:rPr lang="en-US" sz="1200" dirty="0">
+                        <a:rPr lang="en-US" sz="1150" dirty="0">
                           <a:solidFill>
                             <a:srgbClr val="334155"/>
                           </a:solidFill>
@@ -14157,9 +16807,9 @@
                           <a:ea typeface="Calibri" pitchFamily="34" charset="-122"/>
                           <a:cs typeface="Calibri" pitchFamily="34" charset="-120"/>
                         </a:rPr>
-                        <a:t>Q4 (Jan to Mar)</a:t>
+                        <a:t>Q4 (Jan-Mar)</a:t>
                       </a:r>
-                      <a:endParaRPr lang="en-US" sz="1200" dirty="0">
+                      <a:endParaRPr lang="en-US" sz="1150" dirty="0">
                         <a:latin typeface="Calibri" charset="0"/>
                         <a:ea typeface="Calibri" charset="0"/>
                         <a:cs typeface="Calibri" charset="0"/>
@@ -14217,7 +16867,7 @@
                         <a:buNone/>
                       </a:pPr>
                       <a:r>
-                        <a:rPr lang="en-US" sz="1200" dirty="0">
+                        <a:rPr lang="en-US" sz="1150" dirty="0">
                           <a:solidFill>
                             <a:srgbClr val="334155"/>
                           </a:solidFill>
@@ -14227,7 +16877,7 @@
                         </a:rPr>
                         <a:t>2.13</a:t>
                       </a:r>
-                      <a:endParaRPr lang="en-US" sz="1200" dirty="0">
+                      <a:endParaRPr lang="en-US" sz="1150" dirty="0">
                         <a:latin typeface="Calibri" charset="0"/>
                         <a:ea typeface="Calibri" charset="0"/>
                         <a:cs typeface="Calibri" charset="0"/>
@@ -14285,7 +16935,7 @@
                         <a:buNone/>
                       </a:pPr>
                       <a:r>
-                        <a:rPr lang="en-US" sz="1200" dirty="0">
+                        <a:rPr lang="en-US" sz="1150" dirty="0">
                           <a:solidFill>
                             <a:srgbClr val="334155"/>
                           </a:solidFill>
@@ -14295,7 +16945,7 @@
                         </a:rPr>
                         <a:t>1.38</a:t>
                       </a:r>
-                      <a:endParaRPr lang="en-US" sz="1200" dirty="0">
+                      <a:endParaRPr lang="en-US" sz="1150" dirty="0">
                         <a:latin typeface="Calibri" charset="0"/>
                         <a:ea typeface="Calibri" charset="0"/>
                         <a:cs typeface="Calibri" charset="0"/>
@@ -14353,7 +17003,7 @@
                         <a:buNone/>
                       </a:pPr>
                       <a:r>
-                        <a:rPr lang="en-US" sz="1200" dirty="0">
+                        <a:rPr lang="en-US" sz="1150" dirty="0">
                           <a:solidFill>
                             <a:srgbClr val="0F766E"/>
                           </a:solidFill>
@@ -14363,7 +17013,7 @@
                         </a:rPr>
                         <a:t>+0.75</a:t>
                       </a:r>
-                      <a:endParaRPr lang="en-US" sz="1200" dirty="0">
+                      <a:endParaRPr lang="en-US" sz="1150" dirty="0">
                         <a:latin typeface="Calibri" charset="0"/>
                         <a:ea typeface="Calibri" charset="0"/>
                         <a:cs typeface="Calibri" charset="0"/>
@@ -14413,7 +17063,7 @@
                   </a:tcPr>
                 </a:tc>
               </a:tr>
-              <a:tr h="384048">
+              <a:tr h="347472">
                 <a:tc>
                   <a:txBody>
                     <a:bodyPr/>
@@ -14423,7 +17073,7 @@
                         <a:buNone/>
                       </a:pPr>
                       <a:r>
-                        <a:rPr lang="en-US" sz="1200" b="1" dirty="0">
+                        <a:rPr lang="en-US" sz="1150" b="1" dirty="0">
                           <a:solidFill>
                             <a:srgbClr val="334155"/>
                           </a:solidFill>
@@ -14433,7 +17083,7 @@
                         </a:rPr>
                         <a:t>FY27 total</a:t>
                       </a:r>
-                      <a:endParaRPr lang="en-US" sz="1200" dirty="0">
+                      <a:endParaRPr lang="en-US" sz="1150" dirty="0">
                         <a:latin typeface="Calibri" charset="0"/>
                         <a:ea typeface="Calibri" charset="0"/>
                         <a:cs typeface="Calibri" charset="0"/>
@@ -14491,7 +17141,7 @@
                         <a:buNone/>
                       </a:pPr>
                       <a:r>
-                        <a:rPr lang="en-US" sz="1200" b="1" dirty="0">
+                        <a:rPr lang="en-US" sz="1150" b="1" dirty="0">
                           <a:solidFill>
                             <a:srgbClr val="334155"/>
                           </a:solidFill>
@@ -14501,7 +17151,7 @@
                         </a:rPr>
                         <a:t>5.55</a:t>
                       </a:r>
-                      <a:endParaRPr lang="en-US" sz="1200" dirty="0">
+                      <a:endParaRPr lang="en-US" sz="1150" dirty="0">
                         <a:latin typeface="Calibri" charset="0"/>
                         <a:ea typeface="Calibri" charset="0"/>
                         <a:cs typeface="Calibri" charset="0"/>
@@ -14559,7 +17209,7 @@
                         <a:buNone/>
                       </a:pPr>
                       <a:r>
-                        <a:rPr lang="en-US" sz="1200" b="1" dirty="0">
+                        <a:rPr lang="en-US" sz="1150" b="1" dirty="0">
                           <a:solidFill>
                             <a:srgbClr val="334155"/>
                           </a:solidFill>
@@ -14569,7 +17219,7 @@
                         </a:rPr>
                         <a:t>5.24</a:t>
                       </a:r>
-                      <a:endParaRPr lang="en-US" sz="1200" dirty="0">
+                      <a:endParaRPr lang="en-US" sz="1150" dirty="0">
                         <a:latin typeface="Calibri" charset="0"/>
                         <a:ea typeface="Calibri" charset="0"/>
                         <a:cs typeface="Calibri" charset="0"/>
@@ -14627,7 +17277,7 @@
                         <a:buNone/>
                       </a:pPr>
                       <a:r>
-                        <a:rPr lang="en-US" sz="1200" b="1" dirty="0">
+                        <a:rPr lang="en-US" sz="1150" b="1" dirty="0">
                           <a:solidFill>
                             <a:srgbClr val="0F766E"/>
                           </a:solidFill>
@@ -14637,7 +17287,7 @@
                         </a:rPr>
                         <a:t>+0.31</a:t>
                       </a:r>
-                      <a:endParaRPr lang="en-US" sz="1200" dirty="0">
+                      <a:endParaRPr lang="en-US" sz="1150" dirty="0">
                         <a:latin typeface="Calibri" charset="0"/>
                         <a:ea typeface="Calibri" charset="0"/>
                         <a:cs typeface="Calibri" charset="0"/>
@@ -14699,8 +17349,8 @@
         </p:nvSpPr>
         <p:spPr>
           <a:xfrm>
-            <a:off x="6492240" y="1417320"/>
-            <a:ext cx="5120640" cy="274320"/>
+            <a:off x="6492240" y="1371600"/>
+            <a:ext cx="5212080" cy="274320"/>
           </a:xfrm>
           <a:prstGeom prst="rect">
             <a:avLst/>
@@ -14724,7 +17374,7 @@
                 <a:ea typeface="Calibri" pitchFamily="34" charset="-122"/>
                 <a:cs typeface="Calibri" pitchFamily="34" charset="-120"/>
               </a:rPr>
-              <a:t>FY27 actual spend to date, by ledger head (Rs Lakh)</a:t>
+              <a:t>Cost by ledger head, FY27 actual to date (Rs Lakh)</a:t>
             </a:r>
             <a:endParaRPr lang="en-US" sz="1200" dirty="0"/>
           </a:p>
@@ -14737,8 +17387,8 @@
           <p:nvPr/>
         </p:nvGraphicFramePr>
         <p:xfrm>
-          <a:off x="6400800" y="1691640"/>
-          <a:ext cx="5394960" cy="3291840"/>
+          <a:off x="6400800" y="1645920"/>
+          <a:ext cx="5394960" cy="2468880"/>
         </p:xfrm>
         <a:graphic xmlns:a="http://schemas.openxmlformats.org/drawingml/2006/main">
           <a:graphicData uri="http://schemas.openxmlformats.org/drawingml/2006/chart">
@@ -14754,28 +17404,24 @@
         </p:nvSpPr>
         <p:spPr>
           <a:xfrm>
-            <a:off x="566928" y="5166360"/>
-            <a:ext cx="10972800" cy="1097280"/>
-          </a:xfrm>
-          <a:prstGeom prst="rect">
-            <a:avLst/>
-          </a:prstGeom>
-          <a:noFill/>
-          <a:ln/>
-        </p:spPr>
-        <p:txBody>
-          <a:bodyPr wrap="square" rtlCol="0" anchor="t"/>
-          <a:lstStyle/>
-          <a:p>
-            <a:pPr marL="177800" indent="-177800">
-              <a:spcAft>
-                <a:spcPts val="700"/>
-              </a:spcAft>
-              <a:buSzPct val="100000"/>
-              <a:buChar char="•"/>
-            </a:pPr>
-            <a:r>
-              <a:rPr lang="en-US" sz="1300" dirty="0">
+            <a:off x="566928" y="4160520"/>
+            <a:ext cx="7315200" cy="274320"/>
+          </a:xfrm>
+          <a:prstGeom prst="rect">
+            <a:avLst/>
+          </a:prstGeom>
+          <a:noFill/>
+          <a:ln/>
+        </p:spPr>
+        <p:txBody>
+          <a:bodyPr wrap="square" rtlCol="0" anchor="ctr"/>
+          <a:lstStyle/>
+          <a:p>
+            <a:pPr indent="0" marL="0">
+              <a:buNone/>
+            </a:pPr>
+            <a:r>
+              <a:rPr lang="en-US" sz="1200" b="1" dirty="0">
                 <a:solidFill>
                   <a:srgbClr val="334155"/>
                 </a:solidFill>
@@ -14783,1083 +17429,7 @@
                 <a:ea typeface="Calibri" pitchFamily="34" charset="-122"/>
                 <a:cs typeface="Calibri" pitchFamily="34" charset="-120"/>
               </a:rPr>
-              <a:t>Salary is 58% of actual spend to date and rises further as the two new hires annualise. Q1 P&amp;L above is booked actual; Q2 to Q4 are projected. Full year cost base is budgeted at Rs 5.24 Cr.</a:t>
-            </a:r>
-            <a:endParaRPr lang="en-US" sz="1300" dirty="0"/>
-          </a:p>
-        </p:txBody>
-      </p:sp>
-      <p:sp>
-        <p:nvSpPr>
-          <p:cNvPr id="10" name="Text 6"/>
-          <p:cNvSpPr/>
-          <p:nvPr/>
-        </p:nvSpPr>
-        <p:spPr>
-          <a:xfrm>
-            <a:off x="566928" y="6446520"/>
-            <a:ext cx="11064240" cy="301752"/>
-          </a:xfrm>
-          <a:prstGeom prst="rect">
-            <a:avLst/>
-          </a:prstGeom>
-          <a:noFill/>
-          <a:ln/>
-        </p:spPr>
-        <p:txBody>
-          <a:bodyPr wrap="square" rtlCol="0" anchor="ctr"/>
-          <a:lstStyle/>
-          <a:p>
-            <a:pPr indent="0" marL="0">
-              <a:buNone/>
-            </a:pPr>
-            <a:r>
-              <a:rPr lang="en-US" sz="900" i="1" dirty="0">
-                <a:solidFill>
-                  <a:srgbClr val="94A3B8"/>
-                </a:solidFill>
-                <a:latin typeface="Calibri" pitchFamily="34" charset="0"/>
-                <a:ea typeface="Calibri" pitchFamily="34" charset="-122"/>
-                <a:cs typeface="Calibri" pitchFamily="34" charset="-120"/>
-              </a:rPr>
-              <a:t>Source: cost heads are Internal actuals to 21 Jul [1]; quarterly build uses Internal run rate [1] and BLR assumptions [2].</a:t>
-            </a:r>
-            <a:endParaRPr lang="en-US" sz="900" dirty="0"/>
-          </a:p>
-        </p:txBody>
-      </p:sp>
-    </p:spTree>
-  </p:cSld>
-  <p:clrMapOvr>
-    <a:masterClrMapping/>
-  </p:clrMapOvr>
-</p:sld>
-</file>
-
-<file path=ppt/slides/slide8.xml><?xml version="1.0" encoding="utf-8"?>
-<p:sld xmlns:a="http://schemas.openxmlformats.org/drawingml/2006/main" xmlns:r="http://schemas.openxmlformats.org/officeDocument/2006/relationships" xmlns:p="http://schemas.openxmlformats.org/presentationml/2006/main">
-  <p:cSld name="Slide 8">
-    <p:bg>
-      <p:bgPr>
-        <a:solidFill>
-          <a:srgbClr val="FFFFFF"/>
-        </a:solidFill>
-      </p:bgPr>
-    </p:bg>
-    <p:spTree>
-      <p:nvGrpSpPr>
-        <p:cNvPr id="1" name=""/>
-        <p:cNvGrpSpPr/>
-        <p:nvPr/>
-      </p:nvGrpSpPr>
-      <p:grpSpPr>
-        <a:xfrm>
-          <a:off x="0" y="0"/>
-          <a:ext cx="0" cy="0"/>
-          <a:chOff x="0" y="0"/>
-          <a:chExt cx="0" cy="0"/>
-        </a:xfrm>
-      </p:grpSpPr>
-      <p:sp>
-        <p:nvSpPr>
-          <p:cNvPr id="2" name="Text 0"/>
-          <p:cNvSpPr/>
-          <p:nvPr/>
-        </p:nvSpPr>
-        <p:spPr>
-          <a:xfrm>
-            <a:off x="11430000" y="402336"/>
-            <a:ext cx="365760" cy="274320"/>
-          </a:xfrm>
-          <a:prstGeom prst="rect">
-            <a:avLst/>
-          </a:prstGeom>
-          <a:noFill/>
-          <a:ln/>
-        </p:spPr>
-        <p:txBody>
-          <a:bodyPr wrap="square" rtlCol="0" anchor="ctr"/>
-          <a:lstStyle/>
-          <a:p>
-            <a:pPr algn="r" indent="0" marL="0">
-              <a:buNone/>
-            </a:pPr>
-            <a:r>
-              <a:rPr lang="en-US" sz="1100" b="1" dirty="0">
-                <a:solidFill>
-                  <a:srgbClr val="94A3B8"/>
-                </a:solidFill>
-                <a:latin typeface="Calibri" pitchFamily="34" charset="0"/>
-                <a:ea typeface="Calibri" pitchFamily="34" charset="-122"/>
-                <a:cs typeface="Calibri" pitchFamily="34" charset="-120"/>
-              </a:rPr>
-              <a:t>08</a:t>
-            </a:r>
-            <a:endParaRPr lang="en-US" sz="1100" dirty="0"/>
-          </a:p>
-        </p:txBody>
-      </p:sp>
-      <p:sp>
-        <p:nvSpPr>
-          <p:cNvPr id="3" name="Text 1"/>
-          <p:cNvSpPr/>
-          <p:nvPr/>
-        </p:nvSpPr>
-        <p:spPr>
-          <a:xfrm>
-            <a:off x="566928" y="438912"/>
-            <a:ext cx="10058400" cy="274320"/>
-          </a:xfrm>
-          <a:prstGeom prst="rect">
-            <a:avLst/>
-          </a:prstGeom>
-          <a:noFill/>
-          <a:ln/>
-        </p:spPr>
-        <p:txBody>
-          <a:bodyPr wrap="square" rtlCol="0" anchor="ctr"/>
-          <a:lstStyle/>
-          <a:p>
-            <a:pPr indent="0" marL="0">
-              <a:buNone/>
-            </a:pPr>
-            <a:r>
-              <a:rPr lang="en-US" sz="1100" b="1" spc="200" kern="0" dirty="0">
-                <a:solidFill>
-                  <a:srgbClr val="2B5CC4"/>
-                </a:solidFill>
-                <a:latin typeface="Calibri" pitchFamily="34" charset="0"/>
-                <a:ea typeface="Calibri" pitchFamily="34" charset="-122"/>
-                <a:cs typeface="Calibri" pitchFamily="34" charset="-120"/>
-              </a:rPr>
-              <a:t>FUNDING AND RUNWAY</a:t>
-            </a:r>
-            <a:endParaRPr lang="en-US" sz="1100" dirty="0"/>
-          </a:p>
-        </p:txBody>
-      </p:sp>
-      <p:sp>
-        <p:nvSpPr>
-          <p:cNvPr id="4" name="Text 2"/>
-          <p:cNvSpPr/>
-          <p:nvPr/>
-        </p:nvSpPr>
-        <p:spPr>
-          <a:xfrm>
-            <a:off x="566928" y="694944"/>
-            <a:ext cx="11064240" cy="548640"/>
-          </a:xfrm>
-          <a:prstGeom prst="rect">
-            <a:avLst/>
-          </a:prstGeom>
-          <a:noFill/>
-          <a:ln/>
-        </p:spPr>
-        <p:txBody>
-          <a:bodyPr wrap="square" rtlCol="0" anchor="ctr"/>
-          <a:lstStyle/>
-          <a:p>
-            <a:pPr indent="0" marL="0">
-              <a:buNone/>
-            </a:pPr>
-            <a:r>
-              <a:rPr lang="en-US" sz="2900" b="1" dirty="0">
-                <a:solidFill>
-                  <a:srgbClr val="0F172A"/>
-                </a:solidFill>
-                <a:latin typeface="Cambria" pitchFamily="34" charset="0"/>
-                <a:ea typeface="Cambria" pitchFamily="34" charset="-122"/>
-                <a:cs typeface="Cambria" pitchFamily="34" charset="-120"/>
-              </a:rPr>
-              <a:t>Solvency is not the question</a:t>
-            </a:r>
-            <a:endParaRPr lang="en-US" sz="2900" dirty="0"/>
-          </a:p>
-        </p:txBody>
-      </p:sp>
-      <p:sp>
-        <p:nvSpPr>
-          <p:cNvPr id="5" name="Text 3"/>
-          <p:cNvSpPr/>
-          <p:nvPr/>
-        </p:nvSpPr>
-        <p:spPr>
-          <a:xfrm>
-            <a:off x="566928" y="1298448"/>
-            <a:ext cx="11064240" cy="457200"/>
-          </a:xfrm>
-          <a:prstGeom prst="rect">
-            <a:avLst/>
-          </a:prstGeom>
-          <a:noFill/>
-          <a:ln/>
-        </p:spPr>
-        <p:txBody>
-          <a:bodyPr wrap="square" rtlCol="0" anchor="ctr"/>
-          <a:lstStyle/>
-          <a:p>
-            <a:pPr indent="0" marL="0">
-              <a:buNone/>
-            </a:pPr>
-            <a:r>
-              <a:rPr lang="en-US" sz="1400" dirty="0">
-                <a:solidFill>
-                  <a:srgbClr val="64748B"/>
-                </a:solidFill>
-                <a:latin typeface="Calibri" pitchFamily="34" charset="0"/>
-                <a:ea typeface="Calibri" pitchFamily="34" charset="-122"/>
-                <a:cs typeface="Calibri" pitchFamily="34" charset="-120"/>
-              </a:rPr>
-              <a:t>The plan is fully funded in every scenario without touching the regulatory net worth.</a:t>
-            </a:r>
-            <a:endParaRPr lang="en-US" sz="1400" dirty="0"/>
-          </a:p>
-        </p:txBody>
-      </p:sp>
-      <p:sp>
-        <p:nvSpPr>
-          <p:cNvPr id="6" name="Shape 4"/>
-          <p:cNvSpPr/>
-          <p:nvPr/>
-        </p:nvSpPr>
-        <p:spPr>
-          <a:xfrm>
-            <a:off x="566928" y="1783080"/>
-            <a:ext cx="2606040" cy="1280160"/>
-          </a:xfrm>
-          <a:prstGeom prst="roundRect">
-            <a:avLst>
-              <a:gd name="adj" fmla="val 4286"/>
-            </a:avLst>
-          </a:prstGeom>
-          <a:solidFill>
-            <a:srgbClr val="F5F8FB"/>
-          </a:solidFill>
-          <a:ln w="12700">
-            <a:solidFill>
-              <a:srgbClr val="E2E8F0"/>
-            </a:solidFill>
-            <a:prstDash val="solid"/>
-          </a:ln>
-        </p:spPr>
-      </p:sp>
-      <p:sp>
-        <p:nvSpPr>
-          <p:cNvPr id="7" name="Text 5"/>
-          <p:cNvSpPr/>
-          <p:nvPr/>
-        </p:nvSpPr>
-        <p:spPr>
-          <a:xfrm>
-            <a:off x="713232" y="1892808"/>
-            <a:ext cx="2313432" cy="274320"/>
-          </a:xfrm>
-          <a:prstGeom prst="rect">
-            <a:avLst/>
-          </a:prstGeom>
-          <a:noFill/>
-          <a:ln/>
-        </p:spPr>
-        <p:txBody>
-          <a:bodyPr wrap="square" rtlCol="0" anchor="ctr"/>
-          <a:lstStyle/>
-          <a:p>
-            <a:pPr indent="0" marL="0">
-              <a:buNone/>
-            </a:pPr>
-            <a:r>
-              <a:rPr lang="en-US" sz="1050" dirty="0">
-                <a:solidFill>
-                  <a:srgbClr val="64748B"/>
-                </a:solidFill>
-                <a:latin typeface="Calibri" pitchFamily="34" charset="0"/>
-                <a:ea typeface="Calibri" pitchFamily="34" charset="-122"/>
-                <a:cs typeface="Calibri" pitchFamily="34" charset="-120"/>
-              </a:rPr>
-              <a:t>Total FD corpus</a:t>
-            </a:r>
-            <a:endParaRPr lang="en-US" sz="1050" dirty="0"/>
-          </a:p>
-        </p:txBody>
-      </p:sp>
-      <p:sp>
-        <p:nvSpPr>
-          <p:cNvPr id="8" name="Text 6"/>
-          <p:cNvSpPr/>
-          <p:nvPr/>
-        </p:nvSpPr>
-        <p:spPr>
-          <a:xfrm>
-            <a:off x="713232" y="2130552"/>
-            <a:ext cx="2313432" cy="411480"/>
-          </a:xfrm>
-          <a:prstGeom prst="rect">
-            <a:avLst/>
-          </a:prstGeom>
-          <a:noFill/>
-          <a:ln/>
-        </p:spPr>
-        <p:txBody>
-          <a:bodyPr wrap="square" rtlCol="0" anchor="ctr"/>
-          <a:lstStyle/>
-          <a:p>
-            <a:pPr indent="0" marL="0">
-              <a:buNone/>
-            </a:pPr>
-            <a:r>
-              <a:rPr lang="en-US" sz="2000" b="1" dirty="0">
-                <a:solidFill>
-                  <a:srgbClr val="0F172A"/>
-                </a:solidFill>
-                <a:latin typeface="Cambria" pitchFamily="34" charset="0"/>
-                <a:ea typeface="Cambria" pitchFamily="34" charset="-122"/>
-                <a:cs typeface="Cambria" pitchFamily="34" charset="-120"/>
-              </a:rPr>
-              <a:t>Rs 26.1 Cr</a:t>
-            </a:r>
-            <a:endParaRPr lang="en-US" sz="2000" dirty="0"/>
-          </a:p>
-        </p:txBody>
-      </p:sp>
-      <p:sp>
-        <p:nvSpPr>
-          <p:cNvPr id="9" name="Shape 7"/>
-          <p:cNvSpPr/>
-          <p:nvPr/>
-        </p:nvSpPr>
-        <p:spPr>
-          <a:xfrm>
-            <a:off x="3328416" y="1783080"/>
-            <a:ext cx="2606040" cy="1280160"/>
-          </a:xfrm>
-          <a:prstGeom prst="roundRect">
-            <a:avLst>
-              <a:gd name="adj" fmla="val 4286"/>
-            </a:avLst>
-          </a:prstGeom>
-          <a:solidFill>
-            <a:srgbClr val="F5F8FB"/>
-          </a:solidFill>
-          <a:ln w="12700">
-            <a:solidFill>
-              <a:srgbClr val="E2E8F0"/>
-            </a:solidFill>
-            <a:prstDash val="solid"/>
-          </a:ln>
-        </p:spPr>
-      </p:sp>
-      <p:sp>
-        <p:nvSpPr>
-          <p:cNvPr id="10" name="Text 8"/>
-          <p:cNvSpPr/>
-          <p:nvPr/>
-        </p:nvSpPr>
-        <p:spPr>
-          <a:xfrm>
-            <a:off x="3474720" y="1892808"/>
-            <a:ext cx="2313432" cy="274320"/>
-          </a:xfrm>
-          <a:prstGeom prst="rect">
-            <a:avLst/>
-          </a:prstGeom>
-          <a:noFill/>
-          <a:ln/>
-        </p:spPr>
-        <p:txBody>
-          <a:bodyPr wrap="square" rtlCol="0" anchor="ctr"/>
-          <a:lstStyle/>
-          <a:p>
-            <a:pPr indent="0" marL="0">
-              <a:buNone/>
-            </a:pPr>
-            <a:r>
-              <a:rPr lang="en-US" sz="1050" dirty="0">
-                <a:solidFill>
-                  <a:srgbClr val="64748B"/>
-                </a:solidFill>
-                <a:latin typeface="Calibri" pitchFamily="34" charset="0"/>
-                <a:ea typeface="Calibri" pitchFamily="34" charset="-122"/>
-                <a:cs typeface="Calibri" pitchFamily="34" charset="-120"/>
-              </a:rPr>
-              <a:t>Locked, SEBI net worth</a:t>
-            </a:r>
-            <a:endParaRPr lang="en-US" sz="1050" dirty="0"/>
-          </a:p>
-        </p:txBody>
-      </p:sp>
-      <p:sp>
-        <p:nvSpPr>
-          <p:cNvPr id="11" name="Text 9"/>
-          <p:cNvSpPr/>
-          <p:nvPr/>
-        </p:nvSpPr>
-        <p:spPr>
-          <a:xfrm>
-            <a:off x="3474720" y="2130552"/>
-            <a:ext cx="2313432" cy="411480"/>
-          </a:xfrm>
-          <a:prstGeom prst="rect">
-            <a:avLst/>
-          </a:prstGeom>
-          <a:noFill/>
-          <a:ln/>
-        </p:spPr>
-        <p:txBody>
-          <a:bodyPr wrap="square" rtlCol="0" anchor="ctr"/>
-          <a:lstStyle/>
-          <a:p>
-            <a:pPr indent="0" marL="0">
-              <a:buNone/>
-            </a:pPr>
-            <a:r>
-              <a:rPr lang="en-US" sz="2000" b="1" dirty="0">
-                <a:solidFill>
-                  <a:srgbClr val="DC2626"/>
-                </a:solidFill>
-                <a:latin typeface="Cambria" pitchFamily="34" charset="0"/>
-                <a:ea typeface="Cambria" pitchFamily="34" charset="-122"/>
-                <a:cs typeface="Cambria" pitchFamily="34" charset="-120"/>
-              </a:rPr>
-              <a:t>Rs 25.0 Cr</a:t>
-            </a:r>
-            <a:endParaRPr lang="en-US" sz="2000" dirty="0"/>
-          </a:p>
-        </p:txBody>
-      </p:sp>
-      <p:sp>
-        <p:nvSpPr>
-          <p:cNvPr id="12" name="Text 10"/>
-          <p:cNvSpPr/>
-          <p:nvPr/>
-        </p:nvSpPr>
-        <p:spPr>
-          <a:xfrm>
-            <a:off x="3474720" y="2569464"/>
-            <a:ext cx="2313432" cy="365760"/>
-          </a:xfrm>
-          <a:prstGeom prst="rect">
-            <a:avLst/>
-          </a:prstGeom>
-          <a:noFill/>
-          <a:ln/>
-        </p:spPr>
-        <p:txBody>
-          <a:bodyPr wrap="square" rtlCol="0" anchor="ctr"/>
-          <a:lstStyle/>
-          <a:p>
-            <a:pPr indent="0" marL="0">
-              <a:buNone/>
-            </a:pPr>
-            <a:r>
-              <a:rPr lang="en-US" sz="900" dirty="0">
-                <a:solidFill>
-                  <a:srgbClr val="94A3B8"/>
-                </a:solidFill>
-                <a:latin typeface="Calibri" pitchFamily="34" charset="0"/>
-                <a:ea typeface="Calibri" pitchFamily="34" charset="-122"/>
-                <a:cs typeface="Calibri" pitchFamily="34" charset="-120"/>
-              </a:rPr>
-              <a:t>held at all times</a:t>
-            </a:r>
-            <a:endParaRPr lang="en-US" sz="900" dirty="0"/>
-          </a:p>
-        </p:txBody>
-      </p:sp>
-      <p:sp>
-        <p:nvSpPr>
-          <p:cNvPr id="13" name="Shape 11"/>
-          <p:cNvSpPr/>
-          <p:nvPr/>
-        </p:nvSpPr>
-        <p:spPr>
-          <a:xfrm>
-            <a:off x="6089904" y="1783080"/>
-            <a:ext cx="2606040" cy="1280160"/>
-          </a:xfrm>
-          <a:prstGeom prst="roundRect">
-            <a:avLst>
-              <a:gd name="adj" fmla="val 4286"/>
-            </a:avLst>
-          </a:prstGeom>
-          <a:solidFill>
-            <a:srgbClr val="F5F8FB"/>
-          </a:solidFill>
-          <a:ln w="12700">
-            <a:solidFill>
-              <a:srgbClr val="E2E8F0"/>
-            </a:solidFill>
-            <a:prstDash val="solid"/>
-          </a:ln>
-        </p:spPr>
-      </p:sp>
-      <p:sp>
-        <p:nvSpPr>
-          <p:cNvPr id="14" name="Text 12"/>
-          <p:cNvSpPr/>
-          <p:nvPr/>
-        </p:nvSpPr>
-        <p:spPr>
-          <a:xfrm>
-            <a:off x="6236208" y="1892808"/>
-            <a:ext cx="2313432" cy="274320"/>
-          </a:xfrm>
-          <a:prstGeom prst="rect">
-            <a:avLst/>
-          </a:prstGeom>
-          <a:noFill/>
-          <a:ln/>
-        </p:spPr>
-        <p:txBody>
-          <a:bodyPr wrap="square" rtlCol="0" anchor="ctr"/>
-          <a:lstStyle/>
-          <a:p>
-            <a:pPr indent="0" marL="0">
-              <a:buNone/>
-            </a:pPr>
-            <a:r>
-              <a:rPr lang="en-US" sz="1050" dirty="0">
-                <a:solidFill>
-                  <a:srgbClr val="64748B"/>
-                </a:solidFill>
-                <a:latin typeface="Calibri" pitchFamily="34" charset="0"/>
-                <a:ea typeface="Calibri" pitchFamily="34" charset="-122"/>
-                <a:cs typeface="Calibri" pitchFamily="34" charset="-120"/>
-              </a:rPr>
-              <a:t>Accessible funds</a:t>
-            </a:r>
-            <a:endParaRPr lang="en-US" sz="1050" dirty="0"/>
-          </a:p>
-        </p:txBody>
-      </p:sp>
-      <p:sp>
-        <p:nvSpPr>
-          <p:cNvPr id="15" name="Text 13"/>
-          <p:cNvSpPr/>
-          <p:nvPr/>
-        </p:nvSpPr>
-        <p:spPr>
-          <a:xfrm>
-            <a:off x="6236208" y="2130552"/>
-            <a:ext cx="2313432" cy="411480"/>
-          </a:xfrm>
-          <a:prstGeom prst="rect">
-            <a:avLst/>
-          </a:prstGeom>
-          <a:noFill/>
-          <a:ln/>
-        </p:spPr>
-        <p:txBody>
-          <a:bodyPr wrap="square" rtlCol="0" anchor="ctr"/>
-          <a:lstStyle/>
-          <a:p>
-            <a:pPr indent="0" marL="0">
-              <a:buNone/>
-            </a:pPr>
-            <a:r>
-              <a:rPr lang="en-US" sz="2000" b="1" dirty="0">
-                <a:solidFill>
-                  <a:srgbClr val="0F766E"/>
-                </a:solidFill>
-                <a:latin typeface="Cambria" pitchFamily="34" charset="0"/>
-                <a:ea typeface="Cambria" pitchFamily="34" charset="-122"/>
-                <a:cs typeface="Cambria" pitchFamily="34" charset="-120"/>
-              </a:rPr>
-              <a:t>about Rs 3.0 Cr</a:t>
-            </a:r>
-            <a:endParaRPr lang="en-US" sz="2000" dirty="0"/>
-          </a:p>
-        </p:txBody>
-      </p:sp>
-      <p:sp>
-        <p:nvSpPr>
-          <p:cNvPr id="16" name="Text 14"/>
-          <p:cNvSpPr/>
-          <p:nvPr/>
-        </p:nvSpPr>
-        <p:spPr>
-          <a:xfrm>
-            <a:off x="6236208" y="2569464"/>
-            <a:ext cx="2313432" cy="365760"/>
-          </a:xfrm>
-          <a:prstGeom prst="rect">
-            <a:avLst/>
-          </a:prstGeom>
-          <a:noFill/>
-          <a:ln/>
-        </p:spPr>
-        <p:txBody>
-          <a:bodyPr wrap="square" rtlCol="0" anchor="ctr"/>
-          <a:lstStyle/>
-          <a:p>
-            <a:pPr indent="0" marL="0">
-              <a:buNone/>
-            </a:pPr>
-            <a:r>
-              <a:rPr lang="en-US" sz="900" dirty="0">
-                <a:solidFill>
-                  <a:srgbClr val="94A3B8"/>
-                </a:solidFill>
-                <a:latin typeface="Calibri" pitchFamily="34" charset="0"/>
-                <a:ea typeface="Calibri" pitchFamily="34" charset="-122"/>
-                <a:cs typeface="Calibri" pitchFamily="34" charset="-120"/>
-              </a:rPr>
-              <a:t>non locked FD plus bank</a:t>
-            </a:r>
-            <a:endParaRPr lang="en-US" sz="900" dirty="0"/>
-          </a:p>
-        </p:txBody>
-      </p:sp>
-      <p:sp>
-        <p:nvSpPr>
-          <p:cNvPr id="17" name="Shape 15"/>
-          <p:cNvSpPr/>
-          <p:nvPr/>
-        </p:nvSpPr>
-        <p:spPr>
-          <a:xfrm>
-            <a:off x="8851392" y="1783080"/>
-            <a:ext cx="2606040" cy="1280160"/>
-          </a:xfrm>
-          <a:prstGeom prst="roundRect">
-            <a:avLst>
-              <a:gd name="adj" fmla="val 4286"/>
-            </a:avLst>
-          </a:prstGeom>
-          <a:solidFill>
-            <a:srgbClr val="F5F8FB"/>
-          </a:solidFill>
-          <a:ln w="12700">
-            <a:solidFill>
-              <a:srgbClr val="E2E8F0"/>
-            </a:solidFill>
-            <a:prstDash val="solid"/>
-          </a:ln>
-        </p:spPr>
-      </p:sp>
-      <p:sp>
-        <p:nvSpPr>
-          <p:cNvPr id="18" name="Text 16"/>
-          <p:cNvSpPr/>
-          <p:nvPr/>
-        </p:nvSpPr>
-        <p:spPr>
-          <a:xfrm>
-            <a:off x="8997696" y="1892808"/>
-            <a:ext cx="2313432" cy="274320"/>
-          </a:xfrm>
-          <a:prstGeom prst="rect">
-            <a:avLst/>
-          </a:prstGeom>
-          <a:noFill/>
-          <a:ln/>
-        </p:spPr>
-        <p:txBody>
-          <a:bodyPr wrap="square" rtlCol="0" anchor="ctr"/>
-          <a:lstStyle/>
-          <a:p>
-            <a:pPr indent="0" marL="0">
-              <a:buNone/>
-            </a:pPr>
-            <a:r>
-              <a:rPr lang="en-US" sz="1050" dirty="0">
-                <a:solidFill>
-                  <a:srgbClr val="64748B"/>
-                </a:solidFill>
-                <a:latin typeface="Calibri" pitchFamily="34" charset="0"/>
-                <a:ea typeface="Calibri" pitchFamily="34" charset="-122"/>
-                <a:cs typeface="Calibri" pitchFamily="34" charset="-120"/>
-              </a:rPr>
-              <a:t>Annual FD interest</a:t>
-            </a:r>
-            <a:endParaRPr lang="en-US" sz="1050" dirty="0"/>
-          </a:p>
-        </p:txBody>
-      </p:sp>
-      <p:sp>
-        <p:nvSpPr>
-          <p:cNvPr id="19" name="Text 17"/>
-          <p:cNvSpPr/>
-          <p:nvPr/>
-        </p:nvSpPr>
-        <p:spPr>
-          <a:xfrm>
-            <a:off x="8997696" y="2130552"/>
-            <a:ext cx="2313432" cy="411480"/>
-          </a:xfrm>
-          <a:prstGeom prst="rect">
-            <a:avLst/>
-          </a:prstGeom>
-          <a:noFill/>
-          <a:ln/>
-        </p:spPr>
-        <p:txBody>
-          <a:bodyPr wrap="square" rtlCol="0" anchor="ctr"/>
-          <a:lstStyle/>
-          <a:p>
-            <a:pPr indent="0" marL="0">
-              <a:buNone/>
-            </a:pPr>
-            <a:r>
-              <a:rPr lang="en-US" sz="2000" b="1" dirty="0">
-                <a:solidFill>
-                  <a:srgbClr val="0F766E"/>
-                </a:solidFill>
-                <a:latin typeface="Cambria" pitchFamily="34" charset="0"/>
-                <a:ea typeface="Cambria" pitchFamily="34" charset="-122"/>
-                <a:cs typeface="Cambria" pitchFamily="34" charset="-120"/>
-              </a:rPr>
-              <a:t>about Rs 1.8 Cr</a:t>
-            </a:r>
-            <a:endParaRPr lang="en-US" sz="2000" dirty="0"/>
-          </a:p>
-        </p:txBody>
-      </p:sp>
-      <p:sp>
-        <p:nvSpPr>
-          <p:cNvPr id="20" name="Text 18"/>
-          <p:cNvSpPr/>
-          <p:nvPr/>
-        </p:nvSpPr>
-        <p:spPr>
-          <a:xfrm>
-            <a:off x="8997696" y="2569464"/>
-            <a:ext cx="2313432" cy="365760"/>
-          </a:xfrm>
-          <a:prstGeom prst="rect">
-            <a:avLst/>
-          </a:prstGeom>
-          <a:noFill/>
-          <a:ln/>
-        </p:spPr>
-        <p:txBody>
-          <a:bodyPr wrap="square" rtlCol="0" anchor="ctr"/>
-          <a:lstStyle/>
-          <a:p>
-            <a:pPr indent="0" marL="0">
-              <a:buNone/>
-            </a:pPr>
-            <a:r>
-              <a:rPr lang="en-US" sz="900" dirty="0">
-                <a:solidFill>
-                  <a:srgbClr val="94A3B8"/>
-                </a:solidFill>
-                <a:latin typeface="Calibri" pitchFamily="34" charset="0"/>
-                <a:ea typeface="Calibri" pitchFamily="34" charset="-122"/>
-                <a:cs typeface="Calibri" pitchFamily="34" charset="-120"/>
-              </a:rPr>
-              <a:t>recurring cash income</a:t>
-            </a:r>
-            <a:endParaRPr lang="en-US" sz="900" dirty="0"/>
-          </a:p>
-        </p:txBody>
-      </p:sp>
-      <p:sp>
-        <p:nvSpPr>
-          <p:cNvPr id="21" name="Text 19"/>
-          <p:cNvSpPr/>
-          <p:nvPr/>
-        </p:nvSpPr>
-        <p:spPr>
-          <a:xfrm>
-            <a:off x="566928" y="3383280"/>
-            <a:ext cx="10972800" cy="2377440"/>
-          </a:xfrm>
-          <a:prstGeom prst="rect">
-            <a:avLst/>
-          </a:prstGeom>
-          <a:noFill/>
-          <a:ln/>
-        </p:spPr>
-        <p:txBody>
-          <a:bodyPr wrap="square" rtlCol="0" anchor="t"/>
-          <a:lstStyle/>
-          <a:p>
-            <a:pPr marL="177800" indent="-177800">
-              <a:spcAft>
-                <a:spcPts val="700"/>
-              </a:spcAft>
-              <a:buSzPct val="100000"/>
-              <a:buChar char="•"/>
-            </a:pPr>
-            <a:r>
-              <a:rPr lang="en-US" sz="1400" dirty="0">
-                <a:solidFill>
-                  <a:srgbClr val="334155"/>
-                </a:solidFill>
-                <a:latin typeface="Calibri" pitchFamily="34" charset="0"/>
-                <a:ea typeface="Calibri" pitchFamily="34" charset="-122"/>
-                <a:cs typeface="Calibri" pitchFamily="34" charset="-120"/>
-              </a:rPr>
-              <a:t>Base case S1 breaks even, so no drawdown is needed.</a:t>
-            </a:r>
-            <a:endParaRPr lang="en-US" sz="1400" dirty="0"/>
-          </a:p>
-          <a:p>
-            <a:pPr marL="177800" indent="-177800">
-              <a:spcAft>
-                <a:spcPts val="700"/>
-              </a:spcAft>
-              <a:buSzPct val="100000"/>
-              <a:buChar char="•"/>
-            </a:pPr>
-            <a:r>
-              <a:rPr lang="en-US" sz="1400" dirty="0">
-                <a:solidFill>
-                  <a:srgbClr val="334155"/>
-                </a:solidFill>
-                <a:latin typeface="Calibri" pitchFamily="34" charset="0"/>
-                <a:ea typeface="Calibri" pitchFamily="34" charset="-122"/>
-                <a:cs typeface="Calibri" pitchFamily="34" charset="-120"/>
-              </a:rPr>
-              <a:t>Even the worst case S3, a Rs 2.6 Cr loss, is about Rs 2.5 Cr of cash burn, comfortably inside the roughly Rs 3.0 Cr accessible plus Rs 1.8 Cr of annual interest.</a:t>
-            </a:r>
-            <a:endParaRPr lang="en-US" sz="1400" dirty="0"/>
-          </a:p>
-          <a:p>
-            <a:pPr marL="177800" indent="-177800">
-              <a:spcAft>
-                <a:spcPts val="700"/>
-              </a:spcAft>
-              <a:buSzPct val="100000"/>
-              <a:buChar char="•"/>
-            </a:pPr>
-            <a:r>
-              <a:rPr lang="en-US" sz="1400" dirty="0">
-                <a:solidFill>
-                  <a:srgbClr val="334155"/>
-                </a:solidFill>
-                <a:latin typeface="Calibri" pitchFamily="34" charset="0"/>
-                <a:ea typeface="Calibri" pitchFamily="34" charset="-122"/>
-                <a:cs typeface="Calibri" pitchFamily="34" charset="-120"/>
-              </a:rPr>
-              <a:t>The Rs 25 Cr net worth stays intact in every scenario, so the SEBI registration is never at risk. The question is operational self sufficiency, not survival.</a:t>
-            </a:r>
-            <a:endParaRPr lang="en-US" sz="1400" dirty="0"/>
-          </a:p>
-        </p:txBody>
-      </p:sp>
-      <p:sp>
-        <p:nvSpPr>
-          <p:cNvPr id="22" name="Text 20"/>
-          <p:cNvSpPr/>
-          <p:nvPr/>
-        </p:nvSpPr>
-        <p:spPr>
-          <a:xfrm>
-            <a:off x="566928" y="6446520"/>
-            <a:ext cx="11064240" cy="301752"/>
-          </a:xfrm>
-          <a:prstGeom prst="rect">
-            <a:avLst/>
-          </a:prstGeom>
-          <a:noFill/>
-          <a:ln/>
-        </p:spPr>
-        <p:txBody>
-          <a:bodyPr wrap="square" rtlCol="0" anchor="ctr"/>
-          <a:lstStyle/>
-          <a:p>
-            <a:pPr indent="0" marL="0">
-              <a:buNone/>
-            </a:pPr>
-            <a:r>
-              <a:rPr lang="en-US" sz="900" i="1" dirty="0">
-                <a:solidFill>
-                  <a:srgbClr val="94A3B8"/>
-                </a:solidFill>
-                <a:latin typeface="Calibri" pitchFamily="34" charset="0"/>
-                <a:ea typeface="Calibri" pitchFamily="34" charset="-122"/>
-                <a:cs typeface="Calibri" pitchFamily="34" charset="-120"/>
-              </a:rPr>
-              <a:t>Source: Internal [1]. SEBI net worth basis [10].</a:t>
-            </a:r>
-            <a:endParaRPr lang="en-US" sz="900" dirty="0"/>
-          </a:p>
-        </p:txBody>
-      </p:sp>
-    </p:spTree>
-  </p:cSld>
-  <p:clrMapOvr>
-    <a:masterClrMapping/>
-  </p:clrMapOvr>
-</p:sld>
-</file>
-
-<file path=ppt/slides/slide9.xml><?xml version="1.0" encoding="utf-8"?>
-<p:sld xmlns:a="http://schemas.openxmlformats.org/drawingml/2006/main" xmlns:r="http://schemas.openxmlformats.org/officeDocument/2006/relationships" xmlns:p="http://schemas.openxmlformats.org/presentationml/2006/main">
-  <p:cSld name="Slide 9">
-    <p:bg>
-      <p:bgPr>
-        <a:solidFill>
-          <a:srgbClr val="FFFFFF"/>
-        </a:solidFill>
-      </p:bgPr>
-    </p:bg>
-    <p:spTree>
-      <p:nvGrpSpPr>
-        <p:cNvPr id="1" name=""/>
-        <p:cNvGrpSpPr/>
-        <p:nvPr/>
-      </p:nvGrpSpPr>
-      <p:grpSpPr>
-        <a:xfrm>
-          <a:off x="0" y="0"/>
-          <a:ext cx="0" cy="0"/>
-          <a:chOff x="0" y="0"/>
-          <a:chExt cx="0" cy="0"/>
-        </a:xfrm>
-      </p:grpSpPr>
-      <p:sp>
-        <p:nvSpPr>
-          <p:cNvPr id="2" name="Text 0"/>
-          <p:cNvSpPr/>
-          <p:nvPr/>
-        </p:nvSpPr>
-        <p:spPr>
-          <a:xfrm>
-            <a:off x="11430000" y="402336"/>
-            <a:ext cx="365760" cy="274320"/>
-          </a:xfrm>
-          <a:prstGeom prst="rect">
-            <a:avLst/>
-          </a:prstGeom>
-          <a:noFill/>
-          <a:ln/>
-        </p:spPr>
-        <p:txBody>
-          <a:bodyPr wrap="square" rtlCol="0" anchor="ctr"/>
-          <a:lstStyle/>
-          <a:p>
-            <a:pPr algn="r" indent="0" marL="0">
-              <a:buNone/>
-            </a:pPr>
-            <a:r>
-              <a:rPr lang="en-US" sz="1100" b="1" dirty="0">
-                <a:solidFill>
-                  <a:srgbClr val="94A3B8"/>
-                </a:solidFill>
-                <a:latin typeface="Calibri" pitchFamily="34" charset="0"/>
-                <a:ea typeface="Calibri" pitchFamily="34" charset="-122"/>
-                <a:cs typeface="Calibri" pitchFamily="34" charset="-120"/>
-              </a:rPr>
-              <a:t>09</a:t>
-            </a:r>
-            <a:endParaRPr lang="en-US" sz="1100" dirty="0"/>
-          </a:p>
-        </p:txBody>
-      </p:sp>
-      <p:sp>
-        <p:nvSpPr>
-          <p:cNvPr id="3" name="Text 1"/>
-          <p:cNvSpPr/>
-          <p:nvPr/>
-        </p:nvSpPr>
-        <p:spPr>
-          <a:xfrm>
-            <a:off x="566928" y="438912"/>
-            <a:ext cx="10058400" cy="274320"/>
-          </a:xfrm>
-          <a:prstGeom prst="rect">
-            <a:avLst/>
-          </a:prstGeom>
-          <a:noFill/>
-          <a:ln/>
-        </p:spPr>
-        <p:txBody>
-          <a:bodyPr wrap="square" rtlCol="0" anchor="ctr"/>
-          <a:lstStyle/>
-          <a:p>
-            <a:pPr indent="0" marL="0">
-              <a:buNone/>
-            </a:pPr>
-            <a:r>
-              <a:rPr lang="en-US" sz="1100" b="1" spc="200" kern="0" dirty="0">
-                <a:solidFill>
-                  <a:srgbClr val="2B5CC4"/>
-                </a:solidFill>
-                <a:latin typeface="Calibri" pitchFamily="34" charset="0"/>
-                <a:ea typeface="Calibri" pitchFamily="34" charset="-122"/>
-                <a:cs typeface="Calibri" pitchFamily="34" charset="-120"/>
-              </a:rPr>
-              <a:t>THE CLIMB</a:t>
-            </a:r>
-            <a:endParaRPr lang="en-US" sz="1100" dirty="0"/>
-          </a:p>
-        </p:txBody>
-      </p:sp>
-      <p:sp>
-        <p:nvSpPr>
-          <p:cNvPr id="4" name="Text 2"/>
-          <p:cNvSpPr/>
-          <p:nvPr/>
-        </p:nvSpPr>
-        <p:spPr>
-          <a:xfrm>
-            <a:off x="566928" y="694944"/>
-            <a:ext cx="11064240" cy="548640"/>
-          </a:xfrm>
-          <a:prstGeom prst="rect">
-            <a:avLst/>
-          </a:prstGeom>
-          <a:noFill/>
-          <a:ln/>
-        </p:spPr>
-        <p:txBody>
-          <a:bodyPr wrap="square" rtlCol="0" anchor="ctr"/>
-          <a:lstStyle/>
-          <a:p>
-            <a:pPr indent="0" marL="0">
-              <a:buNone/>
-            </a:pPr>
-            <a:r>
-              <a:rPr lang="en-US" sz="2900" b="1" dirty="0">
-                <a:solidFill>
-                  <a:srgbClr val="0F172A"/>
-                </a:solidFill>
-                <a:latin typeface="Cambria" pitchFamily="34" charset="0"/>
-                <a:ea typeface="Cambria" pitchFamily="34" charset="-122"/>
-                <a:cs typeface="Cambria" pitchFamily="34" charset="-120"/>
-              </a:rPr>
-              <a:t>Revenue trajectory and the income mix flip</a:t>
-            </a:r>
-            <a:endParaRPr lang="en-US" sz="2900" dirty="0"/>
-          </a:p>
-        </p:txBody>
-      </p:sp>
-      <p:sp>
-        <p:nvSpPr>
-          <p:cNvPr id="5" name="Text 3"/>
-          <p:cNvSpPr/>
-          <p:nvPr/>
-        </p:nvSpPr>
-        <p:spPr>
-          <a:xfrm>
-            <a:off x="566928" y="1417320"/>
-            <a:ext cx="5486400" cy="274320"/>
-          </a:xfrm>
-          <a:prstGeom prst="rect">
-            <a:avLst/>
-          </a:prstGeom>
-          <a:noFill/>
-          <a:ln/>
-        </p:spPr>
-        <p:txBody>
-          <a:bodyPr wrap="square" rtlCol="0" anchor="ctr"/>
-          <a:lstStyle/>
-          <a:p>
-            <a:pPr indent="0" marL="0">
-              <a:buNone/>
-            </a:pPr>
-            <a:r>
-              <a:rPr lang="en-US" sz="1200" b="1" dirty="0">
-                <a:solidFill>
-                  <a:srgbClr val="334155"/>
-                </a:solidFill>
-                <a:latin typeface="Calibri" pitchFamily="34" charset="0"/>
-                <a:ea typeface="Calibri" pitchFamily="34" charset="-122"/>
-                <a:cs typeface="Calibri" pitchFamily="34" charset="-120"/>
-              </a:rPr>
-              <a:t>Operating revenue build, base case (Rs Cr)</a:t>
+              <a:t>Salary breakup, run rate (Rs Cr per year)</a:t>
             </a:r>
             <a:endParaRPr lang="en-US" sz="1200" dirty="0"/>
           </a:p>
@@ -15867,68 +17437,13 @@
       </p:sp>
       <p:graphicFrame>
         <p:nvGraphicFramePr>
-          <p:cNvPr id="6" name="Chart 0" descr=""/>
+          <p:cNvPr id="10" name="Chart 1" descr=""/>
           <p:cNvGraphicFramePr/>
           <p:nvPr/>
         </p:nvGraphicFramePr>
         <p:xfrm>
-          <a:off x="566928" y="1737360"/>
-          <a:ext cx="5669280" cy="4023360"/>
-        </p:xfrm>
-        <a:graphic xmlns:a="http://schemas.openxmlformats.org/drawingml/2006/main">
-          <a:graphicData uri="http://schemas.openxmlformats.org/drawingml/2006/chart">
-            <c:chart xmlns:c="http://schemas.openxmlformats.org/drawingml/2006/chart" r:id="rId1"/>
-          </a:graphicData>
-        </a:graphic>
-      </p:graphicFrame>
-      <p:sp>
-        <p:nvSpPr>
-          <p:cNvPr id="7" name="Text 4"/>
-          <p:cNvSpPr/>
-          <p:nvPr/>
-        </p:nvSpPr>
-        <p:spPr>
-          <a:xfrm>
-            <a:off x="6492240" y="1417320"/>
-            <a:ext cx="5486400" cy="274320"/>
-          </a:xfrm>
-          <a:prstGeom prst="rect">
-            <a:avLst/>
-          </a:prstGeom>
-          <a:noFill/>
-          <a:ln/>
-        </p:spPr>
-        <p:txBody>
-          <a:bodyPr wrap="square" rtlCol="0" anchor="ctr"/>
-          <a:lstStyle/>
-          <a:p>
-            <a:pPr indent="0" marL="0">
-              <a:buNone/>
-            </a:pPr>
-            <a:r>
-              <a:rPr lang="en-US" sz="1200" b="1" dirty="0">
-                <a:solidFill>
-                  <a:srgbClr val="334155"/>
-                </a:solidFill>
-                <a:latin typeface="Calibri" pitchFamily="34" charset="0"/>
-                <a:ea typeface="Calibri" pitchFamily="34" charset="-122"/>
-                <a:cs typeface="Calibri" pitchFamily="34" charset="-120"/>
-              </a:rPr>
-              <a:t>Income mix, FD versus ratings</a:t>
-            </a:r>
-            <a:endParaRPr lang="en-US" sz="1200" dirty="0"/>
-          </a:p>
-        </p:txBody>
-      </p:sp>
-      <p:graphicFrame>
-        <p:nvGraphicFramePr>
-          <p:cNvPr id="8" name="Chart 1" descr=""/>
-          <p:cNvGraphicFramePr/>
-          <p:nvPr/>
-        </p:nvGraphicFramePr>
-        <p:xfrm>
-          <a:off x="6400800" y="1737360"/>
-          <a:ext cx="5394960" cy="4023360"/>
+          <a:off x="566928" y="4434840"/>
+          <a:ext cx="6766560" cy="1554480"/>
         </p:xfrm>
         <a:graphic xmlns:a="http://schemas.openxmlformats.org/drawingml/2006/main">
           <a:graphicData uri="http://schemas.openxmlformats.org/drawingml/2006/chart">
@@ -15938,38 +17453,77 @@
       </p:graphicFrame>
       <p:sp>
         <p:nvSpPr>
-          <p:cNvPr id="9" name="Text 5"/>
-          <p:cNvSpPr/>
-          <p:nvPr/>
-        </p:nvSpPr>
-        <p:spPr>
-          <a:xfrm>
-            <a:off x="566928" y="6446520"/>
-            <a:ext cx="11064240" cy="301752"/>
-          </a:xfrm>
-          <a:prstGeom prst="rect">
-            <a:avLst/>
-          </a:prstGeom>
-          <a:noFill/>
-          <a:ln/>
-        </p:spPr>
-        <p:txBody>
-          <a:bodyPr wrap="square" rtlCol="0" anchor="ctr"/>
+          <p:cNvPr id="11" name="Text 6"/>
+          <p:cNvSpPr/>
+          <p:nvPr/>
+        </p:nvSpPr>
+        <p:spPr>
+          <a:xfrm>
+            <a:off x="7635240" y="4480560"/>
+            <a:ext cx="3977640" cy="1463040"/>
+          </a:xfrm>
+          <a:prstGeom prst="rect">
+            <a:avLst/>
+          </a:prstGeom>
+          <a:noFill/>
+          <a:ln/>
+        </p:spPr>
+        <p:txBody>
+          <a:bodyPr wrap="square" rtlCol="0" anchor="t"/>
           <a:lstStyle/>
           <a:p>
             <a:pPr indent="0" marL="0">
               <a:buNone/>
             </a:pPr>
             <a:r>
-              <a:rPr lang="en-US" sz="900" i="1" dirty="0">
-                <a:solidFill>
-                  <a:srgbClr val="94A3B8"/>
+              <a:rPr lang="en-US" sz="1250" dirty="0">
+                <a:solidFill>
+                  <a:srgbClr val="334155"/>
                 </a:solidFill>
                 <a:latin typeface="Calibri" pitchFamily="34" charset="0"/>
                 <a:ea typeface="Calibri" pitchFamily="34" charset="-122"/>
                 <a:cs typeface="Calibri" pitchFamily="34" charset="-120"/>
               </a:rPr>
-              <a:t>Source: FY26 actual, Internal [1]. FY27 to FY29 modelled from Internal baseline [1] and BLR assumptions [2].</a:t>
+              <a:t>People cost run rate Rs 3.95 Cr a year. Salary is 58% of actual spend to date and the single lever the Board controls. Full year cost base is budgeted at Rs 5.24 Cr.</a:t>
+            </a:r>
+            <a:endParaRPr lang="en-US" sz="1250" dirty="0"/>
+          </a:p>
+        </p:txBody>
+      </p:sp>
+      <p:sp>
+        <p:nvSpPr>
+          <p:cNvPr id="12" name="Text 7"/>
+          <p:cNvSpPr/>
+          <p:nvPr/>
+        </p:nvSpPr>
+        <p:spPr>
+          <a:xfrm>
+            <a:off x="566928" y="6446520"/>
+            <a:ext cx="11064240" cy="301752"/>
+          </a:xfrm>
+          <a:prstGeom prst="rect">
+            <a:avLst/>
+          </a:prstGeom>
+          <a:noFill/>
+          <a:ln/>
+        </p:spPr>
+        <p:txBody>
+          <a:bodyPr wrap="square" rtlCol="0" anchor="ctr"/>
+          <a:lstStyle/>
+          <a:p>
+            <a:pPr indent="0" marL="0">
+              <a:buNone/>
+            </a:pPr>
+            <a:r>
+              <a:rPr lang="en-US" sz="900" i="1" dirty="0">
+                <a:solidFill>
+                  <a:srgbClr val="94A3B8"/>
+                </a:solidFill>
+                <a:latin typeface="Calibri" pitchFamily="34" charset="0"/>
+                <a:ea typeface="Calibri" pitchFamily="34" charset="-122"/>
+                <a:cs typeface="Calibri" pitchFamily="34" charset="-120"/>
+              </a:rPr>
+              <a:t>Source: cost heads and payroll are Internal actuals and run rate [1]; the two hires are Board approved CTCs [2].</a:t>
             </a:r>
             <a:endParaRPr lang="en-US" sz="900" dirty="0"/>
           </a:p>

--- a/board/AOP_board_presentation.pptx
+++ b/board/AOP_board_presentation.pptx
@@ -126,10 +126,41 @@
   <c:date1904 val="0"/>
   <c:roundedCorners val="1"/>
   <c:chart>
-    <c:autoTitleDeleted val="1"/>
+    <c:title>
+      <c:tx>
+        <c:rich>
+          <a:bodyPr/>
+          <a:lstStyle/>
+          <a:p>
+            <a:pPr>
+              <a:defRPr sz="1200" b="0" i="0" u="none" strike="noStrike">
+                <a:solidFill>
+                  <a:srgbClr val="5B6B7B"/>
+                </a:solidFill>
+                <a:latin typeface="Calibri"/>
+              </a:defRPr>
+            </a:pPr>
+            <a:r>
+              <a:rPr sz="1200" b="0" i="0" u="none" strike="noStrike">
+                <a:solidFill>
+                  <a:srgbClr val="5B6B7B"/>
+                </a:solidFill>
+                <a:latin typeface="Calibri"/>
+              </a:rPr>
+              <a:t>Cumulative debt rated, base case (Rs Cr)</a:t>
+            </a:r>
+          </a:p>
+        </c:rich>
+      </c:tx>
+      <c:layout/>
+      <c:overlay val="0"/>
+    </c:title>
+    <c:autoTitleDeleted val="0"/>
     <c:plotArea>
       <c:layout/>
-      <c:areaChart>
+      <c:barChart>
+        <c:barDir val="col"/>
+        <c:grouping val="clustered"/>
         <c:varyColors val="0"/>
         <c:ser>
           <c:idx val="0"/>
@@ -140,16 +171,14 @@
               <c:strCache>
                 <c:ptCount val="1"/>
                 <c:pt idx="0">
-                  <c:v>Income (FD + ratings)</c:v>
+                  <c:v>Cumulative rated debt (Rs Cr)</c:v>
                 </c:pt>
               </c:strCache>
             </c:strRef>
           </c:tx>
           <c:spPr>
             <a:solidFill>
-              <a:srgbClr val="0F766E">
-                <a:alpha val="35000"/>
-              </a:srgbClr>
+              <a:srgbClr val="1E4E79"/>
             </a:solidFill>
             <a:effectLst/>
           </c:spPr>
@@ -161,552 +190,9 @@
               <a:lstStyle/>
               <a:p>
                 <a:pPr>
-                  <a:defRPr b="0" i="0" strike="noStrike" sz="1200" u="none">
+                  <a:defRPr b="0" i="0" strike="noStrike" sz="900" u="none">
                     <a:solidFill>
-                      <a:srgbClr val="000000"/>
-                    </a:solidFill>
-                    <a:latin typeface="Arial"/>
-                  </a:defRPr>
-                </a:pPr>
-              </a:p>
-            </c:txPr>
-            <c:showLegendKey val="0"/>
-            <c:showVal val="0"/>
-            <c:showCatName val="0"/>
-            <c:showSerName val="0"/>
-            <c:showPercent val="0"/>
-            <c:showBubbleSize val="0"/>
-            <c:showLeaderLines val="0"/>
-          </c:dLbls>
-          <c:cat>
-            <c:multiLvlStrRef>
-              <c:f>Sheet1!$A$2:$A$16</c:f>
-              <c:multiLvlStrCache>
-                <c:ptCount val="15"/>
-                <c:lvl>
-                  <c:pt idx="0">
-                    <c:v>Apr</c:v>
-                  </c:pt>
-                  <c:pt idx="1">
-                    <c:v>May</c:v>
-                  </c:pt>
-                  <c:pt idx="2">
-                    <c:v>Jun</c:v>
-                  </c:pt>
-                  <c:pt idx="3">
-                    <c:v>Jul</c:v>
-                  </c:pt>
-                  <c:pt idx="4">
-                    <c:v>Aug</c:v>
-                  </c:pt>
-                  <c:pt idx="5">
-                    <c:v>Sep</c:v>
-                  </c:pt>
-                  <c:pt idx="6">
-                    <c:v>Oct</c:v>
-                  </c:pt>
-                  <c:pt idx="7">
-                    <c:v>Nov</c:v>
-                  </c:pt>
-                  <c:pt idx="8">
-                    <c:v>Dec</c:v>
-                  </c:pt>
-                  <c:pt idx="9">
-                    <c:v>Jan</c:v>
-                  </c:pt>
-                  <c:pt idx="10">
-                    <c:v>Feb</c:v>
-                  </c:pt>
-                  <c:pt idx="11">
-                    <c:v>Mar</c:v>
-                  </c:pt>
-                  <c:pt idx="12">
-                    <c:v>Apr</c:v>
-                  </c:pt>
-                  <c:pt idx="13">
-                    <c:v>May</c:v>
-                  </c:pt>
-                  <c:pt idx="14">
-                    <c:v>Jun</c:v>
-                  </c:pt>
-                </c:lvl>
-              </c:multiLvlStrCache>
-            </c:multiLvlStrRef>
-          </c:cat>
-          <c:val>
-            <c:numRef>
-              <c:f>Sheet1!$B$2:$B$16</c:f>
-              <c:numCache>
-                <c:formatCode>General</c:formatCode>
-                <c:ptCount val="15"/>
-                <c:pt idx="0">
-                  <c:v>0</c:v>
-                </c:pt>
-                <c:pt idx="1">
-                  <c:v>0</c:v>
-                </c:pt>
-                <c:pt idx="2">
-                  <c:v>0.134</c:v>
-                </c:pt>
-                <c:pt idx="3">
-                  <c:v>0.015</c:v>
-                </c:pt>
-                <c:pt idx="4">
-                  <c:v>0.146</c:v>
-                </c:pt>
-                <c:pt idx="5">
-                  <c:v>0.29</c:v>
-                </c:pt>
-                <c:pt idx="6">
-                  <c:v>0.146</c:v>
-                </c:pt>
-                <c:pt idx="7">
-                  <c:v>0.145</c:v>
-                </c:pt>
-                <c:pt idx="8">
-                  <c:v>0.145</c:v>
-                </c:pt>
-                <c:pt idx="9">
-                  <c:v>0.156</c:v>
-                </c:pt>
-                <c:pt idx="10">
-                  <c:v>0.235</c:v>
-                </c:pt>
-                <c:pt idx="11">
-                  <c:v>0.149</c:v>
-                </c:pt>
-                <c:pt idx="12">
-                  <c:v>0.175</c:v>
-                </c:pt>
-                <c:pt idx="13">
-                  <c:v>0.194</c:v>
-                </c:pt>
-                <c:pt idx="14">
-                  <c:v>0.232</c:v>
-                </c:pt>
-              </c:numCache>
-            </c:numRef>
-          </c:val>
-        </c:ser>
-        <c:dLbls>
-          <c:numFmt formatCode="#,##0" sourceLinked="0"/>
-          <c:txPr>
-            <a:bodyPr/>
-            <a:lstStyle/>
-            <a:p>
-              <a:pPr>
-                <a:defRPr b="0" i="0" strike="noStrike" sz="1200" u="none">
-                  <a:solidFill>
-                    <a:srgbClr val="000000"/>
-                  </a:solidFill>
-                  <a:latin typeface="Arial"/>
-                </a:defRPr>
-              </a:pPr>
-            </a:p>
-          </c:txPr>
-          <c:showLegendKey val="0"/>
-          <c:showVal val="0"/>
-          <c:showCatName val="0"/>
-          <c:showSerName val="0"/>
-          <c:showPercent val="0"/>
-          <c:showBubbleSize val="0"/>
-          <c:showLeaderLines val="0"/>
-        </c:dLbls>
-        <c:axId val="2094734554"/>
-        <c:axId val="2094734552"/>
-        <c:axId val="2094734556"/>
-      </c:areaChart>
-      <c:lineChart>
-        <c:varyColors val="0"/>
-        <c:ser>
-          <c:idx val="1"/>
-          <c:order val="1"/>
-          <c:tx>
-            <c:strRef>
-              <c:f>Sheet1!$C$1</c:f>
-              <c:strCache>
-                <c:ptCount val="1"/>
-                <c:pt idx="0">
-                  <c:v>Expense, all in</c:v>
-                </c:pt>
-              </c:strCache>
-            </c:strRef>
-          </c:tx>
-          <c:spPr>
-            <a:solidFill>
-              <a:srgbClr val="334155"/>
-            </a:solidFill>
-            <a:ln w="25400" cap="flat">
-              <a:solidFill>
-                <a:srgbClr val="334155"/>
-              </a:solidFill>
-              <a:prstDash val="solid"/>
-              <a:round/>
-            </a:ln>
-            <a:effectLst/>
-          </c:spPr>
-          <c:invertIfNegative val="0"/>
-          <c:dLbls>
-            <c:numFmt formatCode="#,##0" sourceLinked="0"/>
-            <c:txPr>
-              <a:bodyPr/>
-              <a:lstStyle/>
-              <a:p>
-                <a:pPr>
-                  <a:defRPr b="0" i="0" strike="noStrike" sz="1200" u="none">
-                    <a:solidFill>
-                      <a:srgbClr val="000000"/>
-                    </a:solidFill>
-                    <a:latin typeface="Arial"/>
-                  </a:defRPr>
-                </a:pPr>
-              </a:p>
-            </c:txPr>
-            <c:showLegendKey val="0"/>
-            <c:showVal val="0"/>
-            <c:showCatName val="0"/>
-            <c:showSerName val="0"/>
-            <c:showPercent val="0"/>
-            <c:showBubbleSize val="0"/>
-            <c:showLeaderLines val="0"/>
-          </c:dLbls>
-          <c:marker>
-            <c:symbol val="none"/>
-            <c:size val="6"/>
-            <c:spPr>
-              <a:solidFill>
-                <a:srgbClr val="334155"/>
-              </a:solidFill>
-              <a:ln w="9525" cap="flat">
-                <a:solidFill>
-                  <a:srgbClr val="334155"/>
-                </a:solidFill>
-                <a:prstDash val="solid"/>
-                <a:round/>
-              </a:ln>
-              <a:effectLst/>
-            </c:spPr>
-          </c:marker>
-          <c:cat>
-            <c:multiLvlStrRef>
-              <c:f>Sheet1!$A$2:$A$16</c:f>
-              <c:multiLvlStrCache>
-                <c:ptCount val="15"/>
-                <c:lvl>
-                  <c:pt idx="0">
-                    <c:v>Apr</c:v>
-                  </c:pt>
-                  <c:pt idx="1">
-                    <c:v>May</c:v>
-                  </c:pt>
-                  <c:pt idx="2">
-                    <c:v>Jun</c:v>
-                  </c:pt>
-                  <c:pt idx="3">
-                    <c:v>Jul</c:v>
-                  </c:pt>
-                  <c:pt idx="4">
-                    <c:v>Aug</c:v>
-                  </c:pt>
-                  <c:pt idx="5">
-                    <c:v>Sep</c:v>
-                  </c:pt>
-                  <c:pt idx="6">
-                    <c:v>Oct</c:v>
-                  </c:pt>
-                  <c:pt idx="7">
-                    <c:v>Nov</c:v>
-                  </c:pt>
-                  <c:pt idx="8">
-                    <c:v>Dec</c:v>
-                  </c:pt>
-                  <c:pt idx="9">
-                    <c:v>Jan</c:v>
-                  </c:pt>
-                  <c:pt idx="10">
-                    <c:v>Feb</c:v>
-                  </c:pt>
-                  <c:pt idx="11">
-                    <c:v>Mar</c:v>
-                  </c:pt>
-                  <c:pt idx="12">
-                    <c:v>Apr</c:v>
-                  </c:pt>
-                  <c:pt idx="13">
-                    <c:v>May</c:v>
-                  </c:pt>
-                  <c:pt idx="14">
-                    <c:v>Jun</c:v>
-                  </c:pt>
-                </c:lvl>
-              </c:multiLvlStrCache>
-            </c:multiLvlStrRef>
-          </c:cat>
-          <c:val>
-            <c:numRef>
-              <c:f>Sheet1!$C$2:$C$16</c:f>
-              <c:numCache>
-                <c:formatCode>General</c:formatCode>
-                <c:ptCount val="15"/>
-                <c:pt idx="0">
-                  <c:v>0.036</c:v>
-                </c:pt>
-                <c:pt idx="1">
-                  <c:v>0.095</c:v>
-                </c:pt>
-                <c:pt idx="2">
-                  <c:v>0.171</c:v>
-                </c:pt>
-                <c:pt idx="3">
-                  <c:v>0.1</c:v>
-                </c:pt>
-                <c:pt idx="4">
-                  <c:v>0.14</c:v>
-                </c:pt>
-                <c:pt idx="5">
-                  <c:v>0.183</c:v>
-                </c:pt>
-                <c:pt idx="6">
-                  <c:v>0.177</c:v>
-                </c:pt>
-                <c:pt idx="7">
-                  <c:v>0.196</c:v>
-                </c:pt>
-                <c:pt idx="8">
-                  <c:v>0.334</c:v>
-                </c:pt>
-                <c:pt idx="9">
-                  <c:v>0.267</c:v>
-                </c:pt>
-                <c:pt idx="10">
-                  <c:v>0.359</c:v>
-                </c:pt>
-                <c:pt idx="11">
-                  <c:v>0.38</c:v>
-                </c:pt>
-                <c:pt idx="12">
-                  <c:v>0.364</c:v>
-                </c:pt>
-                <c:pt idx="13">
-                  <c:v>0.33</c:v>
-                </c:pt>
-                <c:pt idx="14">
-                  <c:v>0.463</c:v>
-                </c:pt>
-              </c:numCache>
-            </c:numRef>
-          </c:val>
-          <c:smooth val="0"/>
-        </c:ser>
-        <c:dLbls>
-          <c:numFmt formatCode="#,##0" sourceLinked="0"/>
-          <c:txPr>
-            <a:bodyPr/>
-            <a:lstStyle/>
-            <a:p>
-              <a:pPr>
-                <a:defRPr b="0" i="0" strike="noStrike" sz="1200" u="none">
-                  <a:solidFill>
-                    <a:srgbClr val="000000"/>
-                  </a:solidFill>
-                  <a:latin typeface="Arial"/>
-                </a:defRPr>
-              </a:pPr>
-            </a:p>
-          </c:txPr>
-          <c:showLegendKey val="0"/>
-          <c:showVal val="0"/>
-          <c:showCatName val="0"/>
-          <c:showSerName val="0"/>
-          <c:showPercent val="0"/>
-          <c:showBubbleSize val="0"/>
-          <c:showLeaderLines val="0"/>
-        </c:dLbls>
-        <c:marker val="1"/>
-        <c:axId val="2094734554"/>
-        <c:axId val="2094734552"/>
-        <c:axId val="2094734556"/>
-      </c:lineChart>
-      <c:catAx>
-        <c:axId val="2094734554"/>
-        <c:scaling>
-          <c:orientation val="minMax"/>
-        </c:scaling>
-        <c:delete val="0"/>
-        <c:axPos val="b"/>
-        <c:numFmt formatCode="General" sourceLinked="1"/>
-        <c:majorTickMark val="out"/>
-        <c:minorTickMark val="none"/>
-        <c:tickLblPos val="low"/>
-        <c:spPr>
-          <a:ln w="12700" cap="flat">
-            <a:solidFill>
-              <a:srgbClr val="888888"/>
-            </a:solidFill>
-            <a:prstDash val="solid"/>
-            <a:round/>
-          </a:ln>
-        </c:spPr>
-        <c:txPr>
-          <a:bodyPr/>
-          <a:lstStyle/>
-          <a:p>
-            <a:pPr>
-              <a:defRPr sz="800" b="0" i="0" u="none" strike="noStrike">
-                <a:solidFill>
-                  <a:srgbClr val="94A3B8"/>
-                </a:solidFill>
-                <a:latin typeface="Calibri"/>
-              </a:defRPr>
-            </a:pPr>
-            <a:endParaRPr lang="en-US"/>
-          </a:p>
-        </c:txPr>
-        <c:crossAx val="2094734552"/>
-        <c:crosses val="autoZero"/>
-        <c:auto val="1"/>
-        <c:lblAlgn val="ctr"/>
-        <c:noMultiLvlLbl val="1"/>
-      </c:catAx>
-      <c:valAx>
-        <c:axId val="2094734552"/>
-        <c:scaling>
-          <c:orientation val="minMax"/>
-          <c:max val="0.5"/>
-          <c:min val="0"/>
-        </c:scaling>
-        <c:delete val="0"/>
-        <c:axPos val="l"/>
-        <c:majorGridlines>
-          <c:spPr>
-            <a:ln w="6350" cap="flat">
-              <a:solidFill>
-                <a:srgbClr val="E2E8F0"/>
-              </a:solidFill>
-              <a:prstDash val="solid"/>
-              <a:round/>
-            </a:ln>
-          </c:spPr>
-        </c:majorGridlines>
-        <c:numFmt formatCode="General" sourceLinked="0"/>
-        <c:majorTickMark val="out"/>
-        <c:minorTickMark val="none"/>
-        <c:tickLblPos val="nextTo"/>
-        <c:spPr>
-          <a:ln w="12700" cap="flat">
-            <a:solidFill>
-              <a:srgbClr val="888888"/>
-            </a:solidFill>
-            <a:prstDash val="solid"/>
-            <a:round/>
-          </a:ln>
-        </c:spPr>
-        <c:txPr>
-          <a:bodyPr/>
-          <a:lstStyle/>
-          <a:p>
-            <a:pPr>
-              <a:defRPr sz="900" b="0" i="0" u="none" strike="noStrike">
-                <a:solidFill>
-                  <a:srgbClr val="94A3B8"/>
-                </a:solidFill>
-                <a:latin typeface="Calibri"/>
-              </a:defRPr>
-            </a:pPr>
-            <a:endParaRPr lang="en-US"/>
-          </a:p>
-        </c:txPr>
-        <c:crossAx val="2094734554"/>
-        <c:crosses val="autoZero"/>
-        <c:crossBetween val="midCat"/>
-      </c:valAx>
-      <c:spPr>
-        <a:noFill/>
-        <a:ln>
-          <a:noFill/>
-        </a:ln>
-        <a:effectLst/>
-      </c:spPr>
-    </c:plotArea>
-    <c:legend>
-      <c:legendPos val="b"/>
-      <c:overlay val="0"/>
-      <c:txPr>
-        <a:bodyPr/>
-        <a:lstStyle/>
-        <a:p>
-          <a:pPr>
-            <a:defRPr sz="1000">
-              <a:solidFill>
-                <a:srgbClr val="334155"/>
-              </a:solidFill>
-              <a:latin typeface="Calibri"/>
-              <a:cs typeface="Calibri"/>
-            </a:defRPr>
-          </a:pPr>
-          <a:endParaRPr lang="en-US"/>
-        </a:p>
-      </c:txPr>
-    </c:legend>
-    <c:plotVisOnly val="1"/>
-    <c:dispBlanksAs val="span"/>
-  </c:chart>
-  <c:spPr>
-    <a:noFill/>
-    <a:ln>
-      <a:noFill/>
-    </a:ln>
-    <a:effectLst/>
-  </c:spPr>
-  <c:externalData r:id="rId1">
-    <c:autoUpdate val="0"/>
-  </c:externalData>
-</c:chartSpace>
-</file>
-
-<file path=ppt/charts/chart10.xml><?xml version="1.0" encoding="utf-8"?>
-<c:chartSpace xmlns:c="http://schemas.openxmlformats.org/drawingml/2006/chart" xmlns:a="http://schemas.openxmlformats.org/drawingml/2006/main" xmlns:r="http://schemas.openxmlformats.org/officeDocument/2006/relationships">
-  <c:date1904 val="0"/>
-  <c:roundedCorners val="1"/>
-  <c:chart>
-    <c:autoTitleDeleted val="1"/>
-    <c:plotArea>
-      <c:layout/>
-      <c:barChart>
-        <c:barDir val="bar"/>
-        <c:grouping val="clustered"/>
-        <c:varyColors val="0"/>
-        <c:ser>
-          <c:idx val="0"/>
-          <c:order val="0"/>
-          <c:tx>
-            <c:strRef>
-              <c:f>Sheet1!$B$1</c:f>
-              <c:strCache>
-                <c:ptCount val="1"/>
-                <c:pt idx="0">
-                  <c:v>Rating revenue</c:v>
-                </c:pt>
-              </c:strCache>
-            </c:strRef>
-          </c:tx>
-          <c:spPr>
-            <a:solidFill>
-              <a:srgbClr val="2B5CC4"/>
-            </a:solidFill>
-            <a:effectLst/>
-          </c:spPr>
-          <c:invertIfNegative val="0"/>
-          <c:dLbls>
-            <c:numFmt formatCode="#,##0" sourceLinked="0"/>
-            <c:txPr>
-              <a:bodyPr/>
-              <a:lstStyle/>
-              <a:p>
-                <a:pPr>
-                  <a:defRPr b="0" i="0" strike="noStrike" sz="950" u="none">
-                    <a:solidFill>
-                      <a:srgbClr val="334155"/>
+                      <a:srgbClr val="2B3F52"/>
                     </a:solidFill>
                     <a:latin typeface="Calibri"/>
                   </a:defRPr>
@@ -723,30 +209,27 @@
           </c:dLbls>
           <c:cat>
             <c:multiLvlStrRef>
-              <c:f>Sheet1!$A$2:$A$8</c:f>
+              <c:f>Sheet1!$A$2:$A$7</c:f>
               <c:multiLvlStrCache>
-                <c:ptCount val="7"/>
+                <c:ptCount val="6"/>
                 <c:lvl>
                   <c:pt idx="0">
-                    <c:v>ACER now</c:v>
+                    <c:v>Oct</c:v>
                   </c:pt>
                   <c:pt idx="1">
-                    <c:v>ACER FY28</c:v>
+                    <c:v>Nov</c:v>
                   </c:pt>
                   <c:pt idx="2">
-                    <c:v>Acuite</c:v>
+                    <c:v>Dec</c:v>
                   </c:pt>
                   <c:pt idx="3">
-                    <c:v>Infomerics</c:v>
+                    <c:v>Jan</c:v>
                   </c:pt>
                   <c:pt idx="4">
-                    <c:v>India Ratings</c:v>
+                    <c:v>Feb</c:v>
                   </c:pt>
                   <c:pt idx="5">
-                    <c:v>CARE</c:v>
-                  </c:pt>
-                  <c:pt idx="6">
-                    <c:v>CRISIL</c:v>
+                    <c:v>Mar</c:v>
                   </c:pt>
                 </c:lvl>
               </c:multiLvlStrCache>
@@ -754,30 +237,27 @@
           </c:cat>
           <c:val>
             <c:numRef>
-              <c:f>Sheet1!$B$2:$B$8</c:f>
+              <c:f>Sheet1!$B$2:$B$7</c:f>
               <c:numCache>
                 <c:formatCode>General</c:formatCode>
-                <c:ptCount val="7"/>
+                <c:ptCount val="6"/>
                 <c:pt idx="0">
-                  <c:v>0.9</c:v>
+                  <c:v>1600</c:v>
                 </c:pt>
                 <c:pt idx="1">
-                  <c:v>8</c:v>
+                  <c:v>3200</c:v>
                 </c:pt>
                 <c:pt idx="2">
-                  <c:v>57</c:v>
+                  <c:v>4800</c:v>
                 </c:pt>
                 <c:pt idx="3">
-                  <c:v>95</c:v>
+                  <c:v>6400</c:v>
                 </c:pt>
                 <c:pt idx="4">
-                  <c:v>251</c:v>
+                  <c:v>8000</c:v>
                 </c:pt>
                 <c:pt idx="5">
-                  <c:v>423</c:v>
-                </c:pt>
-                <c:pt idx="6">
-                  <c:v>909</c:v>
+                  <c:v>9600</c:v>
                 </c:pt>
               </c:numCache>
             </c:numRef>
@@ -790,251 +270,9 @@
             <a:lstStyle/>
             <a:p>
               <a:pPr>
-                <a:defRPr b="0" i="0" strike="noStrike" sz="950" u="none">
+                <a:defRPr b="0" i="0" strike="noStrike" sz="900" u="none">
                   <a:solidFill>
-                    <a:srgbClr val="334155"/>
-                  </a:solidFill>
-                  <a:latin typeface="Calibri"/>
-                </a:defRPr>
-              </a:pPr>
-            </a:p>
-          </c:txPr>
-          <c:showLegendKey val="0"/>
-          <c:showVal val="1"/>
-          <c:showCatName val="0"/>
-          <c:showSerName val="0"/>
-          <c:showPercent val="0"/>
-          <c:showBubbleSize val="0"/>
-          <c:showLeaderLines val="0"/>
-        </c:dLbls>
-        <c:gapWidth val="40"/>
-        <c:overlap val="0"/>
-        <c:axId val="2094734554"/>
-        <c:axId val="2094734552"/>
-        <c:axId val="2094734556"/>
-      </c:barChart>
-      <c:catAx>
-        <c:axId val="2094734554"/>
-        <c:scaling>
-          <c:orientation val="minMax"/>
-        </c:scaling>
-        <c:delete val="0"/>
-        <c:axPos val="l"/>
-        <c:numFmt formatCode="General" sourceLinked="1"/>
-        <c:majorTickMark val="out"/>
-        <c:minorTickMark val="none"/>
-        <c:tickLblPos val="nextTo"/>
-        <c:spPr>
-          <a:ln w="12700" cap="flat">
-            <a:solidFill>
-              <a:srgbClr val="888888"/>
-            </a:solidFill>
-            <a:prstDash val="solid"/>
-            <a:round/>
-          </a:ln>
-        </c:spPr>
-        <c:txPr>
-          <a:bodyPr/>
-          <a:lstStyle/>
-          <a:p>
-            <a:pPr>
-              <a:defRPr sz="1050" b="0" i="0" u="none" strike="noStrike">
-                <a:solidFill>
-                  <a:srgbClr val="334155"/>
-                </a:solidFill>
-                <a:latin typeface="Calibri"/>
-              </a:defRPr>
-            </a:pPr>
-            <a:endParaRPr lang="en-US"/>
-          </a:p>
-        </c:txPr>
-        <c:crossAx val="2094734552"/>
-        <c:crosses val="autoZero"/>
-        <c:auto val="1"/>
-        <c:lblAlgn val="ctr"/>
-        <c:noMultiLvlLbl val="1"/>
-      </c:catAx>
-      <c:valAx>
-        <c:axId val="2094734552"/>
-        <c:scaling>
-          <c:orientation val="minMax"/>
-          <c:max val="1000"/>
-        </c:scaling>
-        <c:delete val="1"/>
-        <c:axPos val="b"/>
-        <c:numFmt formatCode="General" sourceLinked="0"/>
-        <c:majorTickMark val="out"/>
-        <c:minorTickMark val="none"/>
-        <c:tickLblPos val="low"/>
-        <c:spPr>
-          <a:ln w="12700" cap="flat">
-            <a:solidFill>
-              <a:srgbClr val="888888"/>
-            </a:solidFill>
-            <a:prstDash val="solid"/>
-            <a:round/>
-          </a:ln>
-        </c:spPr>
-        <c:txPr>
-          <a:bodyPr/>
-          <a:lstStyle/>
-          <a:p>
-            <a:pPr>
-              <a:defRPr sz="1200" b="0" i="0" u="none" strike="noStrike">
-                <a:solidFill>
-                  <a:srgbClr val="000000"/>
-                </a:solidFill>
-                <a:latin typeface="Arial"/>
-              </a:defRPr>
-            </a:pPr>
-            <a:endParaRPr lang="en-US"/>
-          </a:p>
-        </c:txPr>
-        <c:crossAx val="2094734554"/>
-        <c:crosses val="autoZero"/>
-        <c:crossBetween val="between"/>
-      </c:valAx>
-      <c:spPr>
-        <a:noFill/>
-        <a:ln>
-          <a:noFill/>
-        </a:ln>
-        <a:effectLst/>
-      </c:spPr>
-    </c:plotArea>
-    <c:plotVisOnly val="1"/>
-    <c:dispBlanksAs val="span"/>
-  </c:chart>
-  <c:spPr>
-    <a:noFill/>
-    <a:ln>
-      <a:noFill/>
-    </a:ln>
-    <a:effectLst/>
-  </c:spPr>
-  <c:externalData r:id="rId1">
-    <c:autoUpdate val="0"/>
-  </c:externalData>
-</c:chartSpace>
-</file>
-
-<file path=ppt/charts/chart11.xml><?xml version="1.0" encoding="utf-8"?>
-<c:chartSpace xmlns:c="http://schemas.openxmlformats.org/drawingml/2006/chart" xmlns:a="http://schemas.openxmlformats.org/drawingml/2006/main" xmlns:r="http://schemas.openxmlformats.org/officeDocument/2006/relationships">
-  <c:date1904 val="0"/>
-  <c:roundedCorners val="1"/>
-  <c:chart>
-    <c:autoTitleDeleted val="1"/>
-    <c:plotArea>
-      <c:layout/>
-      <c:barChart>
-        <c:barDir val="col"/>
-        <c:grouping val="clustered"/>
-        <c:varyColors val="0"/>
-        <c:ser>
-          <c:idx val="0"/>
-          <c:order val="0"/>
-          <c:tx>
-            <c:strRef>
-              <c:f>Sheet1!$B$1</c:f>
-              <c:strCache>
-                <c:ptCount val="1"/>
-                <c:pt idx="0">
-                  <c:v>ACER rating revenue</c:v>
-                </c:pt>
-              </c:strCache>
-            </c:strRef>
-          </c:tx>
-          <c:spPr>
-            <a:solidFill>
-              <a:srgbClr val="0F766E"/>
-            </a:solidFill>
-            <a:effectLst/>
-          </c:spPr>
-          <c:invertIfNegative val="0"/>
-          <c:dLbls>
-            <c:numFmt formatCode="#,##0" sourceLinked="0"/>
-            <c:txPr>
-              <a:bodyPr/>
-              <a:lstStyle/>
-              <a:p>
-                <a:pPr>
-                  <a:defRPr b="0" i="0" strike="noStrike" sz="1000" u="none">
-                    <a:solidFill>
-                      <a:srgbClr val="334155"/>
-                    </a:solidFill>
-                    <a:latin typeface="Calibri"/>
-                  </a:defRPr>
-                </a:pPr>
-              </a:p>
-            </c:txPr>
-            <c:showLegendKey val="0"/>
-            <c:showVal val="1"/>
-            <c:showCatName val="0"/>
-            <c:showSerName val="0"/>
-            <c:showPercent val="0"/>
-            <c:showBubbleSize val="0"/>
-            <c:showLeaderLines val="0"/>
-          </c:dLbls>
-          <c:cat>
-            <c:multiLvlStrRef>
-              <c:f>Sheet1!$A$2:$A$6</c:f>
-              <c:multiLvlStrCache>
-                <c:ptCount val="5"/>
-                <c:lvl>
-                  <c:pt idx="0">
-                    <c:v>FY26</c:v>
-                  </c:pt>
-                  <c:pt idx="1">
-                    <c:v>FY27</c:v>
-                  </c:pt>
-                  <c:pt idx="2">
-                    <c:v>FY28</c:v>
-                  </c:pt>
-                  <c:pt idx="3">
-                    <c:v>FY29</c:v>
-                  </c:pt>
-                  <c:pt idx="4">
-                    <c:v>FY30</c:v>
-                  </c:pt>
-                </c:lvl>
-              </c:multiLvlStrCache>
-            </c:multiLvlStrRef>
-          </c:cat>
-          <c:val>
-            <c:numRef>
-              <c:f>Sheet1!$B$2:$B$6</c:f>
-              <c:numCache>
-                <c:formatCode>General</c:formatCode>
-                <c:ptCount val="5"/>
-                <c:pt idx="0">
-                  <c:v>0.08</c:v>
-                </c:pt>
-                <c:pt idx="1">
-                  <c:v>3.8</c:v>
-                </c:pt>
-                <c:pt idx="2">
-                  <c:v>8.3</c:v>
-                </c:pt>
-                <c:pt idx="3">
-                  <c:v>11.3</c:v>
-                </c:pt>
-                <c:pt idx="4">
-                  <c:v>16</c:v>
-                </c:pt>
-              </c:numCache>
-            </c:numRef>
-          </c:val>
-        </c:ser>
-        <c:dLbls>
-          <c:numFmt formatCode="#,##0" sourceLinked="0"/>
-          <c:txPr>
-            <a:bodyPr/>
-            <a:lstStyle/>
-            <a:p>
-              <a:pPr>
-                <a:defRPr b="0" i="0" strike="noStrike" sz="1000" u="none">
-                  <a:solidFill>
-                    <a:srgbClr val="334155"/>
+                    <a:srgbClr val="2B3F52"/>
                   </a:solidFill>
                   <a:latin typeface="Calibri"/>
                 </a:defRPr>
@@ -1082,7 +320,7 @@
             <a:pPr>
               <a:defRPr sz="1100" b="0" i="0" u="none" strike="noStrike">
                 <a:solidFill>
-                  <a:srgbClr val="334155"/>
+                  <a:srgbClr val="2B3F52"/>
                 </a:solidFill>
                 <a:latin typeface="Calibri"/>
               </a:defRPr>
@@ -1100,7 +338,7 @@
         <c:axId val="2094734552"/>
         <c:scaling>
           <c:orientation val="minMax"/>
-          <c:max val="19"/>
+          <c:max val="11000"/>
         </c:scaling>
         <c:delete val="1"/>
         <c:axPos val="l"/>
@@ -1160,7 +398,7 @@
 </c:chartSpace>
 </file>
 
-<file path=ppt/charts/chart12.xml><?xml version="1.0" encoding="utf-8"?>
+<file path=ppt/charts/chart10.xml><?xml version="1.0" encoding="utf-8"?>
 <c:chartSpace xmlns:c="http://schemas.openxmlformats.org/drawingml/2006/chart" xmlns:a="http://schemas.openxmlformats.org/drawingml/2006/main" xmlns:r="http://schemas.openxmlformats.org/officeDocument/2006/relationships">
   <c:date1904 val="0"/>
   <c:roundedCorners val="1"/>
@@ -1212,7 +450,7 @@
             <c:bubble3D val="0"/>
             <c:spPr>
               <a:solidFill>
-                <a:srgbClr val="2B5CC4"/>
+                <a:srgbClr val="1E4E79"/>
               </a:solidFill>
               <a:effectLst/>
             </c:spPr>
@@ -1222,7 +460,7 @@
             <c:bubble3D val="0"/>
             <c:spPr>
               <a:solidFill>
-                <a:srgbClr val="94A3B8"/>
+                <a:srgbClr val="8EA6B8"/>
               </a:solidFill>
               <a:effectLst/>
             </c:spPr>
@@ -1382,7 +620,7 @@
           <a:pPr>
             <a:defRPr sz="1000">
               <a:solidFill>
-                <a:srgbClr val="334155"/>
+                <a:srgbClr val="2B3F52"/>
               </a:solidFill>
               <a:latin typeface="Calibri"/>
               <a:cs typeface="Calibri"/>
@@ -1413,41 +651,12 @@
   <c:date1904 val="0"/>
   <c:roundedCorners val="1"/>
   <c:chart>
-    <c:title>
-      <c:tx>
-        <c:rich>
-          <a:bodyPr/>
-          <a:lstStyle/>
-          <a:p>
-            <a:pPr>
-              <a:defRPr sz="1200" b="0" i="0" u="none" strike="noStrike">
-                <a:solidFill>
-                  <a:srgbClr val="64748B"/>
-                </a:solidFill>
-                <a:latin typeface="Calibri"/>
-              </a:defRPr>
-            </a:pPr>
-            <a:r>
-              <a:rPr sz="1200" b="0" i="0" u="none" strike="noStrike">
-                <a:solidFill>
-                  <a:srgbClr val="64748B"/>
-                </a:solidFill>
-                <a:latin typeface="Calibri"/>
-              </a:rPr>
-              <a:t>Cumulative debt rated, base case (Rs Cr)</a:t>
-            </a:r>
-          </a:p>
-        </c:rich>
-      </c:tx>
-      <c:layout/>
-      <c:overlay val="0"/>
-    </c:title>
-    <c:autoTitleDeleted val="0"/>
+    <c:autoTitleDeleted val="1"/>
     <c:plotArea>
       <c:layout/>
       <c:barChart>
         <c:barDir val="col"/>
-        <c:grouping val="clustered"/>
+        <c:grouping val="stacked"/>
         <c:varyColors val="0"/>
         <c:ser>
           <c:idx val="0"/>
@@ -1458,14 +667,14 @@
               <c:strCache>
                 <c:ptCount val="1"/>
                 <c:pt idx="0">
-                  <c:v>Cumulative rated debt (Rs Cr)</c:v>
+                  <c:v>FD returns</c:v>
                 </c:pt>
               </c:strCache>
             </c:strRef>
           </c:tx>
           <c:spPr>
             <a:solidFill>
-              <a:srgbClr val="2B5CC4"/>
+              <a:srgbClr val="8EA6B8"/>
             </a:solidFill>
             <a:effectLst/>
           </c:spPr>
@@ -1477,263 +686,16 @@
               <a:lstStyle/>
               <a:p>
                 <a:pPr>
-                  <a:defRPr b="0" i="0" strike="noStrike" sz="900" u="none">
+                  <a:defRPr b="0" i="0" strike="noStrike" sz="800" u="none">
                     <a:solidFill>
-                      <a:srgbClr val="334155"/>
+                      <a:srgbClr val="FFFFFF"/>
                     </a:solidFill>
                     <a:latin typeface="Calibri"/>
                   </a:defRPr>
                 </a:pPr>
               </a:p>
             </c:txPr>
-            <c:showLegendKey val="0"/>
-            <c:showVal val="1"/>
-            <c:showCatName val="0"/>
-            <c:showSerName val="0"/>
-            <c:showPercent val="0"/>
-            <c:showBubbleSize val="0"/>
-            <c:showLeaderLines val="0"/>
-          </c:dLbls>
-          <c:cat>
-            <c:multiLvlStrRef>
-              <c:f>Sheet1!$A$2:$A$7</c:f>
-              <c:multiLvlStrCache>
-                <c:ptCount val="6"/>
-                <c:lvl>
-                  <c:pt idx="0">
-                    <c:v>Oct</c:v>
-                  </c:pt>
-                  <c:pt idx="1">
-                    <c:v>Nov</c:v>
-                  </c:pt>
-                  <c:pt idx="2">
-                    <c:v>Dec</c:v>
-                  </c:pt>
-                  <c:pt idx="3">
-                    <c:v>Jan</c:v>
-                  </c:pt>
-                  <c:pt idx="4">
-                    <c:v>Feb</c:v>
-                  </c:pt>
-                  <c:pt idx="5">
-                    <c:v>Mar</c:v>
-                  </c:pt>
-                </c:lvl>
-              </c:multiLvlStrCache>
-            </c:multiLvlStrRef>
-          </c:cat>
-          <c:val>
-            <c:numRef>
-              <c:f>Sheet1!$B$2:$B$7</c:f>
-              <c:numCache>
-                <c:formatCode>General</c:formatCode>
-                <c:ptCount val="6"/>
-                <c:pt idx="0">
-                  <c:v>1600</c:v>
-                </c:pt>
-                <c:pt idx="1">
-                  <c:v>3200</c:v>
-                </c:pt>
-                <c:pt idx="2">
-                  <c:v>4800</c:v>
-                </c:pt>
-                <c:pt idx="3">
-                  <c:v>6400</c:v>
-                </c:pt>
-                <c:pt idx="4">
-                  <c:v>8000</c:v>
-                </c:pt>
-                <c:pt idx="5">
-                  <c:v>9600</c:v>
-                </c:pt>
-              </c:numCache>
-            </c:numRef>
-          </c:val>
-        </c:ser>
-        <c:dLbls>
-          <c:numFmt formatCode="#,##0" sourceLinked="0"/>
-          <c:txPr>
-            <a:bodyPr/>
-            <a:lstStyle/>
-            <a:p>
-              <a:pPr>
-                <a:defRPr b="0" i="0" strike="noStrike" sz="900" u="none">
-                  <a:solidFill>
-                    <a:srgbClr val="334155"/>
-                  </a:solidFill>
-                  <a:latin typeface="Calibri"/>
-                </a:defRPr>
-              </a:pPr>
-            </a:p>
-          </c:txPr>
-          <c:showLegendKey val="0"/>
-          <c:showVal val="1"/>
-          <c:showCatName val="0"/>
-          <c:showSerName val="0"/>
-          <c:showPercent val="0"/>
-          <c:showBubbleSize val="0"/>
-          <c:showLeaderLines val="0"/>
-        </c:dLbls>
-        <c:gapWidth val="150"/>
-        <c:overlap val="0"/>
-        <c:axId val="2094734554"/>
-        <c:axId val="2094734552"/>
-        <c:axId val="2094734556"/>
-      </c:barChart>
-      <c:catAx>
-        <c:axId val="2094734554"/>
-        <c:scaling>
-          <c:orientation val="minMax"/>
-        </c:scaling>
-        <c:delete val="0"/>
-        <c:axPos val="b"/>
-        <c:numFmt formatCode="General" sourceLinked="1"/>
-        <c:majorTickMark val="out"/>
-        <c:minorTickMark val="none"/>
-        <c:tickLblPos val="low"/>
-        <c:spPr>
-          <a:ln w="12700" cap="flat">
-            <a:solidFill>
-              <a:srgbClr val="888888"/>
-            </a:solidFill>
-            <a:prstDash val="solid"/>
-            <a:round/>
-          </a:ln>
-        </c:spPr>
-        <c:txPr>
-          <a:bodyPr/>
-          <a:lstStyle/>
-          <a:p>
-            <a:pPr>
-              <a:defRPr sz="1100" b="0" i="0" u="none" strike="noStrike">
-                <a:solidFill>
-                  <a:srgbClr val="334155"/>
-                </a:solidFill>
-                <a:latin typeface="Calibri"/>
-              </a:defRPr>
-            </a:pPr>
-            <a:endParaRPr lang="en-US"/>
-          </a:p>
-        </c:txPr>
-        <c:crossAx val="2094734552"/>
-        <c:crosses val="autoZero"/>
-        <c:auto val="1"/>
-        <c:lblAlgn val="ctr"/>
-        <c:noMultiLvlLbl val="1"/>
-      </c:catAx>
-      <c:valAx>
-        <c:axId val="2094734552"/>
-        <c:scaling>
-          <c:orientation val="minMax"/>
-          <c:max val="11000"/>
-        </c:scaling>
-        <c:delete val="1"/>
-        <c:axPos val="l"/>
-        <c:numFmt formatCode="General" sourceLinked="0"/>
-        <c:majorTickMark val="out"/>
-        <c:minorTickMark val="none"/>
-        <c:tickLblPos val="nextTo"/>
-        <c:spPr>
-          <a:ln w="12700" cap="flat">
-            <a:solidFill>
-              <a:srgbClr val="888888"/>
-            </a:solidFill>
-            <a:prstDash val="solid"/>
-            <a:round/>
-          </a:ln>
-        </c:spPr>
-        <c:txPr>
-          <a:bodyPr/>
-          <a:lstStyle/>
-          <a:p>
-            <a:pPr>
-              <a:defRPr sz="1200" b="0" i="0" u="none" strike="noStrike">
-                <a:solidFill>
-                  <a:srgbClr val="000000"/>
-                </a:solidFill>
-                <a:latin typeface="Arial"/>
-              </a:defRPr>
-            </a:pPr>
-            <a:endParaRPr lang="en-US"/>
-          </a:p>
-        </c:txPr>
-        <c:crossAx val="2094734554"/>
-        <c:crosses val="autoZero"/>
-        <c:crossBetween val="between"/>
-      </c:valAx>
-      <c:spPr>
-        <a:noFill/>
-        <a:ln>
-          <a:noFill/>
-        </a:ln>
-        <a:effectLst/>
-      </c:spPr>
-    </c:plotArea>
-    <c:plotVisOnly val="1"/>
-    <c:dispBlanksAs val="span"/>
-  </c:chart>
-  <c:spPr>
-    <a:noFill/>
-    <a:ln>
-      <a:noFill/>
-    </a:ln>
-    <a:effectLst/>
-  </c:spPr>
-  <c:externalData r:id="rId1">
-    <c:autoUpdate val="0"/>
-  </c:externalData>
-</c:chartSpace>
-</file>
-
-<file path=ppt/charts/chart3.xml><?xml version="1.0" encoding="utf-8"?>
-<c:chartSpace xmlns:c="http://schemas.openxmlformats.org/drawingml/2006/chart" xmlns:a="http://schemas.openxmlformats.org/drawingml/2006/main" xmlns:r="http://schemas.openxmlformats.org/officeDocument/2006/relationships">
-  <c:date1904 val="0"/>
-  <c:roundedCorners val="1"/>
-  <c:chart>
-    <c:autoTitleDeleted val="1"/>
-    <c:plotArea>
-      <c:layout/>
-      <c:barChart>
-        <c:barDir val="col"/>
-        <c:grouping val="clustered"/>
-        <c:varyColors val="0"/>
-        <c:ser>
-          <c:idx val="0"/>
-          <c:order val="0"/>
-          <c:tx>
-            <c:strRef>
-              <c:f>Sheet1!$B$1</c:f>
-              <c:strCache>
-                <c:ptCount val="1"/>
-                <c:pt idx="0">
-                  <c:v>FD returns</c:v>
-                </c:pt>
-              </c:strCache>
-            </c:strRef>
-          </c:tx>
-          <c:spPr>
-            <a:solidFill>
-              <a:srgbClr val="94A3B8"/>
-            </a:solidFill>
-            <a:effectLst/>
-          </c:spPr>
-          <c:invertIfNegative val="0"/>
-          <c:dLbls>
-            <c:numFmt formatCode="#,##0" sourceLinked="0"/>
-            <c:txPr>
-              <a:bodyPr/>
-              <a:lstStyle/>
-              <a:p>
-                <a:pPr>
-                  <a:defRPr b="0" i="0" strike="noStrike" sz="700" u="none">
-                    <a:solidFill>
-                      <a:srgbClr val="334155"/>
-                    </a:solidFill>
-                    <a:latin typeface="Calibri"/>
-                  </a:defRPr>
-                </a:pPr>
-              </a:p>
-            </c:txPr>
+            <c:dLblPos val="ctr"/>
             <c:showLegendKey val="0"/>
             <c:showVal val="1"/>
             <c:showCatName val="0"/>
@@ -1862,15 +824,16 @@
               <a:lstStyle/>
               <a:p>
                 <a:pPr>
-                  <a:defRPr b="0" i="0" strike="noStrike" sz="700" u="none">
+                  <a:defRPr b="0" i="0" strike="noStrike" sz="800" u="none">
                     <a:solidFill>
-                      <a:srgbClr val="334155"/>
+                      <a:srgbClr val="FFFFFF"/>
                     </a:solidFill>
                     <a:latin typeface="Calibri"/>
                   </a:defRPr>
                 </a:pPr>
               </a:p>
             </c:txPr>
+            <c:dLblPos val="ctr"/>
             <c:showLegendKey val="0"/>
             <c:showVal val="1"/>
             <c:showCatName val="0"/>
@@ -1971,6 +934,39 @@
             </c:numRef>
           </c:val>
         </c:ser>
+        <c:dLbls>
+          <c:numFmt formatCode="#,##0" sourceLinked="0"/>
+          <c:txPr>
+            <a:bodyPr/>
+            <a:lstStyle/>
+            <a:p>
+              <a:pPr>
+                <a:defRPr b="0" i="0" strike="noStrike" sz="800" u="none">
+                  <a:solidFill>
+                    <a:srgbClr val="FFFFFF"/>
+                  </a:solidFill>
+                  <a:latin typeface="Calibri"/>
+                </a:defRPr>
+              </a:pPr>
+            </a:p>
+          </c:txPr>
+          <c:dLblPos val="ctr"/>
+          <c:showLegendKey val="0"/>
+          <c:showVal val="1"/>
+          <c:showCatName val="0"/>
+          <c:showSerName val="0"/>
+          <c:showPercent val="0"/>
+          <c:showBubbleSize val="0"/>
+          <c:showLeaderLines val="0"/>
+        </c:dLbls>
+        <c:gapWidth val="50"/>
+        <c:overlap val="100"/>
+        <c:axId val="2094734554"/>
+        <c:axId val="2094734552"/>
+        <c:axId val="2094734556"/>
+      </c:barChart>
+      <c:lineChart>
+        <c:varyColors val="0"/>
         <c:ser>
           <c:idx val="2"/>
           <c:order val="2"/>
@@ -1987,8 +983,15 @@
           </c:tx>
           <c:spPr>
             <a:solidFill>
-              <a:srgbClr val="334155"/>
+              <a:srgbClr val="B3261E"/>
             </a:solidFill>
+            <a:ln w="31750" cap="flat">
+              <a:solidFill>
+                <a:srgbClr val="B3261E"/>
+              </a:solidFill>
+              <a:prstDash val="solid"/>
+              <a:round/>
+            </a:ln>
             <a:effectLst/>
           </c:spPr>
           <c:invertIfNegative val="0"/>
@@ -1999,15 +1002,16 @@
               <a:lstStyle/>
               <a:p>
                 <a:pPr>
-                  <a:defRPr b="0" i="0" strike="noStrike" sz="700" u="none">
+                  <a:defRPr b="0" i="0" strike="noStrike" sz="800" u="none">
                     <a:solidFill>
-                      <a:srgbClr val="334155"/>
+                      <a:srgbClr val="FFFFFF"/>
                     </a:solidFill>
                     <a:latin typeface="Calibri"/>
                   </a:defRPr>
                 </a:pPr>
               </a:p>
             </c:txPr>
+            <c:dLblPos val="ctr"/>
             <c:showLegendKey val="0"/>
             <c:showVal val="1"/>
             <c:showCatName val="0"/>
@@ -2016,6 +1020,23 @@
             <c:showBubbleSize val="0"/>
             <c:showLeaderLines val="0"/>
           </c:dLbls>
+          <c:marker>
+            <c:symbol val="circle"/>
+            <c:size val="5"/>
+            <c:spPr>
+              <a:solidFill>
+                <a:srgbClr val="B3261E"/>
+              </a:solidFill>
+              <a:ln w="9525" cap="flat">
+                <a:solidFill>
+                  <a:srgbClr val="B3261E"/>
+                </a:solidFill>
+                <a:prstDash val="solid"/>
+                <a:round/>
+              </a:ln>
+              <a:effectLst/>
+            </c:spPr>
+          </c:marker>
           <c:cat>
             <c:multiLvlStrRef>
               <c:f>Sheet1!$A$2:$A$13</c:f>
@@ -2107,6 +1128,7 @@
               </c:numCache>
             </c:numRef>
           </c:val>
+          <c:smooth val="0"/>
         </c:ser>
         <c:dLbls>
           <c:numFmt formatCode="#,##0" sourceLinked="0"/>
@@ -2115,15 +1137,16 @@
             <a:lstStyle/>
             <a:p>
               <a:pPr>
-                <a:defRPr b="0" i="0" strike="noStrike" sz="700" u="none">
+                <a:defRPr b="0" i="0" strike="noStrike" sz="800" u="none">
                   <a:solidFill>
-                    <a:srgbClr val="334155"/>
+                    <a:srgbClr val="FFFFFF"/>
                   </a:solidFill>
                   <a:latin typeface="Calibri"/>
                 </a:defRPr>
               </a:pPr>
             </a:p>
           </c:txPr>
+          <c:dLblPos val="ctr"/>
           <c:showLegendKey val="0"/>
           <c:showVal val="1"/>
           <c:showCatName val="0"/>
@@ -2132,12 +1155,11 @@
           <c:showBubbleSize val="0"/>
           <c:showLeaderLines val="0"/>
         </c:dLbls>
-        <c:gapWidth val="150"/>
-        <c:overlap val="0"/>
+        <c:marker val="1"/>
         <c:axId val="2094734554"/>
         <c:axId val="2094734552"/>
         <c:axId val="2094734556"/>
-      </c:barChart>
+      </c:lineChart>
       <c:catAx>
         <c:axId val="2094734554"/>
         <c:scaling>
@@ -2165,7 +1187,7 @@
             <a:pPr>
               <a:defRPr sz="1000" b="0" i="0" u="none" strike="noStrike">
                 <a:solidFill>
-                  <a:srgbClr val="334155"/>
+                  <a:srgbClr val="2B3F52"/>
                 </a:solidFill>
                 <a:latin typeface="Calibri"/>
               </a:defRPr>
@@ -2183,7 +1205,7 @@
         <c:axId val="2094734552"/>
         <c:scaling>
           <c:orientation val="minMax"/>
-          <c:max val="64"/>
+          <c:max val="76"/>
           <c:min val="0"/>
         </c:scaling>
         <c:delete val="1"/>
@@ -2238,7 +1260,7 @@
           <a:pPr>
             <a:defRPr sz="1100">
               <a:solidFill>
-                <a:srgbClr val="334155"/>
+                <a:srgbClr val="2B3F52"/>
               </a:solidFill>
               <a:latin typeface="Calibri"/>
               <a:cs typeface="Calibri"/>
@@ -2264,7 +1286,7 @@
 </c:chartSpace>
 </file>
 
-<file path=ppt/charts/chart4.xml><?xml version="1.0" encoding="utf-8"?>
+<file path=ppt/charts/chart3.xml><?xml version="1.0" encoding="utf-8"?>
 <c:chartSpace xmlns:c="http://schemas.openxmlformats.org/drawingml/2006/chart" xmlns:a="http://schemas.openxmlformats.org/drawingml/2006/main" xmlns:r="http://schemas.openxmlformats.org/officeDocument/2006/relationships">
   <c:date1904 val="0"/>
   <c:roundedCorners val="1"/>
@@ -2274,7 +1296,7 @@
       <c:layout/>
       <c:barChart>
         <c:barDir val="col"/>
-        <c:grouping val="clustered"/>
+        <c:grouping val="stacked"/>
         <c:varyColors val="0"/>
         <c:ser>
           <c:idx val="0"/>
@@ -2292,7 +1314,7 @@
           </c:tx>
           <c:spPr>
             <a:solidFill>
-              <a:srgbClr val="94A3B8"/>
+              <a:srgbClr val="8EA6B8"/>
             </a:solidFill>
             <a:effectLst/>
           </c:spPr>
@@ -2304,15 +1326,16 @@
               <a:lstStyle/>
               <a:p>
                 <a:pPr>
-                  <a:defRPr b="0" i="0" strike="noStrike" sz="700" u="none">
+                  <a:defRPr b="0" i="0" strike="noStrike" sz="800" u="none">
                     <a:solidFill>
-                      <a:srgbClr val="334155"/>
+                      <a:srgbClr val="FFFFFF"/>
                     </a:solidFill>
                     <a:latin typeface="Calibri"/>
                   </a:defRPr>
                 </a:pPr>
               </a:p>
             </c:txPr>
+            <c:dLblPos val="ctr"/>
             <c:showLegendKey val="0"/>
             <c:showVal val="1"/>
             <c:showCatName val="0"/>
@@ -2441,15 +1464,16 @@
               <a:lstStyle/>
               <a:p>
                 <a:pPr>
-                  <a:defRPr b="0" i="0" strike="noStrike" sz="700" u="none">
+                  <a:defRPr b="0" i="0" strike="noStrike" sz="800" u="none">
                     <a:solidFill>
-                      <a:srgbClr val="334155"/>
+                      <a:srgbClr val="FFFFFF"/>
                     </a:solidFill>
                     <a:latin typeface="Calibri"/>
                   </a:defRPr>
                 </a:pPr>
               </a:p>
             </c:txPr>
+            <c:dLblPos val="ctr"/>
             <c:showLegendKey val="0"/>
             <c:showVal val="1"/>
             <c:showCatName val="0"/>
@@ -2550,6 +1574,39 @@
             </c:numRef>
           </c:val>
         </c:ser>
+        <c:dLbls>
+          <c:numFmt formatCode="#,##0" sourceLinked="0"/>
+          <c:txPr>
+            <a:bodyPr/>
+            <a:lstStyle/>
+            <a:p>
+              <a:pPr>
+                <a:defRPr b="0" i="0" strike="noStrike" sz="800" u="none">
+                  <a:solidFill>
+                    <a:srgbClr val="FFFFFF"/>
+                  </a:solidFill>
+                  <a:latin typeface="Calibri"/>
+                </a:defRPr>
+              </a:pPr>
+            </a:p>
+          </c:txPr>
+          <c:dLblPos val="ctr"/>
+          <c:showLegendKey val="0"/>
+          <c:showVal val="1"/>
+          <c:showCatName val="0"/>
+          <c:showSerName val="0"/>
+          <c:showPercent val="0"/>
+          <c:showBubbleSize val="0"/>
+          <c:showLeaderLines val="0"/>
+        </c:dLbls>
+        <c:gapWidth val="50"/>
+        <c:overlap val="100"/>
+        <c:axId val="2094734554"/>
+        <c:axId val="2094734552"/>
+        <c:axId val="2094734556"/>
+      </c:barChart>
+      <c:lineChart>
+        <c:varyColors val="0"/>
         <c:ser>
           <c:idx val="2"/>
           <c:order val="2"/>
@@ -2566,8 +1623,15 @@
           </c:tx>
           <c:spPr>
             <a:solidFill>
-              <a:srgbClr val="334155"/>
+              <a:srgbClr val="B3261E"/>
             </a:solidFill>
+            <a:ln w="31750" cap="flat">
+              <a:solidFill>
+                <a:srgbClr val="B3261E"/>
+              </a:solidFill>
+              <a:prstDash val="solid"/>
+              <a:round/>
+            </a:ln>
             <a:effectLst/>
           </c:spPr>
           <c:invertIfNegative val="0"/>
@@ -2578,15 +1642,16 @@
               <a:lstStyle/>
               <a:p>
                 <a:pPr>
-                  <a:defRPr b="0" i="0" strike="noStrike" sz="700" u="none">
+                  <a:defRPr b="0" i="0" strike="noStrike" sz="800" u="none">
                     <a:solidFill>
-                      <a:srgbClr val="334155"/>
+                      <a:srgbClr val="FFFFFF"/>
                     </a:solidFill>
                     <a:latin typeface="Calibri"/>
                   </a:defRPr>
                 </a:pPr>
               </a:p>
             </c:txPr>
+            <c:dLblPos val="ctr"/>
             <c:showLegendKey val="0"/>
             <c:showVal val="1"/>
             <c:showCatName val="0"/>
@@ -2595,6 +1660,23 @@
             <c:showBubbleSize val="0"/>
             <c:showLeaderLines val="0"/>
           </c:dLbls>
+          <c:marker>
+            <c:symbol val="circle"/>
+            <c:size val="5"/>
+            <c:spPr>
+              <a:solidFill>
+                <a:srgbClr val="B3261E"/>
+              </a:solidFill>
+              <a:ln w="9525" cap="flat">
+                <a:solidFill>
+                  <a:srgbClr val="B3261E"/>
+                </a:solidFill>
+                <a:prstDash val="solid"/>
+                <a:round/>
+              </a:ln>
+              <a:effectLst/>
+            </c:spPr>
+          </c:marker>
           <c:cat>
             <c:multiLvlStrRef>
               <c:f>Sheet1!$A$2:$A$13</c:f>
@@ -2686,6 +1768,7 @@
               </c:numCache>
             </c:numRef>
           </c:val>
+          <c:smooth val="0"/>
         </c:ser>
         <c:dLbls>
           <c:numFmt formatCode="#,##0" sourceLinked="0"/>
@@ -2694,15 +1777,16 @@
             <a:lstStyle/>
             <a:p>
               <a:pPr>
-                <a:defRPr b="0" i="0" strike="noStrike" sz="700" u="none">
+                <a:defRPr b="0" i="0" strike="noStrike" sz="800" u="none">
                   <a:solidFill>
-                    <a:srgbClr val="334155"/>
+                    <a:srgbClr val="FFFFFF"/>
                   </a:solidFill>
                   <a:latin typeface="Calibri"/>
                 </a:defRPr>
               </a:pPr>
             </a:p>
           </c:txPr>
+          <c:dLblPos val="ctr"/>
           <c:showLegendKey val="0"/>
           <c:showVal val="1"/>
           <c:showCatName val="0"/>
@@ -2711,12 +1795,11 @@
           <c:showBubbleSize val="0"/>
           <c:showLeaderLines val="0"/>
         </c:dLbls>
-        <c:gapWidth val="150"/>
-        <c:overlap val="0"/>
+        <c:marker val="1"/>
         <c:axId val="2094734554"/>
         <c:axId val="2094734552"/>
         <c:axId val="2094734556"/>
-      </c:barChart>
+      </c:lineChart>
       <c:catAx>
         <c:axId val="2094734554"/>
         <c:scaling>
@@ -2744,7 +1827,7 @@
             <a:pPr>
               <a:defRPr sz="1000" b="0" i="0" u="none" strike="noStrike">
                 <a:solidFill>
-                  <a:srgbClr val="334155"/>
+                  <a:srgbClr val="2B3F52"/>
                 </a:solidFill>
                 <a:latin typeface="Calibri"/>
               </a:defRPr>
@@ -2762,7 +1845,7 @@
         <c:axId val="2094734552"/>
         <c:scaling>
           <c:orientation val="minMax"/>
-          <c:max val="64"/>
+          <c:max val="76"/>
           <c:min val="0"/>
         </c:scaling>
         <c:delete val="1"/>
@@ -2817,7 +1900,7 @@
           <a:pPr>
             <a:defRPr sz="1100">
               <a:solidFill>
-                <a:srgbClr val="334155"/>
+                <a:srgbClr val="2B3F52"/>
               </a:solidFill>
               <a:latin typeface="Calibri"/>
               <a:cs typeface="Calibri"/>
@@ -2843,7 +1926,7 @@
 </c:chartSpace>
 </file>
 
-<file path=ppt/charts/chart5.xml><?xml version="1.0" encoding="utf-8"?>
+<file path=ppt/charts/chart4.xml><?xml version="1.0" encoding="utf-8"?>
 <c:chartSpace xmlns:c="http://schemas.openxmlformats.org/drawingml/2006/chart" xmlns:a="http://schemas.openxmlformats.org/drawingml/2006/main" xmlns:r="http://schemas.openxmlformats.org/officeDocument/2006/relationships">
   <c:date1904 val="0"/>
   <c:roundedCorners val="1"/>
@@ -2853,7 +1936,7 @@
       <c:layout/>
       <c:barChart>
         <c:barDir val="col"/>
-        <c:grouping val="clustered"/>
+        <c:grouping val="stacked"/>
         <c:varyColors val="0"/>
         <c:ser>
           <c:idx val="0"/>
@@ -2871,7 +1954,7 @@
           </c:tx>
           <c:spPr>
             <a:solidFill>
-              <a:srgbClr val="94A3B8"/>
+              <a:srgbClr val="8EA6B8"/>
             </a:solidFill>
             <a:effectLst/>
           </c:spPr>
@@ -2883,15 +1966,16 @@
               <a:lstStyle/>
               <a:p>
                 <a:pPr>
-                  <a:defRPr b="0" i="0" strike="noStrike" sz="700" u="none">
+                  <a:defRPr b="0" i="0" strike="noStrike" sz="800" u="none">
                     <a:solidFill>
-                      <a:srgbClr val="334155"/>
+                      <a:srgbClr val="FFFFFF"/>
                     </a:solidFill>
                     <a:latin typeface="Calibri"/>
                   </a:defRPr>
                 </a:pPr>
               </a:p>
             </c:txPr>
+            <c:dLblPos val="ctr"/>
             <c:showLegendKey val="0"/>
             <c:showVal val="1"/>
             <c:showCatName val="0"/>
@@ -3020,15 +2104,16 @@
               <a:lstStyle/>
               <a:p>
                 <a:pPr>
-                  <a:defRPr b="0" i="0" strike="noStrike" sz="700" u="none">
+                  <a:defRPr b="0" i="0" strike="noStrike" sz="800" u="none">
                     <a:solidFill>
-                      <a:srgbClr val="334155"/>
+                      <a:srgbClr val="FFFFFF"/>
                     </a:solidFill>
                     <a:latin typeface="Calibri"/>
                   </a:defRPr>
                 </a:pPr>
               </a:p>
             </c:txPr>
+            <c:dLblPos val="ctr"/>
             <c:showLegendKey val="0"/>
             <c:showVal val="1"/>
             <c:showCatName val="0"/>
@@ -3129,6 +2214,39 @@
             </c:numRef>
           </c:val>
         </c:ser>
+        <c:dLbls>
+          <c:numFmt formatCode="#,##0" sourceLinked="0"/>
+          <c:txPr>
+            <a:bodyPr/>
+            <a:lstStyle/>
+            <a:p>
+              <a:pPr>
+                <a:defRPr b="0" i="0" strike="noStrike" sz="800" u="none">
+                  <a:solidFill>
+                    <a:srgbClr val="FFFFFF"/>
+                  </a:solidFill>
+                  <a:latin typeface="Calibri"/>
+                </a:defRPr>
+              </a:pPr>
+            </a:p>
+          </c:txPr>
+          <c:dLblPos val="ctr"/>
+          <c:showLegendKey val="0"/>
+          <c:showVal val="1"/>
+          <c:showCatName val="0"/>
+          <c:showSerName val="0"/>
+          <c:showPercent val="0"/>
+          <c:showBubbleSize val="0"/>
+          <c:showLeaderLines val="0"/>
+        </c:dLbls>
+        <c:gapWidth val="50"/>
+        <c:overlap val="100"/>
+        <c:axId val="2094734554"/>
+        <c:axId val="2094734552"/>
+        <c:axId val="2094734556"/>
+      </c:barChart>
+      <c:lineChart>
+        <c:varyColors val="0"/>
         <c:ser>
           <c:idx val="2"/>
           <c:order val="2"/>
@@ -3145,8 +2263,15 @@
           </c:tx>
           <c:spPr>
             <a:solidFill>
-              <a:srgbClr val="334155"/>
+              <a:srgbClr val="B3261E"/>
             </a:solidFill>
+            <a:ln w="31750" cap="flat">
+              <a:solidFill>
+                <a:srgbClr val="B3261E"/>
+              </a:solidFill>
+              <a:prstDash val="solid"/>
+              <a:round/>
+            </a:ln>
             <a:effectLst/>
           </c:spPr>
           <c:invertIfNegative val="0"/>
@@ -3157,15 +2282,16 @@
               <a:lstStyle/>
               <a:p>
                 <a:pPr>
-                  <a:defRPr b="0" i="0" strike="noStrike" sz="700" u="none">
+                  <a:defRPr b="0" i="0" strike="noStrike" sz="800" u="none">
                     <a:solidFill>
-                      <a:srgbClr val="334155"/>
+                      <a:srgbClr val="FFFFFF"/>
                     </a:solidFill>
                     <a:latin typeface="Calibri"/>
                   </a:defRPr>
                 </a:pPr>
               </a:p>
             </c:txPr>
+            <c:dLblPos val="ctr"/>
             <c:showLegendKey val="0"/>
             <c:showVal val="1"/>
             <c:showCatName val="0"/>
@@ -3174,6 +2300,23 @@
             <c:showBubbleSize val="0"/>
             <c:showLeaderLines val="0"/>
           </c:dLbls>
+          <c:marker>
+            <c:symbol val="circle"/>
+            <c:size val="5"/>
+            <c:spPr>
+              <a:solidFill>
+                <a:srgbClr val="B3261E"/>
+              </a:solidFill>
+              <a:ln w="9525" cap="flat">
+                <a:solidFill>
+                  <a:srgbClr val="B3261E"/>
+                </a:solidFill>
+                <a:prstDash val="solid"/>
+                <a:round/>
+              </a:ln>
+              <a:effectLst/>
+            </c:spPr>
+          </c:marker>
           <c:cat>
             <c:multiLvlStrRef>
               <c:f>Sheet1!$A$2:$A$13</c:f>
@@ -3265,6 +2408,7 @@
               </c:numCache>
             </c:numRef>
           </c:val>
+          <c:smooth val="0"/>
         </c:ser>
         <c:dLbls>
           <c:numFmt formatCode="#,##0" sourceLinked="0"/>
@@ -3273,15 +2417,16 @@
             <a:lstStyle/>
             <a:p>
               <a:pPr>
-                <a:defRPr b="0" i="0" strike="noStrike" sz="700" u="none">
+                <a:defRPr b="0" i="0" strike="noStrike" sz="800" u="none">
                   <a:solidFill>
-                    <a:srgbClr val="334155"/>
+                    <a:srgbClr val="FFFFFF"/>
                   </a:solidFill>
                   <a:latin typeface="Calibri"/>
                 </a:defRPr>
               </a:pPr>
             </a:p>
           </c:txPr>
+          <c:dLblPos val="ctr"/>
           <c:showLegendKey val="0"/>
           <c:showVal val="1"/>
           <c:showCatName val="0"/>
@@ -3290,12 +2435,11 @@
           <c:showBubbleSize val="0"/>
           <c:showLeaderLines val="0"/>
         </c:dLbls>
-        <c:gapWidth val="150"/>
-        <c:overlap val="0"/>
+        <c:marker val="1"/>
         <c:axId val="2094734554"/>
         <c:axId val="2094734552"/>
         <c:axId val="2094734556"/>
-      </c:barChart>
+      </c:lineChart>
       <c:catAx>
         <c:axId val="2094734554"/>
         <c:scaling>
@@ -3323,7 +2467,7 @@
             <a:pPr>
               <a:defRPr sz="1000" b="0" i="0" u="none" strike="noStrike">
                 <a:solidFill>
-                  <a:srgbClr val="334155"/>
+                  <a:srgbClr val="2B3F52"/>
                 </a:solidFill>
                 <a:latin typeface="Calibri"/>
               </a:defRPr>
@@ -3341,7 +2485,7 @@
         <c:axId val="2094734552"/>
         <c:scaling>
           <c:orientation val="minMax"/>
-          <c:max val="64"/>
+          <c:max val="76"/>
           <c:min val="0"/>
         </c:scaling>
         <c:delete val="1"/>
@@ -3396,7 +2540,7 @@
           <a:pPr>
             <a:defRPr sz="1100">
               <a:solidFill>
-                <a:srgbClr val="334155"/>
+                <a:srgbClr val="2B3F52"/>
               </a:solidFill>
               <a:latin typeface="Calibri"/>
               <a:cs typeface="Calibri"/>
@@ -3422,7 +2566,7 @@
 </c:chartSpace>
 </file>
 
-<file path=ppt/charts/chart6.xml><?xml version="1.0" encoding="utf-8"?>
+<file path=ppt/charts/chart5.xml><?xml version="1.0" encoding="utf-8"?>
 <c:chartSpace xmlns:c="http://schemas.openxmlformats.org/drawingml/2006/chart" xmlns:a="http://schemas.openxmlformats.org/drawingml/2006/main" xmlns:r="http://schemas.openxmlformats.org/officeDocument/2006/relationships">
   <c:date1904 val="0"/>
   <c:roundedCorners val="1"/>
@@ -3464,7 +2608,7 @@
             <c:bubble3D val="0"/>
             <c:spPr>
               <a:solidFill>
-                <a:srgbClr val="0F766E"/>
+                <a:srgbClr val="0B5B52"/>
               </a:solidFill>
               <a:effectLst/>
             </c:spPr>
@@ -3474,7 +2618,7 @@
             <c:bubble3D val="0"/>
             <c:spPr>
               <a:solidFill>
-                <a:srgbClr val="2B5CC4"/>
+                <a:srgbClr val="14776B"/>
               </a:solidFill>
               <a:effectLst/>
             </c:spPr>
@@ -3484,7 +2628,7 @@
             <c:bubble3D val="0"/>
             <c:spPr>
               <a:solidFill>
-                <a:srgbClr val="64748B"/>
+                <a:srgbClr val="2F938A"/>
               </a:solidFill>
               <a:effectLst/>
             </c:spPr>
@@ -3494,7 +2638,7 @@
             <c:bubble3D val="0"/>
             <c:spPr>
               <a:solidFill>
-                <a:srgbClr val="94A3B8"/>
+                <a:srgbClr val="5AADA3"/>
               </a:solidFill>
               <a:effectLst/>
             </c:spPr>
@@ -3504,7 +2648,7 @@
             <c:bubble3D val="0"/>
             <c:spPr>
               <a:solidFill>
-                <a:srgbClr val="C7D2E4"/>
+                <a:srgbClr val="8EC7BF"/>
               </a:solidFill>
               <a:effectLst/>
             </c:spPr>
@@ -3514,7 +2658,7 @@
             <c:bubble3D val="0"/>
             <c:spPr>
               <a:solidFill>
-                <a:srgbClr val="CBD5E1"/>
+                <a:srgbClr val="C3CCD6"/>
               </a:solidFill>
               <a:effectLst/>
             </c:spPr>
@@ -3529,7 +2673,7 @@
                 <a:lstStyle/>
                 <a:p>
                   <a:pPr>
-                    <a:defRPr sz="850" b="0" i="0" u="none" strike="noStrike">
+                    <a:defRPr sz="900" b="0" i="0" u="none" strike="noStrike">
                       <a:solidFill>
                         <a:srgbClr val="FFFFFF"/>
                       </a:solidFill>
@@ -3554,7 +2698,7 @@
                 <a:lstStyle/>
                 <a:p>
                   <a:pPr>
-                    <a:defRPr sz="850" b="0" i="0" u="none" strike="noStrike">
+                    <a:defRPr sz="900" b="0" i="0" u="none" strike="noStrike">
                       <a:solidFill>
                         <a:srgbClr val="FFFFFF"/>
                       </a:solidFill>
@@ -3579,7 +2723,7 @@
                 <a:lstStyle/>
                 <a:p>
                   <a:pPr>
-                    <a:defRPr sz="850" b="0" i="0" u="none" strike="noStrike">
+                    <a:defRPr sz="900" b="0" i="0" u="none" strike="noStrike">
                       <a:solidFill>
                         <a:srgbClr val="FFFFFF"/>
                       </a:solidFill>
@@ -3604,7 +2748,7 @@
                 <a:lstStyle/>
                 <a:p>
                   <a:pPr>
-                    <a:defRPr sz="850" b="0" i="0" u="none" strike="noStrike">
+                    <a:defRPr sz="900" b="0" i="0" u="none" strike="noStrike">
                       <a:solidFill>
                         <a:srgbClr val="FFFFFF"/>
                       </a:solidFill>
@@ -3629,7 +2773,7 @@
                 <a:lstStyle/>
                 <a:p>
                   <a:pPr>
-                    <a:defRPr sz="850" b="0" i="0" u="none" strike="noStrike">
+                    <a:defRPr sz="900" b="0" i="0" u="none" strike="noStrike">
                       <a:solidFill>
                         <a:srgbClr val="FFFFFF"/>
                       </a:solidFill>
@@ -3654,7 +2798,7 @@
                 <a:lstStyle/>
                 <a:p>
                   <a:pPr>
-                    <a:defRPr sz="850" b="0" i="0" u="none" strike="noStrike">
+                    <a:defRPr sz="900" b="0" i="0" u="none" strike="noStrike">
                       <a:solidFill>
                         <a:srgbClr val="FFFFFF"/>
                       </a:solidFill>
@@ -3699,22 +2843,22 @@
               <c:strCache>
                 <c:ptCount val="6"/>
                 <c:pt idx="0">
-                  <c:v>Salary</c:v>
+                  <c:v>Salary 58%</c:v>
                 </c:pt>
                 <c:pt idx="1">
-                  <c:v>Rent</c:v>
+                  <c:v>Rent 12%</c:v>
                 </c:pt>
                 <c:pt idx="2">
-                  <c:v>Professional</c:v>
+                  <c:v>Professional 5%</c:v>
                 </c:pt>
                 <c:pt idx="3">
-                  <c:v>Sitting fees</c:v>
+                  <c:v>Sitting fees 4%</c:v>
                 </c:pt>
                 <c:pt idx="4">
-                  <c:v>Travel</c:v>
+                  <c:v>Travel 3%</c:v>
                 </c:pt>
                 <c:pt idx="5">
-                  <c:v>Other heads</c:v>
+                  <c:v>Other 18%</c:v>
                 </c:pt>
               </c:strCache>
             </c:strRef>
@@ -3725,29 +2869,29 @@
               <c:numCache>
                 <c:ptCount val="6"/>
                 <c:pt idx="0">
-                  <c:v>71.99</c:v>
+                  <c:v>58</c:v>
                 </c:pt>
                 <c:pt idx="1">
-                  <c:v>14.65</c:v>
+                  <c:v>12</c:v>
                 </c:pt>
                 <c:pt idx="2">
-                  <c:v>6.01</c:v>
+                  <c:v>5</c:v>
                 </c:pt>
                 <c:pt idx="3">
-                  <c:v>5.5</c:v>
+                  <c:v>4</c:v>
                 </c:pt>
                 <c:pt idx="4">
-                  <c:v>3.7</c:v>
+                  <c:v>3</c:v>
                 </c:pt>
                 <c:pt idx="5">
-                  <c:v>21.43</c:v>
+                  <c:v>18</c:v>
                 </c:pt>
               </c:numCache>
             </c:numRef>
           </c:val>
         </c:ser>
         <c:firstSliceAng val="0"/>
-        <c:holeSize val="52"/>
+        <c:holeSize val="55"/>
       </c:doughnutChart>
       <c:spPr>
         <a:noFill/>
@@ -3765,9 +2909,9 @@
         <a:lstStyle/>
         <a:p>
           <a:pPr>
-            <a:defRPr sz="950">
+            <a:defRPr sz="1000">
               <a:solidFill>
-                <a:srgbClr val="334155"/>
+                <a:srgbClr val="2B3F52"/>
               </a:solidFill>
               <a:latin typeface="Calibri"/>
               <a:cs typeface="Calibri"/>
@@ -3793,237 +2937,7 @@
 </c:chartSpace>
 </file>
 
-<file path=ppt/charts/chart7.xml><?xml version="1.0" encoding="utf-8"?>
-<c:chartSpace xmlns:c="http://schemas.openxmlformats.org/drawingml/2006/chart" xmlns:a="http://schemas.openxmlformats.org/drawingml/2006/main" xmlns:r="http://schemas.openxmlformats.org/officeDocument/2006/relationships">
-  <c:date1904 val="0"/>
-  <c:roundedCorners val="1"/>
-  <c:chart>
-    <c:autoTitleDeleted val="1"/>
-    <c:plotArea>
-      <c:layout/>
-      <c:barChart>
-        <c:barDir val="bar"/>
-        <c:grouping val="clustered"/>
-        <c:varyColors val="0"/>
-        <c:ser>
-          <c:idx val="0"/>
-          <c:order val="0"/>
-          <c:tx>
-            <c:strRef>
-              <c:f>Sheet1!$B$1</c:f>
-              <c:strCache>
-                <c:ptCount val="1"/>
-                <c:pt idx="0">
-                  <c:v>Rs Cr</c:v>
-                </c:pt>
-              </c:strCache>
-            </c:strRef>
-          </c:tx>
-          <c:spPr>
-            <a:solidFill>
-              <a:srgbClr val="0F766E"/>
-            </a:solidFill>
-            <a:effectLst/>
-          </c:spPr>
-          <c:invertIfNegative val="0"/>
-          <c:dLbls>
-            <c:numFmt formatCode="#,##0" sourceLinked="0"/>
-            <c:txPr>
-              <a:bodyPr/>
-              <a:lstStyle/>
-              <a:p>
-                <a:pPr>
-                  <a:defRPr b="0" i="0" strike="noStrike" sz="1000" u="none">
-                    <a:solidFill>
-                      <a:srgbClr val="334155"/>
-                    </a:solidFill>
-                    <a:latin typeface="Calibri"/>
-                  </a:defRPr>
-                </a:pPr>
-              </a:p>
-            </c:txPr>
-            <c:showLegendKey val="0"/>
-            <c:showVal val="1"/>
-            <c:showCatName val="0"/>
-            <c:showSerName val="0"/>
-            <c:showPercent val="0"/>
-            <c:showBubbleSize val="0"/>
-            <c:showLeaderLines val="0"/>
-          </c:dLbls>
-          <c:cat>
-            <c:multiLvlStrRef>
-              <c:f>Sheet1!$A$2:$A$4</c:f>
-              <c:multiLvlStrCache>
-                <c:ptCount val="3"/>
-                <c:lvl>
-                  <c:pt idx="0">
-                    <c:v>Existing team</c:v>
-                  </c:pt>
-                  <c:pt idx="1">
-                    <c:v>New hire 1 (CTC)</c:v>
-                  </c:pt>
-                  <c:pt idx="2">
-                    <c:v>New hire 2 (CTC)</c:v>
-                  </c:pt>
-                </c:lvl>
-              </c:multiLvlStrCache>
-            </c:multiLvlStrRef>
-          </c:cat>
-          <c:val>
-            <c:numRef>
-              <c:f>Sheet1!$B$2:$B$4</c:f>
-              <c:numCache>
-                <c:formatCode>General</c:formatCode>
-                <c:ptCount val="3"/>
-                <c:pt idx="0">
-                  <c:v>3</c:v>
-                </c:pt>
-                <c:pt idx="1">
-                  <c:v>0.45</c:v>
-                </c:pt>
-                <c:pt idx="2">
-                  <c:v>0.5</c:v>
-                </c:pt>
-              </c:numCache>
-            </c:numRef>
-          </c:val>
-        </c:ser>
-        <c:dLbls>
-          <c:numFmt formatCode="#,##0" sourceLinked="0"/>
-          <c:txPr>
-            <a:bodyPr/>
-            <a:lstStyle/>
-            <a:p>
-              <a:pPr>
-                <a:defRPr b="0" i="0" strike="noStrike" sz="1000" u="none">
-                  <a:solidFill>
-                    <a:srgbClr val="334155"/>
-                  </a:solidFill>
-                  <a:latin typeface="Calibri"/>
-                </a:defRPr>
-              </a:pPr>
-            </a:p>
-          </c:txPr>
-          <c:showLegendKey val="0"/>
-          <c:showVal val="1"/>
-          <c:showCatName val="0"/>
-          <c:showSerName val="0"/>
-          <c:showPercent val="0"/>
-          <c:showBubbleSize val="0"/>
-          <c:showLeaderLines val="0"/>
-        </c:dLbls>
-        <c:gapWidth val="50"/>
-        <c:overlap val="0"/>
-        <c:axId val="2094734554"/>
-        <c:axId val="2094734552"/>
-        <c:axId val="2094734556"/>
-      </c:barChart>
-      <c:catAx>
-        <c:axId val="2094734554"/>
-        <c:scaling>
-          <c:orientation val="minMax"/>
-        </c:scaling>
-        <c:delete val="0"/>
-        <c:axPos val="l"/>
-        <c:numFmt formatCode="General" sourceLinked="1"/>
-        <c:majorTickMark val="out"/>
-        <c:minorTickMark val="none"/>
-        <c:tickLblPos val="nextTo"/>
-        <c:spPr>
-          <a:ln w="12700" cap="flat">
-            <a:solidFill>
-              <a:srgbClr val="888888"/>
-            </a:solidFill>
-            <a:prstDash val="solid"/>
-            <a:round/>
-          </a:ln>
-        </c:spPr>
-        <c:txPr>
-          <a:bodyPr/>
-          <a:lstStyle/>
-          <a:p>
-            <a:pPr>
-              <a:defRPr sz="1100" b="0" i="0" u="none" strike="noStrike">
-                <a:solidFill>
-                  <a:srgbClr val="334155"/>
-                </a:solidFill>
-                <a:latin typeface="Calibri"/>
-              </a:defRPr>
-            </a:pPr>
-            <a:endParaRPr lang="en-US"/>
-          </a:p>
-        </c:txPr>
-        <c:crossAx val="2094734552"/>
-        <c:crosses val="autoZero"/>
-        <c:auto val="1"/>
-        <c:lblAlgn val="ctr"/>
-        <c:noMultiLvlLbl val="1"/>
-      </c:catAx>
-      <c:valAx>
-        <c:axId val="2094734552"/>
-        <c:scaling>
-          <c:orientation val="minMax"/>
-          <c:max val="3.6"/>
-        </c:scaling>
-        <c:delete val="1"/>
-        <c:axPos val="b"/>
-        <c:numFmt formatCode="General" sourceLinked="0"/>
-        <c:majorTickMark val="out"/>
-        <c:minorTickMark val="none"/>
-        <c:tickLblPos val="low"/>
-        <c:spPr>
-          <a:ln w="12700" cap="flat">
-            <a:solidFill>
-              <a:srgbClr val="888888"/>
-            </a:solidFill>
-            <a:prstDash val="solid"/>
-            <a:round/>
-          </a:ln>
-        </c:spPr>
-        <c:txPr>
-          <a:bodyPr/>
-          <a:lstStyle/>
-          <a:p>
-            <a:pPr>
-              <a:defRPr sz="1200" b="0" i="0" u="none" strike="noStrike">
-                <a:solidFill>
-                  <a:srgbClr val="000000"/>
-                </a:solidFill>
-                <a:latin typeface="Arial"/>
-              </a:defRPr>
-            </a:pPr>
-            <a:endParaRPr lang="en-US"/>
-          </a:p>
-        </c:txPr>
-        <c:crossAx val="2094734554"/>
-        <c:crosses val="autoZero"/>
-        <c:crossBetween val="between"/>
-      </c:valAx>
-      <c:spPr>
-        <a:noFill/>
-        <a:ln>
-          <a:noFill/>
-        </a:ln>
-        <a:effectLst/>
-      </c:spPr>
-    </c:plotArea>
-    <c:plotVisOnly val="1"/>
-    <c:dispBlanksAs val="span"/>
-  </c:chart>
-  <c:spPr>
-    <a:noFill/>
-    <a:ln>
-      <a:noFill/>
-    </a:ln>
-    <a:effectLst/>
-  </c:spPr>
-  <c:externalData r:id="rId1">
-    <c:autoUpdate val="0"/>
-  </c:externalData>
-</c:chartSpace>
-</file>
-
-<file path=ppt/charts/chart8.xml><?xml version="1.0" encoding="utf-8"?>
+<file path=ppt/charts/chart6.xml><?xml version="1.0" encoding="utf-8"?>
 <c:chartSpace xmlns:c="http://schemas.openxmlformats.org/drawingml/2006/chart" xmlns:a="http://schemas.openxmlformats.org/drawingml/2006/main" xmlns:r="http://schemas.openxmlformats.org/officeDocument/2006/relationships">
   <c:date1904 val="0"/>
   <c:roundedCorners val="1"/>
@@ -4051,7 +2965,7 @@
           </c:tx>
           <c:spPr>
             <a:solidFill>
-              <a:srgbClr val="94A3B8"/>
+              <a:srgbClr val="8EA6B8"/>
             </a:solidFill>
             <a:effectLst/>
           </c:spPr>
@@ -4229,7 +3143,7 @@
           </c:tx>
           <c:spPr>
             <a:solidFill>
-              <a:srgbClr val="2B5CC4"/>
+              <a:srgbClr val="1E4E79"/>
             </a:solidFill>
             <a:effectLst/>
           </c:spPr>
@@ -4359,7 +3273,7 @@
             <a:pPr>
               <a:defRPr sz="1100" b="0" i="0" u="none" strike="noStrike">
                 <a:solidFill>
-                  <a:srgbClr val="334155"/>
+                  <a:srgbClr val="2B3F52"/>
                 </a:solidFill>
                 <a:latin typeface="Calibri"/>
               </a:defRPr>
@@ -4385,7 +3299,7 @@
           <c:spPr>
             <a:ln w="9525" cap="flat">
               <a:solidFill>
-                <a:srgbClr val="E2E8F0"/>
+                <a:srgbClr val="E6E9EE"/>
               </a:solidFill>
               <a:prstDash val="solid"/>
               <a:round/>
@@ -4412,7 +3326,7 @@
             <a:pPr>
               <a:defRPr sz="1000" b="0" i="0" u="none" strike="noStrike">
                 <a:solidFill>
-                  <a:srgbClr val="94A3B8"/>
+                  <a:srgbClr val="9AA7B4"/>
                 </a:solidFill>
                 <a:latin typeface="Calibri"/>
               </a:defRPr>
@@ -4442,7 +3356,7 @@
           <a:pPr>
             <a:defRPr sz="1000">
               <a:solidFill>
-                <a:srgbClr val="334155"/>
+                <a:srgbClr val="2B3F52"/>
               </a:solidFill>
               <a:latin typeface="Calibri"/>
               <a:cs typeface="Calibri"/>
@@ -4468,7 +3382,7 @@
 </c:chartSpace>
 </file>
 
-<file path=ppt/charts/chart9.xml><?xml version="1.0" encoding="utf-8"?>
+<file path=ppt/charts/chart7.xml><?xml version="1.0" encoding="utf-8"?>
 <c:chartSpace xmlns:c="http://schemas.openxmlformats.org/drawingml/2006/chart" xmlns:a="http://schemas.openxmlformats.org/drawingml/2006/main" xmlns:r="http://schemas.openxmlformats.org/officeDocument/2006/relationships">
   <c:date1904 val="0"/>
   <c:roundedCorners val="1"/>
@@ -4496,7 +3410,7 @@
           </c:tx>
           <c:spPr>
             <a:solidFill>
-              <a:srgbClr val="94A3B8"/>
+              <a:srgbClr val="8EA6B8"/>
             </a:solidFill>
             <a:effectLst/>
           </c:spPr>
@@ -4706,7 +3620,7 @@
             <a:pPr>
               <a:defRPr sz="1100" b="0" i="0" u="none" strike="noStrike">
                 <a:solidFill>
-                  <a:srgbClr val="334155"/>
+                  <a:srgbClr val="2B3F52"/>
                 </a:solidFill>
                 <a:latin typeface="Calibri"/>
               </a:defRPr>
@@ -4777,7 +3691,7 @@
           <a:pPr>
             <a:defRPr sz="1000">
               <a:solidFill>
-                <a:srgbClr val="334155"/>
+                <a:srgbClr val="2B3F52"/>
               </a:solidFill>
               <a:latin typeface="Calibri"/>
               <a:cs typeface="Calibri"/>
@@ -4787,6 +3701,508 @@
         </a:p>
       </c:txPr>
     </c:legend>
+    <c:plotVisOnly val="1"/>
+    <c:dispBlanksAs val="span"/>
+  </c:chart>
+  <c:spPr>
+    <a:noFill/>
+    <a:ln>
+      <a:noFill/>
+    </a:ln>
+    <a:effectLst/>
+  </c:spPr>
+  <c:externalData r:id="rId1">
+    <c:autoUpdate val="0"/>
+  </c:externalData>
+</c:chartSpace>
+</file>
+
+<file path=ppt/charts/chart8.xml><?xml version="1.0" encoding="utf-8"?>
+<c:chartSpace xmlns:c="http://schemas.openxmlformats.org/drawingml/2006/chart" xmlns:a="http://schemas.openxmlformats.org/drawingml/2006/main" xmlns:r="http://schemas.openxmlformats.org/officeDocument/2006/relationships">
+  <c:date1904 val="0"/>
+  <c:roundedCorners val="1"/>
+  <c:chart>
+    <c:autoTitleDeleted val="1"/>
+    <c:plotArea>
+      <c:layout/>
+      <c:barChart>
+        <c:barDir val="bar"/>
+        <c:grouping val="clustered"/>
+        <c:varyColors val="0"/>
+        <c:ser>
+          <c:idx val="0"/>
+          <c:order val="0"/>
+          <c:tx>
+            <c:strRef>
+              <c:f>Sheet1!$B$1</c:f>
+              <c:strCache>
+                <c:ptCount val="1"/>
+                <c:pt idx="0">
+                  <c:v>Yearly</c:v>
+                </c:pt>
+              </c:strCache>
+            </c:strRef>
+          </c:tx>
+          <c:spPr>
+            <a:solidFill>
+              <a:srgbClr val="1E4E79"/>
+            </a:solidFill>
+            <a:effectLst/>
+          </c:spPr>
+          <c:invertIfNegative val="0"/>
+          <c:dLbls>
+            <c:numFmt formatCode="#,##0" sourceLinked="0"/>
+            <c:txPr>
+              <a:bodyPr/>
+              <a:lstStyle/>
+              <a:p>
+                <a:pPr>
+                  <a:defRPr b="0" i="0" strike="noStrike" sz="900" u="none">
+                    <a:solidFill>
+                      <a:srgbClr val="2B3F52"/>
+                    </a:solidFill>
+                    <a:latin typeface="Calibri"/>
+                  </a:defRPr>
+                </a:pPr>
+              </a:p>
+            </c:txPr>
+            <c:showLegendKey val="0"/>
+            <c:showVal val="1"/>
+            <c:showCatName val="0"/>
+            <c:showSerName val="0"/>
+            <c:showPercent val="0"/>
+            <c:showBubbleSize val="0"/>
+            <c:showLeaderLines val="0"/>
+          </c:dLbls>
+          <c:cat>
+            <c:multiLvlStrRef>
+              <c:f>Sheet1!$A$2:$A$10</c:f>
+              <c:multiLvlStrCache>
+                <c:ptCount val="9"/>
+                <c:lvl>
+                  <c:pt idx="0">
+                    <c:v>ACER now</c:v>
+                  </c:pt>
+                  <c:pt idx="1">
+                    <c:v>Brickwork</c:v>
+                  </c:pt>
+                  <c:pt idx="2">
+                    <c:v>ACER FY28</c:v>
+                  </c:pt>
+                  <c:pt idx="3">
+                    <c:v>Acuite</c:v>
+                  </c:pt>
+                  <c:pt idx="4">
+                    <c:v>Infomerics</c:v>
+                  </c:pt>
+                  <c:pt idx="5">
+                    <c:v>India Ratings</c:v>
+                  </c:pt>
+                  <c:pt idx="6">
+                    <c:v>CARE</c:v>
+                  </c:pt>
+                  <c:pt idx="7">
+                    <c:v>ICRA</c:v>
+                  </c:pt>
+                  <c:pt idx="8">
+                    <c:v>CRISIL</c:v>
+                  </c:pt>
+                </c:lvl>
+              </c:multiLvlStrCache>
+            </c:multiLvlStrRef>
+          </c:cat>
+          <c:val>
+            <c:numRef>
+              <c:f>Sheet1!$B$2:$B$10</c:f>
+              <c:numCache>
+                <c:formatCode>General</c:formatCode>
+                <c:ptCount val="9"/>
+                <c:pt idx="0">
+                  <c:v>0.9</c:v>
+                </c:pt>
+                <c:pt idx="1">
+                  <c:v>5.9</c:v>
+                </c:pt>
+                <c:pt idx="2">
+                  <c:v>8</c:v>
+                </c:pt>
+                <c:pt idx="3">
+                  <c:v>57</c:v>
+                </c:pt>
+                <c:pt idx="4">
+                  <c:v>95</c:v>
+                </c:pt>
+                <c:pt idx="5">
+                  <c:v>251</c:v>
+                </c:pt>
+                <c:pt idx="6">
+                  <c:v>423</c:v>
+                </c:pt>
+                <c:pt idx="7">
+                  <c:v>498</c:v>
+                </c:pt>
+                <c:pt idx="8">
+                  <c:v>909</c:v>
+                </c:pt>
+              </c:numCache>
+            </c:numRef>
+          </c:val>
+        </c:ser>
+        <c:dLbls>
+          <c:numFmt formatCode="#,##0" sourceLinked="0"/>
+          <c:txPr>
+            <a:bodyPr/>
+            <a:lstStyle/>
+            <a:p>
+              <a:pPr>
+                <a:defRPr b="0" i="0" strike="noStrike" sz="900" u="none">
+                  <a:solidFill>
+                    <a:srgbClr val="2B3F52"/>
+                  </a:solidFill>
+                  <a:latin typeface="Calibri"/>
+                </a:defRPr>
+              </a:pPr>
+            </a:p>
+          </c:txPr>
+          <c:showLegendKey val="0"/>
+          <c:showVal val="1"/>
+          <c:showCatName val="0"/>
+          <c:showSerName val="0"/>
+          <c:showPercent val="0"/>
+          <c:showBubbleSize val="0"/>
+          <c:showLeaderLines val="0"/>
+        </c:dLbls>
+        <c:gapWidth val="40"/>
+        <c:overlap val="0"/>
+        <c:axId val="2094734554"/>
+        <c:axId val="2094734552"/>
+        <c:axId val="2094734556"/>
+      </c:barChart>
+      <c:catAx>
+        <c:axId val="2094734554"/>
+        <c:scaling>
+          <c:orientation val="minMax"/>
+        </c:scaling>
+        <c:delete val="0"/>
+        <c:axPos val="l"/>
+        <c:numFmt formatCode="General" sourceLinked="1"/>
+        <c:majorTickMark val="out"/>
+        <c:minorTickMark val="none"/>
+        <c:tickLblPos val="nextTo"/>
+        <c:spPr>
+          <a:ln w="12700" cap="flat">
+            <a:solidFill>
+              <a:srgbClr val="888888"/>
+            </a:solidFill>
+            <a:prstDash val="solid"/>
+            <a:round/>
+          </a:ln>
+        </c:spPr>
+        <c:txPr>
+          <a:bodyPr/>
+          <a:lstStyle/>
+          <a:p>
+            <a:pPr>
+              <a:defRPr sz="1000" b="0" i="0" u="none" strike="noStrike">
+                <a:solidFill>
+                  <a:srgbClr val="2B3F52"/>
+                </a:solidFill>
+                <a:latin typeface="Calibri"/>
+              </a:defRPr>
+            </a:pPr>
+            <a:endParaRPr lang="en-US"/>
+          </a:p>
+        </c:txPr>
+        <c:crossAx val="2094734552"/>
+        <c:crosses val="autoZero"/>
+        <c:auto val="1"/>
+        <c:lblAlgn val="ctr"/>
+        <c:noMultiLvlLbl val="1"/>
+      </c:catAx>
+      <c:valAx>
+        <c:axId val="2094734552"/>
+        <c:scaling>
+          <c:orientation val="minMax"/>
+          <c:max val="1000"/>
+        </c:scaling>
+        <c:delete val="1"/>
+        <c:axPos val="b"/>
+        <c:numFmt formatCode="General" sourceLinked="0"/>
+        <c:majorTickMark val="out"/>
+        <c:minorTickMark val="none"/>
+        <c:tickLblPos val="low"/>
+        <c:spPr>
+          <a:ln w="12700" cap="flat">
+            <a:solidFill>
+              <a:srgbClr val="888888"/>
+            </a:solidFill>
+            <a:prstDash val="solid"/>
+            <a:round/>
+          </a:ln>
+        </c:spPr>
+        <c:txPr>
+          <a:bodyPr/>
+          <a:lstStyle/>
+          <a:p>
+            <a:pPr>
+              <a:defRPr sz="1200" b="0" i="0" u="none" strike="noStrike">
+                <a:solidFill>
+                  <a:srgbClr val="000000"/>
+                </a:solidFill>
+                <a:latin typeface="Arial"/>
+              </a:defRPr>
+            </a:pPr>
+            <a:endParaRPr lang="en-US"/>
+          </a:p>
+        </c:txPr>
+        <c:crossAx val="2094734554"/>
+        <c:crosses val="autoZero"/>
+        <c:crossBetween val="between"/>
+      </c:valAx>
+      <c:spPr>
+        <a:noFill/>
+        <a:ln>
+          <a:noFill/>
+        </a:ln>
+        <a:effectLst/>
+      </c:spPr>
+    </c:plotArea>
+    <c:plotVisOnly val="1"/>
+    <c:dispBlanksAs val="span"/>
+  </c:chart>
+  <c:spPr>
+    <a:noFill/>
+    <a:ln>
+      <a:noFill/>
+    </a:ln>
+    <a:effectLst/>
+  </c:spPr>
+  <c:externalData r:id="rId1">
+    <c:autoUpdate val="0"/>
+  </c:externalData>
+</c:chartSpace>
+</file>
+
+<file path=ppt/charts/chart9.xml><?xml version="1.0" encoding="utf-8"?>
+<c:chartSpace xmlns:c="http://schemas.openxmlformats.org/drawingml/2006/chart" xmlns:a="http://schemas.openxmlformats.org/drawingml/2006/main" xmlns:r="http://schemas.openxmlformats.org/officeDocument/2006/relationships">
+  <c:date1904 val="0"/>
+  <c:roundedCorners val="1"/>
+  <c:chart>
+    <c:autoTitleDeleted val="1"/>
+    <c:plotArea>
+      <c:layout/>
+      <c:barChart>
+        <c:barDir val="bar"/>
+        <c:grouping val="clustered"/>
+        <c:varyColors val="0"/>
+        <c:ser>
+          <c:idx val="0"/>
+          <c:order val="0"/>
+          <c:tx>
+            <c:strRef>
+              <c:f>Sheet1!$B$1</c:f>
+              <c:strCache>
+                <c:ptCount val="1"/>
+                <c:pt idx="0">
+                  <c:v>Quarterly</c:v>
+                </c:pt>
+              </c:strCache>
+            </c:strRef>
+          </c:tx>
+          <c:spPr>
+            <a:solidFill>
+              <a:srgbClr val="0F766E"/>
+            </a:solidFill>
+            <a:effectLst/>
+          </c:spPr>
+          <c:invertIfNegative val="0"/>
+          <c:dLbls>
+            <c:numFmt formatCode="#,##0" sourceLinked="0"/>
+            <c:txPr>
+              <a:bodyPr/>
+              <a:lstStyle/>
+              <a:p>
+                <a:pPr>
+                  <a:defRPr b="0" i="0" strike="noStrike" sz="1000" u="none">
+                    <a:solidFill>
+                      <a:srgbClr val="2B3F52"/>
+                    </a:solidFill>
+                    <a:latin typeface="Calibri"/>
+                  </a:defRPr>
+                </a:pPr>
+              </a:p>
+            </c:txPr>
+            <c:showLegendKey val="0"/>
+            <c:showVal val="1"/>
+            <c:showCatName val="0"/>
+            <c:showSerName val="0"/>
+            <c:showPercent val="0"/>
+            <c:showBubbleSize val="0"/>
+            <c:showLeaderLines val="0"/>
+          </c:dLbls>
+          <c:cat>
+            <c:multiLvlStrRef>
+              <c:f>Sheet1!$A$2:$A$5</c:f>
+              <c:multiLvlStrCache>
+                <c:ptCount val="4"/>
+                <c:lvl>
+                  <c:pt idx="0">
+                    <c:v>ACER</c:v>
+                  </c:pt>
+                  <c:pt idx="1">
+                    <c:v>ICRA</c:v>
+                  </c:pt>
+                  <c:pt idx="2">
+                    <c:v>CARE</c:v>
+                  </c:pt>
+                  <c:pt idx="3">
+                    <c:v>CRISIL</c:v>
+                  </c:pt>
+                </c:lvl>
+              </c:multiLvlStrCache>
+            </c:multiLvlStrRef>
+          </c:cat>
+          <c:val>
+            <c:numRef>
+              <c:f>Sheet1!$B$2:$B$5</c:f>
+              <c:numCache>
+                <c:formatCode>General</c:formatCode>
+                <c:ptCount val="4"/>
+                <c:pt idx="0">
+                  <c:v>0.15</c:v>
+                </c:pt>
+                <c:pt idx="1">
+                  <c:v>87</c:v>
+                </c:pt>
+                <c:pt idx="2">
+                  <c:v>102</c:v>
+                </c:pt>
+                <c:pt idx="3">
+                  <c:v>254</c:v>
+                </c:pt>
+              </c:numCache>
+            </c:numRef>
+          </c:val>
+        </c:ser>
+        <c:dLbls>
+          <c:numFmt formatCode="#,##0" sourceLinked="0"/>
+          <c:txPr>
+            <a:bodyPr/>
+            <a:lstStyle/>
+            <a:p>
+              <a:pPr>
+                <a:defRPr b="0" i="0" strike="noStrike" sz="1000" u="none">
+                  <a:solidFill>
+                    <a:srgbClr val="2B3F52"/>
+                  </a:solidFill>
+                  <a:latin typeface="Calibri"/>
+                </a:defRPr>
+              </a:pPr>
+            </a:p>
+          </c:txPr>
+          <c:showLegendKey val="0"/>
+          <c:showVal val="1"/>
+          <c:showCatName val="0"/>
+          <c:showSerName val="0"/>
+          <c:showPercent val="0"/>
+          <c:showBubbleSize val="0"/>
+          <c:showLeaderLines val="0"/>
+        </c:dLbls>
+        <c:gapWidth val="55"/>
+        <c:overlap val="0"/>
+        <c:axId val="2094734554"/>
+        <c:axId val="2094734552"/>
+        <c:axId val="2094734556"/>
+      </c:barChart>
+      <c:catAx>
+        <c:axId val="2094734554"/>
+        <c:scaling>
+          <c:orientation val="minMax"/>
+        </c:scaling>
+        <c:delete val="0"/>
+        <c:axPos val="l"/>
+        <c:numFmt formatCode="General" sourceLinked="1"/>
+        <c:majorTickMark val="out"/>
+        <c:minorTickMark val="none"/>
+        <c:tickLblPos val="nextTo"/>
+        <c:spPr>
+          <a:ln w="12700" cap="flat">
+            <a:solidFill>
+              <a:srgbClr val="888888"/>
+            </a:solidFill>
+            <a:prstDash val="solid"/>
+            <a:round/>
+          </a:ln>
+        </c:spPr>
+        <c:txPr>
+          <a:bodyPr/>
+          <a:lstStyle/>
+          <a:p>
+            <a:pPr>
+              <a:defRPr sz="1100" b="0" i="0" u="none" strike="noStrike">
+                <a:solidFill>
+                  <a:srgbClr val="2B3F52"/>
+                </a:solidFill>
+                <a:latin typeface="Calibri"/>
+              </a:defRPr>
+            </a:pPr>
+            <a:endParaRPr lang="en-US"/>
+          </a:p>
+        </c:txPr>
+        <c:crossAx val="2094734552"/>
+        <c:crosses val="autoZero"/>
+        <c:auto val="1"/>
+        <c:lblAlgn val="ctr"/>
+        <c:noMultiLvlLbl val="1"/>
+      </c:catAx>
+      <c:valAx>
+        <c:axId val="2094734552"/>
+        <c:scaling>
+          <c:orientation val="minMax"/>
+          <c:max val="290"/>
+        </c:scaling>
+        <c:delete val="1"/>
+        <c:axPos val="b"/>
+        <c:numFmt formatCode="General" sourceLinked="0"/>
+        <c:majorTickMark val="out"/>
+        <c:minorTickMark val="none"/>
+        <c:tickLblPos val="low"/>
+        <c:spPr>
+          <a:ln w="12700" cap="flat">
+            <a:solidFill>
+              <a:srgbClr val="888888"/>
+            </a:solidFill>
+            <a:prstDash val="solid"/>
+            <a:round/>
+          </a:ln>
+        </c:spPr>
+        <c:txPr>
+          <a:bodyPr/>
+          <a:lstStyle/>
+          <a:p>
+            <a:pPr>
+              <a:defRPr sz="1200" b="0" i="0" u="none" strike="noStrike">
+                <a:solidFill>
+                  <a:srgbClr val="000000"/>
+                </a:solidFill>
+                <a:latin typeface="Arial"/>
+              </a:defRPr>
+            </a:pPr>
+            <a:endParaRPr lang="en-US"/>
+          </a:p>
+        </c:txPr>
+        <c:crossAx val="2094734554"/>
+        <c:crosses val="autoZero"/>
+        <c:crossBetween val="between"/>
+      </c:valAx>
+      <c:spPr>
+        <a:noFill/>
+        <a:ln>
+          <a:noFill/>
+        </a:ln>
+        <a:effectLst/>
+      </c:spPr>
+    </c:plotArea>
     <c:plotVisOnly val="1"/>
     <c:dispBlanksAs val="span"/>
   </c:chart>
@@ -6812,13 +6228,13 @@
         <p:spPr>
           <a:xfrm>
             <a:off x="566928" y="1828800"/>
-            <a:ext cx="914400" cy="82296"/>
+            <a:ext cx="822960" cy="82296"/>
           </a:xfrm>
           <a:prstGeom prst="rect">
             <a:avLst/>
           </a:prstGeom>
           <a:solidFill>
-            <a:srgbClr val="2B5CC4"/>
+            <a:srgbClr val="0F766E"/>
           </a:solidFill>
           <a:ln/>
         </p:spPr>
@@ -6850,13 +6266,13 @@
             <a:r>
               <a:rPr lang="en-US" sz="1200" b="1" spc="200" kern="0" dirty="0">
                 <a:solidFill>
-                  <a:srgbClr val="2B5CC4"/>
+                  <a:srgbClr val="0F766E"/>
                 </a:solidFill>
                 <a:latin typeface="Calibri" pitchFamily="34" charset="0"/>
                 <a:ea typeface="Calibri" pitchFamily="34" charset="-122"/>
                 <a:cs typeface="Calibri" pitchFamily="34" charset="-120"/>
               </a:rPr>
-              <a:t>BOARD PRESENTATION, CONFIDENTIAL</a:t>
+              <a:t>FY27  ·  BOARD PRESENTATION  ·  CONFIDENTIAL</a:t>
             </a:r>
             <a:endParaRPr lang="en-US" sz="1200" dirty="0"/>
           </a:p>
@@ -6871,7 +6287,7 @@
         <p:spPr>
           <a:xfrm>
             <a:off x="566928" y="2395728"/>
-            <a:ext cx="10789920" cy="914400"/>
+            <a:ext cx="10607040" cy="1280160"/>
           </a:xfrm>
           <a:prstGeom prst="rect">
             <a:avLst/>
@@ -6887,17 +6303,17 @@
               <a:buNone/>
             </a:pPr>
             <a:r>
-              <a:rPr lang="en-US" sz="4400" b="1" dirty="0">
-                <a:solidFill>
-                  <a:srgbClr val="0F172A"/>
+              <a:rPr lang="en-US" sz="3800" b="1" dirty="0">
+                <a:solidFill>
+                  <a:srgbClr val="0A1F33"/>
                 </a:solidFill>
                 <a:latin typeface="Cambria" pitchFamily="34" charset="0"/>
                 <a:ea typeface="Cambria" pitchFamily="34" charset="-122"/>
                 <a:cs typeface="Cambria" pitchFamily="34" charset="-120"/>
               </a:rPr>
-              <a:t>FY27 Annual Operating Plan</a:t>
-            </a:r>
-            <a:endParaRPr lang="en-US" sz="4400" dirty="0"/>
+              <a:t>An investment year to become a rating business, not a treasury.</a:t>
+            </a:r>
+            <a:endParaRPr lang="en-US" sz="3800" dirty="0"/>
           </a:p>
         </p:txBody>
       </p:sp>
@@ -6909,8 +6325,8 @@
         </p:nvSpPr>
         <p:spPr>
           <a:xfrm>
-            <a:off x="566928" y="3429000"/>
-            <a:ext cx="8686800" cy="822960"/>
+            <a:off x="566928" y="3840480"/>
+            <a:ext cx="9601200" cy="914400"/>
           </a:xfrm>
           <a:prstGeom prst="rect">
             <a:avLst/>
@@ -6926,17 +6342,17 @@
               <a:buNone/>
             </a:pPr>
             <a:r>
-              <a:rPr lang="en-US" sz="1600" dirty="0">
-                <a:solidFill>
-                  <a:srgbClr val="64748B"/>
+              <a:rPr lang="en-US" sz="1500" dirty="0">
+                <a:solidFill>
+                  <a:srgbClr val="5B6B7B"/>
                 </a:solidFill>
                 <a:latin typeface="Calibri" pitchFamily="34" charset="0"/>
                 <a:ea typeface="Calibri" pitchFamily="34" charset="-122"/>
                 <a:cs typeface="Calibri" pitchFamily="34" charset="-120"/>
               </a:rPr>
-              <a:t>The plan to convert a capital rich, deposit dependent balance sheet into a self sustaining ratings franchise, built on the Bank Loan Rating licence.</a:t>
-            </a:r>
-            <a:endParaRPr lang="en-US" sz="1600" dirty="0"/>
+              <a:t>ACER holds Rs 26 Cr in reserves and earns almost entirely on interest. The Bank Loan Rating licence is the single lever that turns that idle capital into an operating franchise. This plan models the year across three licence timing scenarios.</a:t>
+            </a:r>
+            <a:endParaRPr lang="en-US" sz="1500" dirty="0"/>
           </a:p>
         </p:txBody>
       </p:sp>
@@ -6948,7 +6364,7 @@
         </p:nvSpPr>
         <p:spPr>
           <a:xfrm>
-            <a:off x="566928" y="5440680"/>
+            <a:off x="566928" y="5394960"/>
             <a:ext cx="3474720" cy="274320"/>
           </a:xfrm>
           <a:prstGeom prst="rect">
@@ -6967,7 +6383,7 @@
             <a:r>
               <a:rPr lang="en-US" sz="1200" dirty="0">
                 <a:solidFill>
-                  <a:srgbClr val="94A3B8"/>
+                  <a:srgbClr val="9AA7B4"/>
                 </a:solidFill>
                 <a:latin typeface="Calibri" pitchFamily="34" charset="0"/>
                 <a:ea typeface="Calibri" pitchFamily="34" charset="-122"/>
@@ -6987,7 +6403,7 @@
         </p:nvSpPr>
         <p:spPr>
           <a:xfrm>
-            <a:off x="566928" y="5715000"/>
+            <a:off x="566928" y="5669280"/>
             <a:ext cx="3474720" cy="365760"/>
           </a:xfrm>
           <a:prstGeom prst="rect">
@@ -7006,7 +6422,7 @@
             <a:r>
               <a:rPr lang="en-US" sz="1400" b="1" dirty="0">
                 <a:solidFill>
-                  <a:srgbClr val="0F172A"/>
+                  <a:srgbClr val="0A1F33"/>
                 </a:solidFill>
                 <a:latin typeface="Calibri" pitchFamily="34" charset="0"/>
                 <a:ea typeface="Calibri" pitchFamily="34" charset="-122"/>
@@ -7026,7 +6442,7 @@
         </p:nvSpPr>
         <p:spPr>
           <a:xfrm>
-            <a:off x="4224528" y="5440680"/>
+            <a:off x="4224528" y="5394960"/>
             <a:ext cx="3474720" cy="274320"/>
           </a:xfrm>
           <a:prstGeom prst="rect">
@@ -7045,7 +6461,7 @@
             <a:r>
               <a:rPr lang="en-US" sz="1200" dirty="0">
                 <a:solidFill>
-                  <a:srgbClr val="94A3B8"/>
+                  <a:srgbClr val="9AA7B4"/>
                 </a:solidFill>
                 <a:latin typeface="Calibri" pitchFamily="34" charset="0"/>
                 <a:ea typeface="Calibri" pitchFamily="34" charset="-122"/>
@@ -7065,7 +6481,7 @@
         </p:nvSpPr>
         <p:spPr>
           <a:xfrm>
-            <a:off x="4224528" y="5715000"/>
+            <a:off x="4224528" y="5669280"/>
             <a:ext cx="3474720" cy="365760"/>
           </a:xfrm>
           <a:prstGeom prst="rect">
@@ -7084,7 +6500,7 @@
             <a:r>
               <a:rPr lang="en-US" sz="1400" b="1" dirty="0">
                 <a:solidFill>
-                  <a:srgbClr val="0F172A"/>
+                  <a:srgbClr val="0A1F33"/>
                 </a:solidFill>
                 <a:latin typeface="Calibri" pitchFamily="34" charset="0"/>
                 <a:ea typeface="Calibri" pitchFamily="34" charset="-122"/>
@@ -7104,7 +6520,7 @@
         </p:nvSpPr>
         <p:spPr>
           <a:xfrm>
-            <a:off x="7882128" y="5440680"/>
+            <a:off x="7882128" y="5394960"/>
             <a:ext cx="3474720" cy="274320"/>
           </a:xfrm>
           <a:prstGeom prst="rect">
@@ -7123,7 +6539,7 @@
             <a:r>
               <a:rPr lang="en-US" sz="1200" dirty="0">
                 <a:solidFill>
-                  <a:srgbClr val="94A3B8"/>
+                  <a:srgbClr val="9AA7B4"/>
                 </a:solidFill>
                 <a:latin typeface="Calibri" pitchFamily="34" charset="0"/>
                 <a:ea typeface="Calibri" pitchFamily="34" charset="-122"/>
@@ -7143,7 +6559,7 @@
         </p:nvSpPr>
         <p:spPr>
           <a:xfrm>
-            <a:off x="7882128" y="5715000"/>
+            <a:off x="7882128" y="5669280"/>
             <a:ext cx="3474720" cy="365760"/>
           </a:xfrm>
           <a:prstGeom prst="rect">
@@ -7162,7 +6578,7 @@
             <a:r>
               <a:rPr lang="en-US" sz="1400" b="1" dirty="0">
                 <a:solidFill>
-                  <a:srgbClr val="0F172A"/>
+                  <a:srgbClr val="0A1F33"/>
                 </a:solidFill>
                 <a:latin typeface="Calibri" pitchFamily="34" charset="0"/>
                 <a:ea typeface="Calibri" pitchFamily="34" charset="-122"/>
@@ -7214,7 +6630,7 @@
         </p:nvSpPr>
         <p:spPr>
           <a:xfrm>
-            <a:off x="11430000" y="402336"/>
+            <a:off x="11430000" y="420624"/>
             <a:ext cx="365760" cy="274320"/>
           </a:xfrm>
           <a:prstGeom prst="rect">
@@ -7233,7 +6649,7 @@
             <a:r>
               <a:rPr lang="en-US" sz="1100" b="1" dirty="0">
                 <a:solidFill>
-                  <a:srgbClr val="94A3B8"/>
+                  <a:srgbClr val="9AA7B4"/>
                 </a:solidFill>
                 <a:latin typeface="Calibri" pitchFamily="34" charset="0"/>
                 <a:ea typeface="Calibri" pitchFamily="34" charset="-122"/>
@@ -7253,7 +6669,7 @@
         </p:nvSpPr>
         <p:spPr>
           <a:xfrm>
-            <a:off x="566928" y="438912"/>
+            <a:off x="566928" y="457200"/>
             <a:ext cx="10058400" cy="274320"/>
           </a:xfrm>
           <a:prstGeom prst="rect">
@@ -7272,7 +6688,7 @@
             <a:r>
               <a:rPr lang="en-US" sz="1100" b="1" spc="200" kern="0" dirty="0">
                 <a:solidFill>
-                  <a:srgbClr val="2B5CC4"/>
+                  <a:srgbClr val="0F766E"/>
                 </a:solidFill>
                 <a:latin typeface="Calibri" pitchFamily="34" charset="0"/>
                 <a:ea typeface="Calibri" pitchFamily="34" charset="-122"/>
@@ -7292,8 +6708,8 @@
         </p:nvSpPr>
         <p:spPr>
           <a:xfrm>
-            <a:off x="566928" y="694944"/>
-            <a:ext cx="11064240" cy="548640"/>
+            <a:off x="566928" y="713232"/>
+            <a:ext cx="11064240" cy="640080"/>
           </a:xfrm>
           <a:prstGeom prst="rect">
             <a:avLst/>
@@ -7309,17 +6725,17 @@
               <a:buNone/>
             </a:pPr>
             <a:r>
-              <a:rPr lang="en-US" sz="2900" b="1" dirty="0">
-                <a:solidFill>
-                  <a:srgbClr val="0F172A"/>
+              <a:rPr lang="en-US" sz="2700" b="1" dirty="0">
+                <a:solidFill>
+                  <a:srgbClr val="0A1F33"/>
                 </a:solidFill>
                 <a:latin typeface="Cambria" pitchFamily="34" charset="0"/>
                 <a:ea typeface="Cambria" pitchFamily="34" charset="-122"/>
                 <a:cs typeface="Cambria" pitchFamily="34" charset="-120"/>
               </a:rPr>
-              <a:t>Solvency is not the question</a:t>
-            </a:r>
-            <a:endParaRPr lang="en-US" sz="2900" dirty="0"/>
+              <a:t>A loss year is never a solvency risk</a:t>
+            </a:r>
+            <a:endParaRPr lang="en-US" sz="2700" dirty="0"/>
           </a:p>
         </p:txBody>
       </p:sp>
@@ -7331,7 +6747,7 @@
         </p:nvSpPr>
         <p:spPr>
           <a:xfrm>
-            <a:off x="566928" y="1298448"/>
+            <a:off x="566928" y="1353312"/>
             <a:ext cx="11064240" cy="457200"/>
           </a:xfrm>
           <a:prstGeom prst="rect">
@@ -7350,13 +6766,13 @@
             <a:r>
               <a:rPr lang="en-US" sz="1400" dirty="0">
                 <a:solidFill>
-                  <a:srgbClr val="64748B"/>
+                  <a:srgbClr val="5B6B7B"/>
                 </a:solidFill>
                 <a:latin typeface="Calibri" pitchFamily="34" charset="0"/>
                 <a:ea typeface="Calibri" pitchFamily="34" charset="-122"/>
                 <a:cs typeface="Calibri" pitchFamily="34" charset="-120"/>
               </a:rPr>
-              <a:t>The plan is fully funded in every scenario without touching the regulatory net worth.</a:t>
+              <a:t>Every scenario is funded from reserves and interest without touching the regulatory net worth.</a:t>
             </a:r>
             <a:endParaRPr lang="en-US" sz="1400" dirty="0"/>
           </a:p>
@@ -7371,19 +6787,17 @@
         <p:spPr>
           <a:xfrm>
             <a:off x="566928" y="1783080"/>
-            <a:ext cx="2606040" cy="1280160"/>
-          </a:xfrm>
-          <a:prstGeom prst="roundRect">
-            <a:avLst>
-              <a:gd name="adj" fmla="val 4286"/>
-            </a:avLst>
+            <a:ext cx="2606040" cy="1325880"/>
+          </a:xfrm>
+          <a:prstGeom prst="rect">
+            <a:avLst/>
           </a:prstGeom>
           <a:solidFill>
-            <a:srgbClr val="F5F8FB"/>
+            <a:srgbClr val="F6F8FA"/>
           </a:solidFill>
           <a:ln w="12700">
             <a:solidFill>
-              <a:srgbClr val="E2E8F0"/>
+              <a:srgbClr val="E6E9EE"/>
             </a:solidFill>
             <a:prstDash val="solid"/>
           </a:ln>
@@ -7397,8 +6811,8 @@
         </p:nvSpPr>
         <p:spPr>
           <a:xfrm>
-            <a:off x="713232" y="1892808"/>
-            <a:ext cx="2313432" cy="274320"/>
+            <a:off x="731520" y="1911096"/>
+            <a:ext cx="2276856" cy="274320"/>
           </a:xfrm>
           <a:prstGeom prst="rect">
             <a:avLst/>
@@ -7416,7 +6830,7 @@
             <a:r>
               <a:rPr lang="en-US" sz="1050" dirty="0">
                 <a:solidFill>
-                  <a:srgbClr val="64748B"/>
+                  <a:srgbClr val="5B6B7B"/>
                 </a:solidFill>
                 <a:latin typeface="Calibri" pitchFamily="34" charset="0"/>
                 <a:ea typeface="Calibri" pitchFamily="34" charset="-122"/>
@@ -7436,8 +6850,8 @@
         </p:nvSpPr>
         <p:spPr>
           <a:xfrm>
-            <a:off x="713232" y="2130552"/>
-            <a:ext cx="2313432" cy="411480"/>
+            <a:off x="731520" y="2148840"/>
+            <a:ext cx="2276856" cy="457200"/>
           </a:xfrm>
           <a:prstGeom prst="rect">
             <a:avLst/>
@@ -7453,9 +6867,9 @@
               <a:buNone/>
             </a:pPr>
             <a:r>
-              <a:rPr lang="en-US" sz="2000" b="1" dirty="0">
-                <a:solidFill>
-                  <a:srgbClr val="0F172A"/>
+              <a:rPr lang="en-US" sz="2100" b="1" dirty="0">
+                <a:solidFill>
+                  <a:srgbClr val="0A1F33"/>
                 </a:solidFill>
                 <a:latin typeface="Cambria" pitchFamily="34" charset="0"/>
                 <a:ea typeface="Cambria" pitchFamily="34" charset="-122"/>
@@ -7463,7 +6877,7 @@
               </a:rPr>
               <a:t>Rs 26.1 Cr</a:t>
             </a:r>
-            <a:endParaRPr lang="en-US" sz="2000" dirty="0"/>
+            <a:endParaRPr lang="en-US" sz="2100" dirty="0"/>
           </a:p>
         </p:txBody>
       </p:sp>
@@ -7476,19 +6890,17 @@
         <p:spPr>
           <a:xfrm>
             <a:off x="3328416" y="1783080"/>
-            <a:ext cx="2606040" cy="1280160"/>
-          </a:xfrm>
-          <a:prstGeom prst="roundRect">
-            <a:avLst>
-              <a:gd name="adj" fmla="val 4286"/>
-            </a:avLst>
+            <a:ext cx="2606040" cy="1325880"/>
+          </a:xfrm>
+          <a:prstGeom prst="rect">
+            <a:avLst/>
           </a:prstGeom>
           <a:solidFill>
-            <a:srgbClr val="F5F8FB"/>
+            <a:srgbClr val="F6F8FA"/>
           </a:solidFill>
           <a:ln w="12700">
             <a:solidFill>
-              <a:srgbClr val="E2E8F0"/>
+              <a:srgbClr val="E6E9EE"/>
             </a:solidFill>
             <a:prstDash val="solid"/>
           </a:ln>
@@ -7502,8 +6914,8 @@
         </p:nvSpPr>
         <p:spPr>
           <a:xfrm>
-            <a:off x="3474720" y="1892808"/>
-            <a:ext cx="2313432" cy="274320"/>
+            <a:off x="3493008" y="1911096"/>
+            <a:ext cx="2276856" cy="274320"/>
           </a:xfrm>
           <a:prstGeom prst="rect">
             <a:avLst/>
@@ -7521,7 +6933,7 @@
             <a:r>
               <a:rPr lang="en-US" sz="1050" dirty="0">
                 <a:solidFill>
-                  <a:srgbClr val="64748B"/>
+                  <a:srgbClr val="5B6B7B"/>
                 </a:solidFill>
                 <a:latin typeface="Calibri" pitchFamily="34" charset="0"/>
                 <a:ea typeface="Calibri" pitchFamily="34" charset="-122"/>
@@ -7541,8 +6953,8 @@
         </p:nvSpPr>
         <p:spPr>
           <a:xfrm>
-            <a:off x="3474720" y="2130552"/>
-            <a:ext cx="2313432" cy="411480"/>
+            <a:off x="3493008" y="2148840"/>
+            <a:ext cx="2276856" cy="457200"/>
           </a:xfrm>
           <a:prstGeom prst="rect">
             <a:avLst/>
@@ -7558,9 +6970,9 @@
               <a:buNone/>
             </a:pPr>
             <a:r>
-              <a:rPr lang="en-US" sz="2000" b="1" dirty="0">
-                <a:solidFill>
-                  <a:srgbClr val="DC2626"/>
+              <a:rPr lang="en-US" sz="2100" b="1" dirty="0">
+                <a:solidFill>
+                  <a:srgbClr val="B3261E"/>
                 </a:solidFill>
                 <a:latin typeface="Cambria" pitchFamily="34" charset="0"/>
                 <a:ea typeface="Cambria" pitchFamily="34" charset="-122"/>
@@ -7568,7 +6980,7 @@
               </a:rPr>
               <a:t>Rs 25.0 Cr</a:t>
             </a:r>
-            <a:endParaRPr lang="en-US" sz="2000" dirty="0"/>
+            <a:endParaRPr lang="en-US" sz="2100" dirty="0"/>
           </a:p>
         </p:txBody>
       </p:sp>
@@ -7580,8 +6992,8 @@
         </p:nvSpPr>
         <p:spPr>
           <a:xfrm>
-            <a:off x="3474720" y="2569464"/>
-            <a:ext cx="2313432" cy="365760"/>
+            <a:off x="3493008" y="2606040"/>
+            <a:ext cx="2276856" cy="365760"/>
           </a:xfrm>
           <a:prstGeom prst="rect">
             <a:avLst/>
@@ -7599,7 +7011,7 @@
             <a:r>
               <a:rPr lang="en-US" sz="900" dirty="0">
                 <a:solidFill>
-                  <a:srgbClr val="94A3B8"/>
+                  <a:srgbClr val="9AA7B4"/>
                 </a:solidFill>
                 <a:latin typeface="Calibri" pitchFamily="34" charset="0"/>
                 <a:ea typeface="Calibri" pitchFamily="34" charset="-122"/>
@@ -7620,19 +7032,17 @@
         <p:spPr>
           <a:xfrm>
             <a:off x="6089904" y="1783080"/>
-            <a:ext cx="2606040" cy="1280160"/>
-          </a:xfrm>
-          <a:prstGeom prst="roundRect">
-            <a:avLst>
-              <a:gd name="adj" fmla="val 4286"/>
-            </a:avLst>
+            <a:ext cx="2606040" cy="1325880"/>
+          </a:xfrm>
+          <a:prstGeom prst="rect">
+            <a:avLst/>
           </a:prstGeom>
           <a:solidFill>
-            <a:srgbClr val="F5F8FB"/>
+            <a:srgbClr val="F6F8FA"/>
           </a:solidFill>
           <a:ln w="12700">
             <a:solidFill>
-              <a:srgbClr val="E2E8F0"/>
+              <a:srgbClr val="E6E9EE"/>
             </a:solidFill>
             <a:prstDash val="solid"/>
           </a:ln>
@@ -7646,8 +7056,8 @@
         </p:nvSpPr>
         <p:spPr>
           <a:xfrm>
-            <a:off x="6236208" y="1892808"/>
-            <a:ext cx="2313432" cy="274320"/>
+            <a:off x="6254496" y="1911096"/>
+            <a:ext cx="2276856" cy="274320"/>
           </a:xfrm>
           <a:prstGeom prst="rect">
             <a:avLst/>
@@ -7665,7 +7075,7 @@
             <a:r>
               <a:rPr lang="en-US" sz="1050" dirty="0">
                 <a:solidFill>
-                  <a:srgbClr val="64748B"/>
+                  <a:srgbClr val="5B6B7B"/>
                 </a:solidFill>
                 <a:latin typeface="Calibri" pitchFamily="34" charset="0"/>
                 <a:ea typeface="Calibri" pitchFamily="34" charset="-122"/>
@@ -7685,8 +7095,8 @@
         </p:nvSpPr>
         <p:spPr>
           <a:xfrm>
-            <a:off x="6236208" y="2130552"/>
-            <a:ext cx="2313432" cy="411480"/>
+            <a:off x="6254496" y="2148840"/>
+            <a:ext cx="2276856" cy="457200"/>
           </a:xfrm>
           <a:prstGeom prst="rect">
             <a:avLst/>
@@ -7702,7 +7112,7 @@
               <a:buNone/>
             </a:pPr>
             <a:r>
-              <a:rPr lang="en-US" sz="2000" b="1" dirty="0">
+              <a:rPr lang="en-US" sz="2100" b="1" dirty="0">
                 <a:solidFill>
                   <a:srgbClr val="0F766E"/>
                 </a:solidFill>
@@ -7712,7 +7122,7 @@
               </a:rPr>
               <a:t>about Rs 3.0 Cr</a:t>
             </a:r>
-            <a:endParaRPr lang="en-US" sz="2000" dirty="0"/>
+            <a:endParaRPr lang="en-US" sz="2100" dirty="0"/>
           </a:p>
         </p:txBody>
       </p:sp>
@@ -7724,8 +7134,8 @@
         </p:nvSpPr>
         <p:spPr>
           <a:xfrm>
-            <a:off x="6236208" y="2569464"/>
-            <a:ext cx="2313432" cy="365760"/>
+            <a:off x="6254496" y="2606040"/>
+            <a:ext cx="2276856" cy="365760"/>
           </a:xfrm>
           <a:prstGeom prst="rect">
             <a:avLst/>
@@ -7743,7 +7153,7 @@
             <a:r>
               <a:rPr lang="en-US" sz="900" dirty="0">
                 <a:solidFill>
-                  <a:srgbClr val="94A3B8"/>
+                  <a:srgbClr val="9AA7B4"/>
                 </a:solidFill>
                 <a:latin typeface="Calibri" pitchFamily="34" charset="0"/>
                 <a:ea typeface="Calibri" pitchFamily="34" charset="-122"/>
@@ -7764,19 +7174,17 @@
         <p:spPr>
           <a:xfrm>
             <a:off x="8851392" y="1783080"/>
-            <a:ext cx="2606040" cy="1280160"/>
-          </a:xfrm>
-          <a:prstGeom prst="roundRect">
-            <a:avLst>
-              <a:gd name="adj" fmla="val 4286"/>
-            </a:avLst>
+            <a:ext cx="2606040" cy="1325880"/>
+          </a:xfrm>
+          <a:prstGeom prst="rect">
+            <a:avLst/>
           </a:prstGeom>
           <a:solidFill>
-            <a:srgbClr val="F5F8FB"/>
+            <a:srgbClr val="F6F8FA"/>
           </a:solidFill>
           <a:ln w="12700">
             <a:solidFill>
-              <a:srgbClr val="E2E8F0"/>
+              <a:srgbClr val="E6E9EE"/>
             </a:solidFill>
             <a:prstDash val="solid"/>
           </a:ln>
@@ -7790,8 +7198,8 @@
         </p:nvSpPr>
         <p:spPr>
           <a:xfrm>
-            <a:off x="8997696" y="1892808"/>
-            <a:ext cx="2313432" cy="274320"/>
+            <a:off x="9015984" y="1911096"/>
+            <a:ext cx="2276856" cy="274320"/>
           </a:xfrm>
           <a:prstGeom prst="rect">
             <a:avLst/>
@@ -7809,7 +7217,7 @@
             <a:r>
               <a:rPr lang="en-US" sz="1050" dirty="0">
                 <a:solidFill>
-                  <a:srgbClr val="64748B"/>
+                  <a:srgbClr val="5B6B7B"/>
                 </a:solidFill>
                 <a:latin typeface="Calibri" pitchFamily="34" charset="0"/>
                 <a:ea typeface="Calibri" pitchFamily="34" charset="-122"/>
@@ -7829,8 +7237,8 @@
         </p:nvSpPr>
         <p:spPr>
           <a:xfrm>
-            <a:off x="8997696" y="2130552"/>
-            <a:ext cx="2313432" cy="411480"/>
+            <a:off x="9015984" y="2148840"/>
+            <a:ext cx="2276856" cy="457200"/>
           </a:xfrm>
           <a:prstGeom prst="rect">
             <a:avLst/>
@@ -7846,7 +7254,7 @@
               <a:buNone/>
             </a:pPr>
             <a:r>
-              <a:rPr lang="en-US" sz="2000" b="1" dirty="0">
+              <a:rPr lang="en-US" sz="2100" b="1" dirty="0">
                 <a:solidFill>
                   <a:srgbClr val="0F766E"/>
                 </a:solidFill>
@@ -7856,7 +7264,7 @@
               </a:rPr>
               <a:t>about Rs 1.8 Cr</a:t>
             </a:r>
-            <a:endParaRPr lang="en-US" sz="2000" dirty="0"/>
+            <a:endParaRPr lang="en-US" sz="2100" dirty="0"/>
           </a:p>
         </p:txBody>
       </p:sp>
@@ -7868,8 +7276,8 @@
         </p:nvSpPr>
         <p:spPr>
           <a:xfrm>
-            <a:off x="8997696" y="2569464"/>
-            <a:ext cx="2313432" cy="365760"/>
+            <a:off x="9015984" y="2606040"/>
+            <a:ext cx="2276856" cy="365760"/>
           </a:xfrm>
           <a:prstGeom prst="rect">
             <a:avLst/>
@@ -7887,7 +7295,7 @@
             <a:r>
               <a:rPr lang="en-US" sz="900" dirty="0">
                 <a:solidFill>
-                  <a:srgbClr val="94A3B8"/>
+                  <a:srgbClr val="9AA7B4"/>
                 </a:solidFill>
                 <a:latin typeface="Calibri" pitchFamily="34" charset="0"/>
                 <a:ea typeface="Calibri" pitchFamily="34" charset="-122"/>
@@ -7907,7 +7315,7 @@
         </p:nvSpPr>
         <p:spPr>
           <a:xfrm>
-            <a:off x="566928" y="3383280"/>
+            <a:off x="566928" y="3429000"/>
             <a:ext cx="10972800" cy="2377440"/>
           </a:xfrm>
           <a:prstGeom prst="rect">
@@ -7922,7 +7330,7 @@
           <a:p>
             <a:pPr marL="177800" indent="-177800">
               <a:spcAft>
-                <a:spcPts val="700"/>
+                <a:spcPts val="800"/>
               </a:spcAft>
               <a:buSzPct val="100000"/>
               <a:buChar char="•"/>
@@ -7930,7 +7338,7 @@
             <a:r>
               <a:rPr lang="en-US" sz="1400" dirty="0">
                 <a:solidFill>
-                  <a:srgbClr val="334155"/>
+                  <a:srgbClr val="2B3F52"/>
                 </a:solidFill>
                 <a:latin typeface="Calibri" pitchFamily="34" charset="0"/>
                 <a:ea typeface="Calibri" pitchFamily="34" charset="-122"/>
@@ -7943,7 +7351,7 @@
           <a:p>
             <a:pPr marL="177800" indent="-177800">
               <a:spcAft>
-                <a:spcPts val="700"/>
+                <a:spcPts val="800"/>
               </a:spcAft>
               <a:buSzPct val="100000"/>
               <a:buChar char="•"/>
@@ -7951,7 +7359,7 @@
             <a:r>
               <a:rPr lang="en-US" sz="1400" dirty="0">
                 <a:solidFill>
-                  <a:srgbClr val="334155"/>
+                  <a:srgbClr val="2B3F52"/>
                 </a:solidFill>
                 <a:latin typeface="Calibri" pitchFamily="34" charset="0"/>
                 <a:ea typeface="Calibri" pitchFamily="34" charset="-122"/>
@@ -7964,7 +7372,7 @@
           <a:p>
             <a:pPr marL="177800" indent="-177800">
               <a:spcAft>
-                <a:spcPts val="700"/>
+                <a:spcPts val="800"/>
               </a:spcAft>
               <a:buSzPct val="100000"/>
               <a:buChar char="•"/>
@@ -7972,13 +7380,13 @@
             <a:r>
               <a:rPr lang="en-US" sz="1400" dirty="0">
                 <a:solidFill>
-                  <a:srgbClr val="334155"/>
+                  <a:srgbClr val="2B3F52"/>
                 </a:solidFill>
                 <a:latin typeface="Calibri" pitchFamily="34" charset="0"/>
                 <a:ea typeface="Calibri" pitchFamily="34" charset="-122"/>
                 <a:cs typeface="Calibri" pitchFamily="34" charset="-120"/>
               </a:rPr>
-              <a:t>The Rs 25 Cr net worth stays intact in every scenario, so the SEBI registration is never at risk. The question is operational self sufficiency, not survival.</a:t>
+              <a:t>The Rs 25 Cr net worth stays intact in every scenario, so the SEBI registration is never at risk.</a:t>
             </a:r>
             <a:endParaRPr lang="en-US" sz="1400" dirty="0"/>
           </a:p>
@@ -7992,8 +7400,8 @@
         </p:nvSpPr>
         <p:spPr>
           <a:xfrm>
-            <a:off x="566928" y="6446520"/>
-            <a:ext cx="11064240" cy="301752"/>
+            <a:off x="566928" y="6455664"/>
+            <a:ext cx="11064240" cy="292608"/>
           </a:xfrm>
           <a:prstGeom prst="rect">
             <a:avLst/>
@@ -8009,9 +7417,9 @@
               <a:buNone/>
             </a:pPr>
             <a:r>
-              <a:rPr lang="en-US" sz="900" i="1" dirty="0">
-                <a:solidFill>
-                  <a:srgbClr val="94A3B8"/>
+              <a:rPr lang="en-US" sz="900" dirty="0">
+                <a:solidFill>
+                  <a:srgbClr val="9AA7B4"/>
                 </a:solidFill>
                 <a:latin typeface="Calibri" pitchFamily="34" charset="0"/>
                 <a:ea typeface="Calibri" pitchFamily="34" charset="-122"/>
@@ -8063,7 +7471,7 @@
         </p:nvSpPr>
         <p:spPr>
           <a:xfrm>
-            <a:off x="11430000" y="402336"/>
+            <a:off x="11430000" y="420624"/>
             <a:ext cx="365760" cy="274320"/>
           </a:xfrm>
           <a:prstGeom prst="rect">
@@ -8082,7 +7490,7 @@
             <a:r>
               <a:rPr lang="en-US" sz="1100" b="1" dirty="0">
                 <a:solidFill>
-                  <a:srgbClr val="94A3B8"/>
+                  <a:srgbClr val="9AA7B4"/>
                 </a:solidFill>
                 <a:latin typeface="Calibri" pitchFamily="34" charset="0"/>
                 <a:ea typeface="Calibri" pitchFamily="34" charset="-122"/>
@@ -8102,7 +7510,7 @@
         </p:nvSpPr>
         <p:spPr>
           <a:xfrm>
-            <a:off x="566928" y="438912"/>
+            <a:off x="566928" y="457200"/>
             <a:ext cx="10058400" cy="274320"/>
           </a:xfrm>
           <a:prstGeom prst="rect">
@@ -8121,7 +7529,7 @@
             <a:r>
               <a:rPr lang="en-US" sz="1100" b="1" spc="200" kern="0" dirty="0">
                 <a:solidFill>
-                  <a:srgbClr val="2B5CC4"/>
+                  <a:srgbClr val="0F766E"/>
                 </a:solidFill>
                 <a:latin typeface="Calibri" pitchFamily="34" charset="0"/>
                 <a:ea typeface="Calibri" pitchFamily="34" charset="-122"/>
@@ -8141,8 +7549,8 @@
         </p:nvSpPr>
         <p:spPr>
           <a:xfrm>
-            <a:off x="566928" y="694944"/>
-            <a:ext cx="11064240" cy="548640"/>
+            <a:off x="566928" y="713232"/>
+            <a:ext cx="11064240" cy="640080"/>
           </a:xfrm>
           <a:prstGeom prst="rect">
             <a:avLst/>
@@ -8158,17 +7566,17 @@
               <a:buNone/>
             </a:pPr>
             <a:r>
-              <a:rPr lang="en-US" sz="2900" b="1" dirty="0">
-                <a:solidFill>
-                  <a:srgbClr val="0F172A"/>
+              <a:rPr lang="en-US" sz="2700" b="1" dirty="0">
+                <a:solidFill>
+                  <a:srgbClr val="0A1F33"/>
                 </a:solidFill>
                 <a:latin typeface="Cambria" pitchFamily="34" charset="0"/>
                 <a:ea typeface="Cambria" pitchFamily="34" charset="-122"/>
                 <a:cs typeface="Cambria" pitchFamily="34" charset="-120"/>
               </a:rPr>
-              <a:t>Revenue trajectory and the income mix flip</a:t>
-            </a:r>
-            <a:endParaRPr lang="en-US" sz="2900" dirty="0"/>
+              <a:t>Initial fees fund the turn, surveillance compounds the climb</a:t>
+            </a:r>
+            <a:endParaRPr lang="en-US" sz="2700" dirty="0"/>
           </a:p>
         </p:txBody>
       </p:sp>
@@ -8199,7 +7607,7 @@
             <a:r>
               <a:rPr lang="en-US" sz="1200" b="1" dirty="0">
                 <a:solidFill>
-                  <a:srgbClr val="334155"/>
+                  <a:srgbClr val="2B3F52"/>
                 </a:solidFill>
                 <a:latin typeface="Calibri" pitchFamily="34" charset="0"/>
                 <a:ea typeface="Calibri" pitchFamily="34" charset="-122"/>
@@ -8254,7 +7662,7 @@
             <a:r>
               <a:rPr lang="en-US" sz="1200" b="1" dirty="0">
                 <a:solidFill>
-                  <a:srgbClr val="334155"/>
+                  <a:srgbClr val="2B3F52"/>
                 </a:solidFill>
                 <a:latin typeface="Calibri" pitchFamily="34" charset="0"/>
                 <a:ea typeface="Calibri" pitchFamily="34" charset="-122"/>
@@ -8290,8 +7698,8 @@
         </p:nvSpPr>
         <p:spPr>
           <a:xfrm>
-            <a:off x="566928" y="6446520"/>
-            <a:ext cx="11064240" cy="301752"/>
+            <a:off x="566928" y="6455664"/>
+            <a:ext cx="11064240" cy="292608"/>
           </a:xfrm>
           <a:prstGeom prst="rect">
             <a:avLst/>
@@ -8307,9 +7715,9 @@
               <a:buNone/>
             </a:pPr>
             <a:r>
-              <a:rPr lang="en-US" sz="900" i="1" dirty="0">
-                <a:solidFill>
-                  <a:srgbClr val="94A3B8"/>
+              <a:rPr lang="en-US" sz="900" dirty="0">
+                <a:solidFill>
+                  <a:srgbClr val="9AA7B4"/>
                 </a:solidFill>
                 <a:latin typeface="Calibri" pitchFamily="34" charset="0"/>
                 <a:ea typeface="Calibri" pitchFamily="34" charset="-122"/>
@@ -8361,7 +7769,7 @@
         </p:nvSpPr>
         <p:spPr>
           <a:xfrm>
-            <a:off x="11430000" y="402336"/>
+            <a:off x="11430000" y="420624"/>
             <a:ext cx="365760" cy="274320"/>
           </a:xfrm>
           <a:prstGeom prst="rect">
@@ -8380,7 +7788,7 @@
             <a:r>
               <a:rPr lang="en-US" sz="1100" b="1" dirty="0">
                 <a:solidFill>
-                  <a:srgbClr val="94A3B8"/>
+                  <a:srgbClr val="9AA7B4"/>
                 </a:solidFill>
                 <a:latin typeface="Calibri" pitchFamily="34" charset="0"/>
                 <a:ea typeface="Calibri" pitchFamily="34" charset="-122"/>
@@ -8400,7 +7808,7 @@
         </p:nvSpPr>
         <p:spPr>
           <a:xfrm>
-            <a:off x="566928" y="438912"/>
+            <a:off x="566928" y="457200"/>
             <a:ext cx="10058400" cy="274320"/>
           </a:xfrm>
           <a:prstGeom prst="rect">
@@ -8419,7 +7827,7 @@
             <a:r>
               <a:rPr lang="en-US" sz="1100" b="1" spc="200" kern="0" dirty="0">
                 <a:solidFill>
-                  <a:srgbClr val="2B5CC4"/>
+                  <a:srgbClr val="0F766E"/>
                 </a:solidFill>
                 <a:latin typeface="Calibri" pitchFamily="34" charset="0"/>
                 <a:ea typeface="Calibri" pitchFamily="34" charset="-122"/>
@@ -8439,8 +7847,8 @@
         </p:nvSpPr>
         <p:spPr>
           <a:xfrm>
-            <a:off x="566928" y="694944"/>
-            <a:ext cx="11064240" cy="548640"/>
+            <a:off x="566928" y="713232"/>
+            <a:ext cx="11064240" cy="640080"/>
           </a:xfrm>
           <a:prstGeom prst="rect">
             <a:avLst/>
@@ -8456,17 +7864,17 @@
               <a:buNone/>
             </a:pPr>
             <a:r>
-              <a:rPr lang="en-US" sz="2900" b="1" dirty="0">
-                <a:solidFill>
-                  <a:srgbClr val="0F172A"/>
+              <a:rPr lang="en-US" sz="2700" b="1" dirty="0">
+                <a:solidFill>
+                  <a:srgbClr val="0A1F33"/>
                 </a:solidFill>
                 <a:latin typeface="Cambria" pitchFamily="34" charset="0"/>
                 <a:ea typeface="Cambria" pitchFamily="34" charset="-122"/>
                 <a:cs typeface="Cambria" pitchFamily="34" charset="-120"/>
               </a:rPr>
-              <a:t>What the CRAs earn, and our trajectory</a:t>
-            </a:r>
-            <a:endParaRPr lang="en-US" sz="2900" dirty="0"/>
+              <a:t>What the CRAs earn, yearly and quarterly, versus ACER</a:t>
+            </a:r>
+            <a:endParaRPr lang="en-US" sz="2700" dirty="0"/>
           </a:p>
         </p:txBody>
       </p:sp>
@@ -8478,7 +7886,7 @@
         </p:nvSpPr>
         <p:spPr>
           <a:xfrm>
-            <a:off x="566928" y="1298448"/>
+            <a:off x="566928" y="1353312"/>
             <a:ext cx="11064240" cy="457200"/>
           </a:xfrm>
           <a:prstGeom prst="rect">
@@ -8497,13 +7905,13 @@
             <a:r>
               <a:rPr lang="en-US" sz="1400" dirty="0">
                 <a:solidFill>
-                  <a:srgbClr val="64748B"/>
+                  <a:srgbClr val="5B6B7B"/>
                 </a:solidFill>
                 <a:latin typeface="Calibri" pitchFamily="34" charset="0"/>
                 <a:ea typeface="Calibri" pitchFamily="34" charset="-122"/>
                 <a:cs typeface="Calibri" pitchFamily="34" charset="-120"/>
               </a:rPr>
-              <a:t>The Indian rating industry is about Rs 2,000 Cr. We enter small and climb a credible ladder.</a:t>
+              <a:t>Established agencies book hundreds of crore a year. ACER starts at the very bottom, by design.</a:t>
             </a:r>
             <a:endParaRPr lang="en-US" sz="1400" dirty="0"/>
           </a:p>
@@ -8517,7 +7925,7 @@
         </p:nvSpPr>
         <p:spPr>
           <a:xfrm>
-            <a:off x="566928" y="1371600"/>
+            <a:off x="566928" y="1417320"/>
             <a:ext cx="5486400" cy="274320"/>
           </a:xfrm>
           <a:prstGeom prst="rect">
@@ -8536,13 +7944,13 @@
             <a:r>
               <a:rPr lang="en-US" sz="1200" b="1" dirty="0">
                 <a:solidFill>
-                  <a:srgbClr val="334155"/>
+                  <a:srgbClr val="2B3F52"/>
                 </a:solidFill>
                 <a:latin typeface="Calibri" pitchFamily="34" charset="0"/>
                 <a:ea typeface="Calibri" pitchFamily="34" charset="-122"/>
                 <a:cs typeface="Calibri" pitchFamily="34" charset="-120"/>
               </a:rPr>
-              <a:t>Rating revenue, latest year (Rs Cr)</a:t>
+              <a:t>Yearly rating revenue, latest year (Rs Cr)</a:t>
             </a:r>
             <a:endParaRPr lang="en-US" sz="1200" dirty="0"/>
           </a:p>
@@ -8555,8 +7963,8 @@
           <p:nvPr/>
         </p:nvGraphicFramePr>
         <p:xfrm>
-          <a:off x="566928" y="1691640"/>
-          <a:ext cx="5577840" cy="4206240"/>
+          <a:off x="566928" y="1737360"/>
+          <a:ext cx="5577840" cy="4114800"/>
         </p:xfrm>
         <a:graphic xmlns:a="http://schemas.openxmlformats.org/drawingml/2006/main">
           <a:graphicData uri="http://schemas.openxmlformats.org/drawingml/2006/chart">
@@ -8572,7 +7980,7 @@
         </p:nvSpPr>
         <p:spPr>
           <a:xfrm>
-            <a:off x="6400800" y="1371600"/>
+            <a:off x="6400800" y="1417320"/>
             <a:ext cx="5486400" cy="274320"/>
           </a:xfrm>
           <a:prstGeom prst="rect">
@@ -8591,13 +7999,13 @@
             <a:r>
               <a:rPr lang="en-US" sz="1200" b="1" dirty="0">
                 <a:solidFill>
-                  <a:srgbClr val="334155"/>
+                  <a:srgbClr val="2B3F52"/>
                 </a:solidFill>
                 <a:latin typeface="Calibri" pitchFamily="34" charset="0"/>
                 <a:ea typeface="Calibri" pitchFamily="34" charset="-122"/>
                 <a:cs typeface="Calibri" pitchFamily="34" charset="-120"/>
               </a:rPr>
-              <a:t>Our revenue trajectory (Rs Cr), FY26 actual then projected</a:t>
+              <a:t>Quarterly rating revenue, latest quarter (Rs Cr)</a:t>
             </a:r>
             <a:endParaRPr lang="en-US" sz="1200" dirty="0"/>
           </a:p>
@@ -8610,8 +8018,8 @@
           <p:nvPr/>
         </p:nvGraphicFramePr>
         <p:xfrm>
-          <a:off x="6400800" y="1691640"/>
-          <a:ext cx="5394960" cy="4206240"/>
+          <a:off x="6400800" y="1737360"/>
+          <a:ext cx="5394960" cy="2926080"/>
         </p:xfrm>
         <a:graphic xmlns:a="http://schemas.openxmlformats.org/drawingml/2006/main">
           <a:graphicData uri="http://schemas.openxmlformats.org/drawingml/2006/chart">
@@ -8627,32 +8035,71 @@
         </p:nvSpPr>
         <p:spPr>
           <a:xfrm>
-            <a:off x="566928" y="6446520"/>
-            <a:ext cx="11064240" cy="301752"/>
-          </a:xfrm>
-          <a:prstGeom prst="rect">
-            <a:avLst/>
-          </a:prstGeom>
-          <a:noFill/>
-          <a:ln/>
-        </p:spPr>
-        <p:txBody>
-          <a:bodyPr wrap="square" rtlCol="0" anchor="ctr"/>
+            <a:off x="6400800" y="4846320"/>
+            <a:ext cx="5394960" cy="914400"/>
+          </a:xfrm>
+          <a:prstGeom prst="rect">
+            <a:avLst/>
+          </a:prstGeom>
+          <a:noFill/>
+          <a:ln/>
+        </p:spPr>
+        <p:txBody>
+          <a:bodyPr wrap="square" rtlCol="0" anchor="t"/>
           <a:lstStyle/>
           <a:p>
             <a:pPr indent="0" marL="0">
               <a:buNone/>
             </a:pPr>
             <a:r>
-              <a:rPr lang="en-US" sz="900" i="1" dirty="0">
-                <a:solidFill>
-                  <a:srgbClr val="94A3B8"/>
+              <a:rPr lang="en-US" sz="1200" dirty="0">
+                <a:solidFill>
+                  <a:srgbClr val="2B3F52"/>
                 </a:solidFill>
                 <a:latin typeface="Calibri" pitchFamily="34" charset="0"/>
                 <a:ea typeface="Calibri" pitchFamily="34" charset="-122"/>
                 <a:cs typeface="Calibri" pitchFamily="34" charset="-120"/>
               </a:rPr>
-              <a:t>Source: peer figures from official disclosures, CRISIL [3], CARE [5], India Ratings [6], Infomerics [7], Acuite [8]. ACER, Internal [1] and plan [2].</a:t>
+              <a:t>Leaders book Rs 100 to 254 Cr a quarter; ACER about Rs 0.15 Cr. The scale gap is the opportunity, not a red flag.</a:t>
+            </a:r>
+            <a:endParaRPr lang="en-US" sz="1200" dirty="0"/>
+          </a:p>
+        </p:txBody>
+      </p:sp>
+      <p:sp>
+        <p:nvSpPr>
+          <p:cNvPr id="11" name="Text 7"/>
+          <p:cNvSpPr/>
+          <p:nvPr/>
+        </p:nvSpPr>
+        <p:spPr>
+          <a:xfrm>
+            <a:off x="566928" y="6455664"/>
+            <a:ext cx="11064240" cy="292608"/>
+          </a:xfrm>
+          <a:prstGeom prst="rect">
+            <a:avLst/>
+          </a:prstGeom>
+          <a:noFill/>
+          <a:ln/>
+        </p:spPr>
+        <p:txBody>
+          <a:bodyPr wrap="square" rtlCol="0" anchor="ctr"/>
+          <a:lstStyle/>
+          <a:p>
+            <a:pPr indent="0" marL="0">
+              <a:buNone/>
+            </a:pPr>
+            <a:r>
+              <a:rPr lang="en-US" sz="900" dirty="0">
+                <a:solidFill>
+                  <a:srgbClr val="9AA7B4"/>
+                </a:solidFill>
+                <a:latin typeface="Calibri" pitchFamily="34" charset="0"/>
+                <a:ea typeface="Calibri" pitchFamily="34" charset="-122"/>
+                <a:cs typeface="Calibri" pitchFamily="34" charset="-120"/>
+              </a:rPr>
+              <a:t>Source: official filings, CRISIL [3], ICRA [4], CARE [5], India Ratings [6], Infomerics [7], Acuite [8], Brickwork [9]. ACER [1][2]. ICRA yearly is total revenue; others rating revenue. Quarters differ by company.</a:t>
             </a:r>
             <a:endParaRPr lang="en-US" sz="900" dirty="0"/>
           </a:p>
@@ -8698,7 +8145,7 @@
         </p:nvSpPr>
         <p:spPr>
           <a:xfrm>
-            <a:off x="11430000" y="402336"/>
+            <a:off x="11430000" y="420624"/>
             <a:ext cx="365760" cy="274320"/>
           </a:xfrm>
           <a:prstGeom prst="rect">
@@ -8717,7 +8164,7 @@
             <a:r>
               <a:rPr lang="en-US" sz="1100" b="1" dirty="0">
                 <a:solidFill>
-                  <a:srgbClr val="94A3B8"/>
+                  <a:srgbClr val="9AA7B4"/>
                 </a:solidFill>
                 <a:latin typeface="Calibri" pitchFamily="34" charset="0"/>
                 <a:ea typeface="Calibri" pitchFamily="34" charset="-122"/>
@@ -8737,7 +8184,7 @@
         </p:nvSpPr>
         <p:spPr>
           <a:xfrm>
-            <a:off x="566928" y="438912"/>
+            <a:off x="566928" y="457200"/>
             <a:ext cx="10058400" cy="274320"/>
           </a:xfrm>
           <a:prstGeom prst="rect">
@@ -8756,7 +8203,7 @@
             <a:r>
               <a:rPr lang="en-US" sz="1100" b="1" spc="200" kern="0" dirty="0">
                 <a:solidFill>
-                  <a:srgbClr val="2B5CC4"/>
+                  <a:srgbClr val="0F766E"/>
                 </a:solidFill>
                 <a:latin typeface="Calibri" pitchFamily="34" charset="0"/>
                 <a:ea typeface="Calibri" pitchFamily="34" charset="-122"/>
@@ -8776,8 +8223,8 @@
         </p:nvSpPr>
         <p:spPr>
           <a:xfrm>
-            <a:off x="566928" y="694944"/>
-            <a:ext cx="11064240" cy="548640"/>
+            <a:off x="566928" y="713232"/>
+            <a:ext cx="11064240" cy="640080"/>
           </a:xfrm>
           <a:prstGeom prst="rect">
             <a:avLst/>
@@ -8793,9 +8240,9 @@
               <a:buNone/>
             </a:pPr>
             <a:r>
-              <a:rPr lang="en-US" sz="2900" b="1" dirty="0">
-                <a:solidFill>
-                  <a:srgbClr val="0F172A"/>
+              <a:rPr lang="en-US" sz="2700" b="1" dirty="0">
+                <a:solidFill>
+                  <a:srgbClr val="0A1F33"/>
                 </a:solidFill>
                 <a:latin typeface="Cambria" pitchFamily="34" charset="0"/>
                 <a:ea typeface="Cambria" pitchFamily="34" charset="-122"/>
@@ -8803,7 +8250,7 @@
               </a:rPr>
               <a:t>Where ACER stands, and what it earns in FY28</a:t>
             </a:r>
-            <a:endParaRPr lang="en-US" sz="2900" dirty="0"/>
+            <a:endParaRPr lang="en-US" sz="2700" dirty="0"/>
           </a:p>
         </p:txBody>
       </p:sp>
@@ -8834,13 +8281,13 @@
             <a:r>
               <a:rPr lang="en-US" sz="1200" b="1" dirty="0">
                 <a:solidFill>
-                  <a:srgbClr val="334155"/>
+                  <a:srgbClr val="2B3F52"/>
                 </a:solidFill>
                 <a:latin typeface="Calibri" pitchFamily="34" charset="0"/>
                 <a:ea typeface="Calibri" pitchFamily="34" charset="-122"/>
                 <a:cs typeface="Calibri" pitchFamily="34" charset="-120"/>
               </a:rPr>
-              <a:t>Market size, TAM SAM SOM</a:t>
+              <a:t>Market size, TAM to SOM</a:t>
             </a:r>
             <a:endParaRPr lang="en-US" sz="1200" dirty="0"/>
           </a:p>
@@ -8861,11 +8308,11 @@
             <a:avLst/>
           </a:prstGeom>
           <a:solidFill>
-            <a:srgbClr val="EEF2F9"/>
+            <a:srgbClr val="EEF2F6"/>
           </a:solidFill>
           <a:ln w="12700">
             <a:solidFill>
-              <a:srgbClr val="CBD5E1"/>
+              <a:srgbClr val="CDD6DF"/>
             </a:solidFill>
             <a:prstDash val="solid"/>
           </a:ln>
@@ -8886,11 +8333,11 @@
             <a:avLst/>
           </a:prstGeom>
           <a:solidFill>
-            <a:srgbClr val="DBE6FB"/>
+            <a:srgbClr val="D9E6F2"/>
           </a:solidFill>
           <a:ln w="12700">
             <a:solidFill>
-              <a:srgbClr val="2B5CC4"/>
+              <a:srgbClr val="1E4E79"/>
             </a:solidFill>
             <a:prstDash val="solid"/>
           </a:ln>
@@ -8948,7 +8395,7 @@
             <a:r>
               <a:rPr lang="en-US" sz="1300" b="1" dirty="0">
                 <a:solidFill>
-                  <a:srgbClr val="0F172A"/>
+                  <a:srgbClr val="0A1F33"/>
                 </a:solidFill>
                 <a:latin typeface="Calibri" pitchFamily="34" charset="0"/>
                 <a:ea typeface="Calibri" pitchFamily="34" charset="-122"/>
@@ -8963,7 +8410,7 @@
             <a:r>
               <a:rPr lang="en-US" sz="1100" dirty="0">
                 <a:solidFill>
-                  <a:srgbClr val="64748B"/>
+                  <a:srgbClr val="5B6B7B"/>
                 </a:solidFill>
                 <a:latin typeface="Calibri" pitchFamily="34" charset="0"/>
                 <a:ea typeface="Calibri" pitchFamily="34" charset="-122"/>
@@ -9002,7 +8449,7 @@
             <a:r>
               <a:rPr lang="en-US" sz="1300" b="1" dirty="0">
                 <a:solidFill>
-                  <a:srgbClr val="2B5CC4"/>
+                  <a:srgbClr val="1E4E79"/>
                 </a:solidFill>
                 <a:latin typeface="Calibri" pitchFamily="34" charset="0"/>
                 <a:ea typeface="Calibri" pitchFamily="34" charset="-122"/>
@@ -9017,7 +8464,7 @@
             <a:r>
               <a:rPr lang="en-US" sz="1100" dirty="0">
                 <a:solidFill>
-                  <a:srgbClr val="64748B"/>
+                  <a:srgbClr val="5B6B7B"/>
                 </a:solidFill>
                 <a:latin typeface="Calibri" pitchFamily="34" charset="0"/>
                 <a:ea typeface="Calibri" pitchFamily="34" charset="-122"/>
@@ -9071,7 +8518,7 @@
             <a:r>
               <a:rPr lang="en-US" sz="1100" dirty="0">
                 <a:solidFill>
-                  <a:srgbClr val="64748B"/>
+                  <a:srgbClr val="5B6B7B"/>
                 </a:solidFill>
                 <a:latin typeface="Calibri" pitchFamily="34" charset="0"/>
                 <a:ea typeface="Calibri" pitchFamily="34" charset="-122"/>
@@ -9110,7 +8557,7 @@
             <a:r>
               <a:rPr lang="en-US" sz="1200" b="1" dirty="0">
                 <a:solidFill>
-                  <a:srgbClr val="334155"/>
+                  <a:srgbClr val="2B3F52"/>
                 </a:solidFill>
                 <a:latin typeface="Calibri" pitchFamily="34" charset="0"/>
                 <a:ea typeface="Calibri" pitchFamily="34" charset="-122"/>
@@ -9146,45 +8593,6 @@
         </p:nvSpPr>
         <p:spPr>
           <a:xfrm>
-            <a:off x="8732520" y="2971800"/>
-            <a:ext cx="2011680" cy="320040"/>
-          </a:xfrm>
-          <a:prstGeom prst="rect">
-            <a:avLst/>
-          </a:prstGeom>
-          <a:noFill/>
-          <a:ln/>
-        </p:spPr>
-        <p:txBody>
-          <a:bodyPr wrap="square" rtlCol="0" anchor="ctr"/>
-          <a:lstStyle/>
-          <a:p>
-            <a:pPr algn="ctr" indent="0" marL="0">
-              <a:buNone/>
-            </a:pPr>
-            <a:r>
-              <a:rPr lang="en-US" sz="1500" b="1" dirty="0">
-                <a:solidFill>
-                  <a:srgbClr val="0F172A"/>
-                </a:solidFill>
-                <a:latin typeface="Cambria" pitchFamily="34" charset="0"/>
-                <a:ea typeface="Cambria" pitchFamily="34" charset="-122"/>
-                <a:cs typeface="Cambria" pitchFamily="34" charset="-120"/>
-              </a:rPr>
-              <a:t>Rs 8.3 Cr</a:t>
-            </a:r>
-            <a:endParaRPr lang="en-US" sz="1500" dirty="0"/>
-          </a:p>
-        </p:txBody>
-      </p:sp>
-      <p:sp>
-        <p:nvSpPr>
-          <p:cNvPr id="15" name="Text 12"/>
-          <p:cNvSpPr/>
-          <p:nvPr/>
-        </p:nvSpPr>
-        <p:spPr>
-          <a:xfrm>
             <a:off x="7680960" y="4937760"/>
             <a:ext cx="4114800" cy="1188720"/>
           </a:xfrm>
@@ -9204,7 +8612,7 @@
             <a:r>
               <a:rPr lang="en-US" sz="1150" dirty="0">
                 <a:solidFill>
-                  <a:srgbClr val="334155"/>
+                  <a:srgbClr val="2B3F52"/>
                 </a:solidFill>
                 <a:latin typeface="Calibri" pitchFamily="34" charset="0"/>
                 <a:ea typeface="Calibri" pitchFamily="34" charset="-122"/>
@@ -9218,14 +8626,14 @@
       </p:sp>
       <p:sp>
         <p:nvSpPr>
-          <p:cNvPr id="16" name="Text 13"/>
-          <p:cNvSpPr/>
-          <p:nvPr/>
-        </p:nvSpPr>
-        <p:spPr>
-          <a:xfrm>
-            <a:off x="566928" y="6446520"/>
-            <a:ext cx="11064240" cy="301752"/>
+          <p:cNvPr id="15" name="Text 12"/>
+          <p:cNvSpPr/>
+          <p:nvPr/>
+        </p:nvSpPr>
+        <p:spPr>
+          <a:xfrm>
+            <a:off x="566928" y="6455664"/>
+            <a:ext cx="11064240" cy="292608"/>
           </a:xfrm>
           <a:prstGeom prst="rect">
             <a:avLst/>
@@ -9241,15 +8649,15 @@
               <a:buNone/>
             </a:pPr>
             <a:r>
-              <a:rPr lang="en-US" sz="900" i="1" dirty="0">
-                <a:solidFill>
-                  <a:srgbClr val="94A3B8"/>
+              <a:rPr lang="en-US" sz="900" dirty="0">
+                <a:solidFill>
+                  <a:srgbClr val="9AA7B4"/>
                 </a:solidFill>
                 <a:latin typeface="Calibri" pitchFamily="34" charset="0"/>
                 <a:ea typeface="Calibri" pitchFamily="34" charset="-122"/>
                 <a:cs typeface="Calibri" pitchFamily="34" charset="-120"/>
               </a:rPr>
-              <a:t>Source: TAM and SAM are analyst estimates from official rating segment revenues [3][5][6]. ACER FY28 from this plan's model [1][2].</a:t>
+              <a:t>Source: TAM and SAM are analyst estimates from official rating revenues [3][5][6]. ACER FY28 from this plan's model [1][2].</a:t>
             </a:r>
             <a:endParaRPr lang="en-US" sz="900" dirty="0"/>
           </a:p>
@@ -9295,7 +8703,7 @@
         </p:nvSpPr>
         <p:spPr>
           <a:xfrm>
-            <a:off x="11430000" y="402336"/>
+            <a:off x="11430000" y="420624"/>
             <a:ext cx="365760" cy="274320"/>
           </a:xfrm>
           <a:prstGeom prst="rect">
@@ -9314,7 +8722,7 @@
             <a:r>
               <a:rPr lang="en-US" sz="1100" b="1" dirty="0">
                 <a:solidFill>
-                  <a:srgbClr val="94A3B8"/>
+                  <a:srgbClr val="9AA7B4"/>
                 </a:solidFill>
                 <a:latin typeface="Calibri" pitchFamily="34" charset="0"/>
                 <a:ea typeface="Calibri" pitchFamily="34" charset="-122"/>
@@ -9334,7 +8742,7 @@
         </p:nvSpPr>
         <p:spPr>
           <a:xfrm>
-            <a:off x="566928" y="438912"/>
+            <a:off x="566928" y="457200"/>
             <a:ext cx="10058400" cy="274320"/>
           </a:xfrm>
           <a:prstGeom prst="rect">
@@ -9353,7 +8761,7 @@
             <a:r>
               <a:rPr lang="en-US" sz="1100" b="1" spc="200" kern="0" dirty="0">
                 <a:solidFill>
-                  <a:srgbClr val="2B5CC4"/>
+                  <a:srgbClr val="0F766E"/>
                 </a:solidFill>
                 <a:latin typeface="Calibri" pitchFamily="34" charset="0"/>
                 <a:ea typeface="Calibri" pitchFamily="34" charset="-122"/>
@@ -9373,8 +8781,8 @@
         </p:nvSpPr>
         <p:spPr>
           <a:xfrm>
-            <a:off x="566928" y="694944"/>
-            <a:ext cx="11064240" cy="548640"/>
+            <a:off x="566928" y="713232"/>
+            <a:ext cx="11064240" cy="640080"/>
           </a:xfrm>
           <a:prstGeom prst="rect">
             <a:avLst/>
@@ -9390,17 +8798,17 @@
               <a:buNone/>
             </a:pPr>
             <a:r>
-              <a:rPr lang="en-US" sz="2900" b="1" dirty="0">
-                <a:solidFill>
-                  <a:srgbClr val="0F172A"/>
+              <a:rPr lang="en-US" sz="2700" b="1" dirty="0">
+                <a:solidFill>
+                  <a:srgbClr val="0A1F33"/>
                 </a:solidFill>
                 <a:latin typeface="Cambria" pitchFamily="34" charset="0"/>
                 <a:ea typeface="Cambria" pitchFamily="34" charset="-122"/>
                 <a:cs typeface="Cambria" pitchFamily="34" charset="-120"/>
               </a:rPr>
-              <a:t>Milestones, KPIs and risks</a:t>
-            </a:r>
-            <a:endParaRPr lang="en-US" sz="2900" dirty="0"/>
+              <a:t>A clear path, tracked on hard KPIs, with known risks owned</a:t>
+            </a:r>
+            <a:endParaRPr lang="en-US" sz="2700" dirty="0"/>
           </a:p>
         </p:txBody>
       </p:sp>
@@ -9431,7 +8839,7 @@
             <a:r>
               <a:rPr lang="en-US" sz="1300" b="1" dirty="0">
                 <a:solidFill>
-                  <a:srgbClr val="2B5CC4"/>
+                  <a:srgbClr val="0F766E"/>
                 </a:solidFill>
                 <a:latin typeface="Calibri" pitchFamily="34" charset="0"/>
                 <a:ea typeface="Calibri" pitchFamily="34" charset="-122"/>
@@ -9466,7 +8874,7 @@
           <a:p>
             <a:pPr marL="177800" indent="-177800">
               <a:spcAft>
-                <a:spcPts val="700"/>
+                <a:spcPts val="800"/>
               </a:spcAft>
               <a:buSzPct val="100000"/>
               <a:buChar char="•"/>
@@ -9474,20 +8882,20 @@
             <a:r>
               <a:rPr lang="en-US" sz="1250" dirty="0">
                 <a:solidFill>
-                  <a:srgbClr val="334155"/>
+                  <a:srgbClr val="2B3F52"/>
                 </a:solidFill>
                 <a:latin typeface="Calibri" pitchFamily="34" charset="0"/>
                 <a:ea typeface="Calibri" pitchFamily="34" charset="-122"/>
                 <a:cs typeface="Calibri" pitchFamily="34" charset="-120"/>
               </a:rPr>
-              <a:t>Now: SEBI registered, two hires and four BDs onboarding.</a:t>
+              <a:t>Now: SEBI registered, four BDs onboarded, team in place.</a:t>
             </a:r>
             <a:endParaRPr lang="en-US" sz="1250" dirty="0"/>
           </a:p>
           <a:p>
             <a:pPr marL="177800" indent="-177800">
               <a:spcAft>
-                <a:spcPts val="700"/>
+                <a:spcPts val="800"/>
               </a:spcAft>
               <a:buSzPct val="100000"/>
               <a:buChar char="•"/>
@@ -9495,7 +8903,7 @@
             <a:r>
               <a:rPr lang="en-US" sz="1250" dirty="0">
                 <a:solidFill>
-                  <a:srgbClr val="334155"/>
+                  <a:srgbClr val="2B3F52"/>
                 </a:solidFill>
                 <a:latin typeface="Calibri" pitchFamily="34" charset="0"/>
                 <a:ea typeface="Calibri" pitchFamily="34" charset="-122"/>
@@ -9508,7 +8916,7 @@
           <a:p>
             <a:pPr marL="177800" indent="-177800">
               <a:spcAft>
-                <a:spcPts val="700"/>
+                <a:spcPts val="800"/>
               </a:spcAft>
               <a:buSzPct val="100000"/>
               <a:buChar char="•"/>
@@ -9516,7 +8924,7 @@
             <a:r>
               <a:rPr lang="en-US" sz="1250" dirty="0">
                 <a:solidFill>
-                  <a:srgbClr val="334155"/>
+                  <a:srgbClr val="2B3F52"/>
                 </a:solidFill>
                 <a:latin typeface="Calibri" pitchFamily="34" charset="0"/>
                 <a:ea typeface="Calibri" pitchFamily="34" charset="-122"/>
@@ -9529,7 +8937,7 @@
           <a:p>
             <a:pPr marL="177800" indent="-177800">
               <a:spcAft>
-                <a:spcPts val="700"/>
+                <a:spcPts val="800"/>
               </a:spcAft>
               <a:buSzPct val="100000"/>
               <a:buChar char="•"/>
@@ -9537,7 +8945,7 @@
             <a:r>
               <a:rPr lang="en-US" sz="1250" dirty="0">
                 <a:solidFill>
-                  <a:srgbClr val="334155"/>
+                  <a:srgbClr val="2B3F52"/>
                 </a:solidFill>
                 <a:latin typeface="Calibri" pitchFamily="34" charset="0"/>
                 <a:ea typeface="Calibri" pitchFamily="34" charset="-122"/>
@@ -9550,7 +8958,7 @@
           <a:p>
             <a:pPr marL="177800" indent="-177800">
               <a:spcAft>
-                <a:spcPts val="700"/>
+                <a:spcPts val="800"/>
               </a:spcAft>
               <a:buSzPct val="100000"/>
               <a:buChar char="•"/>
@@ -9558,7 +8966,7 @@
             <a:r>
               <a:rPr lang="en-US" sz="1250" dirty="0">
                 <a:solidFill>
-                  <a:srgbClr val="334155"/>
+                  <a:srgbClr val="2B3F52"/>
                 </a:solidFill>
                 <a:latin typeface="Calibri" pitchFamily="34" charset="0"/>
                 <a:ea typeface="Calibri" pitchFamily="34" charset="-122"/>
@@ -9597,7 +9005,7 @@
             <a:r>
               <a:rPr lang="en-US" sz="1300" b="1" dirty="0">
                 <a:solidFill>
-                  <a:srgbClr val="2B5CC4"/>
+                  <a:srgbClr val="0F766E"/>
                 </a:solidFill>
                 <a:latin typeface="Calibri" pitchFamily="34" charset="0"/>
                 <a:ea typeface="Calibri" pitchFamily="34" charset="-122"/>
@@ -9632,7 +9040,7 @@
           <a:p>
             <a:pPr marL="177800" indent="-177800">
               <a:spcAft>
-                <a:spcPts val="700"/>
+                <a:spcPts val="800"/>
               </a:spcAft>
               <a:buSzPct val="100000"/>
               <a:buChar char="•"/>
@@ -9640,7 +9048,7 @@
             <a:r>
               <a:rPr lang="en-US" sz="1250" dirty="0">
                 <a:solidFill>
-                  <a:srgbClr val="334155"/>
+                  <a:srgbClr val="2B3F52"/>
                 </a:solidFill>
                 <a:latin typeface="Calibri" pitchFamily="34" charset="0"/>
                 <a:ea typeface="Calibri" pitchFamily="34" charset="-122"/>
@@ -9653,7 +9061,7 @@
           <a:p>
             <a:pPr marL="177800" indent="-177800">
               <a:spcAft>
-                <a:spcPts val="700"/>
+                <a:spcPts val="800"/>
               </a:spcAft>
               <a:buSzPct val="100000"/>
               <a:buChar char="•"/>
@@ -9661,7 +9069,7 @@
             <a:r>
               <a:rPr lang="en-US" sz="1250" dirty="0">
                 <a:solidFill>
-                  <a:srgbClr val="334155"/>
+                  <a:srgbClr val="2B3F52"/>
                 </a:solidFill>
                 <a:latin typeface="Calibri" pitchFamily="34" charset="0"/>
                 <a:ea typeface="Calibri" pitchFamily="34" charset="-122"/>
@@ -9674,7 +9082,7 @@
           <a:p>
             <a:pPr marL="177800" indent="-177800">
               <a:spcAft>
-                <a:spcPts val="700"/>
+                <a:spcPts val="800"/>
               </a:spcAft>
               <a:buSzPct val="100000"/>
               <a:buChar char="•"/>
@@ -9682,7 +9090,7 @@
             <a:r>
               <a:rPr lang="en-US" sz="1250" dirty="0">
                 <a:solidFill>
-                  <a:srgbClr val="334155"/>
+                  <a:srgbClr val="2B3F52"/>
                 </a:solidFill>
                 <a:latin typeface="Calibri" pitchFamily="34" charset="0"/>
                 <a:ea typeface="Calibri" pitchFamily="34" charset="-122"/>
@@ -9721,7 +9129,7 @@
             <a:r>
               <a:rPr lang="en-US" sz="1300" b="1" dirty="0">
                 <a:solidFill>
-                  <a:srgbClr val="2B5CC4"/>
+                  <a:srgbClr val="0F766E"/>
                 </a:solidFill>
                 <a:latin typeface="Calibri" pitchFamily="34" charset="0"/>
                 <a:ea typeface="Calibri" pitchFamily="34" charset="-122"/>
@@ -9756,7 +9164,7 @@
           <a:p>
             <a:pPr marL="177800" indent="-177800">
               <a:spcAft>
-                <a:spcPts val="700"/>
+                <a:spcPts val="800"/>
               </a:spcAft>
               <a:buSzPct val="100000"/>
               <a:buChar char="•"/>
@@ -9764,20 +9172,20 @@
             <a:r>
               <a:rPr lang="en-US" sz="1250" dirty="0">
                 <a:solidFill>
-                  <a:srgbClr val="334155"/>
+                  <a:srgbClr val="2B3F52"/>
                 </a:solidFill>
                 <a:latin typeface="Calibri" pitchFamily="34" charset="0"/>
                 <a:ea typeface="Calibri" pitchFamily="34" charset="-122"/>
                 <a:cs typeface="Calibri" pitchFamily="34" charset="-120"/>
               </a:rPr>
-              <a:t>BLR licence delay: cost trigger, stagger the second hire, freeze discretionary spend.</a:t>
+              <a:t>BLR licence delay: cost trigger, tighten discretionary spend if it slips past January.</a:t>
             </a:r>
             <a:endParaRPr lang="en-US" sz="1250" dirty="0"/>
           </a:p>
           <a:p>
             <a:pPr marL="177800" indent="-177800">
               <a:spcAft>
-                <a:spcPts val="700"/>
+                <a:spcPts val="800"/>
               </a:spcAft>
               <a:buSzPct val="100000"/>
               <a:buChar char="•"/>
@@ -9785,7 +9193,7 @@
             <a:r>
               <a:rPr lang="en-US" sz="1250" dirty="0">
                 <a:solidFill>
-                  <a:srgbClr val="334155"/>
+                  <a:srgbClr val="2B3F52"/>
                 </a:solidFill>
                 <a:latin typeface="Calibri" pitchFamily="34" charset="0"/>
                 <a:ea typeface="Calibri" pitchFamily="34" charset="-122"/>
@@ -9798,7 +9206,7 @@
           <a:p>
             <a:pPr marL="177800" indent="-177800">
               <a:spcAft>
-                <a:spcPts val="700"/>
+                <a:spcPts val="800"/>
               </a:spcAft>
               <a:buSzPct val="100000"/>
               <a:buChar char="•"/>
@@ -9806,7 +9214,7 @@
             <a:r>
               <a:rPr lang="en-US" sz="1250" dirty="0">
                 <a:solidFill>
-                  <a:srgbClr val="334155"/>
+                  <a:srgbClr val="2B3F52"/>
                 </a:solidFill>
                 <a:latin typeface="Calibri" pitchFamily="34" charset="0"/>
                 <a:ea typeface="Calibri" pitchFamily="34" charset="-122"/>
@@ -9819,7 +9227,7 @@
           <a:p>
             <a:pPr marL="177800" indent="-177800">
               <a:spcAft>
-                <a:spcPts val="700"/>
+                <a:spcPts val="800"/>
               </a:spcAft>
               <a:buSzPct val="100000"/>
               <a:buChar char="•"/>
@@ -9827,7 +9235,7 @@
             <a:r>
               <a:rPr lang="en-US" sz="1250" dirty="0">
                 <a:solidFill>
-                  <a:srgbClr val="334155"/>
+                  <a:srgbClr val="2B3F52"/>
                 </a:solidFill>
                 <a:latin typeface="Calibri" pitchFamily="34" charset="0"/>
                 <a:ea typeface="Calibri" pitchFamily="34" charset="-122"/>
@@ -9840,7 +9248,7 @@
           <a:p>
             <a:pPr marL="177800" indent="-177800">
               <a:spcAft>
-                <a:spcPts val="700"/>
+                <a:spcPts val="800"/>
               </a:spcAft>
               <a:buSzPct val="100000"/>
               <a:buChar char="•"/>
@@ -9848,7 +9256,7 @@
             <a:r>
               <a:rPr lang="en-US" sz="1250" dirty="0">
                 <a:solidFill>
-                  <a:srgbClr val="334155"/>
+                  <a:srgbClr val="2B3F52"/>
                 </a:solidFill>
                 <a:latin typeface="Calibri" pitchFamily="34" charset="0"/>
                 <a:ea typeface="Calibri" pitchFamily="34" charset="-122"/>
@@ -9868,8 +9276,8 @@
         </p:nvSpPr>
         <p:spPr>
           <a:xfrm>
-            <a:off x="566928" y="6446520"/>
-            <a:ext cx="11064240" cy="301752"/>
+            <a:off x="566928" y="6455664"/>
+            <a:ext cx="11064240" cy="292608"/>
           </a:xfrm>
           <a:prstGeom prst="rect">
             <a:avLst/>
@@ -9885,9 +9293,9 @@
               <a:buNone/>
             </a:pPr>
             <a:r>
-              <a:rPr lang="en-US" sz="900" i="1" dirty="0">
-                <a:solidFill>
-                  <a:srgbClr val="94A3B8"/>
+              <a:rPr lang="en-US" sz="900" dirty="0">
+                <a:solidFill>
+                  <a:srgbClr val="9AA7B4"/>
                 </a:solidFill>
                 <a:latin typeface="Calibri" pitchFamily="34" charset="0"/>
                 <a:ea typeface="Calibri" pitchFamily="34" charset="-122"/>
@@ -9939,7 +9347,7 @@
         </p:nvSpPr>
         <p:spPr>
           <a:xfrm>
-            <a:off x="11430000" y="402336"/>
+            <a:off x="11430000" y="420624"/>
             <a:ext cx="365760" cy="274320"/>
           </a:xfrm>
           <a:prstGeom prst="rect">
@@ -9958,7 +9366,7 @@
             <a:r>
               <a:rPr lang="en-US" sz="1100" b="1" dirty="0">
                 <a:solidFill>
-                  <a:srgbClr val="94A3B8"/>
+                  <a:srgbClr val="9AA7B4"/>
                 </a:solidFill>
                 <a:latin typeface="Calibri" pitchFamily="34" charset="0"/>
                 <a:ea typeface="Calibri" pitchFamily="34" charset="-122"/>
@@ -9978,7 +9386,7 @@
         </p:nvSpPr>
         <p:spPr>
           <a:xfrm>
-            <a:off x="566928" y="438912"/>
+            <a:off x="566928" y="457200"/>
             <a:ext cx="10058400" cy="274320"/>
           </a:xfrm>
           <a:prstGeom prst="rect">
@@ -9997,7 +9405,7 @@
             <a:r>
               <a:rPr lang="en-US" sz="1100" b="1" spc="200" kern="0" dirty="0">
                 <a:solidFill>
-                  <a:srgbClr val="2B5CC4"/>
+                  <a:srgbClr val="0F766E"/>
                 </a:solidFill>
                 <a:latin typeface="Calibri" pitchFamily="34" charset="0"/>
                 <a:ea typeface="Calibri" pitchFamily="34" charset="-122"/>
@@ -10017,8 +9425,8 @@
         </p:nvSpPr>
         <p:spPr>
           <a:xfrm>
-            <a:off x="566928" y="694944"/>
-            <a:ext cx="11064240" cy="548640"/>
+            <a:off x="566928" y="713232"/>
+            <a:ext cx="11064240" cy="640080"/>
           </a:xfrm>
           <a:prstGeom prst="rect">
             <a:avLst/>
@@ -10034,17 +9442,17 @@
               <a:buNone/>
             </a:pPr>
             <a:r>
-              <a:rPr lang="en-US" sz="2900" b="1" dirty="0">
-                <a:solidFill>
-                  <a:srgbClr val="0F172A"/>
+              <a:rPr lang="en-US" sz="2700" b="1" dirty="0">
+                <a:solidFill>
+                  <a:srgbClr val="0A1F33"/>
                 </a:solidFill>
                 <a:latin typeface="Cambria" pitchFamily="34" charset="0"/>
                 <a:ea typeface="Cambria" pitchFamily="34" charset="-122"/>
                 <a:cs typeface="Cambria" pitchFamily="34" charset="-120"/>
               </a:rPr>
-              <a:t>The ask</a:t>
-            </a:r>
-            <a:endParaRPr lang="en-US" sz="2900" dirty="0"/>
+              <a:t>Approve an investment year, with a clear trigger</a:t>
+            </a:r>
+            <a:endParaRPr lang="en-US" sz="2700" dirty="0"/>
           </a:p>
         </p:txBody>
       </p:sp>
@@ -10057,7 +9465,7 @@
         <p:spPr>
           <a:xfrm>
             <a:off x="566928" y="1554480"/>
-            <a:ext cx="10972800" cy="2377440"/>
+            <a:ext cx="10972800" cy="2194560"/>
           </a:xfrm>
           <a:prstGeom prst="rect">
             <a:avLst/>
@@ -10071,7 +9479,7 @@
           <a:p>
             <a:pPr marL="177800" indent="-177800">
               <a:spcAft>
-                <a:spcPts val="700"/>
+                <a:spcPts val="800"/>
               </a:spcAft>
               <a:buSzPct val="100000"/>
               <a:buChar char="•"/>
@@ -10079,20 +9487,20 @@
             <a:r>
               <a:rPr lang="en-US" sz="1500" dirty="0">
                 <a:solidFill>
-                  <a:srgbClr val="334155"/>
+                  <a:srgbClr val="2B3F52"/>
                 </a:solidFill>
                 <a:latin typeface="Calibri" pitchFamily="34" charset="0"/>
                 <a:ea typeface="Calibri" pitchFamily="34" charset="-122"/>
                 <a:cs typeface="Calibri" pitchFamily="34" charset="-120"/>
               </a:rPr>
-              <a:t>Approve the FY27 operating budget of Rs 5.24 Cr, including Rs 0.64 Cr for the two new hires.</a:t>
+              <a:t>Approve the FY27 operating budget of Rs 5.24 Cr.</a:t>
             </a:r>
             <a:endParaRPr lang="en-US" sz="1500" dirty="0"/>
           </a:p>
           <a:p>
             <a:pPr marL="177800" indent="-177800">
               <a:spcAft>
-                <a:spcPts val="700"/>
+                <a:spcPts val="800"/>
               </a:spcAft>
               <a:buSzPct val="100000"/>
               <a:buChar char="•"/>
@@ -10100,20 +9508,20 @@
             <a:r>
               <a:rPr lang="en-US" sz="1500" dirty="0">
                 <a:solidFill>
-                  <a:srgbClr val="334155"/>
+                  <a:srgbClr val="2B3F52"/>
                 </a:solidFill>
                 <a:latin typeface="Calibri" pitchFamily="34" charset="0"/>
                 <a:ea typeface="Calibri" pitchFamily="34" charset="-122"/>
                 <a:cs typeface="Calibri" pitchFamily="34" charset="-120"/>
               </a:rPr>
-              <a:t>Approve the headcount plan: two senior hires plus four BDs.</a:t>
+              <a:t>Endorse the base case, BLR live by 1 October at 16 cases per month, serviced by the four BDs already onboarded.</a:t>
             </a:r>
             <a:endParaRPr lang="en-US" sz="1500" dirty="0"/>
           </a:p>
           <a:p>
             <a:pPr marL="177800" indent="-177800">
               <a:spcAft>
-                <a:spcPts val="700"/>
+                <a:spcPts val="800"/>
               </a:spcAft>
               <a:buSzPct val="100000"/>
               <a:buChar char="•"/>
@@ -10121,134 +9529,111 @@
             <a:r>
               <a:rPr lang="en-US" sz="1500" dirty="0">
                 <a:solidFill>
-                  <a:srgbClr val="334155"/>
+                  <a:srgbClr val="2B3F52"/>
                 </a:solidFill>
                 <a:latin typeface="Calibri" pitchFamily="34" charset="0"/>
                 <a:ea typeface="Calibri" pitchFamily="34" charset="-122"/>
                 <a:cs typeface="Calibri" pitchFamily="34" charset="-120"/>
               </a:rPr>
-              <a:t>Endorse the base case, BLR live by 1 October at 16 cases per month.</a:t>
+              <a:t>Note that the plan is fully funded without touching the Rs 25 Cr net worth, with a cost trigger if BLR slips past January.</a:t>
             </a:r>
             <a:endParaRPr lang="en-US" sz="1500" dirty="0"/>
           </a:p>
-          <a:p>
-            <a:pPr marL="177800" indent="-177800">
-              <a:spcAft>
-                <a:spcPts val="700"/>
-              </a:spcAft>
-              <a:buSzPct val="100000"/>
-              <a:buChar char="•"/>
-            </a:pPr>
-            <a:r>
-              <a:rPr lang="en-US" sz="1500" dirty="0">
-                <a:solidFill>
-                  <a:srgbClr val="334155"/>
+        </p:txBody>
+      </p:sp>
+      <p:sp>
+        <p:nvSpPr>
+          <p:cNvPr id="6" name="Shape 4"/>
+          <p:cNvSpPr/>
+          <p:nvPr/>
+        </p:nvSpPr>
+        <p:spPr>
+          <a:xfrm>
+            <a:off x="566928" y="4114800"/>
+            <a:ext cx="11064240" cy="1371600"/>
+          </a:xfrm>
+          <a:prstGeom prst="rect">
+            <a:avLst/>
+          </a:prstGeom>
+          <a:solidFill>
+            <a:srgbClr val="0A1F33"/>
+          </a:solidFill>
+          <a:ln/>
+        </p:spPr>
+      </p:sp>
+      <p:sp>
+        <p:nvSpPr>
+          <p:cNvPr id="7" name="Text 5"/>
+          <p:cNvSpPr/>
+          <p:nvPr/>
+        </p:nvSpPr>
+        <p:spPr>
+          <a:xfrm>
+            <a:off x="886968" y="4343400"/>
+            <a:ext cx="10424160" cy="914400"/>
+          </a:xfrm>
+          <a:prstGeom prst="rect">
+            <a:avLst/>
+          </a:prstGeom>
+          <a:noFill/>
+          <a:ln/>
+        </p:spPr>
+        <p:txBody>
+          <a:bodyPr wrap="square" rtlCol="0" anchor="ctr"/>
+          <a:lstStyle/>
+          <a:p>
+            <a:pPr indent="0" marL="0">
+              <a:buNone/>
+            </a:pPr>
+            <a:r>
+              <a:rPr lang="en-US" sz="1700" b="1" dirty="0">
+                <a:solidFill>
+                  <a:srgbClr val="FFFFFF"/>
+                </a:solidFill>
+                <a:latin typeface="Cambria" pitchFamily="34" charset="0"/>
+                <a:ea typeface="Cambria" pitchFamily="34" charset="-122"/>
+                <a:cs typeface="Cambria" pitchFamily="34" charset="-120"/>
+              </a:rPr>
+              <a:t>Solvency is secure. Operational self sufficiency by FY28 is the goal, and the BLR licence is the one variable that decides the pace.</a:t>
+            </a:r>
+            <a:endParaRPr lang="en-US" sz="1700" dirty="0"/>
+          </a:p>
+        </p:txBody>
+      </p:sp>
+      <p:sp>
+        <p:nvSpPr>
+          <p:cNvPr id="8" name="Text 6"/>
+          <p:cNvSpPr/>
+          <p:nvPr/>
+        </p:nvSpPr>
+        <p:spPr>
+          <a:xfrm>
+            <a:off x="566928" y="6455664"/>
+            <a:ext cx="11064240" cy="292608"/>
+          </a:xfrm>
+          <a:prstGeom prst="rect">
+            <a:avLst/>
+          </a:prstGeom>
+          <a:noFill/>
+          <a:ln/>
+        </p:spPr>
+        <p:txBody>
+          <a:bodyPr wrap="square" rtlCol="0" anchor="ctr"/>
+          <a:lstStyle/>
+          <a:p>
+            <a:pPr indent="0" marL="0">
+              <a:buNone/>
+            </a:pPr>
+            <a:r>
+              <a:rPr lang="en-US" sz="900" dirty="0">
+                <a:solidFill>
+                  <a:srgbClr val="9AA7B4"/>
                 </a:solidFill>
                 <a:latin typeface="Calibri" pitchFamily="34" charset="0"/>
                 <a:ea typeface="Calibri" pitchFamily="34" charset="-122"/>
                 <a:cs typeface="Calibri" pitchFamily="34" charset="-120"/>
               </a:rPr>
-              <a:t>Note that the plan is fully funded without touching the Rs 25 Cr net worth, with a cost trigger if BLR slips past January.</a:t>
-            </a:r>
-            <a:endParaRPr lang="en-US" sz="1500" dirty="0"/>
-          </a:p>
-        </p:txBody>
-      </p:sp>
-      <p:sp>
-        <p:nvSpPr>
-          <p:cNvPr id="6" name="Shape 4"/>
-          <p:cNvSpPr/>
-          <p:nvPr/>
-        </p:nvSpPr>
-        <p:spPr>
-          <a:xfrm>
-            <a:off x="566928" y="4206240"/>
-            <a:ext cx="11064240" cy="1371600"/>
-          </a:xfrm>
-          <a:prstGeom prst="roundRect">
-            <a:avLst>
-              <a:gd name="adj" fmla="val 5333"/>
-            </a:avLst>
-          </a:prstGeom>
-          <a:solidFill>
-            <a:srgbClr val="0F172A"/>
-          </a:solidFill>
-          <a:ln/>
-        </p:spPr>
-      </p:sp>
-      <p:sp>
-        <p:nvSpPr>
-          <p:cNvPr id="7" name="Text 5"/>
-          <p:cNvSpPr/>
-          <p:nvPr/>
-        </p:nvSpPr>
-        <p:spPr>
-          <a:xfrm>
-            <a:off x="841248" y="4434840"/>
-            <a:ext cx="10515600" cy="914400"/>
-          </a:xfrm>
-          <a:prstGeom prst="rect">
-            <a:avLst/>
-          </a:prstGeom>
-          <a:noFill/>
-          <a:ln/>
-        </p:spPr>
-        <p:txBody>
-          <a:bodyPr wrap="square" rtlCol="0" anchor="ctr"/>
-          <a:lstStyle/>
-          <a:p>
-            <a:pPr indent="0" marL="0">
-              <a:buNone/>
-            </a:pPr>
-            <a:r>
-              <a:rPr lang="en-US" sz="1700" b="1" dirty="0">
-                <a:solidFill>
-                  <a:srgbClr val="FFFFFF"/>
-                </a:solidFill>
-                <a:latin typeface="Cambria" pitchFamily="34" charset="0"/>
-                <a:ea typeface="Cambria" pitchFamily="34" charset="-122"/>
-                <a:cs typeface="Cambria" pitchFamily="34" charset="-120"/>
-              </a:rPr>
-              <a:t>Solvency is secure. Operational self sufficiency by FY28 is the goal, and the BLR licence is the one variable that decides the pace.</a:t>
-            </a:r>
-            <a:endParaRPr lang="en-US" sz="1700" dirty="0"/>
-          </a:p>
-        </p:txBody>
-      </p:sp>
-      <p:sp>
-        <p:nvSpPr>
-          <p:cNvPr id="8" name="Text 6"/>
-          <p:cNvSpPr/>
-          <p:nvPr/>
-        </p:nvSpPr>
-        <p:spPr>
-          <a:xfrm>
-            <a:off x="566928" y="6446520"/>
-            <a:ext cx="11064240" cy="301752"/>
-          </a:xfrm>
-          <a:prstGeom prst="rect">
-            <a:avLst/>
-          </a:prstGeom>
-          <a:noFill/>
-          <a:ln/>
-        </p:spPr>
-        <p:txBody>
-          <a:bodyPr wrap="square" rtlCol="0" anchor="ctr"/>
-          <a:lstStyle/>
-          <a:p>
-            <a:pPr indent="0" marL="0">
-              <a:buNone/>
-            </a:pPr>
-            <a:r>
-              <a:rPr lang="en-US" sz="900" i="1" dirty="0">
-                <a:solidFill>
-                  <a:srgbClr val="94A3B8"/>
-                </a:solidFill>
-                <a:latin typeface="Calibri" pitchFamily="34" charset="0"/>
-                <a:ea typeface="Calibri" pitchFamily="34" charset="-122"/>
-                <a:cs typeface="Calibri" pitchFamily="34" charset="-120"/>
-              </a:rPr>
-              <a:t>Sources: [1] Internal. [2] Management assumption. [3] crisil.com. [5] careratings.com. [6] indiaratings.co.in. [7] infomerics.com. [8] acuite.in. [9] brickworkratings.com. [10] SEBI CRA Regulations.</a:t>
+              <a:t>Sources: [1] Internal. [2] Management assumption. [3] crisil.com. [4] icra.in. [5] careratings.com. [6] indiaratings.co.in. [7] infomerics.com. [8] acuite.in. [9] brickworkratings.com. [10] SEBI CRA Regulations.</a:t>
             </a:r>
             <a:endParaRPr lang="en-US" sz="900" dirty="0"/>
           </a:p>
@@ -10294,7 +9679,7 @@
         </p:nvSpPr>
         <p:spPr>
           <a:xfrm>
-            <a:off x="11430000" y="402336"/>
+            <a:off x="11430000" y="420624"/>
             <a:ext cx="365760" cy="274320"/>
           </a:xfrm>
           <a:prstGeom prst="rect">
@@ -10313,7 +9698,7 @@
             <a:r>
               <a:rPr lang="en-US" sz="1100" b="1" dirty="0">
                 <a:solidFill>
-                  <a:srgbClr val="94A3B8"/>
+                  <a:srgbClr val="9AA7B4"/>
                 </a:solidFill>
                 <a:latin typeface="Calibri" pitchFamily="34" charset="0"/>
                 <a:ea typeface="Calibri" pitchFamily="34" charset="-122"/>
@@ -10333,7 +9718,7 @@
         </p:nvSpPr>
         <p:spPr>
           <a:xfrm>
-            <a:off x="566928" y="438912"/>
+            <a:off x="566928" y="457200"/>
             <a:ext cx="10058400" cy="274320"/>
           </a:xfrm>
           <a:prstGeom prst="rect">
@@ -10352,7 +9737,7 @@
             <a:r>
               <a:rPr lang="en-US" sz="1100" b="1" spc="200" kern="0" dirty="0">
                 <a:solidFill>
-                  <a:srgbClr val="2B5CC4"/>
+                  <a:srgbClr val="0F766E"/>
                 </a:solidFill>
                 <a:latin typeface="Calibri" pitchFamily="34" charset="0"/>
                 <a:ea typeface="Calibri" pitchFamily="34" charset="-122"/>
@@ -10372,8 +9757,8 @@
         </p:nvSpPr>
         <p:spPr>
           <a:xfrm>
-            <a:off x="566928" y="694944"/>
-            <a:ext cx="11064240" cy="548640"/>
+            <a:off x="566928" y="713232"/>
+            <a:ext cx="11064240" cy="640080"/>
           </a:xfrm>
           <a:prstGeom prst="rect">
             <a:avLst/>
@@ -10389,17 +9774,17 @@
               <a:buNone/>
             </a:pPr>
             <a:r>
-              <a:rPr lang="en-US" sz="2900" b="1" dirty="0">
-                <a:solidFill>
-                  <a:srgbClr val="0F172A"/>
+              <a:rPr lang="en-US" sz="2700" b="1" dirty="0">
+                <a:solidFill>
+                  <a:srgbClr val="0A1F33"/>
                 </a:solidFill>
                 <a:latin typeface="Cambria" pitchFamily="34" charset="0"/>
                 <a:ea typeface="Cambria" pitchFamily="34" charset="-122"/>
                 <a:cs typeface="Cambria" pitchFamily="34" charset="-120"/>
               </a:rPr>
-              <a:t>Where we stand today</a:t>
-            </a:r>
-            <a:endParaRPr lang="en-US" sz="2900" dirty="0"/>
+              <a:t>Today we earn like a treasury, not yet a rating agency</a:t>
+            </a:r>
+            <a:endParaRPr lang="en-US" sz="2700" dirty="0"/>
           </a:p>
         </p:txBody>
       </p:sp>
@@ -10411,7 +9796,7 @@
         </p:nvSpPr>
         <p:spPr>
           <a:xfrm>
-            <a:off x="566928" y="1298448"/>
+            <a:off x="566928" y="1353312"/>
             <a:ext cx="11064240" cy="457200"/>
           </a:xfrm>
           <a:prstGeom prst="rect">
@@ -10430,13 +9815,13 @@
             <a:r>
               <a:rPr lang="en-US" sz="1400" dirty="0">
                 <a:solidFill>
-                  <a:srgbClr val="64748B"/>
+                  <a:srgbClr val="5B6B7B"/>
                 </a:solidFill>
                 <a:latin typeface="Calibri" pitchFamily="34" charset="0"/>
                 <a:ea typeface="Calibri" pitchFamily="34" charset="-122"/>
                 <a:cs typeface="Calibri" pitchFamily="34" charset="-120"/>
               </a:rPr>
-              <a:t>Financially solvent and capital rich, but income still comes from reserves, not from operations.</a:t>
+              <a:t>The balance sheet is strong and the regulatory barrier is cleared. The gap is operating revenue, only now appearing.</a:t>
             </a:r>
             <a:endParaRPr lang="en-US" sz="1400" dirty="0"/>
           </a:p>
@@ -10451,19 +9836,17 @@
         <p:spPr>
           <a:xfrm>
             <a:off x="566928" y="1783080"/>
-            <a:ext cx="2606040" cy="1280160"/>
-          </a:xfrm>
-          <a:prstGeom prst="roundRect">
-            <a:avLst>
-              <a:gd name="adj" fmla="val 4286"/>
-            </a:avLst>
+            <a:ext cx="2606040" cy="1325880"/>
+          </a:xfrm>
+          <a:prstGeom prst="rect">
+            <a:avLst/>
           </a:prstGeom>
           <a:solidFill>
-            <a:srgbClr val="F5F8FB"/>
+            <a:srgbClr val="F6F8FA"/>
           </a:solidFill>
           <a:ln w="12700">
             <a:solidFill>
-              <a:srgbClr val="E2E8F0"/>
+              <a:srgbClr val="E6E9EE"/>
             </a:solidFill>
             <a:prstDash val="solid"/>
           </a:ln>
@@ -10477,8 +9860,8 @@
         </p:nvSpPr>
         <p:spPr>
           <a:xfrm>
-            <a:off x="713232" y="1892808"/>
-            <a:ext cx="2313432" cy="274320"/>
+            <a:off x="731520" y="1911096"/>
+            <a:ext cx="2276856" cy="274320"/>
           </a:xfrm>
           <a:prstGeom prst="rect">
             <a:avLst/>
@@ -10496,7 +9879,7 @@
             <a:r>
               <a:rPr lang="en-US" sz="1050" dirty="0">
                 <a:solidFill>
-                  <a:srgbClr val="64748B"/>
+                  <a:srgbClr val="5B6B7B"/>
                 </a:solidFill>
                 <a:latin typeface="Calibri" pitchFamily="34" charset="0"/>
                 <a:ea typeface="Calibri" pitchFamily="34" charset="-122"/>
@@ -10516,8 +9899,8 @@
         </p:nvSpPr>
         <p:spPr>
           <a:xfrm>
-            <a:off x="713232" y="2130552"/>
-            <a:ext cx="2313432" cy="411480"/>
+            <a:off x="731520" y="2148840"/>
+            <a:ext cx="2276856" cy="457200"/>
           </a:xfrm>
           <a:prstGeom prst="rect">
             <a:avLst/>
@@ -10533,9 +9916,9 @@
               <a:buNone/>
             </a:pPr>
             <a:r>
-              <a:rPr lang="en-US" sz="2000" b="1" dirty="0">
-                <a:solidFill>
-                  <a:srgbClr val="0F172A"/>
+              <a:rPr lang="en-US" sz="2100" b="1" dirty="0">
+                <a:solidFill>
+                  <a:srgbClr val="0A1F33"/>
                 </a:solidFill>
                 <a:latin typeface="Cambria" pitchFamily="34" charset="0"/>
                 <a:ea typeface="Cambria" pitchFamily="34" charset="-122"/>
@@ -10543,7 +9926,7 @@
               </a:rPr>
               <a:t>Rs 26.1 Cr</a:t>
             </a:r>
-            <a:endParaRPr lang="en-US" sz="2000" dirty="0"/>
+            <a:endParaRPr lang="en-US" sz="2100" dirty="0"/>
           </a:p>
         </p:txBody>
       </p:sp>
@@ -10555,8 +9938,8 @@
         </p:nvSpPr>
         <p:spPr>
           <a:xfrm>
-            <a:off x="713232" y="2569464"/>
-            <a:ext cx="2313432" cy="365760"/>
+            <a:off x="731520" y="2606040"/>
+            <a:ext cx="2276856" cy="365760"/>
           </a:xfrm>
           <a:prstGeom prst="rect">
             <a:avLst/>
@@ -10574,7 +9957,7 @@
             <a:r>
               <a:rPr lang="en-US" sz="900" dirty="0">
                 <a:solidFill>
-                  <a:srgbClr val="94A3B8"/>
+                  <a:srgbClr val="9AA7B4"/>
                 </a:solidFill>
                 <a:latin typeface="Calibri" pitchFamily="34" charset="0"/>
                 <a:ea typeface="Calibri" pitchFamily="34" charset="-122"/>
@@ -10595,19 +9978,17 @@
         <p:spPr>
           <a:xfrm>
             <a:off x="3328416" y="1783080"/>
-            <a:ext cx="2606040" cy="1280160"/>
-          </a:xfrm>
-          <a:prstGeom prst="roundRect">
-            <a:avLst>
-              <a:gd name="adj" fmla="val 4286"/>
-            </a:avLst>
+            <a:ext cx="2606040" cy="1325880"/>
+          </a:xfrm>
+          <a:prstGeom prst="rect">
+            <a:avLst/>
           </a:prstGeom>
           <a:solidFill>
-            <a:srgbClr val="F5F8FB"/>
+            <a:srgbClr val="F6F8FA"/>
           </a:solidFill>
           <a:ln w="12700">
             <a:solidFill>
-              <a:srgbClr val="E2E8F0"/>
+              <a:srgbClr val="E6E9EE"/>
             </a:solidFill>
             <a:prstDash val="solid"/>
           </a:ln>
@@ -10621,8 +10002,8 @@
         </p:nvSpPr>
         <p:spPr>
           <a:xfrm>
-            <a:off x="3474720" y="1892808"/>
-            <a:ext cx="2313432" cy="274320"/>
+            <a:off x="3493008" y="1911096"/>
+            <a:ext cx="2276856" cy="274320"/>
           </a:xfrm>
           <a:prstGeom prst="rect">
             <a:avLst/>
@@ -10640,13 +10021,13 @@
             <a:r>
               <a:rPr lang="en-US" sz="1050" dirty="0">
                 <a:solidFill>
-                  <a:srgbClr val="64748B"/>
+                  <a:srgbClr val="5B6B7B"/>
                 </a:solidFill>
                 <a:latin typeface="Calibri" pitchFamily="34" charset="0"/>
                 <a:ea typeface="Calibri" pitchFamily="34" charset="-122"/>
                 <a:cs typeface="Calibri" pitchFamily="34" charset="-120"/>
               </a:rPr>
-              <a:t>FY26 income mix</a:t>
+              <a:t>FY26 ratings revenue</a:t>
             </a:r>
             <a:endParaRPr lang="en-US" sz="1050" dirty="0"/>
           </a:p>
@@ -10660,8 +10041,8 @@
         </p:nvSpPr>
         <p:spPr>
           <a:xfrm>
-            <a:off x="3474720" y="2130552"/>
-            <a:ext cx="2313432" cy="411480"/>
+            <a:off x="3493008" y="2148840"/>
+            <a:ext cx="2276856" cy="457200"/>
           </a:xfrm>
           <a:prstGeom prst="rect">
             <a:avLst/>
@@ -10677,17 +10058,17 @@
               <a:buNone/>
             </a:pPr>
             <a:r>
-              <a:rPr lang="en-US" sz="2000" b="1" dirty="0">
-                <a:solidFill>
-                  <a:srgbClr val="0F172A"/>
+              <a:rPr lang="en-US" sz="2100" b="1" dirty="0">
+                <a:solidFill>
+                  <a:srgbClr val="0A1F33"/>
                 </a:solidFill>
                 <a:latin typeface="Cambria" pitchFamily="34" charset="0"/>
                 <a:ea typeface="Cambria" pitchFamily="34" charset="-122"/>
                 <a:cs typeface="Cambria" pitchFamily="34" charset="-120"/>
               </a:rPr>
-              <a:t>95% FD</a:t>
-            </a:r>
-            <a:endParaRPr lang="en-US" sz="2000" dirty="0"/>
+              <a:t>Rs 8 L</a:t>
+            </a:r>
+            <a:endParaRPr lang="en-US" sz="2100" dirty="0"/>
           </a:p>
         </p:txBody>
       </p:sp>
@@ -10699,8 +10080,8 @@
         </p:nvSpPr>
         <p:spPr>
           <a:xfrm>
-            <a:off x="3474720" y="2569464"/>
-            <a:ext cx="2313432" cy="365760"/>
+            <a:off x="3493008" y="2606040"/>
+            <a:ext cx="2276856" cy="365760"/>
           </a:xfrm>
           <a:prstGeom prst="rect">
             <a:avLst/>
@@ -10718,13 +10099,13 @@
             <a:r>
               <a:rPr lang="en-US" sz="900" dirty="0">
                 <a:solidFill>
-                  <a:srgbClr val="94A3B8"/>
+                  <a:srgbClr val="9AA7B4"/>
                 </a:solidFill>
                 <a:latin typeface="Calibri" pitchFamily="34" charset="0"/>
                 <a:ea typeface="Calibri" pitchFamily="34" charset="-122"/>
                 <a:cs typeface="Calibri" pitchFamily="34" charset="-120"/>
               </a:rPr>
-              <a:t>only Rs 8 L from ratings</a:t>
+              <a:t>95% of income was FD interest</a:t>
             </a:r>
             <a:endParaRPr lang="en-US" sz="900" dirty="0"/>
           </a:p>
@@ -10739,19 +10120,17 @@
         <p:spPr>
           <a:xfrm>
             <a:off x="6089904" y="1783080"/>
-            <a:ext cx="2606040" cy="1280160"/>
-          </a:xfrm>
-          <a:prstGeom prst="roundRect">
-            <a:avLst>
-              <a:gd name="adj" fmla="val 4286"/>
-            </a:avLst>
+            <a:ext cx="2606040" cy="1325880"/>
+          </a:xfrm>
+          <a:prstGeom prst="rect">
+            <a:avLst/>
           </a:prstGeom>
           <a:solidFill>
-            <a:srgbClr val="F5F8FB"/>
+            <a:srgbClr val="F6F8FA"/>
           </a:solidFill>
           <a:ln w="12700">
             <a:solidFill>
-              <a:srgbClr val="E2E8F0"/>
+              <a:srgbClr val="E6E9EE"/>
             </a:solidFill>
             <a:prstDash val="solid"/>
           </a:ln>
@@ -10765,8 +10144,8 @@
         </p:nvSpPr>
         <p:spPr>
           <a:xfrm>
-            <a:off x="6236208" y="1892808"/>
-            <a:ext cx="2313432" cy="274320"/>
+            <a:off x="6254496" y="1911096"/>
+            <a:ext cx="2276856" cy="274320"/>
           </a:xfrm>
           <a:prstGeom prst="rect">
             <a:avLst/>
@@ -10784,7 +10163,7 @@
             <a:r>
               <a:rPr lang="en-US" sz="1050" dirty="0">
                 <a:solidFill>
-                  <a:srgbClr val="64748B"/>
+                  <a:srgbClr val="5B6B7B"/>
                 </a:solidFill>
                 <a:latin typeface="Calibri" pitchFamily="34" charset="0"/>
                 <a:ea typeface="Calibri" pitchFamily="34" charset="-122"/>
@@ -10804,8 +10183,8 @@
         </p:nvSpPr>
         <p:spPr>
           <a:xfrm>
-            <a:off x="6236208" y="2130552"/>
-            <a:ext cx="2313432" cy="411480"/>
+            <a:off x="6254496" y="2148840"/>
+            <a:ext cx="2276856" cy="457200"/>
           </a:xfrm>
           <a:prstGeom prst="rect">
             <a:avLst/>
@@ -10821,9 +10200,9 @@
               <a:buNone/>
             </a:pPr>
             <a:r>
-              <a:rPr lang="en-US" sz="2000" b="1" dirty="0">
-                <a:solidFill>
-                  <a:srgbClr val="0F172A"/>
+              <a:rPr lang="en-US" sz="2100" b="1" dirty="0">
+                <a:solidFill>
+                  <a:srgbClr val="0A1F33"/>
                 </a:solidFill>
                 <a:latin typeface="Cambria" pitchFamily="34" charset="0"/>
                 <a:ea typeface="Cambria" pitchFamily="34" charset="-122"/>
@@ -10831,7 +10210,7 @@
               </a:rPr>
               <a:t>Rs 28.5 L</a:t>
             </a:r>
-            <a:endParaRPr lang="en-US" sz="2000" dirty="0"/>
+            <a:endParaRPr lang="en-US" sz="2100" dirty="0"/>
           </a:p>
         </p:txBody>
       </p:sp>
@@ -10843,8 +10222,8 @@
         </p:nvSpPr>
         <p:spPr>
           <a:xfrm>
-            <a:off x="6236208" y="2569464"/>
-            <a:ext cx="2313432" cy="365760"/>
+            <a:off x="6254496" y="2606040"/>
+            <a:ext cx="2276856" cy="365760"/>
           </a:xfrm>
           <a:prstGeom prst="rect">
             <a:avLst/>
@@ -10862,7 +10241,7 @@
             <a:r>
               <a:rPr lang="en-US" sz="900" dirty="0">
                 <a:solidFill>
-                  <a:srgbClr val="94A3B8"/>
+                  <a:srgbClr val="9AA7B4"/>
                 </a:solidFill>
                 <a:latin typeface="Calibri" pitchFamily="34" charset="0"/>
                 <a:ea typeface="Calibri" pitchFamily="34" charset="-122"/>
@@ -10883,19 +10262,17 @@
         <p:spPr>
           <a:xfrm>
             <a:off x="8851392" y="1783080"/>
-            <a:ext cx="2606040" cy="1280160"/>
-          </a:xfrm>
-          <a:prstGeom prst="roundRect">
-            <a:avLst>
-              <a:gd name="adj" fmla="val 4286"/>
-            </a:avLst>
+            <a:ext cx="2606040" cy="1325880"/>
+          </a:xfrm>
+          <a:prstGeom prst="rect">
+            <a:avLst/>
           </a:prstGeom>
           <a:solidFill>
-            <a:srgbClr val="F5F8FB"/>
+            <a:srgbClr val="F6F8FA"/>
           </a:solidFill>
           <a:ln w="12700">
             <a:solidFill>
-              <a:srgbClr val="E2E8F0"/>
+              <a:srgbClr val="E6E9EE"/>
             </a:solidFill>
             <a:prstDash val="solid"/>
           </a:ln>
@@ -10909,8 +10286,8 @@
         </p:nvSpPr>
         <p:spPr>
           <a:xfrm>
-            <a:off x="8997696" y="1892808"/>
-            <a:ext cx="2313432" cy="274320"/>
+            <a:off x="9015984" y="1911096"/>
+            <a:ext cx="2276856" cy="274320"/>
           </a:xfrm>
           <a:prstGeom prst="rect">
             <a:avLst/>
@@ -10928,7 +10305,7 @@
             <a:r>
               <a:rPr lang="en-US" sz="1050" dirty="0">
                 <a:solidFill>
-                  <a:srgbClr val="64748B"/>
+                  <a:srgbClr val="5B6B7B"/>
                 </a:solidFill>
                 <a:latin typeface="Calibri" pitchFamily="34" charset="0"/>
                 <a:ea typeface="Calibri" pitchFamily="34" charset="-122"/>
@@ -10948,8 +10325,8 @@
         </p:nvSpPr>
         <p:spPr>
           <a:xfrm>
-            <a:off x="8997696" y="2130552"/>
-            <a:ext cx="2313432" cy="411480"/>
+            <a:off x="9015984" y="2148840"/>
+            <a:ext cx="2276856" cy="457200"/>
           </a:xfrm>
           <a:prstGeom prst="rect">
             <a:avLst/>
@@ -10965,9 +10342,9 @@
               <a:buNone/>
             </a:pPr>
             <a:r>
-              <a:rPr lang="en-US" sz="2000" b="1" dirty="0">
-                <a:solidFill>
-                  <a:srgbClr val="DC2626"/>
+              <a:rPr lang="en-US" sz="2100" b="1" dirty="0">
+                <a:solidFill>
+                  <a:srgbClr val="B3261E"/>
                 </a:solidFill>
                 <a:latin typeface="Cambria" pitchFamily="34" charset="0"/>
                 <a:ea typeface="Cambria" pitchFamily="34" charset="-122"/>
@@ -10975,7 +10352,7 @@
               </a:rPr>
               <a:t>Rs -2.6 Cr</a:t>
             </a:r>
-            <a:endParaRPr lang="en-US" sz="2000" dirty="0"/>
+            <a:endParaRPr lang="en-US" sz="2100" dirty="0"/>
           </a:p>
         </p:txBody>
       </p:sp>
@@ -10987,8 +10364,8 @@
         </p:nvSpPr>
         <p:spPr>
           <a:xfrm>
-            <a:off x="8997696" y="2569464"/>
-            <a:ext cx="2313432" cy="365760"/>
+            <a:off x="9015984" y="2606040"/>
+            <a:ext cx="2276856" cy="365760"/>
           </a:xfrm>
           <a:prstGeom prst="rect">
             <a:avLst/>
@@ -11006,7 +10383,7 @@
             <a:r>
               <a:rPr lang="en-US" sz="900" dirty="0">
                 <a:solidFill>
-                  <a:srgbClr val="94A3B8"/>
+                  <a:srgbClr val="9AA7B4"/>
                 </a:solidFill>
                 <a:latin typeface="Calibri" pitchFamily="34" charset="0"/>
                 <a:ea typeface="Calibri" pitchFamily="34" charset="-122"/>
@@ -11026,126 +10403,117 @@
         </p:nvSpPr>
         <p:spPr>
           <a:xfrm>
-            <a:off x="566928" y="3200400"/>
-            <a:ext cx="6949440" cy="274320"/>
-          </a:xfrm>
-          <a:prstGeom prst="rect">
-            <a:avLst/>
-          </a:prstGeom>
-          <a:noFill/>
-          <a:ln/>
-        </p:spPr>
-        <p:txBody>
-          <a:bodyPr wrap="square" rtlCol="0" anchor="ctr"/>
-          <a:lstStyle/>
-          <a:p>
-            <a:pPr indent="0" marL="0">
-              <a:buNone/>
-            </a:pPr>
-            <a:r>
-              <a:rPr lang="en-US" sz="1200" b="1" dirty="0">
-                <a:solidFill>
-                  <a:srgbClr val="334155"/>
+            <a:off x="566928" y="3429000"/>
+            <a:ext cx="10972800" cy="2377440"/>
+          </a:xfrm>
+          <a:prstGeom prst="rect">
+            <a:avLst/>
+          </a:prstGeom>
+          <a:noFill/>
+          <a:ln/>
+        </p:spPr>
+        <p:txBody>
+          <a:bodyPr wrap="square" rtlCol="0" anchor="t"/>
+          <a:lstStyle/>
+          <a:p>
+            <a:pPr marL="177800" indent="-177800">
+              <a:spcAft>
+                <a:spcPts val="800"/>
+              </a:spcAft>
+              <a:buSzPct val="100000"/>
+              <a:buChar char="•"/>
+            </a:pPr>
+            <a:r>
+              <a:rPr lang="en-US" sz="1400" dirty="0">
+                <a:solidFill>
+                  <a:srgbClr val="2B3F52"/>
                 </a:solidFill>
                 <a:latin typeface="Calibri" pitchFamily="34" charset="0"/>
                 <a:ea typeface="Calibri" pitchFamily="34" charset="-122"/>
                 <a:cs typeface="Calibri" pitchFamily="34" charset="-120"/>
               </a:rPr>
-              <a:t>Actual monthly income and expense, from the books (Rs Cr)</a:t>
-            </a:r>
-            <a:endParaRPr lang="en-US" sz="1200" dirty="0"/>
-          </a:p>
-        </p:txBody>
-      </p:sp>
-      <p:graphicFrame>
-        <p:nvGraphicFramePr>
-          <p:cNvPr id="23" name="Chart 0" descr=""/>
-          <p:cNvGraphicFramePr/>
-          <p:nvPr/>
-        </p:nvGraphicFramePr>
-        <p:xfrm>
-          <a:off x="566928" y="3474720"/>
-          <a:ext cx="6766560" cy="2697480"/>
-        </p:xfrm>
-        <a:graphic xmlns:a="http://schemas.openxmlformats.org/drawingml/2006/main">
-          <a:graphicData uri="http://schemas.openxmlformats.org/drawingml/2006/chart">
-            <c:chart xmlns:c="http://schemas.openxmlformats.org/drawingml/2006/chart" r:id="rId1"/>
-          </a:graphicData>
-        </a:graphic>
-      </p:graphicFrame>
-      <p:sp>
-        <p:nvSpPr>
-          <p:cNvPr id="24" name="Text 21"/>
-          <p:cNvSpPr/>
-          <p:nvPr/>
-        </p:nvSpPr>
-        <p:spPr>
-          <a:xfrm>
-            <a:off x="7635240" y="3566160"/>
-            <a:ext cx="3977640" cy="2377440"/>
-          </a:xfrm>
-          <a:prstGeom prst="rect">
-            <a:avLst/>
-          </a:prstGeom>
-          <a:noFill/>
-          <a:ln/>
-        </p:spPr>
-        <p:txBody>
-          <a:bodyPr wrap="square" rtlCol="0" anchor="t"/>
-          <a:lstStyle/>
-          <a:p>
-            <a:pPr indent="0" marL="0">
-              <a:buNone/>
-            </a:pPr>
-            <a:r>
-              <a:rPr lang="en-US" sz="1350" dirty="0">
-                <a:solidFill>
-                  <a:srgbClr val="334155"/>
+              <a:t>Income is carried by interest on the deposit corpus, not by the rating business. A capital story, not yet an operating one.</a:t>
+            </a:r>
+            <a:endParaRPr lang="en-US" sz="1400" dirty="0"/>
+          </a:p>
+          <a:p>
+            <a:pPr marL="177800" indent="-177800">
+              <a:spcAft>
+                <a:spcPts val="800"/>
+              </a:spcAft>
+              <a:buSzPct val="100000"/>
+              <a:buChar char="•"/>
+            </a:pPr>
+            <a:r>
+              <a:rPr lang="en-US" sz="1400" dirty="0">
+                <a:solidFill>
+                  <a:srgbClr val="2B3F52"/>
                 </a:solidFill>
                 <a:latin typeface="Calibri" pitchFamily="34" charset="0"/>
                 <a:ea typeface="Calibri" pitchFamily="34" charset="-122"/>
                 <a:cs typeface="Calibri" pitchFamily="34" charset="-120"/>
               </a:rPr>
-              <a:t>Income sat around Rs 14 to 15 L a month, almost all FD interest, while expense climbed past it as the team grew. Ratings income appears only in the last few months. Every value is booked.</a:t>
-            </a:r>
-            <a:endParaRPr lang="en-US" sz="1350" dirty="0"/>
-          </a:p>
-        </p:txBody>
-      </p:sp>
-      <p:sp>
-        <p:nvSpPr>
-          <p:cNvPr id="25" name="Text 22"/>
-          <p:cNvSpPr/>
-          <p:nvPr/>
-        </p:nvSpPr>
-        <p:spPr>
-          <a:xfrm>
-            <a:off x="566928" y="6446520"/>
-            <a:ext cx="11064240" cy="301752"/>
-          </a:xfrm>
-          <a:prstGeom prst="rect">
-            <a:avLst/>
-          </a:prstGeom>
-          <a:noFill/>
-          <a:ln/>
-        </p:spPr>
-        <p:txBody>
-          <a:bodyPr wrap="square" rtlCol="0" anchor="ctr"/>
-          <a:lstStyle/>
-          <a:p>
-            <a:pPr indent="0" marL="0">
-              <a:buNone/>
-            </a:pPr>
-            <a:r>
-              <a:rPr lang="en-US" sz="900" i="1" dirty="0">
-                <a:solidFill>
-                  <a:srgbClr val="94A3B8"/>
+              <a:t>The Rs 25 Cr net worth barrier that stops most new entrants is already met and parked in fixed deposits.</a:t>
+            </a:r>
+            <a:endParaRPr lang="en-US" sz="1400" dirty="0"/>
+          </a:p>
+          <a:p>
+            <a:pPr marL="177800" indent="-177800">
+              <a:spcAft>
+                <a:spcPts val="800"/>
+              </a:spcAft>
+              <a:buSzPct val="100000"/>
+              <a:buChar char="•"/>
+            </a:pPr>
+            <a:r>
+              <a:rPr lang="en-US" sz="1400" dirty="0">
+                <a:solidFill>
+                  <a:srgbClr val="2B3F52"/>
                 </a:solidFill>
                 <a:latin typeface="Calibri" pitchFamily="34" charset="0"/>
                 <a:ea typeface="Calibri" pitchFamily="34" charset="-122"/>
                 <a:cs typeface="Calibri" pitchFamily="34" charset="-120"/>
               </a:rPr>
-              <a:t>Source: Internal monthly ledger, Apr 2025 to Jun 2026 [1]. SEBI net worth requirement [10].</a:t>
+              <a:t>Operating revenue has just begun to inflect, from Rs 8 L in all of FY26 to Rs 28.5 L in the first quarter of FY27.</a:t>
+            </a:r>
+            <a:endParaRPr lang="en-US" sz="1400" dirty="0"/>
+          </a:p>
+        </p:txBody>
+      </p:sp>
+      <p:sp>
+        <p:nvSpPr>
+          <p:cNvPr id="23" name="Text 21"/>
+          <p:cNvSpPr/>
+          <p:nvPr/>
+        </p:nvSpPr>
+        <p:spPr>
+          <a:xfrm>
+            <a:off x="566928" y="6455664"/>
+            <a:ext cx="11064240" cy="292608"/>
+          </a:xfrm>
+          <a:prstGeom prst="rect">
+            <a:avLst/>
+          </a:prstGeom>
+          <a:noFill/>
+          <a:ln/>
+        </p:spPr>
+        <p:txBody>
+          <a:bodyPr wrap="square" rtlCol="0" anchor="ctr"/>
+          <a:lstStyle/>
+          <a:p>
+            <a:pPr indent="0" marL="0">
+              <a:buNone/>
+            </a:pPr>
+            <a:r>
+              <a:rPr lang="en-US" sz="900" dirty="0">
+                <a:solidFill>
+                  <a:srgbClr val="9AA7B4"/>
+                </a:solidFill>
+                <a:latin typeface="Calibri" pitchFamily="34" charset="0"/>
+                <a:ea typeface="Calibri" pitchFamily="34" charset="-122"/>
+                <a:cs typeface="Calibri" pitchFamily="34" charset="-120"/>
+              </a:rPr>
+              <a:t>Source: Internal [1]. SEBI net worth requirement [10].</a:t>
             </a:r>
             <a:endParaRPr lang="en-US" sz="900" dirty="0"/>
           </a:p>
@@ -11191,7 +10559,7 @@
         </p:nvSpPr>
         <p:spPr>
           <a:xfrm>
-            <a:off x="11430000" y="402336"/>
+            <a:off x="11430000" y="420624"/>
             <a:ext cx="365760" cy="274320"/>
           </a:xfrm>
           <a:prstGeom prst="rect">
@@ -11210,7 +10578,7 @@
             <a:r>
               <a:rPr lang="en-US" sz="1100" b="1" dirty="0">
                 <a:solidFill>
-                  <a:srgbClr val="94A3B8"/>
+                  <a:srgbClr val="9AA7B4"/>
                 </a:solidFill>
                 <a:latin typeface="Calibri" pitchFamily="34" charset="0"/>
                 <a:ea typeface="Calibri" pitchFamily="34" charset="-122"/>
@@ -11230,7 +10598,7 @@
         </p:nvSpPr>
         <p:spPr>
           <a:xfrm>
-            <a:off x="566928" y="438912"/>
+            <a:off x="566928" y="457200"/>
             <a:ext cx="10058400" cy="274320"/>
           </a:xfrm>
           <a:prstGeom prst="rect">
@@ -11249,13 +10617,13 @@
             <a:r>
               <a:rPr lang="en-US" sz="1100" b="1" spc="200" kern="0" dirty="0">
                 <a:solidFill>
-                  <a:srgbClr val="2B5CC4"/>
+                  <a:srgbClr val="0F766E"/>
                 </a:solidFill>
                 <a:latin typeface="Calibri" pitchFamily="34" charset="0"/>
                 <a:ea typeface="Calibri" pitchFamily="34" charset="-122"/>
                 <a:cs typeface="Calibri" pitchFamily="34" charset="-120"/>
               </a:rPr>
-              <a:t>STRATEGY</a:t>
+              <a:t>THE REVENUE ENGINE</a:t>
             </a:r>
             <a:endParaRPr lang="en-US" sz="1100" dirty="0"/>
           </a:p>
@@ -11269,8 +10637,8 @@
         </p:nvSpPr>
         <p:spPr>
           <a:xfrm>
-            <a:off x="566928" y="694944"/>
-            <a:ext cx="11064240" cy="548640"/>
+            <a:off x="566928" y="713232"/>
+            <a:ext cx="11064240" cy="640080"/>
           </a:xfrm>
           <a:prstGeom prst="rect">
             <a:avLst/>
@@ -11286,17 +10654,17 @@
               <a:buNone/>
             </a:pPr>
             <a:r>
-              <a:rPr lang="en-US" sz="2900" b="1" dirty="0">
-                <a:solidFill>
-                  <a:srgbClr val="0F172A"/>
+              <a:rPr lang="en-US" sz="2700" b="1" dirty="0">
+                <a:solidFill>
+                  <a:srgbClr val="0A1F33"/>
                 </a:solidFill>
                 <a:latin typeface="Cambria" pitchFamily="34" charset="0"/>
                 <a:ea typeface="Cambria" pitchFamily="34" charset="-122"/>
                 <a:cs typeface="Cambria" pitchFamily="34" charset="-120"/>
               </a:rPr>
-              <a:t>BLR is the switch, and why a borrower picks us</a:t>
-            </a:r>
-            <a:endParaRPr lang="en-US" sz="2900" dirty="0"/>
+              <a:t>One licence turns idle capital into an operating engine</a:t>
+            </a:r>
+            <a:endParaRPr lang="en-US" sz="2700" dirty="0"/>
           </a:p>
         </p:txBody>
       </p:sp>
@@ -11308,7 +10676,7 @@
         </p:nvSpPr>
         <p:spPr>
           <a:xfrm>
-            <a:off x="566928" y="1298448"/>
+            <a:off x="566928" y="1353312"/>
             <a:ext cx="11064240" cy="457200"/>
           </a:xfrm>
           <a:prstGeom prst="rect">
@@ -11327,13 +10695,13 @@
             <a:r>
               <a:rPr lang="en-US" sz="1400" dirty="0">
                 <a:solidFill>
-                  <a:srgbClr val="64748B"/>
+                  <a:srgbClr val="5B6B7B"/>
                 </a:solidFill>
                 <a:latin typeface="Calibri" pitchFamily="34" charset="0"/>
                 <a:ea typeface="Calibri" pitchFamily="34" charset="-122"/>
                 <a:cs typeface="Calibri" pitchFamily="34" charset="-120"/>
               </a:rPr>
-              <a:t>One regulatory milestone turns idle capital into an operating engine. The wedge against incumbents is real.</a:t>
+              <a:t>Bank Loan Ratings, unlocked by RBI ECAI accreditation, open the largest addressable pool in the industry.</a:t>
             </a:r>
             <a:endParaRPr lang="en-US" sz="1400" dirty="0"/>
           </a:p>
@@ -11350,17 +10718,15 @@
             <a:off x="566928" y="1783080"/>
             <a:ext cx="3520440" cy="1783080"/>
           </a:xfrm>
-          <a:prstGeom prst="roundRect">
-            <a:avLst>
-              <a:gd name="adj" fmla="val 3590"/>
-            </a:avLst>
+          <a:prstGeom prst="rect">
+            <a:avLst/>
           </a:prstGeom>
           <a:solidFill>
-            <a:srgbClr val="F5F8FB"/>
+            <a:srgbClr val="F6F8FA"/>
           </a:solidFill>
           <a:ln w="12700">
             <a:solidFill>
-              <a:srgbClr val="E2E8F0"/>
+              <a:srgbClr val="E6E9EE"/>
             </a:solidFill>
             <a:prstDash val="solid"/>
           </a:ln>
@@ -11393,7 +10759,7 @@
             <a:r>
               <a:rPr lang="en-US" sz="1500" b="1" dirty="0">
                 <a:solidFill>
-                  <a:srgbClr val="0F172A"/>
+                  <a:srgbClr val="0A1F33"/>
                 </a:solidFill>
                 <a:latin typeface="Cambria" pitchFamily="34" charset="0"/>
                 <a:ea typeface="Cambria" pitchFamily="34" charset="-122"/>
@@ -11413,7 +10779,7 @@
         </p:nvSpPr>
         <p:spPr>
           <a:xfrm>
-            <a:off x="749808" y="2286000"/>
+            <a:off x="749808" y="2304288"/>
             <a:ext cx="3154680" cy="1188720"/>
           </a:xfrm>
           <a:prstGeom prst="rect">
@@ -11432,13 +10798,13 @@
             <a:r>
               <a:rPr lang="en-US" sz="1250" dirty="0">
                 <a:solidFill>
-                  <a:srgbClr val="334155"/>
+                  <a:srgbClr val="2B3F52"/>
                 </a:solidFill>
                 <a:latin typeface="Calibri" pitchFamily="34" charset="0"/>
                 <a:ea typeface="Calibri" pitchFamily="34" charset="-122"/>
                 <a:cs typeface="Calibri" pitchFamily="34" charset="-120"/>
               </a:rPr>
-              <a:t>Bank Loan Ratings, via RBI ECAI accreditation. Every bank borrower is a candidate, the largest addressable pool in the industry.</a:t>
+              <a:t>Bank Loan Ratings, via RBI ECAI accreditation. Every bank borrower is a candidate, not only bond issuers.</a:t>
             </a:r>
             <a:endParaRPr lang="en-US" sz="1250" dirty="0"/>
           </a:p>
@@ -11455,17 +10821,15 @@
             <a:off x="4270248" y="1783080"/>
             <a:ext cx="3520440" cy="1783080"/>
           </a:xfrm>
-          <a:prstGeom prst="roundRect">
-            <a:avLst>
-              <a:gd name="adj" fmla="val 3590"/>
-            </a:avLst>
+          <a:prstGeom prst="rect">
+            <a:avLst/>
           </a:prstGeom>
           <a:solidFill>
-            <a:srgbClr val="F5F8FB"/>
+            <a:srgbClr val="F6F8FA"/>
           </a:solidFill>
           <a:ln w="12700">
             <a:solidFill>
-              <a:srgbClr val="E2E8F0"/>
+              <a:srgbClr val="E6E9EE"/>
             </a:solidFill>
             <a:prstDash val="solid"/>
           </a:ln>
@@ -11498,7 +10862,7 @@
             <a:r>
               <a:rPr lang="en-US" sz="1500" b="1" dirty="0">
                 <a:solidFill>
-                  <a:srgbClr val="0F172A"/>
+                  <a:srgbClr val="0A1F33"/>
                 </a:solidFill>
                 <a:latin typeface="Cambria" pitchFamily="34" charset="0"/>
                 <a:ea typeface="Cambria" pitchFamily="34" charset="-122"/>
@@ -11518,7 +10882,7 @@
         </p:nvSpPr>
         <p:spPr>
           <a:xfrm>
-            <a:off x="4453128" y="2286000"/>
+            <a:off x="4453128" y="2304288"/>
             <a:ext cx="3154680" cy="1188720"/>
           </a:xfrm>
           <a:prstGeom prst="rect">
@@ -11537,7 +10901,7 @@
             <a:r>
               <a:rPr lang="en-US" sz="1250" dirty="0">
                 <a:solidFill>
-                  <a:srgbClr val="334155"/>
+                  <a:srgbClr val="2B3F52"/>
                 </a:solidFill>
                 <a:latin typeface="Calibri" pitchFamily="34" charset="0"/>
                 <a:ea typeface="Calibri" pitchFamily="34" charset="-122"/>
@@ -11560,17 +10924,15 @@
             <a:off x="7973568" y="1783080"/>
             <a:ext cx="3520440" cy="1783080"/>
           </a:xfrm>
-          <a:prstGeom prst="roundRect">
-            <a:avLst>
-              <a:gd name="adj" fmla="val 3590"/>
-            </a:avLst>
+          <a:prstGeom prst="rect">
+            <a:avLst/>
           </a:prstGeom>
           <a:solidFill>
-            <a:srgbClr val="F5F8FB"/>
+            <a:srgbClr val="F6F8FA"/>
           </a:solidFill>
           <a:ln w="12700">
             <a:solidFill>
-              <a:srgbClr val="E2E8F0"/>
+              <a:srgbClr val="E6E9EE"/>
             </a:solidFill>
             <a:prstDash val="solid"/>
           </a:ln>
@@ -11603,7 +10965,7 @@
             <a:r>
               <a:rPr lang="en-US" sz="1500" b="1" dirty="0">
                 <a:solidFill>
-                  <a:srgbClr val="0F172A"/>
+                  <a:srgbClr val="0A1F33"/>
                 </a:solidFill>
                 <a:latin typeface="Cambria" pitchFamily="34" charset="0"/>
                 <a:ea typeface="Cambria" pitchFamily="34" charset="-122"/>
@@ -11623,7 +10985,7 @@
         </p:nvSpPr>
         <p:spPr>
           <a:xfrm>
-            <a:off x="8156448" y="2286000"/>
+            <a:off x="8156448" y="2304288"/>
             <a:ext cx="3154680" cy="1188720"/>
           </a:xfrm>
           <a:prstGeom prst="rect">
@@ -11642,13 +11004,13 @@
             <a:r>
               <a:rPr lang="en-US" sz="1250" dirty="0">
                 <a:solidFill>
-                  <a:srgbClr val="334155"/>
+                  <a:srgbClr val="2B3F52"/>
                 </a:solidFill>
                 <a:latin typeface="Calibri" pitchFamily="34" charset="0"/>
                 <a:ea typeface="Calibri" pitchFamily="34" charset="-122"/>
                 <a:cs typeface="Calibri" pitchFamily="34" charset="-120"/>
               </a:rPr>
-              <a:t>Two senior hires and four BDs, in place ahead of the licence, so mandates can be serviced from day one.</a:t>
+              <a:t>Four BDs are already onboarded, so mandates can be serviced from day one once the licence is live.</a:t>
             </a:r>
             <a:endParaRPr lang="en-US" sz="1250" dirty="0"/>
           </a:p>
@@ -11662,7 +11024,7 @@
         </p:nvSpPr>
         <p:spPr>
           <a:xfrm>
-            <a:off x="566928" y="3886200"/>
+            <a:off x="566928" y="3931920"/>
             <a:ext cx="10972800" cy="1828800"/>
           </a:xfrm>
           <a:prstGeom prst="rect">
@@ -11677,7 +11039,7 @@
           <a:p>
             <a:pPr marL="177800" indent="-177800">
               <a:spcAft>
-                <a:spcPts val="700"/>
+                <a:spcPts val="800"/>
               </a:spcAft>
               <a:buSzPct val="100000"/>
               <a:buChar char="•"/>
@@ -11685,7 +11047,7 @@
             <a:r>
               <a:rPr lang="en-US" sz="1400" dirty="0">
                 <a:solidFill>
-                  <a:srgbClr val="334155"/>
+                  <a:srgbClr val="2B3F52"/>
                 </a:solidFill>
                 <a:latin typeface="Calibri" pitchFamily="34" charset="0"/>
                 <a:ea typeface="Calibri" pitchFamily="34" charset="-122"/>
@@ -11698,7 +11060,7 @@
           <a:p>
             <a:pPr marL="177800" indent="-177800">
               <a:spcAft>
-                <a:spcPts val="700"/>
+                <a:spcPts val="800"/>
               </a:spcAft>
               <a:buSzPct val="100000"/>
               <a:buChar char="•"/>
@@ -11706,7 +11068,7 @@
             <a:r>
               <a:rPr lang="en-US" sz="1400" dirty="0">
                 <a:solidFill>
-                  <a:srgbClr val="334155"/>
+                  <a:srgbClr val="2B3F52"/>
                 </a:solidFill>
                 <a:latin typeface="Calibri" pitchFamily="34" charset="0"/>
                 <a:ea typeface="Calibri" pitchFamily="34" charset="-122"/>
@@ -11726,8 +11088,8 @@
         </p:nvSpPr>
         <p:spPr>
           <a:xfrm>
-            <a:off x="566928" y="6446520"/>
-            <a:ext cx="11064240" cy="301752"/>
+            <a:off x="566928" y="6455664"/>
+            <a:ext cx="11064240" cy="292608"/>
           </a:xfrm>
           <a:prstGeom prst="rect">
             <a:avLst/>
@@ -11743,15 +11105,15 @@
               <a:buNone/>
             </a:pPr>
             <a:r>
-              <a:rPr lang="en-US" sz="900" i="1" dirty="0">
-                <a:solidFill>
-                  <a:srgbClr val="94A3B8"/>
+              <a:rPr lang="en-US" sz="900" dirty="0">
+                <a:solidFill>
+                  <a:srgbClr val="9AA7B4"/>
                 </a:solidFill>
                 <a:latin typeface="Calibri" pitchFamily="34" charset="0"/>
                 <a:ea typeface="Calibri" pitchFamily="34" charset="-122"/>
                 <a:cs typeface="Calibri" pitchFamily="34" charset="-120"/>
               </a:rPr>
-              <a:t>Source: Infomerics [7]. Hiring and pricing, Internal [1] and assumption [2]. Regulatory basis [10].</a:t>
+              <a:t>Source: Infomerics [7]. Pricing, Internal [1] and assumption [2]. Regulatory basis [10].</a:t>
             </a:r>
             <a:endParaRPr lang="en-US" sz="900" dirty="0"/>
           </a:p>
@@ -11797,7 +11159,7 @@
         </p:nvSpPr>
         <p:spPr>
           <a:xfrm>
-            <a:off x="11430000" y="402336"/>
+            <a:off x="11430000" y="420624"/>
             <a:ext cx="365760" cy="274320"/>
           </a:xfrm>
           <a:prstGeom prst="rect">
@@ -11816,7 +11178,7 @@
             <a:r>
               <a:rPr lang="en-US" sz="1100" b="1" dirty="0">
                 <a:solidFill>
-                  <a:srgbClr val="94A3B8"/>
+                  <a:srgbClr val="9AA7B4"/>
                 </a:solidFill>
                 <a:latin typeface="Calibri" pitchFamily="34" charset="0"/>
                 <a:ea typeface="Calibri" pitchFamily="34" charset="-122"/>
@@ -11836,7 +11198,7 @@
         </p:nvSpPr>
         <p:spPr>
           <a:xfrm>
-            <a:off x="566928" y="438912"/>
+            <a:off x="566928" y="457200"/>
             <a:ext cx="10058400" cy="274320"/>
           </a:xfrm>
           <a:prstGeom prst="rect">
@@ -11855,7 +11217,7 @@
             <a:r>
               <a:rPr lang="en-US" sz="1100" b="1" spc="200" kern="0" dirty="0">
                 <a:solidFill>
-                  <a:srgbClr val="2B5CC4"/>
+                  <a:srgbClr val="0F766E"/>
                 </a:solidFill>
                 <a:latin typeface="Calibri" pitchFamily="34" charset="0"/>
                 <a:ea typeface="Calibri" pitchFamily="34" charset="-122"/>
@@ -11875,8 +11237,8 @@
         </p:nvSpPr>
         <p:spPr>
           <a:xfrm>
-            <a:off x="566928" y="694944"/>
-            <a:ext cx="11064240" cy="548640"/>
+            <a:off x="566928" y="713232"/>
+            <a:ext cx="11064240" cy="640080"/>
           </a:xfrm>
           <a:prstGeom prst="rect">
             <a:avLst/>
@@ -11892,17 +11254,17 @@
               <a:buNone/>
             </a:pPr>
             <a:r>
-              <a:rPr lang="en-US" sz="2900" b="1" dirty="0">
-                <a:solidFill>
-                  <a:srgbClr val="0F172A"/>
+              <a:rPr lang="en-US" sz="2700" b="1" dirty="0">
+                <a:solidFill>
+                  <a:srgbClr val="0A1F33"/>
                 </a:solidFill>
                 <a:latin typeface="Cambria" pitchFamily="34" charset="0"/>
                 <a:ea typeface="Cambria" pitchFamily="34" charset="-122"/>
                 <a:cs typeface="Cambria" pitchFamily="34" charset="-120"/>
               </a:rPr>
-              <a:t>Unit economics and the scale it builds</a:t>
-            </a:r>
-            <a:endParaRPr lang="en-US" sz="2900" dirty="0"/>
+              <a:t>Unit economics, and the scale it builds</a:t>
+            </a:r>
+            <a:endParaRPr lang="en-US" sz="2700" dirty="0"/>
           </a:p>
         </p:txBody>
       </p:sp>
@@ -11915,19 +11277,17 @@
         <p:spPr>
           <a:xfrm>
             <a:off x="566928" y="1691640"/>
-            <a:ext cx="2606040" cy="1280160"/>
-          </a:xfrm>
-          <a:prstGeom prst="roundRect">
-            <a:avLst>
-              <a:gd name="adj" fmla="val 4286"/>
-            </a:avLst>
+            <a:ext cx="2606040" cy="1325880"/>
+          </a:xfrm>
+          <a:prstGeom prst="rect">
+            <a:avLst/>
           </a:prstGeom>
           <a:solidFill>
-            <a:srgbClr val="F5F8FB"/>
+            <a:srgbClr val="F6F8FA"/>
           </a:solidFill>
           <a:ln w="12700">
             <a:solidFill>
-              <a:srgbClr val="E2E8F0"/>
+              <a:srgbClr val="E6E9EE"/>
             </a:solidFill>
             <a:prstDash val="solid"/>
           </a:ln>
@@ -11941,8 +11301,8 @@
         </p:nvSpPr>
         <p:spPr>
           <a:xfrm>
-            <a:off x="713232" y="1801368"/>
-            <a:ext cx="2313432" cy="274320"/>
+            <a:off x="731520" y="1819656"/>
+            <a:ext cx="2276856" cy="274320"/>
           </a:xfrm>
           <a:prstGeom prst="rect">
             <a:avLst/>
@@ -11960,7 +11320,7 @@
             <a:r>
               <a:rPr lang="en-US" sz="1050" dirty="0">
                 <a:solidFill>
-                  <a:srgbClr val="64748B"/>
+                  <a:srgbClr val="5B6B7B"/>
                 </a:solidFill>
                 <a:latin typeface="Calibri" pitchFamily="34" charset="0"/>
                 <a:ea typeface="Calibri" pitchFamily="34" charset="-122"/>
@@ -11980,8 +11340,8 @@
         </p:nvSpPr>
         <p:spPr>
           <a:xfrm>
-            <a:off x="713232" y="2039112"/>
-            <a:ext cx="2313432" cy="411480"/>
+            <a:off x="731520" y="2057400"/>
+            <a:ext cx="2276856" cy="457200"/>
           </a:xfrm>
           <a:prstGeom prst="rect">
             <a:avLst/>
@@ -11997,9 +11357,9 @@
               <a:buNone/>
             </a:pPr>
             <a:r>
-              <a:rPr lang="en-US" sz="2000" b="1" dirty="0">
-                <a:solidFill>
-                  <a:srgbClr val="0F172A"/>
+              <a:rPr lang="en-US" sz="2100" b="1" dirty="0">
+                <a:solidFill>
+                  <a:srgbClr val="0A1F33"/>
                 </a:solidFill>
                 <a:latin typeface="Cambria" pitchFamily="34" charset="0"/>
                 <a:ea typeface="Cambria" pitchFamily="34" charset="-122"/>
@@ -12007,7 +11367,7 @@
               </a:rPr>
               <a:t>Rs 100 Cr</a:t>
             </a:r>
-            <a:endParaRPr lang="en-US" sz="2000" dirty="0"/>
+            <a:endParaRPr lang="en-US" sz="2100" dirty="0"/>
           </a:p>
         </p:txBody>
       </p:sp>
@@ -12019,8 +11379,8 @@
         </p:nvSpPr>
         <p:spPr>
           <a:xfrm>
-            <a:off x="713232" y="2478024"/>
-            <a:ext cx="2313432" cy="365760"/>
+            <a:off x="731520" y="2514600"/>
+            <a:ext cx="2276856" cy="365760"/>
           </a:xfrm>
           <a:prstGeom prst="rect">
             <a:avLst/>
@@ -12038,7 +11398,7 @@
             <a:r>
               <a:rPr lang="en-US" sz="900" dirty="0">
                 <a:solidFill>
-                  <a:srgbClr val="94A3B8"/>
+                  <a:srgbClr val="9AA7B4"/>
                 </a:solidFill>
                 <a:latin typeface="Calibri" pitchFamily="34" charset="0"/>
                 <a:ea typeface="Calibri" pitchFamily="34" charset="-122"/>
@@ -12059,19 +11419,17 @@
         <p:spPr>
           <a:xfrm>
             <a:off x="3328416" y="1691640"/>
-            <a:ext cx="2606040" cy="1280160"/>
-          </a:xfrm>
-          <a:prstGeom prst="roundRect">
-            <a:avLst>
-              <a:gd name="adj" fmla="val 4286"/>
-            </a:avLst>
+            <a:ext cx="2606040" cy="1325880"/>
+          </a:xfrm>
+          <a:prstGeom prst="rect">
+            <a:avLst/>
           </a:prstGeom>
           <a:solidFill>
-            <a:srgbClr val="F5F8FB"/>
+            <a:srgbClr val="F6F8FA"/>
           </a:solidFill>
           <a:ln w="12700">
             <a:solidFill>
-              <a:srgbClr val="E2E8F0"/>
+              <a:srgbClr val="E6E9EE"/>
             </a:solidFill>
             <a:prstDash val="solid"/>
           </a:ln>
@@ -12085,8 +11443,8 @@
         </p:nvSpPr>
         <p:spPr>
           <a:xfrm>
-            <a:off x="3474720" y="1801368"/>
-            <a:ext cx="2313432" cy="274320"/>
+            <a:off x="3493008" y="1819656"/>
+            <a:ext cx="2276856" cy="274320"/>
           </a:xfrm>
           <a:prstGeom prst="rect">
             <a:avLst/>
@@ -12104,7 +11462,7 @@
             <a:r>
               <a:rPr lang="en-US" sz="1050" dirty="0">
                 <a:solidFill>
-                  <a:srgbClr val="64748B"/>
+                  <a:srgbClr val="5B6B7B"/>
                 </a:solidFill>
                 <a:latin typeface="Calibri" pitchFamily="34" charset="0"/>
                 <a:ea typeface="Calibri" pitchFamily="34" charset="-122"/>
@@ -12124,8 +11482,8 @@
         </p:nvSpPr>
         <p:spPr>
           <a:xfrm>
-            <a:off x="3474720" y="2039112"/>
-            <a:ext cx="2313432" cy="411480"/>
+            <a:off x="3493008" y="2057400"/>
+            <a:ext cx="2276856" cy="457200"/>
           </a:xfrm>
           <a:prstGeom prst="rect">
             <a:avLst/>
@@ -12141,9 +11499,9 @@
               <a:buNone/>
             </a:pPr>
             <a:r>
-              <a:rPr lang="en-US" sz="2000" b="1" dirty="0">
-                <a:solidFill>
-                  <a:srgbClr val="0F172A"/>
+              <a:rPr lang="en-US" sz="2100" b="1" dirty="0">
+                <a:solidFill>
+                  <a:srgbClr val="0A1F33"/>
                 </a:solidFill>
                 <a:latin typeface="Cambria" pitchFamily="34" charset="0"/>
                 <a:ea typeface="Cambria" pitchFamily="34" charset="-122"/>
@@ -12151,7 +11509,7 @@
               </a:rPr>
               <a:t>Rs 3.0 L</a:t>
             </a:r>
-            <a:endParaRPr lang="en-US" sz="2000" dirty="0"/>
+            <a:endParaRPr lang="en-US" sz="2100" dirty="0"/>
           </a:p>
         </p:txBody>
       </p:sp>
@@ -12163,8 +11521,8 @@
         </p:nvSpPr>
         <p:spPr>
           <a:xfrm>
-            <a:off x="3474720" y="2478024"/>
-            <a:ext cx="2313432" cy="365760"/>
+            <a:off x="3493008" y="2514600"/>
+            <a:ext cx="2276856" cy="365760"/>
           </a:xfrm>
           <a:prstGeom prst="rect">
             <a:avLst/>
@@ -12182,7 +11540,7 @@
             <a:r>
               <a:rPr lang="en-US" sz="900" dirty="0">
                 <a:solidFill>
-                  <a:srgbClr val="94A3B8"/>
+                  <a:srgbClr val="9AA7B4"/>
                 </a:solidFill>
                 <a:latin typeface="Calibri" pitchFamily="34" charset="0"/>
                 <a:ea typeface="Calibri" pitchFamily="34" charset="-122"/>
@@ -12203,19 +11561,17 @@
         <p:spPr>
           <a:xfrm>
             <a:off x="6089904" y="1691640"/>
-            <a:ext cx="2606040" cy="1280160"/>
-          </a:xfrm>
-          <a:prstGeom prst="roundRect">
-            <a:avLst>
-              <a:gd name="adj" fmla="val 4286"/>
-            </a:avLst>
+            <a:ext cx="2606040" cy="1325880"/>
+          </a:xfrm>
+          <a:prstGeom prst="rect">
+            <a:avLst/>
           </a:prstGeom>
           <a:solidFill>
-            <a:srgbClr val="F5F8FB"/>
+            <a:srgbClr val="F6F8FA"/>
           </a:solidFill>
           <a:ln w="12700">
             <a:solidFill>
-              <a:srgbClr val="E2E8F0"/>
+              <a:srgbClr val="E6E9EE"/>
             </a:solidFill>
             <a:prstDash val="solid"/>
           </a:ln>
@@ -12229,8 +11585,8 @@
         </p:nvSpPr>
         <p:spPr>
           <a:xfrm>
-            <a:off x="6236208" y="1801368"/>
-            <a:ext cx="2313432" cy="274320"/>
+            <a:off x="6254496" y="1819656"/>
+            <a:ext cx="2276856" cy="274320"/>
           </a:xfrm>
           <a:prstGeom prst="rect">
             <a:avLst/>
@@ -12248,7 +11604,7 @@
             <a:r>
               <a:rPr lang="en-US" sz="1050" dirty="0">
                 <a:solidFill>
-                  <a:srgbClr val="64748B"/>
+                  <a:srgbClr val="5B6B7B"/>
                 </a:solidFill>
                 <a:latin typeface="Calibri" pitchFamily="34" charset="0"/>
                 <a:ea typeface="Calibri" pitchFamily="34" charset="-122"/>
@@ -12268,8 +11624,8 @@
         </p:nvSpPr>
         <p:spPr>
           <a:xfrm>
-            <a:off x="6236208" y="2039112"/>
-            <a:ext cx="2313432" cy="411480"/>
+            <a:off x="6254496" y="2057400"/>
+            <a:ext cx="2276856" cy="457200"/>
           </a:xfrm>
           <a:prstGeom prst="rect">
             <a:avLst/>
@@ -12285,9 +11641,9 @@
               <a:buNone/>
             </a:pPr>
             <a:r>
-              <a:rPr lang="en-US" sz="2000" b="1" dirty="0">
-                <a:solidFill>
-                  <a:srgbClr val="0F172A"/>
+              <a:rPr lang="en-US" sz="2100" b="1" dirty="0">
+                <a:solidFill>
+                  <a:srgbClr val="0A1F33"/>
                 </a:solidFill>
                 <a:latin typeface="Cambria" pitchFamily="34" charset="0"/>
                 <a:ea typeface="Cambria" pitchFamily="34" charset="-122"/>
@@ -12295,7 +11651,7 @@
               </a:rPr>
               <a:t>Rs 1.5 L</a:t>
             </a:r>
-            <a:endParaRPr lang="en-US" sz="2000" dirty="0"/>
+            <a:endParaRPr lang="en-US" sz="2100" dirty="0"/>
           </a:p>
         </p:txBody>
       </p:sp>
@@ -12307,8 +11663,8 @@
         </p:nvSpPr>
         <p:spPr>
           <a:xfrm>
-            <a:off x="6236208" y="2478024"/>
-            <a:ext cx="2313432" cy="365760"/>
+            <a:off x="6254496" y="2514600"/>
+            <a:ext cx="2276856" cy="365760"/>
           </a:xfrm>
           <a:prstGeom prst="rect">
             <a:avLst/>
@@ -12326,7 +11682,7 @@
             <a:r>
               <a:rPr lang="en-US" sz="900" dirty="0">
                 <a:solidFill>
-                  <a:srgbClr val="94A3B8"/>
+                  <a:srgbClr val="9AA7B4"/>
                 </a:solidFill>
                 <a:latin typeface="Calibri" pitchFamily="34" charset="0"/>
                 <a:ea typeface="Calibri" pitchFamily="34" charset="-122"/>
@@ -12347,19 +11703,17 @@
         <p:spPr>
           <a:xfrm>
             <a:off x="8851392" y="1691640"/>
-            <a:ext cx="2606040" cy="1280160"/>
-          </a:xfrm>
-          <a:prstGeom prst="roundRect">
-            <a:avLst>
-              <a:gd name="adj" fmla="val 4286"/>
-            </a:avLst>
+            <a:ext cx="2606040" cy="1325880"/>
+          </a:xfrm>
+          <a:prstGeom prst="rect">
+            <a:avLst/>
           </a:prstGeom>
           <a:solidFill>
-            <a:srgbClr val="F5F8FB"/>
+            <a:srgbClr val="F6F8FA"/>
           </a:solidFill>
           <a:ln w="12700">
             <a:solidFill>
-              <a:srgbClr val="E2E8F0"/>
+              <a:srgbClr val="E6E9EE"/>
             </a:solidFill>
             <a:prstDash val="solid"/>
           </a:ln>
@@ -12373,8 +11727,8 @@
         </p:nvSpPr>
         <p:spPr>
           <a:xfrm>
-            <a:off x="8997696" y="1801368"/>
-            <a:ext cx="2313432" cy="274320"/>
+            <a:off x="9015984" y="1819656"/>
+            <a:ext cx="2276856" cy="274320"/>
           </a:xfrm>
           <a:prstGeom prst="rect">
             <a:avLst/>
@@ -12392,7 +11746,7 @@
             <a:r>
               <a:rPr lang="en-US" sz="1050" dirty="0">
                 <a:solidFill>
-                  <a:srgbClr val="64748B"/>
+                  <a:srgbClr val="5B6B7B"/>
                 </a:solidFill>
                 <a:latin typeface="Calibri" pitchFamily="34" charset="0"/>
                 <a:ea typeface="Calibri" pitchFamily="34" charset="-122"/>
@@ -12412,8 +11766,8 @@
         </p:nvSpPr>
         <p:spPr>
           <a:xfrm>
-            <a:off x="8997696" y="2039112"/>
-            <a:ext cx="2313432" cy="411480"/>
+            <a:off x="9015984" y="2057400"/>
+            <a:ext cx="2276856" cy="457200"/>
           </a:xfrm>
           <a:prstGeom prst="rect">
             <a:avLst/>
@@ -12429,9 +11783,9 @@
               <a:buNone/>
             </a:pPr>
             <a:r>
-              <a:rPr lang="en-US" sz="2000" b="1" dirty="0">
-                <a:solidFill>
-                  <a:srgbClr val="0F172A"/>
+              <a:rPr lang="en-US" sz="2100" b="1" dirty="0">
+                <a:solidFill>
+                  <a:srgbClr val="0A1F33"/>
                 </a:solidFill>
                 <a:latin typeface="Cambria" pitchFamily="34" charset="0"/>
                 <a:ea typeface="Cambria" pitchFamily="34" charset="-122"/>
@@ -12439,7 +11793,7 @@
               </a:rPr>
               <a:t>16 / mo</a:t>
             </a:r>
-            <a:endParaRPr lang="en-US" sz="2000" dirty="0"/>
+            <a:endParaRPr lang="en-US" sz="2100" dirty="0"/>
           </a:p>
         </p:txBody>
       </p:sp>
@@ -12451,8 +11805,8 @@
         </p:nvSpPr>
         <p:spPr>
           <a:xfrm>
-            <a:off x="8997696" y="2478024"/>
-            <a:ext cx="2313432" cy="365760"/>
+            <a:off x="9015984" y="2514600"/>
+            <a:ext cx="2276856" cy="365760"/>
           </a:xfrm>
           <a:prstGeom prst="rect">
             <a:avLst/>
@@ -12470,7 +11824,7 @@
             <a:r>
               <a:rPr lang="en-US" sz="900" dirty="0">
                 <a:solidFill>
-                  <a:srgbClr val="94A3B8"/>
+                  <a:srgbClr val="9AA7B4"/>
                 </a:solidFill>
                 <a:latin typeface="Calibri" pitchFamily="34" charset="0"/>
                 <a:ea typeface="Calibri" pitchFamily="34" charset="-122"/>
@@ -12490,7 +11844,7 @@
         </p:nvSpPr>
         <p:spPr>
           <a:xfrm>
-            <a:off x="566928" y="3108960"/>
+            <a:off x="566928" y="3154680"/>
             <a:ext cx="5486400" cy="914400"/>
           </a:xfrm>
           <a:prstGeom prst="rect">
@@ -12509,7 +11863,7 @@
             <a:r>
               <a:rPr lang="en-US" sz="1350" dirty="0">
                 <a:solidFill>
-                  <a:srgbClr val="334155"/>
+                  <a:srgbClr val="2B3F52"/>
                 </a:solidFill>
                 <a:latin typeface="Calibri" pitchFamily="34" charset="0"/>
                 <a:ea typeface="Calibri" pitchFamily="34" charset="-122"/>
@@ -12529,20 +11883,18 @@
         </p:nvSpPr>
         <p:spPr>
           <a:xfrm>
-            <a:off x="566928" y="4069080"/>
+            <a:off x="566928" y="4114800"/>
             <a:ext cx="2606040" cy="1097280"/>
           </a:xfrm>
-          <a:prstGeom prst="roundRect">
-            <a:avLst>
-              <a:gd name="adj" fmla="val 5000"/>
-            </a:avLst>
+          <a:prstGeom prst="rect">
+            <a:avLst/>
           </a:prstGeom>
           <a:solidFill>
-            <a:srgbClr val="F5F8FB"/>
+            <a:srgbClr val="F6F8FA"/>
           </a:solidFill>
           <a:ln w="12700">
             <a:solidFill>
-              <a:srgbClr val="E2E8F0"/>
+              <a:srgbClr val="E6E9EE"/>
             </a:solidFill>
             <a:prstDash val="solid"/>
           </a:ln>
@@ -12556,8 +11908,8 @@
         </p:nvSpPr>
         <p:spPr>
           <a:xfrm>
-            <a:off x="713232" y="4178808"/>
-            <a:ext cx="2313432" cy="274320"/>
+            <a:off x="731520" y="4242816"/>
+            <a:ext cx="2276856" cy="274320"/>
           </a:xfrm>
           <a:prstGeom prst="rect">
             <a:avLst/>
@@ -12575,7 +11927,7 @@
             <a:r>
               <a:rPr lang="en-US" sz="1050" dirty="0">
                 <a:solidFill>
-                  <a:srgbClr val="64748B"/>
+                  <a:srgbClr val="5B6B7B"/>
                 </a:solidFill>
                 <a:latin typeface="Calibri" pitchFamily="34" charset="0"/>
                 <a:ea typeface="Calibri" pitchFamily="34" charset="-122"/>
@@ -12595,8 +11947,8 @@
         </p:nvSpPr>
         <p:spPr>
           <a:xfrm>
-            <a:off x="713232" y="4416552"/>
-            <a:ext cx="2313432" cy="411480"/>
+            <a:off x="731520" y="4480560"/>
+            <a:ext cx="2276856" cy="457200"/>
           </a:xfrm>
           <a:prstGeom prst="rect">
             <a:avLst/>
@@ -12612,7 +11964,7 @@
               <a:buNone/>
             </a:pPr>
             <a:r>
-              <a:rPr lang="en-US" sz="2000" b="1" dirty="0">
+              <a:rPr lang="en-US" sz="2100" b="1" dirty="0">
                 <a:solidFill>
                   <a:srgbClr val="0F766E"/>
                 </a:solidFill>
@@ -12622,7 +11974,7 @@
               </a:rPr>
               <a:t>Rs 5.76 Cr</a:t>
             </a:r>
-            <a:endParaRPr lang="en-US" sz="2000" dirty="0"/>
+            <a:endParaRPr lang="en-US" sz="2100" dirty="0"/>
           </a:p>
         </p:txBody>
       </p:sp>
@@ -12634,8 +11986,8 @@
         </p:nvSpPr>
         <p:spPr>
           <a:xfrm>
-            <a:off x="713232" y="4855464"/>
-            <a:ext cx="2313432" cy="365760"/>
+            <a:off x="731520" y="4937760"/>
+            <a:ext cx="2276856" cy="365760"/>
           </a:xfrm>
           <a:prstGeom prst="rect">
             <a:avLst/>
@@ -12653,7 +12005,7 @@
             <a:r>
               <a:rPr lang="en-US" sz="900" dirty="0">
                 <a:solidFill>
-                  <a:srgbClr val="94A3B8"/>
+                  <a:srgbClr val="9AA7B4"/>
                 </a:solidFill>
                 <a:latin typeface="Calibri" pitchFamily="34" charset="0"/>
                 <a:ea typeface="Calibri" pitchFamily="34" charset="-122"/>
@@ -12673,20 +12025,18 @@
         </p:nvSpPr>
         <p:spPr>
           <a:xfrm>
-            <a:off x="3328416" y="4069080"/>
+            <a:off x="3328416" y="4114800"/>
             <a:ext cx="2606040" cy="1097280"/>
           </a:xfrm>
-          <a:prstGeom prst="roundRect">
-            <a:avLst>
-              <a:gd name="adj" fmla="val 5000"/>
-            </a:avLst>
+          <a:prstGeom prst="rect">
+            <a:avLst/>
           </a:prstGeom>
           <a:solidFill>
-            <a:srgbClr val="F5F8FB"/>
+            <a:srgbClr val="F6F8FA"/>
           </a:solidFill>
           <a:ln w="12700">
             <a:solidFill>
-              <a:srgbClr val="E2E8F0"/>
+              <a:srgbClr val="E6E9EE"/>
             </a:solidFill>
             <a:prstDash val="solid"/>
           </a:ln>
@@ -12700,8 +12050,8 @@
         </p:nvSpPr>
         <p:spPr>
           <a:xfrm>
-            <a:off x="3474720" y="4178808"/>
-            <a:ext cx="2313432" cy="274320"/>
+            <a:off x="3493008" y="4242816"/>
+            <a:ext cx="2276856" cy="274320"/>
           </a:xfrm>
           <a:prstGeom prst="rect">
             <a:avLst/>
@@ -12719,7 +12069,7 @@
             <a:r>
               <a:rPr lang="en-US" sz="1050" dirty="0">
                 <a:solidFill>
-                  <a:srgbClr val="64748B"/>
+                  <a:srgbClr val="5B6B7B"/>
                 </a:solidFill>
                 <a:latin typeface="Calibri" pitchFamily="34" charset="0"/>
                 <a:ea typeface="Calibri" pitchFamily="34" charset="-122"/>
@@ -12739,8 +12089,8 @@
         </p:nvSpPr>
         <p:spPr>
           <a:xfrm>
-            <a:off x="3474720" y="4416552"/>
-            <a:ext cx="2313432" cy="411480"/>
+            <a:off x="3493008" y="4480560"/>
+            <a:ext cx="2276856" cy="457200"/>
           </a:xfrm>
           <a:prstGeom prst="rect">
             <a:avLst/>
@@ -12756,7 +12106,7 @@
               <a:buNone/>
             </a:pPr>
             <a:r>
-              <a:rPr lang="en-US" sz="2000" b="1" dirty="0">
+              <a:rPr lang="en-US" sz="2100" b="1" dirty="0">
                 <a:solidFill>
                   <a:srgbClr val="0F766E"/>
                 </a:solidFill>
@@ -12766,7 +12116,7 @@
               </a:rPr>
               <a:t>Rs 2.88 Cr/yr</a:t>
             </a:r>
-            <a:endParaRPr lang="en-US" sz="2000" dirty="0"/>
+            <a:endParaRPr lang="en-US" sz="2100" dirty="0"/>
           </a:p>
         </p:txBody>
       </p:sp>
@@ -12778,8 +12128,8 @@
         </p:nvSpPr>
         <p:spPr>
           <a:xfrm>
-            <a:off x="3474720" y="4855464"/>
-            <a:ext cx="2313432" cy="365760"/>
+            <a:off x="3493008" y="4937760"/>
+            <a:ext cx="2276856" cy="365760"/>
           </a:xfrm>
           <a:prstGeom prst="rect">
             <a:avLst/>
@@ -12797,7 +12147,7 @@
             <a:r>
               <a:rPr lang="en-US" sz="900" dirty="0">
                 <a:solidFill>
-                  <a:srgbClr val="94A3B8"/>
+                  <a:srgbClr val="9AA7B4"/>
                 </a:solidFill>
                 <a:latin typeface="Calibri" pitchFamily="34" charset="0"/>
                 <a:ea typeface="Calibri" pitchFamily="34" charset="-122"/>
@@ -12833,8 +12183,8 @@
         </p:nvSpPr>
         <p:spPr>
           <a:xfrm>
-            <a:off x="566928" y="6446520"/>
-            <a:ext cx="11064240" cy="301752"/>
+            <a:off x="566928" y="6455664"/>
+            <a:ext cx="11064240" cy="292608"/>
           </a:xfrm>
           <a:prstGeom prst="rect">
             <a:avLst/>
@@ -12850,9 +12200,9 @@
               <a:buNone/>
             </a:pPr>
             <a:r>
-              <a:rPr lang="en-US" sz="900" i="1" dirty="0">
-                <a:solidFill>
-                  <a:srgbClr val="94A3B8"/>
+              <a:rPr lang="en-US" sz="900" dirty="0">
+                <a:solidFill>
+                  <a:srgbClr val="9AA7B4"/>
                 </a:solidFill>
                 <a:latin typeface="Calibri" pitchFamily="34" charset="0"/>
                 <a:ea typeface="Calibri" pitchFamily="34" charset="-122"/>
@@ -12904,7 +12254,7 @@
         </p:nvSpPr>
         <p:spPr>
           <a:xfrm>
-            <a:off x="11430000" y="402336"/>
+            <a:off x="11430000" y="420624"/>
             <a:ext cx="365760" cy="274320"/>
           </a:xfrm>
           <a:prstGeom prst="rect">
@@ -12923,7 +12273,7 @@
             <a:r>
               <a:rPr lang="en-US" sz="1100" b="1" dirty="0">
                 <a:solidFill>
-                  <a:srgbClr val="94A3B8"/>
+                  <a:srgbClr val="9AA7B4"/>
                 </a:solidFill>
                 <a:latin typeface="Calibri" pitchFamily="34" charset="0"/>
                 <a:ea typeface="Calibri" pitchFamily="34" charset="-122"/>
@@ -12943,7 +12293,7 @@
         </p:nvSpPr>
         <p:spPr>
           <a:xfrm>
-            <a:off x="566928" y="438912"/>
+            <a:off x="566928" y="457200"/>
             <a:ext cx="10058400" cy="274320"/>
           </a:xfrm>
           <a:prstGeom prst="rect">
@@ -12962,13 +12312,13 @@
             <a:r>
               <a:rPr lang="en-US" sz="1100" b="1" spc="200" kern="0" dirty="0">
                 <a:solidFill>
-                  <a:srgbClr val="2B5CC4"/>
+                  <a:srgbClr val="0F766E"/>
                 </a:solidFill>
                 <a:latin typeface="Calibri" pitchFamily="34" charset="0"/>
                 <a:ea typeface="Calibri" pitchFamily="34" charset="-122"/>
                 <a:cs typeface="Calibri" pitchFamily="34" charset="-120"/>
               </a:rPr>
-              <a:t>THREE SCENARIOS, FY27</a:t>
+              <a:t>THE THREE SCENARIOS</a:t>
             </a:r>
             <a:endParaRPr lang="en-US" sz="1100" dirty="0"/>
           </a:p>
@@ -12982,8 +12332,8 @@
         </p:nvSpPr>
         <p:spPr>
           <a:xfrm>
-            <a:off x="566928" y="694944"/>
-            <a:ext cx="11064240" cy="548640"/>
+            <a:off x="566928" y="713232"/>
+            <a:ext cx="11064240" cy="640080"/>
           </a:xfrm>
           <a:prstGeom prst="rect">
             <a:avLst/>
@@ -12999,17 +12349,17 @@
               <a:buNone/>
             </a:pPr>
             <a:r>
-              <a:rPr lang="en-US" sz="2900" b="1" dirty="0">
-                <a:solidFill>
-                  <a:srgbClr val="0F172A"/>
+              <a:rPr lang="en-US" sz="2700" b="1" dirty="0">
+                <a:solidFill>
+                  <a:srgbClr val="0A1F33"/>
                 </a:solidFill>
                 <a:latin typeface="Cambria" pitchFamily="34" charset="0"/>
                 <a:ea typeface="Cambria" pitchFamily="34" charset="-122"/>
                 <a:cs typeface="Cambria" pitchFamily="34" charset="-120"/>
               </a:rPr>
-              <a:t>How the year lands, by BLR licence timing</a:t>
-            </a:r>
-            <a:endParaRPr lang="en-US" sz="2900" dirty="0"/>
+              <a:t>BLR timing alone decides whether FY27 breaks even</a:t>
+            </a:r>
+            <a:endParaRPr lang="en-US" sz="2700" dirty="0"/>
           </a:p>
         </p:txBody>
       </p:sp>
@@ -13021,7 +12371,7 @@
         </p:nvSpPr>
         <p:spPr>
           <a:xfrm>
-            <a:off x="566928" y="1298448"/>
+            <a:off x="566928" y="1353312"/>
             <a:ext cx="11064240" cy="457200"/>
           </a:xfrm>
           <a:prstGeom prst="rect">
@@ -13040,7 +12390,7 @@
             <a:r>
               <a:rPr lang="en-US" sz="1400" dirty="0">
                 <a:solidFill>
-                  <a:srgbClr val="64748B"/>
+                  <a:srgbClr val="5B6B7B"/>
                 </a:solidFill>
                 <a:latin typeface="Calibri" pitchFamily="34" charset="0"/>
                 <a:ea typeface="Calibri" pitchFamily="34" charset="-122"/>
@@ -13063,15 +12413,13 @@
             <a:off x="566928" y="1965960"/>
             <a:ext cx="3520440" cy="3383280"/>
           </a:xfrm>
-          <a:prstGeom prst="roundRect">
-            <a:avLst>
-              <a:gd name="adj" fmla="val 2162"/>
-            </a:avLst>
+          <a:prstGeom prst="rect">
+            <a:avLst/>
           </a:prstGeom>
           <a:solidFill>
-            <a:srgbClr val="F0FAF8"/>
+            <a:srgbClr val="F3FAF8"/>
           </a:solidFill>
-          <a:ln w="22225">
+          <a:ln w="25400">
             <a:solidFill>
               <a:srgbClr val="0F766E"/>
             </a:solidFill>
@@ -13087,16 +12435,14 @@
         </p:nvSpPr>
         <p:spPr>
           <a:xfrm>
-            <a:off x="749808" y="2148840"/>
+            <a:off x="749808" y="2167128"/>
             <a:ext cx="1417320" cy="292608"/>
           </a:xfrm>
-          <a:prstGeom prst="roundRect">
-            <a:avLst>
-              <a:gd name="adj" fmla="val 31250"/>
-            </a:avLst>
+          <a:prstGeom prst="rect">
+            <a:avLst/>
           </a:prstGeom>
           <a:solidFill>
-            <a:srgbClr val="D7F0EB"/>
+            <a:srgbClr val="E2F2EF"/>
           </a:solidFill>
           <a:ln/>
         </p:spPr>
@@ -13109,7 +12455,7 @@
         </p:nvSpPr>
         <p:spPr>
           <a:xfrm>
-            <a:off x="749808" y="2148840"/>
+            <a:off x="749808" y="2167128"/>
             <a:ext cx="1417320" cy="292608"/>
           </a:xfrm>
           <a:prstGeom prst="rect">
@@ -13148,7 +12494,7 @@
         </p:nvSpPr>
         <p:spPr>
           <a:xfrm>
-            <a:off x="749808" y="2514600"/>
+            <a:off x="749808" y="2532888"/>
             <a:ext cx="3108960" cy="320040"/>
           </a:xfrm>
           <a:prstGeom prst="rect">
@@ -13167,7 +12513,7 @@
             <a:r>
               <a:rPr lang="en-US" sz="1450" b="1" dirty="0">
                 <a:solidFill>
-                  <a:srgbClr val="0F172A"/>
+                  <a:srgbClr val="0A1F33"/>
                 </a:solidFill>
                 <a:latin typeface="Cambria" pitchFamily="34" charset="0"/>
                 <a:ea typeface="Cambria" pitchFamily="34" charset="-122"/>
@@ -13187,7 +12533,7 @@
         </p:nvSpPr>
         <p:spPr>
           <a:xfrm>
-            <a:off x="749808" y="2898648"/>
+            <a:off x="749808" y="2916936"/>
             <a:ext cx="1920240" cy="274320"/>
           </a:xfrm>
           <a:prstGeom prst="rect">
@@ -13206,7 +12552,7 @@
             <a:r>
               <a:rPr lang="en-US" sz="1150" dirty="0">
                 <a:solidFill>
-                  <a:srgbClr val="64748B"/>
+                  <a:srgbClr val="5B6B7B"/>
                 </a:solidFill>
                 <a:latin typeface="Calibri" pitchFamily="34" charset="0"/>
                 <a:ea typeface="Calibri" pitchFamily="34" charset="-122"/>
@@ -13226,7 +12572,7 @@
         </p:nvSpPr>
         <p:spPr>
           <a:xfrm>
-            <a:off x="2350008" y="2898648"/>
+            <a:off x="2350008" y="2916936"/>
             <a:ext cx="1554480" cy="274320"/>
           </a:xfrm>
           <a:prstGeom prst="rect">
@@ -13245,7 +12591,7 @@
             <a:r>
               <a:rPr lang="en-US" sz="1150" b="1" dirty="0">
                 <a:solidFill>
-                  <a:srgbClr val="0F172A"/>
+                  <a:srgbClr val="0A1F33"/>
                 </a:solidFill>
                 <a:latin typeface="Calibri" pitchFamily="34" charset="0"/>
                 <a:ea typeface="Calibri" pitchFamily="34" charset="-122"/>
@@ -13265,7 +12611,7 @@
         </p:nvSpPr>
         <p:spPr>
           <a:xfrm>
-            <a:off x="749808" y="3218688"/>
+            <a:off x="749808" y="3236976"/>
             <a:ext cx="1920240" cy="274320"/>
           </a:xfrm>
           <a:prstGeom prst="rect">
@@ -13284,7 +12630,7 @@
             <a:r>
               <a:rPr lang="en-US" sz="1150" dirty="0">
                 <a:solidFill>
-                  <a:srgbClr val="64748B"/>
+                  <a:srgbClr val="5B6B7B"/>
                 </a:solidFill>
                 <a:latin typeface="Calibri" pitchFamily="34" charset="0"/>
                 <a:ea typeface="Calibri" pitchFamily="34" charset="-122"/>
@@ -13304,7 +12650,7 @@
         </p:nvSpPr>
         <p:spPr>
           <a:xfrm>
-            <a:off x="2350008" y="3218688"/>
+            <a:off x="2350008" y="3236976"/>
             <a:ext cx="1554480" cy="274320"/>
           </a:xfrm>
           <a:prstGeom prst="rect">
@@ -13323,7 +12669,7 @@
             <a:r>
               <a:rPr lang="en-US" sz="1150" b="1" dirty="0">
                 <a:solidFill>
-                  <a:srgbClr val="0F172A"/>
+                  <a:srgbClr val="0A1F33"/>
                 </a:solidFill>
                 <a:latin typeface="Calibri" pitchFamily="34" charset="0"/>
                 <a:ea typeface="Calibri" pitchFamily="34" charset="-122"/>
@@ -13343,7 +12689,7 @@
         </p:nvSpPr>
         <p:spPr>
           <a:xfrm>
-            <a:off x="749808" y="3538728"/>
+            <a:off x="749808" y="3557016"/>
             <a:ext cx="1920240" cy="274320"/>
           </a:xfrm>
           <a:prstGeom prst="rect">
@@ -13362,7 +12708,7 @@
             <a:r>
               <a:rPr lang="en-US" sz="1150" dirty="0">
                 <a:solidFill>
-                  <a:srgbClr val="64748B"/>
+                  <a:srgbClr val="5B6B7B"/>
                 </a:solidFill>
                 <a:latin typeface="Calibri" pitchFamily="34" charset="0"/>
                 <a:ea typeface="Calibri" pitchFamily="34" charset="-122"/>
@@ -13382,7 +12728,7 @@
         </p:nvSpPr>
         <p:spPr>
           <a:xfrm>
-            <a:off x="2350008" y="3538728"/>
+            <a:off x="2350008" y="3557016"/>
             <a:ext cx="1554480" cy="274320"/>
           </a:xfrm>
           <a:prstGeom prst="rect">
@@ -13401,7 +12747,7 @@
             <a:r>
               <a:rPr lang="en-US" sz="1150" b="1" dirty="0">
                 <a:solidFill>
-                  <a:srgbClr val="0F172A"/>
+                  <a:srgbClr val="0A1F33"/>
                 </a:solidFill>
                 <a:latin typeface="Calibri" pitchFamily="34" charset="0"/>
                 <a:ea typeface="Calibri" pitchFamily="34" charset="-122"/>
@@ -13421,7 +12767,7 @@
         </p:nvSpPr>
         <p:spPr>
           <a:xfrm>
-            <a:off x="749808" y="3858768"/>
+            <a:off x="749808" y="3877056"/>
             <a:ext cx="1920240" cy="274320"/>
           </a:xfrm>
           <a:prstGeom prst="rect">
@@ -13440,7 +12786,7 @@
             <a:r>
               <a:rPr lang="en-US" sz="1150" dirty="0">
                 <a:solidFill>
-                  <a:srgbClr val="64748B"/>
+                  <a:srgbClr val="5B6B7B"/>
                 </a:solidFill>
                 <a:latin typeface="Calibri" pitchFamily="34" charset="0"/>
                 <a:ea typeface="Calibri" pitchFamily="34" charset="-122"/>
@@ -13460,7 +12806,7 @@
         </p:nvSpPr>
         <p:spPr>
           <a:xfrm>
-            <a:off x="2350008" y="3858768"/>
+            <a:off x="2350008" y="3877056"/>
             <a:ext cx="1554480" cy="274320"/>
           </a:xfrm>
           <a:prstGeom prst="rect">
@@ -13479,7 +12825,7 @@
             <a:r>
               <a:rPr lang="en-US" sz="1150" b="1" dirty="0">
                 <a:solidFill>
-                  <a:srgbClr val="0F172A"/>
+                  <a:srgbClr val="0A1F33"/>
                 </a:solidFill>
                 <a:latin typeface="Calibri" pitchFamily="34" charset="0"/>
                 <a:ea typeface="Calibri" pitchFamily="34" charset="-122"/>
@@ -13499,7 +12845,7 @@
         </p:nvSpPr>
         <p:spPr>
           <a:xfrm>
-            <a:off x="749808" y="4251960"/>
+            <a:off x="749808" y="4270248"/>
             <a:ext cx="3108960" cy="411480"/>
           </a:xfrm>
           <a:prstGeom prst="rect">
@@ -13516,7 +12862,7 @@
               <a:buNone/>
             </a:pPr>
             <a:r>
-              <a:rPr lang="en-US" sz="1900" b="1" dirty="0">
+              <a:rPr lang="en-US" sz="1800" b="1" dirty="0">
                 <a:solidFill>
                   <a:srgbClr val="0F766E"/>
                 </a:solidFill>
@@ -13526,7 +12872,7 @@
               </a:rPr>
               <a:t>Net +Rs 0.31 Cr</a:t>
             </a:r>
-            <a:endParaRPr lang="en-US" sz="1900" dirty="0"/>
+            <a:endParaRPr lang="en-US" sz="1800" dirty="0"/>
           </a:p>
         </p:txBody>
       </p:sp>
@@ -13538,7 +12884,7 @@
         </p:nvSpPr>
         <p:spPr>
           <a:xfrm>
-            <a:off x="749808" y="4709160"/>
+            <a:off x="749808" y="4727448"/>
             <a:ext cx="3108960" cy="457200"/>
           </a:xfrm>
           <a:prstGeom prst="rect">
@@ -13557,7 +12903,7 @@
             <a:r>
               <a:rPr lang="en-US" sz="1100" dirty="0">
                 <a:solidFill>
-                  <a:srgbClr val="64748B"/>
+                  <a:srgbClr val="5B6B7B"/>
                 </a:solidFill>
                 <a:latin typeface="Calibri" pitchFamily="34" charset="0"/>
                 <a:ea typeface="Calibri" pitchFamily="34" charset="-122"/>
@@ -13580,17 +12926,15 @@
             <a:off x="4270248" y="1965960"/>
             <a:ext cx="3520440" cy="3383280"/>
           </a:xfrm>
-          <a:prstGeom prst="roundRect">
-            <a:avLst>
-              <a:gd name="adj" fmla="val 2162"/>
-            </a:avLst>
+          <a:prstGeom prst="rect">
+            <a:avLst/>
           </a:prstGeom>
           <a:solidFill>
             <a:srgbClr val="FFFFFF"/>
           </a:solidFill>
           <a:ln w="12700">
             <a:solidFill>
-              <a:srgbClr val="E2E8F0"/>
+              <a:srgbClr val="E6E9EE"/>
             </a:solidFill>
             <a:prstDash val="solid"/>
           </a:ln>
@@ -13604,16 +12948,14 @@
         </p:nvSpPr>
         <p:spPr>
           <a:xfrm>
-            <a:off x="4453128" y="2148840"/>
+            <a:off x="4453128" y="2167128"/>
             <a:ext cx="1417320" cy="292608"/>
           </a:xfrm>
-          <a:prstGeom prst="roundRect">
-            <a:avLst>
-              <a:gd name="adj" fmla="val 31250"/>
-            </a:avLst>
+          <a:prstGeom prst="rect">
+            <a:avLst/>
           </a:prstGeom>
           <a:solidFill>
-            <a:srgbClr val="E6ECFB"/>
+            <a:srgbClr val="E7EDF5"/>
           </a:solidFill>
           <a:ln/>
         </p:spPr>
@@ -13626,7 +12968,7 @@
         </p:nvSpPr>
         <p:spPr>
           <a:xfrm>
-            <a:off x="4453128" y="2148840"/>
+            <a:off x="4453128" y="2167128"/>
             <a:ext cx="1417320" cy="292608"/>
           </a:xfrm>
           <a:prstGeom prst="rect">
@@ -13645,7 +12987,7 @@
             <a:r>
               <a:rPr lang="en-US" sz="1000" b="1" dirty="0">
                 <a:solidFill>
-                  <a:srgbClr val="2B5CC4"/>
+                  <a:srgbClr val="1E4E79"/>
                 </a:solidFill>
                 <a:latin typeface="Calibri" pitchFamily="34" charset="0"/>
                 <a:ea typeface="Calibri" pitchFamily="34" charset="-122"/>
@@ -13665,7 +13007,7 @@
         </p:nvSpPr>
         <p:spPr>
           <a:xfrm>
-            <a:off x="4453128" y="2514600"/>
+            <a:off x="4453128" y="2532888"/>
             <a:ext cx="3108960" cy="320040"/>
           </a:xfrm>
           <a:prstGeom prst="rect">
@@ -13684,7 +13026,7 @@
             <a:r>
               <a:rPr lang="en-US" sz="1450" b="1" dirty="0">
                 <a:solidFill>
-                  <a:srgbClr val="0F172A"/>
+                  <a:srgbClr val="0A1F33"/>
                 </a:solidFill>
                 <a:latin typeface="Cambria" pitchFamily="34" charset="0"/>
                 <a:ea typeface="Cambria" pitchFamily="34" charset="-122"/>
@@ -13704,7 +13046,7 @@
         </p:nvSpPr>
         <p:spPr>
           <a:xfrm>
-            <a:off x="4453128" y="2898648"/>
+            <a:off x="4453128" y="2916936"/>
             <a:ext cx="1920240" cy="274320"/>
           </a:xfrm>
           <a:prstGeom prst="rect">
@@ -13723,7 +13065,7 @@
             <a:r>
               <a:rPr lang="en-US" sz="1150" dirty="0">
                 <a:solidFill>
-                  <a:srgbClr val="64748B"/>
+                  <a:srgbClr val="5B6B7B"/>
                 </a:solidFill>
                 <a:latin typeface="Calibri" pitchFamily="34" charset="0"/>
                 <a:ea typeface="Calibri" pitchFamily="34" charset="-122"/>
@@ -13743,7 +13085,7 @@
         </p:nvSpPr>
         <p:spPr>
           <a:xfrm>
-            <a:off x="6053328" y="2898648"/>
+            <a:off x="6053328" y="2916936"/>
             <a:ext cx="1554480" cy="274320"/>
           </a:xfrm>
           <a:prstGeom prst="rect">
@@ -13762,7 +13104,7 @@
             <a:r>
               <a:rPr lang="en-US" sz="1150" b="1" dirty="0">
                 <a:solidFill>
-                  <a:srgbClr val="0F172A"/>
+                  <a:srgbClr val="0A1F33"/>
                 </a:solidFill>
                 <a:latin typeface="Calibri" pitchFamily="34" charset="0"/>
                 <a:ea typeface="Calibri" pitchFamily="34" charset="-122"/>
@@ -13782,7 +13124,7 @@
         </p:nvSpPr>
         <p:spPr>
           <a:xfrm>
-            <a:off x="4453128" y="3218688"/>
+            <a:off x="4453128" y="3236976"/>
             <a:ext cx="1920240" cy="274320"/>
           </a:xfrm>
           <a:prstGeom prst="rect">
@@ -13801,7 +13143,7 @@
             <a:r>
               <a:rPr lang="en-US" sz="1150" dirty="0">
                 <a:solidFill>
-                  <a:srgbClr val="64748B"/>
+                  <a:srgbClr val="5B6B7B"/>
                 </a:solidFill>
                 <a:latin typeface="Calibri" pitchFamily="34" charset="0"/>
                 <a:ea typeface="Calibri" pitchFamily="34" charset="-122"/>
@@ -13821,7 +13163,7 @@
         </p:nvSpPr>
         <p:spPr>
           <a:xfrm>
-            <a:off x="6053328" y="3218688"/>
+            <a:off x="6053328" y="3236976"/>
             <a:ext cx="1554480" cy="274320"/>
           </a:xfrm>
           <a:prstGeom prst="rect">
@@ -13840,7 +13182,7 @@
             <a:r>
               <a:rPr lang="en-US" sz="1150" b="1" dirty="0">
                 <a:solidFill>
-                  <a:srgbClr val="0F172A"/>
+                  <a:srgbClr val="0A1F33"/>
                 </a:solidFill>
                 <a:latin typeface="Calibri" pitchFamily="34" charset="0"/>
                 <a:ea typeface="Calibri" pitchFamily="34" charset="-122"/>
@@ -13860,7 +13202,7 @@
         </p:nvSpPr>
         <p:spPr>
           <a:xfrm>
-            <a:off x="4453128" y="3538728"/>
+            <a:off x="4453128" y="3557016"/>
             <a:ext cx="1920240" cy="274320"/>
           </a:xfrm>
           <a:prstGeom prst="rect">
@@ -13879,7 +13221,7 @@
             <a:r>
               <a:rPr lang="en-US" sz="1150" dirty="0">
                 <a:solidFill>
-                  <a:srgbClr val="64748B"/>
+                  <a:srgbClr val="5B6B7B"/>
                 </a:solidFill>
                 <a:latin typeface="Calibri" pitchFamily="34" charset="0"/>
                 <a:ea typeface="Calibri" pitchFamily="34" charset="-122"/>
@@ -13899,7 +13241,7 @@
         </p:nvSpPr>
         <p:spPr>
           <a:xfrm>
-            <a:off x="6053328" y="3538728"/>
+            <a:off x="6053328" y="3557016"/>
             <a:ext cx="1554480" cy="274320"/>
           </a:xfrm>
           <a:prstGeom prst="rect">
@@ -13918,7 +13260,7 @@
             <a:r>
               <a:rPr lang="en-US" sz="1150" b="1" dirty="0">
                 <a:solidFill>
-                  <a:srgbClr val="0F172A"/>
+                  <a:srgbClr val="0A1F33"/>
                 </a:solidFill>
                 <a:latin typeface="Calibri" pitchFamily="34" charset="0"/>
                 <a:ea typeface="Calibri" pitchFamily="34" charset="-122"/>
@@ -13938,7 +13280,7 @@
         </p:nvSpPr>
         <p:spPr>
           <a:xfrm>
-            <a:off x="4453128" y="3858768"/>
+            <a:off x="4453128" y="3877056"/>
             <a:ext cx="1920240" cy="274320"/>
           </a:xfrm>
           <a:prstGeom prst="rect">
@@ -13957,7 +13299,7 @@
             <a:r>
               <a:rPr lang="en-US" sz="1150" dirty="0">
                 <a:solidFill>
-                  <a:srgbClr val="64748B"/>
+                  <a:srgbClr val="5B6B7B"/>
                 </a:solidFill>
                 <a:latin typeface="Calibri" pitchFamily="34" charset="0"/>
                 <a:ea typeface="Calibri" pitchFamily="34" charset="-122"/>
@@ -13977,7 +13319,7 @@
         </p:nvSpPr>
         <p:spPr>
           <a:xfrm>
-            <a:off x="6053328" y="3858768"/>
+            <a:off x="6053328" y="3877056"/>
             <a:ext cx="1554480" cy="274320"/>
           </a:xfrm>
           <a:prstGeom prst="rect">
@@ -13996,7 +13338,7 @@
             <a:r>
               <a:rPr lang="en-US" sz="1150" b="1" dirty="0">
                 <a:solidFill>
-                  <a:srgbClr val="0F172A"/>
+                  <a:srgbClr val="0A1F33"/>
                 </a:solidFill>
                 <a:latin typeface="Calibri" pitchFamily="34" charset="0"/>
                 <a:ea typeface="Calibri" pitchFamily="34" charset="-122"/>
@@ -14016,7 +13358,7 @@
         </p:nvSpPr>
         <p:spPr>
           <a:xfrm>
-            <a:off x="4453128" y="4251960"/>
+            <a:off x="4453128" y="4270248"/>
             <a:ext cx="3108960" cy="411480"/>
           </a:xfrm>
           <a:prstGeom prst="rect">
@@ -14033,9 +13375,9 @@
               <a:buNone/>
             </a:pPr>
             <a:r>
-              <a:rPr lang="en-US" sz="1900" b="1" dirty="0">
-                <a:solidFill>
-                  <a:srgbClr val="DC2626"/>
+              <a:rPr lang="en-US" sz="1800" b="1" dirty="0">
+                <a:solidFill>
+                  <a:srgbClr val="B3261E"/>
                 </a:solidFill>
                 <a:latin typeface="Cambria" pitchFamily="34" charset="0"/>
                 <a:ea typeface="Cambria" pitchFamily="34" charset="-122"/>
@@ -14043,7 +13385,7 @@
               </a:rPr>
               <a:t>Net -Rs 1.13 Cr</a:t>
             </a:r>
-            <a:endParaRPr lang="en-US" sz="1900" dirty="0"/>
+            <a:endParaRPr lang="en-US" sz="1800" dirty="0"/>
           </a:p>
         </p:txBody>
       </p:sp>
@@ -14055,7 +13397,7 @@
         </p:nvSpPr>
         <p:spPr>
           <a:xfrm>
-            <a:off x="4453128" y="4709160"/>
+            <a:off x="4453128" y="4727448"/>
             <a:ext cx="3108960" cy="457200"/>
           </a:xfrm>
           <a:prstGeom prst="rect">
@@ -14074,7 +13416,7 @@
             <a:r>
               <a:rPr lang="en-US" sz="1100" dirty="0">
                 <a:solidFill>
-                  <a:srgbClr val="64748B"/>
+                  <a:srgbClr val="5B6B7B"/>
                 </a:solidFill>
                 <a:latin typeface="Calibri" pitchFamily="34" charset="0"/>
                 <a:ea typeface="Calibri" pitchFamily="34" charset="-122"/>
@@ -14097,17 +13439,15 @@
             <a:off x="7973568" y="1965960"/>
             <a:ext cx="3520440" cy="3383280"/>
           </a:xfrm>
-          <a:prstGeom prst="roundRect">
-            <a:avLst>
-              <a:gd name="adj" fmla="val 2162"/>
-            </a:avLst>
+          <a:prstGeom prst="rect">
+            <a:avLst/>
           </a:prstGeom>
           <a:solidFill>
             <a:srgbClr val="FFFFFF"/>
           </a:solidFill>
           <a:ln w="12700">
             <a:solidFill>
-              <a:srgbClr val="E2E8F0"/>
+              <a:srgbClr val="E6E9EE"/>
             </a:solidFill>
             <a:prstDash val="solid"/>
           </a:ln>
@@ -14121,16 +13461,14 @@
         </p:nvSpPr>
         <p:spPr>
           <a:xfrm>
-            <a:off x="8156448" y="2148840"/>
+            <a:off x="8156448" y="2167128"/>
             <a:ext cx="1417320" cy="292608"/>
           </a:xfrm>
-          <a:prstGeom prst="roundRect">
-            <a:avLst>
-              <a:gd name="adj" fmla="val 31250"/>
-            </a:avLst>
+          <a:prstGeom prst="rect">
+            <a:avLst/>
           </a:prstGeom>
           <a:solidFill>
-            <a:srgbClr val="FBE4E4"/>
+            <a:srgbClr val="F6E6E4"/>
           </a:solidFill>
           <a:ln/>
         </p:spPr>
@@ -14143,7 +13481,7 @@
         </p:nvSpPr>
         <p:spPr>
           <a:xfrm>
-            <a:off x="8156448" y="2148840"/>
+            <a:off x="8156448" y="2167128"/>
             <a:ext cx="1417320" cy="292608"/>
           </a:xfrm>
           <a:prstGeom prst="rect">
@@ -14162,7 +13500,7 @@
             <a:r>
               <a:rPr lang="en-US" sz="1000" b="1" dirty="0">
                 <a:solidFill>
-                  <a:srgbClr val="DC2626"/>
+                  <a:srgbClr val="B3261E"/>
                 </a:solidFill>
                 <a:latin typeface="Calibri" pitchFamily="34" charset="0"/>
                 <a:ea typeface="Calibri" pitchFamily="34" charset="-122"/>
@@ -14182,7 +13520,7 @@
         </p:nvSpPr>
         <p:spPr>
           <a:xfrm>
-            <a:off x="8156448" y="2514600"/>
+            <a:off x="8156448" y="2532888"/>
             <a:ext cx="3108960" cy="320040"/>
           </a:xfrm>
           <a:prstGeom prst="rect">
@@ -14201,7 +13539,7 @@
             <a:r>
               <a:rPr lang="en-US" sz="1450" b="1" dirty="0">
                 <a:solidFill>
-                  <a:srgbClr val="0F172A"/>
+                  <a:srgbClr val="0A1F33"/>
                 </a:solidFill>
                 <a:latin typeface="Cambria" pitchFamily="34" charset="0"/>
                 <a:ea typeface="Cambria" pitchFamily="34" charset="-122"/>
@@ -14221,7 +13559,7 @@
         </p:nvSpPr>
         <p:spPr>
           <a:xfrm>
-            <a:off x="8156448" y="2898648"/>
+            <a:off x="8156448" y="2916936"/>
             <a:ext cx="1920240" cy="274320"/>
           </a:xfrm>
           <a:prstGeom prst="rect">
@@ -14240,7 +13578,7 @@
             <a:r>
               <a:rPr lang="en-US" sz="1150" dirty="0">
                 <a:solidFill>
-                  <a:srgbClr val="64748B"/>
+                  <a:srgbClr val="5B6B7B"/>
                 </a:solidFill>
                 <a:latin typeface="Calibri" pitchFamily="34" charset="0"/>
                 <a:ea typeface="Calibri" pitchFamily="34" charset="-122"/>
@@ -14260,7 +13598,7 @@
         </p:nvSpPr>
         <p:spPr>
           <a:xfrm>
-            <a:off x="9756648" y="2898648"/>
+            <a:off x="9756648" y="2916936"/>
             <a:ext cx="1554480" cy="274320"/>
           </a:xfrm>
           <a:prstGeom prst="rect">
@@ -14279,7 +13617,7 @@
             <a:r>
               <a:rPr lang="en-US" sz="1150" b="1" dirty="0">
                 <a:solidFill>
-                  <a:srgbClr val="0F172A"/>
+                  <a:srgbClr val="0A1F33"/>
                 </a:solidFill>
                 <a:latin typeface="Calibri" pitchFamily="34" charset="0"/>
                 <a:ea typeface="Calibri" pitchFamily="34" charset="-122"/>
@@ -14299,7 +13637,7 @@
         </p:nvSpPr>
         <p:spPr>
           <a:xfrm>
-            <a:off x="8156448" y="3218688"/>
+            <a:off x="8156448" y="3236976"/>
             <a:ext cx="1920240" cy="274320"/>
           </a:xfrm>
           <a:prstGeom prst="rect">
@@ -14318,7 +13656,7 @@
             <a:r>
               <a:rPr lang="en-US" sz="1150" dirty="0">
                 <a:solidFill>
-                  <a:srgbClr val="64748B"/>
+                  <a:srgbClr val="5B6B7B"/>
                 </a:solidFill>
                 <a:latin typeface="Calibri" pitchFamily="34" charset="0"/>
                 <a:ea typeface="Calibri" pitchFamily="34" charset="-122"/>
@@ -14338,7 +13676,7 @@
         </p:nvSpPr>
         <p:spPr>
           <a:xfrm>
-            <a:off x="9756648" y="3218688"/>
+            <a:off x="9756648" y="3236976"/>
             <a:ext cx="1554480" cy="274320"/>
           </a:xfrm>
           <a:prstGeom prst="rect">
@@ -14357,7 +13695,7 @@
             <a:r>
               <a:rPr lang="en-US" sz="1150" b="1" dirty="0">
                 <a:solidFill>
-                  <a:srgbClr val="0F172A"/>
+                  <a:srgbClr val="0A1F33"/>
                 </a:solidFill>
                 <a:latin typeface="Calibri" pitchFamily="34" charset="0"/>
                 <a:ea typeface="Calibri" pitchFamily="34" charset="-122"/>
@@ -14377,7 +13715,7 @@
         </p:nvSpPr>
         <p:spPr>
           <a:xfrm>
-            <a:off x="8156448" y="3538728"/>
+            <a:off x="8156448" y="3557016"/>
             <a:ext cx="1920240" cy="274320"/>
           </a:xfrm>
           <a:prstGeom prst="rect">
@@ -14396,7 +13734,7 @@
             <a:r>
               <a:rPr lang="en-US" sz="1150" dirty="0">
                 <a:solidFill>
-                  <a:srgbClr val="64748B"/>
+                  <a:srgbClr val="5B6B7B"/>
                 </a:solidFill>
                 <a:latin typeface="Calibri" pitchFamily="34" charset="0"/>
                 <a:ea typeface="Calibri" pitchFamily="34" charset="-122"/>
@@ -14416,7 +13754,7 @@
         </p:nvSpPr>
         <p:spPr>
           <a:xfrm>
-            <a:off x="9756648" y="3538728"/>
+            <a:off x="9756648" y="3557016"/>
             <a:ext cx="1554480" cy="274320"/>
           </a:xfrm>
           <a:prstGeom prst="rect">
@@ -14435,7 +13773,7 @@
             <a:r>
               <a:rPr lang="en-US" sz="1150" b="1" dirty="0">
                 <a:solidFill>
-                  <a:srgbClr val="0F172A"/>
+                  <a:srgbClr val="0A1F33"/>
                 </a:solidFill>
                 <a:latin typeface="Calibri" pitchFamily="34" charset="0"/>
                 <a:ea typeface="Calibri" pitchFamily="34" charset="-122"/>
@@ -14455,7 +13793,7 @@
         </p:nvSpPr>
         <p:spPr>
           <a:xfrm>
-            <a:off x="8156448" y="3858768"/>
+            <a:off x="8156448" y="3877056"/>
             <a:ext cx="1920240" cy="274320"/>
           </a:xfrm>
           <a:prstGeom prst="rect">
@@ -14474,7 +13812,7 @@
             <a:r>
               <a:rPr lang="en-US" sz="1150" dirty="0">
                 <a:solidFill>
-                  <a:srgbClr val="64748B"/>
+                  <a:srgbClr val="5B6B7B"/>
                 </a:solidFill>
                 <a:latin typeface="Calibri" pitchFamily="34" charset="0"/>
                 <a:ea typeface="Calibri" pitchFamily="34" charset="-122"/>
@@ -14494,7 +13832,7 @@
         </p:nvSpPr>
         <p:spPr>
           <a:xfrm>
-            <a:off x="9756648" y="3858768"/>
+            <a:off x="9756648" y="3877056"/>
             <a:ext cx="1554480" cy="274320"/>
           </a:xfrm>
           <a:prstGeom prst="rect">
@@ -14513,7 +13851,7 @@
             <a:r>
               <a:rPr lang="en-US" sz="1150" b="1" dirty="0">
                 <a:solidFill>
-                  <a:srgbClr val="0F172A"/>
+                  <a:srgbClr val="0A1F33"/>
                 </a:solidFill>
                 <a:latin typeface="Calibri" pitchFamily="34" charset="0"/>
                 <a:ea typeface="Calibri" pitchFamily="34" charset="-122"/>
@@ -14533,7 +13871,7 @@
         </p:nvSpPr>
         <p:spPr>
           <a:xfrm>
-            <a:off x="8156448" y="4251960"/>
+            <a:off x="8156448" y="4270248"/>
             <a:ext cx="3108960" cy="411480"/>
           </a:xfrm>
           <a:prstGeom prst="rect">
@@ -14550,9 +13888,9 @@
               <a:buNone/>
             </a:pPr>
             <a:r>
-              <a:rPr lang="en-US" sz="1900" b="1" dirty="0">
-                <a:solidFill>
-                  <a:srgbClr val="DC2626"/>
+              <a:rPr lang="en-US" sz="1800" b="1" dirty="0">
+                <a:solidFill>
+                  <a:srgbClr val="B3261E"/>
                 </a:solidFill>
                 <a:latin typeface="Cambria" pitchFamily="34" charset="0"/>
                 <a:ea typeface="Cambria" pitchFamily="34" charset="-122"/>
@@ -14560,7 +13898,7 @@
               </a:rPr>
               <a:t>Net -Rs 2.57 Cr</a:t>
             </a:r>
-            <a:endParaRPr lang="en-US" sz="1900" dirty="0"/>
+            <a:endParaRPr lang="en-US" sz="1800" dirty="0"/>
           </a:p>
         </p:txBody>
       </p:sp>
@@ -14572,7 +13910,7 @@
         </p:nvSpPr>
         <p:spPr>
           <a:xfrm>
-            <a:off x="8156448" y="4709160"/>
+            <a:off x="8156448" y="4727448"/>
             <a:ext cx="3108960" cy="457200"/>
           </a:xfrm>
           <a:prstGeom prst="rect">
@@ -14591,7 +13929,7 @@
             <a:r>
               <a:rPr lang="en-US" sz="1100" dirty="0">
                 <a:solidFill>
-                  <a:srgbClr val="64748B"/>
+                  <a:srgbClr val="5B6B7B"/>
                 </a:solidFill>
                 <a:latin typeface="Calibri" pitchFamily="34" charset="0"/>
                 <a:ea typeface="Calibri" pitchFamily="34" charset="-122"/>
@@ -14611,8 +13949,8 @@
         </p:nvSpPr>
         <p:spPr>
           <a:xfrm>
-            <a:off x="566928" y="6446520"/>
-            <a:ext cx="11064240" cy="301752"/>
+            <a:off x="566928" y="6455664"/>
+            <a:ext cx="11064240" cy="292608"/>
           </a:xfrm>
           <a:prstGeom prst="rect">
             <a:avLst/>
@@ -14628,15 +13966,15 @@
               <a:buNone/>
             </a:pPr>
             <a:r>
-              <a:rPr lang="en-US" sz="900" i="1" dirty="0">
-                <a:solidFill>
-                  <a:srgbClr val="94A3B8"/>
+              <a:rPr lang="en-US" sz="900" dirty="0">
+                <a:solidFill>
+                  <a:srgbClr val="9AA7B4"/>
                 </a:solidFill>
                 <a:latin typeface="Calibri" pitchFamily="34" charset="0"/>
                 <a:ea typeface="Calibri" pitchFamily="34" charset="-122"/>
                 <a:cs typeface="Calibri" pitchFamily="34" charset="-120"/>
               </a:rPr>
-              <a:t>Source: FD interest and cost base, Internal run rate [1]. BLR revenue, assumptions [2]. Flat 16 cases per month from launch, initial fees only in FY27.</a:t>
+              <a:t>Source: FD interest and cost base, Internal run rate [1]. BLR revenue, assumptions [2]. Flat 16 cases per month from launch; FY27 counts initial fees only.</a:t>
             </a:r>
             <a:endParaRPr lang="en-US" sz="900" dirty="0"/>
           </a:p>
@@ -14682,7 +14020,7 @@
         </p:nvSpPr>
         <p:spPr>
           <a:xfrm>
-            <a:off x="11430000" y="402336"/>
+            <a:off x="11430000" y="420624"/>
             <a:ext cx="365760" cy="274320"/>
           </a:xfrm>
           <a:prstGeom prst="rect">
@@ -14701,7 +14039,7 @@
             <a:r>
               <a:rPr lang="en-US" sz="1100" b="1" dirty="0">
                 <a:solidFill>
-                  <a:srgbClr val="94A3B8"/>
+                  <a:srgbClr val="9AA7B4"/>
                 </a:solidFill>
                 <a:latin typeface="Calibri" pitchFamily="34" charset="0"/>
                 <a:ea typeface="Calibri" pitchFamily="34" charset="-122"/>
@@ -14721,7 +14059,7 @@
         </p:nvSpPr>
         <p:spPr>
           <a:xfrm>
-            <a:off x="566928" y="438912"/>
+            <a:off x="566928" y="457200"/>
             <a:ext cx="10058400" cy="274320"/>
           </a:xfrm>
           <a:prstGeom prst="rect">
@@ -14740,7 +14078,7 @@
             <a:r>
               <a:rPr lang="en-US" sz="1100" b="1" spc="200" kern="0" dirty="0">
                 <a:solidFill>
-                  <a:srgbClr val="2B5CC4"/>
+                  <a:srgbClr val="0F766E"/>
                 </a:solidFill>
                 <a:latin typeface="Calibri" pitchFamily="34" charset="0"/>
                 <a:ea typeface="Calibri" pitchFamily="34" charset="-122"/>
@@ -14760,8 +14098,8 @@
         </p:nvSpPr>
         <p:spPr>
           <a:xfrm>
-            <a:off x="566928" y="694944"/>
-            <a:ext cx="11064240" cy="548640"/>
+            <a:off x="566928" y="713232"/>
+            <a:ext cx="11064240" cy="640080"/>
           </a:xfrm>
           <a:prstGeom prst="rect">
             <a:avLst/>
@@ -14777,9 +14115,9 @@
               <a:buNone/>
             </a:pPr>
             <a:r>
-              <a:rPr lang="en-US" sz="2900" b="1" dirty="0">
-                <a:solidFill>
-                  <a:srgbClr val="0F172A"/>
+              <a:rPr lang="en-US" sz="2700" b="1" dirty="0">
+                <a:solidFill>
+                  <a:srgbClr val="0A1F33"/>
                 </a:solidFill>
                 <a:latin typeface="Cambria" pitchFamily="34" charset="0"/>
                 <a:ea typeface="Cambria" pitchFamily="34" charset="-122"/>
@@ -14787,7 +14125,7 @@
               </a:rPr>
               <a:t>S1. BLR by October</a:t>
             </a:r>
-            <a:endParaRPr lang="en-US" sz="2900" dirty="0"/>
+            <a:endParaRPr lang="en-US" sz="2700" dirty="0"/>
           </a:p>
         </p:txBody>
       </p:sp>
@@ -14800,7 +14138,7 @@
         <p:spPr>
           <a:xfrm>
             <a:off x="566928" y="1325880"/>
-            <a:ext cx="8229600" cy="320040"/>
+            <a:ext cx="10972800" cy="320040"/>
           </a:xfrm>
           <a:prstGeom prst="rect">
             <a:avLst/>
@@ -14816,7 +14154,7 @@
               <a:buNone/>
             </a:pPr>
             <a:r>
-              <a:rPr lang="en-US" sz="1400" b="1" dirty="0">
+              <a:rPr lang="en-US" sz="1300" b="1" dirty="0">
                 <a:solidFill>
                   <a:srgbClr val="0F766E"/>
                 </a:solidFill>
@@ -14824,9 +14162,9 @@
                 <a:ea typeface="Calibri" pitchFamily="34" charset="-122"/>
                 <a:cs typeface="Calibri" pitchFamily="34" charset="-120"/>
               </a:rPr>
-              <a:t>Cash positive from October, when FD plus earning clears expense.</a:t>
-            </a:r>
-            <a:endParaRPr lang="en-US" sz="1400" dirty="0"/>
+              <a:t>Cash positive from October   ·   Apr to Jun actual, rest projected</a:t>
+            </a:r>
+            <a:endParaRPr lang="en-US" sz="1300" dirty="0"/>
           </a:p>
         </p:txBody>
       </p:sp>
@@ -14837,7 +14175,7 @@
           <p:nvPr/>
         </p:nvGraphicFramePr>
         <p:xfrm>
-          <a:off x="566928" y="1691640"/>
+          <a:off x="566928" y="1737360"/>
           <a:ext cx="11064240" cy="3977640"/>
         </p:xfrm>
         <a:graphic xmlns:a="http://schemas.openxmlformats.org/drawingml/2006/main">
@@ -14854,7 +14192,7 @@
         </p:nvSpPr>
         <p:spPr>
           <a:xfrm>
-            <a:off x="566928" y="5760720"/>
+            <a:off x="566928" y="5806440"/>
             <a:ext cx="11064240" cy="457200"/>
           </a:xfrm>
           <a:prstGeom prst="rect">
@@ -14873,13 +14211,13 @@
             <a:r>
               <a:rPr lang="en-US" sz="1250" dirty="0">
                 <a:solidFill>
-                  <a:srgbClr val="334155"/>
+                  <a:srgbClr val="2B3F52"/>
                 </a:solidFill>
                 <a:latin typeface="Calibri" pitchFamily="34" charset="0"/>
                 <a:ea typeface="Calibri" pitchFamily="34" charset="-122"/>
                 <a:cs typeface="Calibri" pitchFamily="34" charset="-120"/>
               </a:rPr>
-              <a:t>Earning jumps from Rs 8 L to Rs 56 L in October as 16 cases at Rs 3 L land, above the Rs 46 L monthly expense.</a:t>
+              <a:t>Earning jumps from Rs 8 L to Rs 56 L in October as 16 cases at Rs 3 L land, clearing the Rs 46 L monthly expense line.</a:t>
             </a:r>
             <a:endParaRPr lang="en-US" sz="1250" dirty="0"/>
           </a:p>
@@ -14893,8 +14231,8 @@
         </p:nvSpPr>
         <p:spPr>
           <a:xfrm>
-            <a:off x="566928" y="6446520"/>
-            <a:ext cx="11064240" cy="301752"/>
+            <a:off x="566928" y="6455664"/>
+            <a:ext cx="11064240" cy="292608"/>
           </a:xfrm>
           <a:prstGeom prst="rect">
             <a:avLst/>
@@ -14910,15 +14248,15 @@
               <a:buNone/>
             </a:pPr>
             <a:r>
-              <a:rPr lang="en-US" sz="900" i="1" dirty="0">
-                <a:solidFill>
-                  <a:srgbClr val="94A3B8"/>
+              <a:rPr lang="en-US" sz="900" dirty="0">
+                <a:solidFill>
+                  <a:srgbClr val="9AA7B4"/>
                 </a:solidFill>
                 <a:latin typeface="Calibri" pitchFamily="34" charset="0"/>
                 <a:ea typeface="Calibri" pitchFamily="34" charset="-122"/>
                 <a:cs typeface="Calibri" pitchFamily="34" charset="-120"/>
               </a:rPr>
-              <a:t>Source: actual months Apr to Jun from Internal ledger [1]; projected months from Internal run rate [1] and BLR assumptions [2]. Values Rs Lakh. Earning = existing ratings plus 16 new cases at Rs 3 L each once BLR is live.</a:t>
+              <a:t>Source: Apr to Jun actual, Internal ledger [1]; Jul to Mar projected [1][2]. Rs Lakh. Earning = existing ratings plus 16 cases at Rs 3 L each once BLR is live.</a:t>
             </a:r>
             <a:endParaRPr lang="en-US" sz="900" dirty="0"/>
           </a:p>
@@ -14964,7 +14302,7 @@
         </p:nvSpPr>
         <p:spPr>
           <a:xfrm>
-            <a:off x="11430000" y="402336"/>
+            <a:off x="11430000" y="420624"/>
             <a:ext cx="365760" cy="274320"/>
           </a:xfrm>
           <a:prstGeom prst="rect">
@@ -14983,7 +14321,7 @@
             <a:r>
               <a:rPr lang="en-US" sz="1100" b="1" dirty="0">
                 <a:solidFill>
-                  <a:srgbClr val="94A3B8"/>
+                  <a:srgbClr val="9AA7B4"/>
                 </a:solidFill>
                 <a:latin typeface="Calibri" pitchFamily="34" charset="0"/>
                 <a:ea typeface="Calibri" pitchFamily="34" charset="-122"/>
@@ -15003,7 +14341,7 @@
         </p:nvSpPr>
         <p:spPr>
           <a:xfrm>
-            <a:off x="566928" y="438912"/>
+            <a:off x="566928" y="457200"/>
             <a:ext cx="10058400" cy="274320"/>
           </a:xfrm>
           <a:prstGeom prst="rect">
@@ -15022,7 +14360,7 @@
             <a:r>
               <a:rPr lang="en-US" sz="1100" b="1" spc="200" kern="0" dirty="0">
                 <a:solidFill>
-                  <a:srgbClr val="2B5CC4"/>
+                  <a:srgbClr val="0F766E"/>
                 </a:solidFill>
                 <a:latin typeface="Calibri" pitchFamily="34" charset="0"/>
                 <a:ea typeface="Calibri" pitchFamily="34" charset="-122"/>
@@ -15042,8 +14380,8 @@
         </p:nvSpPr>
         <p:spPr>
           <a:xfrm>
-            <a:off x="566928" y="694944"/>
-            <a:ext cx="11064240" cy="548640"/>
+            <a:off x="566928" y="713232"/>
+            <a:ext cx="11064240" cy="640080"/>
           </a:xfrm>
           <a:prstGeom prst="rect">
             <a:avLst/>
@@ -15059,9 +14397,9 @@
               <a:buNone/>
             </a:pPr>
             <a:r>
-              <a:rPr lang="en-US" sz="2900" b="1" dirty="0">
-                <a:solidFill>
-                  <a:srgbClr val="0F172A"/>
+              <a:rPr lang="en-US" sz="2700" b="1" dirty="0">
+                <a:solidFill>
+                  <a:srgbClr val="0A1F33"/>
                 </a:solidFill>
                 <a:latin typeface="Cambria" pitchFamily="34" charset="0"/>
                 <a:ea typeface="Cambria" pitchFamily="34" charset="-122"/>
@@ -15069,7 +14407,7 @@
               </a:rPr>
               <a:t>S2. BLR by January</a:t>
             </a:r>
-            <a:endParaRPr lang="en-US" sz="2900" dirty="0"/>
+            <a:endParaRPr lang="en-US" sz="2700" dirty="0"/>
           </a:p>
         </p:txBody>
       </p:sp>
@@ -15082,7 +14420,7 @@
         <p:spPr>
           <a:xfrm>
             <a:off x="566928" y="1325880"/>
-            <a:ext cx="8229600" cy="320040"/>
+            <a:ext cx="10972800" cy="320040"/>
           </a:xfrm>
           <a:prstGeom prst="rect">
             <a:avLst/>
@@ -15098,17 +14436,17 @@
               <a:buNone/>
             </a:pPr>
             <a:r>
-              <a:rPr lang="en-US" sz="1400" b="1" dirty="0">
-                <a:solidFill>
-                  <a:srgbClr val="2B5CC4"/>
+              <a:rPr lang="en-US" sz="1300" b="1" dirty="0">
+                <a:solidFill>
+                  <a:srgbClr val="1E4E79"/>
                 </a:solidFill>
                 <a:latin typeface="Calibri" pitchFamily="34" charset="0"/>
                 <a:ea typeface="Calibri" pitchFamily="34" charset="-122"/>
                 <a:cs typeface="Calibri" pitchFamily="34" charset="-120"/>
               </a:rPr>
-              <a:t>Cash positive from January, only the final quarter carries BLR revenue.</a:t>
-            </a:r>
-            <a:endParaRPr lang="en-US" sz="1400" dirty="0"/>
+              <a:t>Cash positive from January   ·   Apr to Jun actual, rest projected</a:t>
+            </a:r>
+            <a:endParaRPr lang="en-US" sz="1300" dirty="0"/>
           </a:p>
         </p:txBody>
       </p:sp>
@@ -15119,7 +14457,7 @@
           <p:nvPr/>
         </p:nvGraphicFramePr>
         <p:xfrm>
-          <a:off x="566928" y="1691640"/>
+          <a:off x="566928" y="1737360"/>
           <a:ext cx="11064240" cy="3977640"/>
         </p:xfrm>
         <a:graphic xmlns:a="http://schemas.openxmlformats.org/drawingml/2006/main">
@@ -15136,7 +14474,7 @@
         </p:nvSpPr>
         <p:spPr>
           <a:xfrm>
-            <a:off x="566928" y="5760720"/>
+            <a:off x="566928" y="5806440"/>
             <a:ext cx="11064240" cy="457200"/>
           </a:xfrm>
           <a:prstGeom prst="rect">
@@ -15155,7 +14493,7 @@
             <a:r>
               <a:rPr lang="en-US" sz="1250" dirty="0">
                 <a:solidFill>
-                  <a:srgbClr val="334155"/>
+                  <a:srgbClr val="2B3F52"/>
                 </a:solidFill>
                 <a:latin typeface="Calibri" pitchFamily="34" charset="0"/>
                 <a:ea typeface="Calibri" pitchFamily="34" charset="-122"/>
@@ -15175,8 +14513,8 @@
         </p:nvSpPr>
         <p:spPr>
           <a:xfrm>
-            <a:off x="566928" y="6446520"/>
-            <a:ext cx="11064240" cy="301752"/>
+            <a:off x="566928" y="6455664"/>
+            <a:ext cx="11064240" cy="292608"/>
           </a:xfrm>
           <a:prstGeom prst="rect">
             <a:avLst/>
@@ -15192,15 +14530,15 @@
               <a:buNone/>
             </a:pPr>
             <a:r>
-              <a:rPr lang="en-US" sz="900" i="1" dirty="0">
-                <a:solidFill>
-                  <a:srgbClr val="94A3B8"/>
+              <a:rPr lang="en-US" sz="900" dirty="0">
+                <a:solidFill>
+                  <a:srgbClr val="9AA7B4"/>
                 </a:solidFill>
                 <a:latin typeface="Calibri" pitchFamily="34" charset="0"/>
                 <a:ea typeface="Calibri" pitchFamily="34" charset="-122"/>
                 <a:cs typeface="Calibri" pitchFamily="34" charset="-120"/>
               </a:rPr>
-              <a:t>Source: actual months Apr to Jun from Internal ledger [1]; projected months from Internal run rate [1] and BLR assumptions [2]. Values Rs Lakh. Earning = existing ratings plus 16 new cases at Rs 3 L each once BLR is live.</a:t>
+              <a:t>Source: Apr to Jun actual, Internal ledger [1]; Jul to Mar projected [1][2]. Rs Lakh. Earning = existing ratings plus 16 cases at Rs 3 L each once BLR is live.</a:t>
             </a:r>
             <a:endParaRPr lang="en-US" sz="900" dirty="0"/>
           </a:p>
@@ -15246,7 +14584,7 @@
         </p:nvSpPr>
         <p:spPr>
           <a:xfrm>
-            <a:off x="11430000" y="402336"/>
+            <a:off x="11430000" y="420624"/>
             <a:ext cx="365760" cy="274320"/>
           </a:xfrm>
           <a:prstGeom prst="rect">
@@ -15265,7 +14603,7 @@
             <a:r>
               <a:rPr lang="en-US" sz="1100" b="1" dirty="0">
                 <a:solidFill>
-                  <a:srgbClr val="94A3B8"/>
+                  <a:srgbClr val="9AA7B4"/>
                 </a:solidFill>
                 <a:latin typeface="Calibri" pitchFamily="34" charset="0"/>
                 <a:ea typeface="Calibri" pitchFamily="34" charset="-122"/>
@@ -15285,7 +14623,7 @@
         </p:nvSpPr>
         <p:spPr>
           <a:xfrm>
-            <a:off x="566928" y="438912"/>
+            <a:off x="566928" y="457200"/>
             <a:ext cx="10058400" cy="274320"/>
           </a:xfrm>
           <a:prstGeom prst="rect">
@@ -15304,7 +14642,7 @@
             <a:r>
               <a:rPr lang="en-US" sz="1100" b="1" spc="200" kern="0" dirty="0">
                 <a:solidFill>
-                  <a:srgbClr val="2B5CC4"/>
+                  <a:srgbClr val="0F766E"/>
                 </a:solidFill>
                 <a:latin typeface="Calibri" pitchFamily="34" charset="0"/>
                 <a:ea typeface="Calibri" pitchFamily="34" charset="-122"/>
@@ -15324,8 +14662,8 @@
         </p:nvSpPr>
         <p:spPr>
           <a:xfrm>
-            <a:off x="566928" y="694944"/>
-            <a:ext cx="11064240" cy="548640"/>
+            <a:off x="566928" y="713232"/>
+            <a:ext cx="11064240" cy="640080"/>
           </a:xfrm>
           <a:prstGeom prst="rect">
             <a:avLst/>
@@ -15341,9 +14679,9 @@
               <a:buNone/>
             </a:pPr>
             <a:r>
-              <a:rPr lang="en-US" sz="2900" b="1" dirty="0">
-                <a:solidFill>
-                  <a:srgbClr val="0F172A"/>
+              <a:rPr lang="en-US" sz="2700" b="1" dirty="0">
+                <a:solidFill>
+                  <a:srgbClr val="0A1F33"/>
                 </a:solidFill>
                 <a:latin typeface="Cambria" pitchFamily="34" charset="0"/>
                 <a:ea typeface="Cambria" pitchFamily="34" charset="-122"/>
@@ -15351,7 +14689,7 @@
               </a:rPr>
               <a:t>S3. No BLR this financial year</a:t>
             </a:r>
-            <a:endParaRPr lang="en-US" sz="2900" dirty="0"/>
+            <a:endParaRPr lang="en-US" sz="2700" dirty="0"/>
           </a:p>
         </p:txBody>
       </p:sp>
@@ -15364,7 +14702,7 @@
         <p:spPr>
           <a:xfrm>
             <a:off x="566928" y="1325880"/>
-            <a:ext cx="8229600" cy="320040"/>
+            <a:ext cx="10972800" cy="320040"/>
           </a:xfrm>
           <a:prstGeom prst="rect">
             <a:avLst/>
@@ -15380,17 +14718,17 @@
               <a:buNone/>
             </a:pPr>
             <a:r>
-              <a:rPr lang="en-US" sz="1400" b="1" dirty="0">
-                <a:solidFill>
-                  <a:srgbClr val="DC2626"/>
+              <a:rPr lang="en-US" sz="1300" b="1" dirty="0">
+                <a:solidFill>
+                  <a:srgbClr val="B3261E"/>
                 </a:solidFill>
                 <a:latin typeface="Calibri" pitchFamily="34" charset="0"/>
                 <a:ea typeface="Calibri" pitchFamily="34" charset="-122"/>
                 <a:cs typeface="Calibri" pitchFamily="34" charset="-120"/>
               </a:rPr>
-              <a:t>Break even is not reached, earning stays at the existing run rate.</a:t>
-            </a:r>
-            <a:endParaRPr lang="en-US" sz="1400" dirty="0"/>
+              <a:t>Break even not reached   ·   Apr to Jun actual, rest projected</a:t>
+            </a:r>
+            <a:endParaRPr lang="en-US" sz="1300" dirty="0"/>
           </a:p>
         </p:txBody>
       </p:sp>
@@ -15401,7 +14739,7 @@
           <p:nvPr/>
         </p:nvGraphicFramePr>
         <p:xfrm>
-          <a:off x="566928" y="1691640"/>
+          <a:off x="566928" y="1737360"/>
           <a:ext cx="11064240" cy="3977640"/>
         </p:xfrm>
         <a:graphic xmlns:a="http://schemas.openxmlformats.org/drawingml/2006/main">
@@ -15418,7 +14756,7 @@
         </p:nvSpPr>
         <p:spPr>
           <a:xfrm>
-            <a:off x="566928" y="5760720"/>
+            <a:off x="566928" y="5806440"/>
             <a:ext cx="11064240" cy="457200"/>
           </a:xfrm>
           <a:prstGeom prst="rect">
@@ -15437,7 +14775,7 @@
             <a:r>
               <a:rPr lang="en-US" sz="1250" dirty="0">
                 <a:solidFill>
-                  <a:srgbClr val="334155"/>
+                  <a:srgbClr val="2B3F52"/>
                 </a:solidFill>
                 <a:latin typeface="Calibri" pitchFamily="34" charset="0"/>
                 <a:ea typeface="Calibri" pitchFamily="34" charset="-122"/>
@@ -15457,8 +14795,8 @@
         </p:nvSpPr>
         <p:spPr>
           <a:xfrm>
-            <a:off x="566928" y="6446520"/>
-            <a:ext cx="11064240" cy="301752"/>
+            <a:off x="566928" y="6455664"/>
+            <a:ext cx="11064240" cy="292608"/>
           </a:xfrm>
           <a:prstGeom prst="rect">
             <a:avLst/>
@@ -15474,15 +14812,15 @@
               <a:buNone/>
             </a:pPr>
             <a:r>
-              <a:rPr lang="en-US" sz="900" i="1" dirty="0">
-                <a:solidFill>
-                  <a:srgbClr val="94A3B8"/>
+              <a:rPr lang="en-US" sz="900" dirty="0">
+                <a:solidFill>
+                  <a:srgbClr val="9AA7B4"/>
                 </a:solidFill>
                 <a:latin typeface="Calibri" pitchFamily="34" charset="0"/>
                 <a:ea typeface="Calibri" pitchFamily="34" charset="-122"/>
                 <a:cs typeface="Calibri" pitchFamily="34" charset="-120"/>
               </a:rPr>
-              <a:t>Source: actual months Apr to Jun from Internal ledger [1]; projected months from Internal run rate [1] and BLR assumptions [2]. Values Rs Lakh. Earning = existing ratings plus 16 new cases at Rs 3 L each once BLR is live.</a:t>
+              <a:t>Source: Apr to Jun actual, Internal ledger [1]; Jul to Mar projected [1][2]. Rs Lakh. Earning = existing ratings plus 16 cases at Rs 3 L each once BLR is live.</a:t>
             </a:r>
             <a:endParaRPr lang="en-US" sz="900" dirty="0"/>
           </a:p>
@@ -15528,7 +14866,7 @@
         </p:nvSpPr>
         <p:spPr>
           <a:xfrm>
-            <a:off x="11430000" y="402336"/>
+            <a:off x="11430000" y="420624"/>
             <a:ext cx="365760" cy="274320"/>
           </a:xfrm>
           <a:prstGeom prst="rect">
@@ -15547,7 +14885,7 @@
             <a:r>
               <a:rPr lang="en-US" sz="1100" b="1" dirty="0">
                 <a:solidFill>
-                  <a:srgbClr val="94A3B8"/>
+                  <a:srgbClr val="9AA7B4"/>
                 </a:solidFill>
                 <a:latin typeface="Calibri" pitchFamily="34" charset="0"/>
                 <a:ea typeface="Calibri" pitchFamily="34" charset="-122"/>
@@ -15567,7 +14905,7 @@
         </p:nvSpPr>
         <p:spPr>
           <a:xfrm>
-            <a:off x="566928" y="438912"/>
+            <a:off x="566928" y="457200"/>
             <a:ext cx="10058400" cy="274320"/>
           </a:xfrm>
           <a:prstGeom prst="rect">
@@ -15586,7 +14924,7 @@
             <a:r>
               <a:rPr lang="en-US" sz="1100" b="1" spc="200" kern="0" dirty="0">
                 <a:solidFill>
-                  <a:srgbClr val="2B5CC4"/>
+                  <a:srgbClr val="0F766E"/>
                 </a:solidFill>
                 <a:latin typeface="Calibri" pitchFamily="34" charset="0"/>
                 <a:ea typeface="Calibri" pitchFamily="34" charset="-122"/>
@@ -15606,8 +14944,8 @@
         </p:nvSpPr>
         <p:spPr>
           <a:xfrm>
-            <a:off x="566928" y="694944"/>
-            <a:ext cx="11064240" cy="548640"/>
+            <a:off x="566928" y="713232"/>
+            <a:ext cx="11064240" cy="640080"/>
           </a:xfrm>
           <a:prstGeom prst="rect">
             <a:avLst/>
@@ -15623,17 +14961,17 @@
               <a:buNone/>
             </a:pPr>
             <a:r>
-              <a:rPr lang="en-US" sz="2900" b="1" dirty="0">
-                <a:solidFill>
-                  <a:srgbClr val="0F172A"/>
+              <a:rPr lang="en-US" sz="2700" b="1" dirty="0">
+                <a:solidFill>
+                  <a:srgbClr val="0A1F33"/>
                 </a:solidFill>
                 <a:latin typeface="Cambria" pitchFamily="34" charset="0"/>
                 <a:ea typeface="Cambria" pitchFamily="34" charset="-122"/>
                 <a:cs typeface="Cambria" pitchFamily="34" charset="-120"/>
               </a:rPr>
-              <a:t>FY27 budget and cost</a:t>
-            </a:r>
-            <a:endParaRPr lang="en-US" sz="2900" dirty="0"/>
+              <a:t>Salary is the plan, nearly 60 paise of every rupee</a:t>
+            </a:r>
+            <a:endParaRPr lang="en-US" sz="2700" dirty="0"/>
           </a:p>
         </p:txBody>
       </p:sp>
@@ -15645,7 +14983,7 @@
         </p:nvSpPr>
         <p:spPr>
           <a:xfrm>
-            <a:off x="566928" y="1371600"/>
+            <a:off x="566928" y="1417320"/>
             <a:ext cx="5486400" cy="274320"/>
           </a:xfrm>
           <a:prstGeom prst="rect">
@@ -15664,7 +15002,7 @@
             <a:r>
               <a:rPr lang="en-US" sz="1200" b="1" dirty="0">
                 <a:solidFill>
-                  <a:srgbClr val="334155"/>
+                  <a:srgbClr val="2B3F52"/>
                 </a:solidFill>
                 <a:latin typeface="Calibri" pitchFamily="34" charset="0"/>
                 <a:ea typeface="Calibri" pitchFamily="34" charset="-122"/>
@@ -15691,7 +15029,7 @@
           </p:nvPr>
         </p:nvGraphicFramePr>
         <p:xfrm>
-          <a:off x="566928" y="1691640"/>
+          <a:off x="566928" y="1737360"/>
           <a:ext cx="5486400" cy="914400"/>
         </p:xfrm>
         <a:graphic>
@@ -15704,7 +15042,7 @@
                 <a:gridCol w="1097280"/>
                 <a:gridCol w="1097280"/>
               </a:tblGrid>
-              <a:tr h="347472">
+              <a:tr h="384048">
                 <a:tc>
                   <a:txBody>
                     <a:bodyPr/>
@@ -15723,7 +15061,7 @@
                   <a:tcPr marL="91440" marR="91440" marT="45720" marB="45720" anchor="ctr">
                     <a:lnL w="6350" cap="flat" cmpd="sng" algn="ctr">
                       <a:solidFill>
-                        <a:srgbClr val="E2E8F0"/>
+                        <a:srgbClr val="E6E9EE"/>
                       </a:solidFill>
                       <a:prstDash val="solid"/>
                       <a:round/>
@@ -15732,7 +15070,7 @@
                     </a:lnL>
                     <a:lnR w="6350" cap="flat" cmpd="sng" algn="ctr">
                       <a:solidFill>
-                        <a:srgbClr val="E2E8F0"/>
+                        <a:srgbClr val="E6E9EE"/>
                       </a:solidFill>
                       <a:prstDash val="solid"/>
                       <a:round/>
@@ -15741,7 +15079,7 @@
                     </a:lnR>
                     <a:lnT w="6350" cap="flat" cmpd="sng" algn="ctr">
                       <a:solidFill>
-                        <a:srgbClr val="E2E8F0"/>
+                        <a:srgbClr val="E6E9EE"/>
                       </a:solidFill>
                       <a:prstDash val="solid"/>
                       <a:round/>
@@ -15750,7 +15088,7 @@
                     </a:lnT>
                     <a:lnB w="6350" cap="flat" cmpd="sng" algn="ctr">
                       <a:solidFill>
-                        <a:srgbClr val="E2E8F0"/>
+                        <a:srgbClr val="E6E9EE"/>
                       </a:solidFill>
                       <a:prstDash val="solid"/>
                       <a:round/>
@@ -15758,7 +15096,7 @@
                       <a:tailEnd type="none" w="med" len="med"/>
                     </a:lnB>
                     <a:solidFill>
-                      <a:srgbClr val="F5F8FB"/>
+                      <a:srgbClr val="F6F8FA"/>
                     </a:solidFill>
                   </a:tcPr>
                 </a:tc>
@@ -15773,7 +15111,7 @@
                       <a:r>
                         <a:rPr lang="en-US" sz="1100" b="1" dirty="0">
                           <a:solidFill>
-                            <a:srgbClr val="64748B"/>
+                            <a:srgbClr val="5B6B7B"/>
                           </a:solidFill>
                           <a:latin typeface="Calibri" pitchFamily="34" charset="0"/>
                           <a:ea typeface="Calibri" pitchFamily="34" charset="-122"/>
@@ -15791,7 +15129,7 @@
                   <a:tcPr marL="91440" marR="91440" marT="45720" marB="45720" anchor="ctr">
                     <a:lnL w="6350" cap="flat" cmpd="sng" algn="ctr">
                       <a:solidFill>
-                        <a:srgbClr val="E2E8F0"/>
+                        <a:srgbClr val="E6E9EE"/>
                       </a:solidFill>
                       <a:prstDash val="solid"/>
                       <a:round/>
@@ -15800,7 +15138,7 @@
                     </a:lnL>
                     <a:lnR w="6350" cap="flat" cmpd="sng" algn="ctr">
                       <a:solidFill>
-                        <a:srgbClr val="E2E8F0"/>
+                        <a:srgbClr val="E6E9EE"/>
                       </a:solidFill>
                       <a:prstDash val="solid"/>
                       <a:round/>
@@ -15809,7 +15147,7 @@
                     </a:lnR>
                     <a:lnT w="6350" cap="flat" cmpd="sng" algn="ctr">
                       <a:solidFill>
-                        <a:srgbClr val="E2E8F0"/>
+                        <a:srgbClr val="E6E9EE"/>
                       </a:solidFill>
                       <a:prstDash val="solid"/>
                       <a:round/>
@@ -15818,7 +15156,7 @@
                     </a:lnT>
                     <a:lnB w="6350" cap="flat" cmpd="sng" algn="ctr">
                       <a:solidFill>
-                        <a:srgbClr val="E2E8F0"/>
+                        <a:srgbClr val="E6E9EE"/>
                       </a:solidFill>
                       <a:prstDash val="solid"/>
                       <a:round/>
@@ -15826,7 +15164,7 @@
                       <a:tailEnd type="none" w="med" len="med"/>
                     </a:lnB>
                     <a:solidFill>
-                      <a:srgbClr val="F5F8FB"/>
+                      <a:srgbClr val="F6F8FA"/>
                     </a:solidFill>
                   </a:tcPr>
                 </a:tc>
@@ -15841,7 +15179,7 @@
                       <a:r>
                         <a:rPr lang="en-US" sz="1100" b="1" dirty="0">
                           <a:solidFill>
-                            <a:srgbClr val="64748B"/>
+                            <a:srgbClr val="5B6B7B"/>
                           </a:solidFill>
                           <a:latin typeface="Calibri" pitchFamily="34" charset="0"/>
                           <a:ea typeface="Calibri" pitchFamily="34" charset="-122"/>
@@ -15859,7 +15197,7 @@
                   <a:tcPr marL="91440" marR="91440" marT="45720" marB="45720" anchor="ctr">
                     <a:lnL w="6350" cap="flat" cmpd="sng" algn="ctr">
                       <a:solidFill>
-                        <a:srgbClr val="E2E8F0"/>
+                        <a:srgbClr val="E6E9EE"/>
                       </a:solidFill>
                       <a:prstDash val="solid"/>
                       <a:round/>
@@ -15868,7 +15206,7 @@
                     </a:lnL>
                     <a:lnR w="6350" cap="flat" cmpd="sng" algn="ctr">
                       <a:solidFill>
-                        <a:srgbClr val="E2E8F0"/>
+                        <a:srgbClr val="E6E9EE"/>
                       </a:solidFill>
                       <a:prstDash val="solid"/>
                       <a:round/>
@@ -15877,7 +15215,7 @@
                     </a:lnR>
                     <a:lnT w="6350" cap="flat" cmpd="sng" algn="ctr">
                       <a:solidFill>
-                        <a:srgbClr val="E2E8F0"/>
+                        <a:srgbClr val="E6E9EE"/>
                       </a:solidFill>
                       <a:prstDash val="solid"/>
                       <a:round/>
@@ -15886,7 +15224,7 @@
                     </a:lnT>
                     <a:lnB w="6350" cap="flat" cmpd="sng" algn="ctr">
                       <a:solidFill>
-                        <a:srgbClr val="E2E8F0"/>
+                        <a:srgbClr val="E6E9EE"/>
                       </a:solidFill>
                       <a:prstDash val="solid"/>
                       <a:round/>
@@ -15894,7 +15232,7 @@
                       <a:tailEnd type="none" w="med" len="med"/>
                     </a:lnB>
                     <a:solidFill>
-                      <a:srgbClr val="F5F8FB"/>
+                      <a:srgbClr val="F6F8FA"/>
                     </a:solidFill>
                   </a:tcPr>
                 </a:tc>
@@ -15909,7 +15247,7 @@
                       <a:r>
                         <a:rPr lang="en-US" sz="1100" b="1" dirty="0">
                           <a:solidFill>
-                            <a:srgbClr val="64748B"/>
+                            <a:srgbClr val="5B6B7B"/>
                           </a:solidFill>
                           <a:latin typeface="Calibri" pitchFamily="34" charset="0"/>
                           <a:ea typeface="Calibri" pitchFamily="34" charset="-122"/>
@@ -15927,7 +15265,7 @@
                   <a:tcPr marL="91440" marR="91440" marT="45720" marB="45720" anchor="ctr">
                     <a:lnL w="6350" cap="flat" cmpd="sng" algn="ctr">
                       <a:solidFill>
-                        <a:srgbClr val="E2E8F0"/>
+                        <a:srgbClr val="E6E9EE"/>
                       </a:solidFill>
                       <a:prstDash val="solid"/>
                       <a:round/>
@@ -15936,7 +15274,7 @@
                     </a:lnL>
                     <a:lnR w="6350" cap="flat" cmpd="sng" algn="ctr">
                       <a:solidFill>
-                        <a:srgbClr val="E2E8F0"/>
+                        <a:srgbClr val="E6E9EE"/>
                       </a:solidFill>
                       <a:prstDash val="solid"/>
                       <a:round/>
@@ -15945,7 +15283,7 @@
                     </a:lnR>
                     <a:lnT w="6350" cap="flat" cmpd="sng" algn="ctr">
                       <a:solidFill>
-                        <a:srgbClr val="E2E8F0"/>
+                        <a:srgbClr val="E6E9EE"/>
                       </a:solidFill>
                       <a:prstDash val="solid"/>
                       <a:round/>
@@ -15954,7 +15292,7 @@
                     </a:lnT>
                     <a:lnB w="6350" cap="flat" cmpd="sng" algn="ctr">
                       <a:solidFill>
-                        <a:srgbClr val="E2E8F0"/>
+                        <a:srgbClr val="E6E9EE"/>
                       </a:solidFill>
                       <a:prstDash val="solid"/>
                       <a:round/>
@@ -15962,12 +15300,12 @@
                       <a:tailEnd type="none" w="med" len="med"/>
                     </a:lnB>
                     <a:solidFill>
-                      <a:srgbClr val="F5F8FB"/>
+                      <a:srgbClr val="F6F8FA"/>
                     </a:solidFill>
                   </a:tcPr>
                 </a:tc>
               </a:tr>
-              <a:tr h="347472">
+              <a:tr h="384048">
                 <a:tc>
                   <a:txBody>
                     <a:bodyPr/>
@@ -15979,7 +15317,7 @@
                       <a:r>
                         <a:rPr lang="en-US" sz="1150" dirty="0">
                           <a:solidFill>
-                            <a:srgbClr val="334155"/>
+                            <a:srgbClr val="2B3F52"/>
                           </a:solidFill>
                           <a:latin typeface="Calibri" pitchFamily="34" charset="0"/>
                           <a:ea typeface="Calibri" pitchFamily="34" charset="-122"/>
@@ -15997,7 +15335,7 @@
                   <a:tcPr marL="91440" marR="91440" marT="45720" marB="45720" anchor="ctr">
                     <a:lnL w="6350" cap="flat" cmpd="sng" algn="ctr">
                       <a:solidFill>
-                        <a:srgbClr val="E2E8F0"/>
+                        <a:srgbClr val="E6E9EE"/>
                       </a:solidFill>
                       <a:prstDash val="solid"/>
                       <a:round/>
@@ -16006,7 +15344,7 @@
                     </a:lnL>
                     <a:lnR w="6350" cap="flat" cmpd="sng" algn="ctr">
                       <a:solidFill>
-                        <a:srgbClr val="E2E8F0"/>
+                        <a:srgbClr val="E6E9EE"/>
                       </a:solidFill>
                       <a:prstDash val="solid"/>
                       <a:round/>
@@ -16015,7 +15353,7 @@
                     </a:lnR>
                     <a:lnT w="6350" cap="flat" cmpd="sng" algn="ctr">
                       <a:solidFill>
-                        <a:srgbClr val="E2E8F0"/>
+                        <a:srgbClr val="E6E9EE"/>
                       </a:solidFill>
                       <a:prstDash val="solid"/>
                       <a:round/>
@@ -16024,7 +15362,7 @@
                     </a:lnT>
                     <a:lnB w="6350" cap="flat" cmpd="sng" algn="ctr">
                       <a:solidFill>
-                        <a:srgbClr val="E2E8F0"/>
+                        <a:srgbClr val="E6E9EE"/>
                       </a:solidFill>
                       <a:prstDash val="solid"/>
                       <a:round/>
@@ -16047,7 +15385,7 @@
                       <a:r>
                         <a:rPr lang="en-US" sz="1150" dirty="0">
                           <a:solidFill>
-                            <a:srgbClr val="334155"/>
+                            <a:srgbClr val="2B3F52"/>
                           </a:solidFill>
                           <a:latin typeface="Calibri" pitchFamily="34" charset="0"/>
                           <a:ea typeface="Calibri" pitchFamily="34" charset="-122"/>
@@ -16065,7 +15403,7 @@
                   <a:tcPr marL="91440" marR="91440" marT="45720" marB="45720" anchor="ctr">
                     <a:lnL w="6350" cap="flat" cmpd="sng" algn="ctr">
                       <a:solidFill>
-                        <a:srgbClr val="E2E8F0"/>
+                        <a:srgbClr val="E6E9EE"/>
                       </a:solidFill>
                       <a:prstDash val="solid"/>
                       <a:round/>
@@ -16074,7 +15412,7 @@
                     </a:lnL>
                     <a:lnR w="6350" cap="flat" cmpd="sng" algn="ctr">
                       <a:solidFill>
-                        <a:srgbClr val="E2E8F0"/>
+                        <a:srgbClr val="E6E9EE"/>
                       </a:solidFill>
                       <a:prstDash val="solid"/>
                       <a:round/>
@@ -16083,7 +15421,7 @@
                     </a:lnR>
                     <a:lnT w="6350" cap="flat" cmpd="sng" algn="ctr">
                       <a:solidFill>
-                        <a:srgbClr val="E2E8F0"/>
+                        <a:srgbClr val="E6E9EE"/>
                       </a:solidFill>
                       <a:prstDash val="solid"/>
                       <a:round/>
@@ -16092,7 +15430,7 @@
                     </a:lnT>
                     <a:lnB w="6350" cap="flat" cmpd="sng" algn="ctr">
                       <a:solidFill>
-                        <a:srgbClr val="E2E8F0"/>
+                        <a:srgbClr val="E6E9EE"/>
                       </a:solidFill>
                       <a:prstDash val="solid"/>
                       <a:round/>
@@ -16115,7 +15453,7 @@
                       <a:r>
                         <a:rPr lang="en-US" sz="1150" dirty="0">
                           <a:solidFill>
-                            <a:srgbClr val="334155"/>
+                            <a:srgbClr val="2B3F52"/>
                           </a:solidFill>
                           <a:latin typeface="Calibri" pitchFamily="34" charset="0"/>
                           <a:ea typeface="Calibri" pitchFamily="34" charset="-122"/>
@@ -16133,7 +15471,7 @@
                   <a:tcPr marL="91440" marR="91440" marT="45720" marB="45720" anchor="ctr">
                     <a:lnL w="6350" cap="flat" cmpd="sng" algn="ctr">
                       <a:solidFill>
-                        <a:srgbClr val="E2E8F0"/>
+                        <a:srgbClr val="E6E9EE"/>
                       </a:solidFill>
                       <a:prstDash val="solid"/>
                       <a:round/>
@@ -16142,7 +15480,7 @@
                     </a:lnL>
                     <a:lnR w="6350" cap="flat" cmpd="sng" algn="ctr">
                       <a:solidFill>
-                        <a:srgbClr val="E2E8F0"/>
+                        <a:srgbClr val="E6E9EE"/>
                       </a:solidFill>
                       <a:prstDash val="solid"/>
                       <a:round/>
@@ -16151,7 +15489,7 @@
                     </a:lnR>
                     <a:lnT w="6350" cap="flat" cmpd="sng" algn="ctr">
                       <a:solidFill>
-                        <a:srgbClr val="E2E8F0"/>
+                        <a:srgbClr val="E6E9EE"/>
                       </a:solidFill>
                       <a:prstDash val="solid"/>
                       <a:round/>
@@ -16160,7 +15498,7 @@
                     </a:lnT>
                     <a:lnB w="6350" cap="flat" cmpd="sng" algn="ctr">
                       <a:solidFill>
-                        <a:srgbClr val="E2E8F0"/>
+                        <a:srgbClr val="E6E9EE"/>
                       </a:solidFill>
                       <a:prstDash val="solid"/>
                       <a:round/>
@@ -16183,7 +15521,7 @@
                       <a:r>
                         <a:rPr lang="en-US" sz="1150" dirty="0">
                           <a:solidFill>
-                            <a:srgbClr val="DC2626"/>
+                            <a:srgbClr val="B3261E"/>
                           </a:solidFill>
                           <a:latin typeface="Calibri" pitchFamily="34" charset="0"/>
                           <a:ea typeface="Calibri" pitchFamily="34" charset="-122"/>
@@ -16201,7 +15539,7 @@
                   <a:tcPr marL="91440" marR="91440" marT="45720" marB="45720" anchor="ctr">
                     <a:lnL w="6350" cap="flat" cmpd="sng" algn="ctr">
                       <a:solidFill>
-                        <a:srgbClr val="E2E8F0"/>
+                        <a:srgbClr val="E6E9EE"/>
                       </a:solidFill>
                       <a:prstDash val="solid"/>
                       <a:round/>
@@ -16210,7 +15548,7 @@
                     </a:lnL>
                     <a:lnR w="6350" cap="flat" cmpd="sng" algn="ctr">
                       <a:solidFill>
-                        <a:srgbClr val="E2E8F0"/>
+                        <a:srgbClr val="E6E9EE"/>
                       </a:solidFill>
                       <a:prstDash val="solid"/>
                       <a:round/>
@@ -16219,7 +15557,7 @@
                     </a:lnR>
                     <a:lnT w="6350" cap="flat" cmpd="sng" algn="ctr">
                       <a:solidFill>
-                        <a:srgbClr val="E2E8F0"/>
+                        <a:srgbClr val="E6E9EE"/>
                       </a:solidFill>
                       <a:prstDash val="solid"/>
                       <a:round/>
@@ -16228,7 +15566,7 @@
                     </a:lnT>
                     <a:lnB w="6350" cap="flat" cmpd="sng" algn="ctr">
                       <a:solidFill>
-                        <a:srgbClr val="E2E8F0"/>
+                        <a:srgbClr val="E6E9EE"/>
                       </a:solidFill>
                       <a:prstDash val="solid"/>
                       <a:round/>
@@ -16241,7 +15579,7 @@
                   </a:tcPr>
                 </a:tc>
               </a:tr>
-              <a:tr h="347472">
+              <a:tr h="384048">
                 <a:tc>
                   <a:txBody>
                     <a:bodyPr/>
@@ -16253,7 +15591,7 @@
                       <a:r>
                         <a:rPr lang="en-US" sz="1150" dirty="0">
                           <a:solidFill>
-                            <a:srgbClr val="334155"/>
+                            <a:srgbClr val="2B3F52"/>
                           </a:solidFill>
                           <a:latin typeface="Calibri" pitchFamily="34" charset="0"/>
                           <a:ea typeface="Calibri" pitchFamily="34" charset="-122"/>
@@ -16271,7 +15609,7 @@
                   <a:tcPr marL="91440" marR="91440" marT="45720" marB="45720" anchor="ctr">
                     <a:lnL w="6350" cap="flat" cmpd="sng" algn="ctr">
                       <a:solidFill>
-                        <a:srgbClr val="E2E8F0"/>
+                        <a:srgbClr val="E6E9EE"/>
                       </a:solidFill>
                       <a:prstDash val="solid"/>
                       <a:round/>
@@ -16280,7 +15618,7 @@
                     </a:lnL>
                     <a:lnR w="6350" cap="flat" cmpd="sng" algn="ctr">
                       <a:solidFill>
-                        <a:srgbClr val="E2E8F0"/>
+                        <a:srgbClr val="E6E9EE"/>
                       </a:solidFill>
                       <a:prstDash val="solid"/>
                       <a:round/>
@@ -16289,7 +15627,7 @@
                     </a:lnR>
                     <a:lnT w="6350" cap="flat" cmpd="sng" algn="ctr">
                       <a:solidFill>
-                        <a:srgbClr val="E2E8F0"/>
+                        <a:srgbClr val="E6E9EE"/>
                       </a:solidFill>
                       <a:prstDash val="solid"/>
                       <a:round/>
@@ -16298,7 +15636,7 @@
                     </a:lnT>
                     <a:lnB w="6350" cap="flat" cmpd="sng" algn="ctr">
                       <a:solidFill>
-                        <a:srgbClr val="E2E8F0"/>
+                        <a:srgbClr val="E6E9EE"/>
                       </a:solidFill>
                       <a:prstDash val="solid"/>
                       <a:round/>
@@ -16321,7 +15659,7 @@
                       <a:r>
                         <a:rPr lang="en-US" sz="1150" dirty="0">
                           <a:solidFill>
-                            <a:srgbClr val="334155"/>
+                            <a:srgbClr val="2B3F52"/>
                           </a:solidFill>
                           <a:latin typeface="Calibri" pitchFamily="34" charset="0"/>
                           <a:ea typeface="Calibri" pitchFamily="34" charset="-122"/>
@@ -16339,7 +15677,7 @@
                   <a:tcPr marL="91440" marR="91440" marT="45720" marB="45720" anchor="ctr">
                     <a:lnL w="6350" cap="flat" cmpd="sng" algn="ctr">
                       <a:solidFill>
-                        <a:srgbClr val="E2E8F0"/>
+                        <a:srgbClr val="E6E9EE"/>
                       </a:solidFill>
                       <a:prstDash val="solid"/>
                       <a:round/>
@@ -16348,7 +15686,7 @@
                     </a:lnL>
                     <a:lnR w="6350" cap="flat" cmpd="sng" algn="ctr">
                       <a:solidFill>
-                        <a:srgbClr val="E2E8F0"/>
+                        <a:srgbClr val="E6E9EE"/>
                       </a:solidFill>
                       <a:prstDash val="solid"/>
                       <a:round/>
@@ -16357,7 +15695,7 @@
                     </a:lnR>
                     <a:lnT w="6350" cap="flat" cmpd="sng" algn="ctr">
                       <a:solidFill>
-                        <a:srgbClr val="E2E8F0"/>
+                        <a:srgbClr val="E6E9EE"/>
                       </a:solidFill>
                       <a:prstDash val="solid"/>
                       <a:round/>
@@ -16366,7 +15704,7 @@
                     </a:lnT>
                     <a:lnB w="6350" cap="flat" cmpd="sng" algn="ctr">
                       <a:solidFill>
-                        <a:srgbClr val="E2E8F0"/>
+                        <a:srgbClr val="E6E9EE"/>
                       </a:solidFill>
                       <a:prstDash val="solid"/>
                       <a:round/>
@@ -16389,7 +15727,7 @@
                       <a:r>
                         <a:rPr lang="en-US" sz="1150" dirty="0">
                           <a:solidFill>
-                            <a:srgbClr val="334155"/>
+                            <a:srgbClr val="2B3F52"/>
                           </a:solidFill>
                           <a:latin typeface="Calibri" pitchFamily="34" charset="0"/>
                           <a:ea typeface="Calibri" pitchFamily="34" charset="-122"/>
@@ -16407,7 +15745,7 @@
                   <a:tcPr marL="91440" marR="91440" marT="45720" marB="45720" anchor="ctr">
                     <a:lnL w="6350" cap="flat" cmpd="sng" algn="ctr">
                       <a:solidFill>
-                        <a:srgbClr val="E2E8F0"/>
+                        <a:srgbClr val="E6E9EE"/>
                       </a:solidFill>
                       <a:prstDash val="solid"/>
                       <a:round/>
@@ -16416,7 +15754,7 @@
                     </a:lnL>
                     <a:lnR w="6350" cap="flat" cmpd="sng" algn="ctr">
                       <a:solidFill>
-                        <a:srgbClr val="E2E8F0"/>
+                        <a:srgbClr val="E6E9EE"/>
                       </a:solidFill>
                       <a:prstDash val="solid"/>
                       <a:round/>
@@ -16425,7 +15763,7 @@
                     </a:lnR>
                     <a:lnT w="6350" cap="flat" cmpd="sng" algn="ctr">
                       <a:solidFill>
-                        <a:srgbClr val="E2E8F0"/>
+                        <a:srgbClr val="E6E9EE"/>
                       </a:solidFill>
                       <a:prstDash val="solid"/>
                       <a:round/>
@@ -16434,7 +15772,7 @@
                     </a:lnT>
                     <a:lnB w="6350" cap="flat" cmpd="sng" algn="ctr">
                       <a:solidFill>
-                        <a:srgbClr val="E2E8F0"/>
+                        <a:srgbClr val="E6E9EE"/>
                       </a:solidFill>
                       <a:prstDash val="solid"/>
                       <a:round/>
@@ -16457,7 +15795,7 @@
                       <a:r>
                         <a:rPr lang="en-US" sz="1150" dirty="0">
                           <a:solidFill>
-                            <a:srgbClr val="DC2626"/>
+                            <a:srgbClr val="B3261E"/>
                           </a:solidFill>
                           <a:latin typeface="Calibri" pitchFamily="34" charset="0"/>
                           <a:ea typeface="Calibri" pitchFamily="34" charset="-122"/>
@@ -16475,7 +15813,7 @@
                   <a:tcPr marL="91440" marR="91440" marT="45720" marB="45720" anchor="ctr">
                     <a:lnL w="6350" cap="flat" cmpd="sng" algn="ctr">
                       <a:solidFill>
-                        <a:srgbClr val="E2E8F0"/>
+                        <a:srgbClr val="E6E9EE"/>
                       </a:solidFill>
                       <a:prstDash val="solid"/>
                       <a:round/>
@@ -16484,7 +15822,7 @@
                     </a:lnL>
                     <a:lnR w="6350" cap="flat" cmpd="sng" algn="ctr">
                       <a:solidFill>
-                        <a:srgbClr val="E2E8F0"/>
+                        <a:srgbClr val="E6E9EE"/>
                       </a:solidFill>
                       <a:prstDash val="solid"/>
                       <a:round/>
@@ -16493,7 +15831,7 @@
                     </a:lnR>
                     <a:lnT w="6350" cap="flat" cmpd="sng" algn="ctr">
                       <a:solidFill>
-                        <a:srgbClr val="E2E8F0"/>
+                        <a:srgbClr val="E6E9EE"/>
                       </a:solidFill>
                       <a:prstDash val="solid"/>
                       <a:round/>
@@ -16502,7 +15840,7 @@
                     </a:lnT>
                     <a:lnB w="6350" cap="flat" cmpd="sng" algn="ctr">
                       <a:solidFill>
-                        <a:srgbClr val="E2E8F0"/>
+                        <a:srgbClr val="E6E9EE"/>
                       </a:solidFill>
                       <a:prstDash val="solid"/>
                       <a:round/>
@@ -16515,7 +15853,7 @@
                   </a:tcPr>
                 </a:tc>
               </a:tr>
-              <a:tr h="347472">
+              <a:tr h="384048">
                 <a:tc>
                   <a:txBody>
                     <a:bodyPr/>
@@ -16527,7 +15865,7 @@
                       <a:r>
                         <a:rPr lang="en-US" sz="1150" dirty="0">
                           <a:solidFill>
-                            <a:srgbClr val="334155"/>
+                            <a:srgbClr val="2B3F52"/>
                           </a:solidFill>
                           <a:latin typeface="Calibri" pitchFamily="34" charset="0"/>
                           <a:ea typeface="Calibri" pitchFamily="34" charset="-122"/>
@@ -16545,7 +15883,7 @@
                   <a:tcPr marL="91440" marR="91440" marT="45720" marB="45720" anchor="ctr">
                     <a:lnL w="6350" cap="flat" cmpd="sng" algn="ctr">
                       <a:solidFill>
-                        <a:srgbClr val="E2E8F0"/>
+                        <a:srgbClr val="E6E9EE"/>
                       </a:solidFill>
                       <a:prstDash val="solid"/>
                       <a:round/>
@@ -16554,7 +15892,7 @@
                     </a:lnL>
                     <a:lnR w="6350" cap="flat" cmpd="sng" algn="ctr">
                       <a:solidFill>
-                        <a:srgbClr val="E2E8F0"/>
+                        <a:srgbClr val="E6E9EE"/>
                       </a:solidFill>
                       <a:prstDash val="solid"/>
                       <a:round/>
@@ -16563,7 +15901,7 @@
                     </a:lnR>
                     <a:lnT w="6350" cap="flat" cmpd="sng" algn="ctr">
                       <a:solidFill>
-                        <a:srgbClr val="E2E8F0"/>
+                        <a:srgbClr val="E6E9EE"/>
                       </a:solidFill>
                       <a:prstDash val="solid"/>
                       <a:round/>
@@ -16572,7 +15910,7 @@
                     </a:lnT>
                     <a:lnB w="6350" cap="flat" cmpd="sng" algn="ctr">
                       <a:solidFill>
-                        <a:srgbClr val="E2E8F0"/>
+                        <a:srgbClr val="E6E9EE"/>
                       </a:solidFill>
                       <a:prstDash val="solid"/>
                       <a:round/>
@@ -16595,7 +15933,7 @@
                       <a:r>
                         <a:rPr lang="en-US" sz="1150" dirty="0">
                           <a:solidFill>
-                            <a:srgbClr val="334155"/>
+                            <a:srgbClr val="2B3F52"/>
                           </a:solidFill>
                           <a:latin typeface="Calibri" pitchFamily="34" charset="0"/>
                           <a:ea typeface="Calibri" pitchFamily="34" charset="-122"/>
@@ -16613,7 +15951,7 @@
                   <a:tcPr marL="91440" marR="91440" marT="45720" marB="45720" anchor="ctr">
                     <a:lnL w="6350" cap="flat" cmpd="sng" algn="ctr">
                       <a:solidFill>
-                        <a:srgbClr val="E2E8F0"/>
+                        <a:srgbClr val="E6E9EE"/>
                       </a:solidFill>
                       <a:prstDash val="solid"/>
                       <a:round/>
@@ -16622,7 +15960,7 @@
                     </a:lnL>
                     <a:lnR w="6350" cap="flat" cmpd="sng" algn="ctr">
                       <a:solidFill>
-                        <a:srgbClr val="E2E8F0"/>
+                        <a:srgbClr val="E6E9EE"/>
                       </a:solidFill>
                       <a:prstDash val="solid"/>
                       <a:round/>
@@ -16631,7 +15969,7 @@
                     </a:lnR>
                     <a:lnT w="6350" cap="flat" cmpd="sng" algn="ctr">
                       <a:solidFill>
-                        <a:srgbClr val="E2E8F0"/>
+                        <a:srgbClr val="E6E9EE"/>
                       </a:solidFill>
                       <a:prstDash val="solid"/>
                       <a:round/>
@@ -16640,7 +15978,7 @@
                     </a:lnT>
                     <a:lnB w="6350" cap="flat" cmpd="sng" algn="ctr">
                       <a:solidFill>
-                        <a:srgbClr val="E2E8F0"/>
+                        <a:srgbClr val="E6E9EE"/>
                       </a:solidFill>
                       <a:prstDash val="solid"/>
                       <a:round/>
@@ -16663,7 +16001,7 @@
                       <a:r>
                         <a:rPr lang="en-US" sz="1150" dirty="0">
                           <a:solidFill>
-                            <a:srgbClr val="334155"/>
+                            <a:srgbClr val="2B3F52"/>
                           </a:solidFill>
                           <a:latin typeface="Calibri" pitchFamily="34" charset="0"/>
                           <a:ea typeface="Calibri" pitchFamily="34" charset="-122"/>
@@ -16681,7 +16019,7 @@
                   <a:tcPr marL="91440" marR="91440" marT="45720" marB="45720" anchor="ctr">
                     <a:lnL w="6350" cap="flat" cmpd="sng" algn="ctr">
                       <a:solidFill>
-                        <a:srgbClr val="E2E8F0"/>
+                        <a:srgbClr val="E6E9EE"/>
                       </a:solidFill>
                       <a:prstDash val="solid"/>
                       <a:round/>
@@ -16690,7 +16028,7 @@
                     </a:lnL>
                     <a:lnR w="6350" cap="flat" cmpd="sng" algn="ctr">
                       <a:solidFill>
-                        <a:srgbClr val="E2E8F0"/>
+                        <a:srgbClr val="E6E9EE"/>
                       </a:solidFill>
                       <a:prstDash val="solid"/>
                       <a:round/>
@@ -16699,7 +16037,7 @@
                     </a:lnR>
                     <a:lnT w="6350" cap="flat" cmpd="sng" algn="ctr">
                       <a:solidFill>
-                        <a:srgbClr val="E2E8F0"/>
+                        <a:srgbClr val="E6E9EE"/>
                       </a:solidFill>
                       <a:prstDash val="solid"/>
                       <a:round/>
@@ -16708,7 +16046,7 @@
                     </a:lnT>
                     <a:lnB w="6350" cap="flat" cmpd="sng" algn="ctr">
                       <a:solidFill>
-                        <a:srgbClr val="E2E8F0"/>
+                        <a:srgbClr val="E6E9EE"/>
                       </a:solidFill>
                       <a:prstDash val="solid"/>
                       <a:round/>
@@ -16749,7 +16087,7 @@
                   <a:tcPr marL="91440" marR="91440" marT="45720" marB="45720" anchor="ctr">
                     <a:lnL w="6350" cap="flat" cmpd="sng" algn="ctr">
                       <a:solidFill>
-                        <a:srgbClr val="E2E8F0"/>
+                        <a:srgbClr val="E6E9EE"/>
                       </a:solidFill>
                       <a:prstDash val="solid"/>
                       <a:round/>
@@ -16758,7 +16096,7 @@
                     </a:lnL>
                     <a:lnR w="6350" cap="flat" cmpd="sng" algn="ctr">
                       <a:solidFill>
-                        <a:srgbClr val="E2E8F0"/>
+                        <a:srgbClr val="E6E9EE"/>
                       </a:solidFill>
                       <a:prstDash val="solid"/>
                       <a:round/>
@@ -16767,7 +16105,7 @@
                     </a:lnR>
                     <a:lnT w="6350" cap="flat" cmpd="sng" algn="ctr">
                       <a:solidFill>
-                        <a:srgbClr val="E2E8F0"/>
+                        <a:srgbClr val="E6E9EE"/>
                       </a:solidFill>
                       <a:prstDash val="solid"/>
                       <a:round/>
@@ -16776,7 +16114,7 @@
                     </a:lnT>
                     <a:lnB w="6350" cap="flat" cmpd="sng" algn="ctr">
                       <a:solidFill>
-                        <a:srgbClr val="E2E8F0"/>
+                        <a:srgbClr val="E6E9EE"/>
                       </a:solidFill>
                       <a:prstDash val="solid"/>
                       <a:round/>
@@ -16789,7 +16127,7 @@
                   </a:tcPr>
                 </a:tc>
               </a:tr>
-              <a:tr h="347472">
+              <a:tr h="384048">
                 <a:tc>
                   <a:txBody>
                     <a:bodyPr/>
@@ -16801,7 +16139,7 @@
                       <a:r>
                         <a:rPr lang="en-US" sz="1150" dirty="0">
                           <a:solidFill>
-                            <a:srgbClr val="334155"/>
+                            <a:srgbClr val="2B3F52"/>
                           </a:solidFill>
                           <a:latin typeface="Calibri" pitchFamily="34" charset="0"/>
                           <a:ea typeface="Calibri" pitchFamily="34" charset="-122"/>
@@ -16819,7 +16157,7 @@
                   <a:tcPr marL="91440" marR="91440" marT="45720" marB="45720" anchor="ctr">
                     <a:lnL w="6350" cap="flat" cmpd="sng" algn="ctr">
                       <a:solidFill>
-                        <a:srgbClr val="E2E8F0"/>
+                        <a:srgbClr val="E6E9EE"/>
                       </a:solidFill>
                       <a:prstDash val="solid"/>
                       <a:round/>
@@ -16828,7 +16166,7 @@
                     </a:lnL>
                     <a:lnR w="6350" cap="flat" cmpd="sng" algn="ctr">
                       <a:solidFill>
-                        <a:srgbClr val="E2E8F0"/>
+                        <a:srgbClr val="E6E9EE"/>
                       </a:solidFill>
                       <a:prstDash val="solid"/>
                       <a:round/>
@@ -16837,7 +16175,7 @@
                     </a:lnR>
                     <a:lnT w="6350" cap="flat" cmpd="sng" algn="ctr">
                       <a:solidFill>
-                        <a:srgbClr val="E2E8F0"/>
+                        <a:srgbClr val="E6E9EE"/>
                       </a:solidFill>
                       <a:prstDash val="solid"/>
                       <a:round/>
@@ -16846,7 +16184,7 @@
                     </a:lnT>
                     <a:lnB w="6350" cap="flat" cmpd="sng" algn="ctr">
                       <a:solidFill>
-                        <a:srgbClr val="E2E8F0"/>
+                        <a:srgbClr val="E6E9EE"/>
                       </a:solidFill>
                       <a:prstDash val="solid"/>
                       <a:round/>
@@ -16869,7 +16207,7 @@
                       <a:r>
                         <a:rPr lang="en-US" sz="1150" dirty="0">
                           <a:solidFill>
-                            <a:srgbClr val="334155"/>
+                            <a:srgbClr val="2B3F52"/>
                           </a:solidFill>
                           <a:latin typeface="Calibri" pitchFamily="34" charset="0"/>
                           <a:ea typeface="Calibri" pitchFamily="34" charset="-122"/>
@@ -16887,7 +16225,7 @@
                   <a:tcPr marL="91440" marR="91440" marT="45720" marB="45720" anchor="ctr">
                     <a:lnL w="6350" cap="flat" cmpd="sng" algn="ctr">
                       <a:solidFill>
-                        <a:srgbClr val="E2E8F0"/>
+                        <a:srgbClr val="E6E9EE"/>
                       </a:solidFill>
                       <a:prstDash val="solid"/>
                       <a:round/>
@@ -16896,7 +16234,7 @@
                     </a:lnL>
                     <a:lnR w="6350" cap="flat" cmpd="sng" algn="ctr">
                       <a:solidFill>
-                        <a:srgbClr val="E2E8F0"/>
+                        <a:srgbClr val="E6E9EE"/>
                       </a:solidFill>
                       <a:prstDash val="solid"/>
                       <a:round/>
@@ -16905,7 +16243,7 @@
                     </a:lnR>
                     <a:lnT w="6350" cap="flat" cmpd="sng" algn="ctr">
                       <a:solidFill>
-                        <a:srgbClr val="E2E8F0"/>
+                        <a:srgbClr val="E6E9EE"/>
                       </a:solidFill>
                       <a:prstDash val="solid"/>
                       <a:round/>
@@ -16914,7 +16252,7 @@
                     </a:lnT>
                     <a:lnB w="6350" cap="flat" cmpd="sng" algn="ctr">
                       <a:solidFill>
-                        <a:srgbClr val="E2E8F0"/>
+                        <a:srgbClr val="E6E9EE"/>
                       </a:solidFill>
                       <a:prstDash val="solid"/>
                       <a:round/>
@@ -16937,7 +16275,7 @@
                       <a:r>
                         <a:rPr lang="en-US" sz="1150" dirty="0">
                           <a:solidFill>
-                            <a:srgbClr val="334155"/>
+                            <a:srgbClr val="2B3F52"/>
                           </a:solidFill>
                           <a:latin typeface="Calibri" pitchFamily="34" charset="0"/>
                           <a:ea typeface="Calibri" pitchFamily="34" charset="-122"/>
@@ -16955,7 +16293,7 @@
                   <a:tcPr marL="91440" marR="91440" marT="45720" marB="45720" anchor="ctr">
                     <a:lnL w="6350" cap="flat" cmpd="sng" algn="ctr">
                       <a:solidFill>
-                        <a:srgbClr val="E2E8F0"/>
+                        <a:srgbClr val="E6E9EE"/>
                       </a:solidFill>
                       <a:prstDash val="solid"/>
                       <a:round/>
@@ -16964,7 +16302,7 @@
                     </a:lnL>
                     <a:lnR w="6350" cap="flat" cmpd="sng" algn="ctr">
                       <a:solidFill>
-                        <a:srgbClr val="E2E8F0"/>
+                        <a:srgbClr val="E6E9EE"/>
                       </a:solidFill>
                       <a:prstDash val="solid"/>
                       <a:round/>
@@ -16973,7 +16311,7 @@
                     </a:lnR>
                     <a:lnT w="6350" cap="flat" cmpd="sng" algn="ctr">
                       <a:solidFill>
-                        <a:srgbClr val="E2E8F0"/>
+                        <a:srgbClr val="E6E9EE"/>
                       </a:solidFill>
                       <a:prstDash val="solid"/>
                       <a:round/>
@@ -16982,7 +16320,7 @@
                     </a:lnT>
                     <a:lnB w="6350" cap="flat" cmpd="sng" algn="ctr">
                       <a:solidFill>
-                        <a:srgbClr val="E2E8F0"/>
+                        <a:srgbClr val="E6E9EE"/>
                       </a:solidFill>
                       <a:prstDash val="solid"/>
                       <a:round/>
@@ -17023,7 +16361,7 @@
                   <a:tcPr marL="91440" marR="91440" marT="45720" marB="45720" anchor="ctr">
                     <a:lnL w="6350" cap="flat" cmpd="sng" algn="ctr">
                       <a:solidFill>
-                        <a:srgbClr val="E2E8F0"/>
+                        <a:srgbClr val="E6E9EE"/>
                       </a:solidFill>
                       <a:prstDash val="solid"/>
                       <a:round/>
@@ -17032,7 +16370,7 @@
                     </a:lnL>
                     <a:lnR w="6350" cap="flat" cmpd="sng" algn="ctr">
                       <a:solidFill>
-                        <a:srgbClr val="E2E8F0"/>
+                        <a:srgbClr val="E6E9EE"/>
                       </a:solidFill>
                       <a:prstDash val="solid"/>
                       <a:round/>
@@ -17041,7 +16379,7 @@
                     </a:lnR>
                     <a:lnT w="6350" cap="flat" cmpd="sng" algn="ctr">
                       <a:solidFill>
-                        <a:srgbClr val="E2E8F0"/>
+                        <a:srgbClr val="E6E9EE"/>
                       </a:solidFill>
                       <a:prstDash val="solid"/>
                       <a:round/>
@@ -17050,7 +16388,7 @@
                     </a:lnT>
                     <a:lnB w="6350" cap="flat" cmpd="sng" algn="ctr">
                       <a:solidFill>
-                        <a:srgbClr val="E2E8F0"/>
+                        <a:srgbClr val="E6E9EE"/>
                       </a:solidFill>
                       <a:prstDash val="solid"/>
                       <a:round/>
@@ -17063,7 +16401,7 @@
                   </a:tcPr>
                 </a:tc>
               </a:tr>
-              <a:tr h="347472">
+              <a:tr h="384048">
                 <a:tc>
                   <a:txBody>
                     <a:bodyPr/>
@@ -17075,7 +16413,7 @@
                       <a:r>
                         <a:rPr lang="en-US" sz="1150" b="1" dirty="0">
                           <a:solidFill>
-                            <a:srgbClr val="334155"/>
+                            <a:srgbClr val="2B3F52"/>
                           </a:solidFill>
                           <a:latin typeface="Calibri" pitchFamily="34" charset="0"/>
                           <a:ea typeface="Calibri" pitchFamily="34" charset="-122"/>
@@ -17093,7 +16431,7 @@
                   <a:tcPr marL="91440" marR="91440" marT="45720" marB="45720" anchor="ctr">
                     <a:lnL w="6350" cap="flat" cmpd="sng" algn="ctr">
                       <a:solidFill>
-                        <a:srgbClr val="E2E8F0"/>
+                        <a:srgbClr val="E6E9EE"/>
                       </a:solidFill>
                       <a:prstDash val="solid"/>
                       <a:round/>
@@ -17102,7 +16440,7 @@
                     </a:lnL>
                     <a:lnR w="6350" cap="flat" cmpd="sng" algn="ctr">
                       <a:solidFill>
-                        <a:srgbClr val="E2E8F0"/>
+                        <a:srgbClr val="E6E9EE"/>
                       </a:solidFill>
                       <a:prstDash val="solid"/>
                       <a:round/>
@@ -17111,7 +16449,7 @@
                     </a:lnR>
                     <a:lnT w="6350" cap="flat" cmpd="sng" algn="ctr">
                       <a:solidFill>
-                        <a:srgbClr val="E2E8F0"/>
+                        <a:srgbClr val="E6E9EE"/>
                       </a:solidFill>
                       <a:prstDash val="solid"/>
                       <a:round/>
@@ -17120,7 +16458,7 @@
                     </a:lnT>
                     <a:lnB w="6350" cap="flat" cmpd="sng" algn="ctr">
                       <a:solidFill>
-                        <a:srgbClr val="E2E8F0"/>
+                        <a:srgbClr val="E6E9EE"/>
                       </a:solidFill>
                       <a:prstDash val="solid"/>
                       <a:round/>
@@ -17128,7 +16466,7 @@
                       <a:tailEnd type="none" w="med" len="med"/>
                     </a:lnB>
                     <a:solidFill>
-                      <a:srgbClr val="EEF2FC"/>
+                      <a:srgbClr val="EAF2F0"/>
                     </a:solidFill>
                   </a:tcPr>
                 </a:tc>
@@ -17143,7 +16481,7 @@
                       <a:r>
                         <a:rPr lang="en-US" sz="1150" b="1" dirty="0">
                           <a:solidFill>
-                            <a:srgbClr val="334155"/>
+                            <a:srgbClr val="2B3F52"/>
                           </a:solidFill>
                           <a:latin typeface="Calibri" pitchFamily="34" charset="0"/>
                           <a:ea typeface="Calibri" pitchFamily="34" charset="-122"/>
@@ -17161,7 +16499,7 @@
                   <a:tcPr marL="91440" marR="91440" marT="45720" marB="45720" anchor="ctr">
                     <a:lnL w="6350" cap="flat" cmpd="sng" algn="ctr">
                       <a:solidFill>
-                        <a:srgbClr val="E2E8F0"/>
+                        <a:srgbClr val="E6E9EE"/>
                       </a:solidFill>
                       <a:prstDash val="solid"/>
                       <a:round/>
@@ -17170,7 +16508,7 @@
                     </a:lnL>
                     <a:lnR w="6350" cap="flat" cmpd="sng" algn="ctr">
                       <a:solidFill>
-                        <a:srgbClr val="E2E8F0"/>
+                        <a:srgbClr val="E6E9EE"/>
                       </a:solidFill>
                       <a:prstDash val="solid"/>
                       <a:round/>
@@ -17179,7 +16517,7 @@
                     </a:lnR>
                     <a:lnT w="6350" cap="flat" cmpd="sng" algn="ctr">
                       <a:solidFill>
-                        <a:srgbClr val="E2E8F0"/>
+                        <a:srgbClr val="E6E9EE"/>
                       </a:solidFill>
                       <a:prstDash val="solid"/>
                       <a:round/>
@@ -17188,7 +16526,7 @@
                     </a:lnT>
                     <a:lnB w="6350" cap="flat" cmpd="sng" algn="ctr">
                       <a:solidFill>
-                        <a:srgbClr val="E2E8F0"/>
+                        <a:srgbClr val="E6E9EE"/>
                       </a:solidFill>
                       <a:prstDash val="solid"/>
                       <a:round/>
@@ -17196,7 +16534,7 @@
                       <a:tailEnd type="none" w="med" len="med"/>
                     </a:lnB>
                     <a:solidFill>
-                      <a:srgbClr val="EEF2FC"/>
+                      <a:srgbClr val="EAF2F0"/>
                     </a:solidFill>
                   </a:tcPr>
                 </a:tc>
@@ -17211,7 +16549,7 @@
                       <a:r>
                         <a:rPr lang="en-US" sz="1150" b="1" dirty="0">
                           <a:solidFill>
-                            <a:srgbClr val="334155"/>
+                            <a:srgbClr val="2B3F52"/>
                           </a:solidFill>
                           <a:latin typeface="Calibri" pitchFamily="34" charset="0"/>
                           <a:ea typeface="Calibri" pitchFamily="34" charset="-122"/>
@@ -17229,7 +16567,7 @@
                   <a:tcPr marL="91440" marR="91440" marT="45720" marB="45720" anchor="ctr">
                     <a:lnL w="6350" cap="flat" cmpd="sng" algn="ctr">
                       <a:solidFill>
-                        <a:srgbClr val="E2E8F0"/>
+                        <a:srgbClr val="E6E9EE"/>
                       </a:solidFill>
                       <a:prstDash val="solid"/>
                       <a:round/>
@@ -17238,7 +16576,7 @@
                     </a:lnL>
                     <a:lnR w="6350" cap="flat" cmpd="sng" algn="ctr">
                       <a:solidFill>
-                        <a:srgbClr val="E2E8F0"/>
+                        <a:srgbClr val="E6E9EE"/>
                       </a:solidFill>
                       <a:prstDash val="solid"/>
                       <a:round/>
@@ -17247,7 +16585,7 @@
                     </a:lnR>
                     <a:lnT w="6350" cap="flat" cmpd="sng" algn="ctr">
                       <a:solidFill>
-                        <a:srgbClr val="E2E8F0"/>
+                        <a:srgbClr val="E6E9EE"/>
                       </a:solidFill>
                       <a:prstDash val="solid"/>
                       <a:round/>
@@ -17256,7 +16594,7 @@
                     </a:lnT>
                     <a:lnB w="6350" cap="flat" cmpd="sng" algn="ctr">
                       <a:solidFill>
-                        <a:srgbClr val="E2E8F0"/>
+                        <a:srgbClr val="E6E9EE"/>
                       </a:solidFill>
                       <a:prstDash val="solid"/>
                       <a:round/>
@@ -17264,7 +16602,7 @@
                       <a:tailEnd type="none" w="med" len="med"/>
                     </a:lnB>
                     <a:solidFill>
-                      <a:srgbClr val="EEF2FC"/>
+                      <a:srgbClr val="EAF2F0"/>
                     </a:solidFill>
                   </a:tcPr>
                 </a:tc>
@@ -17297,7 +16635,7 @@
                   <a:tcPr marL="91440" marR="91440" marT="45720" marB="45720" anchor="ctr">
                     <a:lnL w="6350" cap="flat" cmpd="sng" algn="ctr">
                       <a:solidFill>
-                        <a:srgbClr val="E2E8F0"/>
+                        <a:srgbClr val="E6E9EE"/>
                       </a:solidFill>
                       <a:prstDash val="solid"/>
                       <a:round/>
@@ -17306,7 +16644,7 @@
                     </a:lnL>
                     <a:lnR w="6350" cap="flat" cmpd="sng" algn="ctr">
                       <a:solidFill>
-                        <a:srgbClr val="E2E8F0"/>
+                        <a:srgbClr val="E6E9EE"/>
                       </a:solidFill>
                       <a:prstDash val="solid"/>
                       <a:round/>
@@ -17315,7 +16653,7 @@
                     </a:lnR>
                     <a:lnT w="6350" cap="flat" cmpd="sng" algn="ctr">
                       <a:solidFill>
-                        <a:srgbClr val="E2E8F0"/>
+                        <a:srgbClr val="E6E9EE"/>
                       </a:solidFill>
                       <a:prstDash val="solid"/>
                       <a:round/>
@@ -17324,7 +16662,7 @@
                     </a:lnT>
                     <a:lnB w="6350" cap="flat" cmpd="sng" algn="ctr">
                       <a:solidFill>
-                        <a:srgbClr val="E2E8F0"/>
+                        <a:srgbClr val="E6E9EE"/>
                       </a:solidFill>
                       <a:prstDash val="solid"/>
                       <a:round/>
@@ -17332,7 +16670,7 @@
                       <a:tailEnd type="none" w="med" len="med"/>
                     </a:lnB>
                     <a:solidFill>
-                      <a:srgbClr val="EEF2FC"/>
+                      <a:srgbClr val="EAF2F0"/>
                     </a:solidFill>
                   </a:tcPr>
                 </a:tc>
@@ -17349,7 +16687,7 @@
         </p:nvSpPr>
         <p:spPr>
           <a:xfrm>
-            <a:off x="6492240" y="1371600"/>
+            <a:off x="6492240" y="1417320"/>
             <a:ext cx="5212080" cy="274320"/>
           </a:xfrm>
           <a:prstGeom prst="rect">
@@ -17368,13 +16706,13 @@
             <a:r>
               <a:rPr lang="en-US" sz="1200" b="1" dirty="0">
                 <a:solidFill>
-                  <a:srgbClr val="334155"/>
+                  <a:srgbClr val="2B3F52"/>
                 </a:solidFill>
                 <a:latin typeface="Calibri" pitchFamily="34" charset="0"/>
                 <a:ea typeface="Calibri" pitchFamily="34" charset="-122"/>
                 <a:cs typeface="Calibri" pitchFamily="34" charset="-120"/>
               </a:rPr>
-              <a:t>Cost by ledger head, FY27 actual to date (Rs Lakh)</a:t>
+              <a:t>Cost composition, share of spend to date (%)</a:t>
             </a:r>
             <a:endParaRPr lang="en-US" sz="1200" dirty="0"/>
           </a:p>
@@ -17387,8 +16725,8 @@
           <p:nvPr/>
         </p:nvGraphicFramePr>
         <p:xfrm>
-          <a:off x="6400800" y="1645920"/>
-          <a:ext cx="5394960" cy="2468880"/>
+          <a:off x="6400800" y="1737360"/>
+          <a:ext cx="5394960" cy="3566160"/>
         </p:xfrm>
         <a:graphic xmlns:a="http://schemas.openxmlformats.org/drawingml/2006/main">
           <a:graphicData uri="http://schemas.openxmlformats.org/drawingml/2006/chart">
@@ -17404,126 +16742,75 @@
         </p:nvSpPr>
         <p:spPr>
           <a:xfrm>
-            <a:off x="566928" y="4160520"/>
-            <a:ext cx="7315200" cy="274320"/>
-          </a:xfrm>
-          <a:prstGeom prst="rect">
-            <a:avLst/>
-          </a:prstGeom>
-          <a:noFill/>
-          <a:ln/>
-        </p:spPr>
-        <p:txBody>
-          <a:bodyPr wrap="square" rtlCol="0" anchor="ctr"/>
-          <a:lstStyle/>
-          <a:p>
-            <a:pPr indent="0" marL="0">
-              <a:buNone/>
-            </a:pPr>
-            <a:r>
-              <a:rPr lang="en-US" sz="1200" b="1" dirty="0">
-                <a:solidFill>
-                  <a:srgbClr val="334155"/>
+            <a:off x="566928" y="4297680"/>
+            <a:ext cx="5486400" cy="1463040"/>
+          </a:xfrm>
+          <a:prstGeom prst="rect">
+            <a:avLst/>
+          </a:prstGeom>
+          <a:noFill/>
+          <a:ln/>
+        </p:spPr>
+        <p:txBody>
+          <a:bodyPr wrap="square" rtlCol="0" anchor="t"/>
+          <a:lstStyle/>
+          <a:p>
+            <a:pPr marL="177800" indent="-177800">
+              <a:spcAft>
+                <a:spcPts val="800"/>
+              </a:spcAft>
+              <a:buSzPct val="100000"/>
+              <a:buChar char="•"/>
+            </a:pPr>
+            <a:r>
+              <a:rPr lang="en-US" sz="1300" dirty="0">
+                <a:solidFill>
+                  <a:srgbClr val="2B3F52"/>
                 </a:solidFill>
                 <a:latin typeface="Calibri" pitchFamily="34" charset="0"/>
                 <a:ea typeface="Calibri" pitchFamily="34" charset="-122"/>
                 <a:cs typeface="Calibri" pitchFamily="34" charset="-120"/>
               </a:rPr>
-              <a:t>Salary breakup, run rate (Rs Cr per year)</a:t>
-            </a:r>
-            <a:endParaRPr lang="en-US" sz="1200" dirty="0"/>
-          </a:p>
-        </p:txBody>
-      </p:sp>
-      <p:graphicFrame>
-        <p:nvGraphicFramePr>
-          <p:cNvPr id="10" name="Chart 1" descr=""/>
-          <p:cNvGraphicFramePr/>
-          <p:nvPr/>
-        </p:nvGraphicFramePr>
-        <p:xfrm>
-          <a:off x="566928" y="4434840"/>
-          <a:ext cx="6766560" cy="1554480"/>
-        </p:xfrm>
-        <a:graphic xmlns:a="http://schemas.openxmlformats.org/drawingml/2006/main">
-          <a:graphicData uri="http://schemas.openxmlformats.org/drawingml/2006/chart">
-            <c:chart xmlns:c="http://schemas.openxmlformats.org/drawingml/2006/chart" r:id="rId2"/>
-          </a:graphicData>
-        </a:graphic>
-      </p:graphicFrame>
-      <p:sp>
-        <p:nvSpPr>
-          <p:cNvPr id="11" name="Text 6"/>
-          <p:cNvSpPr/>
-          <p:nvPr/>
-        </p:nvSpPr>
-        <p:spPr>
-          <a:xfrm>
-            <a:off x="7635240" y="4480560"/>
-            <a:ext cx="3977640" cy="1463040"/>
-          </a:xfrm>
-          <a:prstGeom prst="rect">
-            <a:avLst/>
-          </a:prstGeom>
-          <a:noFill/>
-          <a:ln/>
-        </p:spPr>
-        <p:txBody>
-          <a:bodyPr wrap="square" rtlCol="0" anchor="t"/>
+              <a:t>Salary is the largest line and the single lever the Board controls. Full year cost base is budgeted at Rs 5.24 Cr, with Q1 booked actual and Q2 to Q4 projected.</a:t>
+            </a:r>
+            <a:endParaRPr lang="en-US" sz="1300" dirty="0"/>
+          </a:p>
+        </p:txBody>
+      </p:sp>
+      <p:sp>
+        <p:nvSpPr>
+          <p:cNvPr id="10" name="Text 6"/>
+          <p:cNvSpPr/>
+          <p:nvPr/>
+        </p:nvSpPr>
+        <p:spPr>
+          <a:xfrm>
+            <a:off x="566928" y="6455664"/>
+            <a:ext cx="11064240" cy="292608"/>
+          </a:xfrm>
+          <a:prstGeom prst="rect">
+            <a:avLst/>
+          </a:prstGeom>
+          <a:noFill/>
+          <a:ln/>
+        </p:spPr>
+        <p:txBody>
+          <a:bodyPr wrap="square" rtlCol="0" anchor="ctr"/>
           <a:lstStyle/>
           <a:p>
             <a:pPr indent="0" marL="0">
               <a:buNone/>
             </a:pPr>
             <a:r>
-              <a:rPr lang="en-US" sz="1250" dirty="0">
-                <a:solidFill>
-                  <a:srgbClr val="334155"/>
+              <a:rPr lang="en-US" sz="900" dirty="0">
+                <a:solidFill>
+                  <a:srgbClr val="9AA7B4"/>
                 </a:solidFill>
                 <a:latin typeface="Calibri" pitchFamily="34" charset="0"/>
                 <a:ea typeface="Calibri" pitchFamily="34" charset="-122"/>
                 <a:cs typeface="Calibri" pitchFamily="34" charset="-120"/>
               </a:rPr>
-              <a:t>People cost run rate Rs 3.95 Cr a year. Salary is 58% of actual spend to date and the single lever the Board controls. Full year cost base is budgeted at Rs 5.24 Cr.</a:t>
-            </a:r>
-            <a:endParaRPr lang="en-US" sz="1250" dirty="0"/>
-          </a:p>
-        </p:txBody>
-      </p:sp>
-      <p:sp>
-        <p:nvSpPr>
-          <p:cNvPr id="12" name="Text 7"/>
-          <p:cNvSpPr/>
-          <p:nvPr/>
-        </p:nvSpPr>
-        <p:spPr>
-          <a:xfrm>
-            <a:off x="566928" y="6446520"/>
-            <a:ext cx="11064240" cy="301752"/>
-          </a:xfrm>
-          <a:prstGeom prst="rect">
-            <a:avLst/>
-          </a:prstGeom>
-          <a:noFill/>
-          <a:ln/>
-        </p:spPr>
-        <p:txBody>
-          <a:bodyPr wrap="square" rtlCol="0" anchor="ctr"/>
-          <a:lstStyle/>
-          <a:p>
-            <a:pPr indent="0" marL="0">
-              <a:buNone/>
-            </a:pPr>
-            <a:r>
-              <a:rPr lang="en-US" sz="900" i="1" dirty="0">
-                <a:solidFill>
-                  <a:srgbClr val="94A3B8"/>
-                </a:solidFill>
-                <a:latin typeface="Calibri" pitchFamily="34" charset="0"/>
-                <a:ea typeface="Calibri" pitchFamily="34" charset="-122"/>
-                <a:cs typeface="Calibri" pitchFamily="34" charset="-120"/>
-              </a:rPr>
-              <a:t>Source: cost heads and payroll are Internal actuals and run rate [1]; the two hires are Board approved CTCs [2].</a:t>
+              <a:t>Source: cost heads are Internal actuals to 21 Jul [1]; quarterly build uses Internal run rate [1] and BLR assumptions [2].</a:t>
             </a:r>
             <a:endParaRPr lang="en-US" sz="900" dirty="0"/>
           </a:p>

--- a/board/AOP_board_presentation.pptx
+++ b/board/AOP_board_presentation.pptx
@@ -385,418 +385,6 @@
         <a:effectLst/>
       </c:spPr>
     </c:plotArea>
-    <c:plotVisOnly val="1"/>
-    <c:dispBlanksAs val="span"/>
-  </c:chart>
-  <c:spPr>
-    <a:noFill/>
-    <a:ln>
-      <a:noFill/>
-    </a:ln>
-    <a:effectLst/>
-  </c:spPr>
-  <c:externalData r:id="rId1">
-    <c:autoUpdate val="0"/>
-  </c:externalData>
-</c:chartSpace>
-</file>
-
-<file path=ppt/charts/chart10.xml><?xml version="1.0" encoding="utf-8"?>
-<c:chartSpace xmlns:c="http://schemas.openxmlformats.org/drawingml/2006/chart" xmlns:a="http://schemas.openxmlformats.org/drawingml/2006/main" xmlns:r="http://schemas.openxmlformats.org/officeDocument/2006/relationships">
-  <c:date1904 val="0"/>
-  <c:roundedCorners val="1"/>
-  <c:chart>
-    <c:autoTitleDeleted val="1"/>
-    <c:plotArea>
-      <c:layout/>
-      <c:doughnutChart>
-        <c:varyColors val="1"/>
-        <c:ser>
-          <c:idx val="0"/>
-          <c:order val="0"/>
-          <c:tx>
-            <c:strRef>
-              <c:f>Sheet1!$B$1</c:f>
-              <c:strCache>
-                <c:ptCount val="1"/>
-                <c:pt idx="0">
-                  <c:v>Share</c:v>
-                </c:pt>
-              </c:strCache>
-            </c:strRef>
-          </c:tx>
-          <c:spPr>
-            <a:solidFill>
-              <a:schemeClr val="accent1"/>
-            </a:solidFill>
-            <a:ln w="9525" cap="flat">
-              <a:solidFill>
-                <a:srgbClr val="F9F9F9"/>
-              </a:solidFill>
-              <a:prstDash val="solid"/>
-              <a:round/>
-            </a:ln>
-            <a:effectLst/>
-          </c:spPr>
-          <c:dPt>
-            <c:idx val="0"/>
-            <c:bubble3D val="0"/>
-            <c:spPr>
-              <a:solidFill>
-                <a:srgbClr val="1E4E79"/>
-              </a:solidFill>
-              <a:effectLst/>
-            </c:spPr>
-          </c:dPt>
-          <c:dPt>
-            <c:idx val="1"/>
-            <c:bubble3D val="0"/>
-            <c:spPr>
-              <a:solidFill>
-                <a:srgbClr val="356F9C"/>
-              </a:solidFill>
-              <a:effectLst/>
-            </c:spPr>
-          </c:dPt>
-          <c:dPt>
-            <c:idx val="2"/>
-            <c:bubble3D val="0"/>
-            <c:spPr>
-              <a:solidFill>
-                <a:srgbClr val="5F9BC0"/>
-              </a:solidFill>
-              <a:effectLst/>
-            </c:spPr>
-          </c:dPt>
-          <c:dPt>
-            <c:idx val="3"/>
-            <c:bubble3D val="0"/>
-            <c:spPr>
-              <a:solidFill>
-                <a:srgbClr val="93BDD6"/>
-              </a:solidFill>
-              <a:effectLst/>
-            </c:spPr>
-          </c:dPt>
-          <c:dPt>
-            <c:idx val="4"/>
-            <c:bubble3D val="0"/>
-            <c:spPr>
-              <a:solidFill>
-                <a:srgbClr val="0F766E"/>
-              </a:solidFill>
-              <a:effectLst/>
-            </c:spPr>
-          </c:dPt>
-          <c:dPt>
-            <c:idx val="5"/>
-            <c:bubble3D val="0"/>
-            <c:spPr>
-              <a:solidFill>
-                <a:srgbClr val="4CA596"/>
-              </a:solidFill>
-              <a:effectLst/>
-            </c:spPr>
-          </c:dPt>
-          <c:dPt>
-            <c:idx val="6"/>
-            <c:bubble3D val="0"/>
-            <c:spPr>
-              <a:solidFill>
-                <a:srgbClr val="C3CCD6"/>
-              </a:solidFill>
-              <a:effectLst/>
-            </c:spPr>
-          </c:dPt>
-          <c:dLbls>
-            <c:dLbl>
-              <c:idx val="0"/>
-              <c:numFmt formatCode="General" sourceLinked="0"/>
-              <c:spPr/>
-              <c:txPr>
-                <a:bodyPr/>
-                <a:lstStyle/>
-                <a:p>
-                  <a:pPr>
-                    <a:defRPr sz="1200" b="0" i="0" u="none" strike="noStrike">
-                      <a:solidFill>
-                        <a:srgbClr val="000000"/>
-                      </a:solidFill>
-                      <a:latin typeface="Arial"/>
-                    </a:defRPr>
-                  </a:pPr>
-                </a:p>
-              </c:txPr>
-              <c:showLegendKey val="0"/>
-              <c:showVal val="0"/>
-              <c:showCatName val="0"/>
-              <c:showSerName val="0"/>
-              <c:showPercent val="0"/>
-              <c:showBubbleSize val="0"/>
-            </c:dLbl>
-            <c:dLbl>
-              <c:idx val="1"/>
-              <c:numFmt formatCode="General" sourceLinked="0"/>
-              <c:spPr/>
-              <c:txPr>
-                <a:bodyPr/>
-                <a:lstStyle/>
-                <a:p>
-                  <a:pPr>
-                    <a:defRPr sz="1200" b="0" i="0" u="none" strike="noStrike">
-                      <a:solidFill>
-                        <a:srgbClr val="000000"/>
-                      </a:solidFill>
-                      <a:latin typeface="Arial"/>
-                    </a:defRPr>
-                  </a:pPr>
-                </a:p>
-              </c:txPr>
-              <c:showLegendKey val="0"/>
-              <c:showVal val="0"/>
-              <c:showCatName val="0"/>
-              <c:showSerName val="0"/>
-              <c:showPercent val="0"/>
-              <c:showBubbleSize val="0"/>
-            </c:dLbl>
-            <c:dLbl>
-              <c:idx val="2"/>
-              <c:numFmt formatCode="General" sourceLinked="0"/>
-              <c:spPr/>
-              <c:txPr>
-                <a:bodyPr/>
-                <a:lstStyle/>
-                <a:p>
-                  <a:pPr>
-                    <a:defRPr sz="1200" b="0" i="0" u="none" strike="noStrike">
-                      <a:solidFill>
-                        <a:srgbClr val="000000"/>
-                      </a:solidFill>
-                      <a:latin typeface="Arial"/>
-                    </a:defRPr>
-                  </a:pPr>
-                </a:p>
-              </c:txPr>
-              <c:showLegendKey val="0"/>
-              <c:showVal val="0"/>
-              <c:showCatName val="0"/>
-              <c:showSerName val="0"/>
-              <c:showPercent val="0"/>
-              <c:showBubbleSize val="0"/>
-            </c:dLbl>
-            <c:dLbl>
-              <c:idx val="3"/>
-              <c:numFmt formatCode="General" sourceLinked="0"/>
-              <c:spPr/>
-              <c:txPr>
-                <a:bodyPr/>
-                <a:lstStyle/>
-                <a:p>
-                  <a:pPr>
-                    <a:defRPr sz="1200" b="0" i="0" u="none" strike="noStrike">
-                      <a:solidFill>
-                        <a:srgbClr val="000000"/>
-                      </a:solidFill>
-                      <a:latin typeface="Arial"/>
-                    </a:defRPr>
-                  </a:pPr>
-                </a:p>
-              </c:txPr>
-              <c:showLegendKey val="0"/>
-              <c:showVal val="0"/>
-              <c:showCatName val="0"/>
-              <c:showSerName val="0"/>
-              <c:showPercent val="0"/>
-              <c:showBubbleSize val="0"/>
-            </c:dLbl>
-            <c:dLbl>
-              <c:idx val="4"/>
-              <c:numFmt formatCode="General" sourceLinked="0"/>
-              <c:spPr/>
-              <c:txPr>
-                <a:bodyPr/>
-                <a:lstStyle/>
-                <a:p>
-                  <a:pPr>
-                    <a:defRPr sz="1200" b="0" i="0" u="none" strike="noStrike">
-                      <a:solidFill>
-                        <a:srgbClr val="000000"/>
-                      </a:solidFill>
-                      <a:latin typeface="Arial"/>
-                    </a:defRPr>
-                  </a:pPr>
-                </a:p>
-              </c:txPr>
-              <c:showLegendKey val="0"/>
-              <c:showVal val="0"/>
-              <c:showCatName val="0"/>
-              <c:showSerName val="0"/>
-              <c:showPercent val="0"/>
-              <c:showBubbleSize val="0"/>
-            </c:dLbl>
-            <c:dLbl>
-              <c:idx val="5"/>
-              <c:numFmt formatCode="General" sourceLinked="0"/>
-              <c:spPr/>
-              <c:txPr>
-                <a:bodyPr/>
-                <a:lstStyle/>
-                <a:p>
-                  <a:pPr>
-                    <a:defRPr sz="1200" b="0" i="0" u="none" strike="noStrike">
-                      <a:solidFill>
-                        <a:srgbClr val="000000"/>
-                      </a:solidFill>
-                      <a:latin typeface="Arial"/>
-                    </a:defRPr>
-                  </a:pPr>
-                </a:p>
-              </c:txPr>
-              <c:showLegendKey val="0"/>
-              <c:showVal val="0"/>
-              <c:showCatName val="0"/>
-              <c:showSerName val="0"/>
-              <c:showPercent val="0"/>
-              <c:showBubbleSize val="0"/>
-            </c:dLbl>
-            <c:dLbl>
-              <c:idx val="6"/>
-              <c:numFmt formatCode="General" sourceLinked="0"/>
-              <c:spPr/>
-              <c:txPr>
-                <a:bodyPr/>
-                <a:lstStyle/>
-                <a:p>
-                  <a:pPr>
-                    <a:defRPr sz="1200" b="0" i="0" u="none" strike="noStrike">
-                      <a:solidFill>
-                        <a:srgbClr val="000000"/>
-                      </a:solidFill>
-                      <a:latin typeface="Arial"/>
-                    </a:defRPr>
-                  </a:pPr>
-                </a:p>
-              </c:txPr>
-              <c:showLegendKey val="0"/>
-              <c:showVal val="0"/>
-              <c:showCatName val="0"/>
-              <c:showSerName val="0"/>
-              <c:showPercent val="0"/>
-              <c:showBubbleSize val="0"/>
-            </c:dLbl>
-            <c:numFmt formatCode="General" sourceLinked="0"/>
-            <c:txPr>
-              <a:bodyPr/>
-              <a:lstStyle/>
-              <a:p>
-                <a:pPr>
-                  <a:defRPr sz="1800" b="0" i="0" u="none" strike="noStrike">
-                    <a:solidFill>
-                      <a:srgbClr val="000000"/>
-                    </a:solidFill>
-                    <a:latin typeface="Arial"/>
-                  </a:defRPr>
-                </a:pPr>
-              </a:p>
-            </c:txPr>
-            <c:showLegendKey val="0"/>
-            <c:showVal val="0"/>
-            <c:showCatName val="1"/>
-            <c:showSerName val="0"/>
-            <c:showPercent val="1"/>
-            <c:showBubbleSize val="0"/>
-            <c:showLeaderLines val="0"/>
-          </c:dLbls>
-          <c:cat>
-            <c:strRef>
-              <c:f>Sheet1!$A$2:$A$8</c:f>
-              <c:strCache>
-                <c:ptCount val="7"/>
-                <c:pt idx="0">
-                  <c:v>CRISIL 44%</c:v>
-                </c:pt>
-                <c:pt idx="1">
-                  <c:v>CARE 21%</c:v>
-                </c:pt>
-                <c:pt idx="2">
-                  <c:v>ICRA 14%</c:v>
-                </c:pt>
-                <c:pt idx="3">
-                  <c:v>India Ratings 12%</c:v>
-                </c:pt>
-                <c:pt idx="4">
-                  <c:v>Infomerics 5%</c:v>
-                </c:pt>
-                <c:pt idx="5">
-                  <c:v>Acuite 3%</c:v>
-                </c:pt>
-                <c:pt idx="6">
-                  <c:v>Others 1%</c:v>
-                </c:pt>
-              </c:strCache>
-            </c:strRef>
-          </c:cat>
-          <c:val>
-            <c:numRef>
-              <c:f>Sheet1!$B$2:$B$8</c:f>
-              <c:numCache>
-                <c:ptCount val="7"/>
-                <c:pt idx="0">
-                  <c:v>44</c:v>
-                </c:pt>
-                <c:pt idx="1">
-                  <c:v>21</c:v>
-                </c:pt>
-                <c:pt idx="2">
-                  <c:v>14</c:v>
-                </c:pt>
-                <c:pt idx="3">
-                  <c:v>12</c:v>
-                </c:pt>
-                <c:pt idx="4">
-                  <c:v>5</c:v>
-                </c:pt>
-                <c:pt idx="5">
-                  <c:v>3</c:v>
-                </c:pt>
-                <c:pt idx="6">
-                  <c:v>1</c:v>
-                </c:pt>
-              </c:numCache>
-            </c:numRef>
-          </c:val>
-        </c:ser>
-        <c:firstSliceAng val="0"/>
-        <c:holeSize val="50"/>
-      </c:doughnutChart>
-      <c:spPr>
-        <a:noFill/>
-        <a:ln>
-          <a:noFill/>
-        </a:ln>
-        <a:effectLst/>
-      </c:spPr>
-    </c:plotArea>
-    <c:legend>
-      <c:legendPos val="r"/>
-      <c:overlay val="0"/>
-      <c:txPr>
-        <a:bodyPr/>
-        <a:lstStyle/>
-        <a:p>
-          <a:pPr>
-            <a:defRPr sz="1050">
-              <a:solidFill>
-                <a:srgbClr val="2B3F52"/>
-              </a:solidFill>
-              <a:latin typeface="Calibri"/>
-              <a:cs typeface="Calibri"/>
-            </a:defRPr>
-          </a:pPr>
-          <a:endParaRPr lang="en-US"/>
-        </a:p>
-      </c:txPr>
-    </c:legend>
     <c:plotVisOnly val="1"/>
     <c:dispBlanksAs val="span"/>
   </c:chart>
@@ -11325,7 +10913,7 @@
                 <a:ea typeface="Calibri" pitchFamily="34" charset="-122"/>
                 <a:cs typeface="Calibri" pitchFamily="34" charset="-120"/>
               </a:rPr>
-              <a:t>MARKET OPPORTUNITY</a:t>
+              <a:t>DOABILITY</a:t>
             </a:r>
             <a:endParaRPr lang="en-US" sz="1100" dirty="0"/>
           </a:p>
@@ -11364,7 +10952,7 @@
                 <a:ea typeface="Cambria" pitchFamily="34" charset="-122"/>
                 <a:cs typeface="Cambria" pitchFamily="34" charset="-120"/>
               </a:rPr>
-              <a:t>The CRA market pie, and where ACER concentrates</a:t>
+              <a:t>Rating Rs 1,600 Cr a month is a small slice of a vast market</a:t>
             </a:r>
             <a:endParaRPr lang="en-US" sz="2600" dirty="0"/>
           </a:p>
@@ -11378,8 +10966,8 @@
         </p:nvSpPr>
         <p:spPr>
           <a:xfrm>
-            <a:off x="640080" y="1463040"/>
-            <a:ext cx="5852160" cy="274320"/>
+            <a:off x="640080" y="1417320"/>
+            <a:ext cx="10972800" cy="457200"/>
           </a:xfrm>
           <a:prstGeom prst="rect">
             <a:avLst/>
@@ -11395,85 +10983,30 @@
               <a:buNone/>
             </a:pPr>
             <a:r>
-              <a:rPr lang="en-US" sz="1200" b="1" dirty="0">
-                <a:solidFill>
-                  <a:srgbClr val="2B3F52"/>
+              <a:rPr lang="en-US" sz="1300" dirty="0">
+                <a:solidFill>
+                  <a:srgbClr val="5B6B7B"/>
                 </a:solidFill>
                 <a:latin typeface="Calibri" pitchFamily="34" charset="0"/>
                 <a:ea typeface="Calibri" pitchFamily="34" charset="-122"/>
                 <a:cs typeface="Calibri" pitchFamily="34" charset="-120"/>
               </a:rPr>
-              <a:t>Share of the ~Rs 2,000 Cr rating industry, by agency</a:t>
-            </a:r>
-            <a:endParaRPr lang="en-US" sz="1200" dirty="0"/>
-          </a:p>
-        </p:txBody>
-      </p:sp>
-      <p:graphicFrame>
-        <p:nvGraphicFramePr>
-          <p:cNvPr id="5" name="Chart 0" descr=""/>
-          <p:cNvGraphicFramePr/>
-          <p:nvPr/>
-        </p:nvGraphicFramePr>
-        <p:xfrm>
-          <a:off x="548640" y="1783080"/>
-          <a:ext cx="5943600" cy="3611880"/>
-        </p:xfrm>
-        <a:graphic xmlns:a="http://schemas.openxmlformats.org/drawingml/2006/main">
-          <a:graphicData uri="http://schemas.openxmlformats.org/drawingml/2006/chart">
-            <c:chart xmlns:c="http://schemas.openxmlformats.org/drawingml/2006/chart" r:id="rId1"/>
-          </a:graphicData>
-        </a:graphic>
-      </p:graphicFrame>
-      <p:sp>
-        <p:nvSpPr>
-          <p:cNvPr id="6" name="Text 3"/>
-          <p:cNvSpPr/>
-          <p:nvPr/>
-        </p:nvSpPr>
-        <p:spPr>
-          <a:xfrm>
-            <a:off x="6675120" y="1463040"/>
-            <a:ext cx="4937760" cy="274320"/>
-          </a:xfrm>
-          <a:prstGeom prst="rect">
-            <a:avLst/>
-          </a:prstGeom>
-          <a:noFill/>
-          <a:ln/>
-        </p:spPr>
-        <p:txBody>
-          <a:bodyPr wrap="square" rtlCol="0" anchor="ctr"/>
-          <a:lstStyle/>
-          <a:p>
-            <a:pPr indent="0" marL="0">
-              <a:buNone/>
-            </a:pPr>
-            <a:r>
-              <a:rPr lang="en-US" sz="1200" b="1" dirty="0">
-                <a:solidFill>
-                  <a:srgbClr val="2B3F52"/>
-                </a:solidFill>
-                <a:latin typeface="Calibri" pitchFamily="34" charset="0"/>
-                <a:ea typeface="Calibri" pitchFamily="34" charset="-122"/>
-                <a:cs typeface="Calibri" pitchFamily="34" charset="-120"/>
-              </a:rPr>
-              <a:t>Where ACER concentrates</a:t>
-            </a:r>
-            <a:endParaRPr lang="en-US" sz="1200" dirty="0"/>
-          </a:p>
-        </p:txBody>
-      </p:sp>
-      <p:sp>
-        <p:nvSpPr>
-          <p:cNvPr id="7" name="Shape 4"/>
-          <p:cNvSpPr/>
-          <p:nvPr/>
-        </p:nvSpPr>
-        <p:spPr>
-          <a:xfrm>
-            <a:off x="6675120" y="1783080"/>
-            <a:ext cx="4937760" cy="868680"/>
+              <a:t>ACER target: Rs 1,600 Cr rated per month, Rs 19,200 Cr per year, about 192 mandates. Set against the market and peer scale, it is a small, credible slice.</a:t>
+            </a:r>
+            <a:endParaRPr lang="en-US" sz="1300" dirty="0"/>
+          </a:p>
+        </p:txBody>
+      </p:sp>
+      <p:sp>
+        <p:nvSpPr>
+          <p:cNvPr id="5" name="Shape 3"/>
+          <p:cNvSpPr/>
+          <p:nvPr/>
+        </p:nvSpPr>
+        <p:spPr>
+          <a:xfrm>
+            <a:off x="640080" y="1965960"/>
+            <a:ext cx="2606040" cy="1371600"/>
           </a:xfrm>
           <a:prstGeom prst="rect">
             <a:avLst/>
@@ -11491,14 +11024,14 @@
       </p:sp>
       <p:sp>
         <p:nvSpPr>
-          <p:cNvPr id="8" name="Text 5"/>
-          <p:cNvSpPr/>
-          <p:nvPr/>
-        </p:nvSpPr>
-        <p:spPr>
-          <a:xfrm>
-            <a:off x="6839712" y="1920240"/>
-            <a:ext cx="4608576" cy="274320"/>
+          <p:cNvPr id="6" name="Text 4"/>
+          <p:cNvSpPr/>
+          <p:nvPr/>
+        </p:nvSpPr>
+        <p:spPr>
+          <a:xfrm>
+            <a:off x="804672" y="2103120"/>
+            <a:ext cx="2276856" cy="274320"/>
           </a:xfrm>
           <a:prstGeom prst="rect">
             <a:avLst/>
@@ -11522,7 +11055,7 @@
                 <a:ea typeface="Calibri" pitchFamily="34" charset="-122"/>
                 <a:cs typeface="Calibri" pitchFamily="34" charset="-120"/>
               </a:rPr>
-              <a:t>TAM  ·  whole rating industry</a:t>
+              <a:t>of India bank credit</a:t>
             </a:r>
             <a:endParaRPr lang="en-US" sz="1050" dirty="0"/>
           </a:p>
@@ -11530,14 +11063,14 @@
       </p:sp>
       <p:sp>
         <p:nvSpPr>
-          <p:cNvPr id="9" name="Text 6"/>
-          <p:cNvSpPr/>
-          <p:nvPr/>
-        </p:nvSpPr>
-        <p:spPr>
-          <a:xfrm>
-            <a:off x="6839712" y="2167128"/>
-            <a:ext cx="4608576" cy="457200"/>
+          <p:cNvPr id="7" name="Text 5"/>
+          <p:cNvSpPr/>
+          <p:nvPr/>
+        </p:nvSpPr>
+        <p:spPr>
+          <a:xfrm>
+            <a:off x="804672" y="2350008"/>
+            <a:ext cx="2276856" cy="457200"/>
           </a:xfrm>
           <a:prstGeom prst="rect">
             <a:avLst/>
@@ -11555,13 +11088,13 @@
             <a:r>
               <a:rPr lang="en-US" sz="2200" b="1" dirty="0">
                 <a:solidFill>
-                  <a:srgbClr val="0A1F33"/>
+                  <a:srgbClr val="0F766E"/>
                 </a:solidFill>
                 <a:latin typeface="Cambria" pitchFamily="34" charset="0"/>
                 <a:ea typeface="Cambria" pitchFamily="34" charset="-122"/>
                 <a:cs typeface="Cambria" pitchFamily="34" charset="-120"/>
               </a:rPr>
-              <a:t>Rs 2,000 Cr</a:t>
+              <a:t>~0.27%</a:t>
             </a:r>
             <a:endParaRPr lang="en-US" sz="2200" dirty="0"/>
           </a:p>
@@ -11569,14 +11102,53 @@
       </p:sp>
       <p:sp>
         <p:nvSpPr>
-          <p:cNvPr id="10" name="Shape 7"/>
-          <p:cNvSpPr/>
-          <p:nvPr/>
-        </p:nvSpPr>
-        <p:spPr>
-          <a:xfrm>
-            <a:off x="6675120" y="2743200"/>
-            <a:ext cx="4937760" cy="868680"/>
+          <p:cNvPr id="8" name="Text 6"/>
+          <p:cNvSpPr/>
+          <p:nvPr/>
+        </p:nvSpPr>
+        <p:spPr>
+          <a:xfrm>
+            <a:off x="804672" y="2825496"/>
+            <a:ext cx="2276856" cy="365760"/>
+          </a:xfrm>
+          <a:prstGeom prst="rect">
+            <a:avLst/>
+          </a:prstGeom>
+          <a:noFill/>
+          <a:ln/>
+        </p:spPr>
+        <p:txBody>
+          <a:bodyPr wrap="square" rtlCol="0" anchor="ctr"/>
+          <a:lstStyle/>
+          <a:p>
+            <a:pPr indent="0" marL="0">
+              <a:buNone/>
+            </a:pPr>
+            <a:r>
+              <a:rPr lang="en-US" sz="900" dirty="0">
+                <a:solidFill>
+                  <a:srgbClr val="9AA7B4"/>
+                </a:solidFill>
+                <a:latin typeface="Calibri" pitchFamily="34" charset="0"/>
+                <a:ea typeface="Calibri" pitchFamily="34" charset="-122"/>
+                <a:cs typeface="Calibri" pitchFamily="34" charset="-120"/>
+              </a:rPr>
+              <a:t>~Rs 70 lakh cr outstanding</a:t>
+            </a:r>
+            <a:endParaRPr lang="en-US" sz="900" dirty="0"/>
+          </a:p>
+        </p:txBody>
+      </p:sp>
+      <p:sp>
+        <p:nvSpPr>
+          <p:cNvPr id="9" name="Shape 7"/>
+          <p:cNvSpPr/>
+          <p:nvPr/>
+        </p:nvSpPr>
+        <p:spPr>
+          <a:xfrm>
+            <a:off x="3383280" y="1965960"/>
+            <a:ext cx="2606040" cy="1371600"/>
           </a:xfrm>
           <a:prstGeom prst="rect">
             <a:avLst/>
@@ -11594,14 +11166,14 @@
       </p:sp>
       <p:sp>
         <p:nvSpPr>
-          <p:cNvPr id="11" name="Text 8"/>
-          <p:cNvSpPr/>
-          <p:nvPr/>
-        </p:nvSpPr>
-        <p:spPr>
-          <a:xfrm>
-            <a:off x="6839712" y="2880360"/>
-            <a:ext cx="4608576" cy="274320"/>
+          <p:cNvPr id="10" name="Text 8"/>
+          <p:cNvSpPr/>
+          <p:nvPr/>
+        </p:nvSpPr>
+        <p:spPr>
+          <a:xfrm>
+            <a:off x="3547872" y="2103120"/>
+            <a:ext cx="2276856" cy="274320"/>
           </a:xfrm>
           <a:prstGeom prst="rect">
             <a:avLst/>
@@ -11625,7 +11197,7 @@
                 <a:ea typeface="Calibri" pitchFamily="34" charset="-122"/>
                 <a:cs typeface="Calibri" pitchFamily="34" charset="-120"/>
               </a:rPr>
-              <a:t>SAM  ·  Rs 100 Cr+ BLR segment</a:t>
+              <a:t>of annual bond issuance</a:t>
             </a:r>
             <a:endParaRPr lang="en-US" sz="1050" dirty="0"/>
           </a:p>
@@ -11633,14 +11205,14 @@
       </p:sp>
       <p:sp>
         <p:nvSpPr>
-          <p:cNvPr id="12" name="Text 9"/>
-          <p:cNvSpPr/>
-          <p:nvPr/>
-        </p:nvSpPr>
-        <p:spPr>
-          <a:xfrm>
-            <a:off x="6839712" y="3127248"/>
-            <a:ext cx="4608576" cy="457200"/>
+          <p:cNvPr id="11" name="Text 9"/>
+          <p:cNvSpPr/>
+          <p:nvPr/>
+        </p:nvSpPr>
+        <p:spPr>
+          <a:xfrm>
+            <a:off x="3547872" y="2350008"/>
+            <a:ext cx="2276856" cy="457200"/>
           </a:xfrm>
           <a:prstGeom prst="rect">
             <a:avLst/>
@@ -11658,13 +11230,13 @@
             <a:r>
               <a:rPr lang="en-US" sz="2200" b="1" dirty="0">
                 <a:solidFill>
-                  <a:srgbClr val="1E4E79"/>
+                  <a:srgbClr val="0F766E"/>
                 </a:solidFill>
                 <a:latin typeface="Cambria" pitchFamily="34" charset="0"/>
                 <a:ea typeface="Cambria" pitchFamily="34" charset="-122"/>
                 <a:cs typeface="Cambria" pitchFamily="34" charset="-120"/>
               </a:rPr>
-              <a:t>Rs 500 Cr</a:t>
+              <a:t>~1.9%</a:t>
             </a:r>
             <a:endParaRPr lang="en-US" sz="2200" dirty="0"/>
           </a:p>
@@ -11672,14 +11244,14 @@
       </p:sp>
       <p:sp>
         <p:nvSpPr>
-          <p:cNvPr id="13" name="Text 10"/>
-          <p:cNvSpPr/>
-          <p:nvPr/>
-        </p:nvSpPr>
-        <p:spPr>
-          <a:xfrm>
-            <a:off x="6839712" y="3602736"/>
-            <a:ext cx="4608576" cy="365760"/>
+          <p:cNvPr id="12" name="Text 10"/>
+          <p:cNvSpPr/>
+          <p:nvPr/>
+        </p:nvSpPr>
+        <p:spPr>
+          <a:xfrm>
+            <a:off x="3547872" y="2825496"/>
+            <a:ext cx="2276856" cy="365760"/>
           </a:xfrm>
           <a:prstGeom prst="rect">
             <a:avLst/>
@@ -11703,7 +11275,7 @@
                 <a:ea typeface="Calibri" pitchFamily="34" charset="-122"/>
                 <a:cs typeface="Calibri" pitchFamily="34" charset="-120"/>
               </a:rPr>
-              <a:t>the slice we target</a:t>
+              <a:t>~Rs 10 lakh cr in FY25</a:t>
             </a:r>
             <a:endParaRPr lang="en-US" sz="900" dirty="0"/>
           </a:p>
@@ -11711,14 +11283,14 @@
       </p:sp>
       <p:sp>
         <p:nvSpPr>
-          <p:cNvPr id="14" name="Shape 11"/>
-          <p:cNvSpPr/>
-          <p:nvPr/>
-        </p:nvSpPr>
-        <p:spPr>
-          <a:xfrm>
-            <a:off x="6675120" y="3703320"/>
-            <a:ext cx="4937760" cy="868680"/>
+          <p:cNvPr id="13" name="Shape 11"/>
+          <p:cNvSpPr/>
+          <p:nvPr/>
+        </p:nvSpPr>
+        <p:spPr>
+          <a:xfrm>
+            <a:off x="6126480" y="1965960"/>
+            <a:ext cx="2606040" cy="1371600"/>
           </a:xfrm>
           <a:prstGeom prst="rect">
             <a:avLst/>
@@ -11736,14 +11308,14 @@
       </p:sp>
       <p:sp>
         <p:nvSpPr>
-          <p:cNvPr id="15" name="Text 12"/>
-          <p:cNvSpPr/>
-          <p:nvPr/>
-        </p:nvSpPr>
-        <p:spPr>
-          <a:xfrm>
-            <a:off x="6839712" y="3840480"/>
-            <a:ext cx="4608576" cy="274320"/>
+          <p:cNvPr id="14" name="Text 12"/>
+          <p:cNvSpPr/>
+          <p:nvPr/>
+        </p:nvSpPr>
+        <p:spPr>
+          <a:xfrm>
+            <a:off x="6291072" y="2103120"/>
+            <a:ext cx="2276856" cy="274320"/>
           </a:xfrm>
           <a:prstGeom prst="rect">
             <a:avLst/>
@@ -11767,7 +11339,7 @@
                 <a:ea typeface="Calibri" pitchFamily="34" charset="-122"/>
                 <a:cs typeface="Calibri" pitchFamily="34" charset="-120"/>
               </a:rPr>
-              <a:t>SOM  ·  ACER by FY28</a:t>
+              <a:t>of Brickwork lifetime rated</a:t>
             </a:r>
             <a:endParaRPr lang="en-US" sz="1050" dirty="0"/>
           </a:p>
@@ -11775,14 +11347,14 @@
       </p:sp>
       <p:sp>
         <p:nvSpPr>
-          <p:cNvPr id="16" name="Text 13"/>
-          <p:cNvSpPr/>
-          <p:nvPr/>
-        </p:nvSpPr>
-        <p:spPr>
-          <a:xfrm>
-            <a:off x="6839712" y="4087368"/>
-            <a:ext cx="4608576" cy="457200"/>
+          <p:cNvPr id="15" name="Text 13"/>
+          <p:cNvSpPr/>
+          <p:nvPr/>
+        </p:nvSpPr>
+        <p:spPr>
+          <a:xfrm>
+            <a:off x="6291072" y="2350008"/>
+            <a:ext cx="2276856" cy="457200"/>
           </a:xfrm>
           <a:prstGeom prst="rect">
             <a:avLst/>
@@ -11806,7 +11378,7 @@
                 <a:ea typeface="Cambria" pitchFamily="34" charset="-122"/>
                 <a:cs typeface="Cambria" pitchFamily="34" charset="-120"/>
               </a:rPr>
-              <a:t>Rs 8 Cr</a:t>
+              <a:t>~1%</a:t>
             </a:r>
             <a:endParaRPr lang="en-US" sz="2200" dirty="0"/>
           </a:p>
@@ -11814,14 +11386,14 @@
       </p:sp>
       <p:sp>
         <p:nvSpPr>
-          <p:cNvPr id="17" name="Text 14"/>
-          <p:cNvSpPr/>
-          <p:nvPr/>
-        </p:nvSpPr>
-        <p:spPr>
-          <a:xfrm>
-            <a:off x="6839712" y="4562856"/>
-            <a:ext cx="4608576" cy="365760"/>
+          <p:cNvPr id="16" name="Text 14"/>
+          <p:cNvSpPr/>
+          <p:nvPr/>
+        </p:nvSpPr>
+        <p:spPr>
+          <a:xfrm>
+            <a:off x="6291072" y="2825496"/>
+            <a:ext cx="2276856" cy="365760"/>
           </a:xfrm>
           <a:prstGeom prst="rect">
             <a:avLst/>
@@ -11845,7 +11417,7 @@
                 <a:ea typeface="Calibri" pitchFamily="34" charset="-122"/>
                 <a:cs typeface="Calibri" pitchFamily="34" charset="-120"/>
               </a:rPr>
-              <a:t>about 0.4% of the pie</a:t>
+              <a:t>Rs 19.18 lakh cr, 11,560+ entities</a:t>
             </a:r>
             <a:endParaRPr lang="en-US" sz="900" dirty="0"/>
           </a:p>
@@ -11853,112 +11425,21 @@
       </p:sp>
       <p:sp>
         <p:nvSpPr>
-          <p:cNvPr id="18" name="Shape 15"/>
-          <p:cNvSpPr/>
-          <p:nvPr/>
-        </p:nvSpPr>
-        <p:spPr>
-          <a:xfrm>
-            <a:off x="640080" y="5074920"/>
-            <a:ext cx="10911535" cy="731520"/>
+          <p:cNvPr id="17" name="Shape 15"/>
+          <p:cNvSpPr/>
+          <p:nvPr/>
+        </p:nvSpPr>
+        <p:spPr>
+          <a:xfrm>
+            <a:off x="8869680" y="1965960"/>
+            <a:ext cx="2606040" cy="1371600"/>
           </a:xfrm>
           <a:prstGeom prst="rect">
             <a:avLst/>
           </a:prstGeom>
           <a:solidFill>
-            <a:srgbClr val="EEF4F3"/>
+            <a:srgbClr val="F6F8FA"/>
           </a:solidFill>
-          <a:ln/>
-        </p:spPr>
-      </p:sp>
-      <p:sp>
-        <p:nvSpPr>
-          <p:cNvPr id="19" name="Shape 16"/>
-          <p:cNvSpPr/>
-          <p:nvPr/>
-        </p:nvSpPr>
-        <p:spPr>
-          <a:xfrm>
-            <a:off x="640080" y="5074920"/>
-            <a:ext cx="82296" cy="731520"/>
-          </a:xfrm>
-          <a:prstGeom prst="rect">
-            <a:avLst/>
-          </a:prstGeom>
-          <a:solidFill>
-            <a:srgbClr val="0F766E"/>
-          </a:solidFill>
-          <a:ln/>
-        </p:spPr>
-      </p:sp>
-      <p:sp>
-        <p:nvSpPr>
-          <p:cNvPr id="20" name="Text 17"/>
-          <p:cNvSpPr/>
-          <p:nvPr/>
-        </p:nvSpPr>
-        <p:spPr>
-          <a:xfrm>
-            <a:off x="896112" y="5074920"/>
-            <a:ext cx="10454335" cy="731520"/>
-          </a:xfrm>
-          <a:prstGeom prst="rect">
-            <a:avLst/>
-          </a:prstGeom>
-          <a:noFill/>
-          <a:ln/>
-        </p:spPr>
-        <p:txBody>
-          <a:bodyPr wrap="square" rtlCol="0" anchor="ctr"/>
-          <a:lstStyle/>
-          <a:p>
-            <a:pPr indent="0" marL="0">
-              <a:buNone/>
-            </a:pPr>
-            <a:r>
-              <a:rPr lang="en-US" sz="1000" b="1" spc="100" kern="0" dirty="0">
-                <a:solidFill>
-                  <a:srgbClr val="0F766E"/>
-                </a:solidFill>
-                <a:latin typeface="Calibri" pitchFamily="34" charset="0"/>
-                <a:ea typeface="Calibri" pitchFamily="34" charset="-122"/>
-                <a:cs typeface="Calibri" pitchFamily="34" charset="-120"/>
-              </a:rPr>
-              <a:t>THE TAKEAWAY   </a:t>
-            </a:r>
-            <a:pPr indent="0" marL="0">
-              <a:buNone/>
-            </a:pPr>
-            <a:r>
-              <a:rPr lang="en-US" sz="1300" b="1" dirty="0">
-                <a:solidFill>
-                  <a:srgbClr val="0A1F33"/>
-                </a:solidFill>
-                <a:latin typeface="Calibri" pitchFamily="34" charset="0"/>
-                <a:ea typeface="Calibri" pitchFamily="34" charset="-122"/>
-                <a:cs typeface="Calibri" pitchFamily="34" charset="-120"/>
-              </a:rPr>
-              <a:t>ACER concentrates on the Rs 100 Cr plus bank loan rating segment; the FY28 target of Rs 8 Cr is about 0.4% of the pie, won from a standing start.</a:t>
-            </a:r>
-            <a:endParaRPr lang="en-US" sz="1000" dirty="0"/>
-          </a:p>
-        </p:txBody>
-      </p:sp>
-      <p:sp>
-        <p:nvSpPr>
-          <p:cNvPr id="21" name="Shape 18"/>
-          <p:cNvSpPr/>
-          <p:nvPr/>
-        </p:nvSpPr>
-        <p:spPr>
-          <a:xfrm>
-            <a:off x="640080" y="6437376"/>
-            <a:ext cx="10911535" cy="0"/>
-          </a:xfrm>
-          <a:prstGeom prst="line">
-            <a:avLst/>
-          </a:prstGeom>
-          <a:noFill/>
           <a:ln w="12700">
             <a:solidFill>
               <a:srgbClr val="E6E9EE"/>
@@ -11969,38 +11450,394 @@
       </p:sp>
       <p:sp>
         <p:nvSpPr>
-          <p:cNvPr id="22" name="Text 19"/>
-          <p:cNvSpPr/>
-          <p:nvPr/>
-        </p:nvSpPr>
-        <p:spPr>
-          <a:xfrm>
-            <a:off x="640080" y="6483096"/>
-            <a:ext cx="9509760" cy="292608"/>
-          </a:xfrm>
-          <a:prstGeom prst="rect">
-            <a:avLst/>
-          </a:prstGeom>
-          <a:noFill/>
-          <a:ln/>
-        </p:spPr>
-        <p:txBody>
-          <a:bodyPr wrap="square" rtlCol="0" anchor="t"/>
+          <p:cNvPr id="18" name="Text 16"/>
+          <p:cNvSpPr/>
+          <p:nvPr/>
+        </p:nvSpPr>
+        <p:spPr>
+          <a:xfrm>
+            <a:off x="9034272" y="2103120"/>
+            <a:ext cx="2276856" cy="274320"/>
+          </a:xfrm>
+          <a:prstGeom prst="rect">
+            <a:avLst/>
+          </a:prstGeom>
+          <a:noFill/>
+          <a:ln/>
+        </p:spPr>
+        <p:txBody>
+          <a:bodyPr wrap="square" rtlCol="0" anchor="ctr"/>
           <a:lstStyle/>
           <a:p>
             <a:pPr indent="0" marL="0">
               <a:buNone/>
             </a:pPr>
             <a:r>
-              <a:rPr lang="en-US" sz="850" dirty="0">
-                <a:solidFill>
-                  <a:srgbClr val="9AA7B4"/>
+              <a:rPr lang="en-US" sz="1050" dirty="0">
+                <a:solidFill>
+                  <a:srgbClr val="5B6B7B"/>
                 </a:solidFill>
                 <a:latin typeface="Calibri" pitchFamily="34" charset="0"/>
                 <a:ea typeface="Calibri" pitchFamily="34" charset="-122"/>
                 <a:cs typeface="Calibri" pitchFamily="34" charset="-120"/>
               </a:rPr>
-              <a:t>Source: shares estimated from official rating revenues [3][4][5][6][7][8]; industry ~Rs 2,000 Cr is an analyst estimate. ACER [1][2].</a:t>
+              <a:t>mandates a year</a:t>
+            </a:r>
+            <a:endParaRPr lang="en-US" sz="1050" dirty="0"/>
+          </a:p>
+        </p:txBody>
+      </p:sp>
+      <p:sp>
+        <p:nvSpPr>
+          <p:cNvPr id="19" name="Text 17"/>
+          <p:cNvSpPr/>
+          <p:nvPr/>
+        </p:nvSpPr>
+        <p:spPr>
+          <a:xfrm>
+            <a:off x="9034272" y="2350008"/>
+            <a:ext cx="2276856" cy="457200"/>
+          </a:xfrm>
+          <a:prstGeom prst="rect">
+            <a:avLst/>
+          </a:prstGeom>
+          <a:noFill/>
+          <a:ln/>
+        </p:spPr>
+        <p:txBody>
+          <a:bodyPr wrap="square" rtlCol="0" anchor="ctr"/>
+          <a:lstStyle/>
+          <a:p>
+            <a:pPr indent="0" marL="0">
+              <a:buNone/>
+            </a:pPr>
+            <a:r>
+              <a:rPr lang="en-US" sz="2200" b="1" dirty="0">
+                <a:solidFill>
+                  <a:srgbClr val="0A1F33"/>
+                </a:solidFill>
+                <a:latin typeface="Cambria" pitchFamily="34" charset="0"/>
+                <a:ea typeface="Cambria" pitchFamily="34" charset="-122"/>
+                <a:cs typeface="Cambria" pitchFamily="34" charset="-120"/>
+              </a:rPr>
+              <a:t>192</a:t>
+            </a:r>
+            <a:endParaRPr lang="en-US" sz="2200" dirty="0"/>
+          </a:p>
+        </p:txBody>
+      </p:sp>
+      <p:sp>
+        <p:nvSpPr>
+          <p:cNvPr id="20" name="Text 18"/>
+          <p:cNvSpPr/>
+          <p:nvPr/>
+        </p:nvSpPr>
+        <p:spPr>
+          <a:xfrm>
+            <a:off x="9034272" y="2825496"/>
+            <a:ext cx="2276856" cy="365760"/>
+          </a:xfrm>
+          <a:prstGeom prst="rect">
+            <a:avLst/>
+          </a:prstGeom>
+          <a:noFill/>
+          <a:ln/>
+        </p:spPr>
+        <p:txBody>
+          <a:bodyPr wrap="square" rtlCol="0" anchor="ctr"/>
+          <a:lstStyle/>
+          <a:p>
+            <a:pPr indent="0" marL="0">
+              <a:buNone/>
+            </a:pPr>
+            <a:r>
+              <a:rPr lang="en-US" sz="900" dirty="0">
+                <a:solidFill>
+                  <a:srgbClr val="9AA7B4"/>
+                </a:solidFill>
+                <a:latin typeface="Calibri" pitchFamily="34" charset="0"/>
+                <a:ea typeface="Calibri" pitchFamily="34" charset="-122"/>
+                <a:cs typeface="Calibri" pitchFamily="34" charset="-120"/>
+              </a:rPr>
+              <a:t>vs CRISIL ~19,500 rated issuers</a:t>
+            </a:r>
+            <a:endParaRPr lang="en-US" sz="900" dirty="0"/>
+          </a:p>
+        </p:txBody>
+      </p:sp>
+      <p:sp>
+        <p:nvSpPr>
+          <p:cNvPr id="21" name="Shape 19"/>
+          <p:cNvSpPr/>
+          <p:nvPr/>
+        </p:nvSpPr>
+        <p:spPr>
+          <a:xfrm>
+            <a:off x="640080" y="3749040"/>
+            <a:ext cx="10972800" cy="502920"/>
+          </a:xfrm>
+          <a:prstGeom prst="rect">
+            <a:avLst/>
+          </a:prstGeom>
+          <a:solidFill>
+            <a:srgbClr val="F6F8FA"/>
+          </a:solidFill>
+          <a:ln w="12700">
+            <a:solidFill>
+              <a:srgbClr val="E6E9EE"/>
+            </a:solidFill>
+            <a:prstDash val="solid"/>
+          </a:ln>
+        </p:spPr>
+      </p:sp>
+      <p:sp>
+        <p:nvSpPr>
+          <p:cNvPr id="22" name="Shape 20"/>
+          <p:cNvSpPr/>
+          <p:nvPr/>
+        </p:nvSpPr>
+        <p:spPr>
+          <a:xfrm>
+            <a:off x="640080" y="3749040"/>
+            <a:ext cx="91440" cy="502920"/>
+          </a:xfrm>
+          <a:prstGeom prst="rect">
+            <a:avLst/>
+          </a:prstGeom>
+          <a:solidFill>
+            <a:srgbClr val="0F766E"/>
+          </a:solidFill>
+          <a:ln/>
+        </p:spPr>
+      </p:sp>
+      <p:sp>
+        <p:nvSpPr>
+          <p:cNvPr id="23" name="Text 21"/>
+          <p:cNvSpPr/>
+          <p:nvPr/>
+        </p:nvSpPr>
+        <p:spPr>
+          <a:xfrm>
+            <a:off x="914400" y="3749040"/>
+            <a:ext cx="8229600" cy="502920"/>
+          </a:xfrm>
+          <a:prstGeom prst="rect">
+            <a:avLst/>
+          </a:prstGeom>
+          <a:noFill/>
+          <a:ln/>
+        </p:spPr>
+        <p:txBody>
+          <a:bodyPr wrap="square" rtlCol="0" anchor="ctr"/>
+          <a:lstStyle/>
+          <a:p>
+            <a:pPr indent="0" marL="0">
+              <a:buNone/>
+            </a:pPr>
+            <a:r>
+              <a:rPr lang="en-US" sz="1150" dirty="0">
+                <a:solidFill>
+                  <a:srgbClr val="5B6B7B"/>
+                </a:solidFill>
+                <a:latin typeface="Calibri" pitchFamily="34" charset="0"/>
+                <a:ea typeface="Calibri" pitchFamily="34" charset="-122"/>
+                <a:cs typeface="Calibri" pitchFamily="34" charset="-120"/>
+              </a:rPr>
+              <a:t>Rest of India's ~Rs 70 lakh crore of outstanding bank credit</a:t>
+            </a:r>
+            <a:endParaRPr lang="en-US" sz="1150" dirty="0"/>
+          </a:p>
+        </p:txBody>
+      </p:sp>
+      <p:sp>
+        <p:nvSpPr>
+          <p:cNvPr id="24" name="Text 22"/>
+          <p:cNvSpPr/>
+          <p:nvPr/>
+        </p:nvSpPr>
+        <p:spPr>
+          <a:xfrm>
+            <a:off x="640080" y="4315968"/>
+            <a:ext cx="10972800" cy="320040"/>
+          </a:xfrm>
+          <a:prstGeom prst="rect">
+            <a:avLst/>
+          </a:prstGeom>
+          <a:noFill/>
+          <a:ln/>
+        </p:spPr>
+        <p:txBody>
+          <a:bodyPr wrap="square" rtlCol="0" anchor="ctr"/>
+          <a:lstStyle/>
+          <a:p>
+            <a:pPr indent="0" marL="0">
+              <a:buNone/>
+            </a:pPr>
+            <a:r>
+              <a:rPr lang="en-US" sz="1150" b="1" dirty="0">
+                <a:solidFill>
+                  <a:srgbClr val="0F766E"/>
+                </a:solidFill>
+                <a:latin typeface="Calibri" pitchFamily="34" charset="0"/>
+                <a:ea typeface="Calibri" pitchFamily="34" charset="-122"/>
+                <a:cs typeface="Calibri" pitchFamily="34" charset="-120"/>
+              </a:rPr>
+              <a:t>The teal sliver is ACER's entire Rs 19,200 Cr yearly target, about 0.27% of outstanding bank credit.</a:t>
+            </a:r>
+            <a:endParaRPr lang="en-US" sz="1150" dirty="0"/>
+          </a:p>
+        </p:txBody>
+      </p:sp>
+      <p:sp>
+        <p:nvSpPr>
+          <p:cNvPr id="25" name="Shape 23"/>
+          <p:cNvSpPr/>
+          <p:nvPr/>
+        </p:nvSpPr>
+        <p:spPr>
+          <a:xfrm>
+            <a:off x="640080" y="4937760"/>
+            <a:ext cx="10911535" cy="731520"/>
+          </a:xfrm>
+          <a:prstGeom prst="rect">
+            <a:avLst/>
+          </a:prstGeom>
+          <a:solidFill>
+            <a:srgbClr val="EEF4F3"/>
+          </a:solidFill>
+          <a:ln/>
+        </p:spPr>
+      </p:sp>
+      <p:sp>
+        <p:nvSpPr>
+          <p:cNvPr id="26" name="Shape 24"/>
+          <p:cNvSpPr/>
+          <p:nvPr/>
+        </p:nvSpPr>
+        <p:spPr>
+          <a:xfrm>
+            <a:off x="640080" y="4937760"/>
+            <a:ext cx="82296" cy="731520"/>
+          </a:xfrm>
+          <a:prstGeom prst="rect">
+            <a:avLst/>
+          </a:prstGeom>
+          <a:solidFill>
+            <a:srgbClr val="0F766E"/>
+          </a:solidFill>
+          <a:ln/>
+        </p:spPr>
+      </p:sp>
+      <p:sp>
+        <p:nvSpPr>
+          <p:cNvPr id="27" name="Text 25"/>
+          <p:cNvSpPr/>
+          <p:nvPr/>
+        </p:nvSpPr>
+        <p:spPr>
+          <a:xfrm>
+            <a:off x="896112" y="4937760"/>
+            <a:ext cx="10454335" cy="731520"/>
+          </a:xfrm>
+          <a:prstGeom prst="rect">
+            <a:avLst/>
+          </a:prstGeom>
+          <a:noFill/>
+          <a:ln/>
+        </p:spPr>
+        <p:txBody>
+          <a:bodyPr wrap="square" rtlCol="0" anchor="ctr"/>
+          <a:lstStyle/>
+          <a:p>
+            <a:pPr indent="0" marL="0">
+              <a:buNone/>
+            </a:pPr>
+            <a:r>
+              <a:rPr lang="en-US" sz="1000" b="1" spc="100" kern="0" dirty="0">
+                <a:solidFill>
+                  <a:srgbClr val="0F766E"/>
+                </a:solidFill>
+                <a:latin typeface="Calibri" pitchFamily="34" charset="0"/>
+                <a:ea typeface="Calibri" pitchFamily="34" charset="-122"/>
+                <a:cs typeface="Calibri" pitchFamily="34" charset="-120"/>
+              </a:rPr>
+              <a:t>THE TAKEAWAY   </a:t>
+            </a:r>
+            <a:pPr indent="0" marL="0">
+              <a:buNone/>
+            </a:pPr>
+            <a:r>
+              <a:rPr lang="en-US" sz="1300" b="1" dirty="0">
+                <a:solidFill>
+                  <a:srgbClr val="0A1F33"/>
+                </a:solidFill>
+                <a:latin typeface="Calibri" pitchFamily="34" charset="0"/>
+                <a:ea typeface="Calibri" pitchFamily="34" charset="-122"/>
+                <a:cs typeface="Calibri" pitchFamily="34" charset="-120"/>
+              </a:rPr>
+              <a:t>Capacity is not the constraint. One small peer has rated debt a hundred times ACER's yearly target over its life; the binding constraint is winning mandates, so execution and the licence decide the pace, not demand.</a:t>
+            </a:r>
+            <a:endParaRPr lang="en-US" sz="1000" dirty="0"/>
+          </a:p>
+        </p:txBody>
+      </p:sp>
+      <p:sp>
+        <p:nvSpPr>
+          <p:cNvPr id="28" name="Shape 26"/>
+          <p:cNvSpPr/>
+          <p:nvPr/>
+        </p:nvSpPr>
+        <p:spPr>
+          <a:xfrm>
+            <a:off x="640080" y="6437376"/>
+            <a:ext cx="10911535" cy="0"/>
+          </a:xfrm>
+          <a:prstGeom prst="line">
+            <a:avLst/>
+          </a:prstGeom>
+          <a:noFill/>
+          <a:ln w="12700">
+            <a:solidFill>
+              <a:srgbClr val="E6E9EE"/>
+            </a:solidFill>
+            <a:prstDash val="solid"/>
+          </a:ln>
+        </p:spPr>
+      </p:sp>
+      <p:sp>
+        <p:nvSpPr>
+          <p:cNvPr id="29" name="Text 27"/>
+          <p:cNvSpPr/>
+          <p:nvPr/>
+        </p:nvSpPr>
+        <p:spPr>
+          <a:xfrm>
+            <a:off x="640080" y="6483096"/>
+            <a:ext cx="9509760" cy="292608"/>
+          </a:xfrm>
+          <a:prstGeom prst="rect">
+            <a:avLst/>
+          </a:prstGeom>
+          <a:noFill/>
+          <a:ln/>
+        </p:spPr>
+        <p:txBody>
+          <a:bodyPr wrap="square" rtlCol="0" anchor="t"/>
+          <a:lstStyle/>
+          <a:p>
+            <a:pPr indent="0" marL="0">
+              <a:buNone/>
+            </a:pPr>
+            <a:r>
+              <a:rPr lang="en-US" sz="850" dirty="0">
+                <a:solidFill>
+                  <a:srgbClr val="9AA7B4"/>
+                </a:solidFill>
+                <a:latin typeface="Calibri" pitchFamily="34" charset="0"/>
+                <a:ea typeface="Calibri" pitchFamily="34" charset="-122"/>
+                <a:cs typeface="Calibri" pitchFamily="34" charset="-120"/>
+              </a:rPr>
+              <a:t>Source: India bank credit ~Rs 70 lakh cr, RBI via Business Standard [11]; bond issuance ~Rs 10 lakh cr [13]; Brickwork lifetime rated debt, brickworkratings.com [9]; CRISIL ~19,500 issuers [12]. Peer figures cumulative, used for scale.</a:t>
             </a:r>
             <a:endParaRPr lang="en-US" sz="850" dirty="0"/>
           </a:p>
@@ -12008,7 +11845,7 @@
       </p:sp>
       <p:sp>
         <p:nvSpPr>
-          <p:cNvPr id="23" name="Text 20"/>
+          <p:cNvPr id="30" name="Text 28"/>
           <p:cNvSpPr/>
           <p:nvPr/>
         </p:nvSpPr>
